--- a/docs/CJC_OSMU_사용자_매뉴얼.pptx
+++ b/docs/CJC_OSMU_사용자_매뉴얼.pptx
@@ -25,6 +25,9 @@
     <p:sldId id="273" r:id="rId24"/>
     <p:sldId id="274" r:id="rId25"/>
     <p:sldId id="275" r:id="rId26"/>
+    <p:sldId id="276" r:id="rId27"/>
+    <p:sldId id="277" r:id="rId28"/>
+    <p:sldId id="278" r:id="rId29"/>
   </p:sldIdLst>
   <p:sldSz cx="12191695" cy="6858000" type="screen4x3"/>
   <p:notesSz cx="6858000" cy="9144000"/>
@@ -5576,7 +5579,7 @@
                 </a:solidFill>
                 <a:latin typeface="맑은 고딕"/>
               </a:rPr>
-              <a:t>② 키워드 갱신 · 유지</a:t>
+              <a:t>② 키워드 갱신 · 실제 화면 (1/3)</a:t>
             </a:r>
           </a:p>
         </p:txBody>
@@ -5615,7 +5618,7 @@
                 </a:solidFill>
                 <a:latin typeface="맑은 고딕"/>
               </a:rPr>
-              <a:t>평소 달 5분 · 분기 30분 · 캐시 30일</a:t>
+              <a:t>씨앗 입력 → 1단계 · 후보 찾기</a:t>
             </a:r>
           </a:p>
         </p:txBody>
@@ -5706,14 +5709,14 @@
         </p:nvSpPr>
         <p:spPr>
           <a:xfrm>
-            <a:off x="502920" y="1371600"/>
-            <a:ext cx="5440680" cy="2926080"/>
+            <a:off x="464820" y="1626108"/>
+            <a:ext cx="5425440" cy="3707055"/>
           </a:xfrm>
           <a:prstGeom prst="rect">
             <a:avLst/>
           </a:prstGeom>
           <a:solidFill>
-            <a:srgbClr val="FFFFFF"/>
+            <a:srgbClr val="7A828E"/>
           </a:solidFill>
           <a:ln>
             <a:noFill/>
@@ -5742,16 +5745,40 @@
           </a:p>
         </p:txBody>
       </p:sp>
-      <p:sp>
-        <p:nvSpPr>
-          <p:cNvPr id="9" name="TextBox 8"/>
-          <p:cNvSpPr txBox="1"/>
-          <p:nvPr/>
-        </p:nvSpPr>
-        <p:spPr>
-          <a:xfrm>
-            <a:off x="731520" y="1508760"/>
-            <a:ext cx="4983480" cy="365760"/>
+      <p:pic>
+        <p:nvPicPr>
+          <p:cNvPr id="9" name="Picture 8" descr="naver_kw_01_start.png"/>
+          <p:cNvPicPr>
+            <a:picLocks noChangeAspect="1"/>
+          </p:cNvPicPr>
+          <p:nvPr/>
+        </p:nvPicPr>
+        <p:blipFill>
+          <a:blip r:embed="rId2"/>
+          <a:stretch>
+            <a:fillRect/>
+          </a:stretch>
+        </p:blipFill>
+        <p:spPr>
+          <a:xfrm>
+            <a:off x="502920" y="1664208"/>
+            <a:ext cx="5349240" cy="3630855"/>
+          </a:xfrm>
+          <a:prstGeom prst="rect">
+            <a:avLst/>
+          </a:prstGeom>
+        </p:spPr>
+      </p:pic>
+      <p:sp>
+        <p:nvSpPr>
+          <p:cNvPr id="10" name="TextBox 9"/>
+          <p:cNvSpPr txBox="1"/>
+          <p:nvPr/>
+        </p:nvSpPr>
+        <p:spPr>
+          <a:xfrm>
+            <a:off x="502920" y="1371600"/>
+            <a:ext cx="5349240" cy="292608"/>
           </a:xfrm>
           <a:prstGeom prst="rect">
             <a:avLst/>
@@ -5770,52 +5797,13 @@
               </a:lnSpc>
             </a:pPr>
             <a:r>
-              <a:rPr sz="1400" b="1" i="0">
+              <a:rPr sz="1200" b="1" i="0">
                 <a:solidFill>
                   <a:srgbClr val="1B3A5C"/>
                 </a:solidFill>
                 <a:latin typeface="맑은 고딕"/>
               </a:rPr>
-              <a:t>매월 — [🔄 숫자만 새로 재기]</a:t>
-            </a:r>
-          </a:p>
-        </p:txBody>
-      </p:sp>
-      <p:sp>
-        <p:nvSpPr>
-          <p:cNvPr id="10" name="TextBox 9"/>
-          <p:cNvSpPr txBox="1"/>
-          <p:nvPr/>
-        </p:nvSpPr>
-        <p:spPr>
-          <a:xfrm>
-            <a:off x="731520" y="1920240"/>
-            <a:ext cx="4983480" cy="2194560"/>
-          </a:xfrm>
-          <a:prstGeom prst="rect">
-            <a:avLst/>
-          </a:prstGeom>
-          <a:noFill/>
-        </p:spPr>
-        <p:txBody>
-          <a:bodyPr wrap="square">
-            <a:spAutoFit/>
-          </a:bodyPr>
-          <a:lstStyle/>
-          <a:p>
-            <a:pPr algn="l">
-              <a:lnSpc>
-                <a:spcPct val="135000"/>
-              </a:lnSpc>
-            </a:pPr>
-            <a:r>
-              <a:rPr sz="1200" b="0" i="0">
-                <a:solidFill>
-                  <a:srgbClr val="23262B"/>
-                </a:solidFill>
-                <a:latin typeface="맑은 고딕"/>
-              </a:rPr>
-              <a:t>키워드 목록은 그대로 두고 만료된 검색량·경쟁도만 다시 잽니다. 살아 있는 값은 캐시에서 읽어 호출 0회 — 과금되는 것은 만료분뿐입니다.</a:t>
+              <a:t>씨앗 키워드 입력 전 — [1단계 · 후보 찾기]만 눌러보면 됩니다</a:t>
             </a:r>
           </a:p>
         </p:txBody>
@@ -5828,14 +5816,14 @@
         </p:nvSpPr>
         <p:spPr>
           <a:xfrm>
-            <a:off x="6263640" y="1371600"/>
-            <a:ext cx="5440680" cy="2926080"/>
+            <a:off x="6225540" y="1626108"/>
+            <a:ext cx="5425440" cy="3626663"/>
           </a:xfrm>
           <a:prstGeom prst="rect">
             <a:avLst/>
           </a:prstGeom>
           <a:solidFill>
-            <a:srgbClr val="FFFFFF"/>
+            <a:srgbClr val="7A828E"/>
           </a:solidFill>
           <a:ln>
             <a:noFill/>
@@ -5864,16 +5852,40 @@
           </a:p>
         </p:txBody>
       </p:sp>
-      <p:sp>
-        <p:nvSpPr>
-          <p:cNvPr id="12" name="TextBox 11"/>
-          <p:cNvSpPr txBox="1"/>
-          <p:nvPr/>
-        </p:nvSpPr>
-        <p:spPr>
-          <a:xfrm>
-            <a:off x="6492240" y="1508760"/>
-            <a:ext cx="4983480" cy="365760"/>
+      <p:pic>
+        <p:nvPicPr>
+          <p:cNvPr id="12" name="Picture 11" descr="naver_kw_02_stage1_result.png"/>
+          <p:cNvPicPr>
+            <a:picLocks noChangeAspect="1"/>
+          </p:cNvPicPr>
+          <p:nvPr/>
+        </p:nvPicPr>
+        <p:blipFill>
+          <a:blip r:embed="rId3"/>
+          <a:stretch>
+            <a:fillRect/>
+          </a:stretch>
+        </p:blipFill>
+        <p:spPr>
+          <a:xfrm>
+            <a:off x="6263640" y="1664208"/>
+            <a:ext cx="5349240" cy="3550463"/>
+          </a:xfrm>
+          <a:prstGeom prst="rect">
+            <a:avLst/>
+          </a:prstGeom>
+        </p:spPr>
+      </p:pic>
+      <p:sp>
+        <p:nvSpPr>
+          <p:cNvPr id="13" name="TextBox 12"/>
+          <p:cNvSpPr txBox="1"/>
+          <p:nvPr/>
+        </p:nvSpPr>
+        <p:spPr>
+          <a:xfrm>
+            <a:off x="6263640" y="1371600"/>
+            <a:ext cx="5349240" cy="292608"/>
           </a:xfrm>
           <a:prstGeom prst="rect">
             <a:avLst/>
@@ -5892,27 +5904,27 @@
               </a:lnSpc>
             </a:pPr>
             <a:r>
-              <a:rPr sz="1400" b="1" i="0">
+              <a:rPr sz="1200" b="1" i="0">
                 <a:solidFill>
                   <a:srgbClr val="1B3A5C"/>
                 </a:solidFill>
                 <a:latin typeface="맑은 고딕"/>
               </a:rPr>
-              <a:t>분기 — 4단계 전체</a:t>
-            </a:r>
-          </a:p>
-        </p:txBody>
-      </p:sp>
-      <p:sp>
-        <p:nvSpPr>
-          <p:cNvPr id="13" name="TextBox 12"/>
-          <p:cNvSpPr txBox="1"/>
-          <p:nvPr/>
-        </p:nvSpPr>
-        <p:spPr>
-          <a:xfrm>
-            <a:off x="6492240" y="1920240"/>
-            <a:ext cx="4983480" cy="2194560"/>
+              <a:t>1단계 실행 후 — 후보 507개 발견, [2단계] 버튼이 새로 나타남</a:t>
+            </a:r>
+          </a:p>
+        </p:txBody>
+      </p:sp>
+      <p:sp>
+        <p:nvSpPr>
+          <p:cNvPr id="14" name="TextBox 13"/>
+          <p:cNvSpPr txBox="1"/>
+          <p:nvPr/>
+        </p:nvSpPr>
+        <p:spPr>
+          <a:xfrm>
+            <a:off x="502920" y="5806440"/>
+            <a:ext cx="11155680" cy="457200"/>
           </a:xfrm>
           <a:prstGeom prst="rect">
             <a:avLst/>
@@ -5927,139 +5939,17 @@
           <a:p>
             <a:pPr algn="l">
               <a:lnSpc>
-                <a:spcPct val="135000"/>
-              </a:lnSpc>
-            </a:pPr>
-            <a:r>
-              <a:rPr sz="1200" b="0" i="0">
-                <a:solidFill>
-                  <a:srgbClr val="23262B"/>
-                </a:solidFill>
-                <a:latin typeface="맑은 고딕"/>
-              </a:rPr>
-              <a:t>씨앗부터 다시 발굴해 키워드 목록 자체를 교체합니다. 조사할 후보 수(기본 100개)가 곧 최대 유료 호출 수 — 넓힐수록 좋은 키워드를 찾을 확률이 오릅니다.</a:t>
-            </a:r>
-          </a:p>
-        </p:txBody>
-      </p:sp>
-      <p:sp>
-        <p:nvSpPr>
-          <p:cNvPr id="14" name="Rectangle 13"/>
-          <p:cNvSpPr/>
-          <p:nvPr/>
-        </p:nvSpPr>
-        <p:spPr>
-          <a:xfrm>
-            <a:off x="502920" y="4526280"/>
-            <a:ext cx="11155680" cy="1600200"/>
-          </a:xfrm>
-          <a:prstGeom prst="rect">
-            <a:avLst/>
-          </a:prstGeom>
-          <a:solidFill>
-            <a:srgbClr val="F5EDD7"/>
-          </a:solidFill>
-          <a:ln>
-            <a:noFill/>
-          </a:ln>
-          <a:effectLst/>
-        </p:spPr>
-        <p:style>
-          <a:lnRef idx="1">
-            <a:schemeClr val="accent1"/>
-          </a:lnRef>
-          <a:fillRef idx="3">
-            <a:schemeClr val="accent1"/>
-          </a:fillRef>
-          <a:effectRef idx="2">
-            <a:schemeClr val="accent1"/>
-          </a:effectRef>
-          <a:fontRef idx="minor">
-            <a:schemeClr val="lt1"/>
-          </a:fontRef>
-        </p:style>
-        <p:txBody>
-          <a:bodyPr rtlCol="0" anchor="ctr"/>
-          <a:lstStyle/>
-          <a:p>
-            <a:pPr algn="ctr"/>
-          </a:p>
-        </p:txBody>
-      </p:sp>
-      <p:sp>
-        <p:nvSpPr>
-          <p:cNvPr id="15" name="TextBox 14"/>
-          <p:cNvSpPr txBox="1"/>
-          <p:nvPr/>
-        </p:nvSpPr>
-        <p:spPr>
-          <a:xfrm>
-            <a:off x="777240" y="4663440"/>
-            <a:ext cx="10607040" cy="365760"/>
-          </a:xfrm>
-          <a:prstGeom prst="rect">
-            <a:avLst/>
-          </a:prstGeom>
-          <a:noFill/>
-        </p:spPr>
-        <p:txBody>
-          <a:bodyPr wrap="square">
-            <a:spAutoFit/>
-          </a:bodyPr>
-          <a:lstStyle/>
-          <a:p>
-            <a:pPr algn="l">
-              <a:lnSpc>
                 <a:spcPct val="100000"/>
               </a:lnSpc>
             </a:pPr>
             <a:r>
-              <a:rPr sz="1400" b="1" i="0">
-                <a:solidFill>
-                  <a:srgbClr val="C0392B"/>
-                </a:solidFill>
-                <a:latin typeface="맑은 고딕"/>
-              </a:rPr>
-              <a:t>⚠️ 만료는 조용히 일어납니다</a:t>
-            </a:r>
-          </a:p>
-        </p:txBody>
-      </p:sp>
-      <p:sp>
-        <p:nvSpPr>
-          <p:cNvPr id="16" name="TextBox 15"/>
-          <p:cNvSpPr txBox="1"/>
-          <p:nvPr/>
-        </p:nvSpPr>
-        <p:spPr>
-          <a:xfrm>
-            <a:off x="777240" y="5047488"/>
-            <a:ext cx="10607040" cy="914400"/>
-          </a:xfrm>
-          <a:prstGeom prst="rect">
-            <a:avLst/>
-          </a:prstGeom>
-          <a:noFill/>
-        </p:spPr>
-        <p:txBody>
-          <a:bodyPr wrap="square">
-            <a:spAutoFit/>
-          </a:bodyPr>
-          <a:lstStyle/>
-          <a:p>
-            <a:pPr algn="l">
-              <a:lnSpc>
-                <a:spcPct val="130000"/>
-              </a:lnSpc>
-            </a:pPr>
-            <a:r>
-              <a:rPr sz="1200" b="0" i="0">
-                <a:solidFill>
-                  <a:srgbClr val="23262B"/>
-                </a:solidFill>
-                <a:latin typeface="맑은 고딕"/>
-              </a:rPr>
-              <a:t>에러도 멈춤도 없이 '전환 가중치'가 꺼지고 단순 등장 횟수로만 순위가 매겨집니다. 브랜드 킷·설정 화면에 '경쟁도 측정 만료' 경고가 뜨면 [숫자만 새로 재기]를 눌러주세요.</a:t>
+              <a:rPr sz="1150" b="0" i="0">
+                <a:solidFill>
+                  <a:srgbClr val="7A828E"/>
+                </a:solidFill>
+                <a:latin typeface="맑은 고딕"/>
+              </a:rPr>
+              <a:t>무료 단계입니다 — 눌러도 과금되지 않습니다. 씨앗은 브랜드 이름이 아니라 실제 검색어여야 합니다.</a:t>
             </a:r>
           </a:p>
         </p:txBody>
@@ -6212,7 +6102,7 @@
                 </a:solidFill>
                 <a:latin typeface="맑은 고딕"/>
               </a:rPr>
-              <a:t>③ 매일 쓰는 법 · 워크벤치</a:t>
+              <a:t>② 키워드 갱신 · 실제 화면 (2/3)</a:t>
             </a:r>
           </a:p>
         </p:txBody>
@@ -6251,7 +6141,7 @@
                 </a:solidFill>
                 <a:latin typeface="맑은 고딕"/>
               </a:rPr>
-              <a:t>새 콘텐츠 만들기 — 5단계</a:t>
+              <a:t>2단계 · 경쟁도 조사 결과</a:t>
             </a:r>
           </a:p>
         </p:txBody>
@@ -6342,14 +6232,14 @@
         </p:nvSpPr>
         <p:spPr>
           <a:xfrm>
-            <a:off x="502920" y="1371600"/>
-            <a:ext cx="502920" cy="914400"/>
+            <a:off x="2887980" y="1626108"/>
+            <a:ext cx="6477000" cy="4386712"/>
           </a:xfrm>
           <a:prstGeom prst="rect">
             <a:avLst/>
           </a:prstGeom>
           <a:solidFill>
-            <a:srgbClr val="1B3A5C"/>
+            <a:srgbClr val="7A828E"/>
           </a:solidFill>
           <a:ln>
             <a:noFill/>
@@ -6378,983 +6268,145 @@
           </a:p>
         </p:txBody>
       </p:sp>
-      <p:sp>
-        <p:nvSpPr>
-          <p:cNvPr id="9" name="TextBox 8"/>
+      <p:pic>
+        <p:nvPicPr>
+          <p:cNvPr id="9" name="Picture 8" descr="naver_kw_03_stage2_result.png"/>
+          <p:cNvPicPr>
+            <a:picLocks noChangeAspect="1"/>
+          </p:cNvPicPr>
+          <p:nvPr/>
+        </p:nvPicPr>
+        <p:blipFill>
+          <a:blip r:embed="rId2"/>
+          <a:stretch>
+            <a:fillRect/>
+          </a:stretch>
+        </p:blipFill>
+        <p:spPr>
+          <a:xfrm>
+            <a:off x="2926080" y="1664208"/>
+            <a:ext cx="6400800" cy="4310512"/>
+          </a:xfrm>
+          <a:prstGeom prst="rect">
+            <a:avLst/>
+          </a:prstGeom>
+        </p:spPr>
+      </p:pic>
+      <p:sp>
+        <p:nvSpPr>
+          <p:cNvPr id="10" name="TextBox 9"/>
+          <p:cNvSpPr txBox="1"/>
+          <p:nvPr/>
+        </p:nvSpPr>
+        <p:spPr>
+          <a:xfrm>
+            <a:off x="2926080" y="1371600"/>
+            <a:ext cx="6400800" cy="292608"/>
+          </a:xfrm>
+          <a:prstGeom prst="rect">
+            <a:avLst/>
+          </a:prstGeom>
+          <a:noFill/>
+        </p:spPr>
+        <p:txBody>
+          <a:bodyPr wrap="square">
+            <a:spAutoFit/>
+          </a:bodyPr>
+          <a:lstStyle/>
+          <a:p>
+            <a:pPr algn="l">
+              <a:lnSpc>
+                <a:spcPct val="100000"/>
+              </a:lnSpc>
+            </a:pPr>
+            <a:r>
+              <a:rPr sz="1200" b="1" i="0">
+                <a:solidFill>
+                  <a:srgbClr val="1B3A5C"/>
+                </a:solidFill>
+                <a:latin typeface="맑은 고딕"/>
+              </a:rPr>
+              <a:t>키워드별 검색량 · 경쟁 문서 수 · 점수가 표로 나옵니다</a:t>
+            </a:r>
+          </a:p>
+        </p:txBody>
+      </p:sp>
+      <p:sp>
+        <p:nvSpPr>
+          <p:cNvPr id="11" name="TextBox 10"/>
           <p:cNvSpPr txBox="1"/>
           <p:nvPr/>
         </p:nvSpPr>
         <p:spPr>
           <a:xfrm>
             <a:off x="502920" y="1371600"/>
-            <a:ext cx="502920" cy="914400"/>
-          </a:xfrm>
-          <a:prstGeom prst="rect">
-            <a:avLst/>
-          </a:prstGeom>
-          <a:noFill/>
-        </p:spPr>
-        <p:txBody>
-          <a:bodyPr wrap="square">
-            <a:spAutoFit/>
-          </a:bodyPr>
-          <a:lstStyle/>
-          <a:p>
-            <a:pPr algn="ctr">
-              <a:lnSpc>
-                <a:spcPct val="100000"/>
-              </a:lnSpc>
-            </a:pPr>
-            <a:r>
-              <a:rPr sz="1900" b="1" i="0">
-                <a:solidFill>
-                  <a:srgbClr val="FFFFFF"/>
-                </a:solidFill>
-                <a:latin typeface="맑은 고딕"/>
-              </a:rPr>
-              <a:t>1</a:t>
-            </a:r>
-          </a:p>
-        </p:txBody>
-      </p:sp>
-      <p:sp>
-        <p:nvSpPr>
-          <p:cNvPr id="10" name="Rectangle 9"/>
-          <p:cNvSpPr/>
-          <p:nvPr/>
-        </p:nvSpPr>
-        <p:spPr>
-          <a:xfrm>
-            <a:off x="1005840" y="1371600"/>
-            <a:ext cx="10652760" cy="914400"/>
-          </a:xfrm>
-          <a:prstGeom prst="rect">
-            <a:avLst/>
-          </a:prstGeom>
-          <a:solidFill>
-            <a:srgbClr val="FFFFFF"/>
-          </a:solidFill>
-          <a:ln>
-            <a:noFill/>
-          </a:ln>
-          <a:effectLst/>
-        </p:spPr>
-        <p:style>
-          <a:lnRef idx="1">
-            <a:schemeClr val="accent1"/>
-          </a:lnRef>
-          <a:fillRef idx="3">
-            <a:schemeClr val="accent1"/>
-          </a:fillRef>
-          <a:effectRef idx="2">
-            <a:schemeClr val="accent1"/>
-          </a:effectRef>
-          <a:fontRef idx="minor">
-            <a:schemeClr val="lt1"/>
-          </a:fontRef>
-        </p:style>
-        <p:txBody>
-          <a:bodyPr rtlCol="0" anchor="ctr"/>
-          <a:lstStyle/>
-          <a:p>
-            <a:pPr algn="ctr"/>
-          </a:p>
-        </p:txBody>
-      </p:sp>
-      <p:sp>
-        <p:nvSpPr>
-          <p:cNvPr id="11" name="TextBox 10"/>
-          <p:cNvSpPr txBox="1"/>
-          <p:nvPr/>
-        </p:nvSpPr>
-        <p:spPr>
-          <a:xfrm>
-            <a:off x="1188720" y="1444752"/>
-            <a:ext cx="10287000" cy="320040"/>
-          </a:xfrm>
-          <a:prstGeom prst="rect">
-            <a:avLst/>
-          </a:prstGeom>
-          <a:noFill/>
-        </p:spPr>
-        <p:txBody>
-          <a:bodyPr wrap="square">
-            <a:spAutoFit/>
-          </a:bodyPr>
-          <a:lstStyle/>
-          <a:p>
-            <a:pPr algn="l">
-              <a:lnSpc>
-                <a:spcPct val="100000"/>
-              </a:lnSpc>
-            </a:pPr>
-            <a:r>
-              <a:rPr sz="1350" b="1" i="0">
+            <a:ext cx="2286000" cy="4114800"/>
+          </a:xfrm>
+          <a:prstGeom prst="rect">
+            <a:avLst/>
+          </a:prstGeom>
+          <a:noFill/>
+        </p:spPr>
+        <p:txBody>
+          <a:bodyPr wrap="square">
+            <a:spAutoFit/>
+          </a:bodyPr>
+          <a:lstStyle/>
+          <a:p>
+            <a:pPr>
+              <a:lnSpc>
+                <a:spcPct val="130000"/>
+              </a:lnSpc>
+              <a:spcAft>
+                <a:spcPts val="1400"/>
+              </a:spcAft>
+            </a:pPr>
+            <a:r>
+              <a:rPr sz="1200" b="0">
                 <a:solidFill>
                   <a:srgbClr val="23262B"/>
                 </a:solidFill>
                 <a:latin typeface="맑은 고딕"/>
               </a:rPr>
-              <a:t>➕ 새 콘텐츠</a:t>
-            </a:r>
-          </a:p>
-        </p:txBody>
-      </p:sp>
-      <p:sp>
-        <p:nvSpPr>
-          <p:cNvPr id="12" name="TextBox 11"/>
-          <p:cNvSpPr txBox="1"/>
-          <p:nvPr/>
-        </p:nvSpPr>
-        <p:spPr>
-          <a:xfrm>
-            <a:off x="1188720" y="1755648"/>
-            <a:ext cx="10287000" cy="457200"/>
-          </a:xfrm>
-          <a:prstGeom prst="rect">
-            <a:avLst/>
-          </a:prstGeom>
-          <a:noFill/>
-        </p:spPr>
-        <p:txBody>
-          <a:bodyPr wrap="square">
-            <a:spAutoFit/>
-          </a:bodyPr>
-          <a:lstStyle/>
-          <a:p>
-            <a:pPr algn="l">
-              <a:lnSpc>
-                <a:spcPct val="120000"/>
-              </a:lnSpc>
-            </a:pPr>
-            <a:r>
-              <a:rPr sz="1150" b="0" i="0">
-                <a:solidFill>
-                  <a:srgbClr val="7A828E"/>
-                </a:solidFill>
-                <a:latin typeface="맑은 고딕"/>
-              </a:rPr>
-              <a:t>빈 초안이 만들어집니다. 빈 초안이 이미 있으면 새로 만들지 않고 재사용합니다.</a:t>
-            </a:r>
-          </a:p>
-        </p:txBody>
-      </p:sp>
-      <p:sp>
-        <p:nvSpPr>
-          <p:cNvPr id="13" name="Rectangle 12"/>
-          <p:cNvSpPr/>
-          <p:nvPr/>
-        </p:nvSpPr>
-        <p:spPr>
-          <a:xfrm>
-            <a:off x="502920" y="2359152"/>
-            <a:ext cx="502920" cy="914400"/>
-          </a:xfrm>
-          <a:prstGeom prst="rect">
-            <a:avLst/>
-          </a:prstGeom>
-          <a:solidFill>
-            <a:srgbClr val="1B3A5C"/>
-          </a:solidFill>
-          <a:ln>
-            <a:noFill/>
-          </a:ln>
-          <a:effectLst/>
-        </p:spPr>
-        <p:style>
-          <a:lnRef idx="1">
-            <a:schemeClr val="accent1"/>
-          </a:lnRef>
-          <a:fillRef idx="3">
-            <a:schemeClr val="accent1"/>
-          </a:fillRef>
-          <a:effectRef idx="2">
-            <a:schemeClr val="accent1"/>
-          </a:effectRef>
-          <a:fontRef idx="minor">
-            <a:schemeClr val="lt1"/>
-          </a:fontRef>
-        </p:style>
-        <p:txBody>
-          <a:bodyPr rtlCol="0" anchor="ctr"/>
-          <a:lstStyle/>
-          <a:p>
-            <a:pPr algn="ctr"/>
-          </a:p>
-        </p:txBody>
-      </p:sp>
-      <p:sp>
-        <p:nvSpPr>
-          <p:cNvPr id="14" name="TextBox 13"/>
-          <p:cNvSpPr txBox="1"/>
-          <p:nvPr/>
-        </p:nvSpPr>
-        <p:spPr>
-          <a:xfrm>
-            <a:off x="502920" y="2359152"/>
-            <a:ext cx="502920" cy="914400"/>
-          </a:xfrm>
-          <a:prstGeom prst="rect">
-            <a:avLst/>
-          </a:prstGeom>
-          <a:noFill/>
-        </p:spPr>
-        <p:txBody>
-          <a:bodyPr wrap="square">
-            <a:spAutoFit/>
-          </a:bodyPr>
-          <a:lstStyle/>
-          <a:p>
-            <a:pPr algn="ctr">
-              <a:lnSpc>
-                <a:spcPct val="100000"/>
-              </a:lnSpc>
-            </a:pPr>
-            <a:r>
-              <a:rPr sz="1900" b="1" i="0">
-                <a:solidFill>
-                  <a:srgbClr val="FFFFFF"/>
-                </a:solidFill>
-                <a:latin typeface="맑은 고딕"/>
-              </a:rPr>
-              <a:t>2</a:t>
-            </a:r>
-          </a:p>
-        </p:txBody>
-      </p:sp>
-      <p:sp>
-        <p:nvSpPr>
-          <p:cNvPr id="15" name="Rectangle 14"/>
-          <p:cNvSpPr/>
-          <p:nvPr/>
-        </p:nvSpPr>
-        <p:spPr>
-          <a:xfrm>
-            <a:off x="1005840" y="2359152"/>
-            <a:ext cx="10652760" cy="914400"/>
-          </a:xfrm>
-          <a:prstGeom prst="rect">
-            <a:avLst/>
-          </a:prstGeom>
-          <a:solidFill>
-            <a:srgbClr val="FFFFFF"/>
-          </a:solidFill>
-          <a:ln>
-            <a:noFill/>
-          </a:ln>
-          <a:effectLst/>
-        </p:spPr>
-        <p:style>
-          <a:lnRef idx="1">
-            <a:schemeClr val="accent1"/>
-          </a:lnRef>
-          <a:fillRef idx="3">
-            <a:schemeClr val="accent1"/>
-          </a:fillRef>
-          <a:effectRef idx="2">
-            <a:schemeClr val="accent1"/>
-          </a:effectRef>
-          <a:fontRef idx="minor">
-            <a:schemeClr val="lt1"/>
-          </a:fontRef>
-        </p:style>
-        <p:txBody>
-          <a:bodyPr rtlCol="0" anchor="ctr"/>
-          <a:lstStyle/>
-          <a:p>
-            <a:pPr algn="ctr"/>
-          </a:p>
-        </p:txBody>
-      </p:sp>
-      <p:sp>
-        <p:nvSpPr>
-          <p:cNvPr id="16" name="TextBox 15"/>
-          <p:cNvSpPr txBox="1"/>
-          <p:nvPr/>
-        </p:nvSpPr>
-        <p:spPr>
-          <a:xfrm>
-            <a:off x="1188720" y="2432304"/>
-            <a:ext cx="10287000" cy="320040"/>
-          </a:xfrm>
-          <a:prstGeom prst="rect">
-            <a:avLst/>
-          </a:prstGeom>
-          <a:noFill/>
-        </p:spPr>
-        <p:txBody>
-          <a:bodyPr wrap="square">
-            <a:spAutoFit/>
-          </a:bodyPr>
-          <a:lstStyle/>
-          <a:p>
-            <a:pPr algn="l">
-              <a:lnSpc>
-                <a:spcPct val="100000"/>
-              </a:lnSpc>
-            </a:pPr>
-            <a:r>
-              <a:rPr sz="1350" b="1" i="0">
+              <a:t>▪ 검색량이 높고 점수가 낮을수록(경쟁이 약할수록) 좋은 키워드입니다.</a:t>
+            </a:r>
+          </a:p>
+          <a:p>
+            <a:pPr>
+              <a:lnSpc>
+                <a:spcPct val="130000"/>
+              </a:lnSpc>
+              <a:spcAft>
+                <a:spcPts val="1400"/>
+              </a:spcAft>
+            </a:pPr>
+            <a:r>
+              <a:rPr sz="1200" b="0">
                 <a:solidFill>
                   <a:srgbClr val="23262B"/>
                 </a:solidFill>
                 <a:latin typeface="맑은 고딕"/>
               </a:rPr>
-              <a:t>담당자 메모 작성</a:t>
-            </a:r>
-          </a:p>
-        </p:txBody>
-      </p:sp>
-      <p:sp>
-        <p:nvSpPr>
-          <p:cNvPr id="17" name="TextBox 16"/>
-          <p:cNvSpPr txBox="1"/>
-          <p:nvPr/>
-        </p:nvSpPr>
-        <p:spPr>
-          <a:xfrm>
-            <a:off x="1188720" y="2743200"/>
-            <a:ext cx="10287000" cy="457200"/>
-          </a:xfrm>
-          <a:prstGeom prst="rect">
-            <a:avLst/>
-          </a:prstGeom>
-          <a:noFill/>
-        </p:spPr>
-        <p:txBody>
-          <a:bodyPr wrap="square">
-            <a:spAutoFit/>
-          </a:bodyPr>
-          <a:lstStyle/>
-          <a:p>
-            <a:pPr algn="l">
-              <a:lnSpc>
-                <a:spcPct val="120000"/>
-              </a:lnSpc>
-            </a:pPr>
-            <a:r>
-              <a:rPr sz="1150" b="0" i="0">
-                <a:solidFill>
-                  <a:srgbClr val="7A828E"/>
-                </a:solidFill>
-                <a:latin typeface="맑은 고딕"/>
-              </a:rPr>
-              <a:t>'초안의 씨앗'. 현장 일화·고객 반응을 자유롭게 — 예: '가발창업교육 5기 모집, ATUM 시연에 40대 관심 집중'.</a:t>
-            </a:r>
-          </a:p>
-        </p:txBody>
-      </p:sp>
-      <p:sp>
-        <p:nvSpPr>
-          <p:cNvPr id="18" name="Rectangle 17"/>
-          <p:cNvSpPr/>
-          <p:nvPr/>
-        </p:nvSpPr>
-        <p:spPr>
-          <a:xfrm>
-            <a:off x="502920" y="3346704"/>
-            <a:ext cx="502920" cy="914400"/>
-          </a:xfrm>
-          <a:prstGeom prst="rect">
-            <a:avLst/>
-          </a:prstGeom>
-          <a:solidFill>
-            <a:srgbClr val="1B3A5C"/>
-          </a:solidFill>
-          <a:ln>
-            <a:noFill/>
-          </a:ln>
-          <a:effectLst/>
-        </p:spPr>
-        <p:style>
-          <a:lnRef idx="1">
-            <a:schemeClr val="accent1"/>
-          </a:lnRef>
-          <a:fillRef idx="3">
-            <a:schemeClr val="accent1"/>
-          </a:fillRef>
-          <a:effectRef idx="2">
-            <a:schemeClr val="accent1"/>
-          </a:effectRef>
-          <a:fontRef idx="minor">
-            <a:schemeClr val="lt1"/>
-          </a:fontRef>
-        </p:style>
-        <p:txBody>
-          <a:bodyPr rtlCol="0" anchor="ctr"/>
-          <a:lstStyle/>
-          <a:p>
-            <a:pPr algn="ctr"/>
-          </a:p>
-        </p:txBody>
-      </p:sp>
-      <p:sp>
-        <p:nvSpPr>
-          <p:cNvPr id="19" name="TextBox 18"/>
-          <p:cNvSpPr txBox="1"/>
-          <p:nvPr/>
-        </p:nvSpPr>
-        <p:spPr>
-          <a:xfrm>
-            <a:off x="502920" y="3346704"/>
-            <a:ext cx="502920" cy="914400"/>
-          </a:xfrm>
-          <a:prstGeom prst="rect">
-            <a:avLst/>
-          </a:prstGeom>
-          <a:noFill/>
-        </p:spPr>
-        <p:txBody>
-          <a:bodyPr wrap="square">
-            <a:spAutoFit/>
-          </a:bodyPr>
-          <a:lstStyle/>
-          <a:p>
-            <a:pPr algn="ctr">
-              <a:lnSpc>
-                <a:spcPct val="100000"/>
-              </a:lnSpc>
-            </a:pPr>
-            <a:r>
-              <a:rPr sz="1900" b="1" i="0">
-                <a:solidFill>
-                  <a:srgbClr val="FFFFFF"/>
-                </a:solidFill>
-                <a:latin typeface="맑은 고딕"/>
-              </a:rPr>
-              <a:t>3</a:t>
-            </a:r>
-          </a:p>
-        </p:txBody>
-      </p:sp>
-      <p:sp>
-        <p:nvSpPr>
-          <p:cNvPr id="20" name="Rectangle 19"/>
-          <p:cNvSpPr/>
-          <p:nvPr/>
-        </p:nvSpPr>
-        <p:spPr>
-          <a:xfrm>
-            <a:off x="1005840" y="3346704"/>
-            <a:ext cx="10652760" cy="914400"/>
-          </a:xfrm>
-          <a:prstGeom prst="rect">
-            <a:avLst/>
-          </a:prstGeom>
-          <a:solidFill>
-            <a:srgbClr val="FFFFFF"/>
-          </a:solidFill>
-          <a:ln>
-            <a:noFill/>
-          </a:ln>
-          <a:effectLst/>
-        </p:spPr>
-        <p:style>
-          <a:lnRef idx="1">
-            <a:schemeClr val="accent1"/>
-          </a:lnRef>
-          <a:fillRef idx="3">
-            <a:schemeClr val="accent1"/>
-          </a:fillRef>
-          <a:effectRef idx="2">
-            <a:schemeClr val="accent1"/>
-          </a:effectRef>
-          <a:fontRef idx="minor">
-            <a:schemeClr val="lt1"/>
-          </a:fontRef>
-        </p:style>
-        <p:txBody>
-          <a:bodyPr rtlCol="0" anchor="ctr"/>
-          <a:lstStyle/>
-          <a:p>
-            <a:pPr algn="ctr"/>
-          </a:p>
-        </p:txBody>
-      </p:sp>
-      <p:sp>
-        <p:nvSpPr>
-          <p:cNvPr id="21" name="TextBox 20"/>
-          <p:cNvSpPr txBox="1"/>
-          <p:nvPr/>
-        </p:nvSpPr>
-        <p:spPr>
-          <a:xfrm>
-            <a:off x="1188720" y="3419856"/>
-            <a:ext cx="10287000" cy="320040"/>
-          </a:xfrm>
-          <a:prstGeom prst="rect">
-            <a:avLst/>
-          </a:prstGeom>
-          <a:noFill/>
-        </p:spPr>
-        <p:txBody>
-          <a:bodyPr wrap="square">
-            <a:spAutoFit/>
-          </a:bodyPr>
-          <a:lstStyle/>
-          <a:p>
-            <a:pPr algn="l">
-              <a:lnSpc>
-                <a:spcPct val="100000"/>
-              </a:lnSpc>
-            </a:pPr>
-            <a:r>
-              <a:rPr sz="1350" b="1" i="0">
+              <a:t>▪ 이 단계가 유일하게 유료 API HUB 호출을 씁니다.</a:t>
+            </a:r>
+          </a:p>
+          <a:p>
+            <a:pPr>
+              <a:lnSpc>
+                <a:spcPct val="130000"/>
+              </a:lnSpc>
+              <a:spcAft>
+                <a:spcPts val="1400"/>
+              </a:spcAft>
+            </a:pPr>
+            <a:r>
+              <a:rPr sz="1200" b="0">
                 <a:solidFill>
                   <a:srgbClr val="23262B"/>
                 </a:solidFill>
                 <a:latin typeface="맑은 고딕"/>
               </a:rPr>
-              <a:t>공지·제품 정보 입력</a:t>
-            </a:r>
-          </a:p>
-        </p:txBody>
-      </p:sp>
-      <p:sp>
-        <p:nvSpPr>
-          <p:cNvPr id="22" name="TextBox 21"/>
-          <p:cNvSpPr txBox="1"/>
-          <p:nvPr/>
-        </p:nvSpPr>
-        <p:spPr>
-          <a:xfrm>
-            <a:off x="1188720" y="3730752"/>
-            <a:ext cx="10287000" cy="457200"/>
-          </a:xfrm>
-          <a:prstGeom prst="rect">
-            <a:avLst/>
-          </a:prstGeom>
-          <a:noFill/>
-        </p:spPr>
-        <p:txBody>
-          <a:bodyPr wrap="square">
-            <a:spAutoFit/>
-          </a:bodyPr>
-          <a:lstStyle/>
-          <a:p>
-            <a:pPr algn="l">
-              <a:lnSpc>
-                <a:spcPct val="120000"/>
-              </a:lnSpc>
-            </a:pPr>
-            <a:r>
-              <a:rPr sz="1150" b="0" i="0">
-                <a:solidFill>
-                  <a:srgbClr val="7A828E"/>
-                </a:solidFill>
-                <a:latin typeface="맑은 고딕"/>
-              </a:rPr>
-              <a:t>날짜·가격·주문 방법처럼 AI가 지어내면 안 되는 값은 별도 칸에. 예: 장소 '서초 본점', 문의 '02-6396-3388'.</a:t>
-            </a:r>
-          </a:p>
-        </p:txBody>
-      </p:sp>
-      <p:sp>
-        <p:nvSpPr>
-          <p:cNvPr id="23" name="Rectangle 22"/>
-          <p:cNvSpPr/>
-          <p:nvPr/>
-        </p:nvSpPr>
-        <p:spPr>
-          <a:xfrm>
-            <a:off x="502920" y="4334256"/>
-            <a:ext cx="502920" cy="914400"/>
-          </a:xfrm>
-          <a:prstGeom prst="rect">
-            <a:avLst/>
-          </a:prstGeom>
-          <a:solidFill>
-            <a:srgbClr val="1B3A5C"/>
-          </a:solidFill>
-          <a:ln>
-            <a:noFill/>
-          </a:ln>
-          <a:effectLst/>
-        </p:spPr>
-        <p:style>
-          <a:lnRef idx="1">
-            <a:schemeClr val="accent1"/>
-          </a:lnRef>
-          <a:fillRef idx="3">
-            <a:schemeClr val="accent1"/>
-          </a:fillRef>
-          <a:effectRef idx="2">
-            <a:schemeClr val="accent1"/>
-          </a:effectRef>
-          <a:fontRef idx="minor">
-            <a:schemeClr val="lt1"/>
-          </a:fontRef>
-        </p:style>
-        <p:txBody>
-          <a:bodyPr rtlCol="0" anchor="ctr"/>
-          <a:lstStyle/>
-          <a:p>
-            <a:pPr algn="ctr"/>
-          </a:p>
-        </p:txBody>
-      </p:sp>
-      <p:sp>
-        <p:nvSpPr>
-          <p:cNvPr id="24" name="TextBox 23"/>
-          <p:cNvSpPr txBox="1"/>
-          <p:nvPr/>
-        </p:nvSpPr>
-        <p:spPr>
-          <a:xfrm>
-            <a:off x="502920" y="4334256"/>
-            <a:ext cx="502920" cy="914400"/>
-          </a:xfrm>
-          <a:prstGeom prst="rect">
-            <a:avLst/>
-          </a:prstGeom>
-          <a:noFill/>
-        </p:spPr>
-        <p:txBody>
-          <a:bodyPr wrap="square">
-            <a:spAutoFit/>
-          </a:bodyPr>
-          <a:lstStyle/>
-          <a:p>
-            <a:pPr algn="ctr">
-              <a:lnSpc>
-                <a:spcPct val="100000"/>
-              </a:lnSpc>
-            </a:pPr>
-            <a:r>
-              <a:rPr sz="1900" b="1" i="0">
-                <a:solidFill>
-                  <a:srgbClr val="FFFFFF"/>
-                </a:solidFill>
-                <a:latin typeface="맑은 고딕"/>
-              </a:rPr>
-              <a:t>4</a:t>
-            </a:r>
-          </a:p>
-        </p:txBody>
-      </p:sp>
-      <p:sp>
-        <p:nvSpPr>
-          <p:cNvPr id="25" name="Rectangle 24"/>
-          <p:cNvSpPr/>
-          <p:nvPr/>
-        </p:nvSpPr>
-        <p:spPr>
-          <a:xfrm>
-            <a:off x="1005840" y="4334256"/>
-            <a:ext cx="10652760" cy="914400"/>
-          </a:xfrm>
-          <a:prstGeom prst="rect">
-            <a:avLst/>
-          </a:prstGeom>
-          <a:solidFill>
-            <a:srgbClr val="FFFFFF"/>
-          </a:solidFill>
-          <a:ln>
-            <a:noFill/>
-          </a:ln>
-          <a:effectLst/>
-        </p:spPr>
-        <p:style>
-          <a:lnRef idx="1">
-            <a:schemeClr val="accent1"/>
-          </a:lnRef>
-          <a:fillRef idx="3">
-            <a:schemeClr val="accent1"/>
-          </a:fillRef>
-          <a:effectRef idx="2">
-            <a:schemeClr val="accent1"/>
-          </a:effectRef>
-          <a:fontRef idx="minor">
-            <a:schemeClr val="lt1"/>
-          </a:fontRef>
-        </p:style>
-        <p:txBody>
-          <a:bodyPr rtlCol="0" anchor="ctr"/>
-          <a:lstStyle/>
-          <a:p>
-            <a:pPr algn="ctr"/>
-          </a:p>
-        </p:txBody>
-      </p:sp>
-      <p:sp>
-        <p:nvSpPr>
-          <p:cNvPr id="26" name="TextBox 25"/>
-          <p:cNvSpPr txBox="1"/>
-          <p:nvPr/>
-        </p:nvSpPr>
-        <p:spPr>
-          <a:xfrm>
-            <a:off x="1188720" y="4407408"/>
-            <a:ext cx="10287000" cy="320040"/>
-          </a:xfrm>
-          <a:prstGeom prst="rect">
-            <a:avLst/>
-          </a:prstGeom>
-          <a:noFill/>
-        </p:spPr>
-        <p:txBody>
-          <a:bodyPr wrap="square">
-            <a:spAutoFit/>
-          </a:bodyPr>
-          <a:lstStyle/>
-          <a:p>
-            <a:pPr algn="l">
-              <a:lnSpc>
-                <a:spcPct val="100000"/>
-              </a:lnSpc>
-            </a:pPr>
-            <a:r>
-              <a:rPr sz="1350" b="1" i="0">
-                <a:solidFill>
-                  <a:srgbClr val="23262B"/>
-                </a:solidFill>
-                <a:latin typeface="맑은 고딕"/>
-              </a:rPr>
-              <a:t>사진 첨부 → 🪄 초안 생성</a:t>
-            </a:r>
-          </a:p>
-        </p:txBody>
-      </p:sp>
-      <p:sp>
-        <p:nvSpPr>
-          <p:cNvPr id="27" name="TextBox 26"/>
-          <p:cNvSpPr txBox="1"/>
-          <p:nvPr/>
-        </p:nvSpPr>
-        <p:spPr>
-          <a:xfrm>
-            <a:off x="1188720" y="4718304"/>
-            <a:ext cx="10287000" cy="457200"/>
-          </a:xfrm>
-          <a:prstGeom prst="rect">
-            <a:avLst/>
-          </a:prstGeom>
-          <a:noFill/>
-        </p:spPr>
-        <p:txBody>
-          <a:bodyPr wrap="square">
-            <a:spAutoFit/>
-          </a:bodyPr>
-          <a:lstStyle/>
-          <a:p>
-            <a:pPr algn="l">
-              <a:lnSpc>
-                <a:spcPct val="120000"/>
-              </a:lnSpc>
-            </a:pPr>
-            <a:r>
-              <a:rPr sz="1150" b="0" i="0">
-                <a:solidFill>
-                  <a:srgbClr val="7A828E"/>
-                </a:solidFill>
-                <a:latin typeface="맑은 고딕"/>
-              </a:rPr>
-              <a:t>네이버 본문·인스타 캡션·X 스레드·쇼츠 자막이 한 번에 생성됩니다. 같은 사진 재사용은 분석 토큰 0.</a:t>
-            </a:r>
-          </a:p>
-        </p:txBody>
-      </p:sp>
-      <p:sp>
-        <p:nvSpPr>
-          <p:cNvPr id="28" name="Rectangle 27"/>
-          <p:cNvSpPr/>
-          <p:nvPr/>
-        </p:nvSpPr>
-        <p:spPr>
-          <a:xfrm>
-            <a:off x="502920" y="5321808"/>
-            <a:ext cx="502920" cy="914400"/>
-          </a:xfrm>
-          <a:prstGeom prst="rect">
-            <a:avLst/>
-          </a:prstGeom>
-          <a:solidFill>
-            <a:srgbClr val="1B3A5C"/>
-          </a:solidFill>
-          <a:ln>
-            <a:noFill/>
-          </a:ln>
-          <a:effectLst/>
-        </p:spPr>
-        <p:style>
-          <a:lnRef idx="1">
-            <a:schemeClr val="accent1"/>
-          </a:lnRef>
-          <a:fillRef idx="3">
-            <a:schemeClr val="accent1"/>
-          </a:fillRef>
-          <a:effectRef idx="2">
-            <a:schemeClr val="accent1"/>
-          </a:effectRef>
-          <a:fontRef idx="minor">
-            <a:schemeClr val="lt1"/>
-          </a:fontRef>
-        </p:style>
-        <p:txBody>
-          <a:bodyPr rtlCol="0" anchor="ctr"/>
-          <a:lstStyle/>
-          <a:p>
-            <a:pPr algn="ctr"/>
-          </a:p>
-        </p:txBody>
-      </p:sp>
-      <p:sp>
-        <p:nvSpPr>
-          <p:cNvPr id="29" name="TextBox 28"/>
-          <p:cNvSpPr txBox="1"/>
-          <p:nvPr/>
-        </p:nvSpPr>
-        <p:spPr>
-          <a:xfrm>
-            <a:off x="502920" y="5321808"/>
-            <a:ext cx="502920" cy="914400"/>
-          </a:xfrm>
-          <a:prstGeom prst="rect">
-            <a:avLst/>
-          </a:prstGeom>
-          <a:noFill/>
-        </p:spPr>
-        <p:txBody>
-          <a:bodyPr wrap="square">
-            <a:spAutoFit/>
-          </a:bodyPr>
-          <a:lstStyle/>
-          <a:p>
-            <a:pPr algn="ctr">
-              <a:lnSpc>
-                <a:spcPct val="100000"/>
-              </a:lnSpc>
-            </a:pPr>
-            <a:r>
-              <a:rPr sz="1900" b="1" i="0">
-                <a:solidFill>
-                  <a:srgbClr val="FFFFFF"/>
-                </a:solidFill>
-                <a:latin typeface="맑은 고딕"/>
-              </a:rPr>
-              <a:t>5</a:t>
-            </a:r>
-          </a:p>
-        </p:txBody>
-      </p:sp>
-      <p:sp>
-        <p:nvSpPr>
-          <p:cNvPr id="30" name="Rectangle 29"/>
-          <p:cNvSpPr/>
-          <p:nvPr/>
-        </p:nvSpPr>
-        <p:spPr>
-          <a:xfrm>
-            <a:off x="1005840" y="5321808"/>
-            <a:ext cx="10652760" cy="914400"/>
-          </a:xfrm>
-          <a:prstGeom prst="rect">
-            <a:avLst/>
-          </a:prstGeom>
-          <a:solidFill>
-            <a:srgbClr val="FFFFFF"/>
-          </a:solidFill>
-          <a:ln>
-            <a:noFill/>
-          </a:ln>
-          <a:effectLst/>
-        </p:spPr>
-        <p:style>
-          <a:lnRef idx="1">
-            <a:schemeClr val="accent1"/>
-          </a:lnRef>
-          <a:fillRef idx="3">
-            <a:schemeClr val="accent1"/>
-          </a:fillRef>
-          <a:effectRef idx="2">
-            <a:schemeClr val="accent1"/>
-          </a:effectRef>
-          <a:fontRef idx="minor">
-            <a:schemeClr val="lt1"/>
-          </a:fontRef>
-        </p:style>
-        <p:txBody>
-          <a:bodyPr rtlCol="0" anchor="ctr"/>
-          <a:lstStyle/>
-          <a:p>
-            <a:pPr algn="ctr"/>
-          </a:p>
-        </p:txBody>
-      </p:sp>
-      <p:sp>
-        <p:nvSpPr>
-          <p:cNvPr id="31" name="TextBox 30"/>
-          <p:cNvSpPr txBox="1"/>
-          <p:nvPr/>
-        </p:nvSpPr>
-        <p:spPr>
-          <a:xfrm>
-            <a:off x="1188720" y="5394960"/>
-            <a:ext cx="10287000" cy="320040"/>
-          </a:xfrm>
-          <a:prstGeom prst="rect">
-            <a:avLst/>
-          </a:prstGeom>
-          <a:noFill/>
-        </p:spPr>
-        <p:txBody>
-          <a:bodyPr wrap="square">
-            <a:spAutoFit/>
-          </a:bodyPr>
-          <a:lstStyle/>
-          <a:p>
-            <a:pPr algn="l">
-              <a:lnSpc>
-                <a:spcPct val="100000"/>
-              </a:lnSpc>
-            </a:pPr>
-            <a:r>
-              <a:rPr sz="1350" b="1" i="0">
-                <a:solidFill>
-                  <a:srgbClr val="23262B"/>
-                </a:solidFill>
-                <a:latin typeface="맑은 고딕"/>
-              </a:rPr>
-              <a:t>편집 → 시뮬레이터 확인</a:t>
-            </a:r>
-          </a:p>
-        </p:txBody>
-      </p:sp>
-      <p:sp>
-        <p:nvSpPr>
-          <p:cNvPr id="32" name="TextBox 31"/>
-          <p:cNvSpPr txBox="1"/>
-          <p:nvPr/>
-        </p:nvSpPr>
-        <p:spPr>
-          <a:xfrm>
-            <a:off x="1188720" y="5705856"/>
-            <a:ext cx="10287000" cy="457200"/>
-          </a:xfrm>
-          <a:prstGeom prst="rect">
-            <a:avLst/>
-          </a:prstGeom>
-          <a:noFill/>
-        </p:spPr>
-        <p:txBody>
-          <a:bodyPr wrap="square">
-            <a:spAutoFit/>
-          </a:bodyPr>
-          <a:lstStyle/>
-          <a:p>
-            <a:pPr algn="l">
-              <a:lnSpc>
-                <a:spcPct val="120000"/>
-              </a:lnSpc>
-            </a:pPr>
-            <a:r>
-              <a:rPr sz="1150" b="0" i="0">
-                <a:solidFill>
-                  <a:srgbClr val="7A828E"/>
-                </a:solidFill>
-                <a:latin typeface="맑은 고딕"/>
-              </a:rPr>
-              <a:t>4개 탭에서 직접 고치고, 우측에서 실제 레이아웃(인스타 125자 절단선·쇼츠 데드존 등)으로 검증.</a:t>
+              <a:t>▪ 표 아래로 스크롤하면 [3단계] 버튼이 있습니다.</a:t>
             </a:r>
           </a:p>
         </p:txBody>
@@ -7507,7 +6559,7 @@
                 </a:solidFill>
                 <a:latin typeface="맑은 고딕"/>
               </a:rPr>
-              <a:t>③ 매일 쓰는 법 · 뉴스와 게시</a:t>
+              <a:t>② 키워드 갱신 · 실제 화면 (3/3)</a:t>
             </a:r>
           </a:p>
         </p:txBody>
@@ -7546,7 +6598,7 @@
                 </a:solidFill>
                 <a:latin typeface="맑은 고딕"/>
               </a:rPr>
-              <a:t>뉴스 큐레이션 &amp; 네이버 게시</a:t>
+              <a:t>3단계 · 브랜드 판정 → 4단계 · 적용</a:t>
             </a:r>
           </a:p>
         </p:txBody>
@@ -7631,296 +6683,20 @@
       </p:sp>
       <p:sp>
         <p:nvSpPr>
-          <p:cNvPr id="8" name="TextBox 7"/>
-          <p:cNvSpPr txBox="1"/>
-          <p:nvPr/>
-        </p:nvSpPr>
-        <p:spPr>
-          <a:xfrm>
-            <a:off x="502920" y="1280160"/>
-            <a:ext cx="5394960" cy="365760"/>
-          </a:xfrm>
-          <a:prstGeom prst="rect">
-            <a:avLst/>
-          </a:prstGeom>
-          <a:noFill/>
-        </p:spPr>
-        <p:txBody>
-          <a:bodyPr wrap="square">
-            <a:spAutoFit/>
-          </a:bodyPr>
-          <a:lstStyle/>
-          <a:p>
-            <a:pPr algn="l">
-              <a:lnSpc>
-                <a:spcPct val="100000"/>
-              </a:lnSpc>
-            </a:pPr>
-            <a:r>
-              <a:rPr sz="1500" b="1" i="0">
-                <a:solidFill>
-                  <a:srgbClr val="1B3A5C"/>
-                </a:solidFill>
-                <a:latin typeface="맑은 고딕"/>
-              </a:rPr>
-              <a:t>📰 뉴스 큐레이션</a:t>
-            </a:r>
-          </a:p>
-        </p:txBody>
-      </p:sp>
-      <p:sp>
-        <p:nvSpPr>
-          <p:cNvPr id="9" name="TextBox 8"/>
-          <p:cNvSpPr txBox="1"/>
-          <p:nvPr/>
-        </p:nvSpPr>
-        <p:spPr>
-          <a:xfrm>
-            <a:off x="502920" y="1691640"/>
-            <a:ext cx="5394960" cy="2560320"/>
-          </a:xfrm>
-          <a:prstGeom prst="rect">
-            <a:avLst/>
-          </a:prstGeom>
-          <a:noFill/>
-        </p:spPr>
-        <p:txBody>
-          <a:bodyPr wrap="square">
-            <a:spAutoFit/>
-          </a:bodyPr>
-          <a:lstStyle/>
-          <a:p>
-            <a:pPr>
-              <a:lnSpc>
-                <a:spcPct val="125000"/>
-              </a:lnSpc>
-              <a:spcAft>
-                <a:spcPts val="900"/>
-              </a:spcAft>
-            </a:pPr>
-            <a:r>
-              <a:rPr sz="1200" b="0">
-                <a:solidFill>
-                  <a:srgbClr val="23262B"/>
-                </a:solidFill>
-                <a:latin typeface="맑은 고딕"/>
-              </a:rPr>
-              <a:t>▪ 브랜드 키워드로 관련 기사를 찾아 [워크벤치로 전달]합니다.</a:t>
-            </a:r>
-          </a:p>
-          <a:p>
-            <a:pPr>
-              <a:lnSpc>
-                <a:spcPct val="125000"/>
-              </a:lnSpc>
-              <a:spcAft>
-                <a:spcPts val="900"/>
-              </a:spcAft>
-            </a:pPr>
-            <a:r>
-              <a:rPr sz="1200" b="1">
-                <a:solidFill>
-                  <a:srgbClr val="23262B"/>
-                </a:solidFill>
-                <a:latin typeface="맑은 고딕"/>
-              </a:rPr>
-              <a:t>▪ Google 뉴스 RSS + 네이버 뉴스 직접 조회 — API 키 없이 완전 무료입니다.</a:t>
-            </a:r>
-          </a:p>
-          <a:p>
-            <a:pPr>
-              <a:lnSpc>
-                <a:spcPct val="125000"/>
-              </a:lnSpc>
-              <a:spcAft>
-                <a:spcPts val="900"/>
-              </a:spcAft>
-            </a:pPr>
-            <a:r>
-              <a:rPr sz="1200" b="0">
-                <a:solidFill>
-                  <a:srgbClr val="23262B"/>
-                </a:solidFill>
-                <a:latin typeface="맑은 고딕"/>
-              </a:rPr>
-              <a:t>▪ 뉴스 기반 글은 본문 끝에 원문 링크가 자동으로 붙습니다.</a:t>
-            </a:r>
-          </a:p>
-          <a:p>
-            <a:pPr>
-              <a:lnSpc>
-                <a:spcPct val="125000"/>
-              </a:lnSpc>
-              <a:spcAft>
-                <a:spcPts val="900"/>
-              </a:spcAft>
-            </a:pPr>
-            <a:r>
-              <a:rPr sz="1200" b="0">
-                <a:solidFill>
-                  <a:srgbClr val="23262B"/>
-                </a:solidFill>
-                <a:latin typeface="맑은 고딕"/>
-              </a:rPr>
-              <a:t>▪ 추가 검색어 예시: '탈모 관리, 항암가발 지원, 소상공인 창업교육'.</a:t>
-            </a:r>
-          </a:p>
-        </p:txBody>
-      </p:sp>
-      <p:sp>
-        <p:nvSpPr>
-          <p:cNvPr id="10" name="TextBox 9"/>
-          <p:cNvSpPr txBox="1"/>
-          <p:nvPr/>
-        </p:nvSpPr>
-        <p:spPr>
-          <a:xfrm>
-            <a:off x="6263640" y="1280160"/>
-            <a:ext cx="5394960" cy="365760"/>
-          </a:xfrm>
-          <a:prstGeom prst="rect">
-            <a:avLst/>
-          </a:prstGeom>
-          <a:noFill/>
-        </p:spPr>
-        <p:txBody>
-          <a:bodyPr wrap="square">
-            <a:spAutoFit/>
-          </a:bodyPr>
-          <a:lstStyle/>
-          <a:p>
-            <a:pPr algn="l">
-              <a:lnSpc>
-                <a:spcPct val="100000"/>
-              </a:lnSpc>
-            </a:pPr>
-            <a:r>
-              <a:rPr sz="1500" b="1" i="0">
-                <a:solidFill>
-                  <a:srgbClr val="1B3A5C"/>
-                </a:solidFill>
-                <a:latin typeface="맑은 고딕"/>
-              </a:rPr>
-              <a:t>🚀 네이버 게시 (반자동)</a:t>
-            </a:r>
-          </a:p>
-        </p:txBody>
-      </p:sp>
-      <p:sp>
-        <p:nvSpPr>
-          <p:cNvPr id="11" name="TextBox 10"/>
-          <p:cNvSpPr txBox="1"/>
-          <p:nvPr/>
-        </p:nvSpPr>
-        <p:spPr>
-          <a:xfrm>
-            <a:off x="6263640" y="1691640"/>
-            <a:ext cx="5394960" cy="2560320"/>
-          </a:xfrm>
-          <a:prstGeom prst="rect">
-            <a:avLst/>
-          </a:prstGeom>
-          <a:noFill/>
-        </p:spPr>
-        <p:txBody>
-          <a:bodyPr wrap="square">
-            <a:spAutoFit/>
-          </a:bodyPr>
-          <a:lstStyle/>
-          <a:p>
-            <a:pPr>
-              <a:lnSpc>
-                <a:spcPct val="125000"/>
-              </a:lnSpc>
-              <a:spcAft>
-                <a:spcPts val="900"/>
-              </a:spcAft>
-            </a:pPr>
-            <a:r>
-              <a:rPr sz="1200" b="0">
-                <a:solidFill>
-                  <a:srgbClr val="23262B"/>
-                </a:solidFill>
-                <a:latin typeface="맑은 고딕"/>
-              </a:rPr>
-              <a:t>▪ ① [네이버 로그인]으로 세션 저장 → ② [지금 게시] → Chrome 자동 입력.</a:t>
-            </a:r>
-          </a:p>
-          <a:p>
-            <a:pPr>
-              <a:lnSpc>
-                <a:spcPct val="125000"/>
-              </a:lnSpc>
-              <a:spcAft>
-                <a:spcPts val="900"/>
-              </a:spcAft>
-            </a:pPr>
-            <a:r>
-              <a:rPr sz="1200" b="1">
-                <a:solidFill>
-                  <a:srgbClr val="23262B"/>
-                </a:solidFill>
-                <a:latin typeface="맑은 고딕"/>
-              </a:rPr>
-              <a:t>▪ ③ 마지막 [발행] 클릭은 항상 사람이 직접 — 봇 차단을 피하기 위한 설계입니다.</a:t>
-            </a:r>
-          </a:p>
-          <a:p>
-            <a:pPr>
-              <a:lnSpc>
-                <a:spcPct val="125000"/>
-              </a:lnSpc>
-              <a:spcAft>
-                <a:spcPts val="900"/>
-              </a:spcAft>
-            </a:pPr>
-            <a:r>
-              <a:rPr sz="1200" b="0">
-                <a:solidFill>
-                  <a:srgbClr val="23262B"/>
-                </a:solidFill>
-                <a:latin typeface="맑은 고딕"/>
-              </a:rPr>
-              <a:t>▪ 직접 붙여넣어 발행했다면 [✅ 수동으로 완료]로 목록을 정리하세요.</a:t>
-            </a:r>
-          </a:p>
-          <a:p>
-            <a:pPr>
-              <a:lnSpc>
-                <a:spcPct val="125000"/>
-              </a:lnSpc>
-              <a:spcAft>
-                <a:spcPts val="900"/>
-              </a:spcAft>
-            </a:pPr>
-            <a:r>
-              <a:rPr sz="1200" b="0">
-                <a:solidFill>
-                  <a:srgbClr val="23262B"/>
-                </a:solidFill>
-                <a:latin typeface="맑은 고딕"/>
-              </a:rPr>
-              <a:t>▪ 인스타/X/쇼츠는 자동 게시가 없어 [📄 콘텐츠 보기]에서 복사해 직접 올립니다.</a:t>
-            </a:r>
-          </a:p>
-        </p:txBody>
-      </p:sp>
-      <p:sp>
-        <p:nvSpPr>
-          <p:cNvPr id="12" name="Rectangle 11"/>
+          <p:cNvPr id="8" name="Rectangle 7"/>
           <p:cNvSpPr/>
           <p:nvPr/>
         </p:nvSpPr>
         <p:spPr>
           <a:xfrm>
-            <a:off x="502920" y="4572000"/>
-            <a:ext cx="11155680" cy="1371600"/>
+            <a:off x="464820" y="1626108"/>
+            <a:ext cx="5425440" cy="3775894"/>
           </a:xfrm>
           <a:prstGeom prst="rect">
             <a:avLst/>
           </a:prstGeom>
           <a:solidFill>
-            <a:srgbClr val="F5EDD7"/>
+            <a:srgbClr val="7A828E"/>
           </a:solidFill>
           <a:ln>
             <a:noFill/>
@@ -7949,6 +6725,137 @@
           </a:p>
         </p:txBody>
       </p:sp>
+      <p:pic>
+        <p:nvPicPr>
+          <p:cNvPr id="9" name="Picture 8" descr="naver_kw_04_stage3_result.png"/>
+          <p:cNvPicPr>
+            <a:picLocks noChangeAspect="1"/>
+          </p:cNvPicPr>
+          <p:nvPr/>
+        </p:nvPicPr>
+        <p:blipFill>
+          <a:blip r:embed="rId2"/>
+          <a:stretch>
+            <a:fillRect/>
+          </a:stretch>
+        </p:blipFill>
+        <p:spPr>
+          <a:xfrm>
+            <a:off x="502920" y="1664208"/>
+            <a:ext cx="5349240" cy="3699694"/>
+          </a:xfrm>
+          <a:prstGeom prst="rect">
+            <a:avLst/>
+          </a:prstGeom>
+        </p:spPr>
+      </p:pic>
+      <p:sp>
+        <p:nvSpPr>
+          <p:cNvPr id="10" name="TextBox 9"/>
+          <p:cNvSpPr txBox="1"/>
+          <p:nvPr/>
+        </p:nvSpPr>
+        <p:spPr>
+          <a:xfrm>
+            <a:off x="502920" y="1371600"/>
+            <a:ext cx="5349240" cy="292608"/>
+          </a:xfrm>
+          <a:prstGeom prst="rect">
+            <a:avLst/>
+          </a:prstGeom>
+          <a:noFill/>
+        </p:spPr>
+        <p:txBody>
+          <a:bodyPr wrap="square">
+            <a:spAutoFit/>
+          </a:bodyPr>
+          <a:lstStyle/>
+          <a:p>
+            <a:pPr algn="l">
+              <a:lnSpc>
+                <a:spcPct val="100000"/>
+              </a:lnSpc>
+            </a:pPr>
+            <a:r>
+              <a:rPr sz="1200" b="1" i="0">
+                <a:solidFill>
+                  <a:srgbClr val="1B3A5C"/>
+                </a:solidFill>
+                <a:latin typeface="맑은 고딕"/>
+              </a:rPr>
+              <a:t>AI가 구매 직결/잠재 고객/사업 부문별로 분류 — '='는 기존 유지, '+'는 신규 추가</a:t>
+            </a:r>
+          </a:p>
+        </p:txBody>
+      </p:sp>
+      <p:sp>
+        <p:nvSpPr>
+          <p:cNvPr id="11" name="Rectangle 10"/>
+          <p:cNvSpPr/>
+          <p:nvPr/>
+        </p:nvSpPr>
+        <p:spPr>
+          <a:xfrm>
+            <a:off x="6225540" y="1626108"/>
+            <a:ext cx="5425440" cy="3636098"/>
+          </a:xfrm>
+          <a:prstGeom prst="rect">
+            <a:avLst/>
+          </a:prstGeom>
+          <a:solidFill>
+            <a:srgbClr val="7A828E"/>
+          </a:solidFill>
+          <a:ln>
+            <a:noFill/>
+          </a:ln>
+          <a:effectLst/>
+        </p:spPr>
+        <p:style>
+          <a:lnRef idx="1">
+            <a:schemeClr val="accent1"/>
+          </a:lnRef>
+          <a:fillRef idx="3">
+            <a:schemeClr val="accent1"/>
+          </a:fillRef>
+          <a:effectRef idx="2">
+            <a:schemeClr val="accent1"/>
+          </a:effectRef>
+          <a:fontRef idx="minor">
+            <a:schemeClr val="lt1"/>
+          </a:fontRef>
+        </p:style>
+        <p:txBody>
+          <a:bodyPr rtlCol="0" anchor="ctr"/>
+          <a:lstStyle/>
+          <a:p>
+            <a:pPr algn="ctr"/>
+          </a:p>
+        </p:txBody>
+      </p:sp>
+      <p:pic>
+        <p:nvPicPr>
+          <p:cNvPr id="12" name="Picture 11" descr="naver_kw_05_stage34_apply.png"/>
+          <p:cNvPicPr>
+            <a:picLocks noChangeAspect="1"/>
+          </p:cNvPicPr>
+          <p:nvPr/>
+        </p:nvPicPr>
+        <p:blipFill>
+          <a:blip r:embed="rId3"/>
+          <a:stretch>
+            <a:fillRect/>
+          </a:stretch>
+        </p:blipFill>
+        <p:spPr>
+          <a:xfrm>
+            <a:off x="6263640" y="1664208"/>
+            <a:ext cx="5349240" cy="3559898"/>
+          </a:xfrm>
+          <a:prstGeom prst="rect">
+            <a:avLst/>
+          </a:prstGeom>
+        </p:spPr>
+      </p:pic>
       <p:sp>
         <p:nvSpPr>
           <p:cNvPr id="13" name="TextBox 12"/>
@@ -7957,8 +6864,8 @@
         </p:nvSpPr>
         <p:spPr>
           <a:xfrm>
-            <a:off x="777240" y="4754880"/>
-            <a:ext cx="10607040" cy="365760"/>
+            <a:off x="6263640" y="1371600"/>
+            <a:ext cx="5349240" cy="292608"/>
           </a:xfrm>
           <a:prstGeom prst="rect">
             <a:avLst/>
@@ -7977,13 +6884,13 @@
               </a:lnSpc>
             </a:pPr>
             <a:r>
-              <a:rPr sz="1350" b="1" i="0">
-                <a:solidFill>
-                  <a:srgbClr val="23262B"/>
-                </a:solidFill>
-                <a:latin typeface="맑은 고딕"/>
-              </a:rPr>
-              <a:t>게시 대상 블로그</a:t>
+              <a:rPr sz="1200" b="1" i="0">
+                <a:solidFill>
+                  <a:srgbClr val="1B3A5C"/>
+                </a:solidFill>
+                <a:latin typeface="맑은 고딕"/>
+              </a:rPr>
+              <a:t>제외된 키워드는 체크박스로 되살릴 수 있음 — [4단계 · 적용]을 눌러야 실제로 반영됨</a:t>
             </a:r>
           </a:p>
         </p:txBody>
@@ -7996,8 +6903,8 @@
         </p:nvSpPr>
         <p:spPr>
           <a:xfrm>
-            <a:off x="777240" y="5120640"/>
-            <a:ext cx="10607040" cy="685800"/>
+            <a:off x="502920" y="5897880"/>
+            <a:ext cx="11155680" cy="457200"/>
           </a:xfrm>
           <a:prstGeom prst="rect">
             <a:avLst/>
@@ -8012,17 +6919,17 @@
           <a:p>
             <a:pPr algn="l">
               <a:lnSpc>
-                <a:spcPct val="125000"/>
-              </a:lnSpc>
-            </a:pPr>
-            <a:r>
-              <a:rPr sz="1200" b="0" i="0">
-                <a:solidFill>
-                  <a:srgbClr val="23262B"/>
-                </a:solidFill>
-                <a:latin typeface="맑은 고딕"/>
-              </a:rPr>
-              <a:t>현재 blog.naver.com/jwl1722 로 연결됩니다. 바꾸려면 🧵 브랜드 킷의 '네이버 블로그 아이디'를 고치세요.</a:t>
+                <a:spcPct val="100000"/>
+              </a:lnSpc>
+            </a:pPr>
+            <a:r>
+              <a:rPr sz="1150" b="1" i="0">
+                <a:solidFill>
+                  <a:srgbClr val="C0392B"/>
+                </a:solidFill>
+                <a:latin typeface="맑은 고딕"/>
+              </a:rPr>
+              <a:t>⚠️ 여기서 [4단계 · 적용]을 누르기 전까지는 브랜드 킷의 SEO 키워드가 전혀 바뀌지 않습니다.</a:t>
             </a:r>
           </a:p>
         </p:txBody>
@@ -8175,7 +7082,7 @@
                 </a:solidFill>
                 <a:latin typeface="맑은 고딕"/>
               </a:rPr>
-              <a:t>③ 매일 쓰는 법 · 브랜드 킷</a:t>
+              <a:t>② 키워드 갱신 · 유지</a:t>
             </a:r>
           </a:p>
         </p:txBody>
@@ -8214,7 +7121,7 @@
                 </a:solidFill>
                 <a:latin typeface="맑은 고딕"/>
               </a:rPr>
-              <a:t>🧵 브랜드 킷 — AI의 두뇌를 직접 관리</a:t>
+              <a:t>평소 달 5분 · 분기 30분 · 캐시 30일</a:t>
             </a:r>
           </a:p>
         </p:txBody>
@@ -8293,6 +7200,2605 @@
                 <a:latin typeface="맑은 고딕"/>
               </a:rPr>
               <a:t>14</a:t>
+            </a:r>
+          </a:p>
+        </p:txBody>
+      </p:sp>
+      <p:sp>
+        <p:nvSpPr>
+          <p:cNvPr id="8" name="Rectangle 7"/>
+          <p:cNvSpPr/>
+          <p:nvPr/>
+        </p:nvSpPr>
+        <p:spPr>
+          <a:xfrm>
+            <a:off x="502920" y="1371600"/>
+            <a:ext cx="5440680" cy="2926080"/>
+          </a:xfrm>
+          <a:prstGeom prst="rect">
+            <a:avLst/>
+          </a:prstGeom>
+          <a:solidFill>
+            <a:srgbClr val="FFFFFF"/>
+          </a:solidFill>
+          <a:ln>
+            <a:noFill/>
+          </a:ln>
+          <a:effectLst/>
+        </p:spPr>
+        <p:style>
+          <a:lnRef idx="1">
+            <a:schemeClr val="accent1"/>
+          </a:lnRef>
+          <a:fillRef idx="3">
+            <a:schemeClr val="accent1"/>
+          </a:fillRef>
+          <a:effectRef idx="2">
+            <a:schemeClr val="accent1"/>
+          </a:effectRef>
+          <a:fontRef idx="minor">
+            <a:schemeClr val="lt1"/>
+          </a:fontRef>
+        </p:style>
+        <p:txBody>
+          <a:bodyPr rtlCol="0" anchor="ctr"/>
+          <a:lstStyle/>
+          <a:p>
+            <a:pPr algn="ctr"/>
+          </a:p>
+        </p:txBody>
+      </p:sp>
+      <p:sp>
+        <p:nvSpPr>
+          <p:cNvPr id="9" name="TextBox 8"/>
+          <p:cNvSpPr txBox="1"/>
+          <p:nvPr/>
+        </p:nvSpPr>
+        <p:spPr>
+          <a:xfrm>
+            <a:off x="731520" y="1508760"/>
+            <a:ext cx="4983480" cy="365760"/>
+          </a:xfrm>
+          <a:prstGeom prst="rect">
+            <a:avLst/>
+          </a:prstGeom>
+          <a:noFill/>
+        </p:spPr>
+        <p:txBody>
+          <a:bodyPr wrap="square">
+            <a:spAutoFit/>
+          </a:bodyPr>
+          <a:lstStyle/>
+          <a:p>
+            <a:pPr algn="l">
+              <a:lnSpc>
+                <a:spcPct val="100000"/>
+              </a:lnSpc>
+            </a:pPr>
+            <a:r>
+              <a:rPr sz="1400" b="1" i="0">
+                <a:solidFill>
+                  <a:srgbClr val="1B3A5C"/>
+                </a:solidFill>
+                <a:latin typeface="맑은 고딕"/>
+              </a:rPr>
+              <a:t>매월 — [🔄 숫자만 새로 재기]</a:t>
+            </a:r>
+          </a:p>
+        </p:txBody>
+      </p:sp>
+      <p:sp>
+        <p:nvSpPr>
+          <p:cNvPr id="10" name="TextBox 9"/>
+          <p:cNvSpPr txBox="1"/>
+          <p:nvPr/>
+        </p:nvSpPr>
+        <p:spPr>
+          <a:xfrm>
+            <a:off x="731520" y="1920240"/>
+            <a:ext cx="4983480" cy="2194560"/>
+          </a:xfrm>
+          <a:prstGeom prst="rect">
+            <a:avLst/>
+          </a:prstGeom>
+          <a:noFill/>
+        </p:spPr>
+        <p:txBody>
+          <a:bodyPr wrap="square">
+            <a:spAutoFit/>
+          </a:bodyPr>
+          <a:lstStyle/>
+          <a:p>
+            <a:pPr algn="l">
+              <a:lnSpc>
+                <a:spcPct val="135000"/>
+              </a:lnSpc>
+            </a:pPr>
+            <a:r>
+              <a:rPr sz="1200" b="0" i="0">
+                <a:solidFill>
+                  <a:srgbClr val="23262B"/>
+                </a:solidFill>
+                <a:latin typeface="맑은 고딕"/>
+              </a:rPr>
+              <a:t>키워드 목록은 그대로 두고 만료된 검색량·경쟁도만 다시 잽니다. 살아 있는 값은 캐시에서 읽어 호출 0회 — 과금되는 것은 만료분뿐입니다.</a:t>
+            </a:r>
+          </a:p>
+        </p:txBody>
+      </p:sp>
+      <p:sp>
+        <p:nvSpPr>
+          <p:cNvPr id="11" name="Rectangle 10"/>
+          <p:cNvSpPr/>
+          <p:nvPr/>
+        </p:nvSpPr>
+        <p:spPr>
+          <a:xfrm>
+            <a:off x="6263640" y="1371600"/>
+            <a:ext cx="5440680" cy="2926080"/>
+          </a:xfrm>
+          <a:prstGeom prst="rect">
+            <a:avLst/>
+          </a:prstGeom>
+          <a:solidFill>
+            <a:srgbClr val="FFFFFF"/>
+          </a:solidFill>
+          <a:ln>
+            <a:noFill/>
+          </a:ln>
+          <a:effectLst/>
+        </p:spPr>
+        <p:style>
+          <a:lnRef idx="1">
+            <a:schemeClr val="accent1"/>
+          </a:lnRef>
+          <a:fillRef idx="3">
+            <a:schemeClr val="accent1"/>
+          </a:fillRef>
+          <a:effectRef idx="2">
+            <a:schemeClr val="accent1"/>
+          </a:effectRef>
+          <a:fontRef idx="minor">
+            <a:schemeClr val="lt1"/>
+          </a:fontRef>
+        </p:style>
+        <p:txBody>
+          <a:bodyPr rtlCol="0" anchor="ctr"/>
+          <a:lstStyle/>
+          <a:p>
+            <a:pPr algn="ctr"/>
+          </a:p>
+        </p:txBody>
+      </p:sp>
+      <p:sp>
+        <p:nvSpPr>
+          <p:cNvPr id="12" name="TextBox 11"/>
+          <p:cNvSpPr txBox="1"/>
+          <p:nvPr/>
+        </p:nvSpPr>
+        <p:spPr>
+          <a:xfrm>
+            <a:off x="6492240" y="1508760"/>
+            <a:ext cx="4983480" cy="365760"/>
+          </a:xfrm>
+          <a:prstGeom prst="rect">
+            <a:avLst/>
+          </a:prstGeom>
+          <a:noFill/>
+        </p:spPr>
+        <p:txBody>
+          <a:bodyPr wrap="square">
+            <a:spAutoFit/>
+          </a:bodyPr>
+          <a:lstStyle/>
+          <a:p>
+            <a:pPr algn="l">
+              <a:lnSpc>
+                <a:spcPct val="100000"/>
+              </a:lnSpc>
+            </a:pPr>
+            <a:r>
+              <a:rPr sz="1400" b="1" i="0">
+                <a:solidFill>
+                  <a:srgbClr val="1B3A5C"/>
+                </a:solidFill>
+                <a:latin typeface="맑은 고딕"/>
+              </a:rPr>
+              <a:t>분기 — 4단계 전체</a:t>
+            </a:r>
+          </a:p>
+        </p:txBody>
+      </p:sp>
+      <p:sp>
+        <p:nvSpPr>
+          <p:cNvPr id="13" name="TextBox 12"/>
+          <p:cNvSpPr txBox="1"/>
+          <p:nvPr/>
+        </p:nvSpPr>
+        <p:spPr>
+          <a:xfrm>
+            <a:off x="6492240" y="1920240"/>
+            <a:ext cx="4983480" cy="2194560"/>
+          </a:xfrm>
+          <a:prstGeom prst="rect">
+            <a:avLst/>
+          </a:prstGeom>
+          <a:noFill/>
+        </p:spPr>
+        <p:txBody>
+          <a:bodyPr wrap="square">
+            <a:spAutoFit/>
+          </a:bodyPr>
+          <a:lstStyle/>
+          <a:p>
+            <a:pPr algn="l">
+              <a:lnSpc>
+                <a:spcPct val="135000"/>
+              </a:lnSpc>
+            </a:pPr>
+            <a:r>
+              <a:rPr sz="1200" b="0" i="0">
+                <a:solidFill>
+                  <a:srgbClr val="23262B"/>
+                </a:solidFill>
+                <a:latin typeface="맑은 고딕"/>
+              </a:rPr>
+              <a:t>씨앗부터 다시 발굴해 키워드 목록 자체를 교체합니다. 조사할 후보 수(기본 100개)가 곧 최대 유료 호출 수 — 넓힐수록 좋은 키워드를 찾을 확률이 오릅니다.</a:t>
+            </a:r>
+          </a:p>
+        </p:txBody>
+      </p:sp>
+      <p:sp>
+        <p:nvSpPr>
+          <p:cNvPr id="14" name="Rectangle 13"/>
+          <p:cNvSpPr/>
+          <p:nvPr/>
+        </p:nvSpPr>
+        <p:spPr>
+          <a:xfrm>
+            <a:off x="502920" y="4526280"/>
+            <a:ext cx="11155680" cy="1600200"/>
+          </a:xfrm>
+          <a:prstGeom prst="rect">
+            <a:avLst/>
+          </a:prstGeom>
+          <a:solidFill>
+            <a:srgbClr val="F5EDD7"/>
+          </a:solidFill>
+          <a:ln>
+            <a:noFill/>
+          </a:ln>
+          <a:effectLst/>
+        </p:spPr>
+        <p:style>
+          <a:lnRef idx="1">
+            <a:schemeClr val="accent1"/>
+          </a:lnRef>
+          <a:fillRef idx="3">
+            <a:schemeClr val="accent1"/>
+          </a:fillRef>
+          <a:effectRef idx="2">
+            <a:schemeClr val="accent1"/>
+          </a:effectRef>
+          <a:fontRef idx="minor">
+            <a:schemeClr val="lt1"/>
+          </a:fontRef>
+        </p:style>
+        <p:txBody>
+          <a:bodyPr rtlCol="0" anchor="ctr"/>
+          <a:lstStyle/>
+          <a:p>
+            <a:pPr algn="ctr"/>
+          </a:p>
+        </p:txBody>
+      </p:sp>
+      <p:sp>
+        <p:nvSpPr>
+          <p:cNvPr id="15" name="TextBox 14"/>
+          <p:cNvSpPr txBox="1"/>
+          <p:nvPr/>
+        </p:nvSpPr>
+        <p:spPr>
+          <a:xfrm>
+            <a:off x="777240" y="4663440"/>
+            <a:ext cx="10607040" cy="365760"/>
+          </a:xfrm>
+          <a:prstGeom prst="rect">
+            <a:avLst/>
+          </a:prstGeom>
+          <a:noFill/>
+        </p:spPr>
+        <p:txBody>
+          <a:bodyPr wrap="square">
+            <a:spAutoFit/>
+          </a:bodyPr>
+          <a:lstStyle/>
+          <a:p>
+            <a:pPr algn="l">
+              <a:lnSpc>
+                <a:spcPct val="100000"/>
+              </a:lnSpc>
+            </a:pPr>
+            <a:r>
+              <a:rPr sz="1400" b="1" i="0">
+                <a:solidFill>
+                  <a:srgbClr val="C0392B"/>
+                </a:solidFill>
+                <a:latin typeface="맑은 고딕"/>
+              </a:rPr>
+              <a:t>⚠️ 만료는 조용히 일어납니다</a:t>
+            </a:r>
+          </a:p>
+        </p:txBody>
+      </p:sp>
+      <p:sp>
+        <p:nvSpPr>
+          <p:cNvPr id="16" name="TextBox 15"/>
+          <p:cNvSpPr txBox="1"/>
+          <p:nvPr/>
+        </p:nvSpPr>
+        <p:spPr>
+          <a:xfrm>
+            <a:off x="777240" y="5047488"/>
+            <a:ext cx="10607040" cy="914400"/>
+          </a:xfrm>
+          <a:prstGeom prst="rect">
+            <a:avLst/>
+          </a:prstGeom>
+          <a:noFill/>
+        </p:spPr>
+        <p:txBody>
+          <a:bodyPr wrap="square">
+            <a:spAutoFit/>
+          </a:bodyPr>
+          <a:lstStyle/>
+          <a:p>
+            <a:pPr algn="l">
+              <a:lnSpc>
+                <a:spcPct val="130000"/>
+              </a:lnSpc>
+            </a:pPr>
+            <a:r>
+              <a:rPr sz="1200" b="0" i="0">
+                <a:solidFill>
+                  <a:srgbClr val="23262B"/>
+                </a:solidFill>
+                <a:latin typeface="맑은 고딕"/>
+              </a:rPr>
+              <a:t>에러도 멈춤도 없이 '전환 가중치'가 꺼지고 단순 등장 횟수로만 순위가 매겨집니다. 브랜드 킷·설정 화면에 '경쟁도 측정 만료' 경고가 뜨면 [숫자만 새로 재기]를 눌러주세요.</a:t>
+            </a:r>
+          </a:p>
+        </p:txBody>
+      </p:sp>
+    </p:spTree>
+  </p:cSld>
+  <p:clrMapOvr>
+    <a:masterClrMapping/>
+  </p:clrMapOvr>
+</p:sld>
+</file>
+
+<file path=ppt/slides/slide16.xml><?xml version="1.0" encoding="utf-8"?>
+<p:sld xmlns:a="http://schemas.openxmlformats.org/drawingml/2006/main" xmlns:p="http://schemas.openxmlformats.org/presentationml/2006/main" xmlns:r="http://schemas.openxmlformats.org/officeDocument/2006/relationships">
+  <p:cSld>
+    <p:bg>
+      <p:bgPr>
+        <a:solidFill>
+          <a:srgbClr val="F7F5F0"/>
+        </a:solidFill>
+        <a:effectLst/>
+      </p:bgPr>
+    </p:bg>
+    <p:spTree>
+      <p:nvGrpSpPr>
+        <p:cNvPr id="1" name=""/>
+        <p:cNvGrpSpPr/>
+        <p:nvPr/>
+      </p:nvGrpSpPr>
+      <p:grpSpPr/>
+      <p:sp>
+        <p:nvSpPr>
+          <p:cNvPr id="2" name="Rectangle 1"/>
+          <p:cNvSpPr/>
+          <p:nvPr/>
+        </p:nvSpPr>
+        <p:spPr>
+          <a:xfrm>
+            <a:off x="0" y="0"/>
+            <a:ext cx="12191695" cy="1051560"/>
+          </a:xfrm>
+          <a:prstGeom prst="rect">
+            <a:avLst/>
+          </a:prstGeom>
+          <a:solidFill>
+            <a:srgbClr val="122A44"/>
+          </a:solidFill>
+          <a:ln>
+            <a:noFill/>
+          </a:ln>
+          <a:effectLst/>
+        </p:spPr>
+        <p:style>
+          <a:lnRef idx="1">
+            <a:schemeClr val="accent1"/>
+          </a:lnRef>
+          <a:fillRef idx="3">
+            <a:schemeClr val="accent1"/>
+          </a:fillRef>
+          <a:effectRef idx="2">
+            <a:schemeClr val="accent1"/>
+          </a:effectRef>
+          <a:fontRef idx="minor">
+            <a:schemeClr val="lt1"/>
+          </a:fontRef>
+        </p:style>
+        <p:txBody>
+          <a:bodyPr rtlCol="0" anchor="ctr"/>
+          <a:lstStyle/>
+          <a:p>
+            <a:pPr algn="ctr"/>
+          </a:p>
+        </p:txBody>
+      </p:sp>
+      <p:sp>
+        <p:nvSpPr>
+          <p:cNvPr id="3" name="Rectangle 2"/>
+          <p:cNvSpPr/>
+          <p:nvPr/>
+        </p:nvSpPr>
+        <p:spPr>
+          <a:xfrm>
+            <a:off x="0" y="1051560"/>
+            <a:ext cx="12191695" cy="38100"/>
+          </a:xfrm>
+          <a:prstGeom prst="rect">
+            <a:avLst/>
+          </a:prstGeom>
+          <a:solidFill>
+            <a:srgbClr val="1B3A5C"/>
+          </a:solidFill>
+          <a:ln>
+            <a:noFill/>
+          </a:ln>
+          <a:effectLst/>
+        </p:spPr>
+        <p:style>
+          <a:lnRef idx="1">
+            <a:schemeClr val="accent1"/>
+          </a:lnRef>
+          <a:fillRef idx="3">
+            <a:schemeClr val="accent1"/>
+          </a:fillRef>
+          <a:effectRef idx="2">
+            <a:schemeClr val="accent1"/>
+          </a:effectRef>
+          <a:fontRef idx="minor">
+            <a:schemeClr val="lt1"/>
+          </a:fontRef>
+        </p:style>
+        <p:txBody>
+          <a:bodyPr rtlCol="0" anchor="ctr"/>
+          <a:lstStyle/>
+          <a:p>
+            <a:pPr algn="ctr"/>
+          </a:p>
+        </p:txBody>
+      </p:sp>
+      <p:sp>
+        <p:nvSpPr>
+          <p:cNvPr id="4" name="TextBox 3"/>
+          <p:cNvSpPr txBox="1"/>
+          <p:nvPr/>
+        </p:nvSpPr>
+        <p:spPr>
+          <a:xfrm>
+            <a:off x="502920" y="109728"/>
+            <a:ext cx="8686800" cy="292608"/>
+          </a:xfrm>
+          <a:prstGeom prst="rect">
+            <a:avLst/>
+          </a:prstGeom>
+          <a:noFill/>
+        </p:spPr>
+        <p:txBody>
+          <a:bodyPr wrap="square">
+            <a:spAutoFit/>
+          </a:bodyPr>
+          <a:lstStyle/>
+          <a:p>
+            <a:pPr algn="l">
+              <a:lnSpc>
+                <a:spcPct val="100000"/>
+              </a:lnSpc>
+            </a:pPr>
+            <a:r>
+              <a:rPr sz="1200" b="1" i="0">
+                <a:solidFill>
+                  <a:srgbClr val="1B3A5C"/>
+                </a:solidFill>
+                <a:latin typeface="맑은 고딕"/>
+              </a:rPr>
+              <a:t>③ 매일 쓰는 법 · 워크벤치</a:t>
+            </a:r>
+          </a:p>
+        </p:txBody>
+      </p:sp>
+      <p:sp>
+        <p:nvSpPr>
+          <p:cNvPr id="5" name="TextBox 4"/>
+          <p:cNvSpPr txBox="1"/>
+          <p:nvPr/>
+        </p:nvSpPr>
+        <p:spPr>
+          <a:xfrm>
+            <a:off x="457200" y="347472"/>
+            <a:ext cx="10515600" cy="621792"/>
+          </a:xfrm>
+          <a:prstGeom prst="rect">
+            <a:avLst/>
+          </a:prstGeom>
+          <a:noFill/>
+        </p:spPr>
+        <p:txBody>
+          <a:bodyPr wrap="square">
+            <a:spAutoFit/>
+          </a:bodyPr>
+          <a:lstStyle/>
+          <a:p>
+            <a:pPr algn="l">
+              <a:lnSpc>
+                <a:spcPct val="100000"/>
+              </a:lnSpc>
+            </a:pPr>
+            <a:r>
+              <a:rPr sz="2400" b="1" i="0">
+                <a:solidFill>
+                  <a:srgbClr val="FFFFFF"/>
+                </a:solidFill>
+                <a:latin typeface="맑은 고딕"/>
+              </a:rPr>
+              <a:t>새 콘텐츠 만들기 — 5단계</a:t>
+            </a:r>
+          </a:p>
+        </p:txBody>
+      </p:sp>
+      <p:sp>
+        <p:nvSpPr>
+          <p:cNvPr id="6" name="TextBox 5"/>
+          <p:cNvSpPr txBox="1"/>
+          <p:nvPr/>
+        </p:nvSpPr>
+        <p:spPr>
+          <a:xfrm>
+            <a:off x="457200" y="6492240"/>
+            <a:ext cx="8229600" cy="274320"/>
+          </a:xfrm>
+          <a:prstGeom prst="rect">
+            <a:avLst/>
+          </a:prstGeom>
+          <a:noFill/>
+        </p:spPr>
+        <p:txBody>
+          <a:bodyPr wrap="square">
+            <a:spAutoFit/>
+          </a:bodyPr>
+          <a:lstStyle/>
+          <a:p>
+            <a:pPr algn="l">
+              <a:lnSpc>
+                <a:spcPct val="100000"/>
+              </a:lnSpc>
+            </a:pPr>
+            <a:r>
+              <a:rPr sz="900" b="0" i="0">
+                <a:solidFill>
+                  <a:srgbClr val="7A828E"/>
+                </a:solidFill>
+                <a:latin typeface="맑은 고딕"/>
+              </a:rPr>
+              <a:t>씨제이씨협동조합 OSMU 워크벤치 · 관리자·사용자 매뉴얼</a:t>
+            </a:r>
+          </a:p>
+        </p:txBody>
+      </p:sp>
+      <p:sp>
+        <p:nvSpPr>
+          <p:cNvPr id="7" name="TextBox 6"/>
+          <p:cNvSpPr txBox="1"/>
+          <p:nvPr/>
+        </p:nvSpPr>
+        <p:spPr>
+          <a:xfrm>
+            <a:off x="11094415" y="6492240"/>
+            <a:ext cx="731520" cy="274320"/>
+          </a:xfrm>
+          <a:prstGeom prst="rect">
+            <a:avLst/>
+          </a:prstGeom>
+          <a:noFill/>
+        </p:spPr>
+        <p:txBody>
+          <a:bodyPr wrap="square">
+            <a:spAutoFit/>
+          </a:bodyPr>
+          <a:lstStyle/>
+          <a:p>
+            <a:pPr algn="r">
+              <a:lnSpc>
+                <a:spcPct val="100000"/>
+              </a:lnSpc>
+            </a:pPr>
+            <a:r>
+              <a:rPr sz="900" b="0" i="0">
+                <a:solidFill>
+                  <a:srgbClr val="7A828E"/>
+                </a:solidFill>
+                <a:latin typeface="맑은 고딕"/>
+              </a:rPr>
+              <a:t>15</a:t>
+            </a:r>
+          </a:p>
+        </p:txBody>
+      </p:sp>
+      <p:sp>
+        <p:nvSpPr>
+          <p:cNvPr id="8" name="Rectangle 7"/>
+          <p:cNvSpPr/>
+          <p:nvPr/>
+        </p:nvSpPr>
+        <p:spPr>
+          <a:xfrm>
+            <a:off x="502920" y="1371600"/>
+            <a:ext cx="502920" cy="914400"/>
+          </a:xfrm>
+          <a:prstGeom prst="rect">
+            <a:avLst/>
+          </a:prstGeom>
+          <a:solidFill>
+            <a:srgbClr val="1B3A5C"/>
+          </a:solidFill>
+          <a:ln>
+            <a:noFill/>
+          </a:ln>
+          <a:effectLst/>
+        </p:spPr>
+        <p:style>
+          <a:lnRef idx="1">
+            <a:schemeClr val="accent1"/>
+          </a:lnRef>
+          <a:fillRef idx="3">
+            <a:schemeClr val="accent1"/>
+          </a:fillRef>
+          <a:effectRef idx="2">
+            <a:schemeClr val="accent1"/>
+          </a:effectRef>
+          <a:fontRef idx="minor">
+            <a:schemeClr val="lt1"/>
+          </a:fontRef>
+        </p:style>
+        <p:txBody>
+          <a:bodyPr rtlCol="0" anchor="ctr"/>
+          <a:lstStyle/>
+          <a:p>
+            <a:pPr algn="ctr"/>
+          </a:p>
+        </p:txBody>
+      </p:sp>
+      <p:sp>
+        <p:nvSpPr>
+          <p:cNvPr id="9" name="TextBox 8"/>
+          <p:cNvSpPr txBox="1"/>
+          <p:nvPr/>
+        </p:nvSpPr>
+        <p:spPr>
+          <a:xfrm>
+            <a:off x="502920" y="1371600"/>
+            <a:ext cx="502920" cy="914400"/>
+          </a:xfrm>
+          <a:prstGeom prst="rect">
+            <a:avLst/>
+          </a:prstGeom>
+          <a:noFill/>
+        </p:spPr>
+        <p:txBody>
+          <a:bodyPr wrap="square">
+            <a:spAutoFit/>
+          </a:bodyPr>
+          <a:lstStyle/>
+          <a:p>
+            <a:pPr algn="ctr">
+              <a:lnSpc>
+                <a:spcPct val="100000"/>
+              </a:lnSpc>
+            </a:pPr>
+            <a:r>
+              <a:rPr sz="1900" b="1" i="0">
+                <a:solidFill>
+                  <a:srgbClr val="FFFFFF"/>
+                </a:solidFill>
+                <a:latin typeface="맑은 고딕"/>
+              </a:rPr>
+              <a:t>1</a:t>
+            </a:r>
+          </a:p>
+        </p:txBody>
+      </p:sp>
+      <p:sp>
+        <p:nvSpPr>
+          <p:cNvPr id="10" name="Rectangle 9"/>
+          <p:cNvSpPr/>
+          <p:nvPr/>
+        </p:nvSpPr>
+        <p:spPr>
+          <a:xfrm>
+            <a:off x="1005840" y="1371600"/>
+            <a:ext cx="10652760" cy="914400"/>
+          </a:xfrm>
+          <a:prstGeom prst="rect">
+            <a:avLst/>
+          </a:prstGeom>
+          <a:solidFill>
+            <a:srgbClr val="FFFFFF"/>
+          </a:solidFill>
+          <a:ln>
+            <a:noFill/>
+          </a:ln>
+          <a:effectLst/>
+        </p:spPr>
+        <p:style>
+          <a:lnRef idx="1">
+            <a:schemeClr val="accent1"/>
+          </a:lnRef>
+          <a:fillRef idx="3">
+            <a:schemeClr val="accent1"/>
+          </a:fillRef>
+          <a:effectRef idx="2">
+            <a:schemeClr val="accent1"/>
+          </a:effectRef>
+          <a:fontRef idx="minor">
+            <a:schemeClr val="lt1"/>
+          </a:fontRef>
+        </p:style>
+        <p:txBody>
+          <a:bodyPr rtlCol="0" anchor="ctr"/>
+          <a:lstStyle/>
+          <a:p>
+            <a:pPr algn="ctr"/>
+          </a:p>
+        </p:txBody>
+      </p:sp>
+      <p:sp>
+        <p:nvSpPr>
+          <p:cNvPr id="11" name="TextBox 10"/>
+          <p:cNvSpPr txBox="1"/>
+          <p:nvPr/>
+        </p:nvSpPr>
+        <p:spPr>
+          <a:xfrm>
+            <a:off x="1188720" y="1444752"/>
+            <a:ext cx="10287000" cy="320040"/>
+          </a:xfrm>
+          <a:prstGeom prst="rect">
+            <a:avLst/>
+          </a:prstGeom>
+          <a:noFill/>
+        </p:spPr>
+        <p:txBody>
+          <a:bodyPr wrap="square">
+            <a:spAutoFit/>
+          </a:bodyPr>
+          <a:lstStyle/>
+          <a:p>
+            <a:pPr algn="l">
+              <a:lnSpc>
+                <a:spcPct val="100000"/>
+              </a:lnSpc>
+            </a:pPr>
+            <a:r>
+              <a:rPr sz="1350" b="1" i="0">
+                <a:solidFill>
+                  <a:srgbClr val="23262B"/>
+                </a:solidFill>
+                <a:latin typeface="맑은 고딕"/>
+              </a:rPr>
+              <a:t>➕ 새 콘텐츠</a:t>
+            </a:r>
+          </a:p>
+        </p:txBody>
+      </p:sp>
+      <p:sp>
+        <p:nvSpPr>
+          <p:cNvPr id="12" name="TextBox 11"/>
+          <p:cNvSpPr txBox="1"/>
+          <p:nvPr/>
+        </p:nvSpPr>
+        <p:spPr>
+          <a:xfrm>
+            <a:off x="1188720" y="1755648"/>
+            <a:ext cx="10287000" cy="457200"/>
+          </a:xfrm>
+          <a:prstGeom prst="rect">
+            <a:avLst/>
+          </a:prstGeom>
+          <a:noFill/>
+        </p:spPr>
+        <p:txBody>
+          <a:bodyPr wrap="square">
+            <a:spAutoFit/>
+          </a:bodyPr>
+          <a:lstStyle/>
+          <a:p>
+            <a:pPr algn="l">
+              <a:lnSpc>
+                <a:spcPct val="120000"/>
+              </a:lnSpc>
+            </a:pPr>
+            <a:r>
+              <a:rPr sz="1150" b="0" i="0">
+                <a:solidFill>
+                  <a:srgbClr val="7A828E"/>
+                </a:solidFill>
+                <a:latin typeface="맑은 고딕"/>
+              </a:rPr>
+              <a:t>빈 초안이 만들어집니다. 빈 초안이 이미 있으면 새로 만들지 않고 재사용합니다.</a:t>
+            </a:r>
+          </a:p>
+        </p:txBody>
+      </p:sp>
+      <p:sp>
+        <p:nvSpPr>
+          <p:cNvPr id="13" name="Rectangle 12"/>
+          <p:cNvSpPr/>
+          <p:nvPr/>
+        </p:nvSpPr>
+        <p:spPr>
+          <a:xfrm>
+            <a:off x="502920" y="2359152"/>
+            <a:ext cx="502920" cy="914400"/>
+          </a:xfrm>
+          <a:prstGeom prst="rect">
+            <a:avLst/>
+          </a:prstGeom>
+          <a:solidFill>
+            <a:srgbClr val="1B3A5C"/>
+          </a:solidFill>
+          <a:ln>
+            <a:noFill/>
+          </a:ln>
+          <a:effectLst/>
+        </p:spPr>
+        <p:style>
+          <a:lnRef idx="1">
+            <a:schemeClr val="accent1"/>
+          </a:lnRef>
+          <a:fillRef idx="3">
+            <a:schemeClr val="accent1"/>
+          </a:fillRef>
+          <a:effectRef idx="2">
+            <a:schemeClr val="accent1"/>
+          </a:effectRef>
+          <a:fontRef idx="minor">
+            <a:schemeClr val="lt1"/>
+          </a:fontRef>
+        </p:style>
+        <p:txBody>
+          <a:bodyPr rtlCol="0" anchor="ctr"/>
+          <a:lstStyle/>
+          <a:p>
+            <a:pPr algn="ctr"/>
+          </a:p>
+        </p:txBody>
+      </p:sp>
+      <p:sp>
+        <p:nvSpPr>
+          <p:cNvPr id="14" name="TextBox 13"/>
+          <p:cNvSpPr txBox="1"/>
+          <p:nvPr/>
+        </p:nvSpPr>
+        <p:spPr>
+          <a:xfrm>
+            <a:off x="502920" y="2359152"/>
+            <a:ext cx="502920" cy="914400"/>
+          </a:xfrm>
+          <a:prstGeom prst="rect">
+            <a:avLst/>
+          </a:prstGeom>
+          <a:noFill/>
+        </p:spPr>
+        <p:txBody>
+          <a:bodyPr wrap="square">
+            <a:spAutoFit/>
+          </a:bodyPr>
+          <a:lstStyle/>
+          <a:p>
+            <a:pPr algn="ctr">
+              <a:lnSpc>
+                <a:spcPct val="100000"/>
+              </a:lnSpc>
+            </a:pPr>
+            <a:r>
+              <a:rPr sz="1900" b="1" i="0">
+                <a:solidFill>
+                  <a:srgbClr val="FFFFFF"/>
+                </a:solidFill>
+                <a:latin typeface="맑은 고딕"/>
+              </a:rPr>
+              <a:t>2</a:t>
+            </a:r>
+          </a:p>
+        </p:txBody>
+      </p:sp>
+      <p:sp>
+        <p:nvSpPr>
+          <p:cNvPr id="15" name="Rectangle 14"/>
+          <p:cNvSpPr/>
+          <p:nvPr/>
+        </p:nvSpPr>
+        <p:spPr>
+          <a:xfrm>
+            <a:off x="1005840" y="2359152"/>
+            <a:ext cx="10652760" cy="914400"/>
+          </a:xfrm>
+          <a:prstGeom prst="rect">
+            <a:avLst/>
+          </a:prstGeom>
+          <a:solidFill>
+            <a:srgbClr val="FFFFFF"/>
+          </a:solidFill>
+          <a:ln>
+            <a:noFill/>
+          </a:ln>
+          <a:effectLst/>
+        </p:spPr>
+        <p:style>
+          <a:lnRef idx="1">
+            <a:schemeClr val="accent1"/>
+          </a:lnRef>
+          <a:fillRef idx="3">
+            <a:schemeClr val="accent1"/>
+          </a:fillRef>
+          <a:effectRef idx="2">
+            <a:schemeClr val="accent1"/>
+          </a:effectRef>
+          <a:fontRef idx="minor">
+            <a:schemeClr val="lt1"/>
+          </a:fontRef>
+        </p:style>
+        <p:txBody>
+          <a:bodyPr rtlCol="0" anchor="ctr"/>
+          <a:lstStyle/>
+          <a:p>
+            <a:pPr algn="ctr"/>
+          </a:p>
+        </p:txBody>
+      </p:sp>
+      <p:sp>
+        <p:nvSpPr>
+          <p:cNvPr id="16" name="TextBox 15"/>
+          <p:cNvSpPr txBox="1"/>
+          <p:nvPr/>
+        </p:nvSpPr>
+        <p:spPr>
+          <a:xfrm>
+            <a:off x="1188720" y="2432304"/>
+            <a:ext cx="10287000" cy="320040"/>
+          </a:xfrm>
+          <a:prstGeom prst="rect">
+            <a:avLst/>
+          </a:prstGeom>
+          <a:noFill/>
+        </p:spPr>
+        <p:txBody>
+          <a:bodyPr wrap="square">
+            <a:spAutoFit/>
+          </a:bodyPr>
+          <a:lstStyle/>
+          <a:p>
+            <a:pPr algn="l">
+              <a:lnSpc>
+                <a:spcPct val="100000"/>
+              </a:lnSpc>
+            </a:pPr>
+            <a:r>
+              <a:rPr sz="1350" b="1" i="0">
+                <a:solidFill>
+                  <a:srgbClr val="23262B"/>
+                </a:solidFill>
+                <a:latin typeface="맑은 고딕"/>
+              </a:rPr>
+              <a:t>담당자 메모 작성</a:t>
+            </a:r>
+          </a:p>
+        </p:txBody>
+      </p:sp>
+      <p:sp>
+        <p:nvSpPr>
+          <p:cNvPr id="17" name="TextBox 16"/>
+          <p:cNvSpPr txBox="1"/>
+          <p:nvPr/>
+        </p:nvSpPr>
+        <p:spPr>
+          <a:xfrm>
+            <a:off x="1188720" y="2743200"/>
+            <a:ext cx="10287000" cy="457200"/>
+          </a:xfrm>
+          <a:prstGeom prst="rect">
+            <a:avLst/>
+          </a:prstGeom>
+          <a:noFill/>
+        </p:spPr>
+        <p:txBody>
+          <a:bodyPr wrap="square">
+            <a:spAutoFit/>
+          </a:bodyPr>
+          <a:lstStyle/>
+          <a:p>
+            <a:pPr algn="l">
+              <a:lnSpc>
+                <a:spcPct val="120000"/>
+              </a:lnSpc>
+            </a:pPr>
+            <a:r>
+              <a:rPr sz="1150" b="0" i="0">
+                <a:solidFill>
+                  <a:srgbClr val="7A828E"/>
+                </a:solidFill>
+                <a:latin typeface="맑은 고딕"/>
+              </a:rPr>
+              <a:t>'초안의 씨앗'. 현장 일화·고객 반응을 자유롭게 — 예: '가발창업교육 5기 모집, ATUM 시연에 40대 관심 집중'.</a:t>
+            </a:r>
+          </a:p>
+        </p:txBody>
+      </p:sp>
+      <p:sp>
+        <p:nvSpPr>
+          <p:cNvPr id="18" name="Rectangle 17"/>
+          <p:cNvSpPr/>
+          <p:nvPr/>
+        </p:nvSpPr>
+        <p:spPr>
+          <a:xfrm>
+            <a:off x="502920" y="3346704"/>
+            <a:ext cx="502920" cy="914400"/>
+          </a:xfrm>
+          <a:prstGeom prst="rect">
+            <a:avLst/>
+          </a:prstGeom>
+          <a:solidFill>
+            <a:srgbClr val="1B3A5C"/>
+          </a:solidFill>
+          <a:ln>
+            <a:noFill/>
+          </a:ln>
+          <a:effectLst/>
+        </p:spPr>
+        <p:style>
+          <a:lnRef idx="1">
+            <a:schemeClr val="accent1"/>
+          </a:lnRef>
+          <a:fillRef idx="3">
+            <a:schemeClr val="accent1"/>
+          </a:fillRef>
+          <a:effectRef idx="2">
+            <a:schemeClr val="accent1"/>
+          </a:effectRef>
+          <a:fontRef idx="minor">
+            <a:schemeClr val="lt1"/>
+          </a:fontRef>
+        </p:style>
+        <p:txBody>
+          <a:bodyPr rtlCol="0" anchor="ctr"/>
+          <a:lstStyle/>
+          <a:p>
+            <a:pPr algn="ctr"/>
+          </a:p>
+        </p:txBody>
+      </p:sp>
+      <p:sp>
+        <p:nvSpPr>
+          <p:cNvPr id="19" name="TextBox 18"/>
+          <p:cNvSpPr txBox="1"/>
+          <p:nvPr/>
+        </p:nvSpPr>
+        <p:spPr>
+          <a:xfrm>
+            <a:off x="502920" y="3346704"/>
+            <a:ext cx="502920" cy="914400"/>
+          </a:xfrm>
+          <a:prstGeom prst="rect">
+            <a:avLst/>
+          </a:prstGeom>
+          <a:noFill/>
+        </p:spPr>
+        <p:txBody>
+          <a:bodyPr wrap="square">
+            <a:spAutoFit/>
+          </a:bodyPr>
+          <a:lstStyle/>
+          <a:p>
+            <a:pPr algn="ctr">
+              <a:lnSpc>
+                <a:spcPct val="100000"/>
+              </a:lnSpc>
+            </a:pPr>
+            <a:r>
+              <a:rPr sz="1900" b="1" i="0">
+                <a:solidFill>
+                  <a:srgbClr val="FFFFFF"/>
+                </a:solidFill>
+                <a:latin typeface="맑은 고딕"/>
+              </a:rPr>
+              <a:t>3</a:t>
+            </a:r>
+          </a:p>
+        </p:txBody>
+      </p:sp>
+      <p:sp>
+        <p:nvSpPr>
+          <p:cNvPr id="20" name="Rectangle 19"/>
+          <p:cNvSpPr/>
+          <p:nvPr/>
+        </p:nvSpPr>
+        <p:spPr>
+          <a:xfrm>
+            <a:off x="1005840" y="3346704"/>
+            <a:ext cx="10652760" cy="914400"/>
+          </a:xfrm>
+          <a:prstGeom prst="rect">
+            <a:avLst/>
+          </a:prstGeom>
+          <a:solidFill>
+            <a:srgbClr val="FFFFFF"/>
+          </a:solidFill>
+          <a:ln>
+            <a:noFill/>
+          </a:ln>
+          <a:effectLst/>
+        </p:spPr>
+        <p:style>
+          <a:lnRef idx="1">
+            <a:schemeClr val="accent1"/>
+          </a:lnRef>
+          <a:fillRef idx="3">
+            <a:schemeClr val="accent1"/>
+          </a:fillRef>
+          <a:effectRef idx="2">
+            <a:schemeClr val="accent1"/>
+          </a:effectRef>
+          <a:fontRef idx="minor">
+            <a:schemeClr val="lt1"/>
+          </a:fontRef>
+        </p:style>
+        <p:txBody>
+          <a:bodyPr rtlCol="0" anchor="ctr"/>
+          <a:lstStyle/>
+          <a:p>
+            <a:pPr algn="ctr"/>
+          </a:p>
+        </p:txBody>
+      </p:sp>
+      <p:sp>
+        <p:nvSpPr>
+          <p:cNvPr id="21" name="TextBox 20"/>
+          <p:cNvSpPr txBox="1"/>
+          <p:nvPr/>
+        </p:nvSpPr>
+        <p:spPr>
+          <a:xfrm>
+            <a:off x="1188720" y="3419856"/>
+            <a:ext cx="10287000" cy="320040"/>
+          </a:xfrm>
+          <a:prstGeom prst="rect">
+            <a:avLst/>
+          </a:prstGeom>
+          <a:noFill/>
+        </p:spPr>
+        <p:txBody>
+          <a:bodyPr wrap="square">
+            <a:spAutoFit/>
+          </a:bodyPr>
+          <a:lstStyle/>
+          <a:p>
+            <a:pPr algn="l">
+              <a:lnSpc>
+                <a:spcPct val="100000"/>
+              </a:lnSpc>
+            </a:pPr>
+            <a:r>
+              <a:rPr sz="1350" b="1" i="0">
+                <a:solidFill>
+                  <a:srgbClr val="23262B"/>
+                </a:solidFill>
+                <a:latin typeface="맑은 고딕"/>
+              </a:rPr>
+              <a:t>공지·제품 정보 입력</a:t>
+            </a:r>
+          </a:p>
+        </p:txBody>
+      </p:sp>
+      <p:sp>
+        <p:nvSpPr>
+          <p:cNvPr id="22" name="TextBox 21"/>
+          <p:cNvSpPr txBox="1"/>
+          <p:nvPr/>
+        </p:nvSpPr>
+        <p:spPr>
+          <a:xfrm>
+            <a:off x="1188720" y="3730752"/>
+            <a:ext cx="10287000" cy="457200"/>
+          </a:xfrm>
+          <a:prstGeom prst="rect">
+            <a:avLst/>
+          </a:prstGeom>
+          <a:noFill/>
+        </p:spPr>
+        <p:txBody>
+          <a:bodyPr wrap="square">
+            <a:spAutoFit/>
+          </a:bodyPr>
+          <a:lstStyle/>
+          <a:p>
+            <a:pPr algn="l">
+              <a:lnSpc>
+                <a:spcPct val="120000"/>
+              </a:lnSpc>
+            </a:pPr>
+            <a:r>
+              <a:rPr sz="1150" b="0" i="0">
+                <a:solidFill>
+                  <a:srgbClr val="7A828E"/>
+                </a:solidFill>
+                <a:latin typeface="맑은 고딕"/>
+              </a:rPr>
+              <a:t>날짜·가격·주문 방법처럼 AI가 지어내면 안 되는 값은 별도 칸에. 예: 장소 '서초 본점', 문의 '02-6396-3388'.</a:t>
+            </a:r>
+          </a:p>
+        </p:txBody>
+      </p:sp>
+      <p:sp>
+        <p:nvSpPr>
+          <p:cNvPr id="23" name="Rectangle 22"/>
+          <p:cNvSpPr/>
+          <p:nvPr/>
+        </p:nvSpPr>
+        <p:spPr>
+          <a:xfrm>
+            <a:off x="502920" y="4334256"/>
+            <a:ext cx="502920" cy="914400"/>
+          </a:xfrm>
+          <a:prstGeom prst="rect">
+            <a:avLst/>
+          </a:prstGeom>
+          <a:solidFill>
+            <a:srgbClr val="1B3A5C"/>
+          </a:solidFill>
+          <a:ln>
+            <a:noFill/>
+          </a:ln>
+          <a:effectLst/>
+        </p:spPr>
+        <p:style>
+          <a:lnRef idx="1">
+            <a:schemeClr val="accent1"/>
+          </a:lnRef>
+          <a:fillRef idx="3">
+            <a:schemeClr val="accent1"/>
+          </a:fillRef>
+          <a:effectRef idx="2">
+            <a:schemeClr val="accent1"/>
+          </a:effectRef>
+          <a:fontRef idx="minor">
+            <a:schemeClr val="lt1"/>
+          </a:fontRef>
+        </p:style>
+        <p:txBody>
+          <a:bodyPr rtlCol="0" anchor="ctr"/>
+          <a:lstStyle/>
+          <a:p>
+            <a:pPr algn="ctr"/>
+          </a:p>
+        </p:txBody>
+      </p:sp>
+      <p:sp>
+        <p:nvSpPr>
+          <p:cNvPr id="24" name="TextBox 23"/>
+          <p:cNvSpPr txBox="1"/>
+          <p:nvPr/>
+        </p:nvSpPr>
+        <p:spPr>
+          <a:xfrm>
+            <a:off x="502920" y="4334256"/>
+            <a:ext cx="502920" cy="914400"/>
+          </a:xfrm>
+          <a:prstGeom prst="rect">
+            <a:avLst/>
+          </a:prstGeom>
+          <a:noFill/>
+        </p:spPr>
+        <p:txBody>
+          <a:bodyPr wrap="square">
+            <a:spAutoFit/>
+          </a:bodyPr>
+          <a:lstStyle/>
+          <a:p>
+            <a:pPr algn="ctr">
+              <a:lnSpc>
+                <a:spcPct val="100000"/>
+              </a:lnSpc>
+            </a:pPr>
+            <a:r>
+              <a:rPr sz="1900" b="1" i="0">
+                <a:solidFill>
+                  <a:srgbClr val="FFFFFF"/>
+                </a:solidFill>
+                <a:latin typeface="맑은 고딕"/>
+              </a:rPr>
+              <a:t>4</a:t>
+            </a:r>
+          </a:p>
+        </p:txBody>
+      </p:sp>
+      <p:sp>
+        <p:nvSpPr>
+          <p:cNvPr id="25" name="Rectangle 24"/>
+          <p:cNvSpPr/>
+          <p:nvPr/>
+        </p:nvSpPr>
+        <p:spPr>
+          <a:xfrm>
+            <a:off x="1005840" y="4334256"/>
+            <a:ext cx="10652760" cy="914400"/>
+          </a:xfrm>
+          <a:prstGeom prst="rect">
+            <a:avLst/>
+          </a:prstGeom>
+          <a:solidFill>
+            <a:srgbClr val="FFFFFF"/>
+          </a:solidFill>
+          <a:ln>
+            <a:noFill/>
+          </a:ln>
+          <a:effectLst/>
+        </p:spPr>
+        <p:style>
+          <a:lnRef idx="1">
+            <a:schemeClr val="accent1"/>
+          </a:lnRef>
+          <a:fillRef idx="3">
+            <a:schemeClr val="accent1"/>
+          </a:fillRef>
+          <a:effectRef idx="2">
+            <a:schemeClr val="accent1"/>
+          </a:effectRef>
+          <a:fontRef idx="minor">
+            <a:schemeClr val="lt1"/>
+          </a:fontRef>
+        </p:style>
+        <p:txBody>
+          <a:bodyPr rtlCol="0" anchor="ctr"/>
+          <a:lstStyle/>
+          <a:p>
+            <a:pPr algn="ctr"/>
+          </a:p>
+        </p:txBody>
+      </p:sp>
+      <p:sp>
+        <p:nvSpPr>
+          <p:cNvPr id="26" name="TextBox 25"/>
+          <p:cNvSpPr txBox="1"/>
+          <p:nvPr/>
+        </p:nvSpPr>
+        <p:spPr>
+          <a:xfrm>
+            <a:off x="1188720" y="4407408"/>
+            <a:ext cx="10287000" cy="320040"/>
+          </a:xfrm>
+          <a:prstGeom prst="rect">
+            <a:avLst/>
+          </a:prstGeom>
+          <a:noFill/>
+        </p:spPr>
+        <p:txBody>
+          <a:bodyPr wrap="square">
+            <a:spAutoFit/>
+          </a:bodyPr>
+          <a:lstStyle/>
+          <a:p>
+            <a:pPr algn="l">
+              <a:lnSpc>
+                <a:spcPct val="100000"/>
+              </a:lnSpc>
+            </a:pPr>
+            <a:r>
+              <a:rPr sz="1350" b="1" i="0">
+                <a:solidFill>
+                  <a:srgbClr val="23262B"/>
+                </a:solidFill>
+                <a:latin typeface="맑은 고딕"/>
+              </a:rPr>
+              <a:t>사진 첨부 → 🪄 초안 생성</a:t>
+            </a:r>
+          </a:p>
+        </p:txBody>
+      </p:sp>
+      <p:sp>
+        <p:nvSpPr>
+          <p:cNvPr id="27" name="TextBox 26"/>
+          <p:cNvSpPr txBox="1"/>
+          <p:nvPr/>
+        </p:nvSpPr>
+        <p:spPr>
+          <a:xfrm>
+            <a:off x="1188720" y="4718304"/>
+            <a:ext cx="10287000" cy="457200"/>
+          </a:xfrm>
+          <a:prstGeom prst="rect">
+            <a:avLst/>
+          </a:prstGeom>
+          <a:noFill/>
+        </p:spPr>
+        <p:txBody>
+          <a:bodyPr wrap="square">
+            <a:spAutoFit/>
+          </a:bodyPr>
+          <a:lstStyle/>
+          <a:p>
+            <a:pPr algn="l">
+              <a:lnSpc>
+                <a:spcPct val="120000"/>
+              </a:lnSpc>
+            </a:pPr>
+            <a:r>
+              <a:rPr sz="1150" b="0" i="0">
+                <a:solidFill>
+                  <a:srgbClr val="7A828E"/>
+                </a:solidFill>
+                <a:latin typeface="맑은 고딕"/>
+              </a:rPr>
+              <a:t>네이버 본문·인스타 캡션·X 스레드·쇼츠 자막이 한 번에 생성됩니다. 같은 사진 재사용은 분석 토큰 0.</a:t>
+            </a:r>
+          </a:p>
+        </p:txBody>
+      </p:sp>
+      <p:sp>
+        <p:nvSpPr>
+          <p:cNvPr id="28" name="Rectangle 27"/>
+          <p:cNvSpPr/>
+          <p:nvPr/>
+        </p:nvSpPr>
+        <p:spPr>
+          <a:xfrm>
+            <a:off x="502920" y="5321808"/>
+            <a:ext cx="502920" cy="914400"/>
+          </a:xfrm>
+          <a:prstGeom prst="rect">
+            <a:avLst/>
+          </a:prstGeom>
+          <a:solidFill>
+            <a:srgbClr val="1B3A5C"/>
+          </a:solidFill>
+          <a:ln>
+            <a:noFill/>
+          </a:ln>
+          <a:effectLst/>
+        </p:spPr>
+        <p:style>
+          <a:lnRef idx="1">
+            <a:schemeClr val="accent1"/>
+          </a:lnRef>
+          <a:fillRef idx="3">
+            <a:schemeClr val="accent1"/>
+          </a:fillRef>
+          <a:effectRef idx="2">
+            <a:schemeClr val="accent1"/>
+          </a:effectRef>
+          <a:fontRef idx="minor">
+            <a:schemeClr val="lt1"/>
+          </a:fontRef>
+        </p:style>
+        <p:txBody>
+          <a:bodyPr rtlCol="0" anchor="ctr"/>
+          <a:lstStyle/>
+          <a:p>
+            <a:pPr algn="ctr"/>
+          </a:p>
+        </p:txBody>
+      </p:sp>
+      <p:sp>
+        <p:nvSpPr>
+          <p:cNvPr id="29" name="TextBox 28"/>
+          <p:cNvSpPr txBox="1"/>
+          <p:nvPr/>
+        </p:nvSpPr>
+        <p:spPr>
+          <a:xfrm>
+            <a:off x="502920" y="5321808"/>
+            <a:ext cx="502920" cy="914400"/>
+          </a:xfrm>
+          <a:prstGeom prst="rect">
+            <a:avLst/>
+          </a:prstGeom>
+          <a:noFill/>
+        </p:spPr>
+        <p:txBody>
+          <a:bodyPr wrap="square">
+            <a:spAutoFit/>
+          </a:bodyPr>
+          <a:lstStyle/>
+          <a:p>
+            <a:pPr algn="ctr">
+              <a:lnSpc>
+                <a:spcPct val="100000"/>
+              </a:lnSpc>
+            </a:pPr>
+            <a:r>
+              <a:rPr sz="1900" b="1" i="0">
+                <a:solidFill>
+                  <a:srgbClr val="FFFFFF"/>
+                </a:solidFill>
+                <a:latin typeface="맑은 고딕"/>
+              </a:rPr>
+              <a:t>5</a:t>
+            </a:r>
+          </a:p>
+        </p:txBody>
+      </p:sp>
+      <p:sp>
+        <p:nvSpPr>
+          <p:cNvPr id="30" name="Rectangle 29"/>
+          <p:cNvSpPr/>
+          <p:nvPr/>
+        </p:nvSpPr>
+        <p:spPr>
+          <a:xfrm>
+            <a:off x="1005840" y="5321808"/>
+            <a:ext cx="10652760" cy="914400"/>
+          </a:xfrm>
+          <a:prstGeom prst="rect">
+            <a:avLst/>
+          </a:prstGeom>
+          <a:solidFill>
+            <a:srgbClr val="FFFFFF"/>
+          </a:solidFill>
+          <a:ln>
+            <a:noFill/>
+          </a:ln>
+          <a:effectLst/>
+        </p:spPr>
+        <p:style>
+          <a:lnRef idx="1">
+            <a:schemeClr val="accent1"/>
+          </a:lnRef>
+          <a:fillRef idx="3">
+            <a:schemeClr val="accent1"/>
+          </a:fillRef>
+          <a:effectRef idx="2">
+            <a:schemeClr val="accent1"/>
+          </a:effectRef>
+          <a:fontRef idx="minor">
+            <a:schemeClr val="lt1"/>
+          </a:fontRef>
+        </p:style>
+        <p:txBody>
+          <a:bodyPr rtlCol="0" anchor="ctr"/>
+          <a:lstStyle/>
+          <a:p>
+            <a:pPr algn="ctr"/>
+          </a:p>
+        </p:txBody>
+      </p:sp>
+      <p:sp>
+        <p:nvSpPr>
+          <p:cNvPr id="31" name="TextBox 30"/>
+          <p:cNvSpPr txBox="1"/>
+          <p:nvPr/>
+        </p:nvSpPr>
+        <p:spPr>
+          <a:xfrm>
+            <a:off x="1188720" y="5394960"/>
+            <a:ext cx="10287000" cy="320040"/>
+          </a:xfrm>
+          <a:prstGeom prst="rect">
+            <a:avLst/>
+          </a:prstGeom>
+          <a:noFill/>
+        </p:spPr>
+        <p:txBody>
+          <a:bodyPr wrap="square">
+            <a:spAutoFit/>
+          </a:bodyPr>
+          <a:lstStyle/>
+          <a:p>
+            <a:pPr algn="l">
+              <a:lnSpc>
+                <a:spcPct val="100000"/>
+              </a:lnSpc>
+            </a:pPr>
+            <a:r>
+              <a:rPr sz="1350" b="1" i="0">
+                <a:solidFill>
+                  <a:srgbClr val="23262B"/>
+                </a:solidFill>
+                <a:latin typeface="맑은 고딕"/>
+              </a:rPr>
+              <a:t>편집 → 시뮬레이터 확인</a:t>
+            </a:r>
+          </a:p>
+        </p:txBody>
+      </p:sp>
+      <p:sp>
+        <p:nvSpPr>
+          <p:cNvPr id="32" name="TextBox 31"/>
+          <p:cNvSpPr txBox="1"/>
+          <p:nvPr/>
+        </p:nvSpPr>
+        <p:spPr>
+          <a:xfrm>
+            <a:off x="1188720" y="5705856"/>
+            <a:ext cx="10287000" cy="457200"/>
+          </a:xfrm>
+          <a:prstGeom prst="rect">
+            <a:avLst/>
+          </a:prstGeom>
+          <a:noFill/>
+        </p:spPr>
+        <p:txBody>
+          <a:bodyPr wrap="square">
+            <a:spAutoFit/>
+          </a:bodyPr>
+          <a:lstStyle/>
+          <a:p>
+            <a:pPr algn="l">
+              <a:lnSpc>
+                <a:spcPct val="120000"/>
+              </a:lnSpc>
+            </a:pPr>
+            <a:r>
+              <a:rPr sz="1150" b="0" i="0">
+                <a:solidFill>
+                  <a:srgbClr val="7A828E"/>
+                </a:solidFill>
+                <a:latin typeface="맑은 고딕"/>
+              </a:rPr>
+              <a:t>4개 탭에서 직접 고치고, 우측에서 실제 레이아웃(인스타 125자 절단선·쇼츠 데드존 등)으로 검증.</a:t>
+            </a:r>
+          </a:p>
+        </p:txBody>
+      </p:sp>
+    </p:spTree>
+  </p:cSld>
+  <p:clrMapOvr>
+    <a:masterClrMapping/>
+  </p:clrMapOvr>
+</p:sld>
+</file>
+
+<file path=ppt/slides/slide17.xml><?xml version="1.0" encoding="utf-8"?>
+<p:sld xmlns:a="http://schemas.openxmlformats.org/drawingml/2006/main" xmlns:p="http://schemas.openxmlformats.org/presentationml/2006/main" xmlns:r="http://schemas.openxmlformats.org/officeDocument/2006/relationships">
+  <p:cSld>
+    <p:bg>
+      <p:bgPr>
+        <a:solidFill>
+          <a:srgbClr val="F7F5F0"/>
+        </a:solidFill>
+        <a:effectLst/>
+      </p:bgPr>
+    </p:bg>
+    <p:spTree>
+      <p:nvGrpSpPr>
+        <p:cNvPr id="1" name=""/>
+        <p:cNvGrpSpPr/>
+        <p:nvPr/>
+      </p:nvGrpSpPr>
+      <p:grpSpPr/>
+      <p:sp>
+        <p:nvSpPr>
+          <p:cNvPr id="2" name="Rectangle 1"/>
+          <p:cNvSpPr/>
+          <p:nvPr/>
+        </p:nvSpPr>
+        <p:spPr>
+          <a:xfrm>
+            <a:off x="0" y="0"/>
+            <a:ext cx="12191695" cy="1051560"/>
+          </a:xfrm>
+          <a:prstGeom prst="rect">
+            <a:avLst/>
+          </a:prstGeom>
+          <a:solidFill>
+            <a:srgbClr val="122A44"/>
+          </a:solidFill>
+          <a:ln>
+            <a:noFill/>
+          </a:ln>
+          <a:effectLst/>
+        </p:spPr>
+        <p:style>
+          <a:lnRef idx="1">
+            <a:schemeClr val="accent1"/>
+          </a:lnRef>
+          <a:fillRef idx="3">
+            <a:schemeClr val="accent1"/>
+          </a:fillRef>
+          <a:effectRef idx="2">
+            <a:schemeClr val="accent1"/>
+          </a:effectRef>
+          <a:fontRef idx="minor">
+            <a:schemeClr val="lt1"/>
+          </a:fontRef>
+        </p:style>
+        <p:txBody>
+          <a:bodyPr rtlCol="0" anchor="ctr"/>
+          <a:lstStyle/>
+          <a:p>
+            <a:pPr algn="ctr"/>
+          </a:p>
+        </p:txBody>
+      </p:sp>
+      <p:sp>
+        <p:nvSpPr>
+          <p:cNvPr id="3" name="Rectangle 2"/>
+          <p:cNvSpPr/>
+          <p:nvPr/>
+        </p:nvSpPr>
+        <p:spPr>
+          <a:xfrm>
+            <a:off x="0" y="1051560"/>
+            <a:ext cx="12191695" cy="38100"/>
+          </a:xfrm>
+          <a:prstGeom prst="rect">
+            <a:avLst/>
+          </a:prstGeom>
+          <a:solidFill>
+            <a:srgbClr val="1B3A5C"/>
+          </a:solidFill>
+          <a:ln>
+            <a:noFill/>
+          </a:ln>
+          <a:effectLst/>
+        </p:spPr>
+        <p:style>
+          <a:lnRef idx="1">
+            <a:schemeClr val="accent1"/>
+          </a:lnRef>
+          <a:fillRef idx="3">
+            <a:schemeClr val="accent1"/>
+          </a:fillRef>
+          <a:effectRef idx="2">
+            <a:schemeClr val="accent1"/>
+          </a:effectRef>
+          <a:fontRef idx="minor">
+            <a:schemeClr val="lt1"/>
+          </a:fontRef>
+        </p:style>
+        <p:txBody>
+          <a:bodyPr rtlCol="0" anchor="ctr"/>
+          <a:lstStyle/>
+          <a:p>
+            <a:pPr algn="ctr"/>
+          </a:p>
+        </p:txBody>
+      </p:sp>
+      <p:sp>
+        <p:nvSpPr>
+          <p:cNvPr id="4" name="TextBox 3"/>
+          <p:cNvSpPr txBox="1"/>
+          <p:nvPr/>
+        </p:nvSpPr>
+        <p:spPr>
+          <a:xfrm>
+            <a:off x="502920" y="109728"/>
+            <a:ext cx="8686800" cy="292608"/>
+          </a:xfrm>
+          <a:prstGeom prst="rect">
+            <a:avLst/>
+          </a:prstGeom>
+          <a:noFill/>
+        </p:spPr>
+        <p:txBody>
+          <a:bodyPr wrap="square">
+            <a:spAutoFit/>
+          </a:bodyPr>
+          <a:lstStyle/>
+          <a:p>
+            <a:pPr algn="l">
+              <a:lnSpc>
+                <a:spcPct val="100000"/>
+              </a:lnSpc>
+            </a:pPr>
+            <a:r>
+              <a:rPr sz="1200" b="1" i="0">
+                <a:solidFill>
+                  <a:srgbClr val="1B3A5C"/>
+                </a:solidFill>
+                <a:latin typeface="맑은 고딕"/>
+              </a:rPr>
+              <a:t>③ 매일 쓰는 법 · 뉴스와 게시</a:t>
+            </a:r>
+          </a:p>
+        </p:txBody>
+      </p:sp>
+      <p:sp>
+        <p:nvSpPr>
+          <p:cNvPr id="5" name="TextBox 4"/>
+          <p:cNvSpPr txBox="1"/>
+          <p:nvPr/>
+        </p:nvSpPr>
+        <p:spPr>
+          <a:xfrm>
+            <a:off x="457200" y="347472"/>
+            <a:ext cx="10515600" cy="621792"/>
+          </a:xfrm>
+          <a:prstGeom prst="rect">
+            <a:avLst/>
+          </a:prstGeom>
+          <a:noFill/>
+        </p:spPr>
+        <p:txBody>
+          <a:bodyPr wrap="square">
+            <a:spAutoFit/>
+          </a:bodyPr>
+          <a:lstStyle/>
+          <a:p>
+            <a:pPr algn="l">
+              <a:lnSpc>
+                <a:spcPct val="100000"/>
+              </a:lnSpc>
+            </a:pPr>
+            <a:r>
+              <a:rPr sz="2400" b="1" i="0">
+                <a:solidFill>
+                  <a:srgbClr val="FFFFFF"/>
+                </a:solidFill>
+                <a:latin typeface="맑은 고딕"/>
+              </a:rPr>
+              <a:t>뉴스 큐레이션 &amp; 네이버 게시</a:t>
+            </a:r>
+          </a:p>
+        </p:txBody>
+      </p:sp>
+      <p:sp>
+        <p:nvSpPr>
+          <p:cNvPr id="6" name="TextBox 5"/>
+          <p:cNvSpPr txBox="1"/>
+          <p:nvPr/>
+        </p:nvSpPr>
+        <p:spPr>
+          <a:xfrm>
+            <a:off x="457200" y="6492240"/>
+            <a:ext cx="8229600" cy="274320"/>
+          </a:xfrm>
+          <a:prstGeom prst="rect">
+            <a:avLst/>
+          </a:prstGeom>
+          <a:noFill/>
+        </p:spPr>
+        <p:txBody>
+          <a:bodyPr wrap="square">
+            <a:spAutoFit/>
+          </a:bodyPr>
+          <a:lstStyle/>
+          <a:p>
+            <a:pPr algn="l">
+              <a:lnSpc>
+                <a:spcPct val="100000"/>
+              </a:lnSpc>
+            </a:pPr>
+            <a:r>
+              <a:rPr sz="900" b="0" i="0">
+                <a:solidFill>
+                  <a:srgbClr val="7A828E"/>
+                </a:solidFill>
+                <a:latin typeface="맑은 고딕"/>
+              </a:rPr>
+              <a:t>씨제이씨협동조합 OSMU 워크벤치 · 관리자·사용자 매뉴얼</a:t>
+            </a:r>
+          </a:p>
+        </p:txBody>
+      </p:sp>
+      <p:sp>
+        <p:nvSpPr>
+          <p:cNvPr id="7" name="TextBox 6"/>
+          <p:cNvSpPr txBox="1"/>
+          <p:nvPr/>
+        </p:nvSpPr>
+        <p:spPr>
+          <a:xfrm>
+            <a:off x="11094415" y="6492240"/>
+            <a:ext cx="731520" cy="274320"/>
+          </a:xfrm>
+          <a:prstGeom prst="rect">
+            <a:avLst/>
+          </a:prstGeom>
+          <a:noFill/>
+        </p:spPr>
+        <p:txBody>
+          <a:bodyPr wrap="square">
+            <a:spAutoFit/>
+          </a:bodyPr>
+          <a:lstStyle/>
+          <a:p>
+            <a:pPr algn="r">
+              <a:lnSpc>
+                <a:spcPct val="100000"/>
+              </a:lnSpc>
+            </a:pPr>
+            <a:r>
+              <a:rPr sz="900" b="0" i="0">
+                <a:solidFill>
+                  <a:srgbClr val="7A828E"/>
+                </a:solidFill>
+                <a:latin typeface="맑은 고딕"/>
+              </a:rPr>
+              <a:t>16</a:t>
+            </a:r>
+          </a:p>
+        </p:txBody>
+      </p:sp>
+      <p:sp>
+        <p:nvSpPr>
+          <p:cNvPr id="8" name="TextBox 7"/>
+          <p:cNvSpPr txBox="1"/>
+          <p:nvPr/>
+        </p:nvSpPr>
+        <p:spPr>
+          <a:xfrm>
+            <a:off x="502920" y="1280160"/>
+            <a:ext cx="5394960" cy="365760"/>
+          </a:xfrm>
+          <a:prstGeom prst="rect">
+            <a:avLst/>
+          </a:prstGeom>
+          <a:noFill/>
+        </p:spPr>
+        <p:txBody>
+          <a:bodyPr wrap="square">
+            <a:spAutoFit/>
+          </a:bodyPr>
+          <a:lstStyle/>
+          <a:p>
+            <a:pPr algn="l">
+              <a:lnSpc>
+                <a:spcPct val="100000"/>
+              </a:lnSpc>
+            </a:pPr>
+            <a:r>
+              <a:rPr sz="1500" b="1" i="0">
+                <a:solidFill>
+                  <a:srgbClr val="1B3A5C"/>
+                </a:solidFill>
+                <a:latin typeface="맑은 고딕"/>
+              </a:rPr>
+              <a:t>📰 뉴스 큐레이션</a:t>
+            </a:r>
+          </a:p>
+        </p:txBody>
+      </p:sp>
+      <p:sp>
+        <p:nvSpPr>
+          <p:cNvPr id="9" name="TextBox 8"/>
+          <p:cNvSpPr txBox="1"/>
+          <p:nvPr/>
+        </p:nvSpPr>
+        <p:spPr>
+          <a:xfrm>
+            <a:off x="502920" y="1691640"/>
+            <a:ext cx="5394960" cy="2560320"/>
+          </a:xfrm>
+          <a:prstGeom prst="rect">
+            <a:avLst/>
+          </a:prstGeom>
+          <a:noFill/>
+        </p:spPr>
+        <p:txBody>
+          <a:bodyPr wrap="square">
+            <a:spAutoFit/>
+          </a:bodyPr>
+          <a:lstStyle/>
+          <a:p>
+            <a:pPr>
+              <a:lnSpc>
+                <a:spcPct val="125000"/>
+              </a:lnSpc>
+              <a:spcAft>
+                <a:spcPts val="900"/>
+              </a:spcAft>
+            </a:pPr>
+            <a:r>
+              <a:rPr sz="1200" b="0">
+                <a:solidFill>
+                  <a:srgbClr val="23262B"/>
+                </a:solidFill>
+                <a:latin typeface="맑은 고딕"/>
+              </a:rPr>
+              <a:t>▪ 브랜드 키워드로 관련 기사를 찾아 [워크벤치로 전달]합니다.</a:t>
+            </a:r>
+          </a:p>
+          <a:p>
+            <a:pPr>
+              <a:lnSpc>
+                <a:spcPct val="125000"/>
+              </a:lnSpc>
+              <a:spcAft>
+                <a:spcPts val="900"/>
+              </a:spcAft>
+            </a:pPr>
+            <a:r>
+              <a:rPr sz="1200" b="1">
+                <a:solidFill>
+                  <a:srgbClr val="23262B"/>
+                </a:solidFill>
+                <a:latin typeface="맑은 고딕"/>
+              </a:rPr>
+              <a:t>▪ Google 뉴스 RSS + 네이버 뉴스 직접 조회 — API 키 없이 완전 무료입니다.</a:t>
+            </a:r>
+          </a:p>
+          <a:p>
+            <a:pPr>
+              <a:lnSpc>
+                <a:spcPct val="125000"/>
+              </a:lnSpc>
+              <a:spcAft>
+                <a:spcPts val="900"/>
+              </a:spcAft>
+            </a:pPr>
+            <a:r>
+              <a:rPr sz="1200" b="0">
+                <a:solidFill>
+                  <a:srgbClr val="23262B"/>
+                </a:solidFill>
+                <a:latin typeface="맑은 고딕"/>
+              </a:rPr>
+              <a:t>▪ 뉴스 기반 글은 본문 끝에 원문 링크가 자동으로 붙습니다.</a:t>
+            </a:r>
+          </a:p>
+          <a:p>
+            <a:pPr>
+              <a:lnSpc>
+                <a:spcPct val="125000"/>
+              </a:lnSpc>
+              <a:spcAft>
+                <a:spcPts val="900"/>
+              </a:spcAft>
+            </a:pPr>
+            <a:r>
+              <a:rPr sz="1200" b="0">
+                <a:solidFill>
+                  <a:srgbClr val="23262B"/>
+                </a:solidFill>
+                <a:latin typeface="맑은 고딕"/>
+              </a:rPr>
+              <a:t>▪ 추가 검색어 예시: '탈모 관리, 항암가발 지원, 소상공인 창업교육'.</a:t>
+            </a:r>
+          </a:p>
+        </p:txBody>
+      </p:sp>
+      <p:sp>
+        <p:nvSpPr>
+          <p:cNvPr id="10" name="TextBox 9"/>
+          <p:cNvSpPr txBox="1"/>
+          <p:nvPr/>
+        </p:nvSpPr>
+        <p:spPr>
+          <a:xfrm>
+            <a:off x="6263640" y="1280160"/>
+            <a:ext cx="5394960" cy="365760"/>
+          </a:xfrm>
+          <a:prstGeom prst="rect">
+            <a:avLst/>
+          </a:prstGeom>
+          <a:noFill/>
+        </p:spPr>
+        <p:txBody>
+          <a:bodyPr wrap="square">
+            <a:spAutoFit/>
+          </a:bodyPr>
+          <a:lstStyle/>
+          <a:p>
+            <a:pPr algn="l">
+              <a:lnSpc>
+                <a:spcPct val="100000"/>
+              </a:lnSpc>
+            </a:pPr>
+            <a:r>
+              <a:rPr sz="1500" b="1" i="0">
+                <a:solidFill>
+                  <a:srgbClr val="1B3A5C"/>
+                </a:solidFill>
+                <a:latin typeface="맑은 고딕"/>
+              </a:rPr>
+              <a:t>🚀 네이버 게시 (반자동)</a:t>
+            </a:r>
+          </a:p>
+        </p:txBody>
+      </p:sp>
+      <p:sp>
+        <p:nvSpPr>
+          <p:cNvPr id="11" name="TextBox 10"/>
+          <p:cNvSpPr txBox="1"/>
+          <p:nvPr/>
+        </p:nvSpPr>
+        <p:spPr>
+          <a:xfrm>
+            <a:off x="6263640" y="1691640"/>
+            <a:ext cx="5394960" cy="2560320"/>
+          </a:xfrm>
+          <a:prstGeom prst="rect">
+            <a:avLst/>
+          </a:prstGeom>
+          <a:noFill/>
+        </p:spPr>
+        <p:txBody>
+          <a:bodyPr wrap="square">
+            <a:spAutoFit/>
+          </a:bodyPr>
+          <a:lstStyle/>
+          <a:p>
+            <a:pPr>
+              <a:lnSpc>
+                <a:spcPct val="125000"/>
+              </a:lnSpc>
+              <a:spcAft>
+                <a:spcPts val="900"/>
+              </a:spcAft>
+            </a:pPr>
+            <a:r>
+              <a:rPr sz="1200" b="0">
+                <a:solidFill>
+                  <a:srgbClr val="23262B"/>
+                </a:solidFill>
+                <a:latin typeface="맑은 고딕"/>
+              </a:rPr>
+              <a:t>▪ ① [네이버 로그인]으로 세션 저장 → ② [지금 게시] → Chrome 자동 입력.</a:t>
+            </a:r>
+          </a:p>
+          <a:p>
+            <a:pPr>
+              <a:lnSpc>
+                <a:spcPct val="125000"/>
+              </a:lnSpc>
+              <a:spcAft>
+                <a:spcPts val="900"/>
+              </a:spcAft>
+            </a:pPr>
+            <a:r>
+              <a:rPr sz="1200" b="1">
+                <a:solidFill>
+                  <a:srgbClr val="23262B"/>
+                </a:solidFill>
+                <a:latin typeface="맑은 고딕"/>
+              </a:rPr>
+              <a:t>▪ ③ 마지막 [발행] 클릭은 항상 사람이 직접 — 봇 차단을 피하기 위한 설계입니다.</a:t>
+            </a:r>
+          </a:p>
+          <a:p>
+            <a:pPr>
+              <a:lnSpc>
+                <a:spcPct val="125000"/>
+              </a:lnSpc>
+              <a:spcAft>
+                <a:spcPts val="900"/>
+              </a:spcAft>
+            </a:pPr>
+            <a:r>
+              <a:rPr sz="1200" b="0">
+                <a:solidFill>
+                  <a:srgbClr val="23262B"/>
+                </a:solidFill>
+                <a:latin typeface="맑은 고딕"/>
+              </a:rPr>
+              <a:t>▪ 직접 붙여넣어 발행했다면 [✅ 수동으로 완료]로 목록을 정리하세요.</a:t>
+            </a:r>
+          </a:p>
+          <a:p>
+            <a:pPr>
+              <a:lnSpc>
+                <a:spcPct val="125000"/>
+              </a:lnSpc>
+              <a:spcAft>
+                <a:spcPts val="900"/>
+              </a:spcAft>
+            </a:pPr>
+            <a:r>
+              <a:rPr sz="1200" b="0">
+                <a:solidFill>
+                  <a:srgbClr val="23262B"/>
+                </a:solidFill>
+                <a:latin typeface="맑은 고딕"/>
+              </a:rPr>
+              <a:t>▪ 인스타/X/쇼츠는 자동 게시가 없어 [📄 콘텐츠 보기]에서 복사해 직접 올립니다.</a:t>
+            </a:r>
+          </a:p>
+        </p:txBody>
+      </p:sp>
+      <p:sp>
+        <p:nvSpPr>
+          <p:cNvPr id="12" name="Rectangle 11"/>
+          <p:cNvSpPr/>
+          <p:nvPr/>
+        </p:nvSpPr>
+        <p:spPr>
+          <a:xfrm>
+            <a:off x="502920" y="4572000"/>
+            <a:ext cx="11155680" cy="1371600"/>
+          </a:xfrm>
+          <a:prstGeom prst="rect">
+            <a:avLst/>
+          </a:prstGeom>
+          <a:solidFill>
+            <a:srgbClr val="F5EDD7"/>
+          </a:solidFill>
+          <a:ln>
+            <a:noFill/>
+          </a:ln>
+          <a:effectLst/>
+        </p:spPr>
+        <p:style>
+          <a:lnRef idx="1">
+            <a:schemeClr val="accent1"/>
+          </a:lnRef>
+          <a:fillRef idx="3">
+            <a:schemeClr val="accent1"/>
+          </a:fillRef>
+          <a:effectRef idx="2">
+            <a:schemeClr val="accent1"/>
+          </a:effectRef>
+          <a:fontRef idx="minor">
+            <a:schemeClr val="lt1"/>
+          </a:fontRef>
+        </p:style>
+        <p:txBody>
+          <a:bodyPr rtlCol="0" anchor="ctr"/>
+          <a:lstStyle/>
+          <a:p>
+            <a:pPr algn="ctr"/>
+          </a:p>
+        </p:txBody>
+      </p:sp>
+      <p:sp>
+        <p:nvSpPr>
+          <p:cNvPr id="13" name="TextBox 12"/>
+          <p:cNvSpPr txBox="1"/>
+          <p:nvPr/>
+        </p:nvSpPr>
+        <p:spPr>
+          <a:xfrm>
+            <a:off x="777240" y="4754880"/>
+            <a:ext cx="10607040" cy="365760"/>
+          </a:xfrm>
+          <a:prstGeom prst="rect">
+            <a:avLst/>
+          </a:prstGeom>
+          <a:noFill/>
+        </p:spPr>
+        <p:txBody>
+          <a:bodyPr wrap="square">
+            <a:spAutoFit/>
+          </a:bodyPr>
+          <a:lstStyle/>
+          <a:p>
+            <a:pPr algn="l">
+              <a:lnSpc>
+                <a:spcPct val="100000"/>
+              </a:lnSpc>
+            </a:pPr>
+            <a:r>
+              <a:rPr sz="1350" b="1" i="0">
+                <a:solidFill>
+                  <a:srgbClr val="23262B"/>
+                </a:solidFill>
+                <a:latin typeface="맑은 고딕"/>
+              </a:rPr>
+              <a:t>게시 대상 블로그</a:t>
+            </a:r>
+          </a:p>
+        </p:txBody>
+      </p:sp>
+      <p:sp>
+        <p:nvSpPr>
+          <p:cNvPr id="14" name="TextBox 13"/>
+          <p:cNvSpPr txBox="1"/>
+          <p:nvPr/>
+        </p:nvSpPr>
+        <p:spPr>
+          <a:xfrm>
+            <a:off x="777240" y="5120640"/>
+            <a:ext cx="10607040" cy="685800"/>
+          </a:xfrm>
+          <a:prstGeom prst="rect">
+            <a:avLst/>
+          </a:prstGeom>
+          <a:noFill/>
+        </p:spPr>
+        <p:txBody>
+          <a:bodyPr wrap="square">
+            <a:spAutoFit/>
+          </a:bodyPr>
+          <a:lstStyle/>
+          <a:p>
+            <a:pPr algn="l">
+              <a:lnSpc>
+                <a:spcPct val="125000"/>
+              </a:lnSpc>
+            </a:pPr>
+            <a:r>
+              <a:rPr sz="1200" b="0" i="0">
+                <a:solidFill>
+                  <a:srgbClr val="23262B"/>
+                </a:solidFill>
+                <a:latin typeface="맑은 고딕"/>
+              </a:rPr>
+              <a:t>현재 blog.naver.com/jwl1722 로 연결됩니다. 바꾸려면 🧵 브랜드 킷의 '네이버 블로그 아이디'를 고치세요.</a:t>
+            </a:r>
+          </a:p>
+        </p:txBody>
+      </p:sp>
+    </p:spTree>
+  </p:cSld>
+  <p:clrMapOvr>
+    <a:masterClrMapping/>
+  </p:clrMapOvr>
+</p:sld>
+</file>
+
+<file path=ppt/slides/slide18.xml><?xml version="1.0" encoding="utf-8"?>
+<p:sld xmlns:a="http://schemas.openxmlformats.org/drawingml/2006/main" xmlns:p="http://schemas.openxmlformats.org/presentationml/2006/main" xmlns:r="http://schemas.openxmlformats.org/officeDocument/2006/relationships">
+  <p:cSld>
+    <p:bg>
+      <p:bgPr>
+        <a:solidFill>
+          <a:srgbClr val="F7F5F0"/>
+        </a:solidFill>
+        <a:effectLst/>
+      </p:bgPr>
+    </p:bg>
+    <p:spTree>
+      <p:nvGrpSpPr>
+        <p:cNvPr id="1" name=""/>
+        <p:cNvGrpSpPr/>
+        <p:nvPr/>
+      </p:nvGrpSpPr>
+      <p:grpSpPr/>
+      <p:sp>
+        <p:nvSpPr>
+          <p:cNvPr id="2" name="Rectangle 1"/>
+          <p:cNvSpPr/>
+          <p:nvPr/>
+        </p:nvSpPr>
+        <p:spPr>
+          <a:xfrm>
+            <a:off x="0" y="0"/>
+            <a:ext cx="12191695" cy="1051560"/>
+          </a:xfrm>
+          <a:prstGeom prst="rect">
+            <a:avLst/>
+          </a:prstGeom>
+          <a:solidFill>
+            <a:srgbClr val="122A44"/>
+          </a:solidFill>
+          <a:ln>
+            <a:noFill/>
+          </a:ln>
+          <a:effectLst/>
+        </p:spPr>
+        <p:style>
+          <a:lnRef idx="1">
+            <a:schemeClr val="accent1"/>
+          </a:lnRef>
+          <a:fillRef idx="3">
+            <a:schemeClr val="accent1"/>
+          </a:fillRef>
+          <a:effectRef idx="2">
+            <a:schemeClr val="accent1"/>
+          </a:effectRef>
+          <a:fontRef idx="minor">
+            <a:schemeClr val="lt1"/>
+          </a:fontRef>
+        </p:style>
+        <p:txBody>
+          <a:bodyPr rtlCol="0" anchor="ctr"/>
+          <a:lstStyle/>
+          <a:p>
+            <a:pPr algn="ctr"/>
+          </a:p>
+        </p:txBody>
+      </p:sp>
+      <p:sp>
+        <p:nvSpPr>
+          <p:cNvPr id="3" name="Rectangle 2"/>
+          <p:cNvSpPr/>
+          <p:nvPr/>
+        </p:nvSpPr>
+        <p:spPr>
+          <a:xfrm>
+            <a:off x="0" y="1051560"/>
+            <a:ext cx="12191695" cy="38100"/>
+          </a:xfrm>
+          <a:prstGeom prst="rect">
+            <a:avLst/>
+          </a:prstGeom>
+          <a:solidFill>
+            <a:srgbClr val="1B3A5C"/>
+          </a:solidFill>
+          <a:ln>
+            <a:noFill/>
+          </a:ln>
+          <a:effectLst/>
+        </p:spPr>
+        <p:style>
+          <a:lnRef idx="1">
+            <a:schemeClr val="accent1"/>
+          </a:lnRef>
+          <a:fillRef idx="3">
+            <a:schemeClr val="accent1"/>
+          </a:fillRef>
+          <a:effectRef idx="2">
+            <a:schemeClr val="accent1"/>
+          </a:effectRef>
+          <a:fontRef idx="minor">
+            <a:schemeClr val="lt1"/>
+          </a:fontRef>
+        </p:style>
+        <p:txBody>
+          <a:bodyPr rtlCol="0" anchor="ctr"/>
+          <a:lstStyle/>
+          <a:p>
+            <a:pPr algn="ctr"/>
+          </a:p>
+        </p:txBody>
+      </p:sp>
+      <p:sp>
+        <p:nvSpPr>
+          <p:cNvPr id="4" name="TextBox 3"/>
+          <p:cNvSpPr txBox="1"/>
+          <p:nvPr/>
+        </p:nvSpPr>
+        <p:spPr>
+          <a:xfrm>
+            <a:off x="502920" y="109728"/>
+            <a:ext cx="8686800" cy="292608"/>
+          </a:xfrm>
+          <a:prstGeom prst="rect">
+            <a:avLst/>
+          </a:prstGeom>
+          <a:noFill/>
+        </p:spPr>
+        <p:txBody>
+          <a:bodyPr wrap="square">
+            <a:spAutoFit/>
+          </a:bodyPr>
+          <a:lstStyle/>
+          <a:p>
+            <a:pPr algn="l">
+              <a:lnSpc>
+                <a:spcPct val="100000"/>
+              </a:lnSpc>
+            </a:pPr>
+            <a:r>
+              <a:rPr sz="1200" b="1" i="0">
+                <a:solidFill>
+                  <a:srgbClr val="1B3A5C"/>
+                </a:solidFill>
+                <a:latin typeface="맑은 고딕"/>
+              </a:rPr>
+              <a:t>③ 매일 쓰는 법 · 브랜드 킷</a:t>
+            </a:r>
+          </a:p>
+        </p:txBody>
+      </p:sp>
+      <p:sp>
+        <p:nvSpPr>
+          <p:cNvPr id="5" name="TextBox 4"/>
+          <p:cNvSpPr txBox="1"/>
+          <p:nvPr/>
+        </p:nvSpPr>
+        <p:spPr>
+          <a:xfrm>
+            <a:off x="457200" y="347472"/>
+            <a:ext cx="10515600" cy="621792"/>
+          </a:xfrm>
+          <a:prstGeom prst="rect">
+            <a:avLst/>
+          </a:prstGeom>
+          <a:noFill/>
+        </p:spPr>
+        <p:txBody>
+          <a:bodyPr wrap="square">
+            <a:spAutoFit/>
+          </a:bodyPr>
+          <a:lstStyle/>
+          <a:p>
+            <a:pPr algn="l">
+              <a:lnSpc>
+                <a:spcPct val="100000"/>
+              </a:lnSpc>
+            </a:pPr>
+            <a:r>
+              <a:rPr sz="2400" b="1" i="0">
+                <a:solidFill>
+                  <a:srgbClr val="FFFFFF"/>
+                </a:solidFill>
+                <a:latin typeface="맑은 고딕"/>
+              </a:rPr>
+              <a:t>🧵 브랜드 킷 — AI의 두뇌를 직접 관리</a:t>
+            </a:r>
+          </a:p>
+        </p:txBody>
+      </p:sp>
+      <p:sp>
+        <p:nvSpPr>
+          <p:cNvPr id="6" name="TextBox 5"/>
+          <p:cNvSpPr txBox="1"/>
+          <p:nvPr/>
+        </p:nvSpPr>
+        <p:spPr>
+          <a:xfrm>
+            <a:off x="457200" y="6492240"/>
+            <a:ext cx="8229600" cy="274320"/>
+          </a:xfrm>
+          <a:prstGeom prst="rect">
+            <a:avLst/>
+          </a:prstGeom>
+          <a:noFill/>
+        </p:spPr>
+        <p:txBody>
+          <a:bodyPr wrap="square">
+            <a:spAutoFit/>
+          </a:bodyPr>
+          <a:lstStyle/>
+          <a:p>
+            <a:pPr algn="l">
+              <a:lnSpc>
+                <a:spcPct val="100000"/>
+              </a:lnSpc>
+            </a:pPr>
+            <a:r>
+              <a:rPr sz="900" b="0" i="0">
+                <a:solidFill>
+                  <a:srgbClr val="7A828E"/>
+                </a:solidFill>
+                <a:latin typeface="맑은 고딕"/>
+              </a:rPr>
+              <a:t>씨제이씨협동조합 OSMU 워크벤치 · 관리자·사용자 매뉴얼</a:t>
+            </a:r>
+          </a:p>
+        </p:txBody>
+      </p:sp>
+      <p:sp>
+        <p:nvSpPr>
+          <p:cNvPr id="7" name="TextBox 6"/>
+          <p:cNvSpPr txBox="1"/>
+          <p:nvPr/>
+        </p:nvSpPr>
+        <p:spPr>
+          <a:xfrm>
+            <a:off x="11094415" y="6492240"/>
+            <a:ext cx="731520" cy="274320"/>
+          </a:xfrm>
+          <a:prstGeom prst="rect">
+            <a:avLst/>
+          </a:prstGeom>
+          <a:noFill/>
+        </p:spPr>
+        <p:txBody>
+          <a:bodyPr wrap="square">
+            <a:spAutoFit/>
+          </a:bodyPr>
+          <a:lstStyle/>
+          <a:p>
+            <a:pPr algn="r">
+              <a:lnSpc>
+                <a:spcPct val="100000"/>
+              </a:lnSpc>
+            </a:pPr>
+            <a:r>
+              <a:rPr sz="900" b="0" i="0">
+                <a:solidFill>
+                  <a:srgbClr val="7A828E"/>
+                </a:solidFill>
+                <a:latin typeface="맑은 고딕"/>
+              </a:rPr>
+              <a:t>17</a:t>
             </a:r>
           </a:p>
         </p:txBody>
@@ -8715,7 +10221,7 @@
 </p:sld>
 </file>
 
-<file path=ppt/slides/slide16.xml><?xml version="1.0" encoding="utf-8"?>
+<file path=ppt/slides/slide19.xml><?xml version="1.0" encoding="utf-8"?>
 <p:sld xmlns:a="http://schemas.openxmlformats.org/drawingml/2006/main" xmlns:p="http://schemas.openxmlformats.org/presentationml/2006/main" xmlns:r="http://schemas.openxmlformats.org/officeDocument/2006/relationships">
   <p:cSld>
     <p:bg>
@@ -8972,7 +10478,7 @@
                 </a:solidFill>
                 <a:latin typeface="맑은 고딕"/>
               </a:rPr>
-              <a:t>15</a:t>
+              <a:t>18</a:t>
             </a:r>
           </a:p>
         </p:txBody>
@@ -9521,7 +11027,7 @@
 </p:sld>
 </file>
 
-<file path=ppt/slides/slide17.xml><?xml version="1.0" encoding="utf-8"?>
+<file path=ppt/slides/slide2.xml><?xml version="1.0" encoding="utf-8"?>
 <p:sld xmlns:a="http://schemas.openxmlformats.org/drawingml/2006/main" xmlns:p="http://schemas.openxmlformats.org/presentationml/2006/main" xmlns:r="http://schemas.openxmlformats.org/officeDocument/2006/relationships">
   <p:cSld>
     <p:bg>
@@ -9661,7 +11167,7 @@
                 </a:solidFill>
                 <a:latin typeface="맑은 고딕"/>
               </a:rPr>
-              <a:t>④ 안전 · 비용</a:t>
+              <a:t>CONTENTS</a:t>
             </a:r>
           </a:p>
         </p:txBody>
@@ -9700,7 +11206,7 @@
                 </a:solidFill>
                 <a:latin typeface="맑은 고딕"/>
               </a:rPr>
-              <a:t>어디서 돈이 나가나 — 과금 지점 정리</a:t>
+              <a:t>목차</a:t>
             </a:r>
           </a:p>
         </p:txBody>
@@ -9778,7 +11284,1273 @@
                 </a:solidFill>
                 <a:latin typeface="맑은 고딕"/>
               </a:rPr>
-              <a:t>16</a:t>
+              <a:t>01</a:t>
+            </a:r>
+          </a:p>
+        </p:txBody>
+      </p:sp>
+      <p:sp>
+        <p:nvSpPr>
+          <p:cNvPr id="8" name="Rectangle 7"/>
+          <p:cNvSpPr/>
+          <p:nvPr/>
+        </p:nvSpPr>
+        <p:spPr>
+          <a:xfrm>
+            <a:off x="502920" y="1280160"/>
+            <a:ext cx="11155680" cy="1143000"/>
+          </a:xfrm>
+          <a:prstGeom prst="rect">
+            <a:avLst/>
+          </a:prstGeom>
+          <a:solidFill>
+            <a:srgbClr val="FFFFFF"/>
+          </a:solidFill>
+          <a:ln>
+            <a:noFill/>
+          </a:ln>
+          <a:effectLst/>
+        </p:spPr>
+        <p:style>
+          <a:lnRef idx="1">
+            <a:schemeClr val="accent1"/>
+          </a:lnRef>
+          <a:fillRef idx="3">
+            <a:schemeClr val="accent1"/>
+          </a:fillRef>
+          <a:effectRef idx="2">
+            <a:schemeClr val="accent1"/>
+          </a:effectRef>
+          <a:fontRef idx="minor">
+            <a:schemeClr val="lt1"/>
+          </a:fontRef>
+        </p:style>
+        <p:txBody>
+          <a:bodyPr rtlCol="0" anchor="ctr"/>
+          <a:lstStyle/>
+          <a:p>
+            <a:pPr algn="ctr"/>
+          </a:p>
+        </p:txBody>
+      </p:sp>
+      <p:sp>
+        <p:nvSpPr>
+          <p:cNvPr id="9" name="Rectangle 8"/>
+          <p:cNvSpPr/>
+          <p:nvPr/>
+        </p:nvSpPr>
+        <p:spPr>
+          <a:xfrm>
+            <a:off x="502920" y="1280160"/>
+            <a:ext cx="109728" cy="1143000"/>
+          </a:xfrm>
+          <a:prstGeom prst="rect">
+            <a:avLst/>
+          </a:prstGeom>
+          <a:solidFill>
+            <a:srgbClr val="C9A227"/>
+          </a:solidFill>
+          <a:ln>
+            <a:noFill/>
+          </a:ln>
+          <a:effectLst/>
+        </p:spPr>
+        <p:style>
+          <a:lnRef idx="1">
+            <a:schemeClr val="accent1"/>
+          </a:lnRef>
+          <a:fillRef idx="3">
+            <a:schemeClr val="accent1"/>
+          </a:fillRef>
+          <a:effectRef idx="2">
+            <a:schemeClr val="accent1"/>
+          </a:effectRef>
+          <a:fontRef idx="minor">
+            <a:schemeClr val="lt1"/>
+          </a:fontRef>
+        </p:style>
+        <p:txBody>
+          <a:bodyPr rtlCol="0" anchor="ctr"/>
+          <a:lstStyle/>
+          <a:p>
+            <a:pPr algn="ctr"/>
+          </a:p>
+        </p:txBody>
+      </p:sp>
+      <p:sp>
+        <p:nvSpPr>
+          <p:cNvPr id="10" name="Rounded Rectangle 9"/>
+          <p:cNvSpPr/>
+          <p:nvPr/>
+        </p:nvSpPr>
+        <p:spPr>
+          <a:xfrm>
+            <a:off x="777240" y="1645920"/>
+            <a:ext cx="1005840" cy="402336"/>
+          </a:xfrm>
+          <a:prstGeom prst="roundRect">
+            <a:avLst/>
+          </a:prstGeom>
+          <a:solidFill>
+            <a:srgbClr val="C9A227"/>
+          </a:solidFill>
+          <a:ln>
+            <a:noFill/>
+          </a:ln>
+          <a:effectLst/>
+        </p:spPr>
+        <p:style>
+          <a:lnRef idx="1">
+            <a:schemeClr val="accent1"/>
+          </a:lnRef>
+          <a:fillRef idx="3">
+            <a:schemeClr val="accent1"/>
+          </a:fillRef>
+          <a:effectRef idx="2">
+            <a:schemeClr val="accent1"/>
+          </a:effectRef>
+          <a:fontRef idx="minor">
+            <a:schemeClr val="lt1"/>
+          </a:fontRef>
+        </p:style>
+        <p:txBody>
+          <a:bodyPr rtlCol="0" anchor="ctr"/>
+          <a:lstStyle/>
+          <a:p>
+            <a:pPr algn="ctr"/>
+          </a:p>
+        </p:txBody>
+      </p:sp>
+      <p:sp>
+        <p:nvSpPr>
+          <p:cNvPr id="11" name="TextBox 10"/>
+          <p:cNvSpPr txBox="1"/>
+          <p:nvPr/>
+        </p:nvSpPr>
+        <p:spPr>
+          <a:xfrm>
+            <a:off x="777240" y="1645920"/>
+            <a:ext cx="1005840" cy="402336"/>
+          </a:xfrm>
+          <a:prstGeom prst="rect">
+            <a:avLst/>
+          </a:prstGeom>
+          <a:noFill/>
+        </p:spPr>
+        <p:txBody>
+          <a:bodyPr wrap="square">
+            <a:spAutoFit/>
+          </a:bodyPr>
+          <a:lstStyle/>
+          <a:p>
+            <a:pPr algn="ctr">
+              <a:lnSpc>
+                <a:spcPct val="100000"/>
+              </a:lnSpc>
+            </a:pPr>
+            <a:r>
+              <a:rPr sz="1050" b="1" i="0">
+                <a:solidFill>
+                  <a:srgbClr val="FFFFFF"/>
+                </a:solidFill>
+                <a:latin typeface="맑은 고딕"/>
+              </a:rPr>
+              <a:t>준비</a:t>
+            </a:r>
+          </a:p>
+        </p:txBody>
+      </p:sp>
+      <p:sp>
+        <p:nvSpPr>
+          <p:cNvPr id="12" name="TextBox 11"/>
+          <p:cNvSpPr txBox="1"/>
+          <p:nvPr/>
+        </p:nvSpPr>
+        <p:spPr>
+          <a:xfrm>
+            <a:off x="2011680" y="1389888"/>
+            <a:ext cx="8778240" cy="365760"/>
+          </a:xfrm>
+          <a:prstGeom prst="rect">
+            <a:avLst/>
+          </a:prstGeom>
+          <a:noFill/>
+        </p:spPr>
+        <p:txBody>
+          <a:bodyPr wrap="square">
+            <a:spAutoFit/>
+          </a:bodyPr>
+          <a:lstStyle/>
+          <a:p>
+            <a:pPr algn="l">
+              <a:lnSpc>
+                <a:spcPct val="100000"/>
+              </a:lnSpc>
+            </a:pPr>
+            <a:r>
+              <a:rPr sz="1650" b="1" i="0">
+                <a:solidFill>
+                  <a:srgbClr val="23262B"/>
+                </a:solidFill>
+                <a:latin typeface="맑은 고딕"/>
+              </a:rPr>
+              <a:t>① 초기 설정 — 키 3종 등록</a:t>
+            </a:r>
+          </a:p>
+        </p:txBody>
+      </p:sp>
+      <p:sp>
+        <p:nvSpPr>
+          <p:cNvPr id="13" name="TextBox 12"/>
+          <p:cNvSpPr txBox="1"/>
+          <p:nvPr/>
+        </p:nvSpPr>
+        <p:spPr>
+          <a:xfrm>
+            <a:off x="2011680" y="1828800"/>
+            <a:ext cx="8778240" cy="457200"/>
+          </a:xfrm>
+          <a:prstGeom prst="rect">
+            <a:avLst/>
+          </a:prstGeom>
+          <a:noFill/>
+        </p:spPr>
+        <p:txBody>
+          <a:bodyPr wrap="square">
+            <a:spAutoFit/>
+          </a:bodyPr>
+          <a:lstStyle/>
+          <a:p>
+            <a:pPr algn="l">
+              <a:lnSpc>
+                <a:spcPct val="100000"/>
+              </a:lnSpc>
+            </a:pPr>
+            <a:r>
+              <a:rPr sz="1150" b="0" i="0">
+                <a:solidFill>
+                  <a:srgbClr val="7A828E"/>
+                </a:solidFill>
+                <a:latin typeface="맑은 고딕"/>
+              </a:rPr>
+              <a:t>LLM 1개 + 네이버 API 2개. 한 번만 하면 됩니다</a:t>
+            </a:r>
+          </a:p>
+        </p:txBody>
+      </p:sp>
+      <p:sp>
+        <p:nvSpPr>
+          <p:cNvPr id="14" name="Rectangle 13"/>
+          <p:cNvSpPr/>
+          <p:nvPr/>
+        </p:nvSpPr>
+        <p:spPr>
+          <a:xfrm>
+            <a:off x="502920" y="2560320"/>
+            <a:ext cx="11155680" cy="1143000"/>
+          </a:xfrm>
+          <a:prstGeom prst="rect">
+            <a:avLst/>
+          </a:prstGeom>
+          <a:solidFill>
+            <a:srgbClr val="FFFFFF"/>
+          </a:solidFill>
+          <a:ln>
+            <a:noFill/>
+          </a:ln>
+          <a:effectLst/>
+        </p:spPr>
+        <p:style>
+          <a:lnRef idx="1">
+            <a:schemeClr val="accent1"/>
+          </a:lnRef>
+          <a:fillRef idx="3">
+            <a:schemeClr val="accent1"/>
+          </a:fillRef>
+          <a:effectRef idx="2">
+            <a:schemeClr val="accent1"/>
+          </a:effectRef>
+          <a:fontRef idx="minor">
+            <a:schemeClr val="lt1"/>
+          </a:fontRef>
+        </p:style>
+        <p:txBody>
+          <a:bodyPr rtlCol="0" anchor="ctr"/>
+          <a:lstStyle/>
+          <a:p>
+            <a:pPr algn="ctr"/>
+          </a:p>
+        </p:txBody>
+      </p:sp>
+      <p:sp>
+        <p:nvSpPr>
+          <p:cNvPr id="15" name="Rectangle 14"/>
+          <p:cNvSpPr/>
+          <p:nvPr/>
+        </p:nvSpPr>
+        <p:spPr>
+          <a:xfrm>
+            <a:off x="502920" y="2560320"/>
+            <a:ext cx="109728" cy="1143000"/>
+          </a:xfrm>
+          <a:prstGeom prst="rect">
+            <a:avLst/>
+          </a:prstGeom>
+          <a:solidFill>
+            <a:srgbClr val="1B3A5C"/>
+          </a:solidFill>
+          <a:ln>
+            <a:noFill/>
+          </a:ln>
+          <a:effectLst/>
+        </p:spPr>
+        <p:style>
+          <a:lnRef idx="1">
+            <a:schemeClr val="accent1"/>
+          </a:lnRef>
+          <a:fillRef idx="3">
+            <a:schemeClr val="accent1"/>
+          </a:fillRef>
+          <a:effectRef idx="2">
+            <a:schemeClr val="accent1"/>
+          </a:effectRef>
+          <a:fontRef idx="minor">
+            <a:schemeClr val="lt1"/>
+          </a:fontRef>
+        </p:style>
+        <p:txBody>
+          <a:bodyPr rtlCol="0" anchor="ctr"/>
+          <a:lstStyle/>
+          <a:p>
+            <a:pPr algn="ctr"/>
+          </a:p>
+        </p:txBody>
+      </p:sp>
+      <p:sp>
+        <p:nvSpPr>
+          <p:cNvPr id="16" name="Rounded Rectangle 15"/>
+          <p:cNvSpPr/>
+          <p:nvPr/>
+        </p:nvSpPr>
+        <p:spPr>
+          <a:xfrm>
+            <a:off x="777240" y="2926080"/>
+            <a:ext cx="1005840" cy="402336"/>
+          </a:xfrm>
+          <a:prstGeom prst="roundRect">
+            <a:avLst/>
+          </a:prstGeom>
+          <a:solidFill>
+            <a:srgbClr val="1B3A5C"/>
+          </a:solidFill>
+          <a:ln>
+            <a:noFill/>
+          </a:ln>
+          <a:effectLst/>
+        </p:spPr>
+        <p:style>
+          <a:lnRef idx="1">
+            <a:schemeClr val="accent1"/>
+          </a:lnRef>
+          <a:fillRef idx="3">
+            <a:schemeClr val="accent1"/>
+          </a:fillRef>
+          <a:effectRef idx="2">
+            <a:schemeClr val="accent1"/>
+          </a:effectRef>
+          <a:fontRef idx="minor">
+            <a:schemeClr val="lt1"/>
+          </a:fontRef>
+        </p:style>
+        <p:txBody>
+          <a:bodyPr rtlCol="0" anchor="ctr"/>
+          <a:lstStyle/>
+          <a:p>
+            <a:pPr algn="ctr"/>
+          </a:p>
+        </p:txBody>
+      </p:sp>
+      <p:sp>
+        <p:nvSpPr>
+          <p:cNvPr id="17" name="TextBox 16"/>
+          <p:cNvSpPr txBox="1"/>
+          <p:nvPr/>
+        </p:nvSpPr>
+        <p:spPr>
+          <a:xfrm>
+            <a:off x="777240" y="2926080"/>
+            <a:ext cx="1005840" cy="402336"/>
+          </a:xfrm>
+          <a:prstGeom prst="rect">
+            <a:avLst/>
+          </a:prstGeom>
+          <a:noFill/>
+        </p:spPr>
+        <p:txBody>
+          <a:bodyPr wrap="square">
+            <a:spAutoFit/>
+          </a:bodyPr>
+          <a:lstStyle/>
+          <a:p>
+            <a:pPr algn="ctr">
+              <a:lnSpc>
+                <a:spcPct val="100000"/>
+              </a:lnSpc>
+            </a:pPr>
+            <a:r>
+              <a:rPr sz="1050" b="1" i="0">
+                <a:solidFill>
+                  <a:srgbClr val="FFFFFF"/>
+                </a:solidFill>
+                <a:latin typeface="맑은 고딕"/>
+              </a:rPr>
+              <a:t>핵심</a:t>
+            </a:r>
+          </a:p>
+        </p:txBody>
+      </p:sp>
+      <p:sp>
+        <p:nvSpPr>
+          <p:cNvPr id="18" name="TextBox 17"/>
+          <p:cNvSpPr txBox="1"/>
+          <p:nvPr/>
+        </p:nvSpPr>
+        <p:spPr>
+          <a:xfrm>
+            <a:off x="2011680" y="2670048"/>
+            <a:ext cx="8778240" cy="365760"/>
+          </a:xfrm>
+          <a:prstGeom prst="rect">
+            <a:avLst/>
+          </a:prstGeom>
+          <a:noFill/>
+        </p:spPr>
+        <p:txBody>
+          <a:bodyPr wrap="square">
+            <a:spAutoFit/>
+          </a:bodyPr>
+          <a:lstStyle/>
+          <a:p>
+            <a:pPr algn="l">
+              <a:lnSpc>
+                <a:spcPct val="100000"/>
+              </a:lnSpc>
+            </a:pPr>
+            <a:r>
+              <a:rPr sz="1650" b="1" i="0">
+                <a:solidFill>
+                  <a:srgbClr val="23262B"/>
+                </a:solidFill>
+                <a:latin typeface="맑은 고딕"/>
+              </a:rPr>
+              <a:t>② 씨앗 키워드와 키워드 갱신</a:t>
+            </a:r>
+          </a:p>
+        </p:txBody>
+      </p:sp>
+      <p:sp>
+        <p:nvSpPr>
+          <p:cNvPr id="19" name="TextBox 18"/>
+          <p:cNvSpPr txBox="1"/>
+          <p:nvPr/>
+        </p:nvSpPr>
+        <p:spPr>
+          <a:xfrm>
+            <a:off x="2011680" y="3108960"/>
+            <a:ext cx="8778240" cy="457200"/>
+          </a:xfrm>
+          <a:prstGeom prst="rect">
+            <a:avLst/>
+          </a:prstGeom>
+          <a:noFill/>
+        </p:spPr>
+        <p:txBody>
+          <a:bodyPr wrap="square">
+            <a:spAutoFit/>
+          </a:bodyPr>
+          <a:lstStyle/>
+          <a:p>
+            <a:pPr algn="l">
+              <a:lnSpc>
+                <a:spcPct val="100000"/>
+              </a:lnSpc>
+            </a:pPr>
+            <a:r>
+              <a:rPr sz="1150" b="0" i="0">
+                <a:solidFill>
+                  <a:srgbClr val="7A828E"/>
+                </a:solidFill>
+                <a:latin typeface="맑은 고딕"/>
+              </a:rPr>
+              <a:t>이 매뉴얼의 심장부: 씨앗→발굴→측정→판정→적용</a:t>
+            </a:r>
+          </a:p>
+        </p:txBody>
+      </p:sp>
+      <p:sp>
+        <p:nvSpPr>
+          <p:cNvPr id="20" name="Rectangle 19"/>
+          <p:cNvSpPr/>
+          <p:nvPr/>
+        </p:nvSpPr>
+        <p:spPr>
+          <a:xfrm>
+            <a:off x="502920" y="3840480"/>
+            <a:ext cx="11155680" cy="1143000"/>
+          </a:xfrm>
+          <a:prstGeom prst="rect">
+            <a:avLst/>
+          </a:prstGeom>
+          <a:solidFill>
+            <a:srgbClr val="FFFFFF"/>
+          </a:solidFill>
+          <a:ln>
+            <a:noFill/>
+          </a:ln>
+          <a:effectLst/>
+        </p:spPr>
+        <p:style>
+          <a:lnRef idx="1">
+            <a:schemeClr val="accent1"/>
+          </a:lnRef>
+          <a:fillRef idx="3">
+            <a:schemeClr val="accent1"/>
+          </a:fillRef>
+          <a:effectRef idx="2">
+            <a:schemeClr val="accent1"/>
+          </a:effectRef>
+          <a:fontRef idx="minor">
+            <a:schemeClr val="lt1"/>
+          </a:fontRef>
+        </p:style>
+        <p:txBody>
+          <a:bodyPr rtlCol="0" anchor="ctr"/>
+          <a:lstStyle/>
+          <a:p>
+            <a:pPr algn="ctr"/>
+          </a:p>
+        </p:txBody>
+      </p:sp>
+      <p:sp>
+        <p:nvSpPr>
+          <p:cNvPr id="21" name="Rectangle 20"/>
+          <p:cNvSpPr/>
+          <p:nvPr/>
+        </p:nvSpPr>
+        <p:spPr>
+          <a:xfrm>
+            <a:off x="502920" y="3840480"/>
+            <a:ext cx="109728" cy="1143000"/>
+          </a:xfrm>
+          <a:prstGeom prst="rect">
+            <a:avLst/>
+          </a:prstGeom>
+          <a:solidFill>
+            <a:srgbClr val="1B3A5C"/>
+          </a:solidFill>
+          <a:ln>
+            <a:noFill/>
+          </a:ln>
+          <a:effectLst/>
+        </p:spPr>
+        <p:style>
+          <a:lnRef idx="1">
+            <a:schemeClr val="accent1"/>
+          </a:lnRef>
+          <a:fillRef idx="3">
+            <a:schemeClr val="accent1"/>
+          </a:fillRef>
+          <a:effectRef idx="2">
+            <a:schemeClr val="accent1"/>
+          </a:effectRef>
+          <a:fontRef idx="minor">
+            <a:schemeClr val="lt1"/>
+          </a:fontRef>
+        </p:style>
+        <p:txBody>
+          <a:bodyPr rtlCol="0" anchor="ctr"/>
+          <a:lstStyle/>
+          <a:p>
+            <a:pPr algn="ctr"/>
+          </a:p>
+        </p:txBody>
+      </p:sp>
+      <p:sp>
+        <p:nvSpPr>
+          <p:cNvPr id="22" name="Rounded Rectangle 21"/>
+          <p:cNvSpPr/>
+          <p:nvPr/>
+        </p:nvSpPr>
+        <p:spPr>
+          <a:xfrm>
+            <a:off x="777240" y="4206240"/>
+            <a:ext cx="1005840" cy="402336"/>
+          </a:xfrm>
+          <a:prstGeom prst="roundRect">
+            <a:avLst/>
+          </a:prstGeom>
+          <a:solidFill>
+            <a:srgbClr val="1B3A5C"/>
+          </a:solidFill>
+          <a:ln>
+            <a:noFill/>
+          </a:ln>
+          <a:effectLst/>
+        </p:spPr>
+        <p:style>
+          <a:lnRef idx="1">
+            <a:schemeClr val="accent1"/>
+          </a:lnRef>
+          <a:fillRef idx="3">
+            <a:schemeClr val="accent1"/>
+          </a:fillRef>
+          <a:effectRef idx="2">
+            <a:schemeClr val="accent1"/>
+          </a:effectRef>
+          <a:fontRef idx="minor">
+            <a:schemeClr val="lt1"/>
+          </a:fontRef>
+        </p:style>
+        <p:txBody>
+          <a:bodyPr rtlCol="0" anchor="ctr"/>
+          <a:lstStyle/>
+          <a:p>
+            <a:pPr algn="ctr"/>
+          </a:p>
+        </p:txBody>
+      </p:sp>
+      <p:sp>
+        <p:nvSpPr>
+          <p:cNvPr id="23" name="TextBox 22"/>
+          <p:cNvSpPr txBox="1"/>
+          <p:nvPr/>
+        </p:nvSpPr>
+        <p:spPr>
+          <a:xfrm>
+            <a:off x="777240" y="4206240"/>
+            <a:ext cx="1005840" cy="402336"/>
+          </a:xfrm>
+          <a:prstGeom prst="rect">
+            <a:avLst/>
+          </a:prstGeom>
+          <a:noFill/>
+        </p:spPr>
+        <p:txBody>
+          <a:bodyPr wrap="square">
+            <a:spAutoFit/>
+          </a:bodyPr>
+          <a:lstStyle/>
+          <a:p>
+            <a:pPr algn="ctr">
+              <a:lnSpc>
+                <a:spcPct val="100000"/>
+              </a:lnSpc>
+            </a:pPr>
+            <a:r>
+              <a:rPr sz="1050" b="1" i="0">
+                <a:solidFill>
+                  <a:srgbClr val="FFFFFF"/>
+                </a:solidFill>
+                <a:latin typeface="맑은 고딕"/>
+              </a:rPr>
+              <a:t>일상</a:t>
+            </a:r>
+          </a:p>
+        </p:txBody>
+      </p:sp>
+      <p:sp>
+        <p:nvSpPr>
+          <p:cNvPr id="24" name="TextBox 23"/>
+          <p:cNvSpPr txBox="1"/>
+          <p:nvPr/>
+        </p:nvSpPr>
+        <p:spPr>
+          <a:xfrm>
+            <a:off x="2011680" y="3950208"/>
+            <a:ext cx="8778240" cy="365760"/>
+          </a:xfrm>
+          <a:prstGeom prst="rect">
+            <a:avLst/>
+          </a:prstGeom>
+          <a:noFill/>
+        </p:spPr>
+        <p:txBody>
+          <a:bodyPr wrap="square">
+            <a:spAutoFit/>
+          </a:bodyPr>
+          <a:lstStyle/>
+          <a:p>
+            <a:pPr algn="l">
+              <a:lnSpc>
+                <a:spcPct val="100000"/>
+              </a:lnSpc>
+            </a:pPr>
+            <a:r>
+              <a:rPr sz="1650" b="1" i="0">
+                <a:solidFill>
+                  <a:srgbClr val="23262B"/>
+                </a:solidFill>
+                <a:latin typeface="맑은 고딕"/>
+              </a:rPr>
+              <a:t>③ 매일 쓰는 법</a:t>
+            </a:r>
+          </a:p>
+        </p:txBody>
+      </p:sp>
+      <p:sp>
+        <p:nvSpPr>
+          <p:cNvPr id="25" name="TextBox 24"/>
+          <p:cNvSpPr txBox="1"/>
+          <p:nvPr/>
+        </p:nvSpPr>
+        <p:spPr>
+          <a:xfrm>
+            <a:off x="2011680" y="4389120"/>
+            <a:ext cx="8778240" cy="457200"/>
+          </a:xfrm>
+          <a:prstGeom prst="rect">
+            <a:avLst/>
+          </a:prstGeom>
+          <a:noFill/>
+        </p:spPr>
+        <p:txBody>
+          <a:bodyPr wrap="square">
+            <a:spAutoFit/>
+          </a:bodyPr>
+          <a:lstStyle/>
+          <a:p>
+            <a:pPr algn="l">
+              <a:lnSpc>
+                <a:spcPct val="100000"/>
+              </a:lnSpc>
+            </a:pPr>
+            <a:r>
+              <a:rPr sz="1150" b="0" i="0">
+                <a:solidFill>
+                  <a:srgbClr val="7A828E"/>
+                </a:solidFill>
+                <a:latin typeface="맑은 고딕"/>
+              </a:rPr>
+              <a:t>워크벤치·뉴스·브랜드 킷·네이버 게시</a:t>
+            </a:r>
+          </a:p>
+        </p:txBody>
+      </p:sp>
+      <p:sp>
+        <p:nvSpPr>
+          <p:cNvPr id="26" name="Rectangle 25"/>
+          <p:cNvSpPr/>
+          <p:nvPr/>
+        </p:nvSpPr>
+        <p:spPr>
+          <a:xfrm>
+            <a:off x="502920" y="5120640"/>
+            <a:ext cx="11155680" cy="1143000"/>
+          </a:xfrm>
+          <a:prstGeom prst="rect">
+            <a:avLst/>
+          </a:prstGeom>
+          <a:solidFill>
+            <a:srgbClr val="FFFFFF"/>
+          </a:solidFill>
+          <a:ln>
+            <a:noFill/>
+          </a:ln>
+          <a:effectLst/>
+        </p:spPr>
+        <p:style>
+          <a:lnRef idx="1">
+            <a:schemeClr val="accent1"/>
+          </a:lnRef>
+          <a:fillRef idx="3">
+            <a:schemeClr val="accent1"/>
+          </a:fillRef>
+          <a:effectRef idx="2">
+            <a:schemeClr val="accent1"/>
+          </a:effectRef>
+          <a:fontRef idx="minor">
+            <a:schemeClr val="lt1"/>
+          </a:fontRef>
+        </p:style>
+        <p:txBody>
+          <a:bodyPr rtlCol="0" anchor="ctr"/>
+          <a:lstStyle/>
+          <a:p>
+            <a:pPr algn="ctr"/>
+          </a:p>
+        </p:txBody>
+      </p:sp>
+      <p:sp>
+        <p:nvSpPr>
+          <p:cNvPr id="27" name="Rectangle 26"/>
+          <p:cNvSpPr/>
+          <p:nvPr/>
+        </p:nvSpPr>
+        <p:spPr>
+          <a:xfrm>
+            <a:off x="502920" y="5120640"/>
+            <a:ext cx="109728" cy="1143000"/>
+          </a:xfrm>
+          <a:prstGeom prst="rect">
+            <a:avLst/>
+          </a:prstGeom>
+          <a:solidFill>
+            <a:srgbClr val="2F6B7A"/>
+          </a:solidFill>
+          <a:ln>
+            <a:noFill/>
+          </a:ln>
+          <a:effectLst/>
+        </p:spPr>
+        <p:style>
+          <a:lnRef idx="1">
+            <a:schemeClr val="accent1"/>
+          </a:lnRef>
+          <a:fillRef idx="3">
+            <a:schemeClr val="accent1"/>
+          </a:fillRef>
+          <a:effectRef idx="2">
+            <a:schemeClr val="accent1"/>
+          </a:effectRef>
+          <a:fontRef idx="minor">
+            <a:schemeClr val="lt1"/>
+          </a:fontRef>
+        </p:style>
+        <p:txBody>
+          <a:bodyPr rtlCol="0" anchor="ctr"/>
+          <a:lstStyle/>
+          <a:p>
+            <a:pPr algn="ctr"/>
+          </a:p>
+        </p:txBody>
+      </p:sp>
+      <p:sp>
+        <p:nvSpPr>
+          <p:cNvPr id="28" name="Rounded Rectangle 27"/>
+          <p:cNvSpPr/>
+          <p:nvPr/>
+        </p:nvSpPr>
+        <p:spPr>
+          <a:xfrm>
+            <a:off x="777240" y="5486400"/>
+            <a:ext cx="1005840" cy="402336"/>
+          </a:xfrm>
+          <a:prstGeom prst="roundRect">
+            <a:avLst/>
+          </a:prstGeom>
+          <a:solidFill>
+            <a:srgbClr val="2F6B7A"/>
+          </a:solidFill>
+          <a:ln>
+            <a:noFill/>
+          </a:ln>
+          <a:effectLst/>
+        </p:spPr>
+        <p:style>
+          <a:lnRef idx="1">
+            <a:schemeClr val="accent1"/>
+          </a:lnRef>
+          <a:fillRef idx="3">
+            <a:schemeClr val="accent1"/>
+          </a:fillRef>
+          <a:effectRef idx="2">
+            <a:schemeClr val="accent1"/>
+          </a:effectRef>
+          <a:fontRef idx="minor">
+            <a:schemeClr val="lt1"/>
+          </a:fontRef>
+        </p:style>
+        <p:txBody>
+          <a:bodyPr rtlCol="0" anchor="ctr"/>
+          <a:lstStyle/>
+          <a:p>
+            <a:pPr algn="ctr"/>
+          </a:p>
+        </p:txBody>
+      </p:sp>
+      <p:sp>
+        <p:nvSpPr>
+          <p:cNvPr id="29" name="TextBox 28"/>
+          <p:cNvSpPr txBox="1"/>
+          <p:nvPr/>
+        </p:nvSpPr>
+        <p:spPr>
+          <a:xfrm>
+            <a:off x="777240" y="5486400"/>
+            <a:ext cx="1005840" cy="402336"/>
+          </a:xfrm>
+          <a:prstGeom prst="rect">
+            <a:avLst/>
+          </a:prstGeom>
+          <a:noFill/>
+        </p:spPr>
+        <p:txBody>
+          <a:bodyPr wrap="square">
+            <a:spAutoFit/>
+          </a:bodyPr>
+          <a:lstStyle/>
+          <a:p>
+            <a:pPr algn="ctr">
+              <a:lnSpc>
+                <a:spcPct val="100000"/>
+              </a:lnSpc>
+            </a:pPr>
+            <a:r>
+              <a:rPr sz="1050" b="1" i="0">
+                <a:solidFill>
+                  <a:srgbClr val="FFFFFF"/>
+                </a:solidFill>
+                <a:latin typeface="맑은 고딕"/>
+              </a:rPr>
+              <a:t>안전</a:t>
+            </a:r>
+          </a:p>
+        </p:txBody>
+      </p:sp>
+      <p:sp>
+        <p:nvSpPr>
+          <p:cNvPr id="30" name="TextBox 29"/>
+          <p:cNvSpPr txBox="1"/>
+          <p:nvPr/>
+        </p:nvSpPr>
+        <p:spPr>
+          <a:xfrm>
+            <a:off x="2011680" y="5230368"/>
+            <a:ext cx="8778240" cy="365760"/>
+          </a:xfrm>
+          <a:prstGeom prst="rect">
+            <a:avLst/>
+          </a:prstGeom>
+          <a:noFill/>
+        </p:spPr>
+        <p:txBody>
+          <a:bodyPr wrap="square">
+            <a:spAutoFit/>
+          </a:bodyPr>
+          <a:lstStyle/>
+          <a:p>
+            <a:pPr algn="l">
+              <a:lnSpc>
+                <a:spcPct val="100000"/>
+              </a:lnSpc>
+            </a:pPr>
+            <a:r>
+              <a:rPr sz="1650" b="1" i="0">
+                <a:solidFill>
+                  <a:srgbClr val="23262B"/>
+                </a:solidFill>
+                <a:latin typeface="맑은 고딕"/>
+              </a:rPr>
+              <a:t>④ 컴플라이언스·비용·주의사항</a:t>
+            </a:r>
+          </a:p>
+        </p:txBody>
+      </p:sp>
+      <p:sp>
+        <p:nvSpPr>
+          <p:cNvPr id="31" name="TextBox 30"/>
+          <p:cNvSpPr txBox="1"/>
+          <p:nvPr/>
+        </p:nvSpPr>
+        <p:spPr>
+          <a:xfrm>
+            <a:off x="2011680" y="5669280"/>
+            <a:ext cx="8778240" cy="457200"/>
+          </a:xfrm>
+          <a:prstGeom prst="rect">
+            <a:avLst/>
+          </a:prstGeom>
+          <a:noFill/>
+        </p:spPr>
+        <p:txBody>
+          <a:bodyPr wrap="square">
+            <a:spAutoFit/>
+          </a:bodyPr>
+          <a:lstStyle/>
+          <a:p>
+            <a:pPr algn="l">
+              <a:lnSpc>
+                <a:spcPct val="100000"/>
+              </a:lnSpc>
+            </a:pPr>
+            <a:r>
+              <a:rPr sz="1150" b="0" i="0">
+                <a:solidFill>
+                  <a:srgbClr val="7A828E"/>
+                </a:solidFill>
+                <a:latin typeface="맑은 고딕"/>
+              </a:rPr>
+              <a:t>의료법 검수, 과금 지점, 함정 모음, FAQ</a:t>
+            </a:r>
+          </a:p>
+        </p:txBody>
+      </p:sp>
+    </p:spTree>
+  </p:cSld>
+  <p:clrMapOvr>
+    <a:masterClrMapping/>
+  </p:clrMapOvr>
+</p:sld>
+</file>
+
+<file path=ppt/slides/slide20.xml><?xml version="1.0" encoding="utf-8"?>
+<p:sld xmlns:a="http://schemas.openxmlformats.org/drawingml/2006/main" xmlns:p="http://schemas.openxmlformats.org/presentationml/2006/main" xmlns:r="http://schemas.openxmlformats.org/officeDocument/2006/relationships">
+  <p:cSld>
+    <p:bg>
+      <p:bgPr>
+        <a:solidFill>
+          <a:srgbClr val="F7F5F0"/>
+        </a:solidFill>
+        <a:effectLst/>
+      </p:bgPr>
+    </p:bg>
+    <p:spTree>
+      <p:nvGrpSpPr>
+        <p:cNvPr id="1" name=""/>
+        <p:cNvGrpSpPr/>
+        <p:nvPr/>
+      </p:nvGrpSpPr>
+      <p:grpSpPr/>
+      <p:sp>
+        <p:nvSpPr>
+          <p:cNvPr id="2" name="Rectangle 1"/>
+          <p:cNvSpPr/>
+          <p:nvPr/>
+        </p:nvSpPr>
+        <p:spPr>
+          <a:xfrm>
+            <a:off x="0" y="0"/>
+            <a:ext cx="12191695" cy="1051560"/>
+          </a:xfrm>
+          <a:prstGeom prst="rect">
+            <a:avLst/>
+          </a:prstGeom>
+          <a:solidFill>
+            <a:srgbClr val="122A44"/>
+          </a:solidFill>
+          <a:ln>
+            <a:noFill/>
+          </a:ln>
+          <a:effectLst/>
+        </p:spPr>
+        <p:style>
+          <a:lnRef idx="1">
+            <a:schemeClr val="accent1"/>
+          </a:lnRef>
+          <a:fillRef idx="3">
+            <a:schemeClr val="accent1"/>
+          </a:fillRef>
+          <a:effectRef idx="2">
+            <a:schemeClr val="accent1"/>
+          </a:effectRef>
+          <a:fontRef idx="minor">
+            <a:schemeClr val="lt1"/>
+          </a:fontRef>
+        </p:style>
+        <p:txBody>
+          <a:bodyPr rtlCol="0" anchor="ctr"/>
+          <a:lstStyle/>
+          <a:p>
+            <a:pPr algn="ctr"/>
+          </a:p>
+        </p:txBody>
+      </p:sp>
+      <p:sp>
+        <p:nvSpPr>
+          <p:cNvPr id="3" name="Rectangle 2"/>
+          <p:cNvSpPr/>
+          <p:nvPr/>
+        </p:nvSpPr>
+        <p:spPr>
+          <a:xfrm>
+            <a:off x="0" y="1051560"/>
+            <a:ext cx="12191695" cy="38100"/>
+          </a:xfrm>
+          <a:prstGeom prst="rect">
+            <a:avLst/>
+          </a:prstGeom>
+          <a:solidFill>
+            <a:srgbClr val="1B3A5C"/>
+          </a:solidFill>
+          <a:ln>
+            <a:noFill/>
+          </a:ln>
+          <a:effectLst/>
+        </p:spPr>
+        <p:style>
+          <a:lnRef idx="1">
+            <a:schemeClr val="accent1"/>
+          </a:lnRef>
+          <a:fillRef idx="3">
+            <a:schemeClr val="accent1"/>
+          </a:fillRef>
+          <a:effectRef idx="2">
+            <a:schemeClr val="accent1"/>
+          </a:effectRef>
+          <a:fontRef idx="minor">
+            <a:schemeClr val="lt1"/>
+          </a:fontRef>
+        </p:style>
+        <p:txBody>
+          <a:bodyPr rtlCol="0" anchor="ctr"/>
+          <a:lstStyle/>
+          <a:p>
+            <a:pPr algn="ctr"/>
+          </a:p>
+        </p:txBody>
+      </p:sp>
+      <p:sp>
+        <p:nvSpPr>
+          <p:cNvPr id="4" name="TextBox 3"/>
+          <p:cNvSpPr txBox="1"/>
+          <p:nvPr/>
+        </p:nvSpPr>
+        <p:spPr>
+          <a:xfrm>
+            <a:off x="502920" y="109728"/>
+            <a:ext cx="8686800" cy="292608"/>
+          </a:xfrm>
+          <a:prstGeom prst="rect">
+            <a:avLst/>
+          </a:prstGeom>
+          <a:noFill/>
+        </p:spPr>
+        <p:txBody>
+          <a:bodyPr wrap="square">
+            <a:spAutoFit/>
+          </a:bodyPr>
+          <a:lstStyle/>
+          <a:p>
+            <a:pPr algn="l">
+              <a:lnSpc>
+                <a:spcPct val="100000"/>
+              </a:lnSpc>
+            </a:pPr>
+            <a:r>
+              <a:rPr sz="1200" b="1" i="0">
+                <a:solidFill>
+                  <a:srgbClr val="1B3A5C"/>
+                </a:solidFill>
+                <a:latin typeface="맑은 고딕"/>
+              </a:rPr>
+              <a:t>④ 안전 · 비용</a:t>
+            </a:r>
+          </a:p>
+        </p:txBody>
+      </p:sp>
+      <p:sp>
+        <p:nvSpPr>
+          <p:cNvPr id="5" name="TextBox 4"/>
+          <p:cNvSpPr txBox="1"/>
+          <p:nvPr/>
+        </p:nvSpPr>
+        <p:spPr>
+          <a:xfrm>
+            <a:off x="457200" y="347472"/>
+            <a:ext cx="10515600" cy="621792"/>
+          </a:xfrm>
+          <a:prstGeom prst="rect">
+            <a:avLst/>
+          </a:prstGeom>
+          <a:noFill/>
+        </p:spPr>
+        <p:txBody>
+          <a:bodyPr wrap="square">
+            <a:spAutoFit/>
+          </a:bodyPr>
+          <a:lstStyle/>
+          <a:p>
+            <a:pPr algn="l">
+              <a:lnSpc>
+                <a:spcPct val="100000"/>
+              </a:lnSpc>
+            </a:pPr>
+            <a:r>
+              <a:rPr sz="2400" b="1" i="0">
+                <a:solidFill>
+                  <a:srgbClr val="FFFFFF"/>
+                </a:solidFill>
+                <a:latin typeface="맑은 고딕"/>
+              </a:rPr>
+              <a:t>어디서 돈이 나가나 — 과금 지점 정리</a:t>
+            </a:r>
+          </a:p>
+        </p:txBody>
+      </p:sp>
+      <p:sp>
+        <p:nvSpPr>
+          <p:cNvPr id="6" name="TextBox 5"/>
+          <p:cNvSpPr txBox="1"/>
+          <p:nvPr/>
+        </p:nvSpPr>
+        <p:spPr>
+          <a:xfrm>
+            <a:off x="457200" y="6492240"/>
+            <a:ext cx="8229600" cy="274320"/>
+          </a:xfrm>
+          <a:prstGeom prst="rect">
+            <a:avLst/>
+          </a:prstGeom>
+          <a:noFill/>
+        </p:spPr>
+        <p:txBody>
+          <a:bodyPr wrap="square">
+            <a:spAutoFit/>
+          </a:bodyPr>
+          <a:lstStyle/>
+          <a:p>
+            <a:pPr algn="l">
+              <a:lnSpc>
+                <a:spcPct val="100000"/>
+              </a:lnSpc>
+            </a:pPr>
+            <a:r>
+              <a:rPr sz="900" b="0" i="0">
+                <a:solidFill>
+                  <a:srgbClr val="7A828E"/>
+                </a:solidFill>
+                <a:latin typeface="맑은 고딕"/>
+              </a:rPr>
+              <a:t>씨제이씨협동조합 OSMU 워크벤치 · 관리자·사용자 매뉴얼</a:t>
+            </a:r>
+          </a:p>
+        </p:txBody>
+      </p:sp>
+      <p:sp>
+        <p:nvSpPr>
+          <p:cNvPr id="7" name="TextBox 6"/>
+          <p:cNvSpPr txBox="1"/>
+          <p:nvPr/>
+        </p:nvSpPr>
+        <p:spPr>
+          <a:xfrm>
+            <a:off x="11094415" y="6492240"/>
+            <a:ext cx="731520" cy="274320"/>
+          </a:xfrm>
+          <a:prstGeom prst="rect">
+            <a:avLst/>
+          </a:prstGeom>
+          <a:noFill/>
+        </p:spPr>
+        <p:txBody>
+          <a:bodyPr wrap="square">
+            <a:spAutoFit/>
+          </a:bodyPr>
+          <a:lstStyle/>
+          <a:p>
+            <a:pPr algn="r">
+              <a:lnSpc>
+                <a:spcPct val="100000"/>
+              </a:lnSpc>
+            </a:pPr>
+            <a:r>
+              <a:rPr sz="900" b="0" i="0">
+                <a:solidFill>
+                  <a:srgbClr val="7A828E"/>
+                </a:solidFill>
+                <a:latin typeface="맑은 고딕"/>
+              </a:rPr>
+              <a:t>19</a:t>
             </a:r>
           </a:p>
         </p:txBody>
@@ -10256,7 +13028,7 @@
 </p:sld>
 </file>
 
-<file path=ppt/slides/slide18.xml><?xml version="1.0" encoding="utf-8"?>
+<file path=ppt/slides/slide21.xml><?xml version="1.0" encoding="utf-8"?>
 <p:sld xmlns:a="http://schemas.openxmlformats.org/drawingml/2006/main" xmlns:p="http://schemas.openxmlformats.org/presentationml/2006/main" xmlns:r="http://schemas.openxmlformats.org/officeDocument/2006/relationships">
   <p:cSld>
     <p:bg>
@@ -10513,7 +13285,7 @@
                 </a:solidFill>
                 <a:latin typeface="맑은 고딕"/>
               </a:rPr>
-              <a:t>17</a:t>
+              <a:t>20</a:t>
             </a:r>
           </a:p>
         </p:txBody>
@@ -11356,7 +14128,7 @@
 </p:sld>
 </file>
 
-<file path=ppt/slides/slide19.xml><?xml version="1.0" encoding="utf-8"?>
+<file path=ppt/slides/slide22.xml><?xml version="1.0" encoding="utf-8"?>
 <p:sld xmlns:a="http://schemas.openxmlformats.org/drawingml/2006/main" xmlns:p="http://schemas.openxmlformats.org/presentationml/2006/main" xmlns:r="http://schemas.openxmlformats.org/officeDocument/2006/relationships">
   <p:cSld>
     <p:bg>
@@ -11613,7 +14385,7 @@
                 </a:solidFill>
                 <a:latin typeface="맑은 고딕"/>
               </a:rPr>
-              <a:t>18</a:t>
+              <a:t>21</a:t>
             </a:r>
           </a:p>
         </p:txBody>
@@ -12236,1273 +15008,7 @@
 </p:sld>
 </file>
 
-<file path=ppt/slides/slide2.xml><?xml version="1.0" encoding="utf-8"?>
-<p:sld xmlns:a="http://schemas.openxmlformats.org/drawingml/2006/main" xmlns:p="http://schemas.openxmlformats.org/presentationml/2006/main" xmlns:r="http://schemas.openxmlformats.org/officeDocument/2006/relationships">
-  <p:cSld>
-    <p:bg>
-      <p:bgPr>
-        <a:solidFill>
-          <a:srgbClr val="F7F5F0"/>
-        </a:solidFill>
-        <a:effectLst/>
-      </p:bgPr>
-    </p:bg>
-    <p:spTree>
-      <p:nvGrpSpPr>
-        <p:cNvPr id="1" name=""/>
-        <p:cNvGrpSpPr/>
-        <p:nvPr/>
-      </p:nvGrpSpPr>
-      <p:grpSpPr/>
-      <p:sp>
-        <p:nvSpPr>
-          <p:cNvPr id="2" name="Rectangle 1"/>
-          <p:cNvSpPr/>
-          <p:nvPr/>
-        </p:nvSpPr>
-        <p:spPr>
-          <a:xfrm>
-            <a:off x="0" y="0"/>
-            <a:ext cx="12191695" cy="1051560"/>
-          </a:xfrm>
-          <a:prstGeom prst="rect">
-            <a:avLst/>
-          </a:prstGeom>
-          <a:solidFill>
-            <a:srgbClr val="122A44"/>
-          </a:solidFill>
-          <a:ln>
-            <a:noFill/>
-          </a:ln>
-          <a:effectLst/>
-        </p:spPr>
-        <p:style>
-          <a:lnRef idx="1">
-            <a:schemeClr val="accent1"/>
-          </a:lnRef>
-          <a:fillRef idx="3">
-            <a:schemeClr val="accent1"/>
-          </a:fillRef>
-          <a:effectRef idx="2">
-            <a:schemeClr val="accent1"/>
-          </a:effectRef>
-          <a:fontRef idx="minor">
-            <a:schemeClr val="lt1"/>
-          </a:fontRef>
-        </p:style>
-        <p:txBody>
-          <a:bodyPr rtlCol="0" anchor="ctr"/>
-          <a:lstStyle/>
-          <a:p>
-            <a:pPr algn="ctr"/>
-          </a:p>
-        </p:txBody>
-      </p:sp>
-      <p:sp>
-        <p:nvSpPr>
-          <p:cNvPr id="3" name="Rectangle 2"/>
-          <p:cNvSpPr/>
-          <p:nvPr/>
-        </p:nvSpPr>
-        <p:spPr>
-          <a:xfrm>
-            <a:off x="0" y="1051560"/>
-            <a:ext cx="12191695" cy="38100"/>
-          </a:xfrm>
-          <a:prstGeom prst="rect">
-            <a:avLst/>
-          </a:prstGeom>
-          <a:solidFill>
-            <a:srgbClr val="1B3A5C"/>
-          </a:solidFill>
-          <a:ln>
-            <a:noFill/>
-          </a:ln>
-          <a:effectLst/>
-        </p:spPr>
-        <p:style>
-          <a:lnRef idx="1">
-            <a:schemeClr val="accent1"/>
-          </a:lnRef>
-          <a:fillRef idx="3">
-            <a:schemeClr val="accent1"/>
-          </a:fillRef>
-          <a:effectRef idx="2">
-            <a:schemeClr val="accent1"/>
-          </a:effectRef>
-          <a:fontRef idx="minor">
-            <a:schemeClr val="lt1"/>
-          </a:fontRef>
-        </p:style>
-        <p:txBody>
-          <a:bodyPr rtlCol="0" anchor="ctr"/>
-          <a:lstStyle/>
-          <a:p>
-            <a:pPr algn="ctr"/>
-          </a:p>
-        </p:txBody>
-      </p:sp>
-      <p:sp>
-        <p:nvSpPr>
-          <p:cNvPr id="4" name="TextBox 3"/>
-          <p:cNvSpPr txBox="1"/>
-          <p:nvPr/>
-        </p:nvSpPr>
-        <p:spPr>
-          <a:xfrm>
-            <a:off x="502920" y="109728"/>
-            <a:ext cx="8686800" cy="292608"/>
-          </a:xfrm>
-          <a:prstGeom prst="rect">
-            <a:avLst/>
-          </a:prstGeom>
-          <a:noFill/>
-        </p:spPr>
-        <p:txBody>
-          <a:bodyPr wrap="square">
-            <a:spAutoFit/>
-          </a:bodyPr>
-          <a:lstStyle/>
-          <a:p>
-            <a:pPr algn="l">
-              <a:lnSpc>
-                <a:spcPct val="100000"/>
-              </a:lnSpc>
-            </a:pPr>
-            <a:r>
-              <a:rPr sz="1200" b="1" i="0">
-                <a:solidFill>
-                  <a:srgbClr val="1B3A5C"/>
-                </a:solidFill>
-                <a:latin typeface="맑은 고딕"/>
-              </a:rPr>
-              <a:t>CONTENTS</a:t>
-            </a:r>
-          </a:p>
-        </p:txBody>
-      </p:sp>
-      <p:sp>
-        <p:nvSpPr>
-          <p:cNvPr id="5" name="TextBox 4"/>
-          <p:cNvSpPr txBox="1"/>
-          <p:nvPr/>
-        </p:nvSpPr>
-        <p:spPr>
-          <a:xfrm>
-            <a:off x="457200" y="347472"/>
-            <a:ext cx="10515600" cy="621792"/>
-          </a:xfrm>
-          <a:prstGeom prst="rect">
-            <a:avLst/>
-          </a:prstGeom>
-          <a:noFill/>
-        </p:spPr>
-        <p:txBody>
-          <a:bodyPr wrap="square">
-            <a:spAutoFit/>
-          </a:bodyPr>
-          <a:lstStyle/>
-          <a:p>
-            <a:pPr algn="l">
-              <a:lnSpc>
-                <a:spcPct val="100000"/>
-              </a:lnSpc>
-            </a:pPr>
-            <a:r>
-              <a:rPr sz="2400" b="1" i="0">
-                <a:solidFill>
-                  <a:srgbClr val="FFFFFF"/>
-                </a:solidFill>
-                <a:latin typeface="맑은 고딕"/>
-              </a:rPr>
-              <a:t>목차</a:t>
-            </a:r>
-          </a:p>
-        </p:txBody>
-      </p:sp>
-      <p:sp>
-        <p:nvSpPr>
-          <p:cNvPr id="6" name="TextBox 5"/>
-          <p:cNvSpPr txBox="1"/>
-          <p:nvPr/>
-        </p:nvSpPr>
-        <p:spPr>
-          <a:xfrm>
-            <a:off x="457200" y="6492240"/>
-            <a:ext cx="8229600" cy="274320"/>
-          </a:xfrm>
-          <a:prstGeom prst="rect">
-            <a:avLst/>
-          </a:prstGeom>
-          <a:noFill/>
-        </p:spPr>
-        <p:txBody>
-          <a:bodyPr wrap="square">
-            <a:spAutoFit/>
-          </a:bodyPr>
-          <a:lstStyle/>
-          <a:p>
-            <a:pPr algn="l">
-              <a:lnSpc>
-                <a:spcPct val="100000"/>
-              </a:lnSpc>
-            </a:pPr>
-            <a:r>
-              <a:rPr sz="900" b="0" i="0">
-                <a:solidFill>
-                  <a:srgbClr val="7A828E"/>
-                </a:solidFill>
-                <a:latin typeface="맑은 고딕"/>
-              </a:rPr>
-              <a:t>씨제이씨협동조합 OSMU 워크벤치 · 관리자·사용자 매뉴얼</a:t>
-            </a:r>
-          </a:p>
-        </p:txBody>
-      </p:sp>
-      <p:sp>
-        <p:nvSpPr>
-          <p:cNvPr id="7" name="TextBox 6"/>
-          <p:cNvSpPr txBox="1"/>
-          <p:nvPr/>
-        </p:nvSpPr>
-        <p:spPr>
-          <a:xfrm>
-            <a:off x="11094415" y="6492240"/>
-            <a:ext cx="731520" cy="274320"/>
-          </a:xfrm>
-          <a:prstGeom prst="rect">
-            <a:avLst/>
-          </a:prstGeom>
-          <a:noFill/>
-        </p:spPr>
-        <p:txBody>
-          <a:bodyPr wrap="square">
-            <a:spAutoFit/>
-          </a:bodyPr>
-          <a:lstStyle/>
-          <a:p>
-            <a:pPr algn="r">
-              <a:lnSpc>
-                <a:spcPct val="100000"/>
-              </a:lnSpc>
-            </a:pPr>
-            <a:r>
-              <a:rPr sz="900" b="0" i="0">
-                <a:solidFill>
-                  <a:srgbClr val="7A828E"/>
-                </a:solidFill>
-                <a:latin typeface="맑은 고딕"/>
-              </a:rPr>
-              <a:t>01</a:t>
-            </a:r>
-          </a:p>
-        </p:txBody>
-      </p:sp>
-      <p:sp>
-        <p:nvSpPr>
-          <p:cNvPr id="8" name="Rectangle 7"/>
-          <p:cNvSpPr/>
-          <p:nvPr/>
-        </p:nvSpPr>
-        <p:spPr>
-          <a:xfrm>
-            <a:off x="502920" y="1280160"/>
-            <a:ext cx="11155680" cy="1143000"/>
-          </a:xfrm>
-          <a:prstGeom prst="rect">
-            <a:avLst/>
-          </a:prstGeom>
-          <a:solidFill>
-            <a:srgbClr val="FFFFFF"/>
-          </a:solidFill>
-          <a:ln>
-            <a:noFill/>
-          </a:ln>
-          <a:effectLst/>
-        </p:spPr>
-        <p:style>
-          <a:lnRef idx="1">
-            <a:schemeClr val="accent1"/>
-          </a:lnRef>
-          <a:fillRef idx="3">
-            <a:schemeClr val="accent1"/>
-          </a:fillRef>
-          <a:effectRef idx="2">
-            <a:schemeClr val="accent1"/>
-          </a:effectRef>
-          <a:fontRef idx="minor">
-            <a:schemeClr val="lt1"/>
-          </a:fontRef>
-        </p:style>
-        <p:txBody>
-          <a:bodyPr rtlCol="0" anchor="ctr"/>
-          <a:lstStyle/>
-          <a:p>
-            <a:pPr algn="ctr"/>
-          </a:p>
-        </p:txBody>
-      </p:sp>
-      <p:sp>
-        <p:nvSpPr>
-          <p:cNvPr id="9" name="Rectangle 8"/>
-          <p:cNvSpPr/>
-          <p:nvPr/>
-        </p:nvSpPr>
-        <p:spPr>
-          <a:xfrm>
-            <a:off x="502920" y="1280160"/>
-            <a:ext cx="109728" cy="1143000"/>
-          </a:xfrm>
-          <a:prstGeom prst="rect">
-            <a:avLst/>
-          </a:prstGeom>
-          <a:solidFill>
-            <a:srgbClr val="C9A227"/>
-          </a:solidFill>
-          <a:ln>
-            <a:noFill/>
-          </a:ln>
-          <a:effectLst/>
-        </p:spPr>
-        <p:style>
-          <a:lnRef idx="1">
-            <a:schemeClr val="accent1"/>
-          </a:lnRef>
-          <a:fillRef idx="3">
-            <a:schemeClr val="accent1"/>
-          </a:fillRef>
-          <a:effectRef idx="2">
-            <a:schemeClr val="accent1"/>
-          </a:effectRef>
-          <a:fontRef idx="minor">
-            <a:schemeClr val="lt1"/>
-          </a:fontRef>
-        </p:style>
-        <p:txBody>
-          <a:bodyPr rtlCol="0" anchor="ctr"/>
-          <a:lstStyle/>
-          <a:p>
-            <a:pPr algn="ctr"/>
-          </a:p>
-        </p:txBody>
-      </p:sp>
-      <p:sp>
-        <p:nvSpPr>
-          <p:cNvPr id="10" name="Rounded Rectangle 9"/>
-          <p:cNvSpPr/>
-          <p:nvPr/>
-        </p:nvSpPr>
-        <p:spPr>
-          <a:xfrm>
-            <a:off x="777240" y="1645920"/>
-            <a:ext cx="1005840" cy="402336"/>
-          </a:xfrm>
-          <a:prstGeom prst="roundRect">
-            <a:avLst/>
-          </a:prstGeom>
-          <a:solidFill>
-            <a:srgbClr val="C9A227"/>
-          </a:solidFill>
-          <a:ln>
-            <a:noFill/>
-          </a:ln>
-          <a:effectLst/>
-        </p:spPr>
-        <p:style>
-          <a:lnRef idx="1">
-            <a:schemeClr val="accent1"/>
-          </a:lnRef>
-          <a:fillRef idx="3">
-            <a:schemeClr val="accent1"/>
-          </a:fillRef>
-          <a:effectRef idx="2">
-            <a:schemeClr val="accent1"/>
-          </a:effectRef>
-          <a:fontRef idx="minor">
-            <a:schemeClr val="lt1"/>
-          </a:fontRef>
-        </p:style>
-        <p:txBody>
-          <a:bodyPr rtlCol="0" anchor="ctr"/>
-          <a:lstStyle/>
-          <a:p>
-            <a:pPr algn="ctr"/>
-          </a:p>
-        </p:txBody>
-      </p:sp>
-      <p:sp>
-        <p:nvSpPr>
-          <p:cNvPr id="11" name="TextBox 10"/>
-          <p:cNvSpPr txBox="1"/>
-          <p:nvPr/>
-        </p:nvSpPr>
-        <p:spPr>
-          <a:xfrm>
-            <a:off x="777240" y="1645920"/>
-            <a:ext cx="1005840" cy="402336"/>
-          </a:xfrm>
-          <a:prstGeom prst="rect">
-            <a:avLst/>
-          </a:prstGeom>
-          <a:noFill/>
-        </p:spPr>
-        <p:txBody>
-          <a:bodyPr wrap="square">
-            <a:spAutoFit/>
-          </a:bodyPr>
-          <a:lstStyle/>
-          <a:p>
-            <a:pPr algn="ctr">
-              <a:lnSpc>
-                <a:spcPct val="100000"/>
-              </a:lnSpc>
-            </a:pPr>
-            <a:r>
-              <a:rPr sz="1050" b="1" i="0">
-                <a:solidFill>
-                  <a:srgbClr val="FFFFFF"/>
-                </a:solidFill>
-                <a:latin typeface="맑은 고딕"/>
-              </a:rPr>
-              <a:t>준비</a:t>
-            </a:r>
-          </a:p>
-        </p:txBody>
-      </p:sp>
-      <p:sp>
-        <p:nvSpPr>
-          <p:cNvPr id="12" name="TextBox 11"/>
-          <p:cNvSpPr txBox="1"/>
-          <p:nvPr/>
-        </p:nvSpPr>
-        <p:spPr>
-          <a:xfrm>
-            <a:off x="2011680" y="1389888"/>
-            <a:ext cx="8778240" cy="365760"/>
-          </a:xfrm>
-          <a:prstGeom prst="rect">
-            <a:avLst/>
-          </a:prstGeom>
-          <a:noFill/>
-        </p:spPr>
-        <p:txBody>
-          <a:bodyPr wrap="square">
-            <a:spAutoFit/>
-          </a:bodyPr>
-          <a:lstStyle/>
-          <a:p>
-            <a:pPr algn="l">
-              <a:lnSpc>
-                <a:spcPct val="100000"/>
-              </a:lnSpc>
-            </a:pPr>
-            <a:r>
-              <a:rPr sz="1650" b="1" i="0">
-                <a:solidFill>
-                  <a:srgbClr val="23262B"/>
-                </a:solidFill>
-                <a:latin typeface="맑은 고딕"/>
-              </a:rPr>
-              <a:t>① 초기 설정 — 키 3종 등록</a:t>
-            </a:r>
-          </a:p>
-        </p:txBody>
-      </p:sp>
-      <p:sp>
-        <p:nvSpPr>
-          <p:cNvPr id="13" name="TextBox 12"/>
-          <p:cNvSpPr txBox="1"/>
-          <p:nvPr/>
-        </p:nvSpPr>
-        <p:spPr>
-          <a:xfrm>
-            <a:off x="2011680" y="1828800"/>
-            <a:ext cx="8778240" cy="457200"/>
-          </a:xfrm>
-          <a:prstGeom prst="rect">
-            <a:avLst/>
-          </a:prstGeom>
-          <a:noFill/>
-        </p:spPr>
-        <p:txBody>
-          <a:bodyPr wrap="square">
-            <a:spAutoFit/>
-          </a:bodyPr>
-          <a:lstStyle/>
-          <a:p>
-            <a:pPr algn="l">
-              <a:lnSpc>
-                <a:spcPct val="100000"/>
-              </a:lnSpc>
-            </a:pPr>
-            <a:r>
-              <a:rPr sz="1150" b="0" i="0">
-                <a:solidFill>
-                  <a:srgbClr val="7A828E"/>
-                </a:solidFill>
-                <a:latin typeface="맑은 고딕"/>
-              </a:rPr>
-              <a:t>LLM 1개 + 네이버 API 2개. 한 번만 하면 됩니다</a:t>
-            </a:r>
-          </a:p>
-        </p:txBody>
-      </p:sp>
-      <p:sp>
-        <p:nvSpPr>
-          <p:cNvPr id="14" name="Rectangle 13"/>
-          <p:cNvSpPr/>
-          <p:nvPr/>
-        </p:nvSpPr>
-        <p:spPr>
-          <a:xfrm>
-            <a:off x="502920" y="2560320"/>
-            <a:ext cx="11155680" cy="1143000"/>
-          </a:xfrm>
-          <a:prstGeom prst="rect">
-            <a:avLst/>
-          </a:prstGeom>
-          <a:solidFill>
-            <a:srgbClr val="FFFFFF"/>
-          </a:solidFill>
-          <a:ln>
-            <a:noFill/>
-          </a:ln>
-          <a:effectLst/>
-        </p:spPr>
-        <p:style>
-          <a:lnRef idx="1">
-            <a:schemeClr val="accent1"/>
-          </a:lnRef>
-          <a:fillRef idx="3">
-            <a:schemeClr val="accent1"/>
-          </a:fillRef>
-          <a:effectRef idx="2">
-            <a:schemeClr val="accent1"/>
-          </a:effectRef>
-          <a:fontRef idx="minor">
-            <a:schemeClr val="lt1"/>
-          </a:fontRef>
-        </p:style>
-        <p:txBody>
-          <a:bodyPr rtlCol="0" anchor="ctr"/>
-          <a:lstStyle/>
-          <a:p>
-            <a:pPr algn="ctr"/>
-          </a:p>
-        </p:txBody>
-      </p:sp>
-      <p:sp>
-        <p:nvSpPr>
-          <p:cNvPr id="15" name="Rectangle 14"/>
-          <p:cNvSpPr/>
-          <p:nvPr/>
-        </p:nvSpPr>
-        <p:spPr>
-          <a:xfrm>
-            <a:off x="502920" y="2560320"/>
-            <a:ext cx="109728" cy="1143000"/>
-          </a:xfrm>
-          <a:prstGeom prst="rect">
-            <a:avLst/>
-          </a:prstGeom>
-          <a:solidFill>
-            <a:srgbClr val="1B3A5C"/>
-          </a:solidFill>
-          <a:ln>
-            <a:noFill/>
-          </a:ln>
-          <a:effectLst/>
-        </p:spPr>
-        <p:style>
-          <a:lnRef idx="1">
-            <a:schemeClr val="accent1"/>
-          </a:lnRef>
-          <a:fillRef idx="3">
-            <a:schemeClr val="accent1"/>
-          </a:fillRef>
-          <a:effectRef idx="2">
-            <a:schemeClr val="accent1"/>
-          </a:effectRef>
-          <a:fontRef idx="minor">
-            <a:schemeClr val="lt1"/>
-          </a:fontRef>
-        </p:style>
-        <p:txBody>
-          <a:bodyPr rtlCol="0" anchor="ctr"/>
-          <a:lstStyle/>
-          <a:p>
-            <a:pPr algn="ctr"/>
-          </a:p>
-        </p:txBody>
-      </p:sp>
-      <p:sp>
-        <p:nvSpPr>
-          <p:cNvPr id="16" name="Rounded Rectangle 15"/>
-          <p:cNvSpPr/>
-          <p:nvPr/>
-        </p:nvSpPr>
-        <p:spPr>
-          <a:xfrm>
-            <a:off x="777240" y="2926080"/>
-            <a:ext cx="1005840" cy="402336"/>
-          </a:xfrm>
-          <a:prstGeom prst="roundRect">
-            <a:avLst/>
-          </a:prstGeom>
-          <a:solidFill>
-            <a:srgbClr val="1B3A5C"/>
-          </a:solidFill>
-          <a:ln>
-            <a:noFill/>
-          </a:ln>
-          <a:effectLst/>
-        </p:spPr>
-        <p:style>
-          <a:lnRef idx="1">
-            <a:schemeClr val="accent1"/>
-          </a:lnRef>
-          <a:fillRef idx="3">
-            <a:schemeClr val="accent1"/>
-          </a:fillRef>
-          <a:effectRef idx="2">
-            <a:schemeClr val="accent1"/>
-          </a:effectRef>
-          <a:fontRef idx="minor">
-            <a:schemeClr val="lt1"/>
-          </a:fontRef>
-        </p:style>
-        <p:txBody>
-          <a:bodyPr rtlCol="0" anchor="ctr"/>
-          <a:lstStyle/>
-          <a:p>
-            <a:pPr algn="ctr"/>
-          </a:p>
-        </p:txBody>
-      </p:sp>
-      <p:sp>
-        <p:nvSpPr>
-          <p:cNvPr id="17" name="TextBox 16"/>
-          <p:cNvSpPr txBox="1"/>
-          <p:nvPr/>
-        </p:nvSpPr>
-        <p:spPr>
-          <a:xfrm>
-            <a:off x="777240" y="2926080"/>
-            <a:ext cx="1005840" cy="402336"/>
-          </a:xfrm>
-          <a:prstGeom prst="rect">
-            <a:avLst/>
-          </a:prstGeom>
-          <a:noFill/>
-        </p:spPr>
-        <p:txBody>
-          <a:bodyPr wrap="square">
-            <a:spAutoFit/>
-          </a:bodyPr>
-          <a:lstStyle/>
-          <a:p>
-            <a:pPr algn="ctr">
-              <a:lnSpc>
-                <a:spcPct val="100000"/>
-              </a:lnSpc>
-            </a:pPr>
-            <a:r>
-              <a:rPr sz="1050" b="1" i="0">
-                <a:solidFill>
-                  <a:srgbClr val="FFFFFF"/>
-                </a:solidFill>
-                <a:latin typeface="맑은 고딕"/>
-              </a:rPr>
-              <a:t>핵심</a:t>
-            </a:r>
-          </a:p>
-        </p:txBody>
-      </p:sp>
-      <p:sp>
-        <p:nvSpPr>
-          <p:cNvPr id="18" name="TextBox 17"/>
-          <p:cNvSpPr txBox="1"/>
-          <p:nvPr/>
-        </p:nvSpPr>
-        <p:spPr>
-          <a:xfrm>
-            <a:off x="2011680" y="2670048"/>
-            <a:ext cx="8778240" cy="365760"/>
-          </a:xfrm>
-          <a:prstGeom prst="rect">
-            <a:avLst/>
-          </a:prstGeom>
-          <a:noFill/>
-        </p:spPr>
-        <p:txBody>
-          <a:bodyPr wrap="square">
-            <a:spAutoFit/>
-          </a:bodyPr>
-          <a:lstStyle/>
-          <a:p>
-            <a:pPr algn="l">
-              <a:lnSpc>
-                <a:spcPct val="100000"/>
-              </a:lnSpc>
-            </a:pPr>
-            <a:r>
-              <a:rPr sz="1650" b="1" i="0">
-                <a:solidFill>
-                  <a:srgbClr val="23262B"/>
-                </a:solidFill>
-                <a:latin typeface="맑은 고딕"/>
-              </a:rPr>
-              <a:t>② 씨앗 키워드와 키워드 갱신</a:t>
-            </a:r>
-          </a:p>
-        </p:txBody>
-      </p:sp>
-      <p:sp>
-        <p:nvSpPr>
-          <p:cNvPr id="19" name="TextBox 18"/>
-          <p:cNvSpPr txBox="1"/>
-          <p:nvPr/>
-        </p:nvSpPr>
-        <p:spPr>
-          <a:xfrm>
-            <a:off x="2011680" y="3108960"/>
-            <a:ext cx="8778240" cy="457200"/>
-          </a:xfrm>
-          <a:prstGeom prst="rect">
-            <a:avLst/>
-          </a:prstGeom>
-          <a:noFill/>
-        </p:spPr>
-        <p:txBody>
-          <a:bodyPr wrap="square">
-            <a:spAutoFit/>
-          </a:bodyPr>
-          <a:lstStyle/>
-          <a:p>
-            <a:pPr algn="l">
-              <a:lnSpc>
-                <a:spcPct val="100000"/>
-              </a:lnSpc>
-            </a:pPr>
-            <a:r>
-              <a:rPr sz="1150" b="0" i="0">
-                <a:solidFill>
-                  <a:srgbClr val="7A828E"/>
-                </a:solidFill>
-                <a:latin typeface="맑은 고딕"/>
-              </a:rPr>
-              <a:t>이 매뉴얼의 심장부: 씨앗→발굴→측정→판정→적용</a:t>
-            </a:r>
-          </a:p>
-        </p:txBody>
-      </p:sp>
-      <p:sp>
-        <p:nvSpPr>
-          <p:cNvPr id="20" name="Rectangle 19"/>
-          <p:cNvSpPr/>
-          <p:nvPr/>
-        </p:nvSpPr>
-        <p:spPr>
-          <a:xfrm>
-            <a:off x="502920" y="3840480"/>
-            <a:ext cx="11155680" cy="1143000"/>
-          </a:xfrm>
-          <a:prstGeom prst="rect">
-            <a:avLst/>
-          </a:prstGeom>
-          <a:solidFill>
-            <a:srgbClr val="FFFFFF"/>
-          </a:solidFill>
-          <a:ln>
-            <a:noFill/>
-          </a:ln>
-          <a:effectLst/>
-        </p:spPr>
-        <p:style>
-          <a:lnRef idx="1">
-            <a:schemeClr val="accent1"/>
-          </a:lnRef>
-          <a:fillRef idx="3">
-            <a:schemeClr val="accent1"/>
-          </a:fillRef>
-          <a:effectRef idx="2">
-            <a:schemeClr val="accent1"/>
-          </a:effectRef>
-          <a:fontRef idx="minor">
-            <a:schemeClr val="lt1"/>
-          </a:fontRef>
-        </p:style>
-        <p:txBody>
-          <a:bodyPr rtlCol="0" anchor="ctr"/>
-          <a:lstStyle/>
-          <a:p>
-            <a:pPr algn="ctr"/>
-          </a:p>
-        </p:txBody>
-      </p:sp>
-      <p:sp>
-        <p:nvSpPr>
-          <p:cNvPr id="21" name="Rectangle 20"/>
-          <p:cNvSpPr/>
-          <p:nvPr/>
-        </p:nvSpPr>
-        <p:spPr>
-          <a:xfrm>
-            <a:off x="502920" y="3840480"/>
-            <a:ext cx="109728" cy="1143000"/>
-          </a:xfrm>
-          <a:prstGeom prst="rect">
-            <a:avLst/>
-          </a:prstGeom>
-          <a:solidFill>
-            <a:srgbClr val="1B3A5C"/>
-          </a:solidFill>
-          <a:ln>
-            <a:noFill/>
-          </a:ln>
-          <a:effectLst/>
-        </p:spPr>
-        <p:style>
-          <a:lnRef idx="1">
-            <a:schemeClr val="accent1"/>
-          </a:lnRef>
-          <a:fillRef idx="3">
-            <a:schemeClr val="accent1"/>
-          </a:fillRef>
-          <a:effectRef idx="2">
-            <a:schemeClr val="accent1"/>
-          </a:effectRef>
-          <a:fontRef idx="minor">
-            <a:schemeClr val="lt1"/>
-          </a:fontRef>
-        </p:style>
-        <p:txBody>
-          <a:bodyPr rtlCol="0" anchor="ctr"/>
-          <a:lstStyle/>
-          <a:p>
-            <a:pPr algn="ctr"/>
-          </a:p>
-        </p:txBody>
-      </p:sp>
-      <p:sp>
-        <p:nvSpPr>
-          <p:cNvPr id="22" name="Rounded Rectangle 21"/>
-          <p:cNvSpPr/>
-          <p:nvPr/>
-        </p:nvSpPr>
-        <p:spPr>
-          <a:xfrm>
-            <a:off x="777240" y="4206240"/>
-            <a:ext cx="1005840" cy="402336"/>
-          </a:xfrm>
-          <a:prstGeom prst="roundRect">
-            <a:avLst/>
-          </a:prstGeom>
-          <a:solidFill>
-            <a:srgbClr val="1B3A5C"/>
-          </a:solidFill>
-          <a:ln>
-            <a:noFill/>
-          </a:ln>
-          <a:effectLst/>
-        </p:spPr>
-        <p:style>
-          <a:lnRef idx="1">
-            <a:schemeClr val="accent1"/>
-          </a:lnRef>
-          <a:fillRef idx="3">
-            <a:schemeClr val="accent1"/>
-          </a:fillRef>
-          <a:effectRef idx="2">
-            <a:schemeClr val="accent1"/>
-          </a:effectRef>
-          <a:fontRef idx="minor">
-            <a:schemeClr val="lt1"/>
-          </a:fontRef>
-        </p:style>
-        <p:txBody>
-          <a:bodyPr rtlCol="0" anchor="ctr"/>
-          <a:lstStyle/>
-          <a:p>
-            <a:pPr algn="ctr"/>
-          </a:p>
-        </p:txBody>
-      </p:sp>
-      <p:sp>
-        <p:nvSpPr>
-          <p:cNvPr id="23" name="TextBox 22"/>
-          <p:cNvSpPr txBox="1"/>
-          <p:nvPr/>
-        </p:nvSpPr>
-        <p:spPr>
-          <a:xfrm>
-            <a:off x="777240" y="4206240"/>
-            <a:ext cx="1005840" cy="402336"/>
-          </a:xfrm>
-          <a:prstGeom prst="rect">
-            <a:avLst/>
-          </a:prstGeom>
-          <a:noFill/>
-        </p:spPr>
-        <p:txBody>
-          <a:bodyPr wrap="square">
-            <a:spAutoFit/>
-          </a:bodyPr>
-          <a:lstStyle/>
-          <a:p>
-            <a:pPr algn="ctr">
-              <a:lnSpc>
-                <a:spcPct val="100000"/>
-              </a:lnSpc>
-            </a:pPr>
-            <a:r>
-              <a:rPr sz="1050" b="1" i="0">
-                <a:solidFill>
-                  <a:srgbClr val="FFFFFF"/>
-                </a:solidFill>
-                <a:latin typeface="맑은 고딕"/>
-              </a:rPr>
-              <a:t>일상</a:t>
-            </a:r>
-          </a:p>
-        </p:txBody>
-      </p:sp>
-      <p:sp>
-        <p:nvSpPr>
-          <p:cNvPr id="24" name="TextBox 23"/>
-          <p:cNvSpPr txBox="1"/>
-          <p:nvPr/>
-        </p:nvSpPr>
-        <p:spPr>
-          <a:xfrm>
-            <a:off x="2011680" y="3950208"/>
-            <a:ext cx="8778240" cy="365760"/>
-          </a:xfrm>
-          <a:prstGeom prst="rect">
-            <a:avLst/>
-          </a:prstGeom>
-          <a:noFill/>
-        </p:spPr>
-        <p:txBody>
-          <a:bodyPr wrap="square">
-            <a:spAutoFit/>
-          </a:bodyPr>
-          <a:lstStyle/>
-          <a:p>
-            <a:pPr algn="l">
-              <a:lnSpc>
-                <a:spcPct val="100000"/>
-              </a:lnSpc>
-            </a:pPr>
-            <a:r>
-              <a:rPr sz="1650" b="1" i="0">
-                <a:solidFill>
-                  <a:srgbClr val="23262B"/>
-                </a:solidFill>
-                <a:latin typeface="맑은 고딕"/>
-              </a:rPr>
-              <a:t>③ 매일 쓰는 법</a:t>
-            </a:r>
-          </a:p>
-        </p:txBody>
-      </p:sp>
-      <p:sp>
-        <p:nvSpPr>
-          <p:cNvPr id="25" name="TextBox 24"/>
-          <p:cNvSpPr txBox="1"/>
-          <p:nvPr/>
-        </p:nvSpPr>
-        <p:spPr>
-          <a:xfrm>
-            <a:off x="2011680" y="4389120"/>
-            <a:ext cx="8778240" cy="457200"/>
-          </a:xfrm>
-          <a:prstGeom prst="rect">
-            <a:avLst/>
-          </a:prstGeom>
-          <a:noFill/>
-        </p:spPr>
-        <p:txBody>
-          <a:bodyPr wrap="square">
-            <a:spAutoFit/>
-          </a:bodyPr>
-          <a:lstStyle/>
-          <a:p>
-            <a:pPr algn="l">
-              <a:lnSpc>
-                <a:spcPct val="100000"/>
-              </a:lnSpc>
-            </a:pPr>
-            <a:r>
-              <a:rPr sz="1150" b="0" i="0">
-                <a:solidFill>
-                  <a:srgbClr val="7A828E"/>
-                </a:solidFill>
-                <a:latin typeface="맑은 고딕"/>
-              </a:rPr>
-              <a:t>워크벤치·뉴스·브랜드 킷·네이버 게시</a:t>
-            </a:r>
-          </a:p>
-        </p:txBody>
-      </p:sp>
-      <p:sp>
-        <p:nvSpPr>
-          <p:cNvPr id="26" name="Rectangle 25"/>
-          <p:cNvSpPr/>
-          <p:nvPr/>
-        </p:nvSpPr>
-        <p:spPr>
-          <a:xfrm>
-            <a:off x="502920" y="5120640"/>
-            <a:ext cx="11155680" cy="1143000"/>
-          </a:xfrm>
-          <a:prstGeom prst="rect">
-            <a:avLst/>
-          </a:prstGeom>
-          <a:solidFill>
-            <a:srgbClr val="FFFFFF"/>
-          </a:solidFill>
-          <a:ln>
-            <a:noFill/>
-          </a:ln>
-          <a:effectLst/>
-        </p:spPr>
-        <p:style>
-          <a:lnRef idx="1">
-            <a:schemeClr val="accent1"/>
-          </a:lnRef>
-          <a:fillRef idx="3">
-            <a:schemeClr val="accent1"/>
-          </a:fillRef>
-          <a:effectRef idx="2">
-            <a:schemeClr val="accent1"/>
-          </a:effectRef>
-          <a:fontRef idx="minor">
-            <a:schemeClr val="lt1"/>
-          </a:fontRef>
-        </p:style>
-        <p:txBody>
-          <a:bodyPr rtlCol="0" anchor="ctr"/>
-          <a:lstStyle/>
-          <a:p>
-            <a:pPr algn="ctr"/>
-          </a:p>
-        </p:txBody>
-      </p:sp>
-      <p:sp>
-        <p:nvSpPr>
-          <p:cNvPr id="27" name="Rectangle 26"/>
-          <p:cNvSpPr/>
-          <p:nvPr/>
-        </p:nvSpPr>
-        <p:spPr>
-          <a:xfrm>
-            <a:off x="502920" y="5120640"/>
-            <a:ext cx="109728" cy="1143000"/>
-          </a:xfrm>
-          <a:prstGeom prst="rect">
-            <a:avLst/>
-          </a:prstGeom>
-          <a:solidFill>
-            <a:srgbClr val="2F6B7A"/>
-          </a:solidFill>
-          <a:ln>
-            <a:noFill/>
-          </a:ln>
-          <a:effectLst/>
-        </p:spPr>
-        <p:style>
-          <a:lnRef idx="1">
-            <a:schemeClr val="accent1"/>
-          </a:lnRef>
-          <a:fillRef idx="3">
-            <a:schemeClr val="accent1"/>
-          </a:fillRef>
-          <a:effectRef idx="2">
-            <a:schemeClr val="accent1"/>
-          </a:effectRef>
-          <a:fontRef idx="minor">
-            <a:schemeClr val="lt1"/>
-          </a:fontRef>
-        </p:style>
-        <p:txBody>
-          <a:bodyPr rtlCol="0" anchor="ctr"/>
-          <a:lstStyle/>
-          <a:p>
-            <a:pPr algn="ctr"/>
-          </a:p>
-        </p:txBody>
-      </p:sp>
-      <p:sp>
-        <p:nvSpPr>
-          <p:cNvPr id="28" name="Rounded Rectangle 27"/>
-          <p:cNvSpPr/>
-          <p:nvPr/>
-        </p:nvSpPr>
-        <p:spPr>
-          <a:xfrm>
-            <a:off x="777240" y="5486400"/>
-            <a:ext cx="1005840" cy="402336"/>
-          </a:xfrm>
-          <a:prstGeom prst="roundRect">
-            <a:avLst/>
-          </a:prstGeom>
-          <a:solidFill>
-            <a:srgbClr val="2F6B7A"/>
-          </a:solidFill>
-          <a:ln>
-            <a:noFill/>
-          </a:ln>
-          <a:effectLst/>
-        </p:spPr>
-        <p:style>
-          <a:lnRef idx="1">
-            <a:schemeClr val="accent1"/>
-          </a:lnRef>
-          <a:fillRef idx="3">
-            <a:schemeClr val="accent1"/>
-          </a:fillRef>
-          <a:effectRef idx="2">
-            <a:schemeClr val="accent1"/>
-          </a:effectRef>
-          <a:fontRef idx="minor">
-            <a:schemeClr val="lt1"/>
-          </a:fontRef>
-        </p:style>
-        <p:txBody>
-          <a:bodyPr rtlCol="0" anchor="ctr"/>
-          <a:lstStyle/>
-          <a:p>
-            <a:pPr algn="ctr"/>
-          </a:p>
-        </p:txBody>
-      </p:sp>
-      <p:sp>
-        <p:nvSpPr>
-          <p:cNvPr id="29" name="TextBox 28"/>
-          <p:cNvSpPr txBox="1"/>
-          <p:nvPr/>
-        </p:nvSpPr>
-        <p:spPr>
-          <a:xfrm>
-            <a:off x="777240" y="5486400"/>
-            <a:ext cx="1005840" cy="402336"/>
-          </a:xfrm>
-          <a:prstGeom prst="rect">
-            <a:avLst/>
-          </a:prstGeom>
-          <a:noFill/>
-        </p:spPr>
-        <p:txBody>
-          <a:bodyPr wrap="square">
-            <a:spAutoFit/>
-          </a:bodyPr>
-          <a:lstStyle/>
-          <a:p>
-            <a:pPr algn="ctr">
-              <a:lnSpc>
-                <a:spcPct val="100000"/>
-              </a:lnSpc>
-            </a:pPr>
-            <a:r>
-              <a:rPr sz="1050" b="1" i="0">
-                <a:solidFill>
-                  <a:srgbClr val="FFFFFF"/>
-                </a:solidFill>
-                <a:latin typeface="맑은 고딕"/>
-              </a:rPr>
-              <a:t>안전</a:t>
-            </a:r>
-          </a:p>
-        </p:txBody>
-      </p:sp>
-      <p:sp>
-        <p:nvSpPr>
-          <p:cNvPr id="30" name="TextBox 29"/>
-          <p:cNvSpPr txBox="1"/>
-          <p:nvPr/>
-        </p:nvSpPr>
-        <p:spPr>
-          <a:xfrm>
-            <a:off x="2011680" y="5230368"/>
-            <a:ext cx="8778240" cy="365760"/>
-          </a:xfrm>
-          <a:prstGeom prst="rect">
-            <a:avLst/>
-          </a:prstGeom>
-          <a:noFill/>
-        </p:spPr>
-        <p:txBody>
-          <a:bodyPr wrap="square">
-            <a:spAutoFit/>
-          </a:bodyPr>
-          <a:lstStyle/>
-          <a:p>
-            <a:pPr algn="l">
-              <a:lnSpc>
-                <a:spcPct val="100000"/>
-              </a:lnSpc>
-            </a:pPr>
-            <a:r>
-              <a:rPr sz="1650" b="1" i="0">
-                <a:solidFill>
-                  <a:srgbClr val="23262B"/>
-                </a:solidFill>
-                <a:latin typeface="맑은 고딕"/>
-              </a:rPr>
-              <a:t>④ 컴플라이언스·비용·주의사항</a:t>
-            </a:r>
-          </a:p>
-        </p:txBody>
-      </p:sp>
-      <p:sp>
-        <p:nvSpPr>
-          <p:cNvPr id="31" name="TextBox 30"/>
-          <p:cNvSpPr txBox="1"/>
-          <p:nvPr/>
-        </p:nvSpPr>
-        <p:spPr>
-          <a:xfrm>
-            <a:off x="2011680" y="5669280"/>
-            <a:ext cx="8778240" cy="457200"/>
-          </a:xfrm>
-          <a:prstGeom prst="rect">
-            <a:avLst/>
-          </a:prstGeom>
-          <a:noFill/>
-        </p:spPr>
-        <p:txBody>
-          <a:bodyPr wrap="square">
-            <a:spAutoFit/>
-          </a:bodyPr>
-          <a:lstStyle/>
-          <a:p>
-            <a:pPr algn="l">
-              <a:lnSpc>
-                <a:spcPct val="100000"/>
-              </a:lnSpc>
-            </a:pPr>
-            <a:r>
-              <a:rPr sz="1150" b="0" i="0">
-                <a:solidFill>
-                  <a:srgbClr val="7A828E"/>
-                </a:solidFill>
-                <a:latin typeface="맑은 고딕"/>
-              </a:rPr>
-              <a:t>의료법 검수, 과금 지점, 함정 모음, FAQ</a:t>
-            </a:r>
-          </a:p>
-        </p:txBody>
-      </p:sp>
-    </p:spTree>
-  </p:cSld>
-  <p:clrMapOvr>
-    <a:masterClrMapping/>
-  </p:clrMapOvr>
-</p:sld>
-</file>
-
-<file path=ppt/slides/slide20.xml><?xml version="1.0" encoding="utf-8"?>
+<file path=ppt/slides/slide23.xml><?xml version="1.0" encoding="utf-8"?>
 <p:sld xmlns:a="http://schemas.openxmlformats.org/drawingml/2006/main" xmlns:p="http://schemas.openxmlformats.org/presentationml/2006/main" xmlns:r="http://schemas.openxmlformats.org/officeDocument/2006/relationships">
   <p:cSld>
     <p:bg>

--- a/docs/CJC_OSMU_사용자_매뉴얼.pptx
+++ b/docs/CJC_OSMU_사용자_매뉴얼.pptx
@@ -3290,7 +3290,7 @@
                 </a:solidFill>
                 <a:latin typeface="맑은 고딕"/>
               </a:rPr>
-              <a:t>API 키 등록부터 씨앗 키워드·키워드 갱신, 일상 사용법과 주의사항까지</a:t>
+              <a:t>API 키 등록부터 SEO 키워드 고르기·유지, 일상 사용법과 주의사항까지</a:t>
             </a:r>
           </a:p>
         </p:txBody>
@@ -3412,7 +3412,7 @@
                 </a:solidFill>
                 <a:latin typeface="맑은 고딕"/>
               </a:rPr>
-              <a:t>앱 실행: streamlit run app.py → http://localhost:8501</a:t>
+              <a:t>앱 실행: python flet_app/main.py (또는 빌드된 Windows 실행 파일)</a:t>
             </a:r>
           </a:p>
         </p:txBody>
@@ -3565,7 +3565,7 @@
                 </a:solidFill>
                 <a:latin typeface="맑은 고딕"/>
               </a:rPr>
-              <a:t>② 키워드 갱신 · 씨앗</a:t>
+              <a:t>② SEO 키워드 새로 고르기 · 씨앗</a:t>
             </a:r>
           </a:p>
         </p:txBody>
@@ -4191,7 +4191,7 @@
                 </a:solidFill>
                 <a:latin typeface="맑은 고딕"/>
               </a:rPr>
-              <a:t>② 키워드 갱신 · 실행</a:t>
+              <a:t>② SEO 키워드 새로 고르기 · 실행</a:t>
             </a:r>
           </a:p>
         </p:txBody>
@@ -5426,7 +5426,7 @@
                 </a:solidFill>
                 <a:latin typeface="맑은 고딕"/>
               </a:rPr>
-              <a:t>승인 시 브랜드 킷 반영 + 최종 측정까지 완료</a:t>
+              <a:t>이 순간 브랜드 킷 SEO 키워드가 바뀝니다 + 새 키워드 측정까지 완료 — 따로 할 일 없음</a:t>
             </a:r>
           </a:p>
         </p:txBody>
@@ -5579,7 +5579,7 @@
                 </a:solidFill>
                 <a:latin typeface="맑은 고딕"/>
               </a:rPr>
-              <a:t>② 키워드 갱신 · 실제 화면 (1/3)</a:t>
+              <a:t>② SEO 키워드 새로 고르기 · 실제 화면 (1/3)</a:t>
             </a:r>
           </a:p>
         </p:txBody>
@@ -5710,7 +5710,7 @@
         <p:spPr>
           <a:xfrm>
             <a:off x="464820" y="1626108"/>
-            <a:ext cx="5425440" cy="3707055"/>
+            <a:ext cx="5425440" cy="2888742"/>
           </a:xfrm>
           <a:prstGeom prst="rect">
             <a:avLst/>
@@ -5762,7 +5762,7 @@
         <p:spPr>
           <a:xfrm>
             <a:off x="502920" y="1664208"/>
-            <a:ext cx="5349240" cy="3630855"/>
+            <a:ext cx="5349240" cy="2812542"/>
           </a:xfrm>
           <a:prstGeom prst="rect">
             <a:avLst/>
@@ -5803,7 +5803,7 @@
                 </a:solidFill>
                 <a:latin typeface="맑은 고딕"/>
               </a:rPr>
-              <a:t>씨앗 키워드 입력 전 — [1단계 · 후보 찾기]만 눌러보면 됩니다</a:t>
+              <a:t>위 🔑 새로 고르기(씨앗→1~4단계), 아래 🔄 수치 유지 — 처음엔 [1단계]부터</a:t>
             </a:r>
           </a:p>
         </p:txBody>
@@ -6102,7 +6102,7 @@
                 </a:solidFill>
                 <a:latin typeface="맑은 고딕"/>
               </a:rPr>
-              <a:t>② 키워드 갱신 · 실제 화면 (2/3)</a:t>
+              <a:t>② SEO 키워드 새로 고르기 · 실제 화면 (2/3)</a:t>
             </a:r>
           </a:p>
         </p:txBody>
@@ -6559,7 +6559,7 @@
                 </a:solidFill>
                 <a:latin typeface="맑은 고딕"/>
               </a:rPr>
-              <a:t>② 키워드 갱신 · 실제 화면 (3/3)</a:t>
+              <a:t>② SEO 키워드 새로 고르기 · 실제 화면 (3/3)</a:t>
             </a:r>
           </a:p>
         </p:txBody>
@@ -7082,7 +7082,7 @@
                 </a:solidFill>
                 <a:latin typeface="맑은 고딕"/>
               </a:rPr>
-              <a:t>② 키워드 갱신 · 유지</a:t>
+              <a:t>② 🔄 키워드 수치 유지</a:t>
             </a:r>
           </a:p>
         </p:txBody>
@@ -7121,7 +7121,7 @@
                 </a:solidFill>
                 <a:latin typeface="맑은 고딕"/>
               </a:rPr>
-              <a:t>평소 달 5분 · 분기 30분 · 캐시 30일</a:t>
+              <a:t>30일마다 5분 · 분기 30분 · 캐시 30일</a:t>
             </a:r>
           </a:p>
         </p:txBody>
@@ -7282,7 +7282,7 @@
                 </a:solidFill>
                 <a:latin typeface="맑은 고딕"/>
               </a:rPr>
-              <a:t>매월 — [🔄 숫자만 새로 재기]</a:t>
+              <a:t>30일마다 — [🔄 숫자만 새로 재기]</a:t>
             </a:r>
           </a:p>
         </p:txBody>
@@ -7321,7 +7321,7 @@
                 </a:solidFill>
                 <a:latin typeface="맑은 고딕"/>
               </a:rPr>
-              <a:t>키워드 목록은 그대로 두고 만료된 검색량·경쟁도만 다시 잽니다. 살아 있는 값은 캐시에서 읽어 호출 0회 — 과금되는 것은 만료분뿐입니다.</a:t>
+              <a:t>키워드 목록은 그대로 두고 만료된 검색량·경쟁도만 다시 잽니다. 살아 있는 값은 캐시에서 읽어 호출 0회 — 과금되는 것은 만료분뿐입니다. 4단계 [적용] 직후에는 누를 필요가 없습니다(버튼이 '전부 최신 · 0회'로 잠겨 있음).</a:t>
             </a:r>
           </a:p>
         </p:txBody>
@@ -7404,7 +7404,7 @@
                 </a:solidFill>
                 <a:latin typeface="맑은 고딕"/>
               </a:rPr>
-              <a:t>분기 — 4단계 전체</a:t>
+              <a:t>분기 — 🔑 SEO 키워드 새로 고르기</a:t>
             </a:r>
           </a:p>
         </p:txBody>
@@ -11743,7 +11743,7 @@
                 </a:solidFill>
                 <a:latin typeface="맑은 고딕"/>
               </a:rPr>
-              <a:t>② 씨앗 키워드와 키워드 갱신</a:t>
+              <a:t>② SEO 키워드 새로 고르기와 수치 유지</a:t>
             </a:r>
           </a:p>
         </p:txBody>
@@ -11782,7 +11782,7 @@
                 </a:solidFill>
                 <a:latin typeface="맑은 고딕"/>
               </a:rPr>
-              <a:t>이 매뉴얼의 심장부: 씨앗→발굴→측정→판정→적용</a:t>
+              <a:t>이 매뉴얼의 심장부: 씨앗→발굴→측정→판정→적용, 그리고 30일마다 숫자 재기</a:t>
             </a:r>
           </a:p>
         </p:txBody>
@@ -13617,7 +13617,7 @@
                 </a:solidFill>
                 <a:latin typeface="맑은 고딕"/>
               </a:rPr>
-              <a:t>'기본 생성 모델이 지정되지 않았습니다'(🪄 추천) · 키워드 갱신 버튼 잠김 · 경쟁도 만료 경고 — 모두 키 등록으로 해결.</a:t>
+              <a:t>'기본 생성 모델이 지정되지 않았습니다'(🪄 추천) · [1~4단계]·[숫자만 새로 재기] 버튼 잠김 · 경쟁도 만료 경고 — 모두 키 등록으로 해결.</a:t>
             </a:r>
           </a:p>
         </p:txBody>
@@ -14712,7 +14712,7 @@
                 </a:solidFill>
                 <a:latin typeface="맑은 고딕"/>
               </a:rPr>
-              <a:t>Q. 키워드 갱신 아래가 안 보여요</a:t>
+              <a:t>Q. 4단계 적용 후에 [숫자만 새로 재기]를 또 눌러야 하나요?</a:t>
             </a:r>
           </a:p>
         </p:txBody>
@@ -14751,7 +14751,7 @@
                 </a:solidFill>
                 <a:latin typeface="맑은 고딕"/>
               </a:rPr>
-              <a:t>A. 구버전 증상 — 최신 버전에서는 키가 없어도 기능 목록이 보이고 버튼만 잠깁니다. 새로고침 후 확인하세요.</a:t>
+              <a:t>A. 아니요. 4단계 [적용]이 곧 SEO 키워드 교체이고, 새 키워드 측정까지 같이 끝냅니다. 숫자 재기는 30일 뒤 만료 경고가 뜰 때만.</a:t>
             </a:r>
           </a:p>
         </p:txBody>
@@ -16586,7 +16586,7 @@
                           </a:solidFill>
                           <a:latin typeface="맑은 고딕"/>
                         </a:rPr>
-                        <a:t>🔑 키워드 갱신</a:t>
+                        <a:t>🔑 SEO 키워드 새로 고르기</a:t>
                       </a:r>
                     </a:p>
                   </a:txBody>
@@ -16609,7 +16609,7 @@
                           </a:solidFill>
                           <a:latin typeface="맑은 고딕"/>
                         </a:rPr>
-                        <a:t>[🔄 숫자만 새로 재기]로 만료 지표 갱신</a:t>
+                        <a:t>씨앗(🪄 추천) → 1~4단계. 4단계 [적용]이 곧 브랜드 킷 SEO 키워드 교체</a:t>
                       </a:r>
                     </a:p>
                   </a:txBody>
@@ -16632,7 +16632,7 @@
                           </a:solidFill>
                           <a:latin typeface="맑은 고딕"/>
                         </a:rPr>
-                        <a:t>매월 1회 (5분)</a:t>
+                        <a:t>처음 1회 · 이후 분기 1회 (30분)</a:t>
                       </a:r>
                     </a:p>
                   </a:txBody>
@@ -16657,7 +16657,7 @@
                           </a:solidFill>
                           <a:latin typeface="맑은 고딕"/>
                         </a:rPr>
-                        <a:t>🔎 키워드 교체</a:t>
+                        <a:t>🔄 키워드 수치 유지</a:t>
                       </a:r>
                     </a:p>
                   </a:txBody>
@@ -16680,7 +16680,7 @@
                           </a:solidFill>
                           <a:latin typeface="맑은 고딕"/>
                         </a:rPr>
-                        <a:t>씨앗→발굴→측정→판정→적용 4단계로 SEO 키워드 교체</a:t>
+                        <a:t>[🔄 숫자만 새로 재기] — 목록은 그대로, 만료된 수치만 다시 측정</a:t>
                       </a:r>
                     </a:p>
                   </a:txBody>
@@ -16703,7 +16703,7 @@
                           </a:solidFill>
                           <a:latin typeface="맑은 고딕"/>
                         </a:rPr>
-                        <a:t>분기 1회 (30분)</a:t>
+                        <a:t>30일마다 (5분)</a:t>
                       </a:r>
                     </a:p>
                   </a:txBody>
@@ -16867,7 +16867,7 @@
                 </a:solidFill>
                 <a:latin typeface="맑은 고딕"/>
               </a:rPr>
-              <a:t>키 없이도 글쓰기·게시는 전부 됩니다. 키가 필요한 것은 '어떤 키워드로 써야 검색에 잘 걸릴지'를 데이터로 판단하는 키워드 갱신뿐입니다.</a:t>
+              <a:t>키 없이도 글쓰기·게시는 전부 됩니다. 키가 필요한 것은 '어떤 키워드로 써야 검색에 잘 걸릴지'를 데이터로 판단하는 SEO 키워드 새로 고르기와 수치 유지뿐입니다.</a:t>
             </a:r>
           </a:p>
         </p:txBody>
@@ -21025,7 +21025,7 @@
                 </a:solidFill>
                 <a:latin typeface="맑은 고딕"/>
               </a:rPr>
-              <a:t>▪ 🔑 키워드 갱신 전체가 활성화됩니다.</a:t>
+              <a:t>▪ 🔑 SEO 키워드 새로 고르기와 🔄 수치 유지가 활성화됩니다.</a:t>
             </a:r>
           </a:p>
           <a:p>
@@ -21044,7 +21044,7 @@
                 </a:solidFill>
                 <a:latin typeface="맑은 고딕"/>
               </a:rPr>
-              <a:t>▪ 키가 없을 때는 경고 한 줄만 보이고 [숫자 재기]·[1~4단계] 버튼이 잠겨 있습니다.</a:t>
+              <a:t>▪ 키가 없을 때는 경고 한 줄만 보이고 [1~4단계]·[숫자만 새로 재기] 버튼이 잠겨 있습니다.</a:t>
             </a:r>
           </a:p>
           <a:p>

--- a/docs/CJC_OSMU_사용자_매뉴얼.pptx
+++ b/docs/CJC_OSMU_사용자_매뉴얼.pptx
@@ -28,6 +28,7 @@
     <p:sldId id="276" r:id="rId27"/>
     <p:sldId id="277" r:id="rId28"/>
     <p:sldId id="278" r:id="rId29"/>
+    <p:sldId id="279" r:id="rId30"/>
   </p:sldIdLst>
   <p:sldSz cx="12191695" cy="6858000" type="screen4x3"/>
   <p:notesSz cx="6858000" cy="9144000"/>
@@ -9013,7 +9014,7 @@
                 </a:solidFill>
                 <a:latin typeface="맑은 고딕"/>
               </a:rPr>
-              <a:t>③ 매일 쓰는 법 · 뉴스와 게시</a:t>
+              <a:t>③ 매일 쓰는 법 · 워크벤치 (2/2)</a:t>
             </a:r>
           </a:p>
         </p:txBody>
@@ -9052,7 +9053,7 @@
                 </a:solidFill>
                 <a:latin typeface="맑은 고딕"/>
               </a:rPr>
-              <a:t>뉴스 큐레이션 &amp; 네이버 게시</a:t>
+              <a:t>SNS 자동 검증 &amp; 다시 만들기</a:t>
             </a:r>
           </a:p>
         </p:txBody>
@@ -9144,7 +9145,7 @@
         <p:spPr>
           <a:xfrm>
             <a:off x="502920" y="1280160"/>
-            <a:ext cx="5394960" cy="365760"/>
+            <a:ext cx="11155680" cy="365760"/>
           </a:xfrm>
           <a:prstGeom prst="rect">
             <a:avLst/>
@@ -9163,27 +9164,110 @@
               </a:lnSpc>
             </a:pPr>
             <a:r>
-              <a:rPr sz="1500" b="1" i="0">
+              <a:rPr sz="1300" b="0" i="0">
+                <a:solidFill>
+                  <a:srgbClr val="7A828E"/>
+                </a:solidFill>
+                <a:latin typeface="맑은 고딕"/>
+              </a:rPr>
+              <a:t>초안 생성 직후 인스타·X·쇼츠·발행 태그는 길이·해시태그·인증 표현을 자동으로 점검·정리합니다.</a:t>
+            </a:r>
+          </a:p>
+        </p:txBody>
+      </p:sp>
+      <p:sp>
+        <p:nvSpPr>
+          <p:cNvPr id="9" name="Rectangle 8"/>
+          <p:cNvSpPr/>
+          <p:nvPr/>
+        </p:nvSpPr>
+        <p:spPr>
+          <a:xfrm>
+            <a:off x="502920" y="1828800"/>
+            <a:ext cx="5440680" cy="1737360"/>
+          </a:xfrm>
+          <a:prstGeom prst="rect">
+            <a:avLst/>
+          </a:prstGeom>
+          <a:solidFill>
+            <a:srgbClr val="FFFFFF"/>
+          </a:solidFill>
+          <a:ln>
+            <a:noFill/>
+          </a:ln>
+          <a:effectLst/>
+        </p:spPr>
+        <p:style>
+          <a:lnRef idx="1">
+            <a:schemeClr val="accent1"/>
+          </a:lnRef>
+          <a:fillRef idx="3">
+            <a:schemeClr val="accent1"/>
+          </a:fillRef>
+          <a:effectRef idx="2">
+            <a:schemeClr val="accent1"/>
+          </a:effectRef>
+          <a:fontRef idx="minor">
+            <a:schemeClr val="lt1"/>
+          </a:fontRef>
+        </p:style>
+        <p:txBody>
+          <a:bodyPr rtlCol="0" anchor="ctr"/>
+          <a:lstStyle/>
+          <a:p>
+            <a:pPr algn="ctr"/>
+          </a:p>
+        </p:txBody>
+      </p:sp>
+      <p:sp>
+        <p:nvSpPr>
+          <p:cNvPr id="10" name="TextBox 9"/>
+          <p:cNvSpPr txBox="1"/>
+          <p:nvPr/>
+        </p:nvSpPr>
+        <p:spPr>
+          <a:xfrm>
+            <a:off x="731520" y="2011680"/>
+            <a:ext cx="4983480" cy="320040"/>
+          </a:xfrm>
+          <a:prstGeom prst="rect">
+            <a:avLst/>
+          </a:prstGeom>
+          <a:noFill/>
+        </p:spPr>
+        <p:txBody>
+          <a:bodyPr wrap="square">
+            <a:spAutoFit/>
+          </a:bodyPr>
+          <a:lstStyle/>
+          <a:p>
+            <a:pPr algn="l">
+              <a:lnSpc>
+                <a:spcPct val="100000"/>
+              </a:lnSpc>
+            </a:pPr>
+            <a:r>
+              <a:rPr sz="1400" b="1" i="0">
                 <a:solidFill>
                   <a:srgbClr val="1B3A5C"/>
                 </a:solidFill>
                 <a:latin typeface="맑은 고딕"/>
               </a:rPr>
-              <a:t>📰 뉴스 큐레이션</a:t>
-            </a:r>
-          </a:p>
-        </p:txBody>
-      </p:sp>
-      <p:sp>
-        <p:nvSpPr>
-          <p:cNvPr id="9" name="TextBox 8"/>
-          <p:cNvSpPr txBox="1"/>
-          <p:nvPr/>
-        </p:nvSpPr>
-        <p:spPr>
-          <a:xfrm>
-            <a:off x="502920" y="1691640"/>
-            <a:ext cx="5394960" cy="2560320"/>
+              <a:t>📸 인스타그램 · 🐦 X</a:t>
+            </a:r>
+          </a:p>
+        </p:txBody>
+      </p:sp>
+      <p:sp>
+        <p:nvSpPr>
+          <p:cNvPr id="11" name="TextBox 10"/>
+          <p:cNvSpPr txBox="1"/>
+          <p:nvPr/>
+        </p:nvSpPr>
+        <p:spPr>
+          <a:xfrm>
+            <a:off x="731520" y="2377440"/>
+            <a:ext cx="4983480" cy="1097280"/>
           </a:xfrm>
           <a:prstGeom prst="rect">
             <a:avLst/>
@@ -9201,7 +9285,7 @@
                 <a:spcPct val="125000"/>
               </a:lnSpc>
               <a:spcAft>
-                <a:spcPts val="900"/>
+                <a:spcPts val="800"/>
               </a:spcAft>
             </a:pPr>
             <a:r>
@@ -9211,7 +9295,7 @@
                 </a:solidFill>
                 <a:latin typeface="맑은 고딕"/>
               </a:rPr>
-              <a:t>▪ 브랜드 키워드로 관련 기사를 찾아 [워크벤치로 전달]합니다.</a:t>
+              <a:t>▪ '더보기' 전 노출 범위(앞 125자·최대 2줄) 초과 시 경고, 해시태그는 8~15개로 자동 보정.</a:t>
             </a:r>
           </a:p>
           <a:p>
@@ -9220,193 +9304,17 @@
                 <a:spcPct val="125000"/>
               </a:lnSpc>
               <a:spcAft>
-                <a:spcPts val="900"/>
+                <a:spcPts val="800"/>
               </a:spcAft>
             </a:pPr>
             <a:r>
-              <a:rPr sz="1200" b="1">
+              <a:rPr sz="1200" b="0">
                 <a:solidFill>
                   <a:srgbClr val="23262B"/>
                 </a:solidFill>
                 <a:latin typeface="맑은 고딕"/>
               </a:rPr>
-              <a:t>▪ Google 뉴스 RSS + 네이버 뉴스 직접 조회 — API 키 없이 완전 무료입니다.</a:t>
-            </a:r>
-          </a:p>
-          <a:p>
-            <a:pPr>
-              <a:lnSpc>
-                <a:spcPct val="125000"/>
-              </a:lnSpc>
-              <a:spcAft>
-                <a:spcPts val="900"/>
-              </a:spcAft>
-            </a:pPr>
-            <a:r>
-              <a:rPr sz="1200" b="0">
-                <a:solidFill>
-                  <a:srgbClr val="23262B"/>
-                </a:solidFill>
-                <a:latin typeface="맑은 고딕"/>
-              </a:rPr>
-              <a:t>▪ 뉴스 기반 글은 본문 끝에 원문 링크가 자동으로 붙습니다.</a:t>
-            </a:r>
-          </a:p>
-          <a:p>
-            <a:pPr>
-              <a:lnSpc>
-                <a:spcPct val="125000"/>
-              </a:lnSpc>
-              <a:spcAft>
-                <a:spcPts val="900"/>
-              </a:spcAft>
-            </a:pPr>
-            <a:r>
-              <a:rPr sz="1200" b="0">
-                <a:solidFill>
-                  <a:srgbClr val="23262B"/>
-                </a:solidFill>
-                <a:latin typeface="맑은 고딕"/>
-              </a:rPr>
-              <a:t>▪ 추가 검색어 예시: '탈모 관리, 항암가발 지원, 소상공인 창업교육'.</a:t>
-            </a:r>
-          </a:p>
-        </p:txBody>
-      </p:sp>
-      <p:sp>
-        <p:nvSpPr>
-          <p:cNvPr id="10" name="TextBox 9"/>
-          <p:cNvSpPr txBox="1"/>
-          <p:nvPr/>
-        </p:nvSpPr>
-        <p:spPr>
-          <a:xfrm>
-            <a:off x="6263640" y="1280160"/>
-            <a:ext cx="5394960" cy="365760"/>
-          </a:xfrm>
-          <a:prstGeom prst="rect">
-            <a:avLst/>
-          </a:prstGeom>
-          <a:noFill/>
-        </p:spPr>
-        <p:txBody>
-          <a:bodyPr wrap="square">
-            <a:spAutoFit/>
-          </a:bodyPr>
-          <a:lstStyle/>
-          <a:p>
-            <a:pPr algn="l">
-              <a:lnSpc>
-                <a:spcPct val="100000"/>
-              </a:lnSpc>
-            </a:pPr>
-            <a:r>
-              <a:rPr sz="1500" b="1" i="0">
-                <a:solidFill>
-                  <a:srgbClr val="1B3A5C"/>
-                </a:solidFill>
-                <a:latin typeface="맑은 고딕"/>
-              </a:rPr>
-              <a:t>🚀 네이버 게시 (반자동)</a:t>
-            </a:r>
-          </a:p>
-        </p:txBody>
-      </p:sp>
-      <p:sp>
-        <p:nvSpPr>
-          <p:cNvPr id="11" name="TextBox 10"/>
-          <p:cNvSpPr txBox="1"/>
-          <p:nvPr/>
-        </p:nvSpPr>
-        <p:spPr>
-          <a:xfrm>
-            <a:off x="6263640" y="1691640"/>
-            <a:ext cx="5394960" cy="2560320"/>
-          </a:xfrm>
-          <a:prstGeom prst="rect">
-            <a:avLst/>
-          </a:prstGeom>
-          <a:noFill/>
-        </p:spPr>
-        <p:txBody>
-          <a:bodyPr wrap="square">
-            <a:spAutoFit/>
-          </a:bodyPr>
-          <a:lstStyle/>
-          <a:p>
-            <a:pPr>
-              <a:lnSpc>
-                <a:spcPct val="125000"/>
-              </a:lnSpc>
-              <a:spcAft>
-                <a:spcPts val="900"/>
-              </a:spcAft>
-            </a:pPr>
-            <a:r>
-              <a:rPr sz="1200" b="0">
-                <a:solidFill>
-                  <a:srgbClr val="23262B"/>
-                </a:solidFill>
-                <a:latin typeface="맑은 고딕"/>
-              </a:rPr>
-              <a:t>▪ ① [네이버 로그인]으로 세션 저장 → ② [지금 게시] → Chrome 자동 입력.</a:t>
-            </a:r>
-          </a:p>
-          <a:p>
-            <a:pPr>
-              <a:lnSpc>
-                <a:spcPct val="125000"/>
-              </a:lnSpc>
-              <a:spcAft>
-                <a:spcPts val="900"/>
-              </a:spcAft>
-            </a:pPr>
-            <a:r>
-              <a:rPr sz="1200" b="1">
-                <a:solidFill>
-                  <a:srgbClr val="23262B"/>
-                </a:solidFill>
-                <a:latin typeface="맑은 고딕"/>
-              </a:rPr>
-              <a:t>▪ ③ 마지막 [발행] 클릭은 항상 사람이 직접 — 봇 차단을 피하기 위한 설계입니다.</a:t>
-            </a:r>
-          </a:p>
-          <a:p>
-            <a:pPr>
-              <a:lnSpc>
-                <a:spcPct val="125000"/>
-              </a:lnSpc>
-              <a:spcAft>
-                <a:spcPts val="900"/>
-              </a:spcAft>
-            </a:pPr>
-            <a:r>
-              <a:rPr sz="1200" b="0">
-                <a:solidFill>
-                  <a:srgbClr val="23262B"/>
-                </a:solidFill>
-                <a:latin typeface="맑은 고딕"/>
-              </a:rPr>
-              <a:t>▪ 직접 붙여넣어 발행했다면 [✅ 수동으로 완료]로 목록을 정리하세요.</a:t>
-            </a:r>
-          </a:p>
-          <a:p>
-            <a:pPr>
-              <a:lnSpc>
-                <a:spcPct val="125000"/>
-              </a:lnSpc>
-              <a:spcAft>
-                <a:spcPts val="900"/>
-              </a:spcAft>
-            </a:pPr>
-            <a:r>
-              <a:rPr sz="1200" b="0">
-                <a:solidFill>
-                  <a:srgbClr val="23262B"/>
-                </a:solidFill>
-                <a:latin typeface="맑은 고딕"/>
-              </a:rPr>
-              <a:t>▪ 인스타/X/쇼츠는 자동 게시가 없어 [📄 콘텐츠 보기]에서 복사해 직접 올립니다.</a:t>
+              <a:t>▪ X는 한글 1자를 2로 세는 실제 기준(최대 280)으로 자동 분할 — 시뮬레이터도 같은 기준.</a:t>
             </a:r>
           </a:p>
         </p:txBody>
@@ -9419,8 +9327,152 @@
         </p:nvSpPr>
         <p:spPr>
           <a:xfrm>
-            <a:off x="502920" y="4572000"/>
-            <a:ext cx="11155680" cy="1371600"/>
+            <a:off x="6263640" y="1828800"/>
+            <a:ext cx="5440680" cy="1737360"/>
+          </a:xfrm>
+          <a:prstGeom prst="rect">
+            <a:avLst/>
+          </a:prstGeom>
+          <a:solidFill>
+            <a:srgbClr val="FFFFFF"/>
+          </a:solidFill>
+          <a:ln>
+            <a:noFill/>
+          </a:ln>
+          <a:effectLst/>
+        </p:spPr>
+        <p:style>
+          <a:lnRef idx="1">
+            <a:schemeClr val="accent1"/>
+          </a:lnRef>
+          <a:fillRef idx="3">
+            <a:schemeClr val="accent1"/>
+          </a:fillRef>
+          <a:effectRef idx="2">
+            <a:schemeClr val="accent1"/>
+          </a:effectRef>
+          <a:fontRef idx="minor">
+            <a:schemeClr val="lt1"/>
+          </a:fontRef>
+        </p:style>
+        <p:txBody>
+          <a:bodyPr rtlCol="0" anchor="ctr"/>
+          <a:lstStyle/>
+          <a:p>
+            <a:pPr algn="ctr"/>
+          </a:p>
+        </p:txBody>
+      </p:sp>
+      <p:sp>
+        <p:nvSpPr>
+          <p:cNvPr id="13" name="TextBox 12"/>
+          <p:cNvSpPr txBox="1"/>
+          <p:nvPr/>
+        </p:nvSpPr>
+        <p:spPr>
+          <a:xfrm>
+            <a:off x="6492240" y="2011680"/>
+            <a:ext cx="4983480" cy="320040"/>
+          </a:xfrm>
+          <a:prstGeom prst="rect">
+            <a:avLst/>
+          </a:prstGeom>
+          <a:noFill/>
+        </p:spPr>
+        <p:txBody>
+          <a:bodyPr wrap="square">
+            <a:spAutoFit/>
+          </a:bodyPr>
+          <a:lstStyle/>
+          <a:p>
+            <a:pPr algn="l">
+              <a:lnSpc>
+                <a:spcPct val="100000"/>
+              </a:lnSpc>
+            </a:pPr>
+            <a:r>
+              <a:rPr sz="1400" b="1" i="0">
+                <a:solidFill>
+                  <a:srgbClr val="1B3A5C"/>
+                </a:solidFill>
+                <a:latin typeface="맑은 고딕"/>
+              </a:rPr>
+              <a:t>🎬 쇼츠 · 🏷️ 발행 태그</a:t>
+            </a:r>
+          </a:p>
+        </p:txBody>
+      </p:sp>
+      <p:sp>
+        <p:nvSpPr>
+          <p:cNvPr id="14" name="TextBox 13"/>
+          <p:cNvSpPr txBox="1"/>
+          <p:nvPr/>
+        </p:nvSpPr>
+        <p:spPr>
+          <a:xfrm>
+            <a:off x="6492240" y="2377440"/>
+            <a:ext cx="4983480" cy="1097280"/>
+          </a:xfrm>
+          <a:prstGeom prst="rect">
+            <a:avLst/>
+          </a:prstGeom>
+          <a:noFill/>
+        </p:spPr>
+        <p:txBody>
+          <a:bodyPr wrap="square">
+            <a:spAutoFit/>
+          </a:bodyPr>
+          <a:lstStyle/>
+          <a:p>
+            <a:pPr>
+              <a:lnSpc>
+                <a:spcPct val="125000"/>
+              </a:lnSpc>
+              <a:spcAft>
+                <a:spcPts val="800"/>
+              </a:spcAft>
+            </a:pPr>
+            <a:r>
+              <a:rPr sz="1200" b="0">
+                <a:solidFill>
+                  <a:srgbClr val="23262B"/>
+                </a:solidFill>
+                <a:latin typeface="맑은 고딕"/>
+              </a:rPr>
+              <a:t>▪ 컷 자막이 20자를 넘으면 경고하고, 제목에는 #shorts를 자동으로 붙입니다.</a:t>
+            </a:r>
+          </a:p>
+          <a:p>
+            <a:pPr>
+              <a:lnSpc>
+                <a:spcPct val="125000"/>
+              </a:lnSpc>
+              <a:spcAft>
+                <a:spcPts val="800"/>
+              </a:spcAft>
+            </a:pPr>
+            <a:r>
+              <a:rPr sz="1200" b="0">
+                <a:solidFill>
+                  <a:srgbClr val="23262B"/>
+                </a:solidFill>
+                <a:latin typeface="맑은 고딕"/>
+              </a:rPr>
+              <a:t>▪ 발행 태그는 7~12개로 정리하고, 모자라면 이 글의 타깃 키워드로 채웁니다.</a:t>
+            </a:r>
+          </a:p>
+        </p:txBody>
+      </p:sp>
+      <p:sp>
+        <p:nvSpPr>
+          <p:cNvPr id="15" name="Rectangle 14"/>
+          <p:cNvSpPr/>
+          <p:nvPr/>
+        </p:nvSpPr>
+        <p:spPr>
+          <a:xfrm>
+            <a:off x="502920" y="3840480"/>
+            <a:ext cx="11155680" cy="1188720"/>
           </a:xfrm>
           <a:prstGeom prst="rect">
             <a:avLst/>
@@ -9457,13 +9509,13 @@
       </p:sp>
       <p:sp>
         <p:nvSpPr>
-          <p:cNvPr id="13" name="TextBox 12"/>
-          <p:cNvSpPr txBox="1"/>
-          <p:nvPr/>
-        </p:nvSpPr>
-        <p:spPr>
-          <a:xfrm>
-            <a:off x="777240" y="4754880"/>
+          <p:cNvPr id="16" name="TextBox 15"/>
+          <p:cNvSpPr txBox="1"/>
+          <p:nvPr/>
+        </p:nvSpPr>
+        <p:spPr>
+          <a:xfrm>
+            <a:off x="777240" y="4023360"/>
             <a:ext cx="10607040" cy="365760"/>
           </a:xfrm>
           <a:prstGeom prst="rect">
@@ -9489,21 +9541,21 @@
                 </a:solidFill>
                 <a:latin typeface="맑은 고딕"/>
               </a:rPr>
-              <a:t>게시 대상 블로그</a:t>
-            </a:r>
-          </a:p>
-        </p:txBody>
-      </p:sp>
-      <p:sp>
-        <p:nvSpPr>
-          <p:cNvPr id="14" name="TextBox 13"/>
-          <p:cNvSpPr txBox="1"/>
-          <p:nvPr/>
-        </p:nvSpPr>
-        <p:spPr>
-          <a:xfrm>
-            <a:off x="777240" y="5120640"/>
-            <a:ext cx="10607040" cy="685800"/>
+              <a:t>📣 본문을 고친 뒤에는</a:t>
+            </a:r>
+          </a:p>
+        </p:txBody>
+      </p:sp>
+      <p:sp>
+        <p:nvSpPr>
+          <p:cNvPr id="17" name="TextBox 16"/>
+          <p:cNvSpPr txBox="1"/>
+          <p:nvPr/>
+        </p:nvSpPr>
+        <p:spPr>
+          <a:xfrm>
+            <a:off x="777240" y="4434840"/>
+            <a:ext cx="10607040" cy="502920"/>
           </a:xfrm>
           <a:prstGeom prst="rect">
             <a:avLst/>
@@ -9518,7 +9570,7 @@
           <a:p>
             <a:pPr algn="l">
               <a:lnSpc>
-                <a:spcPct val="125000"/>
+                <a:spcPct val="130000"/>
               </a:lnSpc>
             </a:pPr>
             <a:r>
@@ -9528,7 +9580,7 @@
                 </a:solidFill>
                 <a:latin typeface="맑은 고딕"/>
               </a:rPr>
-              <a:t>현재 blog.naver.com/jwl1722 로 연결됩니다. 바꾸려면 🧵 브랜드 킷의 '네이버 블로그 아이디'를 고치세요.</a:t>
+              <a:t>인스타·X·쇼츠·발행 태그는 '수정 전 본문 기준'으로 표시됩니다 — 워크벤치의 [📣 SNS 3채널 다시 만들기]를 눌러 최신 본문에 맞게 다시 만드세요. 인증 범위를 넘겨 쓴 문장은 자동 삭제되고, 맞춤법은 세 채널을 한 번에 교정합니다.</a:t>
             </a:r>
           </a:p>
         </p:txBody>
@@ -9681,7 +9733,7 @@
                 </a:solidFill>
                 <a:latin typeface="맑은 고딕"/>
               </a:rPr>
-              <a:t>③ 매일 쓰는 법 · 브랜드 킷</a:t>
+              <a:t>③ 매일 쓰는 법 · 뉴스와 게시</a:t>
             </a:r>
           </a:p>
         </p:txBody>
@@ -9720,7 +9772,7 @@
                 </a:solidFill>
                 <a:latin typeface="맑은 고딕"/>
               </a:rPr>
-              <a:t>🧵 브랜드 킷 — AI의 두뇌를 직접 관리</a:t>
+              <a:t>뉴스 큐레이션 &amp; 네이버 게시</a:t>
             </a:r>
           </a:p>
         </p:txBody>
@@ -9799,6 +9851,674 @@
                 <a:latin typeface="맑은 고딕"/>
               </a:rPr>
               <a:t>17</a:t>
+            </a:r>
+          </a:p>
+        </p:txBody>
+      </p:sp>
+      <p:sp>
+        <p:nvSpPr>
+          <p:cNvPr id="8" name="TextBox 7"/>
+          <p:cNvSpPr txBox="1"/>
+          <p:nvPr/>
+        </p:nvSpPr>
+        <p:spPr>
+          <a:xfrm>
+            <a:off x="502920" y="1280160"/>
+            <a:ext cx="5394960" cy="365760"/>
+          </a:xfrm>
+          <a:prstGeom prst="rect">
+            <a:avLst/>
+          </a:prstGeom>
+          <a:noFill/>
+        </p:spPr>
+        <p:txBody>
+          <a:bodyPr wrap="square">
+            <a:spAutoFit/>
+          </a:bodyPr>
+          <a:lstStyle/>
+          <a:p>
+            <a:pPr algn="l">
+              <a:lnSpc>
+                <a:spcPct val="100000"/>
+              </a:lnSpc>
+            </a:pPr>
+            <a:r>
+              <a:rPr sz="1500" b="1" i="0">
+                <a:solidFill>
+                  <a:srgbClr val="1B3A5C"/>
+                </a:solidFill>
+                <a:latin typeface="맑은 고딕"/>
+              </a:rPr>
+              <a:t>📰 뉴스 큐레이션</a:t>
+            </a:r>
+          </a:p>
+        </p:txBody>
+      </p:sp>
+      <p:sp>
+        <p:nvSpPr>
+          <p:cNvPr id="9" name="TextBox 8"/>
+          <p:cNvSpPr txBox="1"/>
+          <p:nvPr/>
+        </p:nvSpPr>
+        <p:spPr>
+          <a:xfrm>
+            <a:off x="502920" y="1691640"/>
+            <a:ext cx="5394960" cy="2560320"/>
+          </a:xfrm>
+          <a:prstGeom prst="rect">
+            <a:avLst/>
+          </a:prstGeom>
+          <a:noFill/>
+        </p:spPr>
+        <p:txBody>
+          <a:bodyPr wrap="square">
+            <a:spAutoFit/>
+          </a:bodyPr>
+          <a:lstStyle/>
+          <a:p>
+            <a:pPr>
+              <a:lnSpc>
+                <a:spcPct val="125000"/>
+              </a:lnSpc>
+              <a:spcAft>
+                <a:spcPts val="900"/>
+              </a:spcAft>
+            </a:pPr>
+            <a:r>
+              <a:rPr sz="1200" b="0">
+                <a:solidFill>
+                  <a:srgbClr val="23262B"/>
+                </a:solidFill>
+                <a:latin typeface="맑은 고딕"/>
+              </a:rPr>
+              <a:t>▪ 브랜드 키워드로 관련 기사를 찾아 [워크벤치로 전달]합니다.</a:t>
+            </a:r>
+          </a:p>
+          <a:p>
+            <a:pPr>
+              <a:lnSpc>
+                <a:spcPct val="125000"/>
+              </a:lnSpc>
+              <a:spcAft>
+                <a:spcPts val="900"/>
+              </a:spcAft>
+            </a:pPr>
+            <a:r>
+              <a:rPr sz="1200" b="1">
+                <a:solidFill>
+                  <a:srgbClr val="23262B"/>
+                </a:solidFill>
+                <a:latin typeface="맑은 고딕"/>
+              </a:rPr>
+              <a:t>▪ Google 뉴스 RSS + 네이버 뉴스 직접 조회가 기본입니다. 조회가 막히면 등록된 네이버 API HUB 키로 자동 전환되고(유료), 오늘 호출에 집계됩니다.</a:t>
+            </a:r>
+          </a:p>
+          <a:p>
+            <a:pPr>
+              <a:lnSpc>
+                <a:spcPct val="125000"/>
+              </a:lnSpc>
+              <a:spcAft>
+                <a:spcPts val="900"/>
+              </a:spcAft>
+            </a:pPr>
+            <a:r>
+              <a:rPr sz="1200" b="0">
+                <a:solidFill>
+                  <a:srgbClr val="23262B"/>
+                </a:solidFill>
+                <a:latin typeface="맑은 고딕"/>
+              </a:rPr>
+              <a:t>▪ 뉴스 기반 글은 본문 끝에 원문 링크가 자동으로 붙습니다.</a:t>
+            </a:r>
+          </a:p>
+          <a:p>
+            <a:pPr>
+              <a:lnSpc>
+                <a:spcPct val="125000"/>
+              </a:lnSpc>
+              <a:spcAft>
+                <a:spcPts val="900"/>
+              </a:spcAft>
+            </a:pPr>
+            <a:r>
+              <a:rPr sz="1200" b="0">
+                <a:solidFill>
+                  <a:srgbClr val="23262B"/>
+                </a:solidFill>
+                <a:latin typeface="맑은 고딕"/>
+              </a:rPr>
+              <a:t>▪ 추가 검색어 예시: '탈모 관리, 항암가발 지원, 소상공인 창업교육'.</a:t>
+            </a:r>
+          </a:p>
+        </p:txBody>
+      </p:sp>
+      <p:sp>
+        <p:nvSpPr>
+          <p:cNvPr id="10" name="TextBox 9"/>
+          <p:cNvSpPr txBox="1"/>
+          <p:nvPr/>
+        </p:nvSpPr>
+        <p:spPr>
+          <a:xfrm>
+            <a:off x="6263640" y="1280160"/>
+            <a:ext cx="5394960" cy="365760"/>
+          </a:xfrm>
+          <a:prstGeom prst="rect">
+            <a:avLst/>
+          </a:prstGeom>
+          <a:noFill/>
+        </p:spPr>
+        <p:txBody>
+          <a:bodyPr wrap="square">
+            <a:spAutoFit/>
+          </a:bodyPr>
+          <a:lstStyle/>
+          <a:p>
+            <a:pPr algn="l">
+              <a:lnSpc>
+                <a:spcPct val="100000"/>
+              </a:lnSpc>
+            </a:pPr>
+            <a:r>
+              <a:rPr sz="1500" b="1" i="0">
+                <a:solidFill>
+                  <a:srgbClr val="1B3A5C"/>
+                </a:solidFill>
+                <a:latin typeface="맑은 고딕"/>
+              </a:rPr>
+              <a:t>🚀 네이버 게시 (반자동)</a:t>
+            </a:r>
+          </a:p>
+        </p:txBody>
+      </p:sp>
+      <p:sp>
+        <p:nvSpPr>
+          <p:cNvPr id="11" name="TextBox 10"/>
+          <p:cNvSpPr txBox="1"/>
+          <p:nvPr/>
+        </p:nvSpPr>
+        <p:spPr>
+          <a:xfrm>
+            <a:off x="6263640" y="1691640"/>
+            <a:ext cx="5394960" cy="2560320"/>
+          </a:xfrm>
+          <a:prstGeom prst="rect">
+            <a:avLst/>
+          </a:prstGeom>
+          <a:noFill/>
+        </p:spPr>
+        <p:txBody>
+          <a:bodyPr wrap="square">
+            <a:spAutoFit/>
+          </a:bodyPr>
+          <a:lstStyle/>
+          <a:p>
+            <a:pPr>
+              <a:lnSpc>
+                <a:spcPct val="125000"/>
+              </a:lnSpc>
+              <a:spcAft>
+                <a:spcPts val="900"/>
+              </a:spcAft>
+            </a:pPr>
+            <a:r>
+              <a:rPr sz="1200" b="0">
+                <a:solidFill>
+                  <a:srgbClr val="23262B"/>
+                </a:solidFill>
+                <a:latin typeface="맑은 고딕"/>
+              </a:rPr>
+              <a:t>▪ ① [네이버 로그인]으로 세션 저장 → ② [지금 게시] → Chrome 자동 입력.</a:t>
+            </a:r>
+          </a:p>
+          <a:p>
+            <a:pPr>
+              <a:lnSpc>
+                <a:spcPct val="125000"/>
+              </a:lnSpc>
+              <a:spcAft>
+                <a:spcPts val="900"/>
+              </a:spcAft>
+            </a:pPr>
+            <a:r>
+              <a:rPr sz="1200" b="1">
+                <a:solidFill>
+                  <a:srgbClr val="23262B"/>
+                </a:solidFill>
+                <a:latin typeface="맑은 고딕"/>
+              </a:rPr>
+              <a:t>▪ ③ 마지막 [발행] 클릭은 항상 사람이 직접 — 봇 차단을 피하기 위한 설계입니다.</a:t>
+            </a:r>
+          </a:p>
+          <a:p>
+            <a:pPr>
+              <a:lnSpc>
+                <a:spcPct val="125000"/>
+              </a:lnSpc>
+              <a:spcAft>
+                <a:spcPts val="900"/>
+              </a:spcAft>
+            </a:pPr>
+            <a:r>
+              <a:rPr sz="1200" b="0">
+                <a:solidFill>
+                  <a:srgbClr val="23262B"/>
+                </a:solidFill>
+                <a:latin typeface="맑은 고딕"/>
+              </a:rPr>
+              <a:t>▪ 직접 붙여넣어 발행했다면 [✅ 수동으로 완료]로 목록을 정리하세요.</a:t>
+            </a:r>
+          </a:p>
+          <a:p>
+            <a:pPr>
+              <a:lnSpc>
+                <a:spcPct val="125000"/>
+              </a:lnSpc>
+              <a:spcAft>
+                <a:spcPts val="900"/>
+              </a:spcAft>
+            </a:pPr>
+            <a:r>
+              <a:rPr sz="1200" b="0">
+                <a:solidFill>
+                  <a:srgbClr val="23262B"/>
+                </a:solidFill>
+                <a:latin typeface="맑은 고딕"/>
+              </a:rPr>
+              <a:t>▪ 인스타/X/쇼츠는 자동 게시가 없어 [📄 콘텐츠 보기]에서 복사해 직접 올립니다.</a:t>
+            </a:r>
+          </a:p>
+        </p:txBody>
+      </p:sp>
+      <p:sp>
+        <p:nvSpPr>
+          <p:cNvPr id="12" name="Rectangle 11"/>
+          <p:cNvSpPr/>
+          <p:nvPr/>
+        </p:nvSpPr>
+        <p:spPr>
+          <a:xfrm>
+            <a:off x="502920" y="4572000"/>
+            <a:ext cx="11155680" cy="1371600"/>
+          </a:xfrm>
+          <a:prstGeom prst="rect">
+            <a:avLst/>
+          </a:prstGeom>
+          <a:solidFill>
+            <a:srgbClr val="F5EDD7"/>
+          </a:solidFill>
+          <a:ln>
+            <a:noFill/>
+          </a:ln>
+          <a:effectLst/>
+        </p:spPr>
+        <p:style>
+          <a:lnRef idx="1">
+            <a:schemeClr val="accent1"/>
+          </a:lnRef>
+          <a:fillRef idx="3">
+            <a:schemeClr val="accent1"/>
+          </a:fillRef>
+          <a:effectRef idx="2">
+            <a:schemeClr val="accent1"/>
+          </a:effectRef>
+          <a:fontRef idx="minor">
+            <a:schemeClr val="lt1"/>
+          </a:fontRef>
+        </p:style>
+        <p:txBody>
+          <a:bodyPr rtlCol="0" anchor="ctr"/>
+          <a:lstStyle/>
+          <a:p>
+            <a:pPr algn="ctr"/>
+          </a:p>
+        </p:txBody>
+      </p:sp>
+      <p:sp>
+        <p:nvSpPr>
+          <p:cNvPr id="13" name="TextBox 12"/>
+          <p:cNvSpPr txBox="1"/>
+          <p:nvPr/>
+        </p:nvSpPr>
+        <p:spPr>
+          <a:xfrm>
+            <a:off x="777240" y="4754880"/>
+            <a:ext cx="10607040" cy="365760"/>
+          </a:xfrm>
+          <a:prstGeom prst="rect">
+            <a:avLst/>
+          </a:prstGeom>
+          <a:noFill/>
+        </p:spPr>
+        <p:txBody>
+          <a:bodyPr wrap="square">
+            <a:spAutoFit/>
+          </a:bodyPr>
+          <a:lstStyle/>
+          <a:p>
+            <a:pPr algn="l">
+              <a:lnSpc>
+                <a:spcPct val="100000"/>
+              </a:lnSpc>
+            </a:pPr>
+            <a:r>
+              <a:rPr sz="1350" b="1" i="0">
+                <a:solidFill>
+                  <a:srgbClr val="23262B"/>
+                </a:solidFill>
+                <a:latin typeface="맑은 고딕"/>
+              </a:rPr>
+              <a:t>게시 대상 블로그</a:t>
+            </a:r>
+          </a:p>
+        </p:txBody>
+      </p:sp>
+      <p:sp>
+        <p:nvSpPr>
+          <p:cNvPr id="14" name="TextBox 13"/>
+          <p:cNvSpPr txBox="1"/>
+          <p:nvPr/>
+        </p:nvSpPr>
+        <p:spPr>
+          <a:xfrm>
+            <a:off x="777240" y="5120640"/>
+            <a:ext cx="10607040" cy="685800"/>
+          </a:xfrm>
+          <a:prstGeom prst="rect">
+            <a:avLst/>
+          </a:prstGeom>
+          <a:noFill/>
+        </p:spPr>
+        <p:txBody>
+          <a:bodyPr wrap="square">
+            <a:spAutoFit/>
+          </a:bodyPr>
+          <a:lstStyle/>
+          <a:p>
+            <a:pPr algn="l">
+              <a:lnSpc>
+                <a:spcPct val="125000"/>
+              </a:lnSpc>
+            </a:pPr>
+            <a:r>
+              <a:rPr sz="1200" b="0" i="0">
+                <a:solidFill>
+                  <a:srgbClr val="23262B"/>
+                </a:solidFill>
+                <a:latin typeface="맑은 고딕"/>
+              </a:rPr>
+              <a:t>현재 blog.naver.com/jwl1722 로 연결됩니다. 바꾸려면 🧵 브랜드 킷의 '네이버 블로그 아이디'를 고치세요.</a:t>
+            </a:r>
+          </a:p>
+        </p:txBody>
+      </p:sp>
+    </p:spTree>
+  </p:cSld>
+  <p:clrMapOvr>
+    <a:masterClrMapping/>
+  </p:clrMapOvr>
+</p:sld>
+</file>
+
+<file path=ppt/slides/slide19.xml><?xml version="1.0" encoding="utf-8"?>
+<p:sld xmlns:a="http://schemas.openxmlformats.org/drawingml/2006/main" xmlns:p="http://schemas.openxmlformats.org/presentationml/2006/main" xmlns:r="http://schemas.openxmlformats.org/officeDocument/2006/relationships">
+  <p:cSld>
+    <p:bg>
+      <p:bgPr>
+        <a:solidFill>
+          <a:srgbClr val="F7F5F0"/>
+        </a:solidFill>
+        <a:effectLst/>
+      </p:bgPr>
+    </p:bg>
+    <p:spTree>
+      <p:nvGrpSpPr>
+        <p:cNvPr id="1" name=""/>
+        <p:cNvGrpSpPr/>
+        <p:nvPr/>
+      </p:nvGrpSpPr>
+      <p:grpSpPr/>
+      <p:sp>
+        <p:nvSpPr>
+          <p:cNvPr id="2" name="Rectangle 1"/>
+          <p:cNvSpPr/>
+          <p:nvPr/>
+        </p:nvSpPr>
+        <p:spPr>
+          <a:xfrm>
+            <a:off x="0" y="0"/>
+            <a:ext cx="12191695" cy="1051560"/>
+          </a:xfrm>
+          <a:prstGeom prst="rect">
+            <a:avLst/>
+          </a:prstGeom>
+          <a:solidFill>
+            <a:srgbClr val="122A44"/>
+          </a:solidFill>
+          <a:ln>
+            <a:noFill/>
+          </a:ln>
+          <a:effectLst/>
+        </p:spPr>
+        <p:style>
+          <a:lnRef idx="1">
+            <a:schemeClr val="accent1"/>
+          </a:lnRef>
+          <a:fillRef idx="3">
+            <a:schemeClr val="accent1"/>
+          </a:fillRef>
+          <a:effectRef idx="2">
+            <a:schemeClr val="accent1"/>
+          </a:effectRef>
+          <a:fontRef idx="minor">
+            <a:schemeClr val="lt1"/>
+          </a:fontRef>
+        </p:style>
+        <p:txBody>
+          <a:bodyPr rtlCol="0" anchor="ctr"/>
+          <a:lstStyle/>
+          <a:p>
+            <a:pPr algn="ctr"/>
+          </a:p>
+        </p:txBody>
+      </p:sp>
+      <p:sp>
+        <p:nvSpPr>
+          <p:cNvPr id="3" name="Rectangle 2"/>
+          <p:cNvSpPr/>
+          <p:nvPr/>
+        </p:nvSpPr>
+        <p:spPr>
+          <a:xfrm>
+            <a:off x="0" y="1051560"/>
+            <a:ext cx="12191695" cy="38100"/>
+          </a:xfrm>
+          <a:prstGeom prst="rect">
+            <a:avLst/>
+          </a:prstGeom>
+          <a:solidFill>
+            <a:srgbClr val="1B3A5C"/>
+          </a:solidFill>
+          <a:ln>
+            <a:noFill/>
+          </a:ln>
+          <a:effectLst/>
+        </p:spPr>
+        <p:style>
+          <a:lnRef idx="1">
+            <a:schemeClr val="accent1"/>
+          </a:lnRef>
+          <a:fillRef idx="3">
+            <a:schemeClr val="accent1"/>
+          </a:fillRef>
+          <a:effectRef idx="2">
+            <a:schemeClr val="accent1"/>
+          </a:effectRef>
+          <a:fontRef idx="minor">
+            <a:schemeClr val="lt1"/>
+          </a:fontRef>
+        </p:style>
+        <p:txBody>
+          <a:bodyPr rtlCol="0" anchor="ctr"/>
+          <a:lstStyle/>
+          <a:p>
+            <a:pPr algn="ctr"/>
+          </a:p>
+        </p:txBody>
+      </p:sp>
+      <p:sp>
+        <p:nvSpPr>
+          <p:cNvPr id="4" name="TextBox 3"/>
+          <p:cNvSpPr txBox="1"/>
+          <p:nvPr/>
+        </p:nvSpPr>
+        <p:spPr>
+          <a:xfrm>
+            <a:off x="502920" y="109728"/>
+            <a:ext cx="8686800" cy="292608"/>
+          </a:xfrm>
+          <a:prstGeom prst="rect">
+            <a:avLst/>
+          </a:prstGeom>
+          <a:noFill/>
+        </p:spPr>
+        <p:txBody>
+          <a:bodyPr wrap="square">
+            <a:spAutoFit/>
+          </a:bodyPr>
+          <a:lstStyle/>
+          <a:p>
+            <a:pPr algn="l">
+              <a:lnSpc>
+                <a:spcPct val="100000"/>
+              </a:lnSpc>
+            </a:pPr>
+            <a:r>
+              <a:rPr sz="1200" b="1" i="0">
+                <a:solidFill>
+                  <a:srgbClr val="1B3A5C"/>
+                </a:solidFill>
+                <a:latin typeface="맑은 고딕"/>
+              </a:rPr>
+              <a:t>③ 매일 쓰는 법 · 브랜드 킷</a:t>
+            </a:r>
+          </a:p>
+        </p:txBody>
+      </p:sp>
+      <p:sp>
+        <p:nvSpPr>
+          <p:cNvPr id="5" name="TextBox 4"/>
+          <p:cNvSpPr txBox="1"/>
+          <p:nvPr/>
+        </p:nvSpPr>
+        <p:spPr>
+          <a:xfrm>
+            <a:off x="457200" y="347472"/>
+            <a:ext cx="10515600" cy="621792"/>
+          </a:xfrm>
+          <a:prstGeom prst="rect">
+            <a:avLst/>
+          </a:prstGeom>
+          <a:noFill/>
+        </p:spPr>
+        <p:txBody>
+          <a:bodyPr wrap="square">
+            <a:spAutoFit/>
+          </a:bodyPr>
+          <a:lstStyle/>
+          <a:p>
+            <a:pPr algn="l">
+              <a:lnSpc>
+                <a:spcPct val="100000"/>
+              </a:lnSpc>
+            </a:pPr>
+            <a:r>
+              <a:rPr sz="2400" b="1" i="0">
+                <a:solidFill>
+                  <a:srgbClr val="FFFFFF"/>
+                </a:solidFill>
+                <a:latin typeface="맑은 고딕"/>
+              </a:rPr>
+              <a:t>🧵 브랜드 킷 — AI의 두뇌를 직접 관리</a:t>
+            </a:r>
+          </a:p>
+        </p:txBody>
+      </p:sp>
+      <p:sp>
+        <p:nvSpPr>
+          <p:cNvPr id="6" name="TextBox 5"/>
+          <p:cNvSpPr txBox="1"/>
+          <p:nvPr/>
+        </p:nvSpPr>
+        <p:spPr>
+          <a:xfrm>
+            <a:off x="457200" y="6492240"/>
+            <a:ext cx="8229600" cy="274320"/>
+          </a:xfrm>
+          <a:prstGeom prst="rect">
+            <a:avLst/>
+          </a:prstGeom>
+          <a:noFill/>
+        </p:spPr>
+        <p:txBody>
+          <a:bodyPr wrap="square">
+            <a:spAutoFit/>
+          </a:bodyPr>
+          <a:lstStyle/>
+          <a:p>
+            <a:pPr algn="l">
+              <a:lnSpc>
+                <a:spcPct val="100000"/>
+              </a:lnSpc>
+            </a:pPr>
+            <a:r>
+              <a:rPr sz="900" b="0" i="0">
+                <a:solidFill>
+                  <a:srgbClr val="7A828E"/>
+                </a:solidFill>
+                <a:latin typeface="맑은 고딕"/>
+              </a:rPr>
+              <a:t>씨제이씨협동조합 OSMU 워크벤치 · 관리자·사용자 매뉴얼</a:t>
+            </a:r>
+          </a:p>
+        </p:txBody>
+      </p:sp>
+      <p:sp>
+        <p:nvSpPr>
+          <p:cNvPr id="7" name="TextBox 6"/>
+          <p:cNvSpPr txBox="1"/>
+          <p:nvPr/>
+        </p:nvSpPr>
+        <p:spPr>
+          <a:xfrm>
+            <a:off x="11094415" y="6492240"/>
+            <a:ext cx="731520" cy="274320"/>
+          </a:xfrm>
+          <a:prstGeom prst="rect">
+            <a:avLst/>
+          </a:prstGeom>
+          <a:noFill/>
+        </p:spPr>
+        <p:txBody>
+          <a:bodyPr wrap="square">
+            <a:spAutoFit/>
+          </a:bodyPr>
+          <a:lstStyle/>
+          <a:p>
+            <a:pPr algn="r">
+              <a:lnSpc>
+                <a:spcPct val="100000"/>
+              </a:lnSpc>
+            </a:pPr>
+            <a:r>
+              <a:rPr sz="900" b="0" i="0">
+                <a:solidFill>
+                  <a:srgbClr val="7A828E"/>
+                </a:solidFill>
+                <a:latin typeface="맑은 고딕"/>
+              </a:rPr>
+              <a:t>18</a:t>
             </a:r>
           </a:p>
         </p:txBody>
@@ -10006,7 +10726,7 @@
                           </a:solidFill>
                           <a:latin typeface="맑은 고딕"/>
                         </a:rPr>
-                        <a:t>초안마다 2개 이상 자동 인용. 여기 없는 수치·인증은 AI가 지어내지 않음</a:t>
+                        <a:t>이 글과 관련 있을 때만 0~2개 인용(최근 글과 반복 안 함). 여기 없는 수치·인증은 AI가 지어내지 않음</a:t>
                       </a:r>
                     </a:p>
                   </a:txBody>
@@ -10221,7 +10941,7 @@
 </p:sld>
 </file>
 
-<file path=ppt/slides/slide19.xml><?xml version="1.0" encoding="utf-8"?>
+<file path=ppt/slides/slide2.xml><?xml version="1.0" encoding="utf-8"?>
 <p:sld xmlns:a="http://schemas.openxmlformats.org/drawingml/2006/main" xmlns:p="http://schemas.openxmlformats.org/presentationml/2006/main" xmlns:r="http://schemas.openxmlformats.org/officeDocument/2006/relationships">
   <p:cSld>
     <p:bg>
@@ -10361,7 +11081,7 @@
                 </a:solidFill>
                 <a:latin typeface="맑은 고딕"/>
               </a:rPr>
-              <a:t>④ 안전 · 컴플라이언스</a:t>
+              <a:t>CONTENTS</a:t>
             </a:r>
           </a:p>
         </p:txBody>
@@ -10400,7 +11120,7 @@
                 </a:solidFill>
                 <a:latin typeface="맑은 고딕"/>
               </a:rPr>
-              <a:t>의료법 제56조 + 표시·광고법 — 치료 약속 금지</a:t>
+              <a:t>목차</a:t>
             </a:r>
           </a:p>
         </p:txBody>
@@ -10478,7 +11198,1273 @@
                 </a:solidFill>
                 <a:latin typeface="맑은 고딕"/>
               </a:rPr>
-              <a:t>18</a:t>
+              <a:t>01</a:t>
+            </a:r>
+          </a:p>
+        </p:txBody>
+      </p:sp>
+      <p:sp>
+        <p:nvSpPr>
+          <p:cNvPr id="8" name="Rectangle 7"/>
+          <p:cNvSpPr/>
+          <p:nvPr/>
+        </p:nvSpPr>
+        <p:spPr>
+          <a:xfrm>
+            <a:off x="502920" y="1280160"/>
+            <a:ext cx="11155680" cy="1143000"/>
+          </a:xfrm>
+          <a:prstGeom prst="rect">
+            <a:avLst/>
+          </a:prstGeom>
+          <a:solidFill>
+            <a:srgbClr val="FFFFFF"/>
+          </a:solidFill>
+          <a:ln>
+            <a:noFill/>
+          </a:ln>
+          <a:effectLst/>
+        </p:spPr>
+        <p:style>
+          <a:lnRef idx="1">
+            <a:schemeClr val="accent1"/>
+          </a:lnRef>
+          <a:fillRef idx="3">
+            <a:schemeClr val="accent1"/>
+          </a:fillRef>
+          <a:effectRef idx="2">
+            <a:schemeClr val="accent1"/>
+          </a:effectRef>
+          <a:fontRef idx="minor">
+            <a:schemeClr val="lt1"/>
+          </a:fontRef>
+        </p:style>
+        <p:txBody>
+          <a:bodyPr rtlCol="0" anchor="ctr"/>
+          <a:lstStyle/>
+          <a:p>
+            <a:pPr algn="ctr"/>
+          </a:p>
+        </p:txBody>
+      </p:sp>
+      <p:sp>
+        <p:nvSpPr>
+          <p:cNvPr id="9" name="Rectangle 8"/>
+          <p:cNvSpPr/>
+          <p:nvPr/>
+        </p:nvSpPr>
+        <p:spPr>
+          <a:xfrm>
+            <a:off x="502920" y="1280160"/>
+            <a:ext cx="109728" cy="1143000"/>
+          </a:xfrm>
+          <a:prstGeom prst="rect">
+            <a:avLst/>
+          </a:prstGeom>
+          <a:solidFill>
+            <a:srgbClr val="C9A227"/>
+          </a:solidFill>
+          <a:ln>
+            <a:noFill/>
+          </a:ln>
+          <a:effectLst/>
+        </p:spPr>
+        <p:style>
+          <a:lnRef idx="1">
+            <a:schemeClr val="accent1"/>
+          </a:lnRef>
+          <a:fillRef idx="3">
+            <a:schemeClr val="accent1"/>
+          </a:fillRef>
+          <a:effectRef idx="2">
+            <a:schemeClr val="accent1"/>
+          </a:effectRef>
+          <a:fontRef idx="minor">
+            <a:schemeClr val="lt1"/>
+          </a:fontRef>
+        </p:style>
+        <p:txBody>
+          <a:bodyPr rtlCol="0" anchor="ctr"/>
+          <a:lstStyle/>
+          <a:p>
+            <a:pPr algn="ctr"/>
+          </a:p>
+        </p:txBody>
+      </p:sp>
+      <p:sp>
+        <p:nvSpPr>
+          <p:cNvPr id="10" name="Rounded Rectangle 9"/>
+          <p:cNvSpPr/>
+          <p:nvPr/>
+        </p:nvSpPr>
+        <p:spPr>
+          <a:xfrm>
+            <a:off x="777240" y="1645920"/>
+            <a:ext cx="1005840" cy="402336"/>
+          </a:xfrm>
+          <a:prstGeom prst="roundRect">
+            <a:avLst/>
+          </a:prstGeom>
+          <a:solidFill>
+            <a:srgbClr val="C9A227"/>
+          </a:solidFill>
+          <a:ln>
+            <a:noFill/>
+          </a:ln>
+          <a:effectLst/>
+        </p:spPr>
+        <p:style>
+          <a:lnRef idx="1">
+            <a:schemeClr val="accent1"/>
+          </a:lnRef>
+          <a:fillRef idx="3">
+            <a:schemeClr val="accent1"/>
+          </a:fillRef>
+          <a:effectRef idx="2">
+            <a:schemeClr val="accent1"/>
+          </a:effectRef>
+          <a:fontRef idx="minor">
+            <a:schemeClr val="lt1"/>
+          </a:fontRef>
+        </p:style>
+        <p:txBody>
+          <a:bodyPr rtlCol="0" anchor="ctr"/>
+          <a:lstStyle/>
+          <a:p>
+            <a:pPr algn="ctr"/>
+          </a:p>
+        </p:txBody>
+      </p:sp>
+      <p:sp>
+        <p:nvSpPr>
+          <p:cNvPr id="11" name="TextBox 10"/>
+          <p:cNvSpPr txBox="1"/>
+          <p:nvPr/>
+        </p:nvSpPr>
+        <p:spPr>
+          <a:xfrm>
+            <a:off x="777240" y="1645920"/>
+            <a:ext cx="1005840" cy="402336"/>
+          </a:xfrm>
+          <a:prstGeom prst="rect">
+            <a:avLst/>
+          </a:prstGeom>
+          <a:noFill/>
+        </p:spPr>
+        <p:txBody>
+          <a:bodyPr wrap="square">
+            <a:spAutoFit/>
+          </a:bodyPr>
+          <a:lstStyle/>
+          <a:p>
+            <a:pPr algn="ctr">
+              <a:lnSpc>
+                <a:spcPct val="100000"/>
+              </a:lnSpc>
+            </a:pPr>
+            <a:r>
+              <a:rPr sz="1050" b="1" i="0">
+                <a:solidFill>
+                  <a:srgbClr val="FFFFFF"/>
+                </a:solidFill>
+                <a:latin typeface="맑은 고딕"/>
+              </a:rPr>
+              <a:t>준비</a:t>
+            </a:r>
+          </a:p>
+        </p:txBody>
+      </p:sp>
+      <p:sp>
+        <p:nvSpPr>
+          <p:cNvPr id="12" name="TextBox 11"/>
+          <p:cNvSpPr txBox="1"/>
+          <p:nvPr/>
+        </p:nvSpPr>
+        <p:spPr>
+          <a:xfrm>
+            <a:off x="2011680" y="1389888"/>
+            <a:ext cx="8778240" cy="365760"/>
+          </a:xfrm>
+          <a:prstGeom prst="rect">
+            <a:avLst/>
+          </a:prstGeom>
+          <a:noFill/>
+        </p:spPr>
+        <p:txBody>
+          <a:bodyPr wrap="square">
+            <a:spAutoFit/>
+          </a:bodyPr>
+          <a:lstStyle/>
+          <a:p>
+            <a:pPr algn="l">
+              <a:lnSpc>
+                <a:spcPct val="100000"/>
+              </a:lnSpc>
+            </a:pPr>
+            <a:r>
+              <a:rPr sz="1650" b="1" i="0">
+                <a:solidFill>
+                  <a:srgbClr val="23262B"/>
+                </a:solidFill>
+                <a:latin typeface="맑은 고딕"/>
+              </a:rPr>
+              <a:t>① 초기 설정 — 키 3종 등록</a:t>
+            </a:r>
+          </a:p>
+        </p:txBody>
+      </p:sp>
+      <p:sp>
+        <p:nvSpPr>
+          <p:cNvPr id="13" name="TextBox 12"/>
+          <p:cNvSpPr txBox="1"/>
+          <p:nvPr/>
+        </p:nvSpPr>
+        <p:spPr>
+          <a:xfrm>
+            <a:off x="2011680" y="1828800"/>
+            <a:ext cx="8778240" cy="457200"/>
+          </a:xfrm>
+          <a:prstGeom prst="rect">
+            <a:avLst/>
+          </a:prstGeom>
+          <a:noFill/>
+        </p:spPr>
+        <p:txBody>
+          <a:bodyPr wrap="square">
+            <a:spAutoFit/>
+          </a:bodyPr>
+          <a:lstStyle/>
+          <a:p>
+            <a:pPr algn="l">
+              <a:lnSpc>
+                <a:spcPct val="100000"/>
+              </a:lnSpc>
+            </a:pPr>
+            <a:r>
+              <a:rPr sz="1150" b="0" i="0">
+                <a:solidFill>
+                  <a:srgbClr val="7A828E"/>
+                </a:solidFill>
+                <a:latin typeface="맑은 고딕"/>
+              </a:rPr>
+              <a:t>LLM 1개 + 네이버 API 2개. 한 번만 하면 됩니다</a:t>
+            </a:r>
+          </a:p>
+        </p:txBody>
+      </p:sp>
+      <p:sp>
+        <p:nvSpPr>
+          <p:cNvPr id="14" name="Rectangle 13"/>
+          <p:cNvSpPr/>
+          <p:nvPr/>
+        </p:nvSpPr>
+        <p:spPr>
+          <a:xfrm>
+            <a:off x="502920" y="2560320"/>
+            <a:ext cx="11155680" cy="1143000"/>
+          </a:xfrm>
+          <a:prstGeom prst="rect">
+            <a:avLst/>
+          </a:prstGeom>
+          <a:solidFill>
+            <a:srgbClr val="FFFFFF"/>
+          </a:solidFill>
+          <a:ln>
+            <a:noFill/>
+          </a:ln>
+          <a:effectLst/>
+        </p:spPr>
+        <p:style>
+          <a:lnRef idx="1">
+            <a:schemeClr val="accent1"/>
+          </a:lnRef>
+          <a:fillRef idx="3">
+            <a:schemeClr val="accent1"/>
+          </a:fillRef>
+          <a:effectRef idx="2">
+            <a:schemeClr val="accent1"/>
+          </a:effectRef>
+          <a:fontRef idx="minor">
+            <a:schemeClr val="lt1"/>
+          </a:fontRef>
+        </p:style>
+        <p:txBody>
+          <a:bodyPr rtlCol="0" anchor="ctr"/>
+          <a:lstStyle/>
+          <a:p>
+            <a:pPr algn="ctr"/>
+          </a:p>
+        </p:txBody>
+      </p:sp>
+      <p:sp>
+        <p:nvSpPr>
+          <p:cNvPr id="15" name="Rectangle 14"/>
+          <p:cNvSpPr/>
+          <p:nvPr/>
+        </p:nvSpPr>
+        <p:spPr>
+          <a:xfrm>
+            <a:off x="502920" y="2560320"/>
+            <a:ext cx="109728" cy="1143000"/>
+          </a:xfrm>
+          <a:prstGeom prst="rect">
+            <a:avLst/>
+          </a:prstGeom>
+          <a:solidFill>
+            <a:srgbClr val="1B3A5C"/>
+          </a:solidFill>
+          <a:ln>
+            <a:noFill/>
+          </a:ln>
+          <a:effectLst/>
+        </p:spPr>
+        <p:style>
+          <a:lnRef idx="1">
+            <a:schemeClr val="accent1"/>
+          </a:lnRef>
+          <a:fillRef idx="3">
+            <a:schemeClr val="accent1"/>
+          </a:fillRef>
+          <a:effectRef idx="2">
+            <a:schemeClr val="accent1"/>
+          </a:effectRef>
+          <a:fontRef idx="minor">
+            <a:schemeClr val="lt1"/>
+          </a:fontRef>
+        </p:style>
+        <p:txBody>
+          <a:bodyPr rtlCol="0" anchor="ctr"/>
+          <a:lstStyle/>
+          <a:p>
+            <a:pPr algn="ctr"/>
+          </a:p>
+        </p:txBody>
+      </p:sp>
+      <p:sp>
+        <p:nvSpPr>
+          <p:cNvPr id="16" name="Rounded Rectangle 15"/>
+          <p:cNvSpPr/>
+          <p:nvPr/>
+        </p:nvSpPr>
+        <p:spPr>
+          <a:xfrm>
+            <a:off x="777240" y="2926080"/>
+            <a:ext cx="1005840" cy="402336"/>
+          </a:xfrm>
+          <a:prstGeom prst="roundRect">
+            <a:avLst/>
+          </a:prstGeom>
+          <a:solidFill>
+            <a:srgbClr val="1B3A5C"/>
+          </a:solidFill>
+          <a:ln>
+            <a:noFill/>
+          </a:ln>
+          <a:effectLst/>
+        </p:spPr>
+        <p:style>
+          <a:lnRef idx="1">
+            <a:schemeClr val="accent1"/>
+          </a:lnRef>
+          <a:fillRef idx="3">
+            <a:schemeClr val="accent1"/>
+          </a:fillRef>
+          <a:effectRef idx="2">
+            <a:schemeClr val="accent1"/>
+          </a:effectRef>
+          <a:fontRef idx="minor">
+            <a:schemeClr val="lt1"/>
+          </a:fontRef>
+        </p:style>
+        <p:txBody>
+          <a:bodyPr rtlCol="0" anchor="ctr"/>
+          <a:lstStyle/>
+          <a:p>
+            <a:pPr algn="ctr"/>
+          </a:p>
+        </p:txBody>
+      </p:sp>
+      <p:sp>
+        <p:nvSpPr>
+          <p:cNvPr id="17" name="TextBox 16"/>
+          <p:cNvSpPr txBox="1"/>
+          <p:nvPr/>
+        </p:nvSpPr>
+        <p:spPr>
+          <a:xfrm>
+            <a:off x="777240" y="2926080"/>
+            <a:ext cx="1005840" cy="402336"/>
+          </a:xfrm>
+          <a:prstGeom prst="rect">
+            <a:avLst/>
+          </a:prstGeom>
+          <a:noFill/>
+        </p:spPr>
+        <p:txBody>
+          <a:bodyPr wrap="square">
+            <a:spAutoFit/>
+          </a:bodyPr>
+          <a:lstStyle/>
+          <a:p>
+            <a:pPr algn="ctr">
+              <a:lnSpc>
+                <a:spcPct val="100000"/>
+              </a:lnSpc>
+            </a:pPr>
+            <a:r>
+              <a:rPr sz="1050" b="1" i="0">
+                <a:solidFill>
+                  <a:srgbClr val="FFFFFF"/>
+                </a:solidFill>
+                <a:latin typeface="맑은 고딕"/>
+              </a:rPr>
+              <a:t>핵심</a:t>
+            </a:r>
+          </a:p>
+        </p:txBody>
+      </p:sp>
+      <p:sp>
+        <p:nvSpPr>
+          <p:cNvPr id="18" name="TextBox 17"/>
+          <p:cNvSpPr txBox="1"/>
+          <p:nvPr/>
+        </p:nvSpPr>
+        <p:spPr>
+          <a:xfrm>
+            <a:off x="2011680" y="2670048"/>
+            <a:ext cx="8778240" cy="365760"/>
+          </a:xfrm>
+          <a:prstGeom prst="rect">
+            <a:avLst/>
+          </a:prstGeom>
+          <a:noFill/>
+        </p:spPr>
+        <p:txBody>
+          <a:bodyPr wrap="square">
+            <a:spAutoFit/>
+          </a:bodyPr>
+          <a:lstStyle/>
+          <a:p>
+            <a:pPr algn="l">
+              <a:lnSpc>
+                <a:spcPct val="100000"/>
+              </a:lnSpc>
+            </a:pPr>
+            <a:r>
+              <a:rPr sz="1650" b="1" i="0">
+                <a:solidFill>
+                  <a:srgbClr val="23262B"/>
+                </a:solidFill>
+                <a:latin typeface="맑은 고딕"/>
+              </a:rPr>
+              <a:t>② SEO 키워드 새로 고르기와 수치 유지</a:t>
+            </a:r>
+          </a:p>
+        </p:txBody>
+      </p:sp>
+      <p:sp>
+        <p:nvSpPr>
+          <p:cNvPr id="19" name="TextBox 18"/>
+          <p:cNvSpPr txBox="1"/>
+          <p:nvPr/>
+        </p:nvSpPr>
+        <p:spPr>
+          <a:xfrm>
+            <a:off x="2011680" y="3108960"/>
+            <a:ext cx="8778240" cy="457200"/>
+          </a:xfrm>
+          <a:prstGeom prst="rect">
+            <a:avLst/>
+          </a:prstGeom>
+          <a:noFill/>
+        </p:spPr>
+        <p:txBody>
+          <a:bodyPr wrap="square">
+            <a:spAutoFit/>
+          </a:bodyPr>
+          <a:lstStyle/>
+          <a:p>
+            <a:pPr algn="l">
+              <a:lnSpc>
+                <a:spcPct val="100000"/>
+              </a:lnSpc>
+            </a:pPr>
+            <a:r>
+              <a:rPr sz="1150" b="0" i="0">
+                <a:solidFill>
+                  <a:srgbClr val="7A828E"/>
+                </a:solidFill>
+                <a:latin typeface="맑은 고딕"/>
+              </a:rPr>
+              <a:t>이 매뉴얼의 심장부: 씨앗→발굴→측정→판정→적용, 그리고 30일마다 숫자 재기</a:t>
+            </a:r>
+          </a:p>
+        </p:txBody>
+      </p:sp>
+      <p:sp>
+        <p:nvSpPr>
+          <p:cNvPr id="20" name="Rectangle 19"/>
+          <p:cNvSpPr/>
+          <p:nvPr/>
+        </p:nvSpPr>
+        <p:spPr>
+          <a:xfrm>
+            <a:off x="502920" y="3840480"/>
+            <a:ext cx="11155680" cy="1143000"/>
+          </a:xfrm>
+          <a:prstGeom prst="rect">
+            <a:avLst/>
+          </a:prstGeom>
+          <a:solidFill>
+            <a:srgbClr val="FFFFFF"/>
+          </a:solidFill>
+          <a:ln>
+            <a:noFill/>
+          </a:ln>
+          <a:effectLst/>
+        </p:spPr>
+        <p:style>
+          <a:lnRef idx="1">
+            <a:schemeClr val="accent1"/>
+          </a:lnRef>
+          <a:fillRef idx="3">
+            <a:schemeClr val="accent1"/>
+          </a:fillRef>
+          <a:effectRef idx="2">
+            <a:schemeClr val="accent1"/>
+          </a:effectRef>
+          <a:fontRef idx="minor">
+            <a:schemeClr val="lt1"/>
+          </a:fontRef>
+        </p:style>
+        <p:txBody>
+          <a:bodyPr rtlCol="0" anchor="ctr"/>
+          <a:lstStyle/>
+          <a:p>
+            <a:pPr algn="ctr"/>
+          </a:p>
+        </p:txBody>
+      </p:sp>
+      <p:sp>
+        <p:nvSpPr>
+          <p:cNvPr id="21" name="Rectangle 20"/>
+          <p:cNvSpPr/>
+          <p:nvPr/>
+        </p:nvSpPr>
+        <p:spPr>
+          <a:xfrm>
+            <a:off x="502920" y="3840480"/>
+            <a:ext cx="109728" cy="1143000"/>
+          </a:xfrm>
+          <a:prstGeom prst="rect">
+            <a:avLst/>
+          </a:prstGeom>
+          <a:solidFill>
+            <a:srgbClr val="1B3A5C"/>
+          </a:solidFill>
+          <a:ln>
+            <a:noFill/>
+          </a:ln>
+          <a:effectLst/>
+        </p:spPr>
+        <p:style>
+          <a:lnRef idx="1">
+            <a:schemeClr val="accent1"/>
+          </a:lnRef>
+          <a:fillRef idx="3">
+            <a:schemeClr val="accent1"/>
+          </a:fillRef>
+          <a:effectRef idx="2">
+            <a:schemeClr val="accent1"/>
+          </a:effectRef>
+          <a:fontRef idx="minor">
+            <a:schemeClr val="lt1"/>
+          </a:fontRef>
+        </p:style>
+        <p:txBody>
+          <a:bodyPr rtlCol="0" anchor="ctr"/>
+          <a:lstStyle/>
+          <a:p>
+            <a:pPr algn="ctr"/>
+          </a:p>
+        </p:txBody>
+      </p:sp>
+      <p:sp>
+        <p:nvSpPr>
+          <p:cNvPr id="22" name="Rounded Rectangle 21"/>
+          <p:cNvSpPr/>
+          <p:nvPr/>
+        </p:nvSpPr>
+        <p:spPr>
+          <a:xfrm>
+            <a:off x="777240" y="4206240"/>
+            <a:ext cx="1005840" cy="402336"/>
+          </a:xfrm>
+          <a:prstGeom prst="roundRect">
+            <a:avLst/>
+          </a:prstGeom>
+          <a:solidFill>
+            <a:srgbClr val="1B3A5C"/>
+          </a:solidFill>
+          <a:ln>
+            <a:noFill/>
+          </a:ln>
+          <a:effectLst/>
+        </p:spPr>
+        <p:style>
+          <a:lnRef idx="1">
+            <a:schemeClr val="accent1"/>
+          </a:lnRef>
+          <a:fillRef idx="3">
+            <a:schemeClr val="accent1"/>
+          </a:fillRef>
+          <a:effectRef idx="2">
+            <a:schemeClr val="accent1"/>
+          </a:effectRef>
+          <a:fontRef idx="minor">
+            <a:schemeClr val="lt1"/>
+          </a:fontRef>
+        </p:style>
+        <p:txBody>
+          <a:bodyPr rtlCol="0" anchor="ctr"/>
+          <a:lstStyle/>
+          <a:p>
+            <a:pPr algn="ctr"/>
+          </a:p>
+        </p:txBody>
+      </p:sp>
+      <p:sp>
+        <p:nvSpPr>
+          <p:cNvPr id="23" name="TextBox 22"/>
+          <p:cNvSpPr txBox="1"/>
+          <p:nvPr/>
+        </p:nvSpPr>
+        <p:spPr>
+          <a:xfrm>
+            <a:off x="777240" y="4206240"/>
+            <a:ext cx="1005840" cy="402336"/>
+          </a:xfrm>
+          <a:prstGeom prst="rect">
+            <a:avLst/>
+          </a:prstGeom>
+          <a:noFill/>
+        </p:spPr>
+        <p:txBody>
+          <a:bodyPr wrap="square">
+            <a:spAutoFit/>
+          </a:bodyPr>
+          <a:lstStyle/>
+          <a:p>
+            <a:pPr algn="ctr">
+              <a:lnSpc>
+                <a:spcPct val="100000"/>
+              </a:lnSpc>
+            </a:pPr>
+            <a:r>
+              <a:rPr sz="1050" b="1" i="0">
+                <a:solidFill>
+                  <a:srgbClr val="FFFFFF"/>
+                </a:solidFill>
+                <a:latin typeface="맑은 고딕"/>
+              </a:rPr>
+              <a:t>일상</a:t>
+            </a:r>
+          </a:p>
+        </p:txBody>
+      </p:sp>
+      <p:sp>
+        <p:nvSpPr>
+          <p:cNvPr id="24" name="TextBox 23"/>
+          <p:cNvSpPr txBox="1"/>
+          <p:nvPr/>
+        </p:nvSpPr>
+        <p:spPr>
+          <a:xfrm>
+            <a:off x="2011680" y="3950208"/>
+            <a:ext cx="8778240" cy="365760"/>
+          </a:xfrm>
+          <a:prstGeom prst="rect">
+            <a:avLst/>
+          </a:prstGeom>
+          <a:noFill/>
+        </p:spPr>
+        <p:txBody>
+          <a:bodyPr wrap="square">
+            <a:spAutoFit/>
+          </a:bodyPr>
+          <a:lstStyle/>
+          <a:p>
+            <a:pPr algn="l">
+              <a:lnSpc>
+                <a:spcPct val="100000"/>
+              </a:lnSpc>
+            </a:pPr>
+            <a:r>
+              <a:rPr sz="1650" b="1" i="0">
+                <a:solidFill>
+                  <a:srgbClr val="23262B"/>
+                </a:solidFill>
+                <a:latin typeface="맑은 고딕"/>
+              </a:rPr>
+              <a:t>③ 매일 쓰는 법</a:t>
+            </a:r>
+          </a:p>
+        </p:txBody>
+      </p:sp>
+      <p:sp>
+        <p:nvSpPr>
+          <p:cNvPr id="25" name="TextBox 24"/>
+          <p:cNvSpPr txBox="1"/>
+          <p:nvPr/>
+        </p:nvSpPr>
+        <p:spPr>
+          <a:xfrm>
+            <a:off x="2011680" y="4389120"/>
+            <a:ext cx="8778240" cy="457200"/>
+          </a:xfrm>
+          <a:prstGeom prst="rect">
+            <a:avLst/>
+          </a:prstGeom>
+          <a:noFill/>
+        </p:spPr>
+        <p:txBody>
+          <a:bodyPr wrap="square">
+            <a:spAutoFit/>
+          </a:bodyPr>
+          <a:lstStyle/>
+          <a:p>
+            <a:pPr algn="l">
+              <a:lnSpc>
+                <a:spcPct val="100000"/>
+              </a:lnSpc>
+            </a:pPr>
+            <a:r>
+              <a:rPr sz="1150" b="0" i="0">
+                <a:solidFill>
+                  <a:srgbClr val="7A828E"/>
+                </a:solidFill>
+                <a:latin typeface="맑은 고딕"/>
+              </a:rPr>
+              <a:t>워크벤치·뉴스·브랜드 킷·네이버 게시</a:t>
+            </a:r>
+          </a:p>
+        </p:txBody>
+      </p:sp>
+      <p:sp>
+        <p:nvSpPr>
+          <p:cNvPr id="26" name="Rectangle 25"/>
+          <p:cNvSpPr/>
+          <p:nvPr/>
+        </p:nvSpPr>
+        <p:spPr>
+          <a:xfrm>
+            <a:off x="502920" y="5120640"/>
+            <a:ext cx="11155680" cy="1143000"/>
+          </a:xfrm>
+          <a:prstGeom prst="rect">
+            <a:avLst/>
+          </a:prstGeom>
+          <a:solidFill>
+            <a:srgbClr val="FFFFFF"/>
+          </a:solidFill>
+          <a:ln>
+            <a:noFill/>
+          </a:ln>
+          <a:effectLst/>
+        </p:spPr>
+        <p:style>
+          <a:lnRef idx="1">
+            <a:schemeClr val="accent1"/>
+          </a:lnRef>
+          <a:fillRef idx="3">
+            <a:schemeClr val="accent1"/>
+          </a:fillRef>
+          <a:effectRef idx="2">
+            <a:schemeClr val="accent1"/>
+          </a:effectRef>
+          <a:fontRef idx="minor">
+            <a:schemeClr val="lt1"/>
+          </a:fontRef>
+        </p:style>
+        <p:txBody>
+          <a:bodyPr rtlCol="0" anchor="ctr"/>
+          <a:lstStyle/>
+          <a:p>
+            <a:pPr algn="ctr"/>
+          </a:p>
+        </p:txBody>
+      </p:sp>
+      <p:sp>
+        <p:nvSpPr>
+          <p:cNvPr id="27" name="Rectangle 26"/>
+          <p:cNvSpPr/>
+          <p:nvPr/>
+        </p:nvSpPr>
+        <p:spPr>
+          <a:xfrm>
+            <a:off x="502920" y="5120640"/>
+            <a:ext cx="109728" cy="1143000"/>
+          </a:xfrm>
+          <a:prstGeom prst="rect">
+            <a:avLst/>
+          </a:prstGeom>
+          <a:solidFill>
+            <a:srgbClr val="2F6B7A"/>
+          </a:solidFill>
+          <a:ln>
+            <a:noFill/>
+          </a:ln>
+          <a:effectLst/>
+        </p:spPr>
+        <p:style>
+          <a:lnRef idx="1">
+            <a:schemeClr val="accent1"/>
+          </a:lnRef>
+          <a:fillRef idx="3">
+            <a:schemeClr val="accent1"/>
+          </a:fillRef>
+          <a:effectRef idx="2">
+            <a:schemeClr val="accent1"/>
+          </a:effectRef>
+          <a:fontRef idx="minor">
+            <a:schemeClr val="lt1"/>
+          </a:fontRef>
+        </p:style>
+        <p:txBody>
+          <a:bodyPr rtlCol="0" anchor="ctr"/>
+          <a:lstStyle/>
+          <a:p>
+            <a:pPr algn="ctr"/>
+          </a:p>
+        </p:txBody>
+      </p:sp>
+      <p:sp>
+        <p:nvSpPr>
+          <p:cNvPr id="28" name="Rounded Rectangle 27"/>
+          <p:cNvSpPr/>
+          <p:nvPr/>
+        </p:nvSpPr>
+        <p:spPr>
+          <a:xfrm>
+            <a:off x="777240" y="5486400"/>
+            <a:ext cx="1005840" cy="402336"/>
+          </a:xfrm>
+          <a:prstGeom prst="roundRect">
+            <a:avLst/>
+          </a:prstGeom>
+          <a:solidFill>
+            <a:srgbClr val="2F6B7A"/>
+          </a:solidFill>
+          <a:ln>
+            <a:noFill/>
+          </a:ln>
+          <a:effectLst/>
+        </p:spPr>
+        <p:style>
+          <a:lnRef idx="1">
+            <a:schemeClr val="accent1"/>
+          </a:lnRef>
+          <a:fillRef idx="3">
+            <a:schemeClr val="accent1"/>
+          </a:fillRef>
+          <a:effectRef idx="2">
+            <a:schemeClr val="accent1"/>
+          </a:effectRef>
+          <a:fontRef idx="minor">
+            <a:schemeClr val="lt1"/>
+          </a:fontRef>
+        </p:style>
+        <p:txBody>
+          <a:bodyPr rtlCol="0" anchor="ctr"/>
+          <a:lstStyle/>
+          <a:p>
+            <a:pPr algn="ctr"/>
+          </a:p>
+        </p:txBody>
+      </p:sp>
+      <p:sp>
+        <p:nvSpPr>
+          <p:cNvPr id="29" name="TextBox 28"/>
+          <p:cNvSpPr txBox="1"/>
+          <p:nvPr/>
+        </p:nvSpPr>
+        <p:spPr>
+          <a:xfrm>
+            <a:off x="777240" y="5486400"/>
+            <a:ext cx="1005840" cy="402336"/>
+          </a:xfrm>
+          <a:prstGeom prst="rect">
+            <a:avLst/>
+          </a:prstGeom>
+          <a:noFill/>
+        </p:spPr>
+        <p:txBody>
+          <a:bodyPr wrap="square">
+            <a:spAutoFit/>
+          </a:bodyPr>
+          <a:lstStyle/>
+          <a:p>
+            <a:pPr algn="ctr">
+              <a:lnSpc>
+                <a:spcPct val="100000"/>
+              </a:lnSpc>
+            </a:pPr>
+            <a:r>
+              <a:rPr sz="1050" b="1" i="0">
+                <a:solidFill>
+                  <a:srgbClr val="FFFFFF"/>
+                </a:solidFill>
+                <a:latin typeface="맑은 고딕"/>
+              </a:rPr>
+              <a:t>안전</a:t>
+            </a:r>
+          </a:p>
+        </p:txBody>
+      </p:sp>
+      <p:sp>
+        <p:nvSpPr>
+          <p:cNvPr id="30" name="TextBox 29"/>
+          <p:cNvSpPr txBox="1"/>
+          <p:nvPr/>
+        </p:nvSpPr>
+        <p:spPr>
+          <a:xfrm>
+            <a:off x="2011680" y="5230368"/>
+            <a:ext cx="8778240" cy="365760"/>
+          </a:xfrm>
+          <a:prstGeom prst="rect">
+            <a:avLst/>
+          </a:prstGeom>
+          <a:noFill/>
+        </p:spPr>
+        <p:txBody>
+          <a:bodyPr wrap="square">
+            <a:spAutoFit/>
+          </a:bodyPr>
+          <a:lstStyle/>
+          <a:p>
+            <a:pPr algn="l">
+              <a:lnSpc>
+                <a:spcPct val="100000"/>
+              </a:lnSpc>
+            </a:pPr>
+            <a:r>
+              <a:rPr sz="1650" b="1" i="0">
+                <a:solidFill>
+                  <a:srgbClr val="23262B"/>
+                </a:solidFill>
+                <a:latin typeface="맑은 고딕"/>
+              </a:rPr>
+              <a:t>④ 컴플라이언스·비용·주의사항</a:t>
+            </a:r>
+          </a:p>
+        </p:txBody>
+      </p:sp>
+      <p:sp>
+        <p:nvSpPr>
+          <p:cNvPr id="31" name="TextBox 30"/>
+          <p:cNvSpPr txBox="1"/>
+          <p:nvPr/>
+        </p:nvSpPr>
+        <p:spPr>
+          <a:xfrm>
+            <a:off x="2011680" y="5669280"/>
+            <a:ext cx="8778240" cy="457200"/>
+          </a:xfrm>
+          <a:prstGeom prst="rect">
+            <a:avLst/>
+          </a:prstGeom>
+          <a:noFill/>
+        </p:spPr>
+        <p:txBody>
+          <a:bodyPr wrap="square">
+            <a:spAutoFit/>
+          </a:bodyPr>
+          <a:lstStyle/>
+          <a:p>
+            <a:pPr algn="l">
+              <a:lnSpc>
+                <a:spcPct val="100000"/>
+              </a:lnSpc>
+            </a:pPr>
+            <a:r>
+              <a:rPr sz="1150" b="0" i="0">
+                <a:solidFill>
+                  <a:srgbClr val="7A828E"/>
+                </a:solidFill>
+                <a:latin typeface="맑은 고딕"/>
+              </a:rPr>
+              <a:t>의료법 검수, 과금 지점, 함정 모음, FAQ</a:t>
+            </a:r>
+          </a:p>
+        </p:txBody>
+      </p:sp>
+    </p:spTree>
+  </p:cSld>
+  <p:clrMapOvr>
+    <a:masterClrMapping/>
+  </p:clrMapOvr>
+</p:sld>
+</file>
+
+<file path=ppt/slides/slide20.xml><?xml version="1.0" encoding="utf-8"?>
+<p:sld xmlns:a="http://schemas.openxmlformats.org/drawingml/2006/main" xmlns:p="http://schemas.openxmlformats.org/presentationml/2006/main" xmlns:r="http://schemas.openxmlformats.org/officeDocument/2006/relationships">
+  <p:cSld>
+    <p:bg>
+      <p:bgPr>
+        <a:solidFill>
+          <a:srgbClr val="F7F5F0"/>
+        </a:solidFill>
+        <a:effectLst/>
+      </p:bgPr>
+    </p:bg>
+    <p:spTree>
+      <p:nvGrpSpPr>
+        <p:cNvPr id="1" name=""/>
+        <p:cNvGrpSpPr/>
+        <p:nvPr/>
+      </p:nvGrpSpPr>
+      <p:grpSpPr/>
+      <p:sp>
+        <p:nvSpPr>
+          <p:cNvPr id="2" name="Rectangle 1"/>
+          <p:cNvSpPr/>
+          <p:nvPr/>
+        </p:nvSpPr>
+        <p:spPr>
+          <a:xfrm>
+            <a:off x="0" y="0"/>
+            <a:ext cx="12191695" cy="1051560"/>
+          </a:xfrm>
+          <a:prstGeom prst="rect">
+            <a:avLst/>
+          </a:prstGeom>
+          <a:solidFill>
+            <a:srgbClr val="122A44"/>
+          </a:solidFill>
+          <a:ln>
+            <a:noFill/>
+          </a:ln>
+          <a:effectLst/>
+        </p:spPr>
+        <p:style>
+          <a:lnRef idx="1">
+            <a:schemeClr val="accent1"/>
+          </a:lnRef>
+          <a:fillRef idx="3">
+            <a:schemeClr val="accent1"/>
+          </a:fillRef>
+          <a:effectRef idx="2">
+            <a:schemeClr val="accent1"/>
+          </a:effectRef>
+          <a:fontRef idx="minor">
+            <a:schemeClr val="lt1"/>
+          </a:fontRef>
+        </p:style>
+        <p:txBody>
+          <a:bodyPr rtlCol="0" anchor="ctr"/>
+          <a:lstStyle/>
+          <a:p>
+            <a:pPr algn="ctr"/>
+          </a:p>
+        </p:txBody>
+      </p:sp>
+      <p:sp>
+        <p:nvSpPr>
+          <p:cNvPr id="3" name="Rectangle 2"/>
+          <p:cNvSpPr/>
+          <p:nvPr/>
+        </p:nvSpPr>
+        <p:spPr>
+          <a:xfrm>
+            <a:off x="0" y="1051560"/>
+            <a:ext cx="12191695" cy="38100"/>
+          </a:xfrm>
+          <a:prstGeom prst="rect">
+            <a:avLst/>
+          </a:prstGeom>
+          <a:solidFill>
+            <a:srgbClr val="1B3A5C"/>
+          </a:solidFill>
+          <a:ln>
+            <a:noFill/>
+          </a:ln>
+          <a:effectLst/>
+        </p:spPr>
+        <p:style>
+          <a:lnRef idx="1">
+            <a:schemeClr val="accent1"/>
+          </a:lnRef>
+          <a:fillRef idx="3">
+            <a:schemeClr val="accent1"/>
+          </a:fillRef>
+          <a:effectRef idx="2">
+            <a:schemeClr val="accent1"/>
+          </a:effectRef>
+          <a:fontRef idx="minor">
+            <a:schemeClr val="lt1"/>
+          </a:fontRef>
+        </p:style>
+        <p:txBody>
+          <a:bodyPr rtlCol="0" anchor="ctr"/>
+          <a:lstStyle/>
+          <a:p>
+            <a:pPr algn="ctr"/>
+          </a:p>
+        </p:txBody>
+      </p:sp>
+      <p:sp>
+        <p:nvSpPr>
+          <p:cNvPr id="4" name="TextBox 3"/>
+          <p:cNvSpPr txBox="1"/>
+          <p:nvPr/>
+        </p:nvSpPr>
+        <p:spPr>
+          <a:xfrm>
+            <a:off x="502920" y="109728"/>
+            <a:ext cx="8686800" cy="292608"/>
+          </a:xfrm>
+          <a:prstGeom prst="rect">
+            <a:avLst/>
+          </a:prstGeom>
+          <a:noFill/>
+        </p:spPr>
+        <p:txBody>
+          <a:bodyPr wrap="square">
+            <a:spAutoFit/>
+          </a:bodyPr>
+          <a:lstStyle/>
+          <a:p>
+            <a:pPr algn="l">
+              <a:lnSpc>
+                <a:spcPct val="100000"/>
+              </a:lnSpc>
+            </a:pPr>
+            <a:r>
+              <a:rPr sz="1200" b="1" i="0">
+                <a:solidFill>
+                  <a:srgbClr val="1B3A5C"/>
+                </a:solidFill>
+                <a:latin typeface="맑은 고딕"/>
+              </a:rPr>
+              <a:t>④ 안전 · 컴플라이언스</a:t>
+            </a:r>
+          </a:p>
+        </p:txBody>
+      </p:sp>
+      <p:sp>
+        <p:nvSpPr>
+          <p:cNvPr id="5" name="TextBox 4"/>
+          <p:cNvSpPr txBox="1"/>
+          <p:nvPr/>
+        </p:nvSpPr>
+        <p:spPr>
+          <a:xfrm>
+            <a:off x="457200" y="347472"/>
+            <a:ext cx="10515600" cy="621792"/>
+          </a:xfrm>
+          <a:prstGeom prst="rect">
+            <a:avLst/>
+          </a:prstGeom>
+          <a:noFill/>
+        </p:spPr>
+        <p:txBody>
+          <a:bodyPr wrap="square">
+            <a:spAutoFit/>
+          </a:bodyPr>
+          <a:lstStyle/>
+          <a:p>
+            <a:pPr algn="l">
+              <a:lnSpc>
+                <a:spcPct val="100000"/>
+              </a:lnSpc>
+            </a:pPr>
+            <a:r>
+              <a:rPr sz="2400" b="1" i="0">
+                <a:solidFill>
+                  <a:srgbClr val="FFFFFF"/>
+                </a:solidFill>
+                <a:latin typeface="맑은 고딕"/>
+              </a:rPr>
+              <a:t>의료법 제56조 + 표시·광고법 — 치료 약속 금지</a:t>
+            </a:r>
+          </a:p>
+        </p:txBody>
+      </p:sp>
+      <p:sp>
+        <p:nvSpPr>
+          <p:cNvPr id="6" name="TextBox 5"/>
+          <p:cNvSpPr txBox="1"/>
+          <p:nvPr/>
+        </p:nvSpPr>
+        <p:spPr>
+          <a:xfrm>
+            <a:off x="457200" y="6492240"/>
+            <a:ext cx="8229600" cy="274320"/>
+          </a:xfrm>
+          <a:prstGeom prst="rect">
+            <a:avLst/>
+          </a:prstGeom>
+          <a:noFill/>
+        </p:spPr>
+        <p:txBody>
+          <a:bodyPr wrap="square">
+            <a:spAutoFit/>
+          </a:bodyPr>
+          <a:lstStyle/>
+          <a:p>
+            <a:pPr algn="l">
+              <a:lnSpc>
+                <a:spcPct val="100000"/>
+              </a:lnSpc>
+            </a:pPr>
+            <a:r>
+              <a:rPr sz="900" b="0" i="0">
+                <a:solidFill>
+                  <a:srgbClr val="7A828E"/>
+                </a:solidFill>
+                <a:latin typeface="맑은 고딕"/>
+              </a:rPr>
+              <a:t>씨제이씨협동조합 OSMU 워크벤치 · 관리자·사용자 매뉴얼</a:t>
+            </a:r>
+          </a:p>
+        </p:txBody>
+      </p:sp>
+      <p:sp>
+        <p:nvSpPr>
+          <p:cNvPr id="7" name="TextBox 6"/>
+          <p:cNvSpPr txBox="1"/>
+          <p:nvPr/>
+        </p:nvSpPr>
+        <p:spPr>
+          <a:xfrm>
+            <a:off x="11094415" y="6492240"/>
+            <a:ext cx="731520" cy="274320"/>
+          </a:xfrm>
+          <a:prstGeom prst="rect">
+            <a:avLst/>
+          </a:prstGeom>
+          <a:noFill/>
+        </p:spPr>
+        <p:txBody>
+          <a:bodyPr wrap="square">
+            <a:spAutoFit/>
+          </a:bodyPr>
+          <a:lstStyle/>
+          <a:p>
+            <a:pPr algn="r">
+              <a:lnSpc>
+                <a:spcPct val="100000"/>
+              </a:lnSpc>
+            </a:pPr>
+            <a:r>
+              <a:rPr sz="900" b="0" i="0">
+                <a:solidFill>
+                  <a:srgbClr val="7A828E"/>
+                </a:solidFill>
+                <a:latin typeface="맑은 고딕"/>
+              </a:rPr>
+              <a:t>19</a:t>
             </a:r>
           </a:p>
         </p:txBody>
@@ -11027,7 +13013,7 @@
 </p:sld>
 </file>
 
-<file path=ppt/slides/slide2.xml><?xml version="1.0" encoding="utf-8"?>
+<file path=ppt/slides/slide21.xml><?xml version="1.0" encoding="utf-8"?>
 <p:sld xmlns:a="http://schemas.openxmlformats.org/drawingml/2006/main" xmlns:p="http://schemas.openxmlformats.org/presentationml/2006/main" xmlns:r="http://schemas.openxmlformats.org/officeDocument/2006/relationships">
   <p:cSld>
     <p:bg>
@@ -11167,7 +13153,7 @@
                 </a:solidFill>
                 <a:latin typeface="맑은 고딕"/>
               </a:rPr>
-              <a:t>CONTENTS</a:t>
+              <a:t>④ 안전 · 비용</a:t>
             </a:r>
           </a:p>
         </p:txBody>
@@ -11206,7 +13192,7 @@
                 </a:solidFill>
                 <a:latin typeface="맑은 고딕"/>
               </a:rPr>
-              <a:t>목차</a:t>
+              <a:t>어디서 돈이 나가나 — 과금 지점 정리</a:t>
             </a:r>
           </a:p>
         </p:txBody>
@@ -11284,1273 +13270,7 @@
                 </a:solidFill>
                 <a:latin typeface="맑은 고딕"/>
               </a:rPr>
-              <a:t>01</a:t>
-            </a:r>
-          </a:p>
-        </p:txBody>
-      </p:sp>
-      <p:sp>
-        <p:nvSpPr>
-          <p:cNvPr id="8" name="Rectangle 7"/>
-          <p:cNvSpPr/>
-          <p:nvPr/>
-        </p:nvSpPr>
-        <p:spPr>
-          <a:xfrm>
-            <a:off x="502920" y="1280160"/>
-            <a:ext cx="11155680" cy="1143000"/>
-          </a:xfrm>
-          <a:prstGeom prst="rect">
-            <a:avLst/>
-          </a:prstGeom>
-          <a:solidFill>
-            <a:srgbClr val="FFFFFF"/>
-          </a:solidFill>
-          <a:ln>
-            <a:noFill/>
-          </a:ln>
-          <a:effectLst/>
-        </p:spPr>
-        <p:style>
-          <a:lnRef idx="1">
-            <a:schemeClr val="accent1"/>
-          </a:lnRef>
-          <a:fillRef idx="3">
-            <a:schemeClr val="accent1"/>
-          </a:fillRef>
-          <a:effectRef idx="2">
-            <a:schemeClr val="accent1"/>
-          </a:effectRef>
-          <a:fontRef idx="minor">
-            <a:schemeClr val="lt1"/>
-          </a:fontRef>
-        </p:style>
-        <p:txBody>
-          <a:bodyPr rtlCol="0" anchor="ctr"/>
-          <a:lstStyle/>
-          <a:p>
-            <a:pPr algn="ctr"/>
-          </a:p>
-        </p:txBody>
-      </p:sp>
-      <p:sp>
-        <p:nvSpPr>
-          <p:cNvPr id="9" name="Rectangle 8"/>
-          <p:cNvSpPr/>
-          <p:nvPr/>
-        </p:nvSpPr>
-        <p:spPr>
-          <a:xfrm>
-            <a:off x="502920" y="1280160"/>
-            <a:ext cx="109728" cy="1143000"/>
-          </a:xfrm>
-          <a:prstGeom prst="rect">
-            <a:avLst/>
-          </a:prstGeom>
-          <a:solidFill>
-            <a:srgbClr val="C9A227"/>
-          </a:solidFill>
-          <a:ln>
-            <a:noFill/>
-          </a:ln>
-          <a:effectLst/>
-        </p:spPr>
-        <p:style>
-          <a:lnRef idx="1">
-            <a:schemeClr val="accent1"/>
-          </a:lnRef>
-          <a:fillRef idx="3">
-            <a:schemeClr val="accent1"/>
-          </a:fillRef>
-          <a:effectRef idx="2">
-            <a:schemeClr val="accent1"/>
-          </a:effectRef>
-          <a:fontRef idx="minor">
-            <a:schemeClr val="lt1"/>
-          </a:fontRef>
-        </p:style>
-        <p:txBody>
-          <a:bodyPr rtlCol="0" anchor="ctr"/>
-          <a:lstStyle/>
-          <a:p>
-            <a:pPr algn="ctr"/>
-          </a:p>
-        </p:txBody>
-      </p:sp>
-      <p:sp>
-        <p:nvSpPr>
-          <p:cNvPr id="10" name="Rounded Rectangle 9"/>
-          <p:cNvSpPr/>
-          <p:nvPr/>
-        </p:nvSpPr>
-        <p:spPr>
-          <a:xfrm>
-            <a:off x="777240" y="1645920"/>
-            <a:ext cx="1005840" cy="402336"/>
-          </a:xfrm>
-          <a:prstGeom prst="roundRect">
-            <a:avLst/>
-          </a:prstGeom>
-          <a:solidFill>
-            <a:srgbClr val="C9A227"/>
-          </a:solidFill>
-          <a:ln>
-            <a:noFill/>
-          </a:ln>
-          <a:effectLst/>
-        </p:spPr>
-        <p:style>
-          <a:lnRef idx="1">
-            <a:schemeClr val="accent1"/>
-          </a:lnRef>
-          <a:fillRef idx="3">
-            <a:schemeClr val="accent1"/>
-          </a:fillRef>
-          <a:effectRef idx="2">
-            <a:schemeClr val="accent1"/>
-          </a:effectRef>
-          <a:fontRef idx="minor">
-            <a:schemeClr val="lt1"/>
-          </a:fontRef>
-        </p:style>
-        <p:txBody>
-          <a:bodyPr rtlCol="0" anchor="ctr"/>
-          <a:lstStyle/>
-          <a:p>
-            <a:pPr algn="ctr"/>
-          </a:p>
-        </p:txBody>
-      </p:sp>
-      <p:sp>
-        <p:nvSpPr>
-          <p:cNvPr id="11" name="TextBox 10"/>
-          <p:cNvSpPr txBox="1"/>
-          <p:nvPr/>
-        </p:nvSpPr>
-        <p:spPr>
-          <a:xfrm>
-            <a:off x="777240" y="1645920"/>
-            <a:ext cx="1005840" cy="402336"/>
-          </a:xfrm>
-          <a:prstGeom prst="rect">
-            <a:avLst/>
-          </a:prstGeom>
-          <a:noFill/>
-        </p:spPr>
-        <p:txBody>
-          <a:bodyPr wrap="square">
-            <a:spAutoFit/>
-          </a:bodyPr>
-          <a:lstStyle/>
-          <a:p>
-            <a:pPr algn="ctr">
-              <a:lnSpc>
-                <a:spcPct val="100000"/>
-              </a:lnSpc>
-            </a:pPr>
-            <a:r>
-              <a:rPr sz="1050" b="1" i="0">
-                <a:solidFill>
-                  <a:srgbClr val="FFFFFF"/>
-                </a:solidFill>
-                <a:latin typeface="맑은 고딕"/>
-              </a:rPr>
-              <a:t>준비</a:t>
-            </a:r>
-          </a:p>
-        </p:txBody>
-      </p:sp>
-      <p:sp>
-        <p:nvSpPr>
-          <p:cNvPr id="12" name="TextBox 11"/>
-          <p:cNvSpPr txBox="1"/>
-          <p:nvPr/>
-        </p:nvSpPr>
-        <p:spPr>
-          <a:xfrm>
-            <a:off x="2011680" y="1389888"/>
-            <a:ext cx="8778240" cy="365760"/>
-          </a:xfrm>
-          <a:prstGeom prst="rect">
-            <a:avLst/>
-          </a:prstGeom>
-          <a:noFill/>
-        </p:spPr>
-        <p:txBody>
-          <a:bodyPr wrap="square">
-            <a:spAutoFit/>
-          </a:bodyPr>
-          <a:lstStyle/>
-          <a:p>
-            <a:pPr algn="l">
-              <a:lnSpc>
-                <a:spcPct val="100000"/>
-              </a:lnSpc>
-            </a:pPr>
-            <a:r>
-              <a:rPr sz="1650" b="1" i="0">
-                <a:solidFill>
-                  <a:srgbClr val="23262B"/>
-                </a:solidFill>
-                <a:latin typeface="맑은 고딕"/>
-              </a:rPr>
-              <a:t>① 초기 설정 — 키 3종 등록</a:t>
-            </a:r>
-          </a:p>
-        </p:txBody>
-      </p:sp>
-      <p:sp>
-        <p:nvSpPr>
-          <p:cNvPr id="13" name="TextBox 12"/>
-          <p:cNvSpPr txBox="1"/>
-          <p:nvPr/>
-        </p:nvSpPr>
-        <p:spPr>
-          <a:xfrm>
-            <a:off x="2011680" y="1828800"/>
-            <a:ext cx="8778240" cy="457200"/>
-          </a:xfrm>
-          <a:prstGeom prst="rect">
-            <a:avLst/>
-          </a:prstGeom>
-          <a:noFill/>
-        </p:spPr>
-        <p:txBody>
-          <a:bodyPr wrap="square">
-            <a:spAutoFit/>
-          </a:bodyPr>
-          <a:lstStyle/>
-          <a:p>
-            <a:pPr algn="l">
-              <a:lnSpc>
-                <a:spcPct val="100000"/>
-              </a:lnSpc>
-            </a:pPr>
-            <a:r>
-              <a:rPr sz="1150" b="0" i="0">
-                <a:solidFill>
-                  <a:srgbClr val="7A828E"/>
-                </a:solidFill>
-                <a:latin typeface="맑은 고딕"/>
-              </a:rPr>
-              <a:t>LLM 1개 + 네이버 API 2개. 한 번만 하면 됩니다</a:t>
-            </a:r>
-          </a:p>
-        </p:txBody>
-      </p:sp>
-      <p:sp>
-        <p:nvSpPr>
-          <p:cNvPr id="14" name="Rectangle 13"/>
-          <p:cNvSpPr/>
-          <p:nvPr/>
-        </p:nvSpPr>
-        <p:spPr>
-          <a:xfrm>
-            <a:off x="502920" y="2560320"/>
-            <a:ext cx="11155680" cy="1143000"/>
-          </a:xfrm>
-          <a:prstGeom prst="rect">
-            <a:avLst/>
-          </a:prstGeom>
-          <a:solidFill>
-            <a:srgbClr val="FFFFFF"/>
-          </a:solidFill>
-          <a:ln>
-            <a:noFill/>
-          </a:ln>
-          <a:effectLst/>
-        </p:spPr>
-        <p:style>
-          <a:lnRef idx="1">
-            <a:schemeClr val="accent1"/>
-          </a:lnRef>
-          <a:fillRef idx="3">
-            <a:schemeClr val="accent1"/>
-          </a:fillRef>
-          <a:effectRef idx="2">
-            <a:schemeClr val="accent1"/>
-          </a:effectRef>
-          <a:fontRef idx="minor">
-            <a:schemeClr val="lt1"/>
-          </a:fontRef>
-        </p:style>
-        <p:txBody>
-          <a:bodyPr rtlCol="0" anchor="ctr"/>
-          <a:lstStyle/>
-          <a:p>
-            <a:pPr algn="ctr"/>
-          </a:p>
-        </p:txBody>
-      </p:sp>
-      <p:sp>
-        <p:nvSpPr>
-          <p:cNvPr id="15" name="Rectangle 14"/>
-          <p:cNvSpPr/>
-          <p:nvPr/>
-        </p:nvSpPr>
-        <p:spPr>
-          <a:xfrm>
-            <a:off x="502920" y="2560320"/>
-            <a:ext cx="109728" cy="1143000"/>
-          </a:xfrm>
-          <a:prstGeom prst="rect">
-            <a:avLst/>
-          </a:prstGeom>
-          <a:solidFill>
-            <a:srgbClr val="1B3A5C"/>
-          </a:solidFill>
-          <a:ln>
-            <a:noFill/>
-          </a:ln>
-          <a:effectLst/>
-        </p:spPr>
-        <p:style>
-          <a:lnRef idx="1">
-            <a:schemeClr val="accent1"/>
-          </a:lnRef>
-          <a:fillRef idx="3">
-            <a:schemeClr val="accent1"/>
-          </a:fillRef>
-          <a:effectRef idx="2">
-            <a:schemeClr val="accent1"/>
-          </a:effectRef>
-          <a:fontRef idx="minor">
-            <a:schemeClr val="lt1"/>
-          </a:fontRef>
-        </p:style>
-        <p:txBody>
-          <a:bodyPr rtlCol="0" anchor="ctr"/>
-          <a:lstStyle/>
-          <a:p>
-            <a:pPr algn="ctr"/>
-          </a:p>
-        </p:txBody>
-      </p:sp>
-      <p:sp>
-        <p:nvSpPr>
-          <p:cNvPr id="16" name="Rounded Rectangle 15"/>
-          <p:cNvSpPr/>
-          <p:nvPr/>
-        </p:nvSpPr>
-        <p:spPr>
-          <a:xfrm>
-            <a:off x="777240" y="2926080"/>
-            <a:ext cx="1005840" cy="402336"/>
-          </a:xfrm>
-          <a:prstGeom prst="roundRect">
-            <a:avLst/>
-          </a:prstGeom>
-          <a:solidFill>
-            <a:srgbClr val="1B3A5C"/>
-          </a:solidFill>
-          <a:ln>
-            <a:noFill/>
-          </a:ln>
-          <a:effectLst/>
-        </p:spPr>
-        <p:style>
-          <a:lnRef idx="1">
-            <a:schemeClr val="accent1"/>
-          </a:lnRef>
-          <a:fillRef idx="3">
-            <a:schemeClr val="accent1"/>
-          </a:fillRef>
-          <a:effectRef idx="2">
-            <a:schemeClr val="accent1"/>
-          </a:effectRef>
-          <a:fontRef idx="minor">
-            <a:schemeClr val="lt1"/>
-          </a:fontRef>
-        </p:style>
-        <p:txBody>
-          <a:bodyPr rtlCol="0" anchor="ctr"/>
-          <a:lstStyle/>
-          <a:p>
-            <a:pPr algn="ctr"/>
-          </a:p>
-        </p:txBody>
-      </p:sp>
-      <p:sp>
-        <p:nvSpPr>
-          <p:cNvPr id="17" name="TextBox 16"/>
-          <p:cNvSpPr txBox="1"/>
-          <p:nvPr/>
-        </p:nvSpPr>
-        <p:spPr>
-          <a:xfrm>
-            <a:off x="777240" y="2926080"/>
-            <a:ext cx="1005840" cy="402336"/>
-          </a:xfrm>
-          <a:prstGeom prst="rect">
-            <a:avLst/>
-          </a:prstGeom>
-          <a:noFill/>
-        </p:spPr>
-        <p:txBody>
-          <a:bodyPr wrap="square">
-            <a:spAutoFit/>
-          </a:bodyPr>
-          <a:lstStyle/>
-          <a:p>
-            <a:pPr algn="ctr">
-              <a:lnSpc>
-                <a:spcPct val="100000"/>
-              </a:lnSpc>
-            </a:pPr>
-            <a:r>
-              <a:rPr sz="1050" b="1" i="0">
-                <a:solidFill>
-                  <a:srgbClr val="FFFFFF"/>
-                </a:solidFill>
-                <a:latin typeface="맑은 고딕"/>
-              </a:rPr>
-              <a:t>핵심</a:t>
-            </a:r>
-          </a:p>
-        </p:txBody>
-      </p:sp>
-      <p:sp>
-        <p:nvSpPr>
-          <p:cNvPr id="18" name="TextBox 17"/>
-          <p:cNvSpPr txBox="1"/>
-          <p:nvPr/>
-        </p:nvSpPr>
-        <p:spPr>
-          <a:xfrm>
-            <a:off x="2011680" y="2670048"/>
-            <a:ext cx="8778240" cy="365760"/>
-          </a:xfrm>
-          <a:prstGeom prst="rect">
-            <a:avLst/>
-          </a:prstGeom>
-          <a:noFill/>
-        </p:spPr>
-        <p:txBody>
-          <a:bodyPr wrap="square">
-            <a:spAutoFit/>
-          </a:bodyPr>
-          <a:lstStyle/>
-          <a:p>
-            <a:pPr algn="l">
-              <a:lnSpc>
-                <a:spcPct val="100000"/>
-              </a:lnSpc>
-            </a:pPr>
-            <a:r>
-              <a:rPr sz="1650" b="1" i="0">
-                <a:solidFill>
-                  <a:srgbClr val="23262B"/>
-                </a:solidFill>
-                <a:latin typeface="맑은 고딕"/>
-              </a:rPr>
-              <a:t>② SEO 키워드 새로 고르기와 수치 유지</a:t>
-            </a:r>
-          </a:p>
-        </p:txBody>
-      </p:sp>
-      <p:sp>
-        <p:nvSpPr>
-          <p:cNvPr id="19" name="TextBox 18"/>
-          <p:cNvSpPr txBox="1"/>
-          <p:nvPr/>
-        </p:nvSpPr>
-        <p:spPr>
-          <a:xfrm>
-            <a:off x="2011680" y="3108960"/>
-            <a:ext cx="8778240" cy="457200"/>
-          </a:xfrm>
-          <a:prstGeom prst="rect">
-            <a:avLst/>
-          </a:prstGeom>
-          <a:noFill/>
-        </p:spPr>
-        <p:txBody>
-          <a:bodyPr wrap="square">
-            <a:spAutoFit/>
-          </a:bodyPr>
-          <a:lstStyle/>
-          <a:p>
-            <a:pPr algn="l">
-              <a:lnSpc>
-                <a:spcPct val="100000"/>
-              </a:lnSpc>
-            </a:pPr>
-            <a:r>
-              <a:rPr sz="1150" b="0" i="0">
-                <a:solidFill>
-                  <a:srgbClr val="7A828E"/>
-                </a:solidFill>
-                <a:latin typeface="맑은 고딕"/>
-              </a:rPr>
-              <a:t>이 매뉴얼의 심장부: 씨앗→발굴→측정→판정→적용, 그리고 30일마다 숫자 재기</a:t>
-            </a:r>
-          </a:p>
-        </p:txBody>
-      </p:sp>
-      <p:sp>
-        <p:nvSpPr>
-          <p:cNvPr id="20" name="Rectangle 19"/>
-          <p:cNvSpPr/>
-          <p:nvPr/>
-        </p:nvSpPr>
-        <p:spPr>
-          <a:xfrm>
-            <a:off x="502920" y="3840480"/>
-            <a:ext cx="11155680" cy="1143000"/>
-          </a:xfrm>
-          <a:prstGeom prst="rect">
-            <a:avLst/>
-          </a:prstGeom>
-          <a:solidFill>
-            <a:srgbClr val="FFFFFF"/>
-          </a:solidFill>
-          <a:ln>
-            <a:noFill/>
-          </a:ln>
-          <a:effectLst/>
-        </p:spPr>
-        <p:style>
-          <a:lnRef idx="1">
-            <a:schemeClr val="accent1"/>
-          </a:lnRef>
-          <a:fillRef idx="3">
-            <a:schemeClr val="accent1"/>
-          </a:fillRef>
-          <a:effectRef idx="2">
-            <a:schemeClr val="accent1"/>
-          </a:effectRef>
-          <a:fontRef idx="minor">
-            <a:schemeClr val="lt1"/>
-          </a:fontRef>
-        </p:style>
-        <p:txBody>
-          <a:bodyPr rtlCol="0" anchor="ctr"/>
-          <a:lstStyle/>
-          <a:p>
-            <a:pPr algn="ctr"/>
-          </a:p>
-        </p:txBody>
-      </p:sp>
-      <p:sp>
-        <p:nvSpPr>
-          <p:cNvPr id="21" name="Rectangle 20"/>
-          <p:cNvSpPr/>
-          <p:nvPr/>
-        </p:nvSpPr>
-        <p:spPr>
-          <a:xfrm>
-            <a:off x="502920" y="3840480"/>
-            <a:ext cx="109728" cy="1143000"/>
-          </a:xfrm>
-          <a:prstGeom prst="rect">
-            <a:avLst/>
-          </a:prstGeom>
-          <a:solidFill>
-            <a:srgbClr val="1B3A5C"/>
-          </a:solidFill>
-          <a:ln>
-            <a:noFill/>
-          </a:ln>
-          <a:effectLst/>
-        </p:spPr>
-        <p:style>
-          <a:lnRef idx="1">
-            <a:schemeClr val="accent1"/>
-          </a:lnRef>
-          <a:fillRef idx="3">
-            <a:schemeClr val="accent1"/>
-          </a:fillRef>
-          <a:effectRef idx="2">
-            <a:schemeClr val="accent1"/>
-          </a:effectRef>
-          <a:fontRef idx="minor">
-            <a:schemeClr val="lt1"/>
-          </a:fontRef>
-        </p:style>
-        <p:txBody>
-          <a:bodyPr rtlCol="0" anchor="ctr"/>
-          <a:lstStyle/>
-          <a:p>
-            <a:pPr algn="ctr"/>
-          </a:p>
-        </p:txBody>
-      </p:sp>
-      <p:sp>
-        <p:nvSpPr>
-          <p:cNvPr id="22" name="Rounded Rectangle 21"/>
-          <p:cNvSpPr/>
-          <p:nvPr/>
-        </p:nvSpPr>
-        <p:spPr>
-          <a:xfrm>
-            <a:off x="777240" y="4206240"/>
-            <a:ext cx="1005840" cy="402336"/>
-          </a:xfrm>
-          <a:prstGeom prst="roundRect">
-            <a:avLst/>
-          </a:prstGeom>
-          <a:solidFill>
-            <a:srgbClr val="1B3A5C"/>
-          </a:solidFill>
-          <a:ln>
-            <a:noFill/>
-          </a:ln>
-          <a:effectLst/>
-        </p:spPr>
-        <p:style>
-          <a:lnRef idx="1">
-            <a:schemeClr val="accent1"/>
-          </a:lnRef>
-          <a:fillRef idx="3">
-            <a:schemeClr val="accent1"/>
-          </a:fillRef>
-          <a:effectRef idx="2">
-            <a:schemeClr val="accent1"/>
-          </a:effectRef>
-          <a:fontRef idx="minor">
-            <a:schemeClr val="lt1"/>
-          </a:fontRef>
-        </p:style>
-        <p:txBody>
-          <a:bodyPr rtlCol="0" anchor="ctr"/>
-          <a:lstStyle/>
-          <a:p>
-            <a:pPr algn="ctr"/>
-          </a:p>
-        </p:txBody>
-      </p:sp>
-      <p:sp>
-        <p:nvSpPr>
-          <p:cNvPr id="23" name="TextBox 22"/>
-          <p:cNvSpPr txBox="1"/>
-          <p:nvPr/>
-        </p:nvSpPr>
-        <p:spPr>
-          <a:xfrm>
-            <a:off x="777240" y="4206240"/>
-            <a:ext cx="1005840" cy="402336"/>
-          </a:xfrm>
-          <a:prstGeom prst="rect">
-            <a:avLst/>
-          </a:prstGeom>
-          <a:noFill/>
-        </p:spPr>
-        <p:txBody>
-          <a:bodyPr wrap="square">
-            <a:spAutoFit/>
-          </a:bodyPr>
-          <a:lstStyle/>
-          <a:p>
-            <a:pPr algn="ctr">
-              <a:lnSpc>
-                <a:spcPct val="100000"/>
-              </a:lnSpc>
-            </a:pPr>
-            <a:r>
-              <a:rPr sz="1050" b="1" i="0">
-                <a:solidFill>
-                  <a:srgbClr val="FFFFFF"/>
-                </a:solidFill>
-                <a:latin typeface="맑은 고딕"/>
-              </a:rPr>
-              <a:t>일상</a:t>
-            </a:r>
-          </a:p>
-        </p:txBody>
-      </p:sp>
-      <p:sp>
-        <p:nvSpPr>
-          <p:cNvPr id="24" name="TextBox 23"/>
-          <p:cNvSpPr txBox="1"/>
-          <p:nvPr/>
-        </p:nvSpPr>
-        <p:spPr>
-          <a:xfrm>
-            <a:off x="2011680" y="3950208"/>
-            <a:ext cx="8778240" cy="365760"/>
-          </a:xfrm>
-          <a:prstGeom prst="rect">
-            <a:avLst/>
-          </a:prstGeom>
-          <a:noFill/>
-        </p:spPr>
-        <p:txBody>
-          <a:bodyPr wrap="square">
-            <a:spAutoFit/>
-          </a:bodyPr>
-          <a:lstStyle/>
-          <a:p>
-            <a:pPr algn="l">
-              <a:lnSpc>
-                <a:spcPct val="100000"/>
-              </a:lnSpc>
-            </a:pPr>
-            <a:r>
-              <a:rPr sz="1650" b="1" i="0">
-                <a:solidFill>
-                  <a:srgbClr val="23262B"/>
-                </a:solidFill>
-                <a:latin typeface="맑은 고딕"/>
-              </a:rPr>
-              <a:t>③ 매일 쓰는 법</a:t>
-            </a:r>
-          </a:p>
-        </p:txBody>
-      </p:sp>
-      <p:sp>
-        <p:nvSpPr>
-          <p:cNvPr id="25" name="TextBox 24"/>
-          <p:cNvSpPr txBox="1"/>
-          <p:nvPr/>
-        </p:nvSpPr>
-        <p:spPr>
-          <a:xfrm>
-            <a:off x="2011680" y="4389120"/>
-            <a:ext cx="8778240" cy="457200"/>
-          </a:xfrm>
-          <a:prstGeom prst="rect">
-            <a:avLst/>
-          </a:prstGeom>
-          <a:noFill/>
-        </p:spPr>
-        <p:txBody>
-          <a:bodyPr wrap="square">
-            <a:spAutoFit/>
-          </a:bodyPr>
-          <a:lstStyle/>
-          <a:p>
-            <a:pPr algn="l">
-              <a:lnSpc>
-                <a:spcPct val="100000"/>
-              </a:lnSpc>
-            </a:pPr>
-            <a:r>
-              <a:rPr sz="1150" b="0" i="0">
-                <a:solidFill>
-                  <a:srgbClr val="7A828E"/>
-                </a:solidFill>
-                <a:latin typeface="맑은 고딕"/>
-              </a:rPr>
-              <a:t>워크벤치·뉴스·브랜드 킷·네이버 게시</a:t>
-            </a:r>
-          </a:p>
-        </p:txBody>
-      </p:sp>
-      <p:sp>
-        <p:nvSpPr>
-          <p:cNvPr id="26" name="Rectangle 25"/>
-          <p:cNvSpPr/>
-          <p:nvPr/>
-        </p:nvSpPr>
-        <p:spPr>
-          <a:xfrm>
-            <a:off x="502920" y="5120640"/>
-            <a:ext cx="11155680" cy="1143000"/>
-          </a:xfrm>
-          <a:prstGeom prst="rect">
-            <a:avLst/>
-          </a:prstGeom>
-          <a:solidFill>
-            <a:srgbClr val="FFFFFF"/>
-          </a:solidFill>
-          <a:ln>
-            <a:noFill/>
-          </a:ln>
-          <a:effectLst/>
-        </p:spPr>
-        <p:style>
-          <a:lnRef idx="1">
-            <a:schemeClr val="accent1"/>
-          </a:lnRef>
-          <a:fillRef idx="3">
-            <a:schemeClr val="accent1"/>
-          </a:fillRef>
-          <a:effectRef idx="2">
-            <a:schemeClr val="accent1"/>
-          </a:effectRef>
-          <a:fontRef idx="minor">
-            <a:schemeClr val="lt1"/>
-          </a:fontRef>
-        </p:style>
-        <p:txBody>
-          <a:bodyPr rtlCol="0" anchor="ctr"/>
-          <a:lstStyle/>
-          <a:p>
-            <a:pPr algn="ctr"/>
-          </a:p>
-        </p:txBody>
-      </p:sp>
-      <p:sp>
-        <p:nvSpPr>
-          <p:cNvPr id="27" name="Rectangle 26"/>
-          <p:cNvSpPr/>
-          <p:nvPr/>
-        </p:nvSpPr>
-        <p:spPr>
-          <a:xfrm>
-            <a:off x="502920" y="5120640"/>
-            <a:ext cx="109728" cy="1143000"/>
-          </a:xfrm>
-          <a:prstGeom prst="rect">
-            <a:avLst/>
-          </a:prstGeom>
-          <a:solidFill>
-            <a:srgbClr val="2F6B7A"/>
-          </a:solidFill>
-          <a:ln>
-            <a:noFill/>
-          </a:ln>
-          <a:effectLst/>
-        </p:spPr>
-        <p:style>
-          <a:lnRef idx="1">
-            <a:schemeClr val="accent1"/>
-          </a:lnRef>
-          <a:fillRef idx="3">
-            <a:schemeClr val="accent1"/>
-          </a:fillRef>
-          <a:effectRef idx="2">
-            <a:schemeClr val="accent1"/>
-          </a:effectRef>
-          <a:fontRef idx="minor">
-            <a:schemeClr val="lt1"/>
-          </a:fontRef>
-        </p:style>
-        <p:txBody>
-          <a:bodyPr rtlCol="0" anchor="ctr"/>
-          <a:lstStyle/>
-          <a:p>
-            <a:pPr algn="ctr"/>
-          </a:p>
-        </p:txBody>
-      </p:sp>
-      <p:sp>
-        <p:nvSpPr>
-          <p:cNvPr id="28" name="Rounded Rectangle 27"/>
-          <p:cNvSpPr/>
-          <p:nvPr/>
-        </p:nvSpPr>
-        <p:spPr>
-          <a:xfrm>
-            <a:off x="777240" y="5486400"/>
-            <a:ext cx="1005840" cy="402336"/>
-          </a:xfrm>
-          <a:prstGeom prst="roundRect">
-            <a:avLst/>
-          </a:prstGeom>
-          <a:solidFill>
-            <a:srgbClr val="2F6B7A"/>
-          </a:solidFill>
-          <a:ln>
-            <a:noFill/>
-          </a:ln>
-          <a:effectLst/>
-        </p:spPr>
-        <p:style>
-          <a:lnRef idx="1">
-            <a:schemeClr val="accent1"/>
-          </a:lnRef>
-          <a:fillRef idx="3">
-            <a:schemeClr val="accent1"/>
-          </a:fillRef>
-          <a:effectRef idx="2">
-            <a:schemeClr val="accent1"/>
-          </a:effectRef>
-          <a:fontRef idx="minor">
-            <a:schemeClr val="lt1"/>
-          </a:fontRef>
-        </p:style>
-        <p:txBody>
-          <a:bodyPr rtlCol="0" anchor="ctr"/>
-          <a:lstStyle/>
-          <a:p>
-            <a:pPr algn="ctr"/>
-          </a:p>
-        </p:txBody>
-      </p:sp>
-      <p:sp>
-        <p:nvSpPr>
-          <p:cNvPr id="29" name="TextBox 28"/>
-          <p:cNvSpPr txBox="1"/>
-          <p:nvPr/>
-        </p:nvSpPr>
-        <p:spPr>
-          <a:xfrm>
-            <a:off x="777240" y="5486400"/>
-            <a:ext cx="1005840" cy="402336"/>
-          </a:xfrm>
-          <a:prstGeom prst="rect">
-            <a:avLst/>
-          </a:prstGeom>
-          <a:noFill/>
-        </p:spPr>
-        <p:txBody>
-          <a:bodyPr wrap="square">
-            <a:spAutoFit/>
-          </a:bodyPr>
-          <a:lstStyle/>
-          <a:p>
-            <a:pPr algn="ctr">
-              <a:lnSpc>
-                <a:spcPct val="100000"/>
-              </a:lnSpc>
-            </a:pPr>
-            <a:r>
-              <a:rPr sz="1050" b="1" i="0">
-                <a:solidFill>
-                  <a:srgbClr val="FFFFFF"/>
-                </a:solidFill>
-                <a:latin typeface="맑은 고딕"/>
-              </a:rPr>
-              <a:t>안전</a:t>
-            </a:r>
-          </a:p>
-        </p:txBody>
-      </p:sp>
-      <p:sp>
-        <p:nvSpPr>
-          <p:cNvPr id="30" name="TextBox 29"/>
-          <p:cNvSpPr txBox="1"/>
-          <p:nvPr/>
-        </p:nvSpPr>
-        <p:spPr>
-          <a:xfrm>
-            <a:off x="2011680" y="5230368"/>
-            <a:ext cx="8778240" cy="365760"/>
-          </a:xfrm>
-          <a:prstGeom prst="rect">
-            <a:avLst/>
-          </a:prstGeom>
-          <a:noFill/>
-        </p:spPr>
-        <p:txBody>
-          <a:bodyPr wrap="square">
-            <a:spAutoFit/>
-          </a:bodyPr>
-          <a:lstStyle/>
-          <a:p>
-            <a:pPr algn="l">
-              <a:lnSpc>
-                <a:spcPct val="100000"/>
-              </a:lnSpc>
-            </a:pPr>
-            <a:r>
-              <a:rPr sz="1650" b="1" i="0">
-                <a:solidFill>
-                  <a:srgbClr val="23262B"/>
-                </a:solidFill>
-                <a:latin typeface="맑은 고딕"/>
-              </a:rPr>
-              <a:t>④ 컴플라이언스·비용·주의사항</a:t>
-            </a:r>
-          </a:p>
-        </p:txBody>
-      </p:sp>
-      <p:sp>
-        <p:nvSpPr>
-          <p:cNvPr id="31" name="TextBox 30"/>
-          <p:cNvSpPr txBox="1"/>
-          <p:nvPr/>
-        </p:nvSpPr>
-        <p:spPr>
-          <a:xfrm>
-            <a:off x="2011680" y="5669280"/>
-            <a:ext cx="8778240" cy="457200"/>
-          </a:xfrm>
-          <a:prstGeom prst="rect">
-            <a:avLst/>
-          </a:prstGeom>
-          <a:noFill/>
-        </p:spPr>
-        <p:txBody>
-          <a:bodyPr wrap="square">
-            <a:spAutoFit/>
-          </a:bodyPr>
-          <a:lstStyle/>
-          <a:p>
-            <a:pPr algn="l">
-              <a:lnSpc>
-                <a:spcPct val="100000"/>
-              </a:lnSpc>
-            </a:pPr>
-            <a:r>
-              <a:rPr sz="1150" b="0" i="0">
-                <a:solidFill>
-                  <a:srgbClr val="7A828E"/>
-                </a:solidFill>
-                <a:latin typeface="맑은 고딕"/>
-              </a:rPr>
-              <a:t>의료법 검수, 과금 지점, 함정 모음, FAQ</a:t>
-            </a:r>
-          </a:p>
-        </p:txBody>
-      </p:sp>
-    </p:spTree>
-  </p:cSld>
-  <p:clrMapOvr>
-    <a:masterClrMapping/>
-  </p:clrMapOvr>
-</p:sld>
-</file>
-
-<file path=ppt/slides/slide20.xml><?xml version="1.0" encoding="utf-8"?>
-<p:sld xmlns:a="http://schemas.openxmlformats.org/drawingml/2006/main" xmlns:p="http://schemas.openxmlformats.org/presentationml/2006/main" xmlns:r="http://schemas.openxmlformats.org/officeDocument/2006/relationships">
-  <p:cSld>
-    <p:bg>
-      <p:bgPr>
-        <a:solidFill>
-          <a:srgbClr val="F7F5F0"/>
-        </a:solidFill>
-        <a:effectLst/>
-      </p:bgPr>
-    </p:bg>
-    <p:spTree>
-      <p:nvGrpSpPr>
-        <p:cNvPr id="1" name=""/>
-        <p:cNvGrpSpPr/>
-        <p:nvPr/>
-      </p:nvGrpSpPr>
-      <p:grpSpPr/>
-      <p:sp>
-        <p:nvSpPr>
-          <p:cNvPr id="2" name="Rectangle 1"/>
-          <p:cNvSpPr/>
-          <p:nvPr/>
-        </p:nvSpPr>
-        <p:spPr>
-          <a:xfrm>
-            <a:off x="0" y="0"/>
-            <a:ext cx="12191695" cy="1051560"/>
-          </a:xfrm>
-          <a:prstGeom prst="rect">
-            <a:avLst/>
-          </a:prstGeom>
-          <a:solidFill>
-            <a:srgbClr val="122A44"/>
-          </a:solidFill>
-          <a:ln>
-            <a:noFill/>
-          </a:ln>
-          <a:effectLst/>
-        </p:spPr>
-        <p:style>
-          <a:lnRef idx="1">
-            <a:schemeClr val="accent1"/>
-          </a:lnRef>
-          <a:fillRef idx="3">
-            <a:schemeClr val="accent1"/>
-          </a:fillRef>
-          <a:effectRef idx="2">
-            <a:schemeClr val="accent1"/>
-          </a:effectRef>
-          <a:fontRef idx="minor">
-            <a:schemeClr val="lt1"/>
-          </a:fontRef>
-        </p:style>
-        <p:txBody>
-          <a:bodyPr rtlCol="0" anchor="ctr"/>
-          <a:lstStyle/>
-          <a:p>
-            <a:pPr algn="ctr"/>
-          </a:p>
-        </p:txBody>
-      </p:sp>
-      <p:sp>
-        <p:nvSpPr>
-          <p:cNvPr id="3" name="Rectangle 2"/>
-          <p:cNvSpPr/>
-          <p:nvPr/>
-        </p:nvSpPr>
-        <p:spPr>
-          <a:xfrm>
-            <a:off x="0" y="1051560"/>
-            <a:ext cx="12191695" cy="38100"/>
-          </a:xfrm>
-          <a:prstGeom prst="rect">
-            <a:avLst/>
-          </a:prstGeom>
-          <a:solidFill>
-            <a:srgbClr val="1B3A5C"/>
-          </a:solidFill>
-          <a:ln>
-            <a:noFill/>
-          </a:ln>
-          <a:effectLst/>
-        </p:spPr>
-        <p:style>
-          <a:lnRef idx="1">
-            <a:schemeClr val="accent1"/>
-          </a:lnRef>
-          <a:fillRef idx="3">
-            <a:schemeClr val="accent1"/>
-          </a:fillRef>
-          <a:effectRef idx="2">
-            <a:schemeClr val="accent1"/>
-          </a:effectRef>
-          <a:fontRef idx="minor">
-            <a:schemeClr val="lt1"/>
-          </a:fontRef>
-        </p:style>
-        <p:txBody>
-          <a:bodyPr rtlCol="0" anchor="ctr"/>
-          <a:lstStyle/>
-          <a:p>
-            <a:pPr algn="ctr"/>
-          </a:p>
-        </p:txBody>
-      </p:sp>
-      <p:sp>
-        <p:nvSpPr>
-          <p:cNvPr id="4" name="TextBox 3"/>
-          <p:cNvSpPr txBox="1"/>
-          <p:nvPr/>
-        </p:nvSpPr>
-        <p:spPr>
-          <a:xfrm>
-            <a:off x="502920" y="109728"/>
-            <a:ext cx="8686800" cy="292608"/>
-          </a:xfrm>
-          <a:prstGeom prst="rect">
-            <a:avLst/>
-          </a:prstGeom>
-          <a:noFill/>
-        </p:spPr>
-        <p:txBody>
-          <a:bodyPr wrap="square">
-            <a:spAutoFit/>
-          </a:bodyPr>
-          <a:lstStyle/>
-          <a:p>
-            <a:pPr algn="l">
-              <a:lnSpc>
-                <a:spcPct val="100000"/>
-              </a:lnSpc>
-            </a:pPr>
-            <a:r>
-              <a:rPr sz="1200" b="1" i="0">
-                <a:solidFill>
-                  <a:srgbClr val="1B3A5C"/>
-                </a:solidFill>
-                <a:latin typeface="맑은 고딕"/>
-              </a:rPr>
-              <a:t>④ 안전 · 비용</a:t>
-            </a:r>
-          </a:p>
-        </p:txBody>
-      </p:sp>
-      <p:sp>
-        <p:nvSpPr>
-          <p:cNvPr id="5" name="TextBox 4"/>
-          <p:cNvSpPr txBox="1"/>
-          <p:nvPr/>
-        </p:nvSpPr>
-        <p:spPr>
-          <a:xfrm>
-            <a:off x="457200" y="347472"/>
-            <a:ext cx="10515600" cy="621792"/>
-          </a:xfrm>
-          <a:prstGeom prst="rect">
-            <a:avLst/>
-          </a:prstGeom>
-          <a:noFill/>
-        </p:spPr>
-        <p:txBody>
-          <a:bodyPr wrap="square">
-            <a:spAutoFit/>
-          </a:bodyPr>
-          <a:lstStyle/>
-          <a:p>
-            <a:pPr algn="l">
-              <a:lnSpc>
-                <a:spcPct val="100000"/>
-              </a:lnSpc>
-            </a:pPr>
-            <a:r>
-              <a:rPr sz="2400" b="1" i="0">
-                <a:solidFill>
-                  <a:srgbClr val="FFFFFF"/>
-                </a:solidFill>
-                <a:latin typeface="맑은 고딕"/>
-              </a:rPr>
-              <a:t>어디서 돈이 나가나 — 과금 지점 정리</a:t>
-            </a:r>
-          </a:p>
-        </p:txBody>
-      </p:sp>
-      <p:sp>
-        <p:nvSpPr>
-          <p:cNvPr id="6" name="TextBox 5"/>
-          <p:cNvSpPr txBox="1"/>
-          <p:nvPr/>
-        </p:nvSpPr>
-        <p:spPr>
-          <a:xfrm>
-            <a:off x="457200" y="6492240"/>
-            <a:ext cx="8229600" cy="274320"/>
-          </a:xfrm>
-          <a:prstGeom prst="rect">
-            <a:avLst/>
-          </a:prstGeom>
-          <a:noFill/>
-        </p:spPr>
-        <p:txBody>
-          <a:bodyPr wrap="square">
-            <a:spAutoFit/>
-          </a:bodyPr>
-          <a:lstStyle/>
-          <a:p>
-            <a:pPr algn="l">
-              <a:lnSpc>
-                <a:spcPct val="100000"/>
-              </a:lnSpc>
-            </a:pPr>
-            <a:r>
-              <a:rPr sz="900" b="0" i="0">
-                <a:solidFill>
-                  <a:srgbClr val="7A828E"/>
-                </a:solidFill>
-                <a:latin typeface="맑은 고딕"/>
-              </a:rPr>
-              <a:t>씨제이씨협동조합 OSMU 워크벤치 · 관리자·사용자 매뉴얼</a:t>
-            </a:r>
-          </a:p>
-        </p:txBody>
-      </p:sp>
-      <p:sp>
-        <p:nvSpPr>
-          <p:cNvPr id="7" name="TextBox 6"/>
-          <p:cNvSpPr txBox="1"/>
-          <p:nvPr/>
-        </p:nvSpPr>
-        <p:spPr>
-          <a:xfrm>
-            <a:off x="11094415" y="6492240"/>
-            <a:ext cx="731520" cy="274320"/>
-          </a:xfrm>
-          <a:prstGeom prst="rect">
-            <a:avLst/>
-          </a:prstGeom>
-          <a:noFill/>
-        </p:spPr>
-        <p:txBody>
-          <a:bodyPr wrap="square">
-            <a:spAutoFit/>
-          </a:bodyPr>
-          <a:lstStyle/>
-          <a:p>
-            <a:pPr algn="r">
-              <a:lnSpc>
-                <a:spcPct val="100000"/>
-              </a:lnSpc>
-            </a:pPr>
-            <a:r>
-              <a:rPr sz="900" b="0" i="0">
-                <a:solidFill>
-                  <a:srgbClr val="7A828E"/>
-                </a:solidFill>
-                <a:latin typeface="맑은 고딕"/>
-              </a:rPr>
-              <a:t>19</a:t>
+              <a:t>20</a:t>
             </a:r>
           </a:p>
         </p:txBody>
@@ -13028,1106 +13748,6 @@
 </p:sld>
 </file>
 
-<file path=ppt/slides/slide21.xml><?xml version="1.0" encoding="utf-8"?>
-<p:sld xmlns:a="http://schemas.openxmlformats.org/drawingml/2006/main" xmlns:p="http://schemas.openxmlformats.org/presentationml/2006/main" xmlns:r="http://schemas.openxmlformats.org/officeDocument/2006/relationships">
-  <p:cSld>
-    <p:bg>
-      <p:bgPr>
-        <a:solidFill>
-          <a:srgbClr val="F7F5F0"/>
-        </a:solidFill>
-        <a:effectLst/>
-      </p:bgPr>
-    </p:bg>
-    <p:spTree>
-      <p:nvGrpSpPr>
-        <p:cNvPr id="1" name=""/>
-        <p:cNvGrpSpPr/>
-        <p:nvPr/>
-      </p:nvGrpSpPr>
-      <p:grpSpPr/>
-      <p:sp>
-        <p:nvSpPr>
-          <p:cNvPr id="2" name="Rectangle 1"/>
-          <p:cNvSpPr/>
-          <p:nvPr/>
-        </p:nvSpPr>
-        <p:spPr>
-          <a:xfrm>
-            <a:off x="0" y="0"/>
-            <a:ext cx="12191695" cy="1051560"/>
-          </a:xfrm>
-          <a:prstGeom prst="rect">
-            <a:avLst/>
-          </a:prstGeom>
-          <a:solidFill>
-            <a:srgbClr val="122A44"/>
-          </a:solidFill>
-          <a:ln>
-            <a:noFill/>
-          </a:ln>
-          <a:effectLst/>
-        </p:spPr>
-        <p:style>
-          <a:lnRef idx="1">
-            <a:schemeClr val="accent1"/>
-          </a:lnRef>
-          <a:fillRef idx="3">
-            <a:schemeClr val="accent1"/>
-          </a:fillRef>
-          <a:effectRef idx="2">
-            <a:schemeClr val="accent1"/>
-          </a:effectRef>
-          <a:fontRef idx="minor">
-            <a:schemeClr val="lt1"/>
-          </a:fontRef>
-        </p:style>
-        <p:txBody>
-          <a:bodyPr rtlCol="0" anchor="ctr"/>
-          <a:lstStyle/>
-          <a:p>
-            <a:pPr algn="ctr"/>
-          </a:p>
-        </p:txBody>
-      </p:sp>
-      <p:sp>
-        <p:nvSpPr>
-          <p:cNvPr id="3" name="Rectangle 2"/>
-          <p:cNvSpPr/>
-          <p:nvPr/>
-        </p:nvSpPr>
-        <p:spPr>
-          <a:xfrm>
-            <a:off x="0" y="1051560"/>
-            <a:ext cx="12191695" cy="38100"/>
-          </a:xfrm>
-          <a:prstGeom prst="rect">
-            <a:avLst/>
-          </a:prstGeom>
-          <a:solidFill>
-            <a:srgbClr val="1B3A5C"/>
-          </a:solidFill>
-          <a:ln>
-            <a:noFill/>
-          </a:ln>
-          <a:effectLst/>
-        </p:spPr>
-        <p:style>
-          <a:lnRef idx="1">
-            <a:schemeClr val="accent1"/>
-          </a:lnRef>
-          <a:fillRef idx="3">
-            <a:schemeClr val="accent1"/>
-          </a:fillRef>
-          <a:effectRef idx="2">
-            <a:schemeClr val="accent1"/>
-          </a:effectRef>
-          <a:fontRef idx="minor">
-            <a:schemeClr val="lt1"/>
-          </a:fontRef>
-        </p:style>
-        <p:txBody>
-          <a:bodyPr rtlCol="0" anchor="ctr"/>
-          <a:lstStyle/>
-          <a:p>
-            <a:pPr algn="ctr"/>
-          </a:p>
-        </p:txBody>
-      </p:sp>
-      <p:sp>
-        <p:nvSpPr>
-          <p:cNvPr id="4" name="TextBox 3"/>
-          <p:cNvSpPr txBox="1"/>
-          <p:nvPr/>
-        </p:nvSpPr>
-        <p:spPr>
-          <a:xfrm>
-            <a:off x="502920" y="109728"/>
-            <a:ext cx="8686800" cy="292608"/>
-          </a:xfrm>
-          <a:prstGeom prst="rect">
-            <a:avLst/>
-          </a:prstGeom>
-          <a:noFill/>
-        </p:spPr>
-        <p:txBody>
-          <a:bodyPr wrap="square">
-            <a:spAutoFit/>
-          </a:bodyPr>
-          <a:lstStyle/>
-          <a:p>
-            <a:pPr algn="l">
-              <a:lnSpc>
-                <a:spcPct val="100000"/>
-              </a:lnSpc>
-            </a:pPr>
-            <a:r>
-              <a:rPr sz="1200" b="1" i="0">
-                <a:solidFill>
-                  <a:srgbClr val="1B3A5C"/>
-                </a:solidFill>
-                <a:latin typeface="맑은 고딕"/>
-              </a:rPr>
-              <a:t>④ 안전 · 주의사항</a:t>
-            </a:r>
-          </a:p>
-        </p:txBody>
-      </p:sp>
-      <p:sp>
-        <p:nvSpPr>
-          <p:cNvPr id="5" name="TextBox 4"/>
-          <p:cNvSpPr txBox="1"/>
-          <p:nvPr/>
-        </p:nvSpPr>
-        <p:spPr>
-          <a:xfrm>
-            <a:off x="457200" y="347472"/>
-            <a:ext cx="10515600" cy="621792"/>
-          </a:xfrm>
-          <a:prstGeom prst="rect">
-            <a:avLst/>
-          </a:prstGeom>
-          <a:noFill/>
-        </p:spPr>
-        <p:txBody>
-          <a:bodyPr wrap="square">
-            <a:spAutoFit/>
-          </a:bodyPr>
-          <a:lstStyle/>
-          <a:p>
-            <a:pPr algn="l">
-              <a:lnSpc>
-                <a:spcPct val="100000"/>
-              </a:lnSpc>
-            </a:pPr>
-            <a:r>
-              <a:rPr sz="2400" b="1" i="0">
-                <a:solidFill>
-                  <a:srgbClr val="FFFFFF"/>
-                </a:solidFill>
-                <a:latin typeface="맑은 고딕"/>
-              </a:rPr>
-              <a:t>함정 모음 — 먼저 알면 안 헷갈립니다</a:t>
-            </a:r>
-          </a:p>
-        </p:txBody>
-      </p:sp>
-      <p:sp>
-        <p:nvSpPr>
-          <p:cNvPr id="6" name="TextBox 5"/>
-          <p:cNvSpPr txBox="1"/>
-          <p:nvPr/>
-        </p:nvSpPr>
-        <p:spPr>
-          <a:xfrm>
-            <a:off x="457200" y="6492240"/>
-            <a:ext cx="8229600" cy="274320"/>
-          </a:xfrm>
-          <a:prstGeom prst="rect">
-            <a:avLst/>
-          </a:prstGeom>
-          <a:noFill/>
-        </p:spPr>
-        <p:txBody>
-          <a:bodyPr wrap="square">
-            <a:spAutoFit/>
-          </a:bodyPr>
-          <a:lstStyle/>
-          <a:p>
-            <a:pPr algn="l">
-              <a:lnSpc>
-                <a:spcPct val="100000"/>
-              </a:lnSpc>
-            </a:pPr>
-            <a:r>
-              <a:rPr sz="900" b="0" i="0">
-                <a:solidFill>
-                  <a:srgbClr val="7A828E"/>
-                </a:solidFill>
-                <a:latin typeface="맑은 고딕"/>
-              </a:rPr>
-              <a:t>씨제이씨협동조합 OSMU 워크벤치 · 관리자·사용자 매뉴얼</a:t>
-            </a:r>
-          </a:p>
-        </p:txBody>
-      </p:sp>
-      <p:sp>
-        <p:nvSpPr>
-          <p:cNvPr id="7" name="TextBox 6"/>
-          <p:cNvSpPr txBox="1"/>
-          <p:nvPr/>
-        </p:nvSpPr>
-        <p:spPr>
-          <a:xfrm>
-            <a:off x="11094415" y="6492240"/>
-            <a:ext cx="731520" cy="274320"/>
-          </a:xfrm>
-          <a:prstGeom prst="rect">
-            <a:avLst/>
-          </a:prstGeom>
-          <a:noFill/>
-        </p:spPr>
-        <p:txBody>
-          <a:bodyPr wrap="square">
-            <a:spAutoFit/>
-          </a:bodyPr>
-          <a:lstStyle/>
-          <a:p>
-            <a:pPr algn="r">
-              <a:lnSpc>
-                <a:spcPct val="100000"/>
-              </a:lnSpc>
-            </a:pPr>
-            <a:r>
-              <a:rPr sz="900" b="0" i="0">
-                <a:solidFill>
-                  <a:srgbClr val="7A828E"/>
-                </a:solidFill>
-                <a:latin typeface="맑은 고딕"/>
-              </a:rPr>
-              <a:t>20</a:t>
-            </a:r>
-          </a:p>
-        </p:txBody>
-      </p:sp>
-      <p:sp>
-        <p:nvSpPr>
-          <p:cNvPr id="8" name="Rectangle 7"/>
-          <p:cNvSpPr/>
-          <p:nvPr/>
-        </p:nvSpPr>
-        <p:spPr>
-          <a:xfrm>
-            <a:off x="502920" y="1417320"/>
-            <a:ext cx="11155680" cy="987552"/>
-          </a:xfrm>
-          <a:prstGeom prst="rect">
-            <a:avLst/>
-          </a:prstGeom>
-          <a:solidFill>
-            <a:srgbClr val="FFFFFF"/>
-          </a:solidFill>
-          <a:ln>
-            <a:noFill/>
-          </a:ln>
-          <a:effectLst/>
-        </p:spPr>
-        <p:style>
-          <a:lnRef idx="1">
-            <a:schemeClr val="accent1"/>
-          </a:lnRef>
-          <a:fillRef idx="3">
-            <a:schemeClr val="accent1"/>
-          </a:fillRef>
-          <a:effectRef idx="2">
-            <a:schemeClr val="accent1"/>
-          </a:effectRef>
-          <a:fontRef idx="minor">
-            <a:schemeClr val="lt1"/>
-          </a:fontRef>
-        </p:style>
-        <p:txBody>
-          <a:bodyPr rtlCol="0" anchor="ctr"/>
-          <a:lstStyle/>
-          <a:p>
-            <a:pPr algn="ctr"/>
-          </a:p>
-        </p:txBody>
-      </p:sp>
-      <p:sp>
-        <p:nvSpPr>
-          <p:cNvPr id="9" name="Rectangle 8"/>
-          <p:cNvSpPr/>
-          <p:nvPr/>
-        </p:nvSpPr>
-        <p:spPr>
-          <a:xfrm>
-            <a:off x="502920" y="1417320"/>
-            <a:ext cx="109728" cy="987552"/>
-          </a:xfrm>
-          <a:prstGeom prst="rect">
-            <a:avLst/>
-          </a:prstGeom>
-          <a:solidFill>
-            <a:srgbClr val="C0392B"/>
-          </a:solidFill>
-          <a:ln>
-            <a:noFill/>
-          </a:ln>
-          <a:effectLst/>
-        </p:spPr>
-        <p:style>
-          <a:lnRef idx="1">
-            <a:schemeClr val="accent1"/>
-          </a:lnRef>
-          <a:fillRef idx="3">
-            <a:schemeClr val="accent1"/>
-          </a:fillRef>
-          <a:effectRef idx="2">
-            <a:schemeClr val="accent1"/>
-          </a:effectRef>
-          <a:fontRef idx="minor">
-            <a:schemeClr val="lt1"/>
-          </a:fontRef>
-        </p:style>
-        <p:txBody>
-          <a:bodyPr rtlCol="0" anchor="ctr"/>
-          <a:lstStyle/>
-          <a:p>
-            <a:pPr algn="ctr"/>
-          </a:p>
-        </p:txBody>
-      </p:sp>
-      <p:sp>
-        <p:nvSpPr>
-          <p:cNvPr id="10" name="TextBox 9"/>
-          <p:cNvSpPr txBox="1"/>
-          <p:nvPr/>
-        </p:nvSpPr>
-        <p:spPr>
-          <a:xfrm>
-            <a:off x="822960" y="1490472"/>
-            <a:ext cx="10607040" cy="347472"/>
-          </a:xfrm>
-          <a:prstGeom prst="rect">
-            <a:avLst/>
-          </a:prstGeom>
-          <a:noFill/>
-        </p:spPr>
-        <p:txBody>
-          <a:bodyPr wrap="square">
-            <a:spAutoFit/>
-          </a:bodyPr>
-          <a:lstStyle/>
-          <a:p>
-            <a:pPr algn="l">
-              <a:lnSpc>
-                <a:spcPct val="100000"/>
-              </a:lnSpc>
-            </a:pPr>
-            <a:r>
-              <a:rPr sz="1300" b="1" i="0">
-                <a:solidFill>
-                  <a:srgbClr val="23262B"/>
-                </a:solidFill>
-                <a:latin typeface="맑은 고딕"/>
-              </a:rPr>
-              <a:t>비밀번호 칸이 비어 보여도 저장된 게 맞다</a:t>
-            </a:r>
-          </a:p>
-        </p:txBody>
-      </p:sp>
-      <p:sp>
-        <p:nvSpPr>
-          <p:cNvPr id="11" name="TextBox 10"/>
-          <p:cNvSpPr txBox="1"/>
-          <p:nvPr/>
-        </p:nvSpPr>
-        <p:spPr>
-          <a:xfrm>
-            <a:off x="822960" y="1856232"/>
-            <a:ext cx="10607040" cy="502920"/>
-          </a:xfrm>
-          <a:prstGeom prst="rect">
-            <a:avLst/>
-          </a:prstGeom>
-          <a:noFill/>
-        </p:spPr>
-        <p:txBody>
-          <a:bodyPr wrap="square">
-            <a:spAutoFit/>
-          </a:bodyPr>
-          <a:lstStyle/>
-          <a:p>
-            <a:pPr algn="l">
-              <a:lnSpc>
-                <a:spcPct val="125000"/>
-              </a:lnSpc>
-            </a:pPr>
-            <a:r>
-              <a:rPr sz="1150" b="0" i="0">
-                <a:solidFill>
-                  <a:srgbClr val="7A828E"/>
-                </a:solidFill>
-                <a:latin typeface="맑은 고딕"/>
-              </a:rPr>
-              <a:t>보안상 키는 절대 다시 보여주지 않습니다. '✅ 등록됨 ****뒷4자리 · 저장 시각' 배지로 확인하세요.</a:t>
-            </a:r>
-          </a:p>
-        </p:txBody>
-      </p:sp>
-      <p:sp>
-        <p:nvSpPr>
-          <p:cNvPr id="12" name="Rectangle 11"/>
-          <p:cNvSpPr/>
-          <p:nvPr/>
-        </p:nvSpPr>
-        <p:spPr>
-          <a:xfrm>
-            <a:off x="502920" y="2496312"/>
-            <a:ext cx="11155680" cy="987552"/>
-          </a:xfrm>
-          <a:prstGeom prst="rect">
-            <a:avLst/>
-          </a:prstGeom>
-          <a:solidFill>
-            <a:srgbClr val="FFFFFF"/>
-          </a:solidFill>
-          <a:ln>
-            <a:noFill/>
-          </a:ln>
-          <a:effectLst/>
-        </p:spPr>
-        <p:style>
-          <a:lnRef idx="1">
-            <a:schemeClr val="accent1"/>
-          </a:lnRef>
-          <a:fillRef idx="3">
-            <a:schemeClr val="accent1"/>
-          </a:fillRef>
-          <a:effectRef idx="2">
-            <a:schemeClr val="accent1"/>
-          </a:effectRef>
-          <a:fontRef idx="minor">
-            <a:schemeClr val="lt1"/>
-          </a:fontRef>
-        </p:style>
-        <p:txBody>
-          <a:bodyPr rtlCol="0" anchor="ctr"/>
-          <a:lstStyle/>
-          <a:p>
-            <a:pPr algn="ctr"/>
-          </a:p>
-        </p:txBody>
-      </p:sp>
-      <p:sp>
-        <p:nvSpPr>
-          <p:cNvPr id="13" name="Rectangle 12"/>
-          <p:cNvSpPr/>
-          <p:nvPr/>
-        </p:nvSpPr>
-        <p:spPr>
-          <a:xfrm>
-            <a:off x="502920" y="2496312"/>
-            <a:ext cx="109728" cy="987552"/>
-          </a:xfrm>
-          <a:prstGeom prst="rect">
-            <a:avLst/>
-          </a:prstGeom>
-          <a:solidFill>
-            <a:srgbClr val="C0392B"/>
-          </a:solidFill>
-          <a:ln>
-            <a:noFill/>
-          </a:ln>
-          <a:effectLst/>
-        </p:spPr>
-        <p:style>
-          <a:lnRef idx="1">
-            <a:schemeClr val="accent1"/>
-          </a:lnRef>
-          <a:fillRef idx="3">
-            <a:schemeClr val="accent1"/>
-          </a:fillRef>
-          <a:effectRef idx="2">
-            <a:schemeClr val="accent1"/>
-          </a:effectRef>
-          <a:fontRef idx="minor">
-            <a:schemeClr val="lt1"/>
-          </a:fontRef>
-        </p:style>
-        <p:txBody>
-          <a:bodyPr rtlCol="0" anchor="ctr"/>
-          <a:lstStyle/>
-          <a:p>
-            <a:pPr algn="ctr"/>
-          </a:p>
-        </p:txBody>
-      </p:sp>
-      <p:sp>
-        <p:nvSpPr>
-          <p:cNvPr id="14" name="TextBox 13"/>
-          <p:cNvSpPr txBox="1"/>
-          <p:nvPr/>
-        </p:nvSpPr>
-        <p:spPr>
-          <a:xfrm>
-            <a:off x="822960" y="2569464"/>
-            <a:ext cx="10607040" cy="347472"/>
-          </a:xfrm>
-          <a:prstGeom prst="rect">
-            <a:avLst/>
-          </a:prstGeom>
-          <a:noFill/>
-        </p:spPr>
-        <p:txBody>
-          <a:bodyPr wrap="square">
-            <a:spAutoFit/>
-          </a:bodyPr>
-          <a:lstStyle/>
-          <a:p>
-            <a:pPr algn="l">
-              <a:lnSpc>
-                <a:spcPct val="100000"/>
-              </a:lnSpc>
-            </a:pPr>
-            <a:r>
-              <a:rPr sz="1300" b="1" i="0">
-                <a:solidFill>
-                  <a:srgbClr val="23262B"/>
-                </a:solidFill>
-                <a:latin typeface="맑은 고딕"/>
-              </a:rPr>
-              <a:t>키 없이 눌렀을 때 증상 3종</a:t>
-            </a:r>
-          </a:p>
-        </p:txBody>
-      </p:sp>
-      <p:sp>
-        <p:nvSpPr>
-          <p:cNvPr id="15" name="TextBox 14"/>
-          <p:cNvSpPr txBox="1"/>
-          <p:nvPr/>
-        </p:nvSpPr>
-        <p:spPr>
-          <a:xfrm>
-            <a:off x="822960" y="2935224"/>
-            <a:ext cx="10607040" cy="502920"/>
-          </a:xfrm>
-          <a:prstGeom prst="rect">
-            <a:avLst/>
-          </a:prstGeom>
-          <a:noFill/>
-        </p:spPr>
-        <p:txBody>
-          <a:bodyPr wrap="square">
-            <a:spAutoFit/>
-          </a:bodyPr>
-          <a:lstStyle/>
-          <a:p>
-            <a:pPr algn="l">
-              <a:lnSpc>
-                <a:spcPct val="125000"/>
-              </a:lnSpc>
-            </a:pPr>
-            <a:r>
-              <a:rPr sz="1150" b="0" i="0">
-                <a:solidFill>
-                  <a:srgbClr val="7A828E"/>
-                </a:solidFill>
-                <a:latin typeface="맑은 고딕"/>
-              </a:rPr>
-              <a:t>'기본 생성 모델이 지정되지 않았습니다'(🪄 추천) · [1~4단계]·[숫자만 새로 재기] 버튼 잠김 · 경쟁도 만료 경고 — 모두 키 등록으로 해결.</a:t>
-            </a:r>
-          </a:p>
-        </p:txBody>
-      </p:sp>
-      <p:sp>
-        <p:nvSpPr>
-          <p:cNvPr id="16" name="Rectangle 15"/>
-          <p:cNvSpPr/>
-          <p:nvPr/>
-        </p:nvSpPr>
-        <p:spPr>
-          <a:xfrm>
-            <a:off x="502920" y="3575304"/>
-            <a:ext cx="11155680" cy="987552"/>
-          </a:xfrm>
-          <a:prstGeom prst="rect">
-            <a:avLst/>
-          </a:prstGeom>
-          <a:solidFill>
-            <a:srgbClr val="FFFFFF"/>
-          </a:solidFill>
-          <a:ln>
-            <a:noFill/>
-          </a:ln>
-          <a:effectLst/>
-        </p:spPr>
-        <p:style>
-          <a:lnRef idx="1">
-            <a:schemeClr val="accent1"/>
-          </a:lnRef>
-          <a:fillRef idx="3">
-            <a:schemeClr val="accent1"/>
-          </a:fillRef>
-          <a:effectRef idx="2">
-            <a:schemeClr val="accent1"/>
-          </a:effectRef>
-          <a:fontRef idx="minor">
-            <a:schemeClr val="lt1"/>
-          </a:fontRef>
-        </p:style>
-        <p:txBody>
-          <a:bodyPr rtlCol="0" anchor="ctr"/>
-          <a:lstStyle/>
-          <a:p>
-            <a:pPr algn="ctr"/>
-          </a:p>
-        </p:txBody>
-      </p:sp>
-      <p:sp>
-        <p:nvSpPr>
-          <p:cNvPr id="17" name="Rectangle 16"/>
-          <p:cNvSpPr/>
-          <p:nvPr/>
-        </p:nvSpPr>
-        <p:spPr>
-          <a:xfrm>
-            <a:off x="502920" y="3575304"/>
-            <a:ext cx="109728" cy="987552"/>
-          </a:xfrm>
-          <a:prstGeom prst="rect">
-            <a:avLst/>
-          </a:prstGeom>
-          <a:solidFill>
-            <a:srgbClr val="C0392B"/>
-          </a:solidFill>
-          <a:ln>
-            <a:noFill/>
-          </a:ln>
-          <a:effectLst/>
-        </p:spPr>
-        <p:style>
-          <a:lnRef idx="1">
-            <a:schemeClr val="accent1"/>
-          </a:lnRef>
-          <a:fillRef idx="3">
-            <a:schemeClr val="accent1"/>
-          </a:fillRef>
-          <a:effectRef idx="2">
-            <a:schemeClr val="accent1"/>
-          </a:effectRef>
-          <a:fontRef idx="minor">
-            <a:schemeClr val="lt1"/>
-          </a:fontRef>
-        </p:style>
-        <p:txBody>
-          <a:bodyPr rtlCol="0" anchor="ctr"/>
-          <a:lstStyle/>
-          <a:p>
-            <a:pPr algn="ctr"/>
-          </a:p>
-        </p:txBody>
-      </p:sp>
-      <p:sp>
-        <p:nvSpPr>
-          <p:cNvPr id="18" name="TextBox 17"/>
-          <p:cNvSpPr txBox="1"/>
-          <p:nvPr/>
-        </p:nvSpPr>
-        <p:spPr>
-          <a:xfrm>
-            <a:off x="822960" y="3648456"/>
-            <a:ext cx="10607040" cy="347472"/>
-          </a:xfrm>
-          <a:prstGeom prst="rect">
-            <a:avLst/>
-          </a:prstGeom>
-          <a:noFill/>
-        </p:spPr>
-        <p:txBody>
-          <a:bodyPr wrap="square">
-            <a:spAutoFit/>
-          </a:bodyPr>
-          <a:lstStyle/>
-          <a:p>
-            <a:pPr algn="l">
-              <a:lnSpc>
-                <a:spcPct val="100000"/>
-              </a:lnSpc>
-            </a:pPr>
-            <a:r>
-              <a:rPr sz="1300" b="1" i="0">
-                <a:solidFill>
-                  <a:srgbClr val="23262B"/>
-                </a:solidFill>
-                <a:latin typeface="맑은 고딕"/>
-              </a:rPr>
-              <a:t>만료는 조용히 일어난다</a:t>
-            </a:r>
-          </a:p>
-        </p:txBody>
-      </p:sp>
-      <p:sp>
-        <p:nvSpPr>
-          <p:cNvPr id="19" name="TextBox 18"/>
-          <p:cNvSpPr txBox="1"/>
-          <p:nvPr/>
-        </p:nvSpPr>
-        <p:spPr>
-          <a:xfrm>
-            <a:off x="822960" y="4014216"/>
-            <a:ext cx="10607040" cy="502920"/>
-          </a:xfrm>
-          <a:prstGeom prst="rect">
-            <a:avLst/>
-          </a:prstGeom>
-          <a:noFill/>
-        </p:spPr>
-        <p:txBody>
-          <a:bodyPr wrap="square">
-            <a:spAutoFit/>
-          </a:bodyPr>
-          <a:lstStyle/>
-          <a:p>
-            <a:pPr algn="l">
-              <a:lnSpc>
-                <a:spcPct val="125000"/>
-              </a:lnSpc>
-            </a:pPr>
-            <a:r>
-              <a:rPr sz="1150" b="0" i="0">
-                <a:solidFill>
-                  <a:srgbClr val="7A828E"/>
-                </a:solidFill>
-                <a:latin typeface="맑은 고딕"/>
-              </a:rPr>
-              <a:t>에러 없이 전환 가중치만 꺼집니다. '경쟁도 측정 만료' 문구가 보이면 [숫자만 새로 재기].</a:t>
-            </a:r>
-          </a:p>
-        </p:txBody>
-      </p:sp>
-      <p:sp>
-        <p:nvSpPr>
-          <p:cNvPr id="20" name="Rectangle 19"/>
-          <p:cNvSpPr/>
-          <p:nvPr/>
-        </p:nvSpPr>
-        <p:spPr>
-          <a:xfrm>
-            <a:off x="502920" y="4654296"/>
-            <a:ext cx="11155680" cy="987552"/>
-          </a:xfrm>
-          <a:prstGeom prst="rect">
-            <a:avLst/>
-          </a:prstGeom>
-          <a:solidFill>
-            <a:srgbClr val="FFFFFF"/>
-          </a:solidFill>
-          <a:ln>
-            <a:noFill/>
-          </a:ln>
-          <a:effectLst/>
-        </p:spPr>
-        <p:style>
-          <a:lnRef idx="1">
-            <a:schemeClr val="accent1"/>
-          </a:lnRef>
-          <a:fillRef idx="3">
-            <a:schemeClr val="accent1"/>
-          </a:fillRef>
-          <a:effectRef idx="2">
-            <a:schemeClr val="accent1"/>
-          </a:effectRef>
-          <a:fontRef idx="minor">
-            <a:schemeClr val="lt1"/>
-          </a:fontRef>
-        </p:style>
-        <p:txBody>
-          <a:bodyPr rtlCol="0" anchor="ctr"/>
-          <a:lstStyle/>
-          <a:p>
-            <a:pPr algn="ctr"/>
-          </a:p>
-        </p:txBody>
-      </p:sp>
-      <p:sp>
-        <p:nvSpPr>
-          <p:cNvPr id="21" name="Rectangle 20"/>
-          <p:cNvSpPr/>
-          <p:nvPr/>
-        </p:nvSpPr>
-        <p:spPr>
-          <a:xfrm>
-            <a:off x="502920" y="4654296"/>
-            <a:ext cx="109728" cy="987552"/>
-          </a:xfrm>
-          <a:prstGeom prst="rect">
-            <a:avLst/>
-          </a:prstGeom>
-          <a:solidFill>
-            <a:srgbClr val="C0392B"/>
-          </a:solidFill>
-          <a:ln>
-            <a:noFill/>
-          </a:ln>
-          <a:effectLst/>
-        </p:spPr>
-        <p:style>
-          <a:lnRef idx="1">
-            <a:schemeClr val="accent1"/>
-          </a:lnRef>
-          <a:fillRef idx="3">
-            <a:schemeClr val="accent1"/>
-          </a:fillRef>
-          <a:effectRef idx="2">
-            <a:schemeClr val="accent1"/>
-          </a:effectRef>
-          <a:fontRef idx="minor">
-            <a:schemeClr val="lt1"/>
-          </a:fontRef>
-        </p:style>
-        <p:txBody>
-          <a:bodyPr rtlCol="0" anchor="ctr"/>
-          <a:lstStyle/>
-          <a:p>
-            <a:pPr algn="ctr"/>
-          </a:p>
-        </p:txBody>
-      </p:sp>
-      <p:sp>
-        <p:nvSpPr>
-          <p:cNvPr id="22" name="TextBox 21"/>
-          <p:cNvSpPr txBox="1"/>
-          <p:nvPr/>
-        </p:nvSpPr>
-        <p:spPr>
-          <a:xfrm>
-            <a:off x="822960" y="4727448"/>
-            <a:ext cx="10607040" cy="347472"/>
-          </a:xfrm>
-          <a:prstGeom prst="rect">
-            <a:avLst/>
-          </a:prstGeom>
-          <a:noFill/>
-        </p:spPr>
-        <p:txBody>
-          <a:bodyPr wrap="square">
-            <a:spAutoFit/>
-          </a:bodyPr>
-          <a:lstStyle/>
-          <a:p>
-            <a:pPr algn="l">
-              <a:lnSpc>
-                <a:spcPct val="100000"/>
-              </a:lnSpc>
-            </a:pPr>
-            <a:r>
-              <a:rPr sz="1300" b="1" i="0">
-                <a:solidFill>
-                  <a:srgbClr val="23262B"/>
-                </a:solidFill>
-                <a:latin typeface="맑은 고딕"/>
-              </a:rPr>
-              <a:t>[발행]은 사람이 직접</a:t>
-            </a:r>
-          </a:p>
-        </p:txBody>
-      </p:sp>
-      <p:sp>
-        <p:nvSpPr>
-          <p:cNvPr id="23" name="TextBox 22"/>
-          <p:cNvSpPr txBox="1"/>
-          <p:nvPr/>
-        </p:nvSpPr>
-        <p:spPr>
-          <a:xfrm>
-            <a:off x="822960" y="5093208"/>
-            <a:ext cx="10607040" cy="502920"/>
-          </a:xfrm>
-          <a:prstGeom prst="rect">
-            <a:avLst/>
-          </a:prstGeom>
-          <a:noFill/>
-        </p:spPr>
-        <p:txBody>
-          <a:bodyPr wrap="square">
-            <a:spAutoFit/>
-          </a:bodyPr>
-          <a:lstStyle/>
-          <a:p>
-            <a:pPr algn="l">
-              <a:lnSpc>
-                <a:spcPct val="125000"/>
-              </a:lnSpc>
-            </a:pPr>
-            <a:r>
-              <a:rPr sz="1150" b="0" i="0">
-                <a:solidFill>
-                  <a:srgbClr val="7A828E"/>
-                </a:solidFill>
-                <a:latin typeface="맑은 고딕"/>
-              </a:rPr>
-              <a:t>자동으로 발행까지 가지 않는 것은 고장이 아니라 네이버 차단 회피 설계입니다.</a:t>
-            </a:r>
-          </a:p>
-        </p:txBody>
-      </p:sp>
-      <p:sp>
-        <p:nvSpPr>
-          <p:cNvPr id="24" name="Rectangle 23"/>
-          <p:cNvSpPr/>
-          <p:nvPr/>
-        </p:nvSpPr>
-        <p:spPr>
-          <a:xfrm>
-            <a:off x="502920" y="5733288"/>
-            <a:ext cx="11155680" cy="987552"/>
-          </a:xfrm>
-          <a:prstGeom prst="rect">
-            <a:avLst/>
-          </a:prstGeom>
-          <a:solidFill>
-            <a:srgbClr val="FFFFFF"/>
-          </a:solidFill>
-          <a:ln>
-            <a:noFill/>
-          </a:ln>
-          <a:effectLst/>
-        </p:spPr>
-        <p:style>
-          <a:lnRef idx="1">
-            <a:schemeClr val="accent1"/>
-          </a:lnRef>
-          <a:fillRef idx="3">
-            <a:schemeClr val="accent1"/>
-          </a:fillRef>
-          <a:effectRef idx="2">
-            <a:schemeClr val="accent1"/>
-          </a:effectRef>
-          <a:fontRef idx="minor">
-            <a:schemeClr val="lt1"/>
-          </a:fontRef>
-        </p:style>
-        <p:txBody>
-          <a:bodyPr rtlCol="0" anchor="ctr"/>
-          <a:lstStyle/>
-          <a:p>
-            <a:pPr algn="ctr"/>
-          </a:p>
-        </p:txBody>
-      </p:sp>
-      <p:sp>
-        <p:nvSpPr>
-          <p:cNvPr id="25" name="Rectangle 24"/>
-          <p:cNvSpPr/>
-          <p:nvPr/>
-        </p:nvSpPr>
-        <p:spPr>
-          <a:xfrm>
-            <a:off x="502920" y="5733288"/>
-            <a:ext cx="109728" cy="987552"/>
-          </a:xfrm>
-          <a:prstGeom prst="rect">
-            <a:avLst/>
-          </a:prstGeom>
-          <a:solidFill>
-            <a:srgbClr val="C0392B"/>
-          </a:solidFill>
-          <a:ln>
-            <a:noFill/>
-          </a:ln>
-          <a:effectLst/>
-        </p:spPr>
-        <p:style>
-          <a:lnRef idx="1">
-            <a:schemeClr val="accent1"/>
-          </a:lnRef>
-          <a:fillRef idx="3">
-            <a:schemeClr val="accent1"/>
-          </a:fillRef>
-          <a:effectRef idx="2">
-            <a:schemeClr val="accent1"/>
-          </a:effectRef>
-          <a:fontRef idx="minor">
-            <a:schemeClr val="lt1"/>
-          </a:fontRef>
-        </p:style>
-        <p:txBody>
-          <a:bodyPr rtlCol="0" anchor="ctr"/>
-          <a:lstStyle/>
-          <a:p>
-            <a:pPr algn="ctr"/>
-          </a:p>
-        </p:txBody>
-      </p:sp>
-      <p:sp>
-        <p:nvSpPr>
-          <p:cNvPr id="26" name="TextBox 25"/>
-          <p:cNvSpPr txBox="1"/>
-          <p:nvPr/>
-        </p:nvSpPr>
-        <p:spPr>
-          <a:xfrm>
-            <a:off x="822960" y="5806440"/>
-            <a:ext cx="10607040" cy="347472"/>
-          </a:xfrm>
-          <a:prstGeom prst="rect">
-            <a:avLst/>
-          </a:prstGeom>
-          <a:noFill/>
-        </p:spPr>
-        <p:txBody>
-          <a:bodyPr wrap="square">
-            <a:spAutoFit/>
-          </a:bodyPr>
-          <a:lstStyle/>
-          <a:p>
-            <a:pPr algn="l">
-              <a:lnSpc>
-                <a:spcPct val="100000"/>
-              </a:lnSpc>
-            </a:pPr>
-            <a:r>
-              <a:rPr sz="1300" b="1" i="0">
-                <a:solidFill>
-                  <a:srgbClr val="23262B"/>
-                </a:solidFill>
-                <a:latin typeface="맑은 고딕"/>
-              </a:rPr>
-              <a:t>data/ 폴더를 함부로 지우지 말기</a:t>
-            </a:r>
-          </a:p>
-        </p:txBody>
-      </p:sp>
-      <p:sp>
-        <p:nvSpPr>
-          <p:cNvPr id="27" name="TextBox 26"/>
-          <p:cNvSpPr txBox="1"/>
-          <p:nvPr/>
-        </p:nvSpPr>
-        <p:spPr>
-          <a:xfrm>
-            <a:off x="822960" y="6172200"/>
-            <a:ext cx="10607040" cy="502920"/>
-          </a:xfrm>
-          <a:prstGeom prst="rect">
-            <a:avLst/>
-          </a:prstGeom>
-          <a:noFill/>
-        </p:spPr>
-        <p:txBody>
-          <a:bodyPr wrap="square">
-            <a:spAutoFit/>
-          </a:bodyPr>
-          <a:lstStyle/>
-          <a:p>
-            <a:pPr algn="l">
-              <a:lnSpc>
-                <a:spcPct val="125000"/>
-              </a:lnSpc>
-            </a:pPr>
-            <a:r>
-              <a:rPr sz="1150" b="0" i="0">
-                <a:solidFill>
-                  <a:srgbClr val="7A828E"/>
-                </a:solidFill>
-                <a:latin typeface="맑은 고딕"/>
-              </a:rPr>
-              <a:t>DB·사진·마스터키가 전부 안에 있습니다. 브랜드 킷을 처음부터 다시 채울 때만 삭제 후 재시작하세요.</a:t>
-            </a:r>
-          </a:p>
-        </p:txBody>
-      </p:sp>
-    </p:spTree>
-  </p:cSld>
-  <p:clrMapOvr>
-    <a:masterClrMapping/>
-  </p:clrMapOvr>
-</p:sld>
-</file>
-
 <file path=ppt/slides/slide22.xml><?xml version="1.0" encoding="utf-8"?>
 <p:sld xmlns:a="http://schemas.openxmlformats.org/drawingml/2006/main" xmlns:p="http://schemas.openxmlformats.org/presentationml/2006/main" xmlns:r="http://schemas.openxmlformats.org/officeDocument/2006/relationships">
   <p:cSld>
@@ -14268,7 +13888,7 @@
                 </a:solidFill>
                 <a:latin typeface="맑은 고딕"/>
               </a:rPr>
-              <a:t>④ 안전 · FAQ</a:t>
+              <a:t>④ 안전 · 주의사항</a:t>
             </a:r>
           </a:p>
         </p:txBody>
@@ -14307,7 +13927,7 @@
                 </a:solidFill>
                 <a:latin typeface="맑은 고딕"/>
               </a:rPr>
-              <a:t>자주 묻는 질문</a:t>
+              <a:t>함정 모음 — 먼저 알면 안 헷갈립니다</a:t>
             </a:r>
           </a:p>
         </p:txBody>
@@ -14436,14 +14056,58 @@
       </p:sp>
       <p:sp>
         <p:nvSpPr>
-          <p:cNvPr id="9" name="TextBox 8"/>
-          <p:cNvSpPr txBox="1"/>
-          <p:nvPr/>
-        </p:nvSpPr>
-        <p:spPr>
-          <a:xfrm>
-            <a:off x="731520" y="1490472"/>
-            <a:ext cx="10607040" cy="365760"/>
+          <p:cNvPr id="9" name="Rectangle 8"/>
+          <p:cNvSpPr/>
+          <p:nvPr/>
+        </p:nvSpPr>
+        <p:spPr>
+          <a:xfrm>
+            <a:off x="502920" y="1417320"/>
+            <a:ext cx="109728" cy="987552"/>
+          </a:xfrm>
+          <a:prstGeom prst="rect">
+            <a:avLst/>
+          </a:prstGeom>
+          <a:solidFill>
+            <a:srgbClr val="C0392B"/>
+          </a:solidFill>
+          <a:ln>
+            <a:noFill/>
+          </a:ln>
+          <a:effectLst/>
+        </p:spPr>
+        <p:style>
+          <a:lnRef idx="1">
+            <a:schemeClr val="accent1"/>
+          </a:lnRef>
+          <a:fillRef idx="3">
+            <a:schemeClr val="accent1"/>
+          </a:fillRef>
+          <a:effectRef idx="2">
+            <a:schemeClr val="accent1"/>
+          </a:effectRef>
+          <a:fontRef idx="minor">
+            <a:schemeClr val="lt1"/>
+          </a:fontRef>
+        </p:style>
+        <p:txBody>
+          <a:bodyPr rtlCol="0" anchor="ctr"/>
+          <a:lstStyle/>
+          <a:p>
+            <a:pPr algn="ctr"/>
+          </a:p>
+        </p:txBody>
+      </p:sp>
+      <p:sp>
+        <p:nvSpPr>
+          <p:cNvPr id="10" name="TextBox 9"/>
+          <p:cNvSpPr txBox="1"/>
+          <p:nvPr/>
+        </p:nvSpPr>
+        <p:spPr>
+          <a:xfrm>
+            <a:off x="822960" y="1490472"/>
+            <a:ext cx="10607040" cy="347472"/>
           </a:xfrm>
           <a:prstGeom prst="rect">
             <a:avLst/>
@@ -14462,27 +14126,27 @@
               </a:lnSpc>
             </a:pPr>
             <a:r>
-              <a:rPr sz="1250" b="1" i="0">
-                <a:solidFill>
-                  <a:srgbClr val="122A44"/>
-                </a:solidFill>
-                <a:latin typeface="맑은 고딕"/>
-              </a:rPr>
-              <a:t>Q. [🪄 브랜드에서 추천]이 실패해요</a:t>
-            </a:r>
-          </a:p>
-        </p:txBody>
-      </p:sp>
-      <p:sp>
-        <p:nvSpPr>
-          <p:cNvPr id="10" name="TextBox 9"/>
-          <p:cNvSpPr txBox="1"/>
-          <p:nvPr/>
-        </p:nvSpPr>
-        <p:spPr>
-          <a:xfrm>
-            <a:off x="731520" y="1874520"/>
-            <a:ext cx="10607040" cy="457200"/>
+              <a:rPr sz="1300" b="1" i="0">
+                <a:solidFill>
+                  <a:srgbClr val="23262B"/>
+                </a:solidFill>
+                <a:latin typeface="맑은 고딕"/>
+              </a:rPr>
+              <a:t>비밀번호 칸이 비어 보여도 저장된 게 맞다</a:t>
+            </a:r>
+          </a:p>
+        </p:txBody>
+      </p:sp>
+      <p:sp>
+        <p:nvSpPr>
+          <p:cNvPr id="11" name="TextBox 10"/>
+          <p:cNvSpPr txBox="1"/>
+          <p:nvPr/>
+        </p:nvSpPr>
+        <p:spPr>
+          <a:xfrm>
+            <a:off x="822960" y="1856232"/>
+            <a:ext cx="10607040" cy="502920"/>
           </a:xfrm>
           <a:prstGeom prst="rect">
             <a:avLst/>
@@ -14497,30 +14161,30 @@
           <a:p>
             <a:pPr algn="l">
               <a:lnSpc>
-                <a:spcPct val="120000"/>
-              </a:lnSpc>
-            </a:pPr>
-            <a:r>
-              <a:rPr sz="1100" b="0" i="0">
-                <a:solidFill>
-                  <a:srgbClr val="23262B"/>
-                </a:solidFill>
-                <a:latin typeface="맑은 고딕"/>
-              </a:rPr>
-              <a:t>A. '추천 실패: ...' 뒤의 메시지가 원인입니다. 대부분 LLM 미등록 → LLM 탭에서 키 등록 후 기본 모델 확인.</a:t>
-            </a:r>
-          </a:p>
-        </p:txBody>
-      </p:sp>
-      <p:sp>
-        <p:nvSpPr>
-          <p:cNvPr id="11" name="Rectangle 10"/>
+                <a:spcPct val="125000"/>
+              </a:lnSpc>
+            </a:pPr>
+            <a:r>
+              <a:rPr sz="1150" b="0" i="0">
+                <a:solidFill>
+                  <a:srgbClr val="7A828E"/>
+                </a:solidFill>
+                <a:latin typeface="맑은 고딕"/>
+              </a:rPr>
+              <a:t>보안상 키는 절대 다시 보여주지 않습니다. '✅ 등록됨 ****뒷4자리 · 저장 시각' 배지로 확인하세요.</a:t>
+            </a:r>
+          </a:p>
+        </p:txBody>
+      </p:sp>
+      <p:sp>
+        <p:nvSpPr>
+          <p:cNvPr id="12" name="Rectangle 11"/>
           <p:cNvSpPr/>
           <p:nvPr/>
         </p:nvSpPr>
         <p:spPr>
           <a:xfrm>
-            <a:off x="502920" y="2478024"/>
+            <a:off x="502920" y="2496312"/>
             <a:ext cx="11155680" cy="987552"/>
           </a:xfrm>
           <a:prstGeom prst="rect">
@@ -14558,14 +14222,58 @@
       </p:sp>
       <p:sp>
         <p:nvSpPr>
-          <p:cNvPr id="12" name="TextBox 11"/>
-          <p:cNvSpPr txBox="1"/>
-          <p:nvPr/>
-        </p:nvSpPr>
-        <p:spPr>
-          <a:xfrm>
-            <a:off x="731520" y="2551176"/>
-            <a:ext cx="10607040" cy="365760"/>
+          <p:cNvPr id="13" name="Rectangle 12"/>
+          <p:cNvSpPr/>
+          <p:nvPr/>
+        </p:nvSpPr>
+        <p:spPr>
+          <a:xfrm>
+            <a:off x="502920" y="2496312"/>
+            <a:ext cx="109728" cy="987552"/>
+          </a:xfrm>
+          <a:prstGeom prst="rect">
+            <a:avLst/>
+          </a:prstGeom>
+          <a:solidFill>
+            <a:srgbClr val="C0392B"/>
+          </a:solidFill>
+          <a:ln>
+            <a:noFill/>
+          </a:ln>
+          <a:effectLst/>
+        </p:spPr>
+        <p:style>
+          <a:lnRef idx="1">
+            <a:schemeClr val="accent1"/>
+          </a:lnRef>
+          <a:fillRef idx="3">
+            <a:schemeClr val="accent1"/>
+          </a:fillRef>
+          <a:effectRef idx="2">
+            <a:schemeClr val="accent1"/>
+          </a:effectRef>
+          <a:fontRef idx="minor">
+            <a:schemeClr val="lt1"/>
+          </a:fontRef>
+        </p:style>
+        <p:txBody>
+          <a:bodyPr rtlCol="0" anchor="ctr"/>
+          <a:lstStyle/>
+          <a:p>
+            <a:pPr algn="ctr"/>
+          </a:p>
+        </p:txBody>
+      </p:sp>
+      <p:sp>
+        <p:nvSpPr>
+          <p:cNvPr id="14" name="TextBox 13"/>
+          <p:cNvSpPr txBox="1"/>
+          <p:nvPr/>
+        </p:nvSpPr>
+        <p:spPr>
+          <a:xfrm>
+            <a:off x="822960" y="2569464"/>
+            <a:ext cx="10607040" cy="347472"/>
           </a:xfrm>
           <a:prstGeom prst="rect">
             <a:avLst/>
@@ -14584,27 +14292,27 @@
               </a:lnSpc>
             </a:pPr>
             <a:r>
-              <a:rPr sz="1250" b="1" i="0">
-                <a:solidFill>
-                  <a:srgbClr val="122A44"/>
-                </a:solidFill>
-                <a:latin typeface="맑은 고딕"/>
-              </a:rPr>
-              <a:t>Q. 키를 저장했는데 칸이 비어 있어요</a:t>
-            </a:r>
-          </a:p>
-        </p:txBody>
-      </p:sp>
-      <p:sp>
-        <p:nvSpPr>
-          <p:cNvPr id="13" name="TextBox 12"/>
-          <p:cNvSpPr txBox="1"/>
-          <p:nvPr/>
-        </p:nvSpPr>
-        <p:spPr>
-          <a:xfrm>
-            <a:off x="731520" y="2935224"/>
-            <a:ext cx="10607040" cy="457200"/>
+              <a:rPr sz="1300" b="1" i="0">
+                <a:solidFill>
+                  <a:srgbClr val="23262B"/>
+                </a:solidFill>
+                <a:latin typeface="맑은 고딕"/>
+              </a:rPr>
+              <a:t>키 없이 눌렀을 때 증상 3종</a:t>
+            </a:r>
+          </a:p>
+        </p:txBody>
+      </p:sp>
+      <p:sp>
+        <p:nvSpPr>
+          <p:cNvPr id="15" name="TextBox 14"/>
+          <p:cNvSpPr txBox="1"/>
+          <p:nvPr/>
+        </p:nvSpPr>
+        <p:spPr>
+          <a:xfrm>
+            <a:off x="822960" y="2935224"/>
+            <a:ext cx="10607040" cy="502920"/>
           </a:xfrm>
           <a:prstGeom prst="rect">
             <a:avLst/>
@@ -14619,30 +14327,30 @@
           <a:p>
             <a:pPr algn="l">
               <a:lnSpc>
-                <a:spcPct val="120000"/>
-              </a:lnSpc>
-            </a:pPr>
-            <a:r>
-              <a:rPr sz="1100" b="0" i="0">
-                <a:solidFill>
-                  <a:srgbClr val="23262B"/>
-                </a:solidFill>
-                <a:latin typeface="맑은 고딕"/>
-              </a:rPr>
-              <a:t>A. 정상입니다. 배지(✅ 등록됨 ****...)로 확인하세요. 바꾸려면 새 키 입력 후 다시 [연결 테스트 · 저장].</a:t>
-            </a:r>
-          </a:p>
-        </p:txBody>
-      </p:sp>
-      <p:sp>
-        <p:nvSpPr>
-          <p:cNvPr id="14" name="Rectangle 13"/>
+                <a:spcPct val="125000"/>
+              </a:lnSpc>
+            </a:pPr>
+            <a:r>
+              <a:rPr sz="1150" b="0" i="0">
+                <a:solidFill>
+                  <a:srgbClr val="7A828E"/>
+                </a:solidFill>
+                <a:latin typeface="맑은 고딕"/>
+              </a:rPr>
+              <a:t>'기본 생성 모델이 지정되지 않았습니다'(🪄 추천) · [1~4단계]·[숫자만 새로 재기] 버튼 잠김 · 경쟁도 만료 경고 — 모두 키 등록으로 해결.</a:t>
+            </a:r>
+          </a:p>
+        </p:txBody>
+      </p:sp>
+      <p:sp>
+        <p:nvSpPr>
+          <p:cNvPr id="16" name="Rectangle 15"/>
           <p:cNvSpPr/>
           <p:nvPr/>
         </p:nvSpPr>
         <p:spPr>
           <a:xfrm>
-            <a:off x="502920" y="3538728"/>
+            <a:off x="502920" y="3575304"/>
             <a:ext cx="11155680" cy="987552"/>
           </a:xfrm>
           <a:prstGeom prst="rect">
@@ -14680,91 +14388,135 @@
       </p:sp>
       <p:sp>
         <p:nvSpPr>
-          <p:cNvPr id="15" name="TextBox 14"/>
-          <p:cNvSpPr txBox="1"/>
-          <p:nvPr/>
-        </p:nvSpPr>
-        <p:spPr>
-          <a:xfrm>
-            <a:off x="731520" y="3611880"/>
-            <a:ext cx="10607040" cy="365760"/>
-          </a:xfrm>
-          <a:prstGeom prst="rect">
-            <a:avLst/>
-          </a:prstGeom>
-          <a:noFill/>
-        </p:spPr>
-        <p:txBody>
-          <a:bodyPr wrap="square">
-            <a:spAutoFit/>
-          </a:bodyPr>
-          <a:lstStyle/>
-          <a:p>
-            <a:pPr algn="l">
-              <a:lnSpc>
-                <a:spcPct val="100000"/>
-              </a:lnSpc>
-            </a:pPr>
-            <a:r>
-              <a:rPr sz="1250" b="1" i="0">
-                <a:solidFill>
-                  <a:srgbClr val="122A44"/>
-                </a:solidFill>
-                <a:latin typeface="맑은 고딕"/>
-              </a:rPr>
-              <a:t>Q. 4단계 적용 후에 [숫자만 새로 재기]를 또 눌러야 하나요?</a:t>
-            </a:r>
-          </a:p>
-        </p:txBody>
-      </p:sp>
-      <p:sp>
-        <p:nvSpPr>
-          <p:cNvPr id="16" name="TextBox 15"/>
-          <p:cNvSpPr txBox="1"/>
-          <p:nvPr/>
-        </p:nvSpPr>
-        <p:spPr>
-          <a:xfrm>
-            <a:off x="731520" y="3995928"/>
-            <a:ext cx="10607040" cy="457200"/>
-          </a:xfrm>
-          <a:prstGeom prst="rect">
-            <a:avLst/>
-          </a:prstGeom>
-          <a:noFill/>
-        </p:spPr>
-        <p:txBody>
-          <a:bodyPr wrap="square">
-            <a:spAutoFit/>
-          </a:bodyPr>
-          <a:lstStyle/>
-          <a:p>
-            <a:pPr algn="l">
-              <a:lnSpc>
-                <a:spcPct val="120000"/>
-              </a:lnSpc>
-            </a:pPr>
-            <a:r>
-              <a:rPr sz="1100" b="0" i="0">
-                <a:solidFill>
-                  <a:srgbClr val="23262B"/>
-                </a:solidFill>
-                <a:latin typeface="맑은 고딕"/>
-              </a:rPr>
-              <a:t>A. 아니요. 4단계 [적용]이 곧 SEO 키워드 교체이고, 새 키워드 측정까지 같이 끝냅니다. 숫자 재기는 30일 뒤 만료 경고가 뜰 때만.</a:t>
-            </a:r>
-          </a:p>
-        </p:txBody>
-      </p:sp>
-      <p:sp>
-        <p:nvSpPr>
           <p:cNvPr id="17" name="Rectangle 16"/>
           <p:cNvSpPr/>
           <p:nvPr/>
         </p:nvSpPr>
         <p:spPr>
           <a:xfrm>
-            <a:off x="502920" y="4599432"/>
+            <a:off x="502920" y="3575304"/>
+            <a:ext cx="109728" cy="987552"/>
+          </a:xfrm>
+          <a:prstGeom prst="rect">
+            <a:avLst/>
+          </a:prstGeom>
+          <a:solidFill>
+            <a:srgbClr val="C0392B"/>
+          </a:solidFill>
+          <a:ln>
+            <a:noFill/>
+          </a:ln>
+          <a:effectLst/>
+        </p:spPr>
+        <p:style>
+          <a:lnRef idx="1">
+            <a:schemeClr val="accent1"/>
+          </a:lnRef>
+          <a:fillRef idx="3">
+            <a:schemeClr val="accent1"/>
+          </a:fillRef>
+          <a:effectRef idx="2">
+            <a:schemeClr val="accent1"/>
+          </a:effectRef>
+          <a:fontRef idx="minor">
+            <a:schemeClr val="lt1"/>
+          </a:fontRef>
+        </p:style>
+        <p:txBody>
+          <a:bodyPr rtlCol="0" anchor="ctr"/>
+          <a:lstStyle/>
+          <a:p>
+            <a:pPr algn="ctr"/>
+          </a:p>
+        </p:txBody>
+      </p:sp>
+      <p:sp>
+        <p:nvSpPr>
+          <p:cNvPr id="18" name="TextBox 17"/>
+          <p:cNvSpPr txBox="1"/>
+          <p:nvPr/>
+        </p:nvSpPr>
+        <p:spPr>
+          <a:xfrm>
+            <a:off x="822960" y="3648456"/>
+            <a:ext cx="10607040" cy="347472"/>
+          </a:xfrm>
+          <a:prstGeom prst="rect">
+            <a:avLst/>
+          </a:prstGeom>
+          <a:noFill/>
+        </p:spPr>
+        <p:txBody>
+          <a:bodyPr wrap="square">
+            <a:spAutoFit/>
+          </a:bodyPr>
+          <a:lstStyle/>
+          <a:p>
+            <a:pPr algn="l">
+              <a:lnSpc>
+                <a:spcPct val="100000"/>
+              </a:lnSpc>
+            </a:pPr>
+            <a:r>
+              <a:rPr sz="1300" b="1" i="0">
+                <a:solidFill>
+                  <a:srgbClr val="23262B"/>
+                </a:solidFill>
+                <a:latin typeface="맑은 고딕"/>
+              </a:rPr>
+              <a:t>만료는 조용히 일어난다</a:t>
+            </a:r>
+          </a:p>
+        </p:txBody>
+      </p:sp>
+      <p:sp>
+        <p:nvSpPr>
+          <p:cNvPr id="19" name="TextBox 18"/>
+          <p:cNvSpPr txBox="1"/>
+          <p:nvPr/>
+        </p:nvSpPr>
+        <p:spPr>
+          <a:xfrm>
+            <a:off x="822960" y="4014216"/>
+            <a:ext cx="10607040" cy="502920"/>
+          </a:xfrm>
+          <a:prstGeom prst="rect">
+            <a:avLst/>
+          </a:prstGeom>
+          <a:noFill/>
+        </p:spPr>
+        <p:txBody>
+          <a:bodyPr wrap="square">
+            <a:spAutoFit/>
+          </a:bodyPr>
+          <a:lstStyle/>
+          <a:p>
+            <a:pPr algn="l">
+              <a:lnSpc>
+                <a:spcPct val="125000"/>
+              </a:lnSpc>
+            </a:pPr>
+            <a:r>
+              <a:rPr sz="1150" b="0" i="0">
+                <a:solidFill>
+                  <a:srgbClr val="7A828E"/>
+                </a:solidFill>
+                <a:latin typeface="맑은 고딕"/>
+              </a:rPr>
+              <a:t>에러 없이 전환 가중치만 꺼집니다. '경쟁도 측정 만료' 문구가 보이면 [숫자만 새로 재기].</a:t>
+            </a:r>
+          </a:p>
+        </p:txBody>
+      </p:sp>
+      <p:sp>
+        <p:nvSpPr>
+          <p:cNvPr id="20" name="Rectangle 19"/>
+          <p:cNvSpPr/>
+          <p:nvPr/>
+        </p:nvSpPr>
+        <p:spPr>
+          <a:xfrm>
+            <a:off x="502920" y="4654296"/>
             <a:ext cx="11155680" cy="987552"/>
           </a:xfrm>
           <a:prstGeom prst="rect">
@@ -14802,14 +14554,58 @@
       </p:sp>
       <p:sp>
         <p:nvSpPr>
-          <p:cNvPr id="18" name="TextBox 17"/>
-          <p:cNvSpPr txBox="1"/>
-          <p:nvPr/>
-        </p:nvSpPr>
-        <p:spPr>
-          <a:xfrm>
-            <a:off x="731520" y="4672584"/>
-            <a:ext cx="10607040" cy="365760"/>
+          <p:cNvPr id="21" name="Rectangle 20"/>
+          <p:cNvSpPr/>
+          <p:nvPr/>
+        </p:nvSpPr>
+        <p:spPr>
+          <a:xfrm>
+            <a:off x="502920" y="4654296"/>
+            <a:ext cx="109728" cy="987552"/>
+          </a:xfrm>
+          <a:prstGeom prst="rect">
+            <a:avLst/>
+          </a:prstGeom>
+          <a:solidFill>
+            <a:srgbClr val="C0392B"/>
+          </a:solidFill>
+          <a:ln>
+            <a:noFill/>
+          </a:ln>
+          <a:effectLst/>
+        </p:spPr>
+        <p:style>
+          <a:lnRef idx="1">
+            <a:schemeClr val="accent1"/>
+          </a:lnRef>
+          <a:fillRef idx="3">
+            <a:schemeClr val="accent1"/>
+          </a:fillRef>
+          <a:effectRef idx="2">
+            <a:schemeClr val="accent1"/>
+          </a:effectRef>
+          <a:fontRef idx="minor">
+            <a:schemeClr val="lt1"/>
+          </a:fontRef>
+        </p:style>
+        <p:txBody>
+          <a:bodyPr rtlCol="0" anchor="ctr"/>
+          <a:lstStyle/>
+          <a:p>
+            <a:pPr algn="ctr"/>
+          </a:p>
+        </p:txBody>
+      </p:sp>
+      <p:sp>
+        <p:nvSpPr>
+          <p:cNvPr id="22" name="TextBox 21"/>
+          <p:cNvSpPr txBox="1"/>
+          <p:nvPr/>
+        </p:nvSpPr>
+        <p:spPr>
+          <a:xfrm>
+            <a:off x="822960" y="4727448"/>
+            <a:ext cx="10607040" cy="347472"/>
           </a:xfrm>
           <a:prstGeom prst="rect">
             <a:avLst/>
@@ -14828,27 +14624,27 @@
               </a:lnSpc>
             </a:pPr>
             <a:r>
-              <a:rPr sz="1250" b="1" i="0">
-                <a:solidFill>
-                  <a:srgbClr val="122A44"/>
-                </a:solidFill>
-                <a:latin typeface="맑은 고딕"/>
-              </a:rPr>
-              <a:t>Q. 경쟁도 만료 경고가 떠요</a:t>
-            </a:r>
-          </a:p>
-        </p:txBody>
-      </p:sp>
-      <p:sp>
-        <p:nvSpPr>
-          <p:cNvPr id="19" name="TextBox 18"/>
-          <p:cNvSpPr txBox="1"/>
-          <p:nvPr/>
-        </p:nvSpPr>
-        <p:spPr>
-          <a:xfrm>
-            <a:off x="731520" y="5056632"/>
-            <a:ext cx="10607040" cy="457200"/>
+              <a:rPr sz="1300" b="1" i="0">
+                <a:solidFill>
+                  <a:srgbClr val="23262B"/>
+                </a:solidFill>
+                <a:latin typeface="맑은 고딕"/>
+              </a:rPr>
+              <a:t>[발행]은 사람이 직접</a:t>
+            </a:r>
+          </a:p>
+        </p:txBody>
+      </p:sp>
+      <p:sp>
+        <p:nvSpPr>
+          <p:cNvPr id="23" name="TextBox 22"/>
+          <p:cNvSpPr txBox="1"/>
+          <p:nvPr/>
+        </p:nvSpPr>
+        <p:spPr>
+          <a:xfrm>
+            <a:off x="822960" y="5093208"/>
+            <a:ext cx="10607040" cy="502920"/>
           </a:xfrm>
           <a:prstGeom prst="rect">
             <a:avLst/>
@@ -14863,30 +14659,30 @@
           <a:p>
             <a:pPr algn="l">
               <a:lnSpc>
-                <a:spcPct val="120000"/>
-              </a:lnSpc>
-            </a:pPr>
-            <a:r>
-              <a:rPr sz="1100" b="0" i="0">
-                <a:solidFill>
-                  <a:srgbClr val="23262B"/>
-                </a:solidFill>
-                <a:latin typeface="맑은 고딕"/>
-              </a:rPr>
-              <a:t>A. [🔄 숫자만 새로 재기]를 누르세요. 캐시가 살아있는 값은 재과금되지 않습니다.</a:t>
-            </a:r>
-          </a:p>
-        </p:txBody>
-      </p:sp>
-      <p:sp>
-        <p:nvSpPr>
-          <p:cNvPr id="20" name="Rectangle 19"/>
+                <a:spcPct val="125000"/>
+              </a:lnSpc>
+            </a:pPr>
+            <a:r>
+              <a:rPr sz="1150" b="0" i="0">
+                <a:solidFill>
+                  <a:srgbClr val="7A828E"/>
+                </a:solidFill>
+                <a:latin typeface="맑은 고딕"/>
+              </a:rPr>
+              <a:t>자동으로 발행까지 가지 않는 것은 고장이 아니라 네이버 차단 회피 설계입니다.</a:t>
+            </a:r>
+          </a:p>
+        </p:txBody>
+      </p:sp>
+      <p:sp>
+        <p:nvSpPr>
+          <p:cNvPr id="24" name="Rectangle 23"/>
           <p:cNvSpPr/>
           <p:nvPr/>
         </p:nvSpPr>
         <p:spPr>
           <a:xfrm>
-            <a:off x="502920" y="5660136"/>
+            <a:off x="502920" y="5733288"/>
             <a:ext cx="11155680" cy="987552"/>
           </a:xfrm>
           <a:prstGeom prst="rect">
@@ -14924,14 +14720,58 @@
       </p:sp>
       <p:sp>
         <p:nvSpPr>
-          <p:cNvPr id="21" name="TextBox 20"/>
-          <p:cNvSpPr txBox="1"/>
-          <p:nvPr/>
-        </p:nvSpPr>
-        <p:spPr>
-          <a:xfrm>
-            <a:off x="731520" y="5733288"/>
-            <a:ext cx="10607040" cy="365760"/>
+          <p:cNvPr id="25" name="Rectangle 24"/>
+          <p:cNvSpPr/>
+          <p:nvPr/>
+        </p:nvSpPr>
+        <p:spPr>
+          <a:xfrm>
+            <a:off x="502920" y="5733288"/>
+            <a:ext cx="109728" cy="987552"/>
+          </a:xfrm>
+          <a:prstGeom prst="rect">
+            <a:avLst/>
+          </a:prstGeom>
+          <a:solidFill>
+            <a:srgbClr val="C0392B"/>
+          </a:solidFill>
+          <a:ln>
+            <a:noFill/>
+          </a:ln>
+          <a:effectLst/>
+        </p:spPr>
+        <p:style>
+          <a:lnRef idx="1">
+            <a:schemeClr val="accent1"/>
+          </a:lnRef>
+          <a:fillRef idx="3">
+            <a:schemeClr val="accent1"/>
+          </a:fillRef>
+          <a:effectRef idx="2">
+            <a:schemeClr val="accent1"/>
+          </a:effectRef>
+          <a:fontRef idx="minor">
+            <a:schemeClr val="lt1"/>
+          </a:fontRef>
+        </p:style>
+        <p:txBody>
+          <a:bodyPr rtlCol="0" anchor="ctr"/>
+          <a:lstStyle/>
+          <a:p>
+            <a:pPr algn="ctr"/>
+          </a:p>
+        </p:txBody>
+      </p:sp>
+      <p:sp>
+        <p:nvSpPr>
+          <p:cNvPr id="26" name="TextBox 25"/>
+          <p:cNvSpPr txBox="1"/>
+          <p:nvPr/>
+        </p:nvSpPr>
+        <p:spPr>
+          <a:xfrm>
+            <a:off x="822960" y="5806440"/>
+            <a:ext cx="10607040" cy="347472"/>
           </a:xfrm>
           <a:prstGeom prst="rect">
             <a:avLst/>
@@ -14950,27 +14790,27 @@
               </a:lnSpc>
             </a:pPr>
             <a:r>
-              <a:rPr sz="1250" b="1" i="0">
-                <a:solidFill>
-                  <a:srgbClr val="122A44"/>
-                </a:solidFill>
-                <a:latin typeface="맑은 고딕"/>
-              </a:rPr>
-              <a:t>Q. 브랜드 킷을 고쳤는데 앱에 안 바껴요</a:t>
-            </a:r>
-          </a:p>
-        </p:txBody>
-      </p:sp>
-      <p:sp>
-        <p:nvSpPr>
-          <p:cNvPr id="22" name="TextBox 21"/>
-          <p:cNvSpPr txBox="1"/>
-          <p:nvPr/>
-        </p:nvSpPr>
-        <p:spPr>
-          <a:xfrm>
-            <a:off x="731520" y="6117336"/>
-            <a:ext cx="10607040" cy="457200"/>
+              <a:rPr sz="1300" b="1" i="0">
+                <a:solidFill>
+                  <a:srgbClr val="23262B"/>
+                </a:solidFill>
+                <a:latin typeface="맑은 고딕"/>
+              </a:rPr>
+              <a:t>data/ 폴더를 함부로 지우지 말기</a:t>
+            </a:r>
+          </a:p>
+        </p:txBody>
+      </p:sp>
+      <p:sp>
+        <p:nvSpPr>
+          <p:cNvPr id="27" name="TextBox 26"/>
+          <p:cNvSpPr txBox="1"/>
+          <p:nvPr/>
+        </p:nvSpPr>
+        <p:spPr>
+          <a:xfrm>
+            <a:off x="822960" y="6172200"/>
+            <a:ext cx="10607040" cy="502920"/>
           </a:xfrm>
           <a:prstGeom prst="rect">
             <a:avLst/>
@@ -14985,17 +14825,17 @@
           <a:p>
             <a:pPr algn="l">
               <a:lnSpc>
-                <a:spcPct val="120000"/>
-              </a:lnSpc>
-            </a:pPr>
-            <a:r>
-              <a:rPr sz="1100" b="0" i="0">
-                <a:solidFill>
-                  <a:srgbClr val="23262B"/>
-                </a:solidFill>
-                <a:latin typeface="맑은 고딕"/>
-              </a:rPr>
-              <a:t>A. 🧵 브랜드 킷 하단 [저장]을 눌렀는지 확인하세요. 저장은 즉시 모든 생성에 반영됩니다.</a:t>
+                <a:spcPct val="125000"/>
+              </a:lnSpc>
+            </a:pPr>
+            <a:r>
+              <a:rPr sz="1150" b="0" i="0">
+                <a:solidFill>
+                  <a:srgbClr val="7A828E"/>
+                </a:solidFill>
+                <a:latin typeface="맑은 고딕"/>
+              </a:rPr>
+              <a:t>DB·사진·마스터키가 전부 안에 있습니다. 브랜드 킷을 처음부터 다시 채울 때만 삭제 후 재시작하세요.</a:t>
             </a:r>
           </a:p>
         </p:txBody>
@@ -15009,6 +14849,886 @@
 </file>
 
 <file path=ppt/slides/slide23.xml><?xml version="1.0" encoding="utf-8"?>
+<p:sld xmlns:a="http://schemas.openxmlformats.org/drawingml/2006/main" xmlns:p="http://schemas.openxmlformats.org/presentationml/2006/main" xmlns:r="http://schemas.openxmlformats.org/officeDocument/2006/relationships">
+  <p:cSld>
+    <p:bg>
+      <p:bgPr>
+        <a:solidFill>
+          <a:srgbClr val="F7F5F0"/>
+        </a:solidFill>
+        <a:effectLst/>
+      </p:bgPr>
+    </p:bg>
+    <p:spTree>
+      <p:nvGrpSpPr>
+        <p:cNvPr id="1" name=""/>
+        <p:cNvGrpSpPr/>
+        <p:nvPr/>
+      </p:nvGrpSpPr>
+      <p:grpSpPr/>
+      <p:sp>
+        <p:nvSpPr>
+          <p:cNvPr id="2" name="Rectangle 1"/>
+          <p:cNvSpPr/>
+          <p:nvPr/>
+        </p:nvSpPr>
+        <p:spPr>
+          <a:xfrm>
+            <a:off x="0" y="0"/>
+            <a:ext cx="12191695" cy="1051560"/>
+          </a:xfrm>
+          <a:prstGeom prst="rect">
+            <a:avLst/>
+          </a:prstGeom>
+          <a:solidFill>
+            <a:srgbClr val="122A44"/>
+          </a:solidFill>
+          <a:ln>
+            <a:noFill/>
+          </a:ln>
+          <a:effectLst/>
+        </p:spPr>
+        <p:style>
+          <a:lnRef idx="1">
+            <a:schemeClr val="accent1"/>
+          </a:lnRef>
+          <a:fillRef idx="3">
+            <a:schemeClr val="accent1"/>
+          </a:fillRef>
+          <a:effectRef idx="2">
+            <a:schemeClr val="accent1"/>
+          </a:effectRef>
+          <a:fontRef idx="minor">
+            <a:schemeClr val="lt1"/>
+          </a:fontRef>
+        </p:style>
+        <p:txBody>
+          <a:bodyPr rtlCol="0" anchor="ctr"/>
+          <a:lstStyle/>
+          <a:p>
+            <a:pPr algn="ctr"/>
+          </a:p>
+        </p:txBody>
+      </p:sp>
+      <p:sp>
+        <p:nvSpPr>
+          <p:cNvPr id="3" name="Rectangle 2"/>
+          <p:cNvSpPr/>
+          <p:nvPr/>
+        </p:nvSpPr>
+        <p:spPr>
+          <a:xfrm>
+            <a:off x="0" y="1051560"/>
+            <a:ext cx="12191695" cy="38100"/>
+          </a:xfrm>
+          <a:prstGeom prst="rect">
+            <a:avLst/>
+          </a:prstGeom>
+          <a:solidFill>
+            <a:srgbClr val="1B3A5C"/>
+          </a:solidFill>
+          <a:ln>
+            <a:noFill/>
+          </a:ln>
+          <a:effectLst/>
+        </p:spPr>
+        <p:style>
+          <a:lnRef idx="1">
+            <a:schemeClr val="accent1"/>
+          </a:lnRef>
+          <a:fillRef idx="3">
+            <a:schemeClr val="accent1"/>
+          </a:fillRef>
+          <a:effectRef idx="2">
+            <a:schemeClr val="accent1"/>
+          </a:effectRef>
+          <a:fontRef idx="minor">
+            <a:schemeClr val="lt1"/>
+          </a:fontRef>
+        </p:style>
+        <p:txBody>
+          <a:bodyPr rtlCol="0" anchor="ctr"/>
+          <a:lstStyle/>
+          <a:p>
+            <a:pPr algn="ctr"/>
+          </a:p>
+        </p:txBody>
+      </p:sp>
+      <p:sp>
+        <p:nvSpPr>
+          <p:cNvPr id="4" name="TextBox 3"/>
+          <p:cNvSpPr txBox="1"/>
+          <p:nvPr/>
+        </p:nvSpPr>
+        <p:spPr>
+          <a:xfrm>
+            <a:off x="502920" y="109728"/>
+            <a:ext cx="8686800" cy="292608"/>
+          </a:xfrm>
+          <a:prstGeom prst="rect">
+            <a:avLst/>
+          </a:prstGeom>
+          <a:noFill/>
+        </p:spPr>
+        <p:txBody>
+          <a:bodyPr wrap="square">
+            <a:spAutoFit/>
+          </a:bodyPr>
+          <a:lstStyle/>
+          <a:p>
+            <a:pPr algn="l">
+              <a:lnSpc>
+                <a:spcPct val="100000"/>
+              </a:lnSpc>
+            </a:pPr>
+            <a:r>
+              <a:rPr sz="1200" b="1" i="0">
+                <a:solidFill>
+                  <a:srgbClr val="1B3A5C"/>
+                </a:solidFill>
+                <a:latin typeface="맑은 고딕"/>
+              </a:rPr>
+              <a:t>④ 안전 · FAQ</a:t>
+            </a:r>
+          </a:p>
+        </p:txBody>
+      </p:sp>
+      <p:sp>
+        <p:nvSpPr>
+          <p:cNvPr id="5" name="TextBox 4"/>
+          <p:cNvSpPr txBox="1"/>
+          <p:nvPr/>
+        </p:nvSpPr>
+        <p:spPr>
+          <a:xfrm>
+            <a:off x="457200" y="347472"/>
+            <a:ext cx="10515600" cy="621792"/>
+          </a:xfrm>
+          <a:prstGeom prst="rect">
+            <a:avLst/>
+          </a:prstGeom>
+          <a:noFill/>
+        </p:spPr>
+        <p:txBody>
+          <a:bodyPr wrap="square">
+            <a:spAutoFit/>
+          </a:bodyPr>
+          <a:lstStyle/>
+          <a:p>
+            <a:pPr algn="l">
+              <a:lnSpc>
+                <a:spcPct val="100000"/>
+              </a:lnSpc>
+            </a:pPr>
+            <a:r>
+              <a:rPr sz="2400" b="1" i="0">
+                <a:solidFill>
+                  <a:srgbClr val="FFFFFF"/>
+                </a:solidFill>
+                <a:latin typeface="맑은 고딕"/>
+              </a:rPr>
+              <a:t>자주 묻는 질문</a:t>
+            </a:r>
+          </a:p>
+        </p:txBody>
+      </p:sp>
+      <p:sp>
+        <p:nvSpPr>
+          <p:cNvPr id="6" name="TextBox 5"/>
+          <p:cNvSpPr txBox="1"/>
+          <p:nvPr/>
+        </p:nvSpPr>
+        <p:spPr>
+          <a:xfrm>
+            <a:off x="457200" y="6492240"/>
+            <a:ext cx="8229600" cy="274320"/>
+          </a:xfrm>
+          <a:prstGeom prst="rect">
+            <a:avLst/>
+          </a:prstGeom>
+          <a:noFill/>
+        </p:spPr>
+        <p:txBody>
+          <a:bodyPr wrap="square">
+            <a:spAutoFit/>
+          </a:bodyPr>
+          <a:lstStyle/>
+          <a:p>
+            <a:pPr algn="l">
+              <a:lnSpc>
+                <a:spcPct val="100000"/>
+              </a:lnSpc>
+            </a:pPr>
+            <a:r>
+              <a:rPr sz="900" b="0" i="0">
+                <a:solidFill>
+                  <a:srgbClr val="7A828E"/>
+                </a:solidFill>
+                <a:latin typeface="맑은 고딕"/>
+              </a:rPr>
+              <a:t>씨제이씨협동조합 OSMU 워크벤치 · 관리자·사용자 매뉴얼</a:t>
+            </a:r>
+          </a:p>
+        </p:txBody>
+      </p:sp>
+      <p:sp>
+        <p:nvSpPr>
+          <p:cNvPr id="7" name="TextBox 6"/>
+          <p:cNvSpPr txBox="1"/>
+          <p:nvPr/>
+        </p:nvSpPr>
+        <p:spPr>
+          <a:xfrm>
+            <a:off x="11094415" y="6492240"/>
+            <a:ext cx="731520" cy="274320"/>
+          </a:xfrm>
+          <a:prstGeom prst="rect">
+            <a:avLst/>
+          </a:prstGeom>
+          <a:noFill/>
+        </p:spPr>
+        <p:txBody>
+          <a:bodyPr wrap="square">
+            <a:spAutoFit/>
+          </a:bodyPr>
+          <a:lstStyle/>
+          <a:p>
+            <a:pPr algn="r">
+              <a:lnSpc>
+                <a:spcPct val="100000"/>
+              </a:lnSpc>
+            </a:pPr>
+            <a:r>
+              <a:rPr sz="900" b="0" i="0">
+                <a:solidFill>
+                  <a:srgbClr val="7A828E"/>
+                </a:solidFill>
+                <a:latin typeface="맑은 고딕"/>
+              </a:rPr>
+              <a:t>22</a:t>
+            </a:r>
+          </a:p>
+        </p:txBody>
+      </p:sp>
+      <p:sp>
+        <p:nvSpPr>
+          <p:cNvPr id="8" name="Rectangle 7"/>
+          <p:cNvSpPr/>
+          <p:nvPr/>
+        </p:nvSpPr>
+        <p:spPr>
+          <a:xfrm>
+            <a:off x="502920" y="1417320"/>
+            <a:ext cx="11155680" cy="987552"/>
+          </a:xfrm>
+          <a:prstGeom prst="rect">
+            <a:avLst/>
+          </a:prstGeom>
+          <a:solidFill>
+            <a:srgbClr val="FFFFFF"/>
+          </a:solidFill>
+          <a:ln>
+            <a:noFill/>
+          </a:ln>
+          <a:effectLst/>
+        </p:spPr>
+        <p:style>
+          <a:lnRef idx="1">
+            <a:schemeClr val="accent1"/>
+          </a:lnRef>
+          <a:fillRef idx="3">
+            <a:schemeClr val="accent1"/>
+          </a:fillRef>
+          <a:effectRef idx="2">
+            <a:schemeClr val="accent1"/>
+          </a:effectRef>
+          <a:fontRef idx="minor">
+            <a:schemeClr val="lt1"/>
+          </a:fontRef>
+        </p:style>
+        <p:txBody>
+          <a:bodyPr rtlCol="0" anchor="ctr"/>
+          <a:lstStyle/>
+          <a:p>
+            <a:pPr algn="ctr"/>
+          </a:p>
+        </p:txBody>
+      </p:sp>
+      <p:sp>
+        <p:nvSpPr>
+          <p:cNvPr id="9" name="TextBox 8"/>
+          <p:cNvSpPr txBox="1"/>
+          <p:nvPr/>
+        </p:nvSpPr>
+        <p:spPr>
+          <a:xfrm>
+            <a:off x="731520" y="1490472"/>
+            <a:ext cx="10607040" cy="365760"/>
+          </a:xfrm>
+          <a:prstGeom prst="rect">
+            <a:avLst/>
+          </a:prstGeom>
+          <a:noFill/>
+        </p:spPr>
+        <p:txBody>
+          <a:bodyPr wrap="square">
+            <a:spAutoFit/>
+          </a:bodyPr>
+          <a:lstStyle/>
+          <a:p>
+            <a:pPr algn="l">
+              <a:lnSpc>
+                <a:spcPct val="100000"/>
+              </a:lnSpc>
+            </a:pPr>
+            <a:r>
+              <a:rPr sz="1250" b="1" i="0">
+                <a:solidFill>
+                  <a:srgbClr val="122A44"/>
+                </a:solidFill>
+                <a:latin typeface="맑은 고딕"/>
+              </a:rPr>
+              <a:t>Q. [🪄 브랜드에서 추천]이 실패해요</a:t>
+            </a:r>
+          </a:p>
+        </p:txBody>
+      </p:sp>
+      <p:sp>
+        <p:nvSpPr>
+          <p:cNvPr id="10" name="TextBox 9"/>
+          <p:cNvSpPr txBox="1"/>
+          <p:nvPr/>
+        </p:nvSpPr>
+        <p:spPr>
+          <a:xfrm>
+            <a:off x="731520" y="1874520"/>
+            <a:ext cx="10607040" cy="457200"/>
+          </a:xfrm>
+          <a:prstGeom prst="rect">
+            <a:avLst/>
+          </a:prstGeom>
+          <a:noFill/>
+        </p:spPr>
+        <p:txBody>
+          <a:bodyPr wrap="square">
+            <a:spAutoFit/>
+          </a:bodyPr>
+          <a:lstStyle/>
+          <a:p>
+            <a:pPr algn="l">
+              <a:lnSpc>
+                <a:spcPct val="120000"/>
+              </a:lnSpc>
+            </a:pPr>
+            <a:r>
+              <a:rPr sz="1100" b="0" i="0">
+                <a:solidFill>
+                  <a:srgbClr val="23262B"/>
+                </a:solidFill>
+                <a:latin typeface="맑은 고딕"/>
+              </a:rPr>
+              <a:t>A. '추천 실패: ...' 뒤의 메시지가 원인입니다. 대부분 LLM 미등록 → LLM 탭에서 키 등록 후 기본 모델 확인.</a:t>
+            </a:r>
+          </a:p>
+        </p:txBody>
+      </p:sp>
+      <p:sp>
+        <p:nvSpPr>
+          <p:cNvPr id="11" name="Rectangle 10"/>
+          <p:cNvSpPr/>
+          <p:nvPr/>
+        </p:nvSpPr>
+        <p:spPr>
+          <a:xfrm>
+            <a:off x="502920" y="2478024"/>
+            <a:ext cx="11155680" cy="987552"/>
+          </a:xfrm>
+          <a:prstGeom prst="rect">
+            <a:avLst/>
+          </a:prstGeom>
+          <a:solidFill>
+            <a:srgbClr val="FFFFFF"/>
+          </a:solidFill>
+          <a:ln>
+            <a:noFill/>
+          </a:ln>
+          <a:effectLst/>
+        </p:spPr>
+        <p:style>
+          <a:lnRef idx="1">
+            <a:schemeClr val="accent1"/>
+          </a:lnRef>
+          <a:fillRef idx="3">
+            <a:schemeClr val="accent1"/>
+          </a:fillRef>
+          <a:effectRef idx="2">
+            <a:schemeClr val="accent1"/>
+          </a:effectRef>
+          <a:fontRef idx="minor">
+            <a:schemeClr val="lt1"/>
+          </a:fontRef>
+        </p:style>
+        <p:txBody>
+          <a:bodyPr rtlCol="0" anchor="ctr"/>
+          <a:lstStyle/>
+          <a:p>
+            <a:pPr algn="ctr"/>
+          </a:p>
+        </p:txBody>
+      </p:sp>
+      <p:sp>
+        <p:nvSpPr>
+          <p:cNvPr id="12" name="TextBox 11"/>
+          <p:cNvSpPr txBox="1"/>
+          <p:nvPr/>
+        </p:nvSpPr>
+        <p:spPr>
+          <a:xfrm>
+            <a:off x="731520" y="2551176"/>
+            <a:ext cx="10607040" cy="365760"/>
+          </a:xfrm>
+          <a:prstGeom prst="rect">
+            <a:avLst/>
+          </a:prstGeom>
+          <a:noFill/>
+        </p:spPr>
+        <p:txBody>
+          <a:bodyPr wrap="square">
+            <a:spAutoFit/>
+          </a:bodyPr>
+          <a:lstStyle/>
+          <a:p>
+            <a:pPr algn="l">
+              <a:lnSpc>
+                <a:spcPct val="100000"/>
+              </a:lnSpc>
+            </a:pPr>
+            <a:r>
+              <a:rPr sz="1250" b="1" i="0">
+                <a:solidFill>
+                  <a:srgbClr val="122A44"/>
+                </a:solidFill>
+                <a:latin typeface="맑은 고딕"/>
+              </a:rPr>
+              <a:t>Q. 키를 저장했는데 칸이 비어 있어요</a:t>
+            </a:r>
+          </a:p>
+        </p:txBody>
+      </p:sp>
+      <p:sp>
+        <p:nvSpPr>
+          <p:cNvPr id="13" name="TextBox 12"/>
+          <p:cNvSpPr txBox="1"/>
+          <p:nvPr/>
+        </p:nvSpPr>
+        <p:spPr>
+          <a:xfrm>
+            <a:off x="731520" y="2935224"/>
+            <a:ext cx="10607040" cy="457200"/>
+          </a:xfrm>
+          <a:prstGeom prst="rect">
+            <a:avLst/>
+          </a:prstGeom>
+          <a:noFill/>
+        </p:spPr>
+        <p:txBody>
+          <a:bodyPr wrap="square">
+            <a:spAutoFit/>
+          </a:bodyPr>
+          <a:lstStyle/>
+          <a:p>
+            <a:pPr algn="l">
+              <a:lnSpc>
+                <a:spcPct val="120000"/>
+              </a:lnSpc>
+            </a:pPr>
+            <a:r>
+              <a:rPr sz="1100" b="0" i="0">
+                <a:solidFill>
+                  <a:srgbClr val="23262B"/>
+                </a:solidFill>
+                <a:latin typeface="맑은 고딕"/>
+              </a:rPr>
+              <a:t>A. 정상입니다. 배지(✅ 등록됨 ****...)로 확인하세요. 바꾸려면 새 키 입력 후 다시 [연결 테스트 · 저장].</a:t>
+            </a:r>
+          </a:p>
+        </p:txBody>
+      </p:sp>
+      <p:sp>
+        <p:nvSpPr>
+          <p:cNvPr id="14" name="Rectangle 13"/>
+          <p:cNvSpPr/>
+          <p:nvPr/>
+        </p:nvSpPr>
+        <p:spPr>
+          <a:xfrm>
+            <a:off x="502920" y="3538728"/>
+            <a:ext cx="11155680" cy="987552"/>
+          </a:xfrm>
+          <a:prstGeom prst="rect">
+            <a:avLst/>
+          </a:prstGeom>
+          <a:solidFill>
+            <a:srgbClr val="FFFFFF"/>
+          </a:solidFill>
+          <a:ln>
+            <a:noFill/>
+          </a:ln>
+          <a:effectLst/>
+        </p:spPr>
+        <p:style>
+          <a:lnRef idx="1">
+            <a:schemeClr val="accent1"/>
+          </a:lnRef>
+          <a:fillRef idx="3">
+            <a:schemeClr val="accent1"/>
+          </a:fillRef>
+          <a:effectRef idx="2">
+            <a:schemeClr val="accent1"/>
+          </a:effectRef>
+          <a:fontRef idx="minor">
+            <a:schemeClr val="lt1"/>
+          </a:fontRef>
+        </p:style>
+        <p:txBody>
+          <a:bodyPr rtlCol="0" anchor="ctr"/>
+          <a:lstStyle/>
+          <a:p>
+            <a:pPr algn="ctr"/>
+          </a:p>
+        </p:txBody>
+      </p:sp>
+      <p:sp>
+        <p:nvSpPr>
+          <p:cNvPr id="15" name="TextBox 14"/>
+          <p:cNvSpPr txBox="1"/>
+          <p:nvPr/>
+        </p:nvSpPr>
+        <p:spPr>
+          <a:xfrm>
+            <a:off x="731520" y="3611880"/>
+            <a:ext cx="10607040" cy="365760"/>
+          </a:xfrm>
+          <a:prstGeom prst="rect">
+            <a:avLst/>
+          </a:prstGeom>
+          <a:noFill/>
+        </p:spPr>
+        <p:txBody>
+          <a:bodyPr wrap="square">
+            <a:spAutoFit/>
+          </a:bodyPr>
+          <a:lstStyle/>
+          <a:p>
+            <a:pPr algn="l">
+              <a:lnSpc>
+                <a:spcPct val="100000"/>
+              </a:lnSpc>
+            </a:pPr>
+            <a:r>
+              <a:rPr sz="1250" b="1" i="0">
+                <a:solidFill>
+                  <a:srgbClr val="122A44"/>
+                </a:solidFill>
+                <a:latin typeface="맑은 고딕"/>
+              </a:rPr>
+              <a:t>Q. 4단계 적용 후에 [숫자만 새로 재기]를 또 눌러야 하나요?</a:t>
+            </a:r>
+          </a:p>
+        </p:txBody>
+      </p:sp>
+      <p:sp>
+        <p:nvSpPr>
+          <p:cNvPr id="16" name="TextBox 15"/>
+          <p:cNvSpPr txBox="1"/>
+          <p:nvPr/>
+        </p:nvSpPr>
+        <p:spPr>
+          <a:xfrm>
+            <a:off x="731520" y="3995928"/>
+            <a:ext cx="10607040" cy="457200"/>
+          </a:xfrm>
+          <a:prstGeom prst="rect">
+            <a:avLst/>
+          </a:prstGeom>
+          <a:noFill/>
+        </p:spPr>
+        <p:txBody>
+          <a:bodyPr wrap="square">
+            <a:spAutoFit/>
+          </a:bodyPr>
+          <a:lstStyle/>
+          <a:p>
+            <a:pPr algn="l">
+              <a:lnSpc>
+                <a:spcPct val="120000"/>
+              </a:lnSpc>
+            </a:pPr>
+            <a:r>
+              <a:rPr sz="1100" b="0" i="0">
+                <a:solidFill>
+                  <a:srgbClr val="23262B"/>
+                </a:solidFill>
+                <a:latin typeface="맑은 고딕"/>
+              </a:rPr>
+              <a:t>A. 아니요. 4단계 [적용]이 곧 SEO 키워드 교체이고, 새 키워드 측정까지 같이 끝냅니다. 숫자 재기는 30일 뒤 만료 경고가 뜰 때만.</a:t>
+            </a:r>
+          </a:p>
+        </p:txBody>
+      </p:sp>
+      <p:sp>
+        <p:nvSpPr>
+          <p:cNvPr id="17" name="Rectangle 16"/>
+          <p:cNvSpPr/>
+          <p:nvPr/>
+        </p:nvSpPr>
+        <p:spPr>
+          <a:xfrm>
+            <a:off x="502920" y="4599432"/>
+            <a:ext cx="11155680" cy="987552"/>
+          </a:xfrm>
+          <a:prstGeom prst="rect">
+            <a:avLst/>
+          </a:prstGeom>
+          <a:solidFill>
+            <a:srgbClr val="FFFFFF"/>
+          </a:solidFill>
+          <a:ln>
+            <a:noFill/>
+          </a:ln>
+          <a:effectLst/>
+        </p:spPr>
+        <p:style>
+          <a:lnRef idx="1">
+            <a:schemeClr val="accent1"/>
+          </a:lnRef>
+          <a:fillRef idx="3">
+            <a:schemeClr val="accent1"/>
+          </a:fillRef>
+          <a:effectRef idx="2">
+            <a:schemeClr val="accent1"/>
+          </a:effectRef>
+          <a:fontRef idx="minor">
+            <a:schemeClr val="lt1"/>
+          </a:fontRef>
+        </p:style>
+        <p:txBody>
+          <a:bodyPr rtlCol="0" anchor="ctr"/>
+          <a:lstStyle/>
+          <a:p>
+            <a:pPr algn="ctr"/>
+          </a:p>
+        </p:txBody>
+      </p:sp>
+      <p:sp>
+        <p:nvSpPr>
+          <p:cNvPr id="18" name="TextBox 17"/>
+          <p:cNvSpPr txBox="1"/>
+          <p:nvPr/>
+        </p:nvSpPr>
+        <p:spPr>
+          <a:xfrm>
+            <a:off x="731520" y="4672584"/>
+            <a:ext cx="10607040" cy="365760"/>
+          </a:xfrm>
+          <a:prstGeom prst="rect">
+            <a:avLst/>
+          </a:prstGeom>
+          <a:noFill/>
+        </p:spPr>
+        <p:txBody>
+          <a:bodyPr wrap="square">
+            <a:spAutoFit/>
+          </a:bodyPr>
+          <a:lstStyle/>
+          <a:p>
+            <a:pPr algn="l">
+              <a:lnSpc>
+                <a:spcPct val="100000"/>
+              </a:lnSpc>
+            </a:pPr>
+            <a:r>
+              <a:rPr sz="1250" b="1" i="0">
+                <a:solidFill>
+                  <a:srgbClr val="122A44"/>
+                </a:solidFill>
+                <a:latin typeface="맑은 고딕"/>
+              </a:rPr>
+              <a:t>Q. 경쟁도 만료 경고가 떠요</a:t>
+            </a:r>
+          </a:p>
+        </p:txBody>
+      </p:sp>
+      <p:sp>
+        <p:nvSpPr>
+          <p:cNvPr id="19" name="TextBox 18"/>
+          <p:cNvSpPr txBox="1"/>
+          <p:nvPr/>
+        </p:nvSpPr>
+        <p:spPr>
+          <a:xfrm>
+            <a:off x="731520" y="5056632"/>
+            <a:ext cx="10607040" cy="457200"/>
+          </a:xfrm>
+          <a:prstGeom prst="rect">
+            <a:avLst/>
+          </a:prstGeom>
+          <a:noFill/>
+        </p:spPr>
+        <p:txBody>
+          <a:bodyPr wrap="square">
+            <a:spAutoFit/>
+          </a:bodyPr>
+          <a:lstStyle/>
+          <a:p>
+            <a:pPr algn="l">
+              <a:lnSpc>
+                <a:spcPct val="120000"/>
+              </a:lnSpc>
+            </a:pPr>
+            <a:r>
+              <a:rPr sz="1100" b="0" i="0">
+                <a:solidFill>
+                  <a:srgbClr val="23262B"/>
+                </a:solidFill>
+                <a:latin typeface="맑은 고딕"/>
+              </a:rPr>
+              <a:t>A. [🔄 숫자만 새로 재기]를 누르세요. 캐시가 살아있는 값은 재과금되지 않습니다.</a:t>
+            </a:r>
+          </a:p>
+        </p:txBody>
+      </p:sp>
+      <p:sp>
+        <p:nvSpPr>
+          <p:cNvPr id="20" name="Rectangle 19"/>
+          <p:cNvSpPr/>
+          <p:nvPr/>
+        </p:nvSpPr>
+        <p:spPr>
+          <a:xfrm>
+            <a:off x="502920" y="5660136"/>
+            <a:ext cx="11155680" cy="987552"/>
+          </a:xfrm>
+          <a:prstGeom prst="rect">
+            <a:avLst/>
+          </a:prstGeom>
+          <a:solidFill>
+            <a:srgbClr val="FFFFFF"/>
+          </a:solidFill>
+          <a:ln>
+            <a:noFill/>
+          </a:ln>
+          <a:effectLst/>
+        </p:spPr>
+        <p:style>
+          <a:lnRef idx="1">
+            <a:schemeClr val="accent1"/>
+          </a:lnRef>
+          <a:fillRef idx="3">
+            <a:schemeClr val="accent1"/>
+          </a:fillRef>
+          <a:effectRef idx="2">
+            <a:schemeClr val="accent1"/>
+          </a:effectRef>
+          <a:fontRef idx="minor">
+            <a:schemeClr val="lt1"/>
+          </a:fontRef>
+        </p:style>
+        <p:txBody>
+          <a:bodyPr rtlCol="0" anchor="ctr"/>
+          <a:lstStyle/>
+          <a:p>
+            <a:pPr algn="ctr"/>
+          </a:p>
+        </p:txBody>
+      </p:sp>
+      <p:sp>
+        <p:nvSpPr>
+          <p:cNvPr id="21" name="TextBox 20"/>
+          <p:cNvSpPr txBox="1"/>
+          <p:nvPr/>
+        </p:nvSpPr>
+        <p:spPr>
+          <a:xfrm>
+            <a:off x="731520" y="5733288"/>
+            <a:ext cx="10607040" cy="365760"/>
+          </a:xfrm>
+          <a:prstGeom prst="rect">
+            <a:avLst/>
+          </a:prstGeom>
+          <a:noFill/>
+        </p:spPr>
+        <p:txBody>
+          <a:bodyPr wrap="square">
+            <a:spAutoFit/>
+          </a:bodyPr>
+          <a:lstStyle/>
+          <a:p>
+            <a:pPr algn="l">
+              <a:lnSpc>
+                <a:spcPct val="100000"/>
+              </a:lnSpc>
+            </a:pPr>
+            <a:r>
+              <a:rPr sz="1250" b="1" i="0">
+                <a:solidFill>
+                  <a:srgbClr val="122A44"/>
+                </a:solidFill>
+                <a:latin typeface="맑은 고딕"/>
+              </a:rPr>
+              <a:t>Q. 브랜드 킷을 고쳤는데 앱에 안 바껴요</a:t>
+            </a:r>
+          </a:p>
+        </p:txBody>
+      </p:sp>
+      <p:sp>
+        <p:nvSpPr>
+          <p:cNvPr id="22" name="TextBox 21"/>
+          <p:cNvSpPr txBox="1"/>
+          <p:nvPr/>
+        </p:nvSpPr>
+        <p:spPr>
+          <a:xfrm>
+            <a:off x="731520" y="6117336"/>
+            <a:ext cx="10607040" cy="457200"/>
+          </a:xfrm>
+          <a:prstGeom prst="rect">
+            <a:avLst/>
+          </a:prstGeom>
+          <a:noFill/>
+        </p:spPr>
+        <p:txBody>
+          <a:bodyPr wrap="square">
+            <a:spAutoFit/>
+          </a:bodyPr>
+          <a:lstStyle/>
+          <a:p>
+            <a:pPr algn="l">
+              <a:lnSpc>
+                <a:spcPct val="120000"/>
+              </a:lnSpc>
+            </a:pPr>
+            <a:r>
+              <a:rPr sz="1100" b="0" i="0">
+                <a:solidFill>
+                  <a:srgbClr val="23262B"/>
+                </a:solidFill>
+                <a:latin typeface="맑은 고딕"/>
+              </a:rPr>
+              <a:t>A. 🧵 브랜드 킷 하단 [저장]을 눌렀는지 확인하세요. 저장은 즉시 모든 생성에 반영됩니다.</a:t>
+            </a:r>
+          </a:p>
+        </p:txBody>
+      </p:sp>
+    </p:spTree>
+  </p:cSld>
+  <p:clrMapOvr>
+    <a:masterClrMapping/>
+  </p:clrMapOvr>
+</p:sld>
+</file>
+
+<file path=ppt/slides/slide24.xml><?xml version="1.0" encoding="utf-8"?>
 <p:sld xmlns:a="http://schemas.openxmlformats.org/drawingml/2006/main" xmlns:p="http://schemas.openxmlformats.org/presentationml/2006/main" xmlns:r="http://schemas.openxmlformats.org/officeDocument/2006/relationships">
   <p:cSld>
     <p:bg>
@@ -21226,7 +21946,7 @@
                 </a:solidFill>
                 <a:latin typeface="맑은 고딕"/>
               </a:rPr>
-              <a:t>▪ 뉴스 큐레이션 — API 없이 직접 조회라 완전 무료</a:t>
+              <a:t>▪ 뉴스 큐레이션 — 평소엔 직접 조회라 무료, 막히면 API HUB로 자동 전환(유료)</a:t>
             </a:r>
           </a:p>
           <a:p>

--- a/docs/CJC_OSMU_사용자_매뉴얼.pptx
+++ b/docs/CJC_OSMU_사용자_매뉴얼.pptx
@@ -15924,25 +15924,6 @@
                 </a:solidFill>
                 <a:latin typeface="맑은 고딕"/>
               </a:rPr>
-              <a:t>▪ CLAUDE.md — 다른 회사용으로 바꿀 때의 절차</a:t>
-            </a:r>
-          </a:p>
-          <a:p>
-            <a:pPr>
-              <a:lnSpc>
-                <a:spcPct val="115000"/>
-              </a:lnSpc>
-              <a:spcAft>
-                <a:spcPts val="1400"/>
-              </a:spcAft>
-            </a:pPr>
-            <a:r>
-              <a:rPr sz="1500" b="0">
-                <a:solidFill>
-                  <a:srgbClr val="F5EDD7"/>
-                </a:solidFill>
-                <a:latin typeface="맑은 고딕"/>
-              </a:rPr>
               <a:t>▪ HANDOFF.md — 구축 보고 (앱 📋 구축 보고서 페이지에서도 열람)</a:t>
             </a:r>
           </a:p>

--- a/docs/CJC_OSMU_사용자_매뉴얼.pptx
+++ b/docs/CJC_OSMU_사용자_매뉴얼.pptx
@@ -5427,7 +5427,7 @@
                 </a:solidFill>
                 <a:latin typeface="맑은 고딕"/>
               </a:rPr>
-              <a:t>이 순간 브랜드 킷 SEO 키워드가 바뀝니다 + 새 키워드 측정까지 완료 — 따로 할 일 없음</a:t>
+              <a:t>이 순간 고른 킷의 SEO 키워드가 바뀝니다 + 새 키워드 측정까지 완료 — 따로 할 일 없음</a:t>
             </a:r>
           </a:p>
         </p:txBody>
@@ -6930,7 +6930,7 @@
                 </a:solidFill>
                 <a:latin typeface="맑은 고딕"/>
               </a:rPr>
-              <a:t>⚠️ 여기서 [4단계 · 적용]을 누르기 전까지는 브랜드 킷의 SEO 키워드가 전혀 바뀌지 않습니다.</a:t>
+              <a:t>⚠️ 여기서 [4단계 · 적용]을 누르기 전까지는 고른 킷의 SEO 키워드가 전혀 바뀌지 않습니다. 결과는 그 킷에만 반영됩니다.</a:t>
             </a:r>
           </a:p>
         </p:txBody>
@@ -8002,7 +8002,7 @@
                 </a:solidFill>
                 <a:latin typeface="맑은 고딕"/>
               </a:rPr>
-              <a:t>➕ 새 콘텐츠</a:t>
+              <a:t>➕ 새 콘텐츠 → 🧵 킷 고르기</a:t>
             </a:r>
           </a:p>
         </p:txBody>
@@ -8041,7 +8041,7 @@
                 </a:solidFill>
                 <a:latin typeface="맑은 고딕"/>
               </a:rPr>
-              <a:t>빈 초안이 만들어집니다. 빈 초안이 이미 있으면 새로 만들지 않고 재사용합니다.</a:t>
+              <a:t>빈 초안이 만들어집니다(빈 초안이 있으면 재사용). 맨 위에서 이 글의 사업 분야 킷을 고르세요 — 다른 분야 킷을 고르면 그 분야 내용이 섞입니다.</a:t>
             </a:r>
           </a:p>
         </p:txBody>
@@ -9931,7 +9931,7 @@
                 </a:solidFill>
                 <a:latin typeface="맑은 고딕"/>
               </a:rPr>
-              <a:t>▪ 브랜드 키워드로 관련 기사를 찾아 [워크벤치로 전달]합니다.</a:t>
+              <a:t>▪ 위에서 고른 킷의 SEO 키워드로 관련 기사를 찾아 [워크벤치로 전달]합니다. 전달한 글도 그 킷으로 연결됩니다.</a:t>
             </a:r>
           </a:p>
           <a:p>
@@ -10248,7 +10248,7 @@
                 </a:solidFill>
                 <a:latin typeface="맑은 고딕"/>
               </a:rPr>
-              <a:t>현재 blog.naver.com/jwl1722 로 연결됩니다. 바꾸려면 🧵 브랜드 킷의 '네이버 블로그 아이디'를 고치세요.</a:t>
+              <a:t>현재 blog.naver.com/jwl1722 로 연결됩니다. 바꾸려면 🧵 브랜드 킷 아래쪽 '회사 공통'의 '네이버 블로그 아이디'를 고치세요. 카드마다 어느 킷으로 쓴 글인지 표시됩니다.</a:t>
             </a:r>
           </a:p>
         </p:txBody>
@@ -10440,7 +10440,7 @@
                 </a:solidFill>
                 <a:latin typeface="맑은 고딕"/>
               </a:rPr>
-              <a:t>🧵 브랜드 킷 — AI의 두뇌를 직접 관리</a:t>
+              <a:t>🧵 브랜드 킷 — 사업 분야별로 여러 개</a:t>
             </a:r>
           </a:p>
         </p:txBody>
@@ -10545,7 +10545,7 @@
                 <a:gridCol w="2743200"/>
                 <a:gridCol w="8412480"/>
               </a:tblGrid>
-              <a:tr h="571500">
+              <a:tr h="653142">
                 <a:tc>
                   <a:txBody>
                     <a:bodyPr/>
@@ -10593,7 +10593,7 @@
                   </a:tcPr>
                 </a:tc>
               </a:tr>
-              <a:tr h="571500">
+              <a:tr h="653142">
                 <a:tc>
                   <a:txBody>
                     <a:bodyPr/>
@@ -10607,7 +10607,7 @@
                           </a:solidFill>
                           <a:latin typeface="맑은 고딕"/>
                         </a:rPr>
-                        <a:t>🏢 기업·채널</a:t>
+                        <a:t>🧵 킷 목록</a:t>
                       </a:r>
                     </a:p>
                   </a:txBody>
@@ -10630,7 +10630,7 @@
                           </a:solidFill>
                           <a:latin typeface="맑은 고딕"/>
                         </a:rPr>
-                        <a:t>조합명·키노피스·업종·홈페이지·블로그 ID — 글의 톤과 게시 대상에 반영</a:t>
+                        <a:t>[➕ 새 킷 만들기](맨 위 '기본' 킷 복사) · 📄 복제 · 이름 변경 · 🗑️ 삭제(아래 '삭제한 킷'에서 되살리기). 개수 제한 없음</a:t>
                       </a:r>
                     </a:p>
                   </a:txBody>
@@ -10641,7 +10641,7 @@
                   </a:tcPr>
                 </a:tc>
               </a:tr>
-              <a:tr h="571500">
+              <a:tr h="653142">
                 <a:tc>
                   <a:txBody>
                     <a:bodyPr/>
@@ -10655,7 +10655,7 @@
                           </a:solidFill>
                           <a:latin typeface="맑은 고딕"/>
                         </a:rPr>
-                        <a:t>🛡️ 가드레일 토글</a:t>
+                        <a:t>✏️ 킷 편집 — 업종·페르소나·톤</a:t>
                       </a:r>
                     </a:p>
                   </a:txBody>
@@ -10678,7 +10678,7 @@
                           </a:solidFill>
                           <a:latin typeface="맑은 고딕"/>
                         </a:rPr>
-                        <a:t>끄면 검수 없이 발행. 끌 이유는 거의 없음</a:t>
+                        <a:t>이 킷의 사업 분야와 말투. 킷마다 따로 저장 ([킷 저장])</a:t>
                       </a:r>
                     </a:p>
                   </a:txBody>
@@ -10689,7 +10689,7 @@
                   </a:tcPr>
                 </a:tc>
               </a:tr>
-              <a:tr h="571500">
+              <a:tr h="653142">
                 <a:tc>
                   <a:txBody>
                     <a:bodyPr/>
@@ -10703,7 +10703,7 @@
                           </a:solidFill>
                           <a:latin typeface="맑은 고딕"/>
                         </a:rPr>
-                        <a:t>🏭 핵심 팩트</a:t>
+                        <a:t>✏️ 킷 편집 — 핵심 팩트</a:t>
                       </a:r>
                     </a:p>
                   </a:txBody>
@@ -10737,7 +10737,7 @@
                   </a:tcPr>
                 </a:tc>
               </a:tr>
-              <a:tr h="571500">
+              <a:tr h="653142">
                 <a:tc>
                   <a:txBody>
                     <a:bodyPr/>
@@ -10751,7 +10751,7 @@
                           </a:solidFill>
                           <a:latin typeface="맑은 고딕"/>
                         </a:rPr>
-                        <a:t>📖 용어집</a:t>
+                        <a:t>✏️ 킷 편집 — 용어집·모드·샘플</a:t>
                       </a:r>
                     </a:p>
                   </a:txBody>
@@ -10774,7 +10774,7 @@
                           </a:solidFill>
                           <a:latin typeface="맑은 고딕"/>
                         </a:rPr>
-                        <a:t>키노피스·ATUM 등 표기 통일 + 교정 보호</a:t>
+                        <a:t>표기 통일 + 교정 보호 / 기본 콘텐츠 모드 / 우수 포스팅 샘플</a:t>
                       </a:r>
                     </a:p>
                   </a:txBody>
@@ -10785,7 +10785,7 @@
                   </a:tcPr>
                 </a:tc>
               </a:tr>
-              <a:tr h="571500">
+              <a:tr h="653142">
                 <a:tc>
                   <a:txBody>
                     <a:bodyPr/>
@@ -10799,7 +10799,7 @@
                           </a:solidFill>
                           <a:latin typeface="맑은 고딕"/>
                         </a:rPr>
-                        <a:t>🎚️ 기본 콘텐츠 모드</a:t>
+                        <a:t>✏️ 킷 편집 — SEO 키워드</a:t>
                       </a:r>
                     </a:p>
                   </a:txBody>
@@ -10822,7 +10822,7 @@
                           </a:solidFill>
                           <a:latin typeface="맑은 고딕"/>
                         </a:rPr>
-                        <a:t>따로 지정 안 한 글의 기본값 (검색 최적화 ↔ 내용 우선)</a:t>
+                        <a:t>이 킷 분야의 키워드만. 제목·본문 배치 대상 + 전환 가중치 + 검색 타깃 여부</a:t>
                       </a:r>
                     </a:p>
                   </a:txBody>
@@ -10833,7 +10833,7 @@
                   </a:tcPr>
                 </a:tc>
               </a:tr>
-              <a:tr h="571500">
+              <a:tr h="653148">
                 <a:tc>
                   <a:txBody>
                     <a:bodyPr/>
@@ -10847,7 +10847,7 @@
                           </a:solidFill>
                           <a:latin typeface="맑은 고딕"/>
                         </a:rPr>
-                        <a:t>🔍 SEO 키워드</a:t>
+                        <a:t>🏢 회사 공통</a:t>
                       </a:r>
                     </a:p>
                   </a:txBody>
@@ -10870,61 +10870,13 @@
                           </a:solidFill>
                           <a:latin typeface="맑은 고딕"/>
                         </a:rPr>
-                        <a:t>제목·본문 배치 대상 + 전환 가중치 + 검색 타깃 여부</a:t>
+                        <a:t>조합명·키노피스·홈페이지·블로그 ID·인스타 + 🛡️ 가드레일 + 🚫 금기어 사전 — 모든 킷에 적용 ([회사 공통 저장])</a:t>
                       </a:r>
                     </a:p>
                   </a:txBody>
                   <a:tcPr marL="101600" marR="101600" marT="50800" marB="50800">
                     <a:solidFill>
                       <a:srgbClr val="EFEBE2"/>
-                    </a:solidFill>
-                  </a:tcPr>
-                </a:tc>
-              </a:tr>
-              <a:tr h="571500">
-                <a:tc>
-                  <a:txBody>
-                    <a:bodyPr/>
-                    <a:lstStyle/>
-                    <a:p>
-                      <a:pPr algn="l"/>
-                      <a:r>
-                        <a:rPr sz="1100">
-                          <a:solidFill>
-                            <a:srgbClr val="23262B"/>
-                          </a:solidFill>
-                          <a:latin typeface="맑은 고딕"/>
-                        </a:rPr>
-                        <a:t>🚫 금기어 사전</a:t>
-                      </a:r>
-                    </a:p>
-                  </a:txBody>
-                  <a:tcPr marL="101600" marR="101600" marT="50800" marB="50800">
-                    <a:solidFill>
-                      <a:srgbClr val="FFFFFF"/>
-                    </a:solidFill>
-                  </a:tcPr>
-                </a:tc>
-                <a:tc>
-                  <a:txBody>
-                    <a:bodyPr/>
-                    <a:lstStyle/>
-                    <a:p>
-                      <a:pPr algn="l"/>
-                      <a:r>
-                        <a:rPr sz="1100">
-                          <a:solidFill>
-                            <a:srgbClr val="23262B"/>
-                          </a:solidFill>
-                          <a:latin typeface="맑은 고딕"/>
-                        </a:rPr>
-                        <a:t>발행 전 100% 자동 치환되는 치료·완치 표현 목록</a:t>
-                      </a:r>
-                    </a:p>
-                  </a:txBody>
-                  <a:tcPr marL="101600" marR="101600" marT="50800" marB="50800">
-                    <a:solidFill>
-                      <a:srgbClr val="FFFFFF"/>
                     </a:solidFill>
                   </a:tcPr>
                 </a:tc>
@@ -15715,7 +15667,7 @@
                 </a:solidFill>
                 <a:latin typeface="맑은 고딕"/>
               </a:rPr>
-              <a:t>A. 🧵 브랜드 킷 하단 [저장]을 눌렀는지 확인하세요. 저장은 즉시 모든 생성에 반영됩니다.</a:t>
+              <a:t>A. 킷 값은 [킷 저장], 계정·금기어는 [회사 공통 저장]을 눌렀는지, 워크벤치에서 그 킷을 골랐는지 확인하세요. 저장은 다음 생성부터 반영됩니다.</a:t>
             </a:r>
           </a:p>
         </p:txBody>
@@ -17310,7 +17262,7 @@
                           </a:solidFill>
                           <a:latin typeface="맑은 고딕"/>
                         </a:rPr>
-                        <a:t>씨앗(🪄 추천) → 1~4단계. 4단계 [적용]이 곧 브랜드 킷 SEO 키워드 교체</a:t>
+                        <a:t>대상 킷 선택 → 씨앗(🪄 추천) → 1~4단계. 4단계 [적용]이 곧 그 킷의 SEO 키워드 교체</a:t>
                       </a:r>
                     </a:p>
                   </a:txBody>

--- a/docs/CJC_OSMU_사용자_매뉴얼.pptx
+++ b/docs/CJC_OSMU_사용자_매뉴얼.pptx
@@ -30,6 +30,7 @@
     <p:sldId id="278" r:id="rId29"/>
     <p:sldId id="279" r:id="rId30"/>
     <p:sldId id="280" r:id="rId31"/>
+    <p:sldId id="281" r:id="rId32"/>
   </p:sldIdLst>
   <p:sldSz cx="12191695" cy="6858000" type="screen4x3"/>
   <p:notesSz cx="6858000" cy="9144000"/>
@@ -6132,7 +6133,7 @@
                 </a:solidFill>
                 <a:latin typeface="맑은 고딕"/>
               </a:rPr>
-              <a:t>② SEO 키워드 새로 고르기 · 실제 화면 (1/3)</a:t>
+              <a:t>② SEO 키워드 새로 고르기 · 실제 화면</a:t>
             </a:r>
           </a:p>
         </p:txBody>
@@ -6171,7 +6172,7 @@
                 </a:solidFill>
                 <a:latin typeface="맑은 고딕"/>
               </a:rPr>
-              <a:t>씨앗 입력 → 1단계 · 후보 찾기</a:t>
+              <a:t>먼저 '키워드 작업 대상 킷'을 고릅니다</a:t>
             </a:r>
           </a:p>
         </p:txBody>
@@ -6263,7 +6264,7 @@
         <p:spPr>
           <a:xfrm>
             <a:off x="464820" y="1626108"/>
-            <a:ext cx="5425440" cy="2888742"/>
+            <a:ext cx="7025640" cy="3847643"/>
           </a:xfrm>
           <a:prstGeom prst="rect">
             <a:avLst/>
@@ -6300,7 +6301,7 @@
       </p:sp>
       <p:pic>
         <p:nvPicPr>
-          <p:cNvPr id="9" name="Picture 8" descr="naver_kw_01_start.png"/>
+          <p:cNvPr id="9" name="Picture 8" descr="naver_kw_00_target_kit.png"/>
           <p:cNvPicPr>
             <a:picLocks noChangeAspect="1"/>
           </p:cNvPicPr>
@@ -6315,7 +6316,7 @@
         <p:spPr>
           <a:xfrm>
             <a:off x="502920" y="1664208"/>
-            <a:ext cx="5349240" cy="2812542"/>
+            <a:ext cx="6949440" cy="3771443"/>
           </a:xfrm>
           <a:prstGeom prst="rect">
             <a:avLst/>
@@ -6331,7 +6332,7 @@
         <p:spPr>
           <a:xfrm>
             <a:off x="502920" y="1371600"/>
-            <a:ext cx="5349240" cy="292608"/>
+            <a:ext cx="6949440" cy="292608"/>
           </a:xfrm>
           <a:prstGeom prst="rect">
             <a:avLst/>
@@ -6356,153 +6357,106 @@
                 </a:solidFill>
                 <a:latin typeface="맑은 고딕"/>
               </a:rPr>
-              <a:t>위 🔑 새로 고르기(씨앗→1~4단계), 아래 🔄 수치 유지 — 처음엔 [1단계]부터</a:t>
-            </a:r>
-          </a:p>
-        </p:txBody>
-      </p:sp>
-      <p:sp>
-        <p:nvSpPr>
-          <p:cNvPr id="11" name="Rectangle 10"/>
-          <p:cNvSpPr/>
-          <p:nvPr/>
-        </p:nvSpPr>
-        <p:spPr>
-          <a:xfrm>
-            <a:off x="6225540" y="1626108"/>
-            <a:ext cx="5425440" cy="3626663"/>
-          </a:xfrm>
-          <a:prstGeom prst="rect">
-            <a:avLst/>
-          </a:prstGeom>
-          <a:solidFill>
-            <a:srgbClr val="7A828E"/>
-          </a:solidFill>
-          <a:ln>
-            <a:noFill/>
-          </a:ln>
-          <a:effectLst/>
-        </p:spPr>
-        <p:style>
-          <a:lnRef idx="1">
-            <a:schemeClr val="accent1"/>
-          </a:lnRef>
-          <a:fillRef idx="3">
-            <a:schemeClr val="accent1"/>
-          </a:fillRef>
-          <a:effectRef idx="2">
-            <a:schemeClr val="accent1"/>
-          </a:effectRef>
-          <a:fontRef idx="minor">
-            <a:schemeClr val="lt1"/>
-          </a:fontRef>
-        </p:style>
-        <p:txBody>
-          <a:bodyPr rtlCol="0" anchor="ctr"/>
-          <a:lstStyle/>
-          <a:p>
-            <a:pPr algn="ctr"/>
-          </a:p>
-        </p:txBody>
-      </p:sp>
-      <p:pic>
-        <p:nvPicPr>
-          <p:cNvPr id="12" name="Picture 11" descr="naver_kw_02_stage1_result.png"/>
-          <p:cNvPicPr>
-            <a:picLocks noChangeAspect="1"/>
-          </p:cNvPicPr>
-          <p:nvPr/>
-        </p:nvPicPr>
-        <p:blipFill>
-          <a:blip r:embed="rId3"/>
-          <a:stretch>
-            <a:fillRect/>
-          </a:stretch>
-        </p:blipFill>
-        <p:spPr>
-          <a:xfrm>
-            <a:off x="6263640" y="1664208"/>
-            <a:ext cx="5349240" cy="3550463"/>
-          </a:xfrm>
-          <a:prstGeom prst="rect">
-            <a:avLst/>
-          </a:prstGeom>
-        </p:spPr>
-      </p:pic>
-      <p:sp>
-        <p:nvSpPr>
-          <p:cNvPr id="13" name="TextBox 12"/>
-          <p:cNvSpPr txBox="1"/>
-          <p:nvPr/>
-        </p:nvSpPr>
-        <p:spPr>
-          <a:xfrm>
-            <a:off x="6263640" y="1371600"/>
-            <a:ext cx="5349240" cy="292608"/>
-          </a:xfrm>
-          <a:prstGeom prst="rect">
-            <a:avLst/>
-          </a:prstGeom>
-          <a:noFill/>
-        </p:spPr>
-        <p:txBody>
-          <a:bodyPr wrap="square">
-            <a:spAutoFit/>
-          </a:bodyPr>
-          <a:lstStyle/>
-          <a:p>
-            <a:pPr algn="l">
-              <a:lnSpc>
-                <a:spcPct val="100000"/>
-              </a:lnSpc>
-            </a:pPr>
-            <a:r>
-              <a:rPr sz="1200" b="1" i="0">
-                <a:solidFill>
-                  <a:srgbClr val="1B3A5C"/>
-                </a:solidFill>
-                <a:latin typeface="맑은 고딕"/>
-              </a:rPr>
-              <a:t>1단계 실행 후 — 후보 507개 발견, [2단계] 버튼이 새로 나타남</a:t>
-            </a:r>
-          </a:p>
-        </p:txBody>
-      </p:sp>
-      <p:sp>
-        <p:nvSpPr>
-          <p:cNvPr id="14" name="TextBox 13"/>
-          <p:cNvSpPr txBox="1"/>
-          <p:nvPr/>
-        </p:nvSpPr>
-        <p:spPr>
-          <a:xfrm>
-            <a:off x="502920" y="5806440"/>
-            <a:ext cx="11155680" cy="457200"/>
-          </a:xfrm>
-          <a:prstGeom prst="rect">
-            <a:avLst/>
-          </a:prstGeom>
-          <a:noFill/>
-        </p:spPr>
-        <p:txBody>
-          <a:bodyPr wrap="square">
-            <a:spAutoFit/>
-          </a:bodyPr>
-          <a:lstStyle/>
-          <a:p>
-            <a:pPr algn="l">
-              <a:lnSpc>
-                <a:spcPct val="100000"/>
-              </a:lnSpc>
-            </a:pPr>
-            <a:r>
-              <a:rPr sz="1150" b="0" i="0">
-                <a:solidFill>
-                  <a:srgbClr val="7A828E"/>
-                </a:solidFill>
-                <a:latin typeface="맑은 고딕"/>
-              </a:rPr>
-              <a:t>무료 단계입니다 — 눌러도 과금되지 않습니다. 씨앗은 브랜드 이름이 아니라 실제 검색어여야 합니다.</a:t>
+              <a:t>⚙️ 설정 → 🔍 네이버 API → 🧵 키워드 작업 대상 킷</a:t>
+            </a:r>
+          </a:p>
+        </p:txBody>
+      </p:sp>
+      <p:sp>
+        <p:nvSpPr>
+          <p:cNvPr id="11" name="TextBox 10"/>
+          <p:cNvSpPr txBox="1"/>
+          <p:nvPr/>
+        </p:nvSpPr>
+        <p:spPr>
+          <a:xfrm>
+            <a:off x="7772400" y="1691640"/>
+            <a:ext cx="3931920" cy="4206240"/>
+          </a:xfrm>
+          <a:prstGeom prst="rect">
+            <a:avLst/>
+          </a:prstGeom>
+          <a:noFill/>
+        </p:spPr>
+        <p:txBody>
+          <a:bodyPr wrap="square">
+            <a:spAutoFit/>
+          </a:bodyPr>
+          <a:lstStyle/>
+          <a:p>
+            <a:pPr>
+              <a:lnSpc>
+                <a:spcPct val="125000"/>
+              </a:lnSpc>
+              <a:spcAft>
+                <a:spcPts val="1000"/>
+              </a:spcAft>
+            </a:pPr>
+            <a:r>
+              <a:rPr sz="1200" b="1">
+                <a:solidFill>
+                  <a:srgbClr val="23262B"/>
+                </a:solidFill>
+                <a:latin typeface="맑은 고딕"/>
+              </a:rPr>
+              <a:t>▪ 브랜드 킷이 여러 개면, 키워드 작업 전에 어느 킷의 키워드를 고칠지 고릅니다.</a:t>
+            </a:r>
+          </a:p>
+          <a:p>
+            <a:pPr>
+              <a:lnSpc>
+                <a:spcPct val="125000"/>
+              </a:lnSpc>
+              <a:spcAft>
+                <a:spcPts val="1000"/>
+              </a:spcAft>
+            </a:pPr>
+            <a:r>
+              <a:rPr sz="1200" b="0">
+                <a:solidFill>
+                  <a:srgbClr val="23262B"/>
+                </a:solidFill>
+                <a:latin typeface="맑은 고딕"/>
+              </a:rPr>
+              <a:t>▪ 아래 '새로 고르기 1~4단계'·'사업 분야 추가'·'수치 유지'·'진단'이 모두 고른 킷에만 반영됩니다.</a:t>
+            </a:r>
+          </a:p>
+          <a:p>
+            <a:pPr>
+              <a:lnSpc>
+                <a:spcPct val="125000"/>
+              </a:lnSpc>
+              <a:spcAft>
+                <a:spcPts val="1000"/>
+              </a:spcAft>
+            </a:pPr>
+            <a:r>
+              <a:rPr sz="1200" b="0">
+                <a:solidFill>
+                  <a:srgbClr val="23262B"/>
+                </a:solidFill>
+                <a:latin typeface="맑은 고딕"/>
+              </a:rPr>
+              <a:t>▪ 진행 중인 단계도 킷마다 따로 기억합니다 — 다른 킷으로 바꿨다 돌아와도 이어서 할 수 있습니다.</a:t>
+            </a:r>
+          </a:p>
+          <a:p>
+            <a:pPr>
+              <a:lnSpc>
+                <a:spcPct val="125000"/>
+              </a:lnSpc>
+              <a:spcAft>
+                <a:spcPts val="1000"/>
+              </a:spcAft>
+            </a:pPr>
+            <a:r>
+              <a:rPr sz="1200" b="0">
+                <a:solidFill>
+                  <a:srgbClr val="23262B"/>
+                </a:solidFill>
+                <a:latin typeface="맑은 고딕"/>
+              </a:rPr>
+              <a:t>▪ 검색량·문서 수 측정값은 킷끼리 함께 써서, 같은 키워드에 호출이 두 번 나가지 않습니다.</a:t>
             </a:r>
           </a:p>
         </p:txBody>
@@ -6655,7 +6609,7 @@
                 </a:solidFill>
                 <a:latin typeface="맑은 고딕"/>
               </a:rPr>
-              <a:t>② SEO 키워드 새로 고르기 · 실제 화면 (2/3)</a:t>
+              <a:t>② SEO 키워드 새로 고르기 · 실제 화면 (1/3)</a:t>
             </a:r>
           </a:p>
         </p:txBody>
@@ -6694,7 +6648,7 @@
                 </a:solidFill>
                 <a:latin typeface="맑은 고딕"/>
               </a:rPr>
-              <a:t>2단계 · 경쟁도 조사 결과</a:t>
+              <a:t>씨앗 입력 → 1단계 · 후보 찾기</a:t>
             </a:r>
           </a:p>
         </p:txBody>
@@ -6785,8 +6739,8 @@
         </p:nvSpPr>
         <p:spPr>
           <a:xfrm>
-            <a:off x="2887980" y="1626108"/>
-            <a:ext cx="6477000" cy="4386712"/>
+            <a:off x="464820" y="1626108"/>
+            <a:ext cx="5425440" cy="2888742"/>
           </a:xfrm>
           <a:prstGeom prst="rect">
             <a:avLst/>
@@ -6823,7 +6777,7 @@
       </p:sp>
       <p:pic>
         <p:nvPicPr>
-          <p:cNvPr id="9" name="Picture 8" descr="naver_kw_03_stage2_result.png"/>
+          <p:cNvPr id="9" name="Picture 8" descr="naver_kw_01_start.png"/>
           <p:cNvPicPr>
             <a:picLocks noChangeAspect="1"/>
           </p:cNvPicPr>
@@ -6837,8 +6791,8 @@
         </p:blipFill>
         <p:spPr>
           <a:xfrm>
-            <a:off x="2926080" y="1664208"/>
-            <a:ext cx="6400800" cy="4310512"/>
+            <a:off x="502920" y="1664208"/>
+            <a:ext cx="5349240" cy="2812542"/>
           </a:xfrm>
           <a:prstGeom prst="rect">
             <a:avLst/>
@@ -6853,8 +6807,8 @@
         </p:nvSpPr>
         <p:spPr>
           <a:xfrm>
-            <a:off x="2926080" y="1371600"/>
-            <a:ext cx="6400800" cy="292608"/>
+            <a:off x="502920" y="1371600"/>
+            <a:ext cx="5349240" cy="292608"/>
           </a:xfrm>
           <a:prstGeom prst="rect">
             <a:avLst/>
@@ -6879,87 +6833,153 @@
                 </a:solidFill>
                 <a:latin typeface="맑은 고딕"/>
               </a:rPr>
-              <a:t>키워드별 검색량 · 경쟁 문서 수 · 점수가 표로 나옵니다</a:t>
-            </a:r>
-          </a:p>
-        </p:txBody>
-      </p:sp>
-      <p:sp>
-        <p:nvSpPr>
-          <p:cNvPr id="11" name="TextBox 10"/>
-          <p:cNvSpPr txBox="1"/>
-          <p:nvPr/>
-        </p:nvSpPr>
-        <p:spPr>
-          <a:xfrm>
-            <a:off x="502920" y="1371600"/>
-            <a:ext cx="2286000" cy="4114800"/>
-          </a:xfrm>
-          <a:prstGeom prst="rect">
-            <a:avLst/>
-          </a:prstGeom>
-          <a:noFill/>
-        </p:spPr>
-        <p:txBody>
-          <a:bodyPr wrap="square">
-            <a:spAutoFit/>
-          </a:bodyPr>
-          <a:lstStyle/>
-          <a:p>
-            <a:pPr>
-              <a:lnSpc>
-                <a:spcPct val="130000"/>
-              </a:lnSpc>
-              <a:spcAft>
-                <a:spcPts val="1400"/>
-              </a:spcAft>
-            </a:pPr>
-            <a:r>
-              <a:rPr sz="1200" b="0">
-                <a:solidFill>
-                  <a:srgbClr val="23262B"/>
-                </a:solidFill>
-                <a:latin typeface="맑은 고딕"/>
-              </a:rPr>
-              <a:t>▪ 검색량이 높고 점수가 낮을수록(경쟁이 약할수록) 좋은 키워드입니다.</a:t>
-            </a:r>
-          </a:p>
-          <a:p>
-            <a:pPr>
-              <a:lnSpc>
-                <a:spcPct val="130000"/>
-              </a:lnSpc>
-              <a:spcAft>
-                <a:spcPts val="1400"/>
-              </a:spcAft>
-            </a:pPr>
-            <a:r>
-              <a:rPr sz="1200" b="0">
-                <a:solidFill>
-                  <a:srgbClr val="23262B"/>
-                </a:solidFill>
-                <a:latin typeface="맑은 고딕"/>
-              </a:rPr>
-              <a:t>▪ 이 단계가 유일하게 유료 API HUB 호출을 씁니다.</a:t>
-            </a:r>
-          </a:p>
-          <a:p>
-            <a:pPr>
-              <a:lnSpc>
-                <a:spcPct val="130000"/>
-              </a:lnSpc>
-              <a:spcAft>
-                <a:spcPts val="1400"/>
-              </a:spcAft>
-            </a:pPr>
-            <a:r>
-              <a:rPr sz="1200" b="0">
-                <a:solidFill>
-                  <a:srgbClr val="23262B"/>
-                </a:solidFill>
-                <a:latin typeface="맑은 고딕"/>
-              </a:rPr>
-              <a:t>▪ 표 아래로 스크롤하면 [3단계] 버튼이 있습니다.</a:t>
+              <a:t>위 🔑 새로 고르기(씨앗→1~4단계), 아래 🔄 수치 유지 — 처음엔 [1단계]부터</a:t>
+            </a:r>
+          </a:p>
+        </p:txBody>
+      </p:sp>
+      <p:sp>
+        <p:nvSpPr>
+          <p:cNvPr id="11" name="Rectangle 10"/>
+          <p:cNvSpPr/>
+          <p:nvPr/>
+        </p:nvSpPr>
+        <p:spPr>
+          <a:xfrm>
+            <a:off x="6225540" y="1626108"/>
+            <a:ext cx="5425440" cy="3626663"/>
+          </a:xfrm>
+          <a:prstGeom prst="rect">
+            <a:avLst/>
+          </a:prstGeom>
+          <a:solidFill>
+            <a:srgbClr val="7A828E"/>
+          </a:solidFill>
+          <a:ln>
+            <a:noFill/>
+          </a:ln>
+          <a:effectLst/>
+        </p:spPr>
+        <p:style>
+          <a:lnRef idx="1">
+            <a:schemeClr val="accent1"/>
+          </a:lnRef>
+          <a:fillRef idx="3">
+            <a:schemeClr val="accent1"/>
+          </a:fillRef>
+          <a:effectRef idx="2">
+            <a:schemeClr val="accent1"/>
+          </a:effectRef>
+          <a:fontRef idx="minor">
+            <a:schemeClr val="lt1"/>
+          </a:fontRef>
+        </p:style>
+        <p:txBody>
+          <a:bodyPr rtlCol="0" anchor="ctr"/>
+          <a:lstStyle/>
+          <a:p>
+            <a:pPr algn="ctr"/>
+          </a:p>
+        </p:txBody>
+      </p:sp>
+      <p:pic>
+        <p:nvPicPr>
+          <p:cNvPr id="12" name="Picture 11" descr="naver_kw_02_stage1_result.png"/>
+          <p:cNvPicPr>
+            <a:picLocks noChangeAspect="1"/>
+          </p:cNvPicPr>
+          <p:nvPr/>
+        </p:nvPicPr>
+        <p:blipFill>
+          <a:blip r:embed="rId3"/>
+          <a:stretch>
+            <a:fillRect/>
+          </a:stretch>
+        </p:blipFill>
+        <p:spPr>
+          <a:xfrm>
+            <a:off x="6263640" y="1664208"/>
+            <a:ext cx="5349240" cy="3550463"/>
+          </a:xfrm>
+          <a:prstGeom prst="rect">
+            <a:avLst/>
+          </a:prstGeom>
+        </p:spPr>
+      </p:pic>
+      <p:sp>
+        <p:nvSpPr>
+          <p:cNvPr id="13" name="TextBox 12"/>
+          <p:cNvSpPr txBox="1"/>
+          <p:nvPr/>
+        </p:nvSpPr>
+        <p:spPr>
+          <a:xfrm>
+            <a:off x="6263640" y="1371600"/>
+            <a:ext cx="5349240" cy="292608"/>
+          </a:xfrm>
+          <a:prstGeom prst="rect">
+            <a:avLst/>
+          </a:prstGeom>
+          <a:noFill/>
+        </p:spPr>
+        <p:txBody>
+          <a:bodyPr wrap="square">
+            <a:spAutoFit/>
+          </a:bodyPr>
+          <a:lstStyle/>
+          <a:p>
+            <a:pPr algn="l">
+              <a:lnSpc>
+                <a:spcPct val="100000"/>
+              </a:lnSpc>
+            </a:pPr>
+            <a:r>
+              <a:rPr sz="1200" b="1" i="0">
+                <a:solidFill>
+                  <a:srgbClr val="1B3A5C"/>
+                </a:solidFill>
+                <a:latin typeface="맑은 고딕"/>
+              </a:rPr>
+              <a:t>1단계 실행 후 — 후보 507개 발견, [2단계] 버튼이 새로 나타남</a:t>
+            </a:r>
+          </a:p>
+        </p:txBody>
+      </p:sp>
+      <p:sp>
+        <p:nvSpPr>
+          <p:cNvPr id="14" name="TextBox 13"/>
+          <p:cNvSpPr txBox="1"/>
+          <p:nvPr/>
+        </p:nvSpPr>
+        <p:spPr>
+          <a:xfrm>
+            <a:off x="502920" y="5806440"/>
+            <a:ext cx="11155680" cy="457200"/>
+          </a:xfrm>
+          <a:prstGeom prst="rect">
+            <a:avLst/>
+          </a:prstGeom>
+          <a:noFill/>
+        </p:spPr>
+        <p:txBody>
+          <a:bodyPr wrap="square">
+            <a:spAutoFit/>
+          </a:bodyPr>
+          <a:lstStyle/>
+          <a:p>
+            <a:pPr algn="l">
+              <a:lnSpc>
+                <a:spcPct val="100000"/>
+              </a:lnSpc>
+            </a:pPr>
+            <a:r>
+              <a:rPr sz="1150" b="0" i="0">
+                <a:solidFill>
+                  <a:srgbClr val="7A828E"/>
+                </a:solidFill>
+                <a:latin typeface="맑은 고딕"/>
+              </a:rPr>
+              <a:t>무료 단계입니다 — 눌러도 과금되지 않습니다. 씨앗은 브랜드 이름이 아니라 실제 검색어여야 합니다.</a:t>
             </a:r>
           </a:p>
         </p:txBody>
@@ -7112,7 +7132,7 @@
                 </a:solidFill>
                 <a:latin typeface="맑은 고딕"/>
               </a:rPr>
-              <a:t>② SEO 키워드 새로 고르기 · 실제 화면 (3/3)</a:t>
+              <a:t>② SEO 키워드 새로 고르기 · 실제 화면 (2/3)</a:t>
             </a:r>
           </a:p>
         </p:txBody>
@@ -7151,7 +7171,7 @@
                 </a:solidFill>
                 <a:latin typeface="맑은 고딕"/>
               </a:rPr>
-              <a:t>3단계 · 브랜드 판정 → 4단계 · 적용</a:t>
+              <a:t>2단계 · 경쟁도 조사 결과</a:t>
             </a:r>
           </a:p>
         </p:txBody>
@@ -7242,8 +7262,8 @@
         </p:nvSpPr>
         <p:spPr>
           <a:xfrm>
-            <a:off x="464820" y="1626108"/>
-            <a:ext cx="5425440" cy="3775894"/>
+            <a:off x="2887980" y="1626108"/>
+            <a:ext cx="6477000" cy="4386712"/>
           </a:xfrm>
           <a:prstGeom prst="rect">
             <a:avLst/>
@@ -7280,7 +7300,7 @@
       </p:sp>
       <p:pic>
         <p:nvPicPr>
-          <p:cNvPr id="9" name="Picture 8" descr="naver_kw_04_stage3_result.png"/>
+          <p:cNvPr id="9" name="Picture 8" descr="naver_kw_03_stage2_result.png"/>
           <p:cNvPicPr>
             <a:picLocks noChangeAspect="1"/>
           </p:cNvPicPr>
@@ -7294,8 +7314,8 @@
         </p:blipFill>
         <p:spPr>
           <a:xfrm>
-            <a:off x="502920" y="1664208"/>
-            <a:ext cx="5349240" cy="3699694"/>
+            <a:off x="2926080" y="1664208"/>
+            <a:ext cx="6400800" cy="4310512"/>
           </a:xfrm>
           <a:prstGeom prst="rect">
             <a:avLst/>
@@ -7310,179 +7330,113 @@
         </p:nvSpPr>
         <p:spPr>
           <a:xfrm>
+            <a:off x="2926080" y="1371600"/>
+            <a:ext cx="6400800" cy="292608"/>
+          </a:xfrm>
+          <a:prstGeom prst="rect">
+            <a:avLst/>
+          </a:prstGeom>
+          <a:noFill/>
+        </p:spPr>
+        <p:txBody>
+          <a:bodyPr wrap="square">
+            <a:spAutoFit/>
+          </a:bodyPr>
+          <a:lstStyle/>
+          <a:p>
+            <a:pPr algn="l">
+              <a:lnSpc>
+                <a:spcPct val="100000"/>
+              </a:lnSpc>
+            </a:pPr>
+            <a:r>
+              <a:rPr sz="1200" b="1" i="0">
+                <a:solidFill>
+                  <a:srgbClr val="1B3A5C"/>
+                </a:solidFill>
+                <a:latin typeface="맑은 고딕"/>
+              </a:rPr>
+              <a:t>키워드별 검색량 · 경쟁 문서 수 · 점수가 표로 나옵니다</a:t>
+            </a:r>
+          </a:p>
+        </p:txBody>
+      </p:sp>
+      <p:sp>
+        <p:nvSpPr>
+          <p:cNvPr id="11" name="TextBox 10"/>
+          <p:cNvSpPr txBox="1"/>
+          <p:nvPr/>
+        </p:nvSpPr>
+        <p:spPr>
+          <a:xfrm>
             <a:off x="502920" y="1371600"/>
-            <a:ext cx="5349240" cy="292608"/>
-          </a:xfrm>
-          <a:prstGeom prst="rect">
-            <a:avLst/>
-          </a:prstGeom>
-          <a:noFill/>
-        </p:spPr>
-        <p:txBody>
-          <a:bodyPr wrap="square">
-            <a:spAutoFit/>
-          </a:bodyPr>
-          <a:lstStyle/>
-          <a:p>
-            <a:pPr algn="l">
-              <a:lnSpc>
-                <a:spcPct val="100000"/>
-              </a:lnSpc>
-            </a:pPr>
-            <a:r>
-              <a:rPr sz="1200" b="1" i="0">
-                <a:solidFill>
-                  <a:srgbClr val="1B3A5C"/>
-                </a:solidFill>
-                <a:latin typeface="맑은 고딕"/>
-              </a:rPr>
-              <a:t>AI가 구매 직결/잠재 고객/사업 부문별로 분류 — '='는 기존 유지, '+'는 신규 추가</a:t>
-            </a:r>
-          </a:p>
-        </p:txBody>
-      </p:sp>
-      <p:sp>
-        <p:nvSpPr>
-          <p:cNvPr id="11" name="Rectangle 10"/>
-          <p:cNvSpPr/>
-          <p:nvPr/>
-        </p:nvSpPr>
-        <p:spPr>
-          <a:xfrm>
-            <a:off x="6225540" y="1626108"/>
-            <a:ext cx="5425440" cy="3636098"/>
-          </a:xfrm>
-          <a:prstGeom prst="rect">
-            <a:avLst/>
-          </a:prstGeom>
-          <a:solidFill>
-            <a:srgbClr val="7A828E"/>
-          </a:solidFill>
-          <a:ln>
-            <a:noFill/>
-          </a:ln>
-          <a:effectLst/>
-        </p:spPr>
-        <p:style>
-          <a:lnRef idx="1">
-            <a:schemeClr val="accent1"/>
-          </a:lnRef>
-          <a:fillRef idx="3">
-            <a:schemeClr val="accent1"/>
-          </a:fillRef>
-          <a:effectRef idx="2">
-            <a:schemeClr val="accent1"/>
-          </a:effectRef>
-          <a:fontRef idx="minor">
-            <a:schemeClr val="lt1"/>
-          </a:fontRef>
-        </p:style>
-        <p:txBody>
-          <a:bodyPr rtlCol="0" anchor="ctr"/>
-          <a:lstStyle/>
-          <a:p>
-            <a:pPr algn="ctr"/>
-          </a:p>
-        </p:txBody>
-      </p:sp>
-      <p:pic>
-        <p:nvPicPr>
-          <p:cNvPr id="12" name="Picture 11" descr="naver_kw_05_stage34_apply.png"/>
-          <p:cNvPicPr>
-            <a:picLocks noChangeAspect="1"/>
-          </p:cNvPicPr>
-          <p:nvPr/>
-        </p:nvPicPr>
-        <p:blipFill>
-          <a:blip r:embed="rId3"/>
-          <a:stretch>
-            <a:fillRect/>
-          </a:stretch>
-        </p:blipFill>
-        <p:spPr>
-          <a:xfrm>
-            <a:off x="6263640" y="1664208"/>
-            <a:ext cx="5349240" cy="3559898"/>
-          </a:xfrm>
-          <a:prstGeom prst="rect">
-            <a:avLst/>
-          </a:prstGeom>
-        </p:spPr>
-      </p:pic>
-      <p:sp>
-        <p:nvSpPr>
-          <p:cNvPr id="13" name="TextBox 12"/>
-          <p:cNvSpPr txBox="1"/>
-          <p:nvPr/>
-        </p:nvSpPr>
-        <p:spPr>
-          <a:xfrm>
-            <a:off x="6263640" y="1371600"/>
-            <a:ext cx="5349240" cy="292608"/>
-          </a:xfrm>
-          <a:prstGeom prst="rect">
-            <a:avLst/>
-          </a:prstGeom>
-          <a:noFill/>
-        </p:spPr>
-        <p:txBody>
-          <a:bodyPr wrap="square">
-            <a:spAutoFit/>
-          </a:bodyPr>
-          <a:lstStyle/>
-          <a:p>
-            <a:pPr algn="l">
-              <a:lnSpc>
-                <a:spcPct val="100000"/>
-              </a:lnSpc>
-            </a:pPr>
-            <a:r>
-              <a:rPr sz="1200" b="1" i="0">
-                <a:solidFill>
-                  <a:srgbClr val="1B3A5C"/>
-                </a:solidFill>
-                <a:latin typeface="맑은 고딕"/>
-              </a:rPr>
-              <a:t>제외된 키워드는 체크박스로 되살릴 수 있음 — [4단계 · 적용]을 눌러야 실제로 반영됨</a:t>
-            </a:r>
-          </a:p>
-        </p:txBody>
-      </p:sp>
-      <p:sp>
-        <p:nvSpPr>
-          <p:cNvPr id="14" name="TextBox 13"/>
-          <p:cNvSpPr txBox="1"/>
-          <p:nvPr/>
-        </p:nvSpPr>
-        <p:spPr>
-          <a:xfrm>
-            <a:off x="502920" y="5897880"/>
-            <a:ext cx="11155680" cy="457200"/>
-          </a:xfrm>
-          <a:prstGeom prst="rect">
-            <a:avLst/>
-          </a:prstGeom>
-          <a:noFill/>
-        </p:spPr>
-        <p:txBody>
-          <a:bodyPr wrap="square">
-            <a:spAutoFit/>
-          </a:bodyPr>
-          <a:lstStyle/>
-          <a:p>
-            <a:pPr algn="l">
-              <a:lnSpc>
-                <a:spcPct val="100000"/>
-              </a:lnSpc>
-            </a:pPr>
-            <a:r>
-              <a:rPr sz="1150" b="1" i="0">
-                <a:solidFill>
-                  <a:srgbClr val="C0392B"/>
-                </a:solidFill>
-                <a:latin typeface="맑은 고딕"/>
-              </a:rPr>
-              <a:t>⚠️ 여기서 [4단계 · 적용]을 누르기 전까지는 고른 킷의 SEO 키워드가 전혀 바뀌지 않습니다. 결과는 그 킷에만 반영됩니다.</a:t>
+            <a:ext cx="2286000" cy="4114800"/>
+          </a:xfrm>
+          <a:prstGeom prst="rect">
+            <a:avLst/>
+          </a:prstGeom>
+          <a:noFill/>
+        </p:spPr>
+        <p:txBody>
+          <a:bodyPr wrap="square">
+            <a:spAutoFit/>
+          </a:bodyPr>
+          <a:lstStyle/>
+          <a:p>
+            <a:pPr>
+              <a:lnSpc>
+                <a:spcPct val="130000"/>
+              </a:lnSpc>
+              <a:spcAft>
+                <a:spcPts val="1400"/>
+              </a:spcAft>
+            </a:pPr>
+            <a:r>
+              <a:rPr sz="1200" b="0">
+                <a:solidFill>
+                  <a:srgbClr val="23262B"/>
+                </a:solidFill>
+                <a:latin typeface="맑은 고딕"/>
+              </a:rPr>
+              <a:t>▪ 검색량이 높고 점수가 낮을수록(경쟁이 약할수록) 좋은 키워드입니다.</a:t>
+            </a:r>
+          </a:p>
+          <a:p>
+            <a:pPr>
+              <a:lnSpc>
+                <a:spcPct val="130000"/>
+              </a:lnSpc>
+              <a:spcAft>
+                <a:spcPts val="1400"/>
+              </a:spcAft>
+            </a:pPr>
+            <a:r>
+              <a:rPr sz="1200" b="0">
+                <a:solidFill>
+                  <a:srgbClr val="23262B"/>
+                </a:solidFill>
+                <a:latin typeface="맑은 고딕"/>
+              </a:rPr>
+              <a:t>▪ 이 단계가 유일하게 유료 API HUB 호출을 씁니다.</a:t>
+            </a:r>
+          </a:p>
+          <a:p>
+            <a:pPr>
+              <a:lnSpc>
+                <a:spcPct val="130000"/>
+              </a:lnSpc>
+              <a:spcAft>
+                <a:spcPts val="1400"/>
+              </a:spcAft>
+            </a:pPr>
+            <a:r>
+              <a:rPr sz="1200" b="0">
+                <a:solidFill>
+                  <a:srgbClr val="23262B"/>
+                </a:solidFill>
+                <a:latin typeface="맑은 고딕"/>
+              </a:rPr>
+              <a:t>▪ 표 아래로 스크롤하면 [3단계] 버튼이 있습니다.</a:t>
             </a:r>
           </a:p>
         </p:txBody>
@@ -7635,7 +7589,7 @@
                 </a:solidFill>
                 <a:latin typeface="맑은 고딕"/>
               </a:rPr>
-              <a:t>② 🔄 키워드 수치 유지</a:t>
+              <a:t>② SEO 키워드 새로 고르기 · 실제 화면 (3/3)</a:t>
             </a:r>
           </a:p>
         </p:txBody>
@@ -7674,7 +7628,7 @@
                 </a:solidFill>
                 <a:latin typeface="맑은 고딕"/>
               </a:rPr>
-              <a:t>30일마다 5분 · 분기 30분 · 캐시 30일</a:t>
+              <a:t>3단계 · 브랜드 판정 → 4단계 · 적용</a:t>
             </a:r>
           </a:p>
         </p:txBody>
@@ -7765,14 +7719,14 @@
         </p:nvSpPr>
         <p:spPr>
           <a:xfrm>
-            <a:off x="502920" y="1371600"/>
-            <a:ext cx="5440680" cy="2926080"/>
+            <a:off x="464820" y="1626108"/>
+            <a:ext cx="5425440" cy="3775894"/>
           </a:xfrm>
           <a:prstGeom prst="rect">
             <a:avLst/>
           </a:prstGeom>
           <a:solidFill>
-            <a:srgbClr val="FFFFFF"/>
+            <a:srgbClr val="7A828E"/>
           </a:solidFill>
           <a:ln>
             <a:noFill/>
@@ -7801,16 +7755,40 @@
           </a:p>
         </p:txBody>
       </p:sp>
-      <p:sp>
-        <p:nvSpPr>
-          <p:cNvPr id="9" name="TextBox 8"/>
-          <p:cNvSpPr txBox="1"/>
-          <p:nvPr/>
-        </p:nvSpPr>
-        <p:spPr>
-          <a:xfrm>
-            <a:off x="731520" y="1508760"/>
-            <a:ext cx="4983480" cy="365760"/>
+      <p:pic>
+        <p:nvPicPr>
+          <p:cNvPr id="9" name="Picture 8" descr="naver_kw_04_stage3_result.png"/>
+          <p:cNvPicPr>
+            <a:picLocks noChangeAspect="1"/>
+          </p:cNvPicPr>
+          <p:nvPr/>
+        </p:nvPicPr>
+        <p:blipFill>
+          <a:blip r:embed="rId2"/>
+          <a:stretch>
+            <a:fillRect/>
+          </a:stretch>
+        </p:blipFill>
+        <p:spPr>
+          <a:xfrm>
+            <a:off x="502920" y="1664208"/>
+            <a:ext cx="5349240" cy="3699694"/>
+          </a:xfrm>
+          <a:prstGeom prst="rect">
+            <a:avLst/>
+          </a:prstGeom>
+        </p:spPr>
+      </p:pic>
+      <p:sp>
+        <p:nvSpPr>
+          <p:cNvPr id="10" name="TextBox 9"/>
+          <p:cNvSpPr txBox="1"/>
+          <p:nvPr/>
+        </p:nvSpPr>
+        <p:spPr>
+          <a:xfrm>
+            <a:off x="502920" y="1371600"/>
+            <a:ext cx="5349240" cy="292608"/>
           </a:xfrm>
           <a:prstGeom prst="rect">
             <a:avLst/>
@@ -7829,52 +7807,13 @@
               </a:lnSpc>
             </a:pPr>
             <a:r>
-              <a:rPr sz="1400" b="1" i="0">
+              <a:rPr sz="1200" b="1" i="0">
                 <a:solidFill>
                   <a:srgbClr val="1B3A5C"/>
                 </a:solidFill>
                 <a:latin typeface="맑은 고딕"/>
               </a:rPr>
-              <a:t>30일마다 — [🔄 숫자만 새로 재기]</a:t>
-            </a:r>
-          </a:p>
-        </p:txBody>
-      </p:sp>
-      <p:sp>
-        <p:nvSpPr>
-          <p:cNvPr id="10" name="TextBox 9"/>
-          <p:cNvSpPr txBox="1"/>
-          <p:nvPr/>
-        </p:nvSpPr>
-        <p:spPr>
-          <a:xfrm>
-            <a:off x="731520" y="1920240"/>
-            <a:ext cx="4983480" cy="2194560"/>
-          </a:xfrm>
-          <a:prstGeom prst="rect">
-            <a:avLst/>
-          </a:prstGeom>
-          <a:noFill/>
-        </p:spPr>
-        <p:txBody>
-          <a:bodyPr wrap="square">
-            <a:spAutoFit/>
-          </a:bodyPr>
-          <a:lstStyle/>
-          <a:p>
-            <a:pPr algn="l">
-              <a:lnSpc>
-                <a:spcPct val="135000"/>
-              </a:lnSpc>
-            </a:pPr>
-            <a:r>
-              <a:rPr sz="1200" b="0" i="0">
-                <a:solidFill>
-                  <a:srgbClr val="23262B"/>
-                </a:solidFill>
-                <a:latin typeface="맑은 고딕"/>
-              </a:rPr>
-              <a:t>키워드 목록은 그대로 두고 만료된 검색량·경쟁도만 다시 잽니다. 살아 있는 값은 캐시에서 읽어 호출 0회 — 과금되는 것은 만료분뿐입니다. 4단계 [적용] 직후에는 누를 필요가 없습니다(버튼이 '전부 최신 · 0회'로 잠겨 있음).</a:t>
+              <a:t>AI가 구매 직결/잠재 고객/사업 부문별로 분류 — '='는 기존 유지, '+'는 신규 추가</a:t>
             </a:r>
           </a:p>
         </p:txBody>
@@ -7887,14 +7826,14 @@
         </p:nvSpPr>
         <p:spPr>
           <a:xfrm>
-            <a:off x="6263640" y="1371600"/>
-            <a:ext cx="5440680" cy="2926080"/>
+            <a:off x="6225540" y="1626108"/>
+            <a:ext cx="5425440" cy="3636098"/>
           </a:xfrm>
           <a:prstGeom prst="rect">
             <a:avLst/>
           </a:prstGeom>
           <a:solidFill>
-            <a:srgbClr val="FFFFFF"/>
+            <a:srgbClr val="7A828E"/>
           </a:solidFill>
           <a:ln>
             <a:noFill/>
@@ -7923,16 +7862,40 @@
           </a:p>
         </p:txBody>
       </p:sp>
-      <p:sp>
-        <p:nvSpPr>
-          <p:cNvPr id="12" name="TextBox 11"/>
-          <p:cNvSpPr txBox="1"/>
-          <p:nvPr/>
-        </p:nvSpPr>
-        <p:spPr>
-          <a:xfrm>
-            <a:off x="6492240" y="1508760"/>
-            <a:ext cx="4983480" cy="365760"/>
+      <p:pic>
+        <p:nvPicPr>
+          <p:cNvPr id="12" name="Picture 11" descr="naver_kw_05_stage34_apply.png"/>
+          <p:cNvPicPr>
+            <a:picLocks noChangeAspect="1"/>
+          </p:cNvPicPr>
+          <p:nvPr/>
+        </p:nvPicPr>
+        <p:blipFill>
+          <a:blip r:embed="rId3"/>
+          <a:stretch>
+            <a:fillRect/>
+          </a:stretch>
+        </p:blipFill>
+        <p:spPr>
+          <a:xfrm>
+            <a:off x="6263640" y="1664208"/>
+            <a:ext cx="5349240" cy="3559898"/>
+          </a:xfrm>
+          <a:prstGeom prst="rect">
+            <a:avLst/>
+          </a:prstGeom>
+        </p:spPr>
+      </p:pic>
+      <p:sp>
+        <p:nvSpPr>
+          <p:cNvPr id="13" name="TextBox 12"/>
+          <p:cNvSpPr txBox="1"/>
+          <p:nvPr/>
+        </p:nvSpPr>
+        <p:spPr>
+          <a:xfrm>
+            <a:off x="6263640" y="1371600"/>
+            <a:ext cx="5349240" cy="292608"/>
           </a:xfrm>
           <a:prstGeom prst="rect">
             <a:avLst/>
@@ -7951,27 +7914,27 @@
               </a:lnSpc>
             </a:pPr>
             <a:r>
-              <a:rPr sz="1400" b="1" i="0">
+              <a:rPr sz="1200" b="1" i="0">
                 <a:solidFill>
                   <a:srgbClr val="1B3A5C"/>
                 </a:solidFill>
                 <a:latin typeface="맑은 고딕"/>
               </a:rPr>
-              <a:t>분기 — 🔑 SEO 키워드 새로 고르기</a:t>
-            </a:r>
-          </a:p>
-        </p:txBody>
-      </p:sp>
-      <p:sp>
-        <p:nvSpPr>
-          <p:cNvPr id="13" name="TextBox 12"/>
-          <p:cNvSpPr txBox="1"/>
-          <p:nvPr/>
-        </p:nvSpPr>
-        <p:spPr>
-          <a:xfrm>
-            <a:off x="6492240" y="1920240"/>
-            <a:ext cx="4983480" cy="2194560"/>
+              <a:t>제외된 키워드는 체크박스로 되살릴 수 있음 — [4단계 · 적용]을 눌러야 실제로 반영됨</a:t>
+            </a:r>
+          </a:p>
+        </p:txBody>
+      </p:sp>
+      <p:sp>
+        <p:nvSpPr>
+          <p:cNvPr id="14" name="TextBox 13"/>
+          <p:cNvSpPr txBox="1"/>
+          <p:nvPr/>
+        </p:nvSpPr>
+        <p:spPr>
+          <a:xfrm>
+            <a:off x="502920" y="5897880"/>
+            <a:ext cx="11155680" cy="457200"/>
           </a:xfrm>
           <a:prstGeom prst="rect">
             <a:avLst/>
@@ -7986,139 +7949,17 @@
           <a:p>
             <a:pPr algn="l">
               <a:lnSpc>
-                <a:spcPct val="135000"/>
-              </a:lnSpc>
-            </a:pPr>
-            <a:r>
-              <a:rPr sz="1200" b="0" i="0">
-                <a:solidFill>
-                  <a:srgbClr val="23262B"/>
-                </a:solidFill>
-                <a:latin typeface="맑은 고딕"/>
-              </a:rPr>
-              <a:t>씨앗부터 다시 발굴해 키워드 목록 자체를 교체합니다. 조사할 후보 수(기본 100개)가 곧 최대 유료 호출 수 — 넓힐수록 좋은 키워드를 찾을 확률이 오릅니다.</a:t>
-            </a:r>
-          </a:p>
-        </p:txBody>
-      </p:sp>
-      <p:sp>
-        <p:nvSpPr>
-          <p:cNvPr id="14" name="Rectangle 13"/>
-          <p:cNvSpPr/>
-          <p:nvPr/>
-        </p:nvSpPr>
-        <p:spPr>
-          <a:xfrm>
-            <a:off x="502920" y="4526280"/>
-            <a:ext cx="11155680" cy="1600200"/>
-          </a:xfrm>
-          <a:prstGeom prst="rect">
-            <a:avLst/>
-          </a:prstGeom>
-          <a:solidFill>
-            <a:srgbClr val="F5EDD7"/>
-          </a:solidFill>
-          <a:ln>
-            <a:noFill/>
-          </a:ln>
-          <a:effectLst/>
-        </p:spPr>
-        <p:style>
-          <a:lnRef idx="1">
-            <a:schemeClr val="accent1"/>
-          </a:lnRef>
-          <a:fillRef idx="3">
-            <a:schemeClr val="accent1"/>
-          </a:fillRef>
-          <a:effectRef idx="2">
-            <a:schemeClr val="accent1"/>
-          </a:effectRef>
-          <a:fontRef idx="minor">
-            <a:schemeClr val="lt1"/>
-          </a:fontRef>
-        </p:style>
-        <p:txBody>
-          <a:bodyPr rtlCol="0" anchor="ctr"/>
-          <a:lstStyle/>
-          <a:p>
-            <a:pPr algn="ctr"/>
-          </a:p>
-        </p:txBody>
-      </p:sp>
-      <p:sp>
-        <p:nvSpPr>
-          <p:cNvPr id="15" name="TextBox 14"/>
-          <p:cNvSpPr txBox="1"/>
-          <p:nvPr/>
-        </p:nvSpPr>
-        <p:spPr>
-          <a:xfrm>
-            <a:off x="777240" y="4663440"/>
-            <a:ext cx="10607040" cy="365760"/>
-          </a:xfrm>
-          <a:prstGeom prst="rect">
-            <a:avLst/>
-          </a:prstGeom>
-          <a:noFill/>
-        </p:spPr>
-        <p:txBody>
-          <a:bodyPr wrap="square">
-            <a:spAutoFit/>
-          </a:bodyPr>
-          <a:lstStyle/>
-          <a:p>
-            <a:pPr algn="l">
-              <a:lnSpc>
                 <a:spcPct val="100000"/>
               </a:lnSpc>
             </a:pPr>
             <a:r>
-              <a:rPr sz="1400" b="1" i="0">
+              <a:rPr sz="1150" b="1" i="0">
                 <a:solidFill>
                   <a:srgbClr val="C0392B"/>
                 </a:solidFill>
                 <a:latin typeface="맑은 고딕"/>
               </a:rPr>
-              <a:t>⚠️ 만료는 조용히 일어납니다</a:t>
-            </a:r>
-          </a:p>
-        </p:txBody>
-      </p:sp>
-      <p:sp>
-        <p:nvSpPr>
-          <p:cNvPr id="16" name="TextBox 15"/>
-          <p:cNvSpPr txBox="1"/>
-          <p:nvPr/>
-        </p:nvSpPr>
-        <p:spPr>
-          <a:xfrm>
-            <a:off x="777240" y="5047488"/>
-            <a:ext cx="10607040" cy="914400"/>
-          </a:xfrm>
-          <a:prstGeom prst="rect">
-            <a:avLst/>
-          </a:prstGeom>
-          <a:noFill/>
-        </p:spPr>
-        <p:txBody>
-          <a:bodyPr wrap="square">
-            <a:spAutoFit/>
-          </a:bodyPr>
-          <a:lstStyle/>
-          <a:p>
-            <a:pPr algn="l">
-              <a:lnSpc>
-                <a:spcPct val="130000"/>
-              </a:lnSpc>
-            </a:pPr>
-            <a:r>
-              <a:rPr sz="1200" b="0" i="0">
-                <a:solidFill>
-                  <a:srgbClr val="23262B"/>
-                </a:solidFill>
-                <a:latin typeface="맑은 고딕"/>
-              </a:rPr>
-              <a:t>에러도 멈춤도 없이 '전환 가중치'가 꺼지고 단순 등장 횟수로만 순위가 매겨집니다. 브랜드 킷·설정 화면에 '경쟁도 측정 만료' 경고가 뜨면 [숫자만 새로 재기]를 눌러주세요.</a:t>
+              <a:t>⚠️ 여기서 [4단계 · 적용]을 누르기 전까지는 고른 킷의 SEO 키워드가 전혀 바뀌지 않습니다. 결과는 그 킷에만 반영됩니다.</a:t>
             </a:r>
           </a:p>
         </p:txBody>
@@ -8271,7 +8112,7 @@
                 </a:solidFill>
                 <a:latin typeface="맑은 고딕"/>
               </a:rPr>
-              <a:t>③ 매일 쓰는 법 · 워크벤치</a:t>
+              <a:t>② 🔄 키워드 수치 유지</a:t>
             </a:r>
           </a:p>
         </p:txBody>
@@ -8310,7 +8151,7 @@
                 </a:solidFill>
                 <a:latin typeface="맑은 고딕"/>
               </a:rPr>
-              <a:t>새 콘텐츠 만들기 — 5단계</a:t>
+              <a:t>30일마다 5분 · 분기 30분 · 캐시 30일</a:t>
             </a:r>
           </a:p>
         </p:txBody>
@@ -8402,90 +8243,7 @@
         <p:spPr>
           <a:xfrm>
             <a:off x="502920" y="1371600"/>
-            <a:ext cx="502920" cy="914400"/>
-          </a:xfrm>
-          <a:prstGeom prst="rect">
-            <a:avLst/>
-          </a:prstGeom>
-          <a:solidFill>
-            <a:srgbClr val="1B3A5C"/>
-          </a:solidFill>
-          <a:ln>
-            <a:noFill/>
-          </a:ln>
-          <a:effectLst/>
-        </p:spPr>
-        <p:style>
-          <a:lnRef idx="1">
-            <a:schemeClr val="accent1"/>
-          </a:lnRef>
-          <a:fillRef idx="3">
-            <a:schemeClr val="accent1"/>
-          </a:fillRef>
-          <a:effectRef idx="2">
-            <a:schemeClr val="accent1"/>
-          </a:effectRef>
-          <a:fontRef idx="minor">
-            <a:schemeClr val="lt1"/>
-          </a:fontRef>
-        </p:style>
-        <p:txBody>
-          <a:bodyPr rtlCol="0" anchor="ctr"/>
-          <a:lstStyle/>
-          <a:p>
-            <a:pPr algn="ctr"/>
-          </a:p>
-        </p:txBody>
-      </p:sp>
-      <p:sp>
-        <p:nvSpPr>
-          <p:cNvPr id="9" name="TextBox 8"/>
-          <p:cNvSpPr txBox="1"/>
-          <p:nvPr/>
-        </p:nvSpPr>
-        <p:spPr>
-          <a:xfrm>
-            <a:off x="502920" y="1371600"/>
-            <a:ext cx="502920" cy="914400"/>
-          </a:xfrm>
-          <a:prstGeom prst="rect">
-            <a:avLst/>
-          </a:prstGeom>
-          <a:noFill/>
-        </p:spPr>
-        <p:txBody>
-          <a:bodyPr wrap="square">
-            <a:spAutoFit/>
-          </a:bodyPr>
-          <a:lstStyle/>
-          <a:p>
-            <a:pPr algn="ctr">
-              <a:lnSpc>
-                <a:spcPct val="100000"/>
-              </a:lnSpc>
-            </a:pPr>
-            <a:r>
-              <a:rPr sz="1900" b="1" i="0">
-                <a:solidFill>
-                  <a:srgbClr val="FFFFFF"/>
-                </a:solidFill>
-                <a:latin typeface="맑은 고딕"/>
-              </a:rPr>
-              <a:t>1</a:t>
-            </a:r>
-          </a:p>
-        </p:txBody>
-      </p:sp>
-      <p:sp>
-        <p:nvSpPr>
-          <p:cNvPr id="10" name="Rectangle 9"/>
-          <p:cNvSpPr/>
-          <p:nvPr/>
-        </p:nvSpPr>
-        <p:spPr>
-          <a:xfrm>
-            <a:off x="1005840" y="1371600"/>
-            <a:ext cx="10652760" cy="914400"/>
+            <a:ext cx="5440680" cy="2926080"/>
           </a:xfrm>
           <a:prstGeom prst="rect">
             <a:avLst/>
@@ -8522,14 +8280,14 @@
       </p:sp>
       <p:sp>
         <p:nvSpPr>
-          <p:cNvPr id="11" name="TextBox 10"/>
-          <p:cNvSpPr txBox="1"/>
-          <p:nvPr/>
-        </p:nvSpPr>
-        <p:spPr>
-          <a:xfrm>
-            <a:off x="1188720" y="1444752"/>
-            <a:ext cx="10287000" cy="320040"/>
+          <p:cNvPr id="9" name="TextBox 8"/>
+          <p:cNvSpPr txBox="1"/>
+          <p:nvPr/>
+        </p:nvSpPr>
+        <p:spPr>
+          <a:xfrm>
+            <a:off x="731520" y="1508760"/>
+            <a:ext cx="4983480" cy="365760"/>
           </a:xfrm>
           <a:prstGeom prst="rect">
             <a:avLst/>
@@ -8548,149 +8306,66 @@
               </a:lnSpc>
             </a:pPr>
             <a:r>
-              <a:rPr sz="1350" b="1" i="0">
+              <a:rPr sz="1400" b="1" i="0">
+                <a:solidFill>
+                  <a:srgbClr val="1B3A5C"/>
+                </a:solidFill>
+                <a:latin typeface="맑은 고딕"/>
+              </a:rPr>
+              <a:t>30일마다 — [🔄 숫자만 새로 재기]</a:t>
+            </a:r>
+          </a:p>
+        </p:txBody>
+      </p:sp>
+      <p:sp>
+        <p:nvSpPr>
+          <p:cNvPr id="10" name="TextBox 9"/>
+          <p:cNvSpPr txBox="1"/>
+          <p:nvPr/>
+        </p:nvSpPr>
+        <p:spPr>
+          <a:xfrm>
+            <a:off x="731520" y="1920240"/>
+            <a:ext cx="4983480" cy="2194560"/>
+          </a:xfrm>
+          <a:prstGeom prst="rect">
+            <a:avLst/>
+          </a:prstGeom>
+          <a:noFill/>
+        </p:spPr>
+        <p:txBody>
+          <a:bodyPr wrap="square">
+            <a:spAutoFit/>
+          </a:bodyPr>
+          <a:lstStyle/>
+          <a:p>
+            <a:pPr algn="l">
+              <a:lnSpc>
+                <a:spcPct val="135000"/>
+              </a:lnSpc>
+            </a:pPr>
+            <a:r>
+              <a:rPr sz="1200" b="0" i="0">
                 <a:solidFill>
                   <a:srgbClr val="23262B"/>
                 </a:solidFill>
                 <a:latin typeface="맑은 고딕"/>
               </a:rPr>
-              <a:t>➕ 새 콘텐츠 → 🧵 킷 고르기</a:t>
-            </a:r>
-          </a:p>
-        </p:txBody>
-      </p:sp>
-      <p:sp>
-        <p:nvSpPr>
-          <p:cNvPr id="12" name="TextBox 11"/>
-          <p:cNvSpPr txBox="1"/>
-          <p:nvPr/>
-        </p:nvSpPr>
-        <p:spPr>
-          <a:xfrm>
-            <a:off x="1188720" y="1755648"/>
-            <a:ext cx="10287000" cy="457200"/>
-          </a:xfrm>
-          <a:prstGeom prst="rect">
-            <a:avLst/>
-          </a:prstGeom>
-          <a:noFill/>
-        </p:spPr>
-        <p:txBody>
-          <a:bodyPr wrap="square">
-            <a:spAutoFit/>
-          </a:bodyPr>
-          <a:lstStyle/>
-          <a:p>
-            <a:pPr algn="l">
-              <a:lnSpc>
-                <a:spcPct val="120000"/>
-              </a:lnSpc>
-            </a:pPr>
-            <a:r>
-              <a:rPr sz="1150" b="0" i="0">
-                <a:solidFill>
-                  <a:srgbClr val="7A828E"/>
-                </a:solidFill>
-                <a:latin typeface="맑은 고딕"/>
-              </a:rPr>
-              <a:t>빈 초안이 만들어집니다(빈 초안이 있으면 재사용). 맨 위에서 이 글의 사업 분야 킷을 고르세요 — 다른 분야 킷을 고르면 그 분야 내용이 섞입니다.</a:t>
-            </a:r>
-          </a:p>
-        </p:txBody>
-      </p:sp>
-      <p:sp>
-        <p:nvSpPr>
-          <p:cNvPr id="13" name="Rectangle 12"/>
+              <a:t>키워드 목록은 그대로 두고 만료된 검색량·경쟁도만 다시 잽니다. 살아 있는 값은 캐시에서 읽어 호출 0회 — 과금되는 것은 만료분뿐입니다. 4단계 [적용] 직후에는 누를 필요가 없습니다(버튼이 '전부 최신 · 0회'로 잠겨 있음).</a:t>
+            </a:r>
+          </a:p>
+        </p:txBody>
+      </p:sp>
+      <p:sp>
+        <p:nvSpPr>
+          <p:cNvPr id="11" name="Rectangle 10"/>
           <p:cNvSpPr/>
           <p:nvPr/>
         </p:nvSpPr>
         <p:spPr>
           <a:xfrm>
-            <a:off x="502920" y="2359152"/>
-            <a:ext cx="502920" cy="914400"/>
-          </a:xfrm>
-          <a:prstGeom prst="rect">
-            <a:avLst/>
-          </a:prstGeom>
-          <a:solidFill>
-            <a:srgbClr val="1B3A5C"/>
-          </a:solidFill>
-          <a:ln>
-            <a:noFill/>
-          </a:ln>
-          <a:effectLst/>
-        </p:spPr>
-        <p:style>
-          <a:lnRef idx="1">
-            <a:schemeClr val="accent1"/>
-          </a:lnRef>
-          <a:fillRef idx="3">
-            <a:schemeClr val="accent1"/>
-          </a:fillRef>
-          <a:effectRef idx="2">
-            <a:schemeClr val="accent1"/>
-          </a:effectRef>
-          <a:fontRef idx="minor">
-            <a:schemeClr val="lt1"/>
-          </a:fontRef>
-        </p:style>
-        <p:txBody>
-          <a:bodyPr rtlCol="0" anchor="ctr"/>
-          <a:lstStyle/>
-          <a:p>
-            <a:pPr algn="ctr"/>
-          </a:p>
-        </p:txBody>
-      </p:sp>
-      <p:sp>
-        <p:nvSpPr>
-          <p:cNvPr id="14" name="TextBox 13"/>
-          <p:cNvSpPr txBox="1"/>
-          <p:nvPr/>
-        </p:nvSpPr>
-        <p:spPr>
-          <a:xfrm>
-            <a:off x="502920" y="2359152"/>
-            <a:ext cx="502920" cy="914400"/>
-          </a:xfrm>
-          <a:prstGeom prst="rect">
-            <a:avLst/>
-          </a:prstGeom>
-          <a:noFill/>
-        </p:spPr>
-        <p:txBody>
-          <a:bodyPr wrap="square">
-            <a:spAutoFit/>
-          </a:bodyPr>
-          <a:lstStyle/>
-          <a:p>
-            <a:pPr algn="ctr">
-              <a:lnSpc>
-                <a:spcPct val="100000"/>
-              </a:lnSpc>
-            </a:pPr>
-            <a:r>
-              <a:rPr sz="1900" b="1" i="0">
-                <a:solidFill>
-                  <a:srgbClr val="FFFFFF"/>
-                </a:solidFill>
-                <a:latin typeface="맑은 고딕"/>
-              </a:rPr>
-              <a:t>2</a:t>
-            </a:r>
-          </a:p>
-        </p:txBody>
-      </p:sp>
-      <p:sp>
-        <p:nvSpPr>
-          <p:cNvPr id="15" name="Rectangle 14"/>
-          <p:cNvSpPr/>
-          <p:nvPr/>
-        </p:nvSpPr>
-        <p:spPr>
-          <a:xfrm>
-            <a:off x="1005840" y="2359152"/>
-            <a:ext cx="10652760" cy="914400"/>
+            <a:off x="6263640" y="1371600"/>
+            <a:ext cx="5440680" cy="2926080"/>
           </a:xfrm>
           <a:prstGeom prst="rect">
             <a:avLst/>
@@ -8727,14 +8402,14 @@
       </p:sp>
       <p:sp>
         <p:nvSpPr>
-          <p:cNvPr id="16" name="TextBox 15"/>
-          <p:cNvSpPr txBox="1"/>
-          <p:nvPr/>
-        </p:nvSpPr>
-        <p:spPr>
-          <a:xfrm>
-            <a:off x="1188720" y="2432304"/>
-            <a:ext cx="10287000" cy="320040"/>
+          <p:cNvPr id="12" name="TextBox 11"/>
+          <p:cNvSpPr txBox="1"/>
+          <p:nvPr/>
+        </p:nvSpPr>
+        <p:spPr>
+          <a:xfrm>
+            <a:off x="6492240" y="1508760"/>
+            <a:ext cx="4983480" cy="365760"/>
           </a:xfrm>
           <a:prstGeom prst="rect">
             <a:avLst/>
@@ -8753,72 +8428,72 @@
               </a:lnSpc>
             </a:pPr>
             <a:r>
-              <a:rPr sz="1350" b="1" i="0">
+              <a:rPr sz="1400" b="1" i="0">
+                <a:solidFill>
+                  <a:srgbClr val="1B3A5C"/>
+                </a:solidFill>
+                <a:latin typeface="맑은 고딕"/>
+              </a:rPr>
+              <a:t>분기 — 🔑 SEO 키워드 새로 고르기</a:t>
+            </a:r>
+          </a:p>
+        </p:txBody>
+      </p:sp>
+      <p:sp>
+        <p:nvSpPr>
+          <p:cNvPr id="13" name="TextBox 12"/>
+          <p:cNvSpPr txBox="1"/>
+          <p:nvPr/>
+        </p:nvSpPr>
+        <p:spPr>
+          <a:xfrm>
+            <a:off x="6492240" y="1920240"/>
+            <a:ext cx="4983480" cy="2194560"/>
+          </a:xfrm>
+          <a:prstGeom prst="rect">
+            <a:avLst/>
+          </a:prstGeom>
+          <a:noFill/>
+        </p:spPr>
+        <p:txBody>
+          <a:bodyPr wrap="square">
+            <a:spAutoFit/>
+          </a:bodyPr>
+          <a:lstStyle/>
+          <a:p>
+            <a:pPr algn="l">
+              <a:lnSpc>
+                <a:spcPct val="135000"/>
+              </a:lnSpc>
+            </a:pPr>
+            <a:r>
+              <a:rPr sz="1200" b="0" i="0">
                 <a:solidFill>
                   <a:srgbClr val="23262B"/>
                 </a:solidFill>
                 <a:latin typeface="맑은 고딕"/>
               </a:rPr>
-              <a:t>담당자 메모 작성</a:t>
-            </a:r>
-          </a:p>
-        </p:txBody>
-      </p:sp>
-      <p:sp>
-        <p:nvSpPr>
-          <p:cNvPr id="17" name="TextBox 16"/>
-          <p:cNvSpPr txBox="1"/>
-          <p:nvPr/>
-        </p:nvSpPr>
-        <p:spPr>
-          <a:xfrm>
-            <a:off x="1188720" y="2743200"/>
-            <a:ext cx="10287000" cy="457200"/>
-          </a:xfrm>
-          <a:prstGeom prst="rect">
-            <a:avLst/>
-          </a:prstGeom>
-          <a:noFill/>
-        </p:spPr>
-        <p:txBody>
-          <a:bodyPr wrap="square">
-            <a:spAutoFit/>
-          </a:bodyPr>
-          <a:lstStyle/>
-          <a:p>
-            <a:pPr algn="l">
-              <a:lnSpc>
-                <a:spcPct val="120000"/>
-              </a:lnSpc>
-            </a:pPr>
-            <a:r>
-              <a:rPr sz="1150" b="0" i="0">
-                <a:solidFill>
-                  <a:srgbClr val="7A828E"/>
-                </a:solidFill>
-                <a:latin typeface="맑은 고딕"/>
-              </a:rPr>
-              <a:t>'초안의 씨앗'. 현장 일화·고객 반응을 자유롭게 — 예: '가발창업교육 5기 모집, ATUM 시연에 40대 관심 집중'.</a:t>
-            </a:r>
-          </a:p>
-        </p:txBody>
-      </p:sp>
-      <p:sp>
-        <p:nvSpPr>
-          <p:cNvPr id="18" name="Rectangle 17"/>
+              <a:t>씨앗부터 다시 발굴해 키워드 목록 자체를 교체합니다. 조사할 후보 수(기본 100개)가 곧 최대 유료 호출 수 — 넓힐수록 좋은 키워드를 찾을 확률이 오릅니다.</a:t>
+            </a:r>
+          </a:p>
+        </p:txBody>
+      </p:sp>
+      <p:sp>
+        <p:nvSpPr>
+          <p:cNvPr id="14" name="Rectangle 13"/>
           <p:cNvSpPr/>
           <p:nvPr/>
         </p:nvSpPr>
         <p:spPr>
           <a:xfrm>
-            <a:off x="502920" y="3346704"/>
-            <a:ext cx="502920" cy="914400"/>
+            <a:off x="502920" y="4526280"/>
+            <a:ext cx="11155680" cy="1600200"/>
           </a:xfrm>
           <a:prstGeom prst="rect">
             <a:avLst/>
           </a:prstGeom>
           <a:solidFill>
-            <a:srgbClr val="1B3A5C"/>
+            <a:srgbClr val="F5EDD7"/>
           </a:solidFill>
           <a:ln>
             <a:noFill/>
@@ -8849,97 +8524,53 @@
       </p:sp>
       <p:sp>
         <p:nvSpPr>
-          <p:cNvPr id="19" name="TextBox 18"/>
-          <p:cNvSpPr txBox="1"/>
-          <p:nvPr/>
-        </p:nvSpPr>
-        <p:spPr>
-          <a:xfrm>
-            <a:off x="502920" y="3346704"/>
-            <a:ext cx="502920" cy="914400"/>
-          </a:xfrm>
-          <a:prstGeom prst="rect">
-            <a:avLst/>
-          </a:prstGeom>
-          <a:noFill/>
-        </p:spPr>
-        <p:txBody>
-          <a:bodyPr wrap="square">
-            <a:spAutoFit/>
-          </a:bodyPr>
-          <a:lstStyle/>
-          <a:p>
-            <a:pPr algn="ctr">
+          <p:cNvPr id="15" name="TextBox 14"/>
+          <p:cNvSpPr txBox="1"/>
+          <p:nvPr/>
+        </p:nvSpPr>
+        <p:spPr>
+          <a:xfrm>
+            <a:off x="777240" y="4663440"/>
+            <a:ext cx="10607040" cy="365760"/>
+          </a:xfrm>
+          <a:prstGeom prst="rect">
+            <a:avLst/>
+          </a:prstGeom>
+          <a:noFill/>
+        </p:spPr>
+        <p:txBody>
+          <a:bodyPr wrap="square">
+            <a:spAutoFit/>
+          </a:bodyPr>
+          <a:lstStyle/>
+          <a:p>
+            <a:pPr algn="l">
               <a:lnSpc>
                 <a:spcPct val="100000"/>
               </a:lnSpc>
             </a:pPr>
             <a:r>
-              <a:rPr sz="1900" b="1" i="0">
-                <a:solidFill>
-                  <a:srgbClr val="FFFFFF"/>
-                </a:solidFill>
-                <a:latin typeface="맑은 고딕"/>
-              </a:rPr>
-              <a:t>3</a:t>
-            </a:r>
-          </a:p>
-        </p:txBody>
-      </p:sp>
-      <p:sp>
-        <p:nvSpPr>
-          <p:cNvPr id="20" name="Rectangle 19"/>
-          <p:cNvSpPr/>
-          <p:nvPr/>
-        </p:nvSpPr>
-        <p:spPr>
-          <a:xfrm>
-            <a:off x="1005840" y="3346704"/>
-            <a:ext cx="10652760" cy="914400"/>
-          </a:xfrm>
-          <a:prstGeom prst="rect">
-            <a:avLst/>
-          </a:prstGeom>
-          <a:solidFill>
-            <a:srgbClr val="FFFFFF"/>
-          </a:solidFill>
-          <a:ln>
-            <a:noFill/>
-          </a:ln>
-          <a:effectLst/>
-        </p:spPr>
-        <p:style>
-          <a:lnRef idx="1">
-            <a:schemeClr val="accent1"/>
-          </a:lnRef>
-          <a:fillRef idx="3">
-            <a:schemeClr val="accent1"/>
-          </a:fillRef>
-          <a:effectRef idx="2">
-            <a:schemeClr val="accent1"/>
-          </a:effectRef>
-          <a:fontRef idx="minor">
-            <a:schemeClr val="lt1"/>
-          </a:fontRef>
-        </p:style>
-        <p:txBody>
-          <a:bodyPr rtlCol="0" anchor="ctr"/>
-          <a:lstStyle/>
-          <a:p>
-            <a:pPr algn="ctr"/>
-          </a:p>
-        </p:txBody>
-      </p:sp>
-      <p:sp>
-        <p:nvSpPr>
-          <p:cNvPr id="21" name="TextBox 20"/>
-          <p:cNvSpPr txBox="1"/>
-          <p:nvPr/>
-        </p:nvSpPr>
-        <p:spPr>
-          <a:xfrm>
-            <a:off x="1188720" y="3419856"/>
-            <a:ext cx="10287000" cy="320040"/>
+              <a:rPr sz="1400" b="1" i="0">
+                <a:solidFill>
+                  <a:srgbClr val="C0392B"/>
+                </a:solidFill>
+                <a:latin typeface="맑은 고딕"/>
+              </a:rPr>
+              <a:t>⚠️ 만료는 조용히 일어납니다</a:t>
+            </a:r>
+          </a:p>
+        </p:txBody>
+      </p:sp>
+      <p:sp>
+        <p:nvSpPr>
+          <p:cNvPr id="16" name="TextBox 15"/>
+          <p:cNvSpPr txBox="1"/>
+          <p:nvPr/>
+        </p:nvSpPr>
+        <p:spPr>
+          <a:xfrm>
+            <a:off x="777240" y="5047488"/>
+            <a:ext cx="10607040" cy="914400"/>
           </a:xfrm>
           <a:prstGeom prst="rect">
             <a:avLst/>
@@ -8954,466 +8585,17 @@
           <a:p>
             <a:pPr algn="l">
               <a:lnSpc>
-                <a:spcPct val="100000"/>
-              </a:lnSpc>
-            </a:pPr>
-            <a:r>
-              <a:rPr sz="1350" b="1" i="0">
+                <a:spcPct val="130000"/>
+              </a:lnSpc>
+            </a:pPr>
+            <a:r>
+              <a:rPr sz="1200" b="0" i="0">
                 <a:solidFill>
                   <a:srgbClr val="23262B"/>
                 </a:solidFill>
                 <a:latin typeface="맑은 고딕"/>
               </a:rPr>
-              <a:t>공지·제품 정보 입력</a:t>
-            </a:r>
-          </a:p>
-        </p:txBody>
-      </p:sp>
-      <p:sp>
-        <p:nvSpPr>
-          <p:cNvPr id="22" name="TextBox 21"/>
-          <p:cNvSpPr txBox="1"/>
-          <p:nvPr/>
-        </p:nvSpPr>
-        <p:spPr>
-          <a:xfrm>
-            <a:off x="1188720" y="3730752"/>
-            <a:ext cx="10287000" cy="457200"/>
-          </a:xfrm>
-          <a:prstGeom prst="rect">
-            <a:avLst/>
-          </a:prstGeom>
-          <a:noFill/>
-        </p:spPr>
-        <p:txBody>
-          <a:bodyPr wrap="square">
-            <a:spAutoFit/>
-          </a:bodyPr>
-          <a:lstStyle/>
-          <a:p>
-            <a:pPr algn="l">
-              <a:lnSpc>
-                <a:spcPct val="120000"/>
-              </a:lnSpc>
-            </a:pPr>
-            <a:r>
-              <a:rPr sz="1150" b="0" i="0">
-                <a:solidFill>
-                  <a:srgbClr val="7A828E"/>
-                </a:solidFill>
-                <a:latin typeface="맑은 고딕"/>
-              </a:rPr>
-              <a:t>날짜·가격·주문 방법처럼 AI가 지어내면 안 되는 값은 별도 칸에. 예: 장소 '서초 본점', 문의 '02-6396-3388'.</a:t>
-            </a:r>
-          </a:p>
-        </p:txBody>
-      </p:sp>
-      <p:sp>
-        <p:nvSpPr>
-          <p:cNvPr id="23" name="Rectangle 22"/>
-          <p:cNvSpPr/>
-          <p:nvPr/>
-        </p:nvSpPr>
-        <p:spPr>
-          <a:xfrm>
-            <a:off x="502920" y="4334256"/>
-            <a:ext cx="502920" cy="914400"/>
-          </a:xfrm>
-          <a:prstGeom prst="rect">
-            <a:avLst/>
-          </a:prstGeom>
-          <a:solidFill>
-            <a:srgbClr val="1B3A5C"/>
-          </a:solidFill>
-          <a:ln>
-            <a:noFill/>
-          </a:ln>
-          <a:effectLst/>
-        </p:spPr>
-        <p:style>
-          <a:lnRef idx="1">
-            <a:schemeClr val="accent1"/>
-          </a:lnRef>
-          <a:fillRef idx="3">
-            <a:schemeClr val="accent1"/>
-          </a:fillRef>
-          <a:effectRef idx="2">
-            <a:schemeClr val="accent1"/>
-          </a:effectRef>
-          <a:fontRef idx="minor">
-            <a:schemeClr val="lt1"/>
-          </a:fontRef>
-        </p:style>
-        <p:txBody>
-          <a:bodyPr rtlCol="0" anchor="ctr"/>
-          <a:lstStyle/>
-          <a:p>
-            <a:pPr algn="ctr"/>
-          </a:p>
-        </p:txBody>
-      </p:sp>
-      <p:sp>
-        <p:nvSpPr>
-          <p:cNvPr id="24" name="TextBox 23"/>
-          <p:cNvSpPr txBox="1"/>
-          <p:nvPr/>
-        </p:nvSpPr>
-        <p:spPr>
-          <a:xfrm>
-            <a:off x="502920" y="4334256"/>
-            <a:ext cx="502920" cy="914400"/>
-          </a:xfrm>
-          <a:prstGeom prst="rect">
-            <a:avLst/>
-          </a:prstGeom>
-          <a:noFill/>
-        </p:spPr>
-        <p:txBody>
-          <a:bodyPr wrap="square">
-            <a:spAutoFit/>
-          </a:bodyPr>
-          <a:lstStyle/>
-          <a:p>
-            <a:pPr algn="ctr">
-              <a:lnSpc>
-                <a:spcPct val="100000"/>
-              </a:lnSpc>
-            </a:pPr>
-            <a:r>
-              <a:rPr sz="1900" b="1" i="0">
-                <a:solidFill>
-                  <a:srgbClr val="FFFFFF"/>
-                </a:solidFill>
-                <a:latin typeface="맑은 고딕"/>
-              </a:rPr>
-              <a:t>4</a:t>
-            </a:r>
-          </a:p>
-        </p:txBody>
-      </p:sp>
-      <p:sp>
-        <p:nvSpPr>
-          <p:cNvPr id="25" name="Rectangle 24"/>
-          <p:cNvSpPr/>
-          <p:nvPr/>
-        </p:nvSpPr>
-        <p:spPr>
-          <a:xfrm>
-            <a:off x="1005840" y="4334256"/>
-            <a:ext cx="10652760" cy="914400"/>
-          </a:xfrm>
-          <a:prstGeom prst="rect">
-            <a:avLst/>
-          </a:prstGeom>
-          <a:solidFill>
-            <a:srgbClr val="FFFFFF"/>
-          </a:solidFill>
-          <a:ln>
-            <a:noFill/>
-          </a:ln>
-          <a:effectLst/>
-        </p:spPr>
-        <p:style>
-          <a:lnRef idx="1">
-            <a:schemeClr val="accent1"/>
-          </a:lnRef>
-          <a:fillRef idx="3">
-            <a:schemeClr val="accent1"/>
-          </a:fillRef>
-          <a:effectRef idx="2">
-            <a:schemeClr val="accent1"/>
-          </a:effectRef>
-          <a:fontRef idx="minor">
-            <a:schemeClr val="lt1"/>
-          </a:fontRef>
-        </p:style>
-        <p:txBody>
-          <a:bodyPr rtlCol="0" anchor="ctr"/>
-          <a:lstStyle/>
-          <a:p>
-            <a:pPr algn="ctr"/>
-          </a:p>
-        </p:txBody>
-      </p:sp>
-      <p:sp>
-        <p:nvSpPr>
-          <p:cNvPr id="26" name="TextBox 25"/>
-          <p:cNvSpPr txBox="1"/>
-          <p:nvPr/>
-        </p:nvSpPr>
-        <p:spPr>
-          <a:xfrm>
-            <a:off x="1188720" y="4407408"/>
-            <a:ext cx="10287000" cy="320040"/>
-          </a:xfrm>
-          <a:prstGeom prst="rect">
-            <a:avLst/>
-          </a:prstGeom>
-          <a:noFill/>
-        </p:spPr>
-        <p:txBody>
-          <a:bodyPr wrap="square">
-            <a:spAutoFit/>
-          </a:bodyPr>
-          <a:lstStyle/>
-          <a:p>
-            <a:pPr algn="l">
-              <a:lnSpc>
-                <a:spcPct val="100000"/>
-              </a:lnSpc>
-            </a:pPr>
-            <a:r>
-              <a:rPr sz="1350" b="1" i="0">
-                <a:solidFill>
-                  <a:srgbClr val="23262B"/>
-                </a:solidFill>
-                <a:latin typeface="맑은 고딕"/>
-              </a:rPr>
-              <a:t>사진 첨부 → 🪄 초안 생성</a:t>
-            </a:r>
-          </a:p>
-        </p:txBody>
-      </p:sp>
-      <p:sp>
-        <p:nvSpPr>
-          <p:cNvPr id="27" name="TextBox 26"/>
-          <p:cNvSpPr txBox="1"/>
-          <p:nvPr/>
-        </p:nvSpPr>
-        <p:spPr>
-          <a:xfrm>
-            <a:off x="1188720" y="4718304"/>
-            <a:ext cx="10287000" cy="457200"/>
-          </a:xfrm>
-          <a:prstGeom prst="rect">
-            <a:avLst/>
-          </a:prstGeom>
-          <a:noFill/>
-        </p:spPr>
-        <p:txBody>
-          <a:bodyPr wrap="square">
-            <a:spAutoFit/>
-          </a:bodyPr>
-          <a:lstStyle/>
-          <a:p>
-            <a:pPr algn="l">
-              <a:lnSpc>
-                <a:spcPct val="120000"/>
-              </a:lnSpc>
-            </a:pPr>
-            <a:r>
-              <a:rPr sz="1150" b="0" i="0">
-                <a:solidFill>
-                  <a:srgbClr val="7A828E"/>
-                </a:solidFill>
-                <a:latin typeface="맑은 고딕"/>
-              </a:rPr>
-              <a:t>네이버 본문·인스타 캡션·X 스레드·쇼츠 자막이 한 번에 생성됩니다. 같은 사진 재사용은 분석 토큰 0.</a:t>
-            </a:r>
-          </a:p>
-        </p:txBody>
-      </p:sp>
-      <p:sp>
-        <p:nvSpPr>
-          <p:cNvPr id="28" name="Rectangle 27"/>
-          <p:cNvSpPr/>
-          <p:nvPr/>
-        </p:nvSpPr>
-        <p:spPr>
-          <a:xfrm>
-            <a:off x="502920" y="5321808"/>
-            <a:ext cx="502920" cy="914400"/>
-          </a:xfrm>
-          <a:prstGeom prst="rect">
-            <a:avLst/>
-          </a:prstGeom>
-          <a:solidFill>
-            <a:srgbClr val="1B3A5C"/>
-          </a:solidFill>
-          <a:ln>
-            <a:noFill/>
-          </a:ln>
-          <a:effectLst/>
-        </p:spPr>
-        <p:style>
-          <a:lnRef idx="1">
-            <a:schemeClr val="accent1"/>
-          </a:lnRef>
-          <a:fillRef idx="3">
-            <a:schemeClr val="accent1"/>
-          </a:fillRef>
-          <a:effectRef idx="2">
-            <a:schemeClr val="accent1"/>
-          </a:effectRef>
-          <a:fontRef idx="minor">
-            <a:schemeClr val="lt1"/>
-          </a:fontRef>
-        </p:style>
-        <p:txBody>
-          <a:bodyPr rtlCol="0" anchor="ctr"/>
-          <a:lstStyle/>
-          <a:p>
-            <a:pPr algn="ctr"/>
-          </a:p>
-        </p:txBody>
-      </p:sp>
-      <p:sp>
-        <p:nvSpPr>
-          <p:cNvPr id="29" name="TextBox 28"/>
-          <p:cNvSpPr txBox="1"/>
-          <p:nvPr/>
-        </p:nvSpPr>
-        <p:spPr>
-          <a:xfrm>
-            <a:off x="502920" y="5321808"/>
-            <a:ext cx="502920" cy="914400"/>
-          </a:xfrm>
-          <a:prstGeom prst="rect">
-            <a:avLst/>
-          </a:prstGeom>
-          <a:noFill/>
-        </p:spPr>
-        <p:txBody>
-          <a:bodyPr wrap="square">
-            <a:spAutoFit/>
-          </a:bodyPr>
-          <a:lstStyle/>
-          <a:p>
-            <a:pPr algn="ctr">
-              <a:lnSpc>
-                <a:spcPct val="100000"/>
-              </a:lnSpc>
-            </a:pPr>
-            <a:r>
-              <a:rPr sz="1900" b="1" i="0">
-                <a:solidFill>
-                  <a:srgbClr val="FFFFFF"/>
-                </a:solidFill>
-                <a:latin typeface="맑은 고딕"/>
-              </a:rPr>
-              <a:t>5</a:t>
-            </a:r>
-          </a:p>
-        </p:txBody>
-      </p:sp>
-      <p:sp>
-        <p:nvSpPr>
-          <p:cNvPr id="30" name="Rectangle 29"/>
-          <p:cNvSpPr/>
-          <p:nvPr/>
-        </p:nvSpPr>
-        <p:spPr>
-          <a:xfrm>
-            <a:off x="1005840" y="5321808"/>
-            <a:ext cx="10652760" cy="914400"/>
-          </a:xfrm>
-          <a:prstGeom prst="rect">
-            <a:avLst/>
-          </a:prstGeom>
-          <a:solidFill>
-            <a:srgbClr val="FFFFFF"/>
-          </a:solidFill>
-          <a:ln>
-            <a:noFill/>
-          </a:ln>
-          <a:effectLst/>
-        </p:spPr>
-        <p:style>
-          <a:lnRef idx="1">
-            <a:schemeClr val="accent1"/>
-          </a:lnRef>
-          <a:fillRef idx="3">
-            <a:schemeClr val="accent1"/>
-          </a:fillRef>
-          <a:effectRef idx="2">
-            <a:schemeClr val="accent1"/>
-          </a:effectRef>
-          <a:fontRef idx="minor">
-            <a:schemeClr val="lt1"/>
-          </a:fontRef>
-        </p:style>
-        <p:txBody>
-          <a:bodyPr rtlCol="0" anchor="ctr"/>
-          <a:lstStyle/>
-          <a:p>
-            <a:pPr algn="ctr"/>
-          </a:p>
-        </p:txBody>
-      </p:sp>
-      <p:sp>
-        <p:nvSpPr>
-          <p:cNvPr id="31" name="TextBox 30"/>
-          <p:cNvSpPr txBox="1"/>
-          <p:nvPr/>
-        </p:nvSpPr>
-        <p:spPr>
-          <a:xfrm>
-            <a:off x="1188720" y="5394960"/>
-            <a:ext cx="10287000" cy="320040"/>
-          </a:xfrm>
-          <a:prstGeom prst="rect">
-            <a:avLst/>
-          </a:prstGeom>
-          <a:noFill/>
-        </p:spPr>
-        <p:txBody>
-          <a:bodyPr wrap="square">
-            <a:spAutoFit/>
-          </a:bodyPr>
-          <a:lstStyle/>
-          <a:p>
-            <a:pPr algn="l">
-              <a:lnSpc>
-                <a:spcPct val="100000"/>
-              </a:lnSpc>
-            </a:pPr>
-            <a:r>
-              <a:rPr sz="1350" b="1" i="0">
-                <a:solidFill>
-                  <a:srgbClr val="23262B"/>
-                </a:solidFill>
-                <a:latin typeface="맑은 고딕"/>
-              </a:rPr>
-              <a:t>편집 → 시뮬레이터 확인</a:t>
-            </a:r>
-          </a:p>
-        </p:txBody>
-      </p:sp>
-      <p:sp>
-        <p:nvSpPr>
-          <p:cNvPr id="32" name="TextBox 31"/>
-          <p:cNvSpPr txBox="1"/>
-          <p:nvPr/>
-        </p:nvSpPr>
-        <p:spPr>
-          <a:xfrm>
-            <a:off x="1188720" y="5705856"/>
-            <a:ext cx="10287000" cy="457200"/>
-          </a:xfrm>
-          <a:prstGeom prst="rect">
-            <a:avLst/>
-          </a:prstGeom>
-          <a:noFill/>
-        </p:spPr>
-        <p:txBody>
-          <a:bodyPr wrap="square">
-            <a:spAutoFit/>
-          </a:bodyPr>
-          <a:lstStyle/>
-          <a:p>
-            <a:pPr algn="l">
-              <a:lnSpc>
-                <a:spcPct val="120000"/>
-              </a:lnSpc>
-            </a:pPr>
-            <a:r>
-              <a:rPr sz="1150" b="0" i="0">
-                <a:solidFill>
-                  <a:srgbClr val="7A828E"/>
-                </a:solidFill>
-                <a:latin typeface="맑은 고딕"/>
-              </a:rPr>
-              <a:t>4개 탭에서 직접 고치고, 우측에서 실제 레이아웃(인스타 125자 절단선·쇼츠 데드존 등)으로 검증.</a:t>
+              <a:t>에러도 멈춤도 없이 '전환 가중치'가 꺼지고 단순 등장 횟수로만 순위가 매겨집니다. 브랜드 킷·설정 화면에 '경쟁도 측정 만료' 경고가 뜨면 [숫자만 새로 재기]를 눌러주세요.</a:t>
             </a:r>
           </a:p>
         </p:txBody>
@@ -9566,7 +8748,7 @@
                 </a:solidFill>
                 <a:latin typeface="맑은 고딕"/>
               </a:rPr>
-              <a:t>③ 매일 쓰는 법 · 워크벤치 (2/2)</a:t>
+              <a:t>③ 매일 쓰는 법 · 워크벤치</a:t>
             </a:r>
           </a:p>
         </p:txBody>
@@ -9605,7 +8787,7 @@
                 </a:solidFill>
                 <a:latin typeface="맑은 고딕"/>
               </a:rPr>
-              <a:t>SNS 자동 검증 &amp; 다시 만들기</a:t>
+              <a:t>새 콘텐츠 만들기 — 5단계</a:t>
             </a:r>
           </a:p>
         </p:txBody>
@@ -9690,53 +8872,97 @@
       </p:sp>
       <p:sp>
         <p:nvSpPr>
-          <p:cNvPr id="8" name="TextBox 7"/>
-          <p:cNvSpPr txBox="1"/>
-          <p:nvPr/>
-        </p:nvSpPr>
-        <p:spPr>
-          <a:xfrm>
-            <a:off x="502920" y="1280160"/>
-            <a:ext cx="11155680" cy="365760"/>
-          </a:xfrm>
-          <a:prstGeom prst="rect">
-            <a:avLst/>
-          </a:prstGeom>
-          <a:noFill/>
-        </p:spPr>
-        <p:txBody>
-          <a:bodyPr wrap="square">
-            <a:spAutoFit/>
-          </a:bodyPr>
-          <a:lstStyle/>
-          <a:p>
-            <a:pPr algn="l">
+          <p:cNvPr id="8" name="Rectangle 7"/>
+          <p:cNvSpPr/>
+          <p:nvPr/>
+        </p:nvSpPr>
+        <p:spPr>
+          <a:xfrm>
+            <a:off x="502920" y="1371600"/>
+            <a:ext cx="502920" cy="914400"/>
+          </a:xfrm>
+          <a:prstGeom prst="rect">
+            <a:avLst/>
+          </a:prstGeom>
+          <a:solidFill>
+            <a:srgbClr val="1B3A5C"/>
+          </a:solidFill>
+          <a:ln>
+            <a:noFill/>
+          </a:ln>
+          <a:effectLst/>
+        </p:spPr>
+        <p:style>
+          <a:lnRef idx="1">
+            <a:schemeClr val="accent1"/>
+          </a:lnRef>
+          <a:fillRef idx="3">
+            <a:schemeClr val="accent1"/>
+          </a:fillRef>
+          <a:effectRef idx="2">
+            <a:schemeClr val="accent1"/>
+          </a:effectRef>
+          <a:fontRef idx="minor">
+            <a:schemeClr val="lt1"/>
+          </a:fontRef>
+        </p:style>
+        <p:txBody>
+          <a:bodyPr rtlCol="0" anchor="ctr"/>
+          <a:lstStyle/>
+          <a:p>
+            <a:pPr algn="ctr"/>
+          </a:p>
+        </p:txBody>
+      </p:sp>
+      <p:sp>
+        <p:nvSpPr>
+          <p:cNvPr id="9" name="TextBox 8"/>
+          <p:cNvSpPr txBox="1"/>
+          <p:nvPr/>
+        </p:nvSpPr>
+        <p:spPr>
+          <a:xfrm>
+            <a:off x="502920" y="1371600"/>
+            <a:ext cx="502920" cy="914400"/>
+          </a:xfrm>
+          <a:prstGeom prst="rect">
+            <a:avLst/>
+          </a:prstGeom>
+          <a:noFill/>
+        </p:spPr>
+        <p:txBody>
+          <a:bodyPr wrap="square">
+            <a:spAutoFit/>
+          </a:bodyPr>
+          <a:lstStyle/>
+          <a:p>
+            <a:pPr algn="ctr">
               <a:lnSpc>
                 <a:spcPct val="100000"/>
               </a:lnSpc>
             </a:pPr>
             <a:r>
-              <a:rPr sz="1300" b="0" i="0">
-                <a:solidFill>
-                  <a:srgbClr val="7A828E"/>
-                </a:solidFill>
-                <a:latin typeface="맑은 고딕"/>
-              </a:rPr>
-              <a:t>초안 생성 직후 인스타·X·쇼츠·발행 태그는 길이·해시태그·인증 표현을 자동으로 점검·정리합니다.</a:t>
-            </a:r>
-          </a:p>
-        </p:txBody>
-      </p:sp>
-      <p:sp>
-        <p:nvSpPr>
-          <p:cNvPr id="9" name="Rectangle 8"/>
+              <a:rPr sz="1900" b="1" i="0">
+                <a:solidFill>
+                  <a:srgbClr val="FFFFFF"/>
+                </a:solidFill>
+                <a:latin typeface="맑은 고딕"/>
+              </a:rPr>
+              <a:t>1</a:t>
+            </a:r>
+          </a:p>
+        </p:txBody>
+      </p:sp>
+      <p:sp>
+        <p:nvSpPr>
+          <p:cNvPr id="10" name="Rectangle 9"/>
           <p:cNvSpPr/>
           <p:nvPr/>
         </p:nvSpPr>
         <p:spPr>
           <a:xfrm>
-            <a:off x="502920" y="1828800"/>
-            <a:ext cx="5440680" cy="1737360"/>
+            <a:off x="1005840" y="1371600"/>
+            <a:ext cx="10652760" cy="914400"/>
           </a:xfrm>
           <a:prstGeom prst="rect">
             <a:avLst/>
@@ -9773,14 +8999,14 @@
       </p:sp>
       <p:sp>
         <p:nvSpPr>
-          <p:cNvPr id="10" name="TextBox 9"/>
-          <p:cNvSpPr txBox="1"/>
-          <p:nvPr/>
-        </p:nvSpPr>
-        <p:spPr>
-          <a:xfrm>
-            <a:off x="731520" y="2011680"/>
-            <a:ext cx="4983480" cy="320040"/>
+          <p:cNvPr id="11" name="TextBox 10"/>
+          <p:cNvSpPr txBox="1"/>
+          <p:nvPr/>
+        </p:nvSpPr>
+        <p:spPr>
+          <a:xfrm>
+            <a:off x="1188720" y="1444752"/>
+            <a:ext cx="10287000" cy="320040"/>
           </a:xfrm>
           <a:prstGeom prst="rect">
             <a:avLst/>
@@ -9799,88 +9025,149 @@
               </a:lnSpc>
             </a:pPr>
             <a:r>
-              <a:rPr sz="1400" b="1" i="0">
-                <a:solidFill>
-                  <a:srgbClr val="1B3A5C"/>
-                </a:solidFill>
-                <a:latin typeface="맑은 고딕"/>
-              </a:rPr>
-              <a:t>📸 인스타그램 · 🐦 X</a:t>
-            </a:r>
-          </a:p>
-        </p:txBody>
-      </p:sp>
-      <p:sp>
-        <p:nvSpPr>
-          <p:cNvPr id="11" name="TextBox 10"/>
-          <p:cNvSpPr txBox="1"/>
-          <p:nvPr/>
-        </p:nvSpPr>
-        <p:spPr>
-          <a:xfrm>
-            <a:off x="731520" y="2377440"/>
-            <a:ext cx="4983480" cy="1097280"/>
-          </a:xfrm>
-          <a:prstGeom prst="rect">
-            <a:avLst/>
-          </a:prstGeom>
-          <a:noFill/>
-        </p:spPr>
-        <p:txBody>
-          <a:bodyPr wrap="square">
-            <a:spAutoFit/>
-          </a:bodyPr>
-          <a:lstStyle/>
-          <a:p>
-            <a:pPr>
-              <a:lnSpc>
-                <a:spcPct val="125000"/>
-              </a:lnSpc>
-              <a:spcAft>
-                <a:spcPts val="800"/>
-              </a:spcAft>
-            </a:pPr>
-            <a:r>
-              <a:rPr sz="1200" b="0">
+              <a:rPr sz="1350" b="1" i="0">
                 <a:solidFill>
                   <a:srgbClr val="23262B"/>
                 </a:solidFill>
                 <a:latin typeface="맑은 고딕"/>
               </a:rPr>
-              <a:t>▪ '더보기' 전 노출 범위(앞 125자·최대 2줄) 초과 시 경고, 해시태그는 8~15개로 자동 보정.</a:t>
-            </a:r>
-          </a:p>
-          <a:p>
-            <a:pPr>
-              <a:lnSpc>
-                <a:spcPct val="125000"/>
-              </a:lnSpc>
-              <a:spcAft>
-                <a:spcPts val="800"/>
-              </a:spcAft>
-            </a:pPr>
-            <a:r>
-              <a:rPr sz="1200" b="0">
-                <a:solidFill>
-                  <a:srgbClr val="23262B"/>
-                </a:solidFill>
-                <a:latin typeface="맑은 고딕"/>
-              </a:rPr>
-              <a:t>▪ X는 한글 1자를 2로 세는 실제 기준(최대 280)으로 자동 분할 — 시뮬레이터도 같은 기준.</a:t>
-            </a:r>
-          </a:p>
-        </p:txBody>
-      </p:sp>
-      <p:sp>
-        <p:nvSpPr>
-          <p:cNvPr id="12" name="Rectangle 11"/>
+              <a:t>➕ 새 콘텐츠 → 🧵 킷 고르기</a:t>
+            </a:r>
+          </a:p>
+        </p:txBody>
+      </p:sp>
+      <p:sp>
+        <p:nvSpPr>
+          <p:cNvPr id="12" name="TextBox 11"/>
+          <p:cNvSpPr txBox="1"/>
+          <p:nvPr/>
+        </p:nvSpPr>
+        <p:spPr>
+          <a:xfrm>
+            <a:off x="1188720" y="1755648"/>
+            <a:ext cx="10287000" cy="457200"/>
+          </a:xfrm>
+          <a:prstGeom prst="rect">
+            <a:avLst/>
+          </a:prstGeom>
+          <a:noFill/>
+        </p:spPr>
+        <p:txBody>
+          <a:bodyPr wrap="square">
+            <a:spAutoFit/>
+          </a:bodyPr>
+          <a:lstStyle/>
+          <a:p>
+            <a:pPr algn="l">
+              <a:lnSpc>
+                <a:spcPct val="120000"/>
+              </a:lnSpc>
+            </a:pPr>
+            <a:r>
+              <a:rPr sz="1150" b="0" i="0">
+                <a:solidFill>
+                  <a:srgbClr val="7A828E"/>
+                </a:solidFill>
+                <a:latin typeface="맑은 고딕"/>
+              </a:rPr>
+              <a:t>빈 초안이 만들어집니다(빈 초안이 있으면 재사용). 맨 위에서 이 글의 사업 분야 킷을 고르세요 — 다른 분야 킷을 고르면 그 분야 내용이 섞입니다.</a:t>
+            </a:r>
+          </a:p>
+        </p:txBody>
+      </p:sp>
+      <p:sp>
+        <p:nvSpPr>
+          <p:cNvPr id="13" name="Rectangle 12"/>
           <p:cNvSpPr/>
           <p:nvPr/>
         </p:nvSpPr>
         <p:spPr>
           <a:xfrm>
-            <a:off x="6263640" y="1828800"/>
-            <a:ext cx="5440680" cy="1737360"/>
+            <a:off x="502920" y="2359152"/>
+            <a:ext cx="502920" cy="914400"/>
+          </a:xfrm>
+          <a:prstGeom prst="rect">
+            <a:avLst/>
+          </a:prstGeom>
+          <a:solidFill>
+            <a:srgbClr val="1B3A5C"/>
+          </a:solidFill>
+          <a:ln>
+            <a:noFill/>
+          </a:ln>
+          <a:effectLst/>
+        </p:spPr>
+        <p:style>
+          <a:lnRef idx="1">
+            <a:schemeClr val="accent1"/>
+          </a:lnRef>
+          <a:fillRef idx="3">
+            <a:schemeClr val="accent1"/>
+          </a:fillRef>
+          <a:effectRef idx="2">
+            <a:schemeClr val="accent1"/>
+          </a:effectRef>
+          <a:fontRef idx="minor">
+            <a:schemeClr val="lt1"/>
+          </a:fontRef>
+        </p:style>
+        <p:txBody>
+          <a:bodyPr rtlCol="0" anchor="ctr"/>
+          <a:lstStyle/>
+          <a:p>
+            <a:pPr algn="ctr"/>
+          </a:p>
+        </p:txBody>
+      </p:sp>
+      <p:sp>
+        <p:nvSpPr>
+          <p:cNvPr id="14" name="TextBox 13"/>
+          <p:cNvSpPr txBox="1"/>
+          <p:nvPr/>
+        </p:nvSpPr>
+        <p:spPr>
+          <a:xfrm>
+            <a:off x="502920" y="2359152"/>
+            <a:ext cx="502920" cy="914400"/>
+          </a:xfrm>
+          <a:prstGeom prst="rect">
+            <a:avLst/>
+          </a:prstGeom>
+          <a:noFill/>
+        </p:spPr>
+        <p:txBody>
+          <a:bodyPr wrap="square">
+            <a:spAutoFit/>
+          </a:bodyPr>
+          <a:lstStyle/>
+          <a:p>
+            <a:pPr algn="ctr">
+              <a:lnSpc>
+                <a:spcPct val="100000"/>
+              </a:lnSpc>
+            </a:pPr>
+            <a:r>
+              <a:rPr sz="1900" b="1" i="0">
+                <a:solidFill>
+                  <a:srgbClr val="FFFFFF"/>
+                </a:solidFill>
+                <a:latin typeface="맑은 고딕"/>
+              </a:rPr>
+              <a:t>2</a:t>
+            </a:r>
+          </a:p>
+        </p:txBody>
+      </p:sp>
+      <p:sp>
+        <p:nvSpPr>
+          <p:cNvPr id="15" name="Rectangle 14"/>
+          <p:cNvSpPr/>
+          <p:nvPr/>
+        </p:nvSpPr>
+        <p:spPr>
+          <a:xfrm>
+            <a:off x="1005840" y="2359152"/>
+            <a:ext cx="10652760" cy="914400"/>
           </a:xfrm>
           <a:prstGeom prst="rect">
             <a:avLst/>
@@ -9917,14 +9204,14 @@
       </p:sp>
       <p:sp>
         <p:nvSpPr>
-          <p:cNvPr id="13" name="TextBox 12"/>
-          <p:cNvSpPr txBox="1"/>
-          <p:nvPr/>
-        </p:nvSpPr>
-        <p:spPr>
-          <a:xfrm>
-            <a:off x="6492240" y="2011680"/>
-            <a:ext cx="4983480" cy="320040"/>
+          <p:cNvPr id="16" name="TextBox 15"/>
+          <p:cNvSpPr txBox="1"/>
+          <p:nvPr/>
+        </p:nvSpPr>
+        <p:spPr>
+          <a:xfrm>
+            <a:off x="1188720" y="2432304"/>
+            <a:ext cx="10287000" cy="320040"/>
           </a:xfrm>
           <a:prstGeom prst="rect">
             <a:avLst/>
@@ -9943,94 +9230,72 @@
               </a:lnSpc>
             </a:pPr>
             <a:r>
-              <a:rPr sz="1400" b="1" i="0">
-                <a:solidFill>
-                  <a:srgbClr val="1B3A5C"/>
-                </a:solidFill>
-                <a:latin typeface="맑은 고딕"/>
-              </a:rPr>
-              <a:t>🎬 쇼츠 · 🏷️ 발행 태그</a:t>
-            </a:r>
-          </a:p>
-        </p:txBody>
-      </p:sp>
-      <p:sp>
-        <p:nvSpPr>
-          <p:cNvPr id="14" name="TextBox 13"/>
-          <p:cNvSpPr txBox="1"/>
-          <p:nvPr/>
-        </p:nvSpPr>
-        <p:spPr>
-          <a:xfrm>
-            <a:off x="6492240" y="2377440"/>
-            <a:ext cx="4983480" cy="1097280"/>
-          </a:xfrm>
-          <a:prstGeom prst="rect">
-            <a:avLst/>
-          </a:prstGeom>
-          <a:noFill/>
-        </p:spPr>
-        <p:txBody>
-          <a:bodyPr wrap="square">
-            <a:spAutoFit/>
-          </a:bodyPr>
-          <a:lstStyle/>
-          <a:p>
-            <a:pPr>
-              <a:lnSpc>
-                <a:spcPct val="125000"/>
-              </a:lnSpc>
-              <a:spcAft>
-                <a:spcPts val="800"/>
-              </a:spcAft>
-            </a:pPr>
-            <a:r>
-              <a:rPr sz="1200" b="0">
+              <a:rPr sz="1350" b="1" i="0">
                 <a:solidFill>
                   <a:srgbClr val="23262B"/>
                 </a:solidFill>
                 <a:latin typeface="맑은 고딕"/>
               </a:rPr>
-              <a:t>▪ 컷 자막이 20자를 넘으면 경고하고, 제목에는 #shorts를 자동으로 붙입니다.</a:t>
-            </a:r>
-          </a:p>
-          <a:p>
-            <a:pPr>
-              <a:lnSpc>
-                <a:spcPct val="125000"/>
-              </a:lnSpc>
-              <a:spcAft>
-                <a:spcPts val="800"/>
-              </a:spcAft>
-            </a:pPr>
-            <a:r>
-              <a:rPr sz="1200" b="0">
-                <a:solidFill>
-                  <a:srgbClr val="23262B"/>
-                </a:solidFill>
-                <a:latin typeface="맑은 고딕"/>
-              </a:rPr>
-              <a:t>▪ 발행 태그는 7~12개로 정리하고, 모자라면 이 글의 타깃 키워드로 채웁니다.</a:t>
-            </a:r>
-          </a:p>
-        </p:txBody>
-      </p:sp>
-      <p:sp>
-        <p:nvSpPr>
-          <p:cNvPr id="15" name="Rectangle 14"/>
+              <a:t>담당자 메모 작성</a:t>
+            </a:r>
+          </a:p>
+        </p:txBody>
+      </p:sp>
+      <p:sp>
+        <p:nvSpPr>
+          <p:cNvPr id="17" name="TextBox 16"/>
+          <p:cNvSpPr txBox="1"/>
+          <p:nvPr/>
+        </p:nvSpPr>
+        <p:spPr>
+          <a:xfrm>
+            <a:off x="1188720" y="2743200"/>
+            <a:ext cx="10287000" cy="457200"/>
+          </a:xfrm>
+          <a:prstGeom prst="rect">
+            <a:avLst/>
+          </a:prstGeom>
+          <a:noFill/>
+        </p:spPr>
+        <p:txBody>
+          <a:bodyPr wrap="square">
+            <a:spAutoFit/>
+          </a:bodyPr>
+          <a:lstStyle/>
+          <a:p>
+            <a:pPr algn="l">
+              <a:lnSpc>
+                <a:spcPct val="120000"/>
+              </a:lnSpc>
+            </a:pPr>
+            <a:r>
+              <a:rPr sz="1150" b="0" i="0">
+                <a:solidFill>
+                  <a:srgbClr val="7A828E"/>
+                </a:solidFill>
+                <a:latin typeface="맑은 고딕"/>
+              </a:rPr>
+              <a:t>'초안의 씨앗'. 현장 일화·고객 반응을 자유롭게 — 예: '가발창업교육 5기 모집, ATUM 시연에 40대 관심 집중'.</a:t>
+            </a:r>
+          </a:p>
+        </p:txBody>
+      </p:sp>
+      <p:sp>
+        <p:nvSpPr>
+          <p:cNvPr id="18" name="Rectangle 17"/>
           <p:cNvSpPr/>
           <p:nvPr/>
         </p:nvSpPr>
         <p:spPr>
           <a:xfrm>
-            <a:off x="502920" y="3840480"/>
-            <a:ext cx="11155680" cy="1188720"/>
+            <a:off x="502920" y="3346704"/>
+            <a:ext cx="502920" cy="914400"/>
           </a:xfrm>
           <a:prstGeom prst="rect">
             <a:avLst/>
           </a:prstGeom>
           <a:solidFill>
-            <a:srgbClr val="F5EDD7"/>
+            <a:srgbClr val="1B3A5C"/>
           </a:solidFill>
           <a:ln>
             <a:noFill/>
@@ -10061,14 +9326,97 @@
       </p:sp>
       <p:sp>
         <p:nvSpPr>
-          <p:cNvPr id="16" name="TextBox 15"/>
-          <p:cNvSpPr txBox="1"/>
-          <p:nvPr/>
-        </p:nvSpPr>
-        <p:spPr>
-          <a:xfrm>
-            <a:off x="777240" y="4023360"/>
-            <a:ext cx="10607040" cy="365760"/>
+          <p:cNvPr id="19" name="TextBox 18"/>
+          <p:cNvSpPr txBox="1"/>
+          <p:nvPr/>
+        </p:nvSpPr>
+        <p:spPr>
+          <a:xfrm>
+            <a:off x="502920" y="3346704"/>
+            <a:ext cx="502920" cy="914400"/>
+          </a:xfrm>
+          <a:prstGeom prst="rect">
+            <a:avLst/>
+          </a:prstGeom>
+          <a:noFill/>
+        </p:spPr>
+        <p:txBody>
+          <a:bodyPr wrap="square">
+            <a:spAutoFit/>
+          </a:bodyPr>
+          <a:lstStyle/>
+          <a:p>
+            <a:pPr algn="ctr">
+              <a:lnSpc>
+                <a:spcPct val="100000"/>
+              </a:lnSpc>
+            </a:pPr>
+            <a:r>
+              <a:rPr sz="1900" b="1" i="0">
+                <a:solidFill>
+                  <a:srgbClr val="FFFFFF"/>
+                </a:solidFill>
+                <a:latin typeface="맑은 고딕"/>
+              </a:rPr>
+              <a:t>3</a:t>
+            </a:r>
+          </a:p>
+        </p:txBody>
+      </p:sp>
+      <p:sp>
+        <p:nvSpPr>
+          <p:cNvPr id="20" name="Rectangle 19"/>
+          <p:cNvSpPr/>
+          <p:nvPr/>
+        </p:nvSpPr>
+        <p:spPr>
+          <a:xfrm>
+            <a:off x="1005840" y="3346704"/>
+            <a:ext cx="10652760" cy="914400"/>
+          </a:xfrm>
+          <a:prstGeom prst="rect">
+            <a:avLst/>
+          </a:prstGeom>
+          <a:solidFill>
+            <a:srgbClr val="FFFFFF"/>
+          </a:solidFill>
+          <a:ln>
+            <a:noFill/>
+          </a:ln>
+          <a:effectLst/>
+        </p:spPr>
+        <p:style>
+          <a:lnRef idx="1">
+            <a:schemeClr val="accent1"/>
+          </a:lnRef>
+          <a:fillRef idx="3">
+            <a:schemeClr val="accent1"/>
+          </a:fillRef>
+          <a:effectRef idx="2">
+            <a:schemeClr val="accent1"/>
+          </a:effectRef>
+          <a:fontRef idx="minor">
+            <a:schemeClr val="lt1"/>
+          </a:fontRef>
+        </p:style>
+        <p:txBody>
+          <a:bodyPr rtlCol="0" anchor="ctr"/>
+          <a:lstStyle/>
+          <a:p>
+            <a:pPr algn="ctr"/>
+          </a:p>
+        </p:txBody>
+      </p:sp>
+      <p:sp>
+        <p:nvSpPr>
+          <p:cNvPr id="21" name="TextBox 20"/>
+          <p:cNvSpPr txBox="1"/>
+          <p:nvPr/>
+        </p:nvSpPr>
+        <p:spPr>
+          <a:xfrm>
+            <a:off x="1188720" y="3419856"/>
+            <a:ext cx="10287000" cy="320040"/>
           </a:xfrm>
           <a:prstGeom prst="rect">
             <a:avLst/>
@@ -10093,21 +9441,21 @@
                 </a:solidFill>
                 <a:latin typeface="맑은 고딕"/>
               </a:rPr>
-              <a:t>📣 본문을 고친 뒤에는</a:t>
-            </a:r>
-          </a:p>
-        </p:txBody>
-      </p:sp>
-      <p:sp>
-        <p:nvSpPr>
-          <p:cNvPr id="17" name="TextBox 16"/>
-          <p:cNvSpPr txBox="1"/>
-          <p:nvPr/>
-        </p:nvSpPr>
-        <p:spPr>
-          <a:xfrm>
-            <a:off x="777240" y="4434840"/>
-            <a:ext cx="10607040" cy="502920"/>
+              <a:t>공지·제품 정보 입력</a:t>
+            </a:r>
+          </a:p>
+        </p:txBody>
+      </p:sp>
+      <p:sp>
+        <p:nvSpPr>
+          <p:cNvPr id="22" name="TextBox 21"/>
+          <p:cNvSpPr txBox="1"/>
+          <p:nvPr/>
+        </p:nvSpPr>
+        <p:spPr>
+          <a:xfrm>
+            <a:off x="1188720" y="3730752"/>
+            <a:ext cx="10287000" cy="457200"/>
           </a:xfrm>
           <a:prstGeom prst="rect">
             <a:avLst/>
@@ -10122,17 +9470,427 @@
           <a:p>
             <a:pPr algn="l">
               <a:lnSpc>
-                <a:spcPct val="130000"/>
-              </a:lnSpc>
-            </a:pPr>
-            <a:r>
-              <a:rPr sz="1200" b="0" i="0">
+                <a:spcPct val="120000"/>
+              </a:lnSpc>
+            </a:pPr>
+            <a:r>
+              <a:rPr sz="1150" b="0" i="0">
+                <a:solidFill>
+                  <a:srgbClr val="7A828E"/>
+                </a:solidFill>
+                <a:latin typeface="맑은 고딕"/>
+              </a:rPr>
+              <a:t>날짜·가격·주문 방법처럼 AI가 지어내면 안 되는 값은 별도 칸에. 예: 장소 '서초 본점', 문의 '02-6396-3388'.</a:t>
+            </a:r>
+          </a:p>
+        </p:txBody>
+      </p:sp>
+      <p:sp>
+        <p:nvSpPr>
+          <p:cNvPr id="23" name="Rectangle 22"/>
+          <p:cNvSpPr/>
+          <p:nvPr/>
+        </p:nvSpPr>
+        <p:spPr>
+          <a:xfrm>
+            <a:off x="502920" y="4334256"/>
+            <a:ext cx="502920" cy="914400"/>
+          </a:xfrm>
+          <a:prstGeom prst="rect">
+            <a:avLst/>
+          </a:prstGeom>
+          <a:solidFill>
+            <a:srgbClr val="1B3A5C"/>
+          </a:solidFill>
+          <a:ln>
+            <a:noFill/>
+          </a:ln>
+          <a:effectLst/>
+        </p:spPr>
+        <p:style>
+          <a:lnRef idx="1">
+            <a:schemeClr val="accent1"/>
+          </a:lnRef>
+          <a:fillRef idx="3">
+            <a:schemeClr val="accent1"/>
+          </a:fillRef>
+          <a:effectRef idx="2">
+            <a:schemeClr val="accent1"/>
+          </a:effectRef>
+          <a:fontRef idx="minor">
+            <a:schemeClr val="lt1"/>
+          </a:fontRef>
+        </p:style>
+        <p:txBody>
+          <a:bodyPr rtlCol="0" anchor="ctr"/>
+          <a:lstStyle/>
+          <a:p>
+            <a:pPr algn="ctr"/>
+          </a:p>
+        </p:txBody>
+      </p:sp>
+      <p:sp>
+        <p:nvSpPr>
+          <p:cNvPr id="24" name="TextBox 23"/>
+          <p:cNvSpPr txBox="1"/>
+          <p:nvPr/>
+        </p:nvSpPr>
+        <p:spPr>
+          <a:xfrm>
+            <a:off x="502920" y="4334256"/>
+            <a:ext cx="502920" cy="914400"/>
+          </a:xfrm>
+          <a:prstGeom prst="rect">
+            <a:avLst/>
+          </a:prstGeom>
+          <a:noFill/>
+        </p:spPr>
+        <p:txBody>
+          <a:bodyPr wrap="square">
+            <a:spAutoFit/>
+          </a:bodyPr>
+          <a:lstStyle/>
+          <a:p>
+            <a:pPr algn="ctr">
+              <a:lnSpc>
+                <a:spcPct val="100000"/>
+              </a:lnSpc>
+            </a:pPr>
+            <a:r>
+              <a:rPr sz="1900" b="1" i="0">
+                <a:solidFill>
+                  <a:srgbClr val="FFFFFF"/>
+                </a:solidFill>
+                <a:latin typeface="맑은 고딕"/>
+              </a:rPr>
+              <a:t>4</a:t>
+            </a:r>
+          </a:p>
+        </p:txBody>
+      </p:sp>
+      <p:sp>
+        <p:nvSpPr>
+          <p:cNvPr id="25" name="Rectangle 24"/>
+          <p:cNvSpPr/>
+          <p:nvPr/>
+        </p:nvSpPr>
+        <p:spPr>
+          <a:xfrm>
+            <a:off x="1005840" y="4334256"/>
+            <a:ext cx="10652760" cy="914400"/>
+          </a:xfrm>
+          <a:prstGeom prst="rect">
+            <a:avLst/>
+          </a:prstGeom>
+          <a:solidFill>
+            <a:srgbClr val="FFFFFF"/>
+          </a:solidFill>
+          <a:ln>
+            <a:noFill/>
+          </a:ln>
+          <a:effectLst/>
+        </p:spPr>
+        <p:style>
+          <a:lnRef idx="1">
+            <a:schemeClr val="accent1"/>
+          </a:lnRef>
+          <a:fillRef idx="3">
+            <a:schemeClr val="accent1"/>
+          </a:fillRef>
+          <a:effectRef idx="2">
+            <a:schemeClr val="accent1"/>
+          </a:effectRef>
+          <a:fontRef idx="minor">
+            <a:schemeClr val="lt1"/>
+          </a:fontRef>
+        </p:style>
+        <p:txBody>
+          <a:bodyPr rtlCol="0" anchor="ctr"/>
+          <a:lstStyle/>
+          <a:p>
+            <a:pPr algn="ctr"/>
+          </a:p>
+        </p:txBody>
+      </p:sp>
+      <p:sp>
+        <p:nvSpPr>
+          <p:cNvPr id="26" name="TextBox 25"/>
+          <p:cNvSpPr txBox="1"/>
+          <p:nvPr/>
+        </p:nvSpPr>
+        <p:spPr>
+          <a:xfrm>
+            <a:off x="1188720" y="4407408"/>
+            <a:ext cx="10287000" cy="320040"/>
+          </a:xfrm>
+          <a:prstGeom prst="rect">
+            <a:avLst/>
+          </a:prstGeom>
+          <a:noFill/>
+        </p:spPr>
+        <p:txBody>
+          <a:bodyPr wrap="square">
+            <a:spAutoFit/>
+          </a:bodyPr>
+          <a:lstStyle/>
+          <a:p>
+            <a:pPr algn="l">
+              <a:lnSpc>
+                <a:spcPct val="100000"/>
+              </a:lnSpc>
+            </a:pPr>
+            <a:r>
+              <a:rPr sz="1350" b="1" i="0">
                 <a:solidFill>
                   <a:srgbClr val="23262B"/>
                 </a:solidFill>
                 <a:latin typeface="맑은 고딕"/>
               </a:rPr>
-              <a:t>인스타·X·쇼츠·발행 태그는 '수정 전 본문 기준'으로 표시됩니다 — 워크벤치의 [📣 SNS 3채널 다시 만들기]를 눌러 최신 본문에 맞게 다시 만드세요. 인증 범위를 넘겨 쓴 문장은 자동 삭제되고, 맞춤법은 세 채널을 한 번에 교정합니다.</a:t>
+              <a:t>사진 첨부 → 🪄 초안 생성</a:t>
+            </a:r>
+          </a:p>
+        </p:txBody>
+      </p:sp>
+      <p:sp>
+        <p:nvSpPr>
+          <p:cNvPr id="27" name="TextBox 26"/>
+          <p:cNvSpPr txBox="1"/>
+          <p:nvPr/>
+        </p:nvSpPr>
+        <p:spPr>
+          <a:xfrm>
+            <a:off x="1188720" y="4718304"/>
+            <a:ext cx="10287000" cy="457200"/>
+          </a:xfrm>
+          <a:prstGeom prst="rect">
+            <a:avLst/>
+          </a:prstGeom>
+          <a:noFill/>
+        </p:spPr>
+        <p:txBody>
+          <a:bodyPr wrap="square">
+            <a:spAutoFit/>
+          </a:bodyPr>
+          <a:lstStyle/>
+          <a:p>
+            <a:pPr algn="l">
+              <a:lnSpc>
+                <a:spcPct val="120000"/>
+              </a:lnSpc>
+            </a:pPr>
+            <a:r>
+              <a:rPr sz="1150" b="0" i="0">
+                <a:solidFill>
+                  <a:srgbClr val="7A828E"/>
+                </a:solidFill>
+                <a:latin typeface="맑은 고딕"/>
+              </a:rPr>
+              <a:t>네이버 본문·인스타 캡션·X 스레드·쇼츠 자막이 한 번에 생성됩니다. 같은 사진 재사용은 분석 토큰 0.</a:t>
+            </a:r>
+          </a:p>
+        </p:txBody>
+      </p:sp>
+      <p:sp>
+        <p:nvSpPr>
+          <p:cNvPr id="28" name="Rectangle 27"/>
+          <p:cNvSpPr/>
+          <p:nvPr/>
+        </p:nvSpPr>
+        <p:spPr>
+          <a:xfrm>
+            <a:off x="502920" y="5321808"/>
+            <a:ext cx="502920" cy="914400"/>
+          </a:xfrm>
+          <a:prstGeom prst="rect">
+            <a:avLst/>
+          </a:prstGeom>
+          <a:solidFill>
+            <a:srgbClr val="1B3A5C"/>
+          </a:solidFill>
+          <a:ln>
+            <a:noFill/>
+          </a:ln>
+          <a:effectLst/>
+        </p:spPr>
+        <p:style>
+          <a:lnRef idx="1">
+            <a:schemeClr val="accent1"/>
+          </a:lnRef>
+          <a:fillRef idx="3">
+            <a:schemeClr val="accent1"/>
+          </a:fillRef>
+          <a:effectRef idx="2">
+            <a:schemeClr val="accent1"/>
+          </a:effectRef>
+          <a:fontRef idx="minor">
+            <a:schemeClr val="lt1"/>
+          </a:fontRef>
+        </p:style>
+        <p:txBody>
+          <a:bodyPr rtlCol="0" anchor="ctr"/>
+          <a:lstStyle/>
+          <a:p>
+            <a:pPr algn="ctr"/>
+          </a:p>
+        </p:txBody>
+      </p:sp>
+      <p:sp>
+        <p:nvSpPr>
+          <p:cNvPr id="29" name="TextBox 28"/>
+          <p:cNvSpPr txBox="1"/>
+          <p:nvPr/>
+        </p:nvSpPr>
+        <p:spPr>
+          <a:xfrm>
+            <a:off x="502920" y="5321808"/>
+            <a:ext cx="502920" cy="914400"/>
+          </a:xfrm>
+          <a:prstGeom prst="rect">
+            <a:avLst/>
+          </a:prstGeom>
+          <a:noFill/>
+        </p:spPr>
+        <p:txBody>
+          <a:bodyPr wrap="square">
+            <a:spAutoFit/>
+          </a:bodyPr>
+          <a:lstStyle/>
+          <a:p>
+            <a:pPr algn="ctr">
+              <a:lnSpc>
+                <a:spcPct val="100000"/>
+              </a:lnSpc>
+            </a:pPr>
+            <a:r>
+              <a:rPr sz="1900" b="1" i="0">
+                <a:solidFill>
+                  <a:srgbClr val="FFFFFF"/>
+                </a:solidFill>
+                <a:latin typeface="맑은 고딕"/>
+              </a:rPr>
+              <a:t>5</a:t>
+            </a:r>
+          </a:p>
+        </p:txBody>
+      </p:sp>
+      <p:sp>
+        <p:nvSpPr>
+          <p:cNvPr id="30" name="Rectangle 29"/>
+          <p:cNvSpPr/>
+          <p:nvPr/>
+        </p:nvSpPr>
+        <p:spPr>
+          <a:xfrm>
+            <a:off x="1005840" y="5321808"/>
+            <a:ext cx="10652760" cy="914400"/>
+          </a:xfrm>
+          <a:prstGeom prst="rect">
+            <a:avLst/>
+          </a:prstGeom>
+          <a:solidFill>
+            <a:srgbClr val="FFFFFF"/>
+          </a:solidFill>
+          <a:ln>
+            <a:noFill/>
+          </a:ln>
+          <a:effectLst/>
+        </p:spPr>
+        <p:style>
+          <a:lnRef idx="1">
+            <a:schemeClr val="accent1"/>
+          </a:lnRef>
+          <a:fillRef idx="3">
+            <a:schemeClr val="accent1"/>
+          </a:fillRef>
+          <a:effectRef idx="2">
+            <a:schemeClr val="accent1"/>
+          </a:effectRef>
+          <a:fontRef idx="minor">
+            <a:schemeClr val="lt1"/>
+          </a:fontRef>
+        </p:style>
+        <p:txBody>
+          <a:bodyPr rtlCol="0" anchor="ctr"/>
+          <a:lstStyle/>
+          <a:p>
+            <a:pPr algn="ctr"/>
+          </a:p>
+        </p:txBody>
+      </p:sp>
+      <p:sp>
+        <p:nvSpPr>
+          <p:cNvPr id="31" name="TextBox 30"/>
+          <p:cNvSpPr txBox="1"/>
+          <p:nvPr/>
+        </p:nvSpPr>
+        <p:spPr>
+          <a:xfrm>
+            <a:off x="1188720" y="5394960"/>
+            <a:ext cx="10287000" cy="320040"/>
+          </a:xfrm>
+          <a:prstGeom prst="rect">
+            <a:avLst/>
+          </a:prstGeom>
+          <a:noFill/>
+        </p:spPr>
+        <p:txBody>
+          <a:bodyPr wrap="square">
+            <a:spAutoFit/>
+          </a:bodyPr>
+          <a:lstStyle/>
+          <a:p>
+            <a:pPr algn="l">
+              <a:lnSpc>
+                <a:spcPct val="100000"/>
+              </a:lnSpc>
+            </a:pPr>
+            <a:r>
+              <a:rPr sz="1350" b="1" i="0">
+                <a:solidFill>
+                  <a:srgbClr val="23262B"/>
+                </a:solidFill>
+                <a:latin typeface="맑은 고딕"/>
+              </a:rPr>
+              <a:t>편집 → 시뮬레이터 확인</a:t>
+            </a:r>
+          </a:p>
+        </p:txBody>
+      </p:sp>
+      <p:sp>
+        <p:nvSpPr>
+          <p:cNvPr id="32" name="TextBox 31"/>
+          <p:cNvSpPr txBox="1"/>
+          <p:nvPr/>
+        </p:nvSpPr>
+        <p:spPr>
+          <a:xfrm>
+            <a:off x="1188720" y="5705856"/>
+            <a:ext cx="10287000" cy="457200"/>
+          </a:xfrm>
+          <a:prstGeom prst="rect">
+            <a:avLst/>
+          </a:prstGeom>
+          <a:noFill/>
+        </p:spPr>
+        <p:txBody>
+          <a:bodyPr wrap="square">
+            <a:spAutoFit/>
+          </a:bodyPr>
+          <a:lstStyle/>
+          <a:p>
+            <a:pPr algn="l">
+              <a:lnSpc>
+                <a:spcPct val="120000"/>
+              </a:lnSpc>
+            </a:pPr>
+            <a:r>
+              <a:rPr sz="1150" b="0" i="0">
+                <a:solidFill>
+                  <a:srgbClr val="7A828E"/>
+                </a:solidFill>
+                <a:latin typeface="맑은 고딕"/>
+              </a:rPr>
+              <a:t>4개 탭에서 직접 고치고, 우측에서 실제 레이아웃(인스타 125자 절단선·쇼츠 데드존 등)으로 검증.</a:t>
             </a:r>
           </a:p>
         </p:txBody>
@@ -10285,7 +10043,7 @@
                 </a:solidFill>
                 <a:latin typeface="맑은 고딕"/>
               </a:rPr>
-              <a:t>③ 매일 쓰는 법 · 뉴스와 게시</a:t>
+              <a:t>③ 매일 쓰는 법 · 워크벤치 (2/2)</a:t>
             </a:r>
           </a:p>
         </p:txBody>
@@ -10324,7 +10082,7 @@
                 </a:solidFill>
                 <a:latin typeface="맑은 고딕"/>
               </a:rPr>
-              <a:t>뉴스 큐레이션 &amp; 네이버 게시</a:t>
+              <a:t>SNS 자동 검증 &amp; 다시 만들기</a:t>
             </a:r>
           </a:p>
         </p:txBody>
@@ -10416,7 +10174,7 @@
         <p:spPr>
           <a:xfrm>
             <a:off x="502920" y="1280160"/>
-            <a:ext cx="5394960" cy="365760"/>
+            <a:ext cx="11155680" cy="365760"/>
           </a:xfrm>
           <a:prstGeom prst="rect">
             <a:avLst/>
@@ -10435,27 +10193,110 @@
               </a:lnSpc>
             </a:pPr>
             <a:r>
-              <a:rPr sz="1500" b="1" i="0">
+              <a:rPr sz="1300" b="0" i="0">
+                <a:solidFill>
+                  <a:srgbClr val="7A828E"/>
+                </a:solidFill>
+                <a:latin typeface="맑은 고딕"/>
+              </a:rPr>
+              <a:t>초안 생성 직후 인스타·X·쇼츠·발행 태그는 길이·해시태그·인증 표현을 자동으로 점검·정리합니다.</a:t>
+            </a:r>
+          </a:p>
+        </p:txBody>
+      </p:sp>
+      <p:sp>
+        <p:nvSpPr>
+          <p:cNvPr id="9" name="Rectangle 8"/>
+          <p:cNvSpPr/>
+          <p:nvPr/>
+        </p:nvSpPr>
+        <p:spPr>
+          <a:xfrm>
+            <a:off x="502920" y="1828800"/>
+            <a:ext cx="5440680" cy="1737360"/>
+          </a:xfrm>
+          <a:prstGeom prst="rect">
+            <a:avLst/>
+          </a:prstGeom>
+          <a:solidFill>
+            <a:srgbClr val="FFFFFF"/>
+          </a:solidFill>
+          <a:ln>
+            <a:noFill/>
+          </a:ln>
+          <a:effectLst/>
+        </p:spPr>
+        <p:style>
+          <a:lnRef idx="1">
+            <a:schemeClr val="accent1"/>
+          </a:lnRef>
+          <a:fillRef idx="3">
+            <a:schemeClr val="accent1"/>
+          </a:fillRef>
+          <a:effectRef idx="2">
+            <a:schemeClr val="accent1"/>
+          </a:effectRef>
+          <a:fontRef idx="minor">
+            <a:schemeClr val="lt1"/>
+          </a:fontRef>
+        </p:style>
+        <p:txBody>
+          <a:bodyPr rtlCol="0" anchor="ctr"/>
+          <a:lstStyle/>
+          <a:p>
+            <a:pPr algn="ctr"/>
+          </a:p>
+        </p:txBody>
+      </p:sp>
+      <p:sp>
+        <p:nvSpPr>
+          <p:cNvPr id="10" name="TextBox 9"/>
+          <p:cNvSpPr txBox="1"/>
+          <p:nvPr/>
+        </p:nvSpPr>
+        <p:spPr>
+          <a:xfrm>
+            <a:off x="731520" y="2011680"/>
+            <a:ext cx="4983480" cy="320040"/>
+          </a:xfrm>
+          <a:prstGeom prst="rect">
+            <a:avLst/>
+          </a:prstGeom>
+          <a:noFill/>
+        </p:spPr>
+        <p:txBody>
+          <a:bodyPr wrap="square">
+            <a:spAutoFit/>
+          </a:bodyPr>
+          <a:lstStyle/>
+          <a:p>
+            <a:pPr algn="l">
+              <a:lnSpc>
+                <a:spcPct val="100000"/>
+              </a:lnSpc>
+            </a:pPr>
+            <a:r>
+              <a:rPr sz="1400" b="1" i="0">
                 <a:solidFill>
                   <a:srgbClr val="1B3A5C"/>
                 </a:solidFill>
                 <a:latin typeface="맑은 고딕"/>
               </a:rPr>
-              <a:t>📰 뉴스 큐레이션</a:t>
-            </a:r>
-          </a:p>
-        </p:txBody>
-      </p:sp>
-      <p:sp>
-        <p:nvSpPr>
-          <p:cNvPr id="9" name="TextBox 8"/>
-          <p:cNvSpPr txBox="1"/>
-          <p:nvPr/>
-        </p:nvSpPr>
-        <p:spPr>
-          <a:xfrm>
-            <a:off x="502920" y="1691640"/>
-            <a:ext cx="5394960" cy="2560320"/>
+              <a:t>📸 인스타그램 · 🐦 X</a:t>
+            </a:r>
+          </a:p>
+        </p:txBody>
+      </p:sp>
+      <p:sp>
+        <p:nvSpPr>
+          <p:cNvPr id="11" name="TextBox 10"/>
+          <p:cNvSpPr txBox="1"/>
+          <p:nvPr/>
+        </p:nvSpPr>
+        <p:spPr>
+          <a:xfrm>
+            <a:off x="731520" y="2377440"/>
+            <a:ext cx="4983480" cy="1097280"/>
           </a:xfrm>
           <a:prstGeom prst="rect">
             <a:avLst/>
@@ -10473,7 +10314,7 @@
                 <a:spcPct val="125000"/>
               </a:lnSpc>
               <a:spcAft>
-                <a:spcPts val="900"/>
+                <a:spcPts val="800"/>
               </a:spcAft>
             </a:pPr>
             <a:r>
@@ -10483,7 +10324,7 @@
                 </a:solidFill>
                 <a:latin typeface="맑은 고딕"/>
               </a:rPr>
-              <a:t>▪ 위에서 고른 킷의 SEO 키워드로 관련 기사를 찾아 [워크벤치로 전달]합니다. 전달한 글도 그 킷으로 연결됩니다.</a:t>
+              <a:t>▪ '더보기' 전 노출 범위(앞 125자·최대 2줄) 초과 시 경고, 해시태그는 8~15개로 자동 보정.</a:t>
             </a:r>
           </a:p>
           <a:p>
@@ -10492,193 +10333,17 @@
                 <a:spcPct val="125000"/>
               </a:lnSpc>
               <a:spcAft>
-                <a:spcPts val="900"/>
+                <a:spcPts val="800"/>
               </a:spcAft>
             </a:pPr>
             <a:r>
-              <a:rPr sz="1200" b="1">
+              <a:rPr sz="1200" b="0">
                 <a:solidFill>
                   <a:srgbClr val="23262B"/>
                 </a:solidFill>
                 <a:latin typeface="맑은 고딕"/>
               </a:rPr>
-              <a:t>▪ Google 뉴스 RSS + 네이버 뉴스 직접 조회가 기본입니다. 조회가 막히면 등록된 네이버 API HUB 키로 자동 전환되고(유료), 오늘 호출에 집계됩니다.</a:t>
-            </a:r>
-          </a:p>
-          <a:p>
-            <a:pPr>
-              <a:lnSpc>
-                <a:spcPct val="125000"/>
-              </a:lnSpc>
-              <a:spcAft>
-                <a:spcPts val="900"/>
-              </a:spcAft>
-            </a:pPr>
-            <a:r>
-              <a:rPr sz="1200" b="0">
-                <a:solidFill>
-                  <a:srgbClr val="23262B"/>
-                </a:solidFill>
-                <a:latin typeface="맑은 고딕"/>
-              </a:rPr>
-              <a:t>▪ 뉴스 기반 글은 본문 끝에 원문 링크가 자동으로 붙습니다.</a:t>
-            </a:r>
-          </a:p>
-          <a:p>
-            <a:pPr>
-              <a:lnSpc>
-                <a:spcPct val="125000"/>
-              </a:lnSpc>
-              <a:spcAft>
-                <a:spcPts val="900"/>
-              </a:spcAft>
-            </a:pPr>
-            <a:r>
-              <a:rPr sz="1200" b="0">
-                <a:solidFill>
-                  <a:srgbClr val="23262B"/>
-                </a:solidFill>
-                <a:latin typeface="맑은 고딕"/>
-              </a:rPr>
-              <a:t>▪ 추가 검색어 예시: '탈모 관리, 항암가발 지원, 소상공인 창업교육'.</a:t>
-            </a:r>
-          </a:p>
-        </p:txBody>
-      </p:sp>
-      <p:sp>
-        <p:nvSpPr>
-          <p:cNvPr id="10" name="TextBox 9"/>
-          <p:cNvSpPr txBox="1"/>
-          <p:nvPr/>
-        </p:nvSpPr>
-        <p:spPr>
-          <a:xfrm>
-            <a:off x="6263640" y="1280160"/>
-            <a:ext cx="5394960" cy="365760"/>
-          </a:xfrm>
-          <a:prstGeom prst="rect">
-            <a:avLst/>
-          </a:prstGeom>
-          <a:noFill/>
-        </p:spPr>
-        <p:txBody>
-          <a:bodyPr wrap="square">
-            <a:spAutoFit/>
-          </a:bodyPr>
-          <a:lstStyle/>
-          <a:p>
-            <a:pPr algn="l">
-              <a:lnSpc>
-                <a:spcPct val="100000"/>
-              </a:lnSpc>
-            </a:pPr>
-            <a:r>
-              <a:rPr sz="1500" b="1" i="0">
-                <a:solidFill>
-                  <a:srgbClr val="1B3A5C"/>
-                </a:solidFill>
-                <a:latin typeface="맑은 고딕"/>
-              </a:rPr>
-              <a:t>🚀 네이버 게시 (반자동)</a:t>
-            </a:r>
-          </a:p>
-        </p:txBody>
-      </p:sp>
-      <p:sp>
-        <p:nvSpPr>
-          <p:cNvPr id="11" name="TextBox 10"/>
-          <p:cNvSpPr txBox="1"/>
-          <p:nvPr/>
-        </p:nvSpPr>
-        <p:spPr>
-          <a:xfrm>
-            <a:off x="6263640" y="1691640"/>
-            <a:ext cx="5394960" cy="2560320"/>
-          </a:xfrm>
-          <a:prstGeom prst="rect">
-            <a:avLst/>
-          </a:prstGeom>
-          <a:noFill/>
-        </p:spPr>
-        <p:txBody>
-          <a:bodyPr wrap="square">
-            <a:spAutoFit/>
-          </a:bodyPr>
-          <a:lstStyle/>
-          <a:p>
-            <a:pPr>
-              <a:lnSpc>
-                <a:spcPct val="125000"/>
-              </a:lnSpc>
-              <a:spcAft>
-                <a:spcPts val="900"/>
-              </a:spcAft>
-            </a:pPr>
-            <a:r>
-              <a:rPr sz="1200" b="0">
-                <a:solidFill>
-                  <a:srgbClr val="23262B"/>
-                </a:solidFill>
-                <a:latin typeface="맑은 고딕"/>
-              </a:rPr>
-              <a:t>▪ ① [네이버 로그인]으로 세션 저장 → ② [지금 게시] → Chrome 자동 입력.</a:t>
-            </a:r>
-          </a:p>
-          <a:p>
-            <a:pPr>
-              <a:lnSpc>
-                <a:spcPct val="125000"/>
-              </a:lnSpc>
-              <a:spcAft>
-                <a:spcPts val="900"/>
-              </a:spcAft>
-            </a:pPr>
-            <a:r>
-              <a:rPr sz="1200" b="1">
-                <a:solidFill>
-                  <a:srgbClr val="23262B"/>
-                </a:solidFill>
-                <a:latin typeface="맑은 고딕"/>
-              </a:rPr>
-              <a:t>▪ ③ 마지막 [발행] 클릭은 항상 사람이 직접 — 봇 차단을 피하기 위한 설계입니다.</a:t>
-            </a:r>
-          </a:p>
-          <a:p>
-            <a:pPr>
-              <a:lnSpc>
-                <a:spcPct val="125000"/>
-              </a:lnSpc>
-              <a:spcAft>
-                <a:spcPts val="900"/>
-              </a:spcAft>
-            </a:pPr>
-            <a:r>
-              <a:rPr sz="1200" b="0">
-                <a:solidFill>
-                  <a:srgbClr val="23262B"/>
-                </a:solidFill>
-                <a:latin typeface="맑은 고딕"/>
-              </a:rPr>
-              <a:t>▪ 직접 붙여넣어 발행했다면 [✅ 수동으로 완료]로 목록을 정리하세요.</a:t>
-            </a:r>
-          </a:p>
-          <a:p>
-            <a:pPr>
-              <a:lnSpc>
-                <a:spcPct val="125000"/>
-              </a:lnSpc>
-              <a:spcAft>
-                <a:spcPts val="900"/>
-              </a:spcAft>
-            </a:pPr>
-            <a:r>
-              <a:rPr sz="1200" b="0">
-                <a:solidFill>
-                  <a:srgbClr val="23262B"/>
-                </a:solidFill>
-                <a:latin typeface="맑은 고딕"/>
-              </a:rPr>
-              <a:t>▪ 인스타/X/쇼츠는 자동 게시가 없어 [📄 콘텐츠 보기]에서 복사해 직접 올립니다.</a:t>
+              <a:t>▪ X는 한글 1자를 2로 세는 실제 기준(최대 280)으로 자동 분할 — 시뮬레이터도 같은 기준.</a:t>
             </a:r>
           </a:p>
         </p:txBody>
@@ -10691,8 +10356,152 @@
         </p:nvSpPr>
         <p:spPr>
           <a:xfrm>
-            <a:off x="502920" y="4572000"/>
-            <a:ext cx="11155680" cy="1371600"/>
+            <a:off x="6263640" y="1828800"/>
+            <a:ext cx="5440680" cy="1737360"/>
+          </a:xfrm>
+          <a:prstGeom prst="rect">
+            <a:avLst/>
+          </a:prstGeom>
+          <a:solidFill>
+            <a:srgbClr val="FFFFFF"/>
+          </a:solidFill>
+          <a:ln>
+            <a:noFill/>
+          </a:ln>
+          <a:effectLst/>
+        </p:spPr>
+        <p:style>
+          <a:lnRef idx="1">
+            <a:schemeClr val="accent1"/>
+          </a:lnRef>
+          <a:fillRef idx="3">
+            <a:schemeClr val="accent1"/>
+          </a:fillRef>
+          <a:effectRef idx="2">
+            <a:schemeClr val="accent1"/>
+          </a:effectRef>
+          <a:fontRef idx="minor">
+            <a:schemeClr val="lt1"/>
+          </a:fontRef>
+        </p:style>
+        <p:txBody>
+          <a:bodyPr rtlCol="0" anchor="ctr"/>
+          <a:lstStyle/>
+          <a:p>
+            <a:pPr algn="ctr"/>
+          </a:p>
+        </p:txBody>
+      </p:sp>
+      <p:sp>
+        <p:nvSpPr>
+          <p:cNvPr id="13" name="TextBox 12"/>
+          <p:cNvSpPr txBox="1"/>
+          <p:nvPr/>
+        </p:nvSpPr>
+        <p:spPr>
+          <a:xfrm>
+            <a:off x="6492240" y="2011680"/>
+            <a:ext cx="4983480" cy="320040"/>
+          </a:xfrm>
+          <a:prstGeom prst="rect">
+            <a:avLst/>
+          </a:prstGeom>
+          <a:noFill/>
+        </p:spPr>
+        <p:txBody>
+          <a:bodyPr wrap="square">
+            <a:spAutoFit/>
+          </a:bodyPr>
+          <a:lstStyle/>
+          <a:p>
+            <a:pPr algn="l">
+              <a:lnSpc>
+                <a:spcPct val="100000"/>
+              </a:lnSpc>
+            </a:pPr>
+            <a:r>
+              <a:rPr sz="1400" b="1" i="0">
+                <a:solidFill>
+                  <a:srgbClr val="1B3A5C"/>
+                </a:solidFill>
+                <a:latin typeface="맑은 고딕"/>
+              </a:rPr>
+              <a:t>🎬 쇼츠 · 🏷️ 발행 태그</a:t>
+            </a:r>
+          </a:p>
+        </p:txBody>
+      </p:sp>
+      <p:sp>
+        <p:nvSpPr>
+          <p:cNvPr id="14" name="TextBox 13"/>
+          <p:cNvSpPr txBox="1"/>
+          <p:nvPr/>
+        </p:nvSpPr>
+        <p:spPr>
+          <a:xfrm>
+            <a:off x="6492240" y="2377440"/>
+            <a:ext cx="4983480" cy="1097280"/>
+          </a:xfrm>
+          <a:prstGeom prst="rect">
+            <a:avLst/>
+          </a:prstGeom>
+          <a:noFill/>
+        </p:spPr>
+        <p:txBody>
+          <a:bodyPr wrap="square">
+            <a:spAutoFit/>
+          </a:bodyPr>
+          <a:lstStyle/>
+          <a:p>
+            <a:pPr>
+              <a:lnSpc>
+                <a:spcPct val="125000"/>
+              </a:lnSpc>
+              <a:spcAft>
+                <a:spcPts val="800"/>
+              </a:spcAft>
+            </a:pPr>
+            <a:r>
+              <a:rPr sz="1200" b="0">
+                <a:solidFill>
+                  <a:srgbClr val="23262B"/>
+                </a:solidFill>
+                <a:latin typeface="맑은 고딕"/>
+              </a:rPr>
+              <a:t>▪ 컷 자막이 20자를 넘으면 경고하고, 제목에는 #shorts를 자동으로 붙입니다.</a:t>
+            </a:r>
+          </a:p>
+          <a:p>
+            <a:pPr>
+              <a:lnSpc>
+                <a:spcPct val="125000"/>
+              </a:lnSpc>
+              <a:spcAft>
+                <a:spcPts val="800"/>
+              </a:spcAft>
+            </a:pPr>
+            <a:r>
+              <a:rPr sz="1200" b="0">
+                <a:solidFill>
+                  <a:srgbClr val="23262B"/>
+                </a:solidFill>
+                <a:latin typeface="맑은 고딕"/>
+              </a:rPr>
+              <a:t>▪ 발행 태그는 7~12개로 정리하고, 모자라면 이 글의 타깃 키워드로 채웁니다.</a:t>
+            </a:r>
+          </a:p>
+        </p:txBody>
+      </p:sp>
+      <p:sp>
+        <p:nvSpPr>
+          <p:cNvPr id="15" name="Rectangle 14"/>
+          <p:cNvSpPr/>
+          <p:nvPr/>
+        </p:nvSpPr>
+        <p:spPr>
+          <a:xfrm>
+            <a:off x="502920" y="3840480"/>
+            <a:ext cx="11155680" cy="1188720"/>
           </a:xfrm>
           <a:prstGeom prst="rect">
             <a:avLst/>
@@ -10729,13 +10538,13 @@
       </p:sp>
       <p:sp>
         <p:nvSpPr>
-          <p:cNvPr id="13" name="TextBox 12"/>
-          <p:cNvSpPr txBox="1"/>
-          <p:nvPr/>
-        </p:nvSpPr>
-        <p:spPr>
-          <a:xfrm>
-            <a:off x="777240" y="4754880"/>
+          <p:cNvPr id="16" name="TextBox 15"/>
+          <p:cNvSpPr txBox="1"/>
+          <p:nvPr/>
+        </p:nvSpPr>
+        <p:spPr>
+          <a:xfrm>
+            <a:off x="777240" y="4023360"/>
             <a:ext cx="10607040" cy="365760"/>
           </a:xfrm>
           <a:prstGeom prst="rect">
@@ -10761,21 +10570,21 @@
                 </a:solidFill>
                 <a:latin typeface="맑은 고딕"/>
               </a:rPr>
-              <a:t>게시 대상 블로그</a:t>
-            </a:r>
-          </a:p>
-        </p:txBody>
-      </p:sp>
-      <p:sp>
-        <p:nvSpPr>
-          <p:cNvPr id="14" name="TextBox 13"/>
-          <p:cNvSpPr txBox="1"/>
-          <p:nvPr/>
-        </p:nvSpPr>
-        <p:spPr>
-          <a:xfrm>
-            <a:off x="777240" y="5120640"/>
-            <a:ext cx="10607040" cy="685800"/>
+              <a:t>📣 본문을 고친 뒤에는</a:t>
+            </a:r>
+          </a:p>
+        </p:txBody>
+      </p:sp>
+      <p:sp>
+        <p:nvSpPr>
+          <p:cNvPr id="17" name="TextBox 16"/>
+          <p:cNvSpPr txBox="1"/>
+          <p:nvPr/>
+        </p:nvSpPr>
+        <p:spPr>
+          <a:xfrm>
+            <a:off x="777240" y="4434840"/>
+            <a:ext cx="10607040" cy="502920"/>
           </a:xfrm>
           <a:prstGeom prst="rect">
             <a:avLst/>
@@ -10790,7 +10599,7 @@
           <a:p>
             <a:pPr algn="l">
               <a:lnSpc>
-                <a:spcPct val="125000"/>
+                <a:spcPct val="130000"/>
               </a:lnSpc>
             </a:pPr>
             <a:r>
@@ -10800,7 +10609,7 @@
                 </a:solidFill>
                 <a:latin typeface="맑은 고딕"/>
               </a:rPr>
-              <a:t>현재 blog.naver.com/jwl1722 로 연결됩니다. 바꾸려면 🧵 브랜드 킷 아래쪽 '회사 공통'의 '네이버 블로그 아이디'를 고치세요. 카드마다 어느 킷으로 쓴 글인지 표시됩니다.</a:t>
+              <a:t>인스타·X·쇼츠·발행 태그는 '수정 전 본문 기준'으로 표시됩니다 — 워크벤치의 [📣 SNS 3채널 다시 만들기]를 눌러 최신 본문에 맞게 다시 만드세요. 인증 범위를 넘겨 쓴 문장은 자동 삭제되고, 맞춤법은 세 채널을 한 번에 교정합니다.</a:t>
             </a:r>
           </a:p>
         </p:txBody>
@@ -12219,7 +12028,7 @@
                 </a:solidFill>
                 <a:latin typeface="맑은 고딕"/>
               </a:rPr>
-              <a:t>③ 매일 쓰는 법 · 브랜드 킷</a:t>
+              <a:t>③ 매일 쓰는 법 · 뉴스와 게시</a:t>
             </a:r>
           </a:p>
         </p:txBody>
@@ -12258,7 +12067,7 @@
                 </a:solidFill>
                 <a:latin typeface="맑은 고딕"/>
               </a:rPr>
-              <a:t>🧵 브랜드 킷 — 사업 분야별로 여러 개</a:t>
+              <a:t>뉴스 큐레이션 &amp; 네이버 게시</a:t>
             </a:r>
           </a:p>
         </p:txBody>
@@ -12337,6 +12146,674 @@
                 <a:latin typeface="맑은 고딕"/>
               </a:rPr>
               <a:t>19</a:t>
+            </a:r>
+          </a:p>
+        </p:txBody>
+      </p:sp>
+      <p:sp>
+        <p:nvSpPr>
+          <p:cNvPr id="8" name="TextBox 7"/>
+          <p:cNvSpPr txBox="1"/>
+          <p:nvPr/>
+        </p:nvSpPr>
+        <p:spPr>
+          <a:xfrm>
+            <a:off x="502920" y="1280160"/>
+            <a:ext cx="5394960" cy="365760"/>
+          </a:xfrm>
+          <a:prstGeom prst="rect">
+            <a:avLst/>
+          </a:prstGeom>
+          <a:noFill/>
+        </p:spPr>
+        <p:txBody>
+          <a:bodyPr wrap="square">
+            <a:spAutoFit/>
+          </a:bodyPr>
+          <a:lstStyle/>
+          <a:p>
+            <a:pPr algn="l">
+              <a:lnSpc>
+                <a:spcPct val="100000"/>
+              </a:lnSpc>
+            </a:pPr>
+            <a:r>
+              <a:rPr sz="1500" b="1" i="0">
+                <a:solidFill>
+                  <a:srgbClr val="1B3A5C"/>
+                </a:solidFill>
+                <a:latin typeface="맑은 고딕"/>
+              </a:rPr>
+              <a:t>📰 뉴스 큐레이션</a:t>
+            </a:r>
+          </a:p>
+        </p:txBody>
+      </p:sp>
+      <p:sp>
+        <p:nvSpPr>
+          <p:cNvPr id="9" name="TextBox 8"/>
+          <p:cNvSpPr txBox="1"/>
+          <p:nvPr/>
+        </p:nvSpPr>
+        <p:spPr>
+          <a:xfrm>
+            <a:off x="502920" y="1691640"/>
+            <a:ext cx="5394960" cy="2560320"/>
+          </a:xfrm>
+          <a:prstGeom prst="rect">
+            <a:avLst/>
+          </a:prstGeom>
+          <a:noFill/>
+        </p:spPr>
+        <p:txBody>
+          <a:bodyPr wrap="square">
+            <a:spAutoFit/>
+          </a:bodyPr>
+          <a:lstStyle/>
+          <a:p>
+            <a:pPr>
+              <a:lnSpc>
+                <a:spcPct val="125000"/>
+              </a:lnSpc>
+              <a:spcAft>
+                <a:spcPts val="900"/>
+              </a:spcAft>
+            </a:pPr>
+            <a:r>
+              <a:rPr sz="1200" b="0">
+                <a:solidFill>
+                  <a:srgbClr val="23262B"/>
+                </a:solidFill>
+                <a:latin typeface="맑은 고딕"/>
+              </a:rPr>
+              <a:t>▪ 위에서 고른 킷의 SEO 키워드로 관련 기사를 찾아 [워크벤치로 전달]합니다. 전달한 글도 그 킷으로 연결됩니다.</a:t>
+            </a:r>
+          </a:p>
+          <a:p>
+            <a:pPr>
+              <a:lnSpc>
+                <a:spcPct val="125000"/>
+              </a:lnSpc>
+              <a:spcAft>
+                <a:spcPts val="900"/>
+              </a:spcAft>
+            </a:pPr>
+            <a:r>
+              <a:rPr sz="1200" b="1">
+                <a:solidFill>
+                  <a:srgbClr val="23262B"/>
+                </a:solidFill>
+                <a:latin typeface="맑은 고딕"/>
+              </a:rPr>
+              <a:t>▪ Google 뉴스 RSS + 네이버 뉴스 직접 조회가 기본입니다. 조회가 막히면 등록된 네이버 API HUB 키로 자동 전환되고(유료), 오늘 호출에 집계됩니다.</a:t>
+            </a:r>
+          </a:p>
+          <a:p>
+            <a:pPr>
+              <a:lnSpc>
+                <a:spcPct val="125000"/>
+              </a:lnSpc>
+              <a:spcAft>
+                <a:spcPts val="900"/>
+              </a:spcAft>
+            </a:pPr>
+            <a:r>
+              <a:rPr sz="1200" b="0">
+                <a:solidFill>
+                  <a:srgbClr val="23262B"/>
+                </a:solidFill>
+                <a:latin typeface="맑은 고딕"/>
+              </a:rPr>
+              <a:t>▪ 뉴스 기반 글은 본문 끝에 원문 링크가 자동으로 붙습니다.</a:t>
+            </a:r>
+          </a:p>
+          <a:p>
+            <a:pPr>
+              <a:lnSpc>
+                <a:spcPct val="125000"/>
+              </a:lnSpc>
+              <a:spcAft>
+                <a:spcPts val="900"/>
+              </a:spcAft>
+            </a:pPr>
+            <a:r>
+              <a:rPr sz="1200" b="0">
+                <a:solidFill>
+                  <a:srgbClr val="23262B"/>
+                </a:solidFill>
+                <a:latin typeface="맑은 고딕"/>
+              </a:rPr>
+              <a:t>▪ 추가 검색어 예시: '탈모 관리, 항암가발 지원, 소상공인 창업교육'.</a:t>
+            </a:r>
+          </a:p>
+        </p:txBody>
+      </p:sp>
+      <p:sp>
+        <p:nvSpPr>
+          <p:cNvPr id="10" name="TextBox 9"/>
+          <p:cNvSpPr txBox="1"/>
+          <p:nvPr/>
+        </p:nvSpPr>
+        <p:spPr>
+          <a:xfrm>
+            <a:off x="6263640" y="1280160"/>
+            <a:ext cx="5394960" cy="365760"/>
+          </a:xfrm>
+          <a:prstGeom prst="rect">
+            <a:avLst/>
+          </a:prstGeom>
+          <a:noFill/>
+        </p:spPr>
+        <p:txBody>
+          <a:bodyPr wrap="square">
+            <a:spAutoFit/>
+          </a:bodyPr>
+          <a:lstStyle/>
+          <a:p>
+            <a:pPr algn="l">
+              <a:lnSpc>
+                <a:spcPct val="100000"/>
+              </a:lnSpc>
+            </a:pPr>
+            <a:r>
+              <a:rPr sz="1500" b="1" i="0">
+                <a:solidFill>
+                  <a:srgbClr val="1B3A5C"/>
+                </a:solidFill>
+                <a:latin typeface="맑은 고딕"/>
+              </a:rPr>
+              <a:t>🚀 네이버 게시 (반자동)</a:t>
+            </a:r>
+          </a:p>
+        </p:txBody>
+      </p:sp>
+      <p:sp>
+        <p:nvSpPr>
+          <p:cNvPr id="11" name="TextBox 10"/>
+          <p:cNvSpPr txBox="1"/>
+          <p:nvPr/>
+        </p:nvSpPr>
+        <p:spPr>
+          <a:xfrm>
+            <a:off x="6263640" y="1691640"/>
+            <a:ext cx="5394960" cy="2560320"/>
+          </a:xfrm>
+          <a:prstGeom prst="rect">
+            <a:avLst/>
+          </a:prstGeom>
+          <a:noFill/>
+        </p:spPr>
+        <p:txBody>
+          <a:bodyPr wrap="square">
+            <a:spAutoFit/>
+          </a:bodyPr>
+          <a:lstStyle/>
+          <a:p>
+            <a:pPr>
+              <a:lnSpc>
+                <a:spcPct val="125000"/>
+              </a:lnSpc>
+              <a:spcAft>
+                <a:spcPts val="900"/>
+              </a:spcAft>
+            </a:pPr>
+            <a:r>
+              <a:rPr sz="1200" b="0">
+                <a:solidFill>
+                  <a:srgbClr val="23262B"/>
+                </a:solidFill>
+                <a:latin typeface="맑은 고딕"/>
+              </a:rPr>
+              <a:t>▪ ① [네이버 로그인]으로 세션 저장 → ② [지금 게시] → Chrome 자동 입력.</a:t>
+            </a:r>
+          </a:p>
+          <a:p>
+            <a:pPr>
+              <a:lnSpc>
+                <a:spcPct val="125000"/>
+              </a:lnSpc>
+              <a:spcAft>
+                <a:spcPts val="900"/>
+              </a:spcAft>
+            </a:pPr>
+            <a:r>
+              <a:rPr sz="1200" b="1">
+                <a:solidFill>
+                  <a:srgbClr val="23262B"/>
+                </a:solidFill>
+                <a:latin typeface="맑은 고딕"/>
+              </a:rPr>
+              <a:t>▪ ③ 마지막 [발행] 클릭은 항상 사람이 직접 — 봇 차단을 피하기 위한 설계입니다.</a:t>
+            </a:r>
+          </a:p>
+          <a:p>
+            <a:pPr>
+              <a:lnSpc>
+                <a:spcPct val="125000"/>
+              </a:lnSpc>
+              <a:spcAft>
+                <a:spcPts val="900"/>
+              </a:spcAft>
+            </a:pPr>
+            <a:r>
+              <a:rPr sz="1200" b="0">
+                <a:solidFill>
+                  <a:srgbClr val="23262B"/>
+                </a:solidFill>
+                <a:latin typeface="맑은 고딕"/>
+              </a:rPr>
+              <a:t>▪ 직접 붙여넣어 발행했다면 [✅ 수동으로 완료]로 목록을 정리하세요.</a:t>
+            </a:r>
+          </a:p>
+          <a:p>
+            <a:pPr>
+              <a:lnSpc>
+                <a:spcPct val="125000"/>
+              </a:lnSpc>
+              <a:spcAft>
+                <a:spcPts val="900"/>
+              </a:spcAft>
+            </a:pPr>
+            <a:r>
+              <a:rPr sz="1200" b="0">
+                <a:solidFill>
+                  <a:srgbClr val="23262B"/>
+                </a:solidFill>
+                <a:latin typeface="맑은 고딕"/>
+              </a:rPr>
+              <a:t>▪ 인스타/X/쇼츠는 자동 게시가 없어 [📄 콘텐츠 보기]에서 복사해 직접 올립니다.</a:t>
+            </a:r>
+          </a:p>
+        </p:txBody>
+      </p:sp>
+      <p:sp>
+        <p:nvSpPr>
+          <p:cNvPr id="12" name="Rectangle 11"/>
+          <p:cNvSpPr/>
+          <p:nvPr/>
+        </p:nvSpPr>
+        <p:spPr>
+          <a:xfrm>
+            <a:off x="502920" y="4572000"/>
+            <a:ext cx="11155680" cy="1371600"/>
+          </a:xfrm>
+          <a:prstGeom prst="rect">
+            <a:avLst/>
+          </a:prstGeom>
+          <a:solidFill>
+            <a:srgbClr val="F5EDD7"/>
+          </a:solidFill>
+          <a:ln>
+            <a:noFill/>
+          </a:ln>
+          <a:effectLst/>
+        </p:spPr>
+        <p:style>
+          <a:lnRef idx="1">
+            <a:schemeClr val="accent1"/>
+          </a:lnRef>
+          <a:fillRef idx="3">
+            <a:schemeClr val="accent1"/>
+          </a:fillRef>
+          <a:effectRef idx="2">
+            <a:schemeClr val="accent1"/>
+          </a:effectRef>
+          <a:fontRef idx="minor">
+            <a:schemeClr val="lt1"/>
+          </a:fontRef>
+        </p:style>
+        <p:txBody>
+          <a:bodyPr rtlCol="0" anchor="ctr"/>
+          <a:lstStyle/>
+          <a:p>
+            <a:pPr algn="ctr"/>
+          </a:p>
+        </p:txBody>
+      </p:sp>
+      <p:sp>
+        <p:nvSpPr>
+          <p:cNvPr id="13" name="TextBox 12"/>
+          <p:cNvSpPr txBox="1"/>
+          <p:nvPr/>
+        </p:nvSpPr>
+        <p:spPr>
+          <a:xfrm>
+            <a:off x="777240" y="4754880"/>
+            <a:ext cx="10607040" cy="365760"/>
+          </a:xfrm>
+          <a:prstGeom prst="rect">
+            <a:avLst/>
+          </a:prstGeom>
+          <a:noFill/>
+        </p:spPr>
+        <p:txBody>
+          <a:bodyPr wrap="square">
+            <a:spAutoFit/>
+          </a:bodyPr>
+          <a:lstStyle/>
+          <a:p>
+            <a:pPr algn="l">
+              <a:lnSpc>
+                <a:spcPct val="100000"/>
+              </a:lnSpc>
+            </a:pPr>
+            <a:r>
+              <a:rPr sz="1350" b="1" i="0">
+                <a:solidFill>
+                  <a:srgbClr val="23262B"/>
+                </a:solidFill>
+                <a:latin typeface="맑은 고딕"/>
+              </a:rPr>
+              <a:t>게시 대상 블로그</a:t>
+            </a:r>
+          </a:p>
+        </p:txBody>
+      </p:sp>
+      <p:sp>
+        <p:nvSpPr>
+          <p:cNvPr id="14" name="TextBox 13"/>
+          <p:cNvSpPr txBox="1"/>
+          <p:nvPr/>
+        </p:nvSpPr>
+        <p:spPr>
+          <a:xfrm>
+            <a:off x="777240" y="5120640"/>
+            <a:ext cx="10607040" cy="685800"/>
+          </a:xfrm>
+          <a:prstGeom prst="rect">
+            <a:avLst/>
+          </a:prstGeom>
+          <a:noFill/>
+        </p:spPr>
+        <p:txBody>
+          <a:bodyPr wrap="square">
+            <a:spAutoFit/>
+          </a:bodyPr>
+          <a:lstStyle/>
+          <a:p>
+            <a:pPr algn="l">
+              <a:lnSpc>
+                <a:spcPct val="125000"/>
+              </a:lnSpc>
+            </a:pPr>
+            <a:r>
+              <a:rPr sz="1200" b="0" i="0">
+                <a:solidFill>
+                  <a:srgbClr val="23262B"/>
+                </a:solidFill>
+                <a:latin typeface="맑은 고딕"/>
+              </a:rPr>
+              <a:t>현재 blog.naver.com/jwl1722 로 연결됩니다. 바꾸려면 🧵 브랜드 킷 아래쪽 '회사 공통'의 '네이버 블로그 아이디'를 고치세요. 카드마다 어느 킷으로 쓴 글인지 표시됩니다.</a:t>
+            </a:r>
+          </a:p>
+        </p:txBody>
+      </p:sp>
+    </p:spTree>
+  </p:cSld>
+  <p:clrMapOvr>
+    <a:masterClrMapping/>
+  </p:clrMapOvr>
+</p:sld>
+</file>
+
+<file path=ppt/slides/slide21.xml><?xml version="1.0" encoding="utf-8"?>
+<p:sld xmlns:a="http://schemas.openxmlformats.org/drawingml/2006/main" xmlns:p="http://schemas.openxmlformats.org/presentationml/2006/main" xmlns:r="http://schemas.openxmlformats.org/officeDocument/2006/relationships">
+  <p:cSld>
+    <p:bg>
+      <p:bgPr>
+        <a:solidFill>
+          <a:srgbClr val="F7F5F0"/>
+        </a:solidFill>
+        <a:effectLst/>
+      </p:bgPr>
+    </p:bg>
+    <p:spTree>
+      <p:nvGrpSpPr>
+        <p:cNvPr id="1" name=""/>
+        <p:cNvGrpSpPr/>
+        <p:nvPr/>
+      </p:nvGrpSpPr>
+      <p:grpSpPr/>
+      <p:sp>
+        <p:nvSpPr>
+          <p:cNvPr id="2" name="Rectangle 1"/>
+          <p:cNvSpPr/>
+          <p:nvPr/>
+        </p:nvSpPr>
+        <p:spPr>
+          <a:xfrm>
+            <a:off x="0" y="0"/>
+            <a:ext cx="12191695" cy="1051560"/>
+          </a:xfrm>
+          <a:prstGeom prst="rect">
+            <a:avLst/>
+          </a:prstGeom>
+          <a:solidFill>
+            <a:srgbClr val="122A44"/>
+          </a:solidFill>
+          <a:ln>
+            <a:noFill/>
+          </a:ln>
+          <a:effectLst/>
+        </p:spPr>
+        <p:style>
+          <a:lnRef idx="1">
+            <a:schemeClr val="accent1"/>
+          </a:lnRef>
+          <a:fillRef idx="3">
+            <a:schemeClr val="accent1"/>
+          </a:fillRef>
+          <a:effectRef idx="2">
+            <a:schemeClr val="accent1"/>
+          </a:effectRef>
+          <a:fontRef idx="minor">
+            <a:schemeClr val="lt1"/>
+          </a:fontRef>
+        </p:style>
+        <p:txBody>
+          <a:bodyPr rtlCol="0" anchor="ctr"/>
+          <a:lstStyle/>
+          <a:p>
+            <a:pPr algn="ctr"/>
+          </a:p>
+        </p:txBody>
+      </p:sp>
+      <p:sp>
+        <p:nvSpPr>
+          <p:cNvPr id="3" name="Rectangle 2"/>
+          <p:cNvSpPr/>
+          <p:nvPr/>
+        </p:nvSpPr>
+        <p:spPr>
+          <a:xfrm>
+            <a:off x="0" y="1051560"/>
+            <a:ext cx="12191695" cy="38100"/>
+          </a:xfrm>
+          <a:prstGeom prst="rect">
+            <a:avLst/>
+          </a:prstGeom>
+          <a:solidFill>
+            <a:srgbClr val="1B3A5C"/>
+          </a:solidFill>
+          <a:ln>
+            <a:noFill/>
+          </a:ln>
+          <a:effectLst/>
+        </p:spPr>
+        <p:style>
+          <a:lnRef idx="1">
+            <a:schemeClr val="accent1"/>
+          </a:lnRef>
+          <a:fillRef idx="3">
+            <a:schemeClr val="accent1"/>
+          </a:fillRef>
+          <a:effectRef idx="2">
+            <a:schemeClr val="accent1"/>
+          </a:effectRef>
+          <a:fontRef idx="minor">
+            <a:schemeClr val="lt1"/>
+          </a:fontRef>
+        </p:style>
+        <p:txBody>
+          <a:bodyPr rtlCol="0" anchor="ctr"/>
+          <a:lstStyle/>
+          <a:p>
+            <a:pPr algn="ctr"/>
+          </a:p>
+        </p:txBody>
+      </p:sp>
+      <p:sp>
+        <p:nvSpPr>
+          <p:cNvPr id="4" name="TextBox 3"/>
+          <p:cNvSpPr txBox="1"/>
+          <p:nvPr/>
+        </p:nvSpPr>
+        <p:spPr>
+          <a:xfrm>
+            <a:off x="502920" y="109728"/>
+            <a:ext cx="8686800" cy="292608"/>
+          </a:xfrm>
+          <a:prstGeom prst="rect">
+            <a:avLst/>
+          </a:prstGeom>
+          <a:noFill/>
+        </p:spPr>
+        <p:txBody>
+          <a:bodyPr wrap="square">
+            <a:spAutoFit/>
+          </a:bodyPr>
+          <a:lstStyle/>
+          <a:p>
+            <a:pPr algn="l">
+              <a:lnSpc>
+                <a:spcPct val="100000"/>
+              </a:lnSpc>
+            </a:pPr>
+            <a:r>
+              <a:rPr sz="1200" b="1" i="0">
+                <a:solidFill>
+                  <a:srgbClr val="1B3A5C"/>
+                </a:solidFill>
+                <a:latin typeface="맑은 고딕"/>
+              </a:rPr>
+              <a:t>③ 매일 쓰는 법 · 브랜드 킷</a:t>
+            </a:r>
+          </a:p>
+        </p:txBody>
+      </p:sp>
+      <p:sp>
+        <p:nvSpPr>
+          <p:cNvPr id="5" name="TextBox 4"/>
+          <p:cNvSpPr txBox="1"/>
+          <p:nvPr/>
+        </p:nvSpPr>
+        <p:spPr>
+          <a:xfrm>
+            <a:off x="457200" y="347472"/>
+            <a:ext cx="10515600" cy="621792"/>
+          </a:xfrm>
+          <a:prstGeom prst="rect">
+            <a:avLst/>
+          </a:prstGeom>
+          <a:noFill/>
+        </p:spPr>
+        <p:txBody>
+          <a:bodyPr wrap="square">
+            <a:spAutoFit/>
+          </a:bodyPr>
+          <a:lstStyle/>
+          <a:p>
+            <a:pPr algn="l">
+              <a:lnSpc>
+                <a:spcPct val="100000"/>
+              </a:lnSpc>
+            </a:pPr>
+            <a:r>
+              <a:rPr sz="2400" b="1" i="0">
+                <a:solidFill>
+                  <a:srgbClr val="FFFFFF"/>
+                </a:solidFill>
+                <a:latin typeface="맑은 고딕"/>
+              </a:rPr>
+              <a:t>🧵 브랜드 킷 — 사업 분야별로 여러 개</a:t>
+            </a:r>
+          </a:p>
+        </p:txBody>
+      </p:sp>
+      <p:sp>
+        <p:nvSpPr>
+          <p:cNvPr id="6" name="TextBox 5"/>
+          <p:cNvSpPr txBox="1"/>
+          <p:nvPr/>
+        </p:nvSpPr>
+        <p:spPr>
+          <a:xfrm>
+            <a:off x="457200" y="6492240"/>
+            <a:ext cx="8229600" cy="274320"/>
+          </a:xfrm>
+          <a:prstGeom prst="rect">
+            <a:avLst/>
+          </a:prstGeom>
+          <a:noFill/>
+        </p:spPr>
+        <p:txBody>
+          <a:bodyPr wrap="square">
+            <a:spAutoFit/>
+          </a:bodyPr>
+          <a:lstStyle/>
+          <a:p>
+            <a:pPr algn="l">
+              <a:lnSpc>
+                <a:spcPct val="100000"/>
+              </a:lnSpc>
+            </a:pPr>
+            <a:r>
+              <a:rPr sz="900" b="0" i="0">
+                <a:solidFill>
+                  <a:srgbClr val="7A828E"/>
+                </a:solidFill>
+                <a:latin typeface="맑은 고딕"/>
+              </a:rPr>
+              <a:t>씨제이씨협동조합 OSMU 워크벤치 · 관리자·사용자 매뉴얼</a:t>
+            </a:r>
+          </a:p>
+        </p:txBody>
+      </p:sp>
+      <p:sp>
+        <p:nvSpPr>
+          <p:cNvPr id="7" name="TextBox 6"/>
+          <p:cNvSpPr txBox="1"/>
+          <p:nvPr/>
+        </p:nvSpPr>
+        <p:spPr>
+          <a:xfrm>
+            <a:off x="11094415" y="6492240"/>
+            <a:ext cx="731520" cy="274320"/>
+          </a:xfrm>
+          <a:prstGeom prst="rect">
+            <a:avLst/>
+          </a:prstGeom>
+          <a:noFill/>
+        </p:spPr>
+        <p:txBody>
+          <a:bodyPr wrap="square">
+            <a:spAutoFit/>
+          </a:bodyPr>
+          <a:lstStyle/>
+          <a:p>
+            <a:pPr algn="r">
+              <a:lnSpc>
+                <a:spcPct val="100000"/>
+              </a:lnSpc>
+            </a:pPr>
+            <a:r>
+              <a:rPr sz="900" b="0" i="0">
+                <a:solidFill>
+                  <a:srgbClr val="7A828E"/>
+                </a:solidFill>
+                <a:latin typeface="맑은 고딕"/>
+              </a:rPr>
+              <a:t>20</a:t>
             </a:r>
           </a:p>
         </p:txBody>
@@ -12711,7 +13188,7 @@
 </p:sld>
 </file>
 
-<file path=ppt/slides/slide21.xml><?xml version="1.0" encoding="utf-8"?>
+<file path=ppt/slides/slide22.xml><?xml version="1.0" encoding="utf-8"?>
 <p:sld xmlns:a="http://schemas.openxmlformats.org/drawingml/2006/main" xmlns:p="http://schemas.openxmlformats.org/presentationml/2006/main" xmlns:r="http://schemas.openxmlformats.org/officeDocument/2006/relationships">
   <p:cSld>
     <p:bg>
@@ -12968,7 +13445,7 @@
                 </a:solidFill>
                 <a:latin typeface="맑은 고딕"/>
               </a:rPr>
-              <a:t>20</a:t>
+              <a:t>21</a:t>
             </a:r>
           </a:p>
         </p:txBody>
@@ -13517,7 +13994,7 @@
 </p:sld>
 </file>
 
-<file path=ppt/slides/slide22.xml><?xml version="1.0" encoding="utf-8"?>
+<file path=ppt/slides/slide23.xml><?xml version="1.0" encoding="utf-8"?>
 <p:sld xmlns:a="http://schemas.openxmlformats.org/drawingml/2006/main" xmlns:p="http://schemas.openxmlformats.org/presentationml/2006/main" xmlns:r="http://schemas.openxmlformats.org/officeDocument/2006/relationships">
   <p:cSld>
     <p:bg>
@@ -13774,7 +14251,7 @@
                 </a:solidFill>
                 <a:latin typeface="맑은 고딕"/>
               </a:rPr>
-              <a:t>21</a:t>
+              <a:t>22</a:t>
             </a:r>
           </a:p>
         </p:txBody>
@@ -14252,1106 +14729,6 @@
 </p:sld>
 </file>
 
-<file path=ppt/slides/slide23.xml><?xml version="1.0" encoding="utf-8"?>
-<p:sld xmlns:a="http://schemas.openxmlformats.org/drawingml/2006/main" xmlns:p="http://schemas.openxmlformats.org/presentationml/2006/main" xmlns:r="http://schemas.openxmlformats.org/officeDocument/2006/relationships">
-  <p:cSld>
-    <p:bg>
-      <p:bgPr>
-        <a:solidFill>
-          <a:srgbClr val="F7F5F0"/>
-        </a:solidFill>
-        <a:effectLst/>
-      </p:bgPr>
-    </p:bg>
-    <p:spTree>
-      <p:nvGrpSpPr>
-        <p:cNvPr id="1" name=""/>
-        <p:cNvGrpSpPr/>
-        <p:nvPr/>
-      </p:nvGrpSpPr>
-      <p:grpSpPr/>
-      <p:sp>
-        <p:nvSpPr>
-          <p:cNvPr id="2" name="Rectangle 1"/>
-          <p:cNvSpPr/>
-          <p:nvPr/>
-        </p:nvSpPr>
-        <p:spPr>
-          <a:xfrm>
-            <a:off x="0" y="0"/>
-            <a:ext cx="12191695" cy="1051560"/>
-          </a:xfrm>
-          <a:prstGeom prst="rect">
-            <a:avLst/>
-          </a:prstGeom>
-          <a:solidFill>
-            <a:srgbClr val="122A44"/>
-          </a:solidFill>
-          <a:ln>
-            <a:noFill/>
-          </a:ln>
-          <a:effectLst/>
-        </p:spPr>
-        <p:style>
-          <a:lnRef idx="1">
-            <a:schemeClr val="accent1"/>
-          </a:lnRef>
-          <a:fillRef idx="3">
-            <a:schemeClr val="accent1"/>
-          </a:fillRef>
-          <a:effectRef idx="2">
-            <a:schemeClr val="accent1"/>
-          </a:effectRef>
-          <a:fontRef idx="minor">
-            <a:schemeClr val="lt1"/>
-          </a:fontRef>
-        </p:style>
-        <p:txBody>
-          <a:bodyPr rtlCol="0" anchor="ctr"/>
-          <a:lstStyle/>
-          <a:p>
-            <a:pPr algn="ctr"/>
-          </a:p>
-        </p:txBody>
-      </p:sp>
-      <p:sp>
-        <p:nvSpPr>
-          <p:cNvPr id="3" name="Rectangle 2"/>
-          <p:cNvSpPr/>
-          <p:nvPr/>
-        </p:nvSpPr>
-        <p:spPr>
-          <a:xfrm>
-            <a:off x="0" y="1051560"/>
-            <a:ext cx="12191695" cy="38100"/>
-          </a:xfrm>
-          <a:prstGeom prst="rect">
-            <a:avLst/>
-          </a:prstGeom>
-          <a:solidFill>
-            <a:srgbClr val="1B3A5C"/>
-          </a:solidFill>
-          <a:ln>
-            <a:noFill/>
-          </a:ln>
-          <a:effectLst/>
-        </p:spPr>
-        <p:style>
-          <a:lnRef idx="1">
-            <a:schemeClr val="accent1"/>
-          </a:lnRef>
-          <a:fillRef idx="3">
-            <a:schemeClr val="accent1"/>
-          </a:fillRef>
-          <a:effectRef idx="2">
-            <a:schemeClr val="accent1"/>
-          </a:effectRef>
-          <a:fontRef idx="minor">
-            <a:schemeClr val="lt1"/>
-          </a:fontRef>
-        </p:style>
-        <p:txBody>
-          <a:bodyPr rtlCol="0" anchor="ctr"/>
-          <a:lstStyle/>
-          <a:p>
-            <a:pPr algn="ctr"/>
-          </a:p>
-        </p:txBody>
-      </p:sp>
-      <p:sp>
-        <p:nvSpPr>
-          <p:cNvPr id="4" name="TextBox 3"/>
-          <p:cNvSpPr txBox="1"/>
-          <p:nvPr/>
-        </p:nvSpPr>
-        <p:spPr>
-          <a:xfrm>
-            <a:off x="502920" y="109728"/>
-            <a:ext cx="8686800" cy="292608"/>
-          </a:xfrm>
-          <a:prstGeom prst="rect">
-            <a:avLst/>
-          </a:prstGeom>
-          <a:noFill/>
-        </p:spPr>
-        <p:txBody>
-          <a:bodyPr wrap="square">
-            <a:spAutoFit/>
-          </a:bodyPr>
-          <a:lstStyle/>
-          <a:p>
-            <a:pPr algn="l">
-              <a:lnSpc>
-                <a:spcPct val="100000"/>
-              </a:lnSpc>
-            </a:pPr>
-            <a:r>
-              <a:rPr sz="1200" b="1" i="0">
-                <a:solidFill>
-                  <a:srgbClr val="1B3A5C"/>
-                </a:solidFill>
-                <a:latin typeface="맑은 고딕"/>
-              </a:rPr>
-              <a:t>④ 안전 · 주의사항</a:t>
-            </a:r>
-          </a:p>
-        </p:txBody>
-      </p:sp>
-      <p:sp>
-        <p:nvSpPr>
-          <p:cNvPr id="5" name="TextBox 4"/>
-          <p:cNvSpPr txBox="1"/>
-          <p:nvPr/>
-        </p:nvSpPr>
-        <p:spPr>
-          <a:xfrm>
-            <a:off x="457200" y="347472"/>
-            <a:ext cx="10515600" cy="621792"/>
-          </a:xfrm>
-          <a:prstGeom prst="rect">
-            <a:avLst/>
-          </a:prstGeom>
-          <a:noFill/>
-        </p:spPr>
-        <p:txBody>
-          <a:bodyPr wrap="square">
-            <a:spAutoFit/>
-          </a:bodyPr>
-          <a:lstStyle/>
-          <a:p>
-            <a:pPr algn="l">
-              <a:lnSpc>
-                <a:spcPct val="100000"/>
-              </a:lnSpc>
-            </a:pPr>
-            <a:r>
-              <a:rPr sz="2400" b="1" i="0">
-                <a:solidFill>
-                  <a:srgbClr val="FFFFFF"/>
-                </a:solidFill>
-                <a:latin typeface="맑은 고딕"/>
-              </a:rPr>
-              <a:t>함정 모음 — 먼저 알면 안 헷갈립니다</a:t>
-            </a:r>
-          </a:p>
-        </p:txBody>
-      </p:sp>
-      <p:sp>
-        <p:nvSpPr>
-          <p:cNvPr id="6" name="TextBox 5"/>
-          <p:cNvSpPr txBox="1"/>
-          <p:nvPr/>
-        </p:nvSpPr>
-        <p:spPr>
-          <a:xfrm>
-            <a:off x="457200" y="6492240"/>
-            <a:ext cx="8229600" cy="274320"/>
-          </a:xfrm>
-          <a:prstGeom prst="rect">
-            <a:avLst/>
-          </a:prstGeom>
-          <a:noFill/>
-        </p:spPr>
-        <p:txBody>
-          <a:bodyPr wrap="square">
-            <a:spAutoFit/>
-          </a:bodyPr>
-          <a:lstStyle/>
-          <a:p>
-            <a:pPr algn="l">
-              <a:lnSpc>
-                <a:spcPct val="100000"/>
-              </a:lnSpc>
-            </a:pPr>
-            <a:r>
-              <a:rPr sz="900" b="0" i="0">
-                <a:solidFill>
-                  <a:srgbClr val="7A828E"/>
-                </a:solidFill>
-                <a:latin typeface="맑은 고딕"/>
-              </a:rPr>
-              <a:t>씨제이씨협동조합 OSMU 워크벤치 · 관리자·사용자 매뉴얼</a:t>
-            </a:r>
-          </a:p>
-        </p:txBody>
-      </p:sp>
-      <p:sp>
-        <p:nvSpPr>
-          <p:cNvPr id="7" name="TextBox 6"/>
-          <p:cNvSpPr txBox="1"/>
-          <p:nvPr/>
-        </p:nvSpPr>
-        <p:spPr>
-          <a:xfrm>
-            <a:off x="11094415" y="6492240"/>
-            <a:ext cx="731520" cy="274320"/>
-          </a:xfrm>
-          <a:prstGeom prst="rect">
-            <a:avLst/>
-          </a:prstGeom>
-          <a:noFill/>
-        </p:spPr>
-        <p:txBody>
-          <a:bodyPr wrap="square">
-            <a:spAutoFit/>
-          </a:bodyPr>
-          <a:lstStyle/>
-          <a:p>
-            <a:pPr algn="r">
-              <a:lnSpc>
-                <a:spcPct val="100000"/>
-              </a:lnSpc>
-            </a:pPr>
-            <a:r>
-              <a:rPr sz="900" b="0" i="0">
-                <a:solidFill>
-                  <a:srgbClr val="7A828E"/>
-                </a:solidFill>
-                <a:latin typeface="맑은 고딕"/>
-              </a:rPr>
-              <a:t>22</a:t>
-            </a:r>
-          </a:p>
-        </p:txBody>
-      </p:sp>
-      <p:sp>
-        <p:nvSpPr>
-          <p:cNvPr id="8" name="Rectangle 7"/>
-          <p:cNvSpPr/>
-          <p:nvPr/>
-        </p:nvSpPr>
-        <p:spPr>
-          <a:xfrm>
-            <a:off x="502920" y="1417320"/>
-            <a:ext cx="11155680" cy="987552"/>
-          </a:xfrm>
-          <a:prstGeom prst="rect">
-            <a:avLst/>
-          </a:prstGeom>
-          <a:solidFill>
-            <a:srgbClr val="FFFFFF"/>
-          </a:solidFill>
-          <a:ln>
-            <a:noFill/>
-          </a:ln>
-          <a:effectLst/>
-        </p:spPr>
-        <p:style>
-          <a:lnRef idx="1">
-            <a:schemeClr val="accent1"/>
-          </a:lnRef>
-          <a:fillRef idx="3">
-            <a:schemeClr val="accent1"/>
-          </a:fillRef>
-          <a:effectRef idx="2">
-            <a:schemeClr val="accent1"/>
-          </a:effectRef>
-          <a:fontRef idx="minor">
-            <a:schemeClr val="lt1"/>
-          </a:fontRef>
-        </p:style>
-        <p:txBody>
-          <a:bodyPr rtlCol="0" anchor="ctr"/>
-          <a:lstStyle/>
-          <a:p>
-            <a:pPr algn="ctr"/>
-          </a:p>
-        </p:txBody>
-      </p:sp>
-      <p:sp>
-        <p:nvSpPr>
-          <p:cNvPr id="9" name="Rectangle 8"/>
-          <p:cNvSpPr/>
-          <p:nvPr/>
-        </p:nvSpPr>
-        <p:spPr>
-          <a:xfrm>
-            <a:off x="502920" y="1417320"/>
-            <a:ext cx="109728" cy="987552"/>
-          </a:xfrm>
-          <a:prstGeom prst="rect">
-            <a:avLst/>
-          </a:prstGeom>
-          <a:solidFill>
-            <a:srgbClr val="C0392B"/>
-          </a:solidFill>
-          <a:ln>
-            <a:noFill/>
-          </a:ln>
-          <a:effectLst/>
-        </p:spPr>
-        <p:style>
-          <a:lnRef idx="1">
-            <a:schemeClr val="accent1"/>
-          </a:lnRef>
-          <a:fillRef idx="3">
-            <a:schemeClr val="accent1"/>
-          </a:fillRef>
-          <a:effectRef idx="2">
-            <a:schemeClr val="accent1"/>
-          </a:effectRef>
-          <a:fontRef idx="minor">
-            <a:schemeClr val="lt1"/>
-          </a:fontRef>
-        </p:style>
-        <p:txBody>
-          <a:bodyPr rtlCol="0" anchor="ctr"/>
-          <a:lstStyle/>
-          <a:p>
-            <a:pPr algn="ctr"/>
-          </a:p>
-        </p:txBody>
-      </p:sp>
-      <p:sp>
-        <p:nvSpPr>
-          <p:cNvPr id="10" name="TextBox 9"/>
-          <p:cNvSpPr txBox="1"/>
-          <p:nvPr/>
-        </p:nvSpPr>
-        <p:spPr>
-          <a:xfrm>
-            <a:off x="822960" y="1490472"/>
-            <a:ext cx="10607040" cy="347472"/>
-          </a:xfrm>
-          <a:prstGeom prst="rect">
-            <a:avLst/>
-          </a:prstGeom>
-          <a:noFill/>
-        </p:spPr>
-        <p:txBody>
-          <a:bodyPr wrap="square">
-            <a:spAutoFit/>
-          </a:bodyPr>
-          <a:lstStyle/>
-          <a:p>
-            <a:pPr algn="l">
-              <a:lnSpc>
-                <a:spcPct val="100000"/>
-              </a:lnSpc>
-            </a:pPr>
-            <a:r>
-              <a:rPr sz="1300" b="1" i="0">
-                <a:solidFill>
-                  <a:srgbClr val="23262B"/>
-                </a:solidFill>
-                <a:latin typeface="맑은 고딕"/>
-              </a:rPr>
-              <a:t>비밀번호 칸이 비어 보여도 저장된 게 맞다</a:t>
-            </a:r>
-          </a:p>
-        </p:txBody>
-      </p:sp>
-      <p:sp>
-        <p:nvSpPr>
-          <p:cNvPr id="11" name="TextBox 10"/>
-          <p:cNvSpPr txBox="1"/>
-          <p:nvPr/>
-        </p:nvSpPr>
-        <p:spPr>
-          <a:xfrm>
-            <a:off x="822960" y="1856232"/>
-            <a:ext cx="10607040" cy="502920"/>
-          </a:xfrm>
-          <a:prstGeom prst="rect">
-            <a:avLst/>
-          </a:prstGeom>
-          <a:noFill/>
-        </p:spPr>
-        <p:txBody>
-          <a:bodyPr wrap="square">
-            <a:spAutoFit/>
-          </a:bodyPr>
-          <a:lstStyle/>
-          <a:p>
-            <a:pPr algn="l">
-              <a:lnSpc>
-                <a:spcPct val="125000"/>
-              </a:lnSpc>
-            </a:pPr>
-            <a:r>
-              <a:rPr sz="1150" b="0" i="0">
-                <a:solidFill>
-                  <a:srgbClr val="7A828E"/>
-                </a:solidFill>
-                <a:latin typeface="맑은 고딕"/>
-              </a:rPr>
-              <a:t>보안상 키는 절대 다시 보여주지 않습니다. '✅ 등록됨 ****뒷4자리 · 저장 시각' 배지로 확인하세요.</a:t>
-            </a:r>
-          </a:p>
-        </p:txBody>
-      </p:sp>
-      <p:sp>
-        <p:nvSpPr>
-          <p:cNvPr id="12" name="Rectangle 11"/>
-          <p:cNvSpPr/>
-          <p:nvPr/>
-        </p:nvSpPr>
-        <p:spPr>
-          <a:xfrm>
-            <a:off x="502920" y="2496312"/>
-            <a:ext cx="11155680" cy="987552"/>
-          </a:xfrm>
-          <a:prstGeom prst="rect">
-            <a:avLst/>
-          </a:prstGeom>
-          <a:solidFill>
-            <a:srgbClr val="FFFFFF"/>
-          </a:solidFill>
-          <a:ln>
-            <a:noFill/>
-          </a:ln>
-          <a:effectLst/>
-        </p:spPr>
-        <p:style>
-          <a:lnRef idx="1">
-            <a:schemeClr val="accent1"/>
-          </a:lnRef>
-          <a:fillRef idx="3">
-            <a:schemeClr val="accent1"/>
-          </a:fillRef>
-          <a:effectRef idx="2">
-            <a:schemeClr val="accent1"/>
-          </a:effectRef>
-          <a:fontRef idx="minor">
-            <a:schemeClr val="lt1"/>
-          </a:fontRef>
-        </p:style>
-        <p:txBody>
-          <a:bodyPr rtlCol="0" anchor="ctr"/>
-          <a:lstStyle/>
-          <a:p>
-            <a:pPr algn="ctr"/>
-          </a:p>
-        </p:txBody>
-      </p:sp>
-      <p:sp>
-        <p:nvSpPr>
-          <p:cNvPr id="13" name="Rectangle 12"/>
-          <p:cNvSpPr/>
-          <p:nvPr/>
-        </p:nvSpPr>
-        <p:spPr>
-          <a:xfrm>
-            <a:off x="502920" y="2496312"/>
-            <a:ext cx="109728" cy="987552"/>
-          </a:xfrm>
-          <a:prstGeom prst="rect">
-            <a:avLst/>
-          </a:prstGeom>
-          <a:solidFill>
-            <a:srgbClr val="C0392B"/>
-          </a:solidFill>
-          <a:ln>
-            <a:noFill/>
-          </a:ln>
-          <a:effectLst/>
-        </p:spPr>
-        <p:style>
-          <a:lnRef idx="1">
-            <a:schemeClr val="accent1"/>
-          </a:lnRef>
-          <a:fillRef idx="3">
-            <a:schemeClr val="accent1"/>
-          </a:fillRef>
-          <a:effectRef idx="2">
-            <a:schemeClr val="accent1"/>
-          </a:effectRef>
-          <a:fontRef idx="minor">
-            <a:schemeClr val="lt1"/>
-          </a:fontRef>
-        </p:style>
-        <p:txBody>
-          <a:bodyPr rtlCol="0" anchor="ctr"/>
-          <a:lstStyle/>
-          <a:p>
-            <a:pPr algn="ctr"/>
-          </a:p>
-        </p:txBody>
-      </p:sp>
-      <p:sp>
-        <p:nvSpPr>
-          <p:cNvPr id="14" name="TextBox 13"/>
-          <p:cNvSpPr txBox="1"/>
-          <p:nvPr/>
-        </p:nvSpPr>
-        <p:spPr>
-          <a:xfrm>
-            <a:off x="822960" y="2569464"/>
-            <a:ext cx="10607040" cy="347472"/>
-          </a:xfrm>
-          <a:prstGeom prst="rect">
-            <a:avLst/>
-          </a:prstGeom>
-          <a:noFill/>
-        </p:spPr>
-        <p:txBody>
-          <a:bodyPr wrap="square">
-            <a:spAutoFit/>
-          </a:bodyPr>
-          <a:lstStyle/>
-          <a:p>
-            <a:pPr algn="l">
-              <a:lnSpc>
-                <a:spcPct val="100000"/>
-              </a:lnSpc>
-            </a:pPr>
-            <a:r>
-              <a:rPr sz="1300" b="1" i="0">
-                <a:solidFill>
-                  <a:srgbClr val="23262B"/>
-                </a:solidFill>
-                <a:latin typeface="맑은 고딕"/>
-              </a:rPr>
-              <a:t>키 없이 눌렀을 때 증상 3종</a:t>
-            </a:r>
-          </a:p>
-        </p:txBody>
-      </p:sp>
-      <p:sp>
-        <p:nvSpPr>
-          <p:cNvPr id="15" name="TextBox 14"/>
-          <p:cNvSpPr txBox="1"/>
-          <p:nvPr/>
-        </p:nvSpPr>
-        <p:spPr>
-          <a:xfrm>
-            <a:off x="822960" y="2935224"/>
-            <a:ext cx="10607040" cy="502920"/>
-          </a:xfrm>
-          <a:prstGeom prst="rect">
-            <a:avLst/>
-          </a:prstGeom>
-          <a:noFill/>
-        </p:spPr>
-        <p:txBody>
-          <a:bodyPr wrap="square">
-            <a:spAutoFit/>
-          </a:bodyPr>
-          <a:lstStyle/>
-          <a:p>
-            <a:pPr algn="l">
-              <a:lnSpc>
-                <a:spcPct val="125000"/>
-              </a:lnSpc>
-            </a:pPr>
-            <a:r>
-              <a:rPr sz="1150" b="0" i="0">
-                <a:solidFill>
-                  <a:srgbClr val="7A828E"/>
-                </a:solidFill>
-                <a:latin typeface="맑은 고딕"/>
-              </a:rPr>
-              <a:t>'기본 생성 모델이 지정되지 않았습니다'(🪄 추천) · [1~4단계]·[숫자만 새로 재기] 버튼 잠김 · 경쟁도 만료 경고 — 모두 키 등록으로 해결.</a:t>
-            </a:r>
-          </a:p>
-        </p:txBody>
-      </p:sp>
-      <p:sp>
-        <p:nvSpPr>
-          <p:cNvPr id="16" name="Rectangle 15"/>
-          <p:cNvSpPr/>
-          <p:nvPr/>
-        </p:nvSpPr>
-        <p:spPr>
-          <a:xfrm>
-            <a:off x="502920" y="3575304"/>
-            <a:ext cx="11155680" cy="987552"/>
-          </a:xfrm>
-          <a:prstGeom prst="rect">
-            <a:avLst/>
-          </a:prstGeom>
-          <a:solidFill>
-            <a:srgbClr val="FFFFFF"/>
-          </a:solidFill>
-          <a:ln>
-            <a:noFill/>
-          </a:ln>
-          <a:effectLst/>
-        </p:spPr>
-        <p:style>
-          <a:lnRef idx="1">
-            <a:schemeClr val="accent1"/>
-          </a:lnRef>
-          <a:fillRef idx="3">
-            <a:schemeClr val="accent1"/>
-          </a:fillRef>
-          <a:effectRef idx="2">
-            <a:schemeClr val="accent1"/>
-          </a:effectRef>
-          <a:fontRef idx="minor">
-            <a:schemeClr val="lt1"/>
-          </a:fontRef>
-        </p:style>
-        <p:txBody>
-          <a:bodyPr rtlCol="0" anchor="ctr"/>
-          <a:lstStyle/>
-          <a:p>
-            <a:pPr algn="ctr"/>
-          </a:p>
-        </p:txBody>
-      </p:sp>
-      <p:sp>
-        <p:nvSpPr>
-          <p:cNvPr id="17" name="Rectangle 16"/>
-          <p:cNvSpPr/>
-          <p:nvPr/>
-        </p:nvSpPr>
-        <p:spPr>
-          <a:xfrm>
-            <a:off x="502920" y="3575304"/>
-            <a:ext cx="109728" cy="987552"/>
-          </a:xfrm>
-          <a:prstGeom prst="rect">
-            <a:avLst/>
-          </a:prstGeom>
-          <a:solidFill>
-            <a:srgbClr val="C0392B"/>
-          </a:solidFill>
-          <a:ln>
-            <a:noFill/>
-          </a:ln>
-          <a:effectLst/>
-        </p:spPr>
-        <p:style>
-          <a:lnRef idx="1">
-            <a:schemeClr val="accent1"/>
-          </a:lnRef>
-          <a:fillRef idx="3">
-            <a:schemeClr val="accent1"/>
-          </a:fillRef>
-          <a:effectRef idx="2">
-            <a:schemeClr val="accent1"/>
-          </a:effectRef>
-          <a:fontRef idx="minor">
-            <a:schemeClr val="lt1"/>
-          </a:fontRef>
-        </p:style>
-        <p:txBody>
-          <a:bodyPr rtlCol="0" anchor="ctr"/>
-          <a:lstStyle/>
-          <a:p>
-            <a:pPr algn="ctr"/>
-          </a:p>
-        </p:txBody>
-      </p:sp>
-      <p:sp>
-        <p:nvSpPr>
-          <p:cNvPr id="18" name="TextBox 17"/>
-          <p:cNvSpPr txBox="1"/>
-          <p:nvPr/>
-        </p:nvSpPr>
-        <p:spPr>
-          <a:xfrm>
-            <a:off x="822960" y="3648456"/>
-            <a:ext cx="10607040" cy="347472"/>
-          </a:xfrm>
-          <a:prstGeom prst="rect">
-            <a:avLst/>
-          </a:prstGeom>
-          <a:noFill/>
-        </p:spPr>
-        <p:txBody>
-          <a:bodyPr wrap="square">
-            <a:spAutoFit/>
-          </a:bodyPr>
-          <a:lstStyle/>
-          <a:p>
-            <a:pPr algn="l">
-              <a:lnSpc>
-                <a:spcPct val="100000"/>
-              </a:lnSpc>
-            </a:pPr>
-            <a:r>
-              <a:rPr sz="1300" b="1" i="0">
-                <a:solidFill>
-                  <a:srgbClr val="23262B"/>
-                </a:solidFill>
-                <a:latin typeface="맑은 고딕"/>
-              </a:rPr>
-              <a:t>만료는 조용히 일어난다</a:t>
-            </a:r>
-          </a:p>
-        </p:txBody>
-      </p:sp>
-      <p:sp>
-        <p:nvSpPr>
-          <p:cNvPr id="19" name="TextBox 18"/>
-          <p:cNvSpPr txBox="1"/>
-          <p:nvPr/>
-        </p:nvSpPr>
-        <p:spPr>
-          <a:xfrm>
-            <a:off x="822960" y="4014216"/>
-            <a:ext cx="10607040" cy="502920"/>
-          </a:xfrm>
-          <a:prstGeom prst="rect">
-            <a:avLst/>
-          </a:prstGeom>
-          <a:noFill/>
-        </p:spPr>
-        <p:txBody>
-          <a:bodyPr wrap="square">
-            <a:spAutoFit/>
-          </a:bodyPr>
-          <a:lstStyle/>
-          <a:p>
-            <a:pPr algn="l">
-              <a:lnSpc>
-                <a:spcPct val="125000"/>
-              </a:lnSpc>
-            </a:pPr>
-            <a:r>
-              <a:rPr sz="1150" b="0" i="0">
-                <a:solidFill>
-                  <a:srgbClr val="7A828E"/>
-                </a:solidFill>
-                <a:latin typeface="맑은 고딕"/>
-              </a:rPr>
-              <a:t>에러 없이 전환 가중치만 꺼집니다. '경쟁도 측정 만료' 문구가 보이면 [숫자만 새로 재기].</a:t>
-            </a:r>
-          </a:p>
-        </p:txBody>
-      </p:sp>
-      <p:sp>
-        <p:nvSpPr>
-          <p:cNvPr id="20" name="Rectangle 19"/>
-          <p:cNvSpPr/>
-          <p:nvPr/>
-        </p:nvSpPr>
-        <p:spPr>
-          <a:xfrm>
-            <a:off x="502920" y="4654296"/>
-            <a:ext cx="11155680" cy="987552"/>
-          </a:xfrm>
-          <a:prstGeom prst="rect">
-            <a:avLst/>
-          </a:prstGeom>
-          <a:solidFill>
-            <a:srgbClr val="FFFFFF"/>
-          </a:solidFill>
-          <a:ln>
-            <a:noFill/>
-          </a:ln>
-          <a:effectLst/>
-        </p:spPr>
-        <p:style>
-          <a:lnRef idx="1">
-            <a:schemeClr val="accent1"/>
-          </a:lnRef>
-          <a:fillRef idx="3">
-            <a:schemeClr val="accent1"/>
-          </a:fillRef>
-          <a:effectRef idx="2">
-            <a:schemeClr val="accent1"/>
-          </a:effectRef>
-          <a:fontRef idx="minor">
-            <a:schemeClr val="lt1"/>
-          </a:fontRef>
-        </p:style>
-        <p:txBody>
-          <a:bodyPr rtlCol="0" anchor="ctr"/>
-          <a:lstStyle/>
-          <a:p>
-            <a:pPr algn="ctr"/>
-          </a:p>
-        </p:txBody>
-      </p:sp>
-      <p:sp>
-        <p:nvSpPr>
-          <p:cNvPr id="21" name="Rectangle 20"/>
-          <p:cNvSpPr/>
-          <p:nvPr/>
-        </p:nvSpPr>
-        <p:spPr>
-          <a:xfrm>
-            <a:off x="502920" y="4654296"/>
-            <a:ext cx="109728" cy="987552"/>
-          </a:xfrm>
-          <a:prstGeom prst="rect">
-            <a:avLst/>
-          </a:prstGeom>
-          <a:solidFill>
-            <a:srgbClr val="C0392B"/>
-          </a:solidFill>
-          <a:ln>
-            <a:noFill/>
-          </a:ln>
-          <a:effectLst/>
-        </p:spPr>
-        <p:style>
-          <a:lnRef idx="1">
-            <a:schemeClr val="accent1"/>
-          </a:lnRef>
-          <a:fillRef idx="3">
-            <a:schemeClr val="accent1"/>
-          </a:fillRef>
-          <a:effectRef idx="2">
-            <a:schemeClr val="accent1"/>
-          </a:effectRef>
-          <a:fontRef idx="minor">
-            <a:schemeClr val="lt1"/>
-          </a:fontRef>
-        </p:style>
-        <p:txBody>
-          <a:bodyPr rtlCol="0" anchor="ctr"/>
-          <a:lstStyle/>
-          <a:p>
-            <a:pPr algn="ctr"/>
-          </a:p>
-        </p:txBody>
-      </p:sp>
-      <p:sp>
-        <p:nvSpPr>
-          <p:cNvPr id="22" name="TextBox 21"/>
-          <p:cNvSpPr txBox="1"/>
-          <p:nvPr/>
-        </p:nvSpPr>
-        <p:spPr>
-          <a:xfrm>
-            <a:off x="822960" y="4727448"/>
-            <a:ext cx="10607040" cy="347472"/>
-          </a:xfrm>
-          <a:prstGeom prst="rect">
-            <a:avLst/>
-          </a:prstGeom>
-          <a:noFill/>
-        </p:spPr>
-        <p:txBody>
-          <a:bodyPr wrap="square">
-            <a:spAutoFit/>
-          </a:bodyPr>
-          <a:lstStyle/>
-          <a:p>
-            <a:pPr algn="l">
-              <a:lnSpc>
-                <a:spcPct val="100000"/>
-              </a:lnSpc>
-            </a:pPr>
-            <a:r>
-              <a:rPr sz="1300" b="1" i="0">
-                <a:solidFill>
-                  <a:srgbClr val="23262B"/>
-                </a:solidFill>
-                <a:latin typeface="맑은 고딕"/>
-              </a:rPr>
-              <a:t>[발행]은 사람이 직접</a:t>
-            </a:r>
-          </a:p>
-        </p:txBody>
-      </p:sp>
-      <p:sp>
-        <p:nvSpPr>
-          <p:cNvPr id="23" name="TextBox 22"/>
-          <p:cNvSpPr txBox="1"/>
-          <p:nvPr/>
-        </p:nvSpPr>
-        <p:spPr>
-          <a:xfrm>
-            <a:off x="822960" y="5093208"/>
-            <a:ext cx="10607040" cy="502920"/>
-          </a:xfrm>
-          <a:prstGeom prst="rect">
-            <a:avLst/>
-          </a:prstGeom>
-          <a:noFill/>
-        </p:spPr>
-        <p:txBody>
-          <a:bodyPr wrap="square">
-            <a:spAutoFit/>
-          </a:bodyPr>
-          <a:lstStyle/>
-          <a:p>
-            <a:pPr algn="l">
-              <a:lnSpc>
-                <a:spcPct val="125000"/>
-              </a:lnSpc>
-            </a:pPr>
-            <a:r>
-              <a:rPr sz="1150" b="0" i="0">
-                <a:solidFill>
-                  <a:srgbClr val="7A828E"/>
-                </a:solidFill>
-                <a:latin typeface="맑은 고딕"/>
-              </a:rPr>
-              <a:t>자동으로 발행까지 가지 않는 것은 고장이 아니라 네이버 차단 회피 설계입니다.</a:t>
-            </a:r>
-          </a:p>
-        </p:txBody>
-      </p:sp>
-      <p:sp>
-        <p:nvSpPr>
-          <p:cNvPr id="24" name="Rectangle 23"/>
-          <p:cNvSpPr/>
-          <p:nvPr/>
-        </p:nvSpPr>
-        <p:spPr>
-          <a:xfrm>
-            <a:off x="502920" y="5733288"/>
-            <a:ext cx="11155680" cy="987552"/>
-          </a:xfrm>
-          <a:prstGeom prst="rect">
-            <a:avLst/>
-          </a:prstGeom>
-          <a:solidFill>
-            <a:srgbClr val="FFFFFF"/>
-          </a:solidFill>
-          <a:ln>
-            <a:noFill/>
-          </a:ln>
-          <a:effectLst/>
-        </p:spPr>
-        <p:style>
-          <a:lnRef idx="1">
-            <a:schemeClr val="accent1"/>
-          </a:lnRef>
-          <a:fillRef idx="3">
-            <a:schemeClr val="accent1"/>
-          </a:fillRef>
-          <a:effectRef idx="2">
-            <a:schemeClr val="accent1"/>
-          </a:effectRef>
-          <a:fontRef idx="minor">
-            <a:schemeClr val="lt1"/>
-          </a:fontRef>
-        </p:style>
-        <p:txBody>
-          <a:bodyPr rtlCol="0" anchor="ctr"/>
-          <a:lstStyle/>
-          <a:p>
-            <a:pPr algn="ctr"/>
-          </a:p>
-        </p:txBody>
-      </p:sp>
-      <p:sp>
-        <p:nvSpPr>
-          <p:cNvPr id="25" name="Rectangle 24"/>
-          <p:cNvSpPr/>
-          <p:nvPr/>
-        </p:nvSpPr>
-        <p:spPr>
-          <a:xfrm>
-            <a:off x="502920" y="5733288"/>
-            <a:ext cx="109728" cy="987552"/>
-          </a:xfrm>
-          <a:prstGeom prst="rect">
-            <a:avLst/>
-          </a:prstGeom>
-          <a:solidFill>
-            <a:srgbClr val="C0392B"/>
-          </a:solidFill>
-          <a:ln>
-            <a:noFill/>
-          </a:ln>
-          <a:effectLst/>
-        </p:spPr>
-        <p:style>
-          <a:lnRef idx="1">
-            <a:schemeClr val="accent1"/>
-          </a:lnRef>
-          <a:fillRef idx="3">
-            <a:schemeClr val="accent1"/>
-          </a:fillRef>
-          <a:effectRef idx="2">
-            <a:schemeClr val="accent1"/>
-          </a:effectRef>
-          <a:fontRef idx="minor">
-            <a:schemeClr val="lt1"/>
-          </a:fontRef>
-        </p:style>
-        <p:txBody>
-          <a:bodyPr rtlCol="0" anchor="ctr"/>
-          <a:lstStyle/>
-          <a:p>
-            <a:pPr algn="ctr"/>
-          </a:p>
-        </p:txBody>
-      </p:sp>
-      <p:sp>
-        <p:nvSpPr>
-          <p:cNvPr id="26" name="TextBox 25"/>
-          <p:cNvSpPr txBox="1"/>
-          <p:nvPr/>
-        </p:nvSpPr>
-        <p:spPr>
-          <a:xfrm>
-            <a:off x="822960" y="5806440"/>
-            <a:ext cx="10607040" cy="347472"/>
-          </a:xfrm>
-          <a:prstGeom prst="rect">
-            <a:avLst/>
-          </a:prstGeom>
-          <a:noFill/>
-        </p:spPr>
-        <p:txBody>
-          <a:bodyPr wrap="square">
-            <a:spAutoFit/>
-          </a:bodyPr>
-          <a:lstStyle/>
-          <a:p>
-            <a:pPr algn="l">
-              <a:lnSpc>
-                <a:spcPct val="100000"/>
-              </a:lnSpc>
-            </a:pPr>
-            <a:r>
-              <a:rPr sz="1300" b="1" i="0">
-                <a:solidFill>
-                  <a:srgbClr val="23262B"/>
-                </a:solidFill>
-                <a:latin typeface="맑은 고딕"/>
-              </a:rPr>
-              <a:t>%APPDATA%\OSMU_CJC 폴더를 함부로 지우지 말기</a:t>
-            </a:r>
-          </a:p>
-        </p:txBody>
-      </p:sp>
-      <p:sp>
-        <p:nvSpPr>
-          <p:cNvPr id="27" name="TextBox 26"/>
-          <p:cNvSpPr txBox="1"/>
-          <p:nvPr/>
-        </p:nvSpPr>
-        <p:spPr>
-          <a:xfrm>
-            <a:off x="822960" y="6172200"/>
-            <a:ext cx="10607040" cy="502920"/>
-          </a:xfrm>
-          <a:prstGeom prst="rect">
-            <a:avLst/>
-          </a:prstGeom>
-          <a:noFill/>
-        </p:spPr>
-        <p:txBody>
-          <a:bodyPr wrap="square">
-            <a:spAutoFit/>
-          </a:bodyPr>
-          <a:lstStyle/>
-          <a:p>
-            <a:pPr algn="l">
-              <a:lnSpc>
-                <a:spcPct val="125000"/>
-              </a:lnSpc>
-            </a:pPr>
-            <a:r>
-              <a:rPr sz="1150" b="0" i="0">
-                <a:solidFill>
-                  <a:srgbClr val="7A828E"/>
-                </a:solidFill>
-                <a:latin typeface="맑은 고딕"/>
-              </a:rPr>
-              <a:t>DB·사진·마스터키가 전부 안에 있습니다(앱을 제거해도 남는 이유). 브랜드 킷을 처음부터 다시 채울 때만 삭제 후 재시작하세요.</a:t>
-            </a:r>
-          </a:p>
-        </p:txBody>
-      </p:sp>
-    </p:spTree>
-  </p:cSld>
-  <p:clrMapOvr>
-    <a:masterClrMapping/>
-  </p:clrMapOvr>
-</p:sld>
-</file>
-
 <file path=ppt/slides/slide24.xml><?xml version="1.0" encoding="utf-8"?>
 <p:sld xmlns:a="http://schemas.openxmlformats.org/drawingml/2006/main" xmlns:p="http://schemas.openxmlformats.org/presentationml/2006/main" xmlns:r="http://schemas.openxmlformats.org/officeDocument/2006/relationships">
   <p:cSld>
@@ -15492,7 +14869,7 @@
                 </a:solidFill>
                 <a:latin typeface="맑은 고딕"/>
               </a:rPr>
-              <a:t>④ 안전 · FAQ</a:t>
+              <a:t>④ 안전 · 주의사항</a:t>
             </a:r>
           </a:p>
         </p:txBody>
@@ -15531,7 +14908,7 @@
                 </a:solidFill>
                 <a:latin typeface="맑은 고딕"/>
               </a:rPr>
-              <a:t>자주 묻는 질문</a:t>
+              <a:t>함정 모음 — 먼저 알면 안 헷갈립니다</a:t>
             </a:r>
           </a:p>
         </p:txBody>
@@ -15660,14 +15037,58 @@
       </p:sp>
       <p:sp>
         <p:nvSpPr>
-          <p:cNvPr id="9" name="TextBox 8"/>
-          <p:cNvSpPr txBox="1"/>
-          <p:nvPr/>
-        </p:nvSpPr>
-        <p:spPr>
-          <a:xfrm>
-            <a:off x="731520" y="1490472"/>
-            <a:ext cx="10607040" cy="365760"/>
+          <p:cNvPr id="9" name="Rectangle 8"/>
+          <p:cNvSpPr/>
+          <p:nvPr/>
+        </p:nvSpPr>
+        <p:spPr>
+          <a:xfrm>
+            <a:off x="502920" y="1417320"/>
+            <a:ext cx="109728" cy="987552"/>
+          </a:xfrm>
+          <a:prstGeom prst="rect">
+            <a:avLst/>
+          </a:prstGeom>
+          <a:solidFill>
+            <a:srgbClr val="C0392B"/>
+          </a:solidFill>
+          <a:ln>
+            <a:noFill/>
+          </a:ln>
+          <a:effectLst/>
+        </p:spPr>
+        <p:style>
+          <a:lnRef idx="1">
+            <a:schemeClr val="accent1"/>
+          </a:lnRef>
+          <a:fillRef idx="3">
+            <a:schemeClr val="accent1"/>
+          </a:fillRef>
+          <a:effectRef idx="2">
+            <a:schemeClr val="accent1"/>
+          </a:effectRef>
+          <a:fontRef idx="minor">
+            <a:schemeClr val="lt1"/>
+          </a:fontRef>
+        </p:style>
+        <p:txBody>
+          <a:bodyPr rtlCol="0" anchor="ctr"/>
+          <a:lstStyle/>
+          <a:p>
+            <a:pPr algn="ctr"/>
+          </a:p>
+        </p:txBody>
+      </p:sp>
+      <p:sp>
+        <p:nvSpPr>
+          <p:cNvPr id="10" name="TextBox 9"/>
+          <p:cNvSpPr txBox="1"/>
+          <p:nvPr/>
+        </p:nvSpPr>
+        <p:spPr>
+          <a:xfrm>
+            <a:off x="822960" y="1490472"/>
+            <a:ext cx="10607040" cy="347472"/>
           </a:xfrm>
           <a:prstGeom prst="rect">
             <a:avLst/>
@@ -15686,27 +15107,27 @@
               </a:lnSpc>
             </a:pPr>
             <a:r>
-              <a:rPr sz="1250" b="1" i="0">
-                <a:solidFill>
-                  <a:srgbClr val="122A44"/>
-                </a:solidFill>
-                <a:latin typeface="맑은 고딕"/>
-              </a:rPr>
-              <a:t>Q. [🪄 브랜드에서 추천]이 실패해요</a:t>
-            </a:r>
-          </a:p>
-        </p:txBody>
-      </p:sp>
-      <p:sp>
-        <p:nvSpPr>
-          <p:cNvPr id="10" name="TextBox 9"/>
-          <p:cNvSpPr txBox="1"/>
-          <p:nvPr/>
-        </p:nvSpPr>
-        <p:spPr>
-          <a:xfrm>
-            <a:off x="731520" y="1874520"/>
-            <a:ext cx="10607040" cy="457200"/>
+              <a:rPr sz="1300" b="1" i="0">
+                <a:solidFill>
+                  <a:srgbClr val="23262B"/>
+                </a:solidFill>
+                <a:latin typeface="맑은 고딕"/>
+              </a:rPr>
+              <a:t>비밀번호 칸이 비어 보여도 저장된 게 맞다</a:t>
+            </a:r>
+          </a:p>
+        </p:txBody>
+      </p:sp>
+      <p:sp>
+        <p:nvSpPr>
+          <p:cNvPr id="11" name="TextBox 10"/>
+          <p:cNvSpPr txBox="1"/>
+          <p:nvPr/>
+        </p:nvSpPr>
+        <p:spPr>
+          <a:xfrm>
+            <a:off x="822960" y="1856232"/>
+            <a:ext cx="10607040" cy="502920"/>
           </a:xfrm>
           <a:prstGeom prst="rect">
             <a:avLst/>
@@ -15721,30 +15142,30 @@
           <a:p>
             <a:pPr algn="l">
               <a:lnSpc>
-                <a:spcPct val="120000"/>
-              </a:lnSpc>
-            </a:pPr>
-            <a:r>
-              <a:rPr sz="1100" b="0" i="0">
-                <a:solidFill>
-                  <a:srgbClr val="23262B"/>
-                </a:solidFill>
-                <a:latin typeface="맑은 고딕"/>
-              </a:rPr>
-              <a:t>A. '추천 실패: ...' 뒤의 메시지가 원인입니다. 대부분 LLM 미등록 → LLM 탭에서 키 등록 후 기본 모델 확인.</a:t>
-            </a:r>
-          </a:p>
-        </p:txBody>
-      </p:sp>
-      <p:sp>
-        <p:nvSpPr>
-          <p:cNvPr id="11" name="Rectangle 10"/>
+                <a:spcPct val="125000"/>
+              </a:lnSpc>
+            </a:pPr>
+            <a:r>
+              <a:rPr sz="1150" b="0" i="0">
+                <a:solidFill>
+                  <a:srgbClr val="7A828E"/>
+                </a:solidFill>
+                <a:latin typeface="맑은 고딕"/>
+              </a:rPr>
+              <a:t>보안상 키는 절대 다시 보여주지 않습니다. '✅ 등록됨 ****뒷4자리 · 저장 시각' 배지로 확인하세요.</a:t>
+            </a:r>
+          </a:p>
+        </p:txBody>
+      </p:sp>
+      <p:sp>
+        <p:nvSpPr>
+          <p:cNvPr id="12" name="Rectangle 11"/>
           <p:cNvSpPr/>
           <p:nvPr/>
         </p:nvSpPr>
         <p:spPr>
           <a:xfrm>
-            <a:off x="502920" y="2478024"/>
+            <a:off x="502920" y="2496312"/>
             <a:ext cx="11155680" cy="987552"/>
           </a:xfrm>
           <a:prstGeom prst="rect">
@@ -15782,14 +15203,58 @@
       </p:sp>
       <p:sp>
         <p:nvSpPr>
-          <p:cNvPr id="12" name="TextBox 11"/>
-          <p:cNvSpPr txBox="1"/>
-          <p:nvPr/>
-        </p:nvSpPr>
-        <p:spPr>
-          <a:xfrm>
-            <a:off x="731520" y="2551176"/>
-            <a:ext cx="10607040" cy="365760"/>
+          <p:cNvPr id="13" name="Rectangle 12"/>
+          <p:cNvSpPr/>
+          <p:nvPr/>
+        </p:nvSpPr>
+        <p:spPr>
+          <a:xfrm>
+            <a:off x="502920" y="2496312"/>
+            <a:ext cx="109728" cy="987552"/>
+          </a:xfrm>
+          <a:prstGeom prst="rect">
+            <a:avLst/>
+          </a:prstGeom>
+          <a:solidFill>
+            <a:srgbClr val="C0392B"/>
+          </a:solidFill>
+          <a:ln>
+            <a:noFill/>
+          </a:ln>
+          <a:effectLst/>
+        </p:spPr>
+        <p:style>
+          <a:lnRef idx="1">
+            <a:schemeClr val="accent1"/>
+          </a:lnRef>
+          <a:fillRef idx="3">
+            <a:schemeClr val="accent1"/>
+          </a:fillRef>
+          <a:effectRef idx="2">
+            <a:schemeClr val="accent1"/>
+          </a:effectRef>
+          <a:fontRef idx="minor">
+            <a:schemeClr val="lt1"/>
+          </a:fontRef>
+        </p:style>
+        <p:txBody>
+          <a:bodyPr rtlCol="0" anchor="ctr"/>
+          <a:lstStyle/>
+          <a:p>
+            <a:pPr algn="ctr"/>
+          </a:p>
+        </p:txBody>
+      </p:sp>
+      <p:sp>
+        <p:nvSpPr>
+          <p:cNvPr id="14" name="TextBox 13"/>
+          <p:cNvSpPr txBox="1"/>
+          <p:nvPr/>
+        </p:nvSpPr>
+        <p:spPr>
+          <a:xfrm>
+            <a:off x="822960" y="2569464"/>
+            <a:ext cx="10607040" cy="347472"/>
           </a:xfrm>
           <a:prstGeom prst="rect">
             <a:avLst/>
@@ -15808,27 +15273,27 @@
               </a:lnSpc>
             </a:pPr>
             <a:r>
-              <a:rPr sz="1250" b="1" i="0">
-                <a:solidFill>
-                  <a:srgbClr val="122A44"/>
-                </a:solidFill>
-                <a:latin typeface="맑은 고딕"/>
-              </a:rPr>
-              <a:t>Q. 키를 저장했는데 칸이 비어 있어요</a:t>
-            </a:r>
-          </a:p>
-        </p:txBody>
-      </p:sp>
-      <p:sp>
-        <p:nvSpPr>
-          <p:cNvPr id="13" name="TextBox 12"/>
-          <p:cNvSpPr txBox="1"/>
-          <p:nvPr/>
-        </p:nvSpPr>
-        <p:spPr>
-          <a:xfrm>
-            <a:off x="731520" y="2935224"/>
-            <a:ext cx="10607040" cy="457200"/>
+              <a:rPr sz="1300" b="1" i="0">
+                <a:solidFill>
+                  <a:srgbClr val="23262B"/>
+                </a:solidFill>
+                <a:latin typeface="맑은 고딕"/>
+              </a:rPr>
+              <a:t>키 없이 눌렀을 때 증상 3종</a:t>
+            </a:r>
+          </a:p>
+        </p:txBody>
+      </p:sp>
+      <p:sp>
+        <p:nvSpPr>
+          <p:cNvPr id="15" name="TextBox 14"/>
+          <p:cNvSpPr txBox="1"/>
+          <p:nvPr/>
+        </p:nvSpPr>
+        <p:spPr>
+          <a:xfrm>
+            <a:off x="822960" y="2935224"/>
+            <a:ext cx="10607040" cy="502920"/>
           </a:xfrm>
           <a:prstGeom prst="rect">
             <a:avLst/>
@@ -15843,30 +15308,30 @@
           <a:p>
             <a:pPr algn="l">
               <a:lnSpc>
-                <a:spcPct val="120000"/>
-              </a:lnSpc>
-            </a:pPr>
-            <a:r>
-              <a:rPr sz="1100" b="0" i="0">
-                <a:solidFill>
-                  <a:srgbClr val="23262B"/>
-                </a:solidFill>
-                <a:latin typeface="맑은 고딕"/>
-              </a:rPr>
-              <a:t>A. 정상입니다. 배지(✅ 등록됨 ****...)로 확인하세요. 바꾸려면 새 키 입력 후 다시 [연결 테스트 · 저장].</a:t>
-            </a:r>
-          </a:p>
-        </p:txBody>
-      </p:sp>
-      <p:sp>
-        <p:nvSpPr>
-          <p:cNvPr id="14" name="Rectangle 13"/>
+                <a:spcPct val="125000"/>
+              </a:lnSpc>
+            </a:pPr>
+            <a:r>
+              <a:rPr sz="1150" b="0" i="0">
+                <a:solidFill>
+                  <a:srgbClr val="7A828E"/>
+                </a:solidFill>
+                <a:latin typeface="맑은 고딕"/>
+              </a:rPr>
+              <a:t>'기본 생성 모델이 지정되지 않았습니다'(🪄 추천) · [1~4단계]·[숫자만 새로 재기] 버튼 잠김 · 경쟁도 만료 경고 — 모두 키 등록으로 해결.</a:t>
+            </a:r>
+          </a:p>
+        </p:txBody>
+      </p:sp>
+      <p:sp>
+        <p:nvSpPr>
+          <p:cNvPr id="16" name="Rectangle 15"/>
           <p:cNvSpPr/>
           <p:nvPr/>
         </p:nvSpPr>
         <p:spPr>
           <a:xfrm>
-            <a:off x="502920" y="3538728"/>
+            <a:off x="502920" y="3575304"/>
             <a:ext cx="11155680" cy="987552"/>
           </a:xfrm>
           <a:prstGeom prst="rect">
@@ -15904,91 +15369,135 @@
       </p:sp>
       <p:sp>
         <p:nvSpPr>
-          <p:cNvPr id="15" name="TextBox 14"/>
-          <p:cNvSpPr txBox="1"/>
-          <p:nvPr/>
-        </p:nvSpPr>
-        <p:spPr>
-          <a:xfrm>
-            <a:off x="731520" y="3611880"/>
-            <a:ext cx="10607040" cy="365760"/>
-          </a:xfrm>
-          <a:prstGeom prst="rect">
-            <a:avLst/>
-          </a:prstGeom>
-          <a:noFill/>
-        </p:spPr>
-        <p:txBody>
-          <a:bodyPr wrap="square">
-            <a:spAutoFit/>
-          </a:bodyPr>
-          <a:lstStyle/>
-          <a:p>
-            <a:pPr algn="l">
-              <a:lnSpc>
-                <a:spcPct val="100000"/>
-              </a:lnSpc>
-            </a:pPr>
-            <a:r>
-              <a:rPr sz="1250" b="1" i="0">
-                <a:solidFill>
-                  <a:srgbClr val="122A44"/>
-                </a:solidFill>
-                <a:latin typeface="맑은 고딕"/>
-              </a:rPr>
-              <a:t>Q. 4단계 적용 후에 [숫자만 새로 재기]를 또 눌러야 하나요?</a:t>
-            </a:r>
-          </a:p>
-        </p:txBody>
-      </p:sp>
-      <p:sp>
-        <p:nvSpPr>
-          <p:cNvPr id="16" name="TextBox 15"/>
-          <p:cNvSpPr txBox="1"/>
-          <p:nvPr/>
-        </p:nvSpPr>
-        <p:spPr>
-          <a:xfrm>
-            <a:off x="731520" y="3995928"/>
-            <a:ext cx="10607040" cy="457200"/>
-          </a:xfrm>
-          <a:prstGeom prst="rect">
-            <a:avLst/>
-          </a:prstGeom>
-          <a:noFill/>
-        </p:spPr>
-        <p:txBody>
-          <a:bodyPr wrap="square">
-            <a:spAutoFit/>
-          </a:bodyPr>
-          <a:lstStyle/>
-          <a:p>
-            <a:pPr algn="l">
-              <a:lnSpc>
-                <a:spcPct val="120000"/>
-              </a:lnSpc>
-            </a:pPr>
-            <a:r>
-              <a:rPr sz="1100" b="0" i="0">
-                <a:solidFill>
-                  <a:srgbClr val="23262B"/>
-                </a:solidFill>
-                <a:latin typeface="맑은 고딕"/>
-              </a:rPr>
-              <a:t>A. 아니요. 4단계 [적용]이 곧 SEO 키워드 교체이고, 새 키워드 측정까지 같이 끝냅니다. 숫자 재기는 30일 뒤 만료 경고가 뜰 때만.</a:t>
-            </a:r>
-          </a:p>
-        </p:txBody>
-      </p:sp>
-      <p:sp>
-        <p:nvSpPr>
           <p:cNvPr id="17" name="Rectangle 16"/>
           <p:cNvSpPr/>
           <p:nvPr/>
         </p:nvSpPr>
         <p:spPr>
           <a:xfrm>
-            <a:off x="502920" y="4599432"/>
+            <a:off x="502920" y="3575304"/>
+            <a:ext cx="109728" cy="987552"/>
+          </a:xfrm>
+          <a:prstGeom prst="rect">
+            <a:avLst/>
+          </a:prstGeom>
+          <a:solidFill>
+            <a:srgbClr val="C0392B"/>
+          </a:solidFill>
+          <a:ln>
+            <a:noFill/>
+          </a:ln>
+          <a:effectLst/>
+        </p:spPr>
+        <p:style>
+          <a:lnRef idx="1">
+            <a:schemeClr val="accent1"/>
+          </a:lnRef>
+          <a:fillRef idx="3">
+            <a:schemeClr val="accent1"/>
+          </a:fillRef>
+          <a:effectRef idx="2">
+            <a:schemeClr val="accent1"/>
+          </a:effectRef>
+          <a:fontRef idx="minor">
+            <a:schemeClr val="lt1"/>
+          </a:fontRef>
+        </p:style>
+        <p:txBody>
+          <a:bodyPr rtlCol="0" anchor="ctr"/>
+          <a:lstStyle/>
+          <a:p>
+            <a:pPr algn="ctr"/>
+          </a:p>
+        </p:txBody>
+      </p:sp>
+      <p:sp>
+        <p:nvSpPr>
+          <p:cNvPr id="18" name="TextBox 17"/>
+          <p:cNvSpPr txBox="1"/>
+          <p:nvPr/>
+        </p:nvSpPr>
+        <p:spPr>
+          <a:xfrm>
+            <a:off x="822960" y="3648456"/>
+            <a:ext cx="10607040" cy="347472"/>
+          </a:xfrm>
+          <a:prstGeom prst="rect">
+            <a:avLst/>
+          </a:prstGeom>
+          <a:noFill/>
+        </p:spPr>
+        <p:txBody>
+          <a:bodyPr wrap="square">
+            <a:spAutoFit/>
+          </a:bodyPr>
+          <a:lstStyle/>
+          <a:p>
+            <a:pPr algn="l">
+              <a:lnSpc>
+                <a:spcPct val="100000"/>
+              </a:lnSpc>
+            </a:pPr>
+            <a:r>
+              <a:rPr sz="1300" b="1" i="0">
+                <a:solidFill>
+                  <a:srgbClr val="23262B"/>
+                </a:solidFill>
+                <a:latin typeface="맑은 고딕"/>
+              </a:rPr>
+              <a:t>만료는 조용히 일어난다</a:t>
+            </a:r>
+          </a:p>
+        </p:txBody>
+      </p:sp>
+      <p:sp>
+        <p:nvSpPr>
+          <p:cNvPr id="19" name="TextBox 18"/>
+          <p:cNvSpPr txBox="1"/>
+          <p:nvPr/>
+        </p:nvSpPr>
+        <p:spPr>
+          <a:xfrm>
+            <a:off x="822960" y="4014216"/>
+            <a:ext cx="10607040" cy="502920"/>
+          </a:xfrm>
+          <a:prstGeom prst="rect">
+            <a:avLst/>
+          </a:prstGeom>
+          <a:noFill/>
+        </p:spPr>
+        <p:txBody>
+          <a:bodyPr wrap="square">
+            <a:spAutoFit/>
+          </a:bodyPr>
+          <a:lstStyle/>
+          <a:p>
+            <a:pPr algn="l">
+              <a:lnSpc>
+                <a:spcPct val="125000"/>
+              </a:lnSpc>
+            </a:pPr>
+            <a:r>
+              <a:rPr sz="1150" b="0" i="0">
+                <a:solidFill>
+                  <a:srgbClr val="7A828E"/>
+                </a:solidFill>
+                <a:latin typeface="맑은 고딕"/>
+              </a:rPr>
+              <a:t>에러 없이 전환 가중치만 꺼집니다. '경쟁도 측정 만료' 문구가 보이면 [숫자만 새로 재기].</a:t>
+            </a:r>
+          </a:p>
+        </p:txBody>
+      </p:sp>
+      <p:sp>
+        <p:nvSpPr>
+          <p:cNvPr id="20" name="Rectangle 19"/>
+          <p:cNvSpPr/>
+          <p:nvPr/>
+        </p:nvSpPr>
+        <p:spPr>
+          <a:xfrm>
+            <a:off x="502920" y="4654296"/>
             <a:ext cx="11155680" cy="987552"/>
           </a:xfrm>
           <a:prstGeom prst="rect">
@@ -16026,14 +15535,58 @@
       </p:sp>
       <p:sp>
         <p:nvSpPr>
-          <p:cNvPr id="18" name="TextBox 17"/>
-          <p:cNvSpPr txBox="1"/>
-          <p:nvPr/>
-        </p:nvSpPr>
-        <p:spPr>
-          <a:xfrm>
-            <a:off x="731520" y="4672584"/>
-            <a:ext cx="10607040" cy="365760"/>
+          <p:cNvPr id="21" name="Rectangle 20"/>
+          <p:cNvSpPr/>
+          <p:nvPr/>
+        </p:nvSpPr>
+        <p:spPr>
+          <a:xfrm>
+            <a:off x="502920" y="4654296"/>
+            <a:ext cx="109728" cy="987552"/>
+          </a:xfrm>
+          <a:prstGeom prst="rect">
+            <a:avLst/>
+          </a:prstGeom>
+          <a:solidFill>
+            <a:srgbClr val="C0392B"/>
+          </a:solidFill>
+          <a:ln>
+            <a:noFill/>
+          </a:ln>
+          <a:effectLst/>
+        </p:spPr>
+        <p:style>
+          <a:lnRef idx="1">
+            <a:schemeClr val="accent1"/>
+          </a:lnRef>
+          <a:fillRef idx="3">
+            <a:schemeClr val="accent1"/>
+          </a:fillRef>
+          <a:effectRef idx="2">
+            <a:schemeClr val="accent1"/>
+          </a:effectRef>
+          <a:fontRef idx="minor">
+            <a:schemeClr val="lt1"/>
+          </a:fontRef>
+        </p:style>
+        <p:txBody>
+          <a:bodyPr rtlCol="0" anchor="ctr"/>
+          <a:lstStyle/>
+          <a:p>
+            <a:pPr algn="ctr"/>
+          </a:p>
+        </p:txBody>
+      </p:sp>
+      <p:sp>
+        <p:nvSpPr>
+          <p:cNvPr id="22" name="TextBox 21"/>
+          <p:cNvSpPr txBox="1"/>
+          <p:nvPr/>
+        </p:nvSpPr>
+        <p:spPr>
+          <a:xfrm>
+            <a:off x="822960" y="4727448"/>
+            <a:ext cx="10607040" cy="347472"/>
           </a:xfrm>
           <a:prstGeom prst="rect">
             <a:avLst/>
@@ -16052,27 +15605,27 @@
               </a:lnSpc>
             </a:pPr>
             <a:r>
-              <a:rPr sz="1250" b="1" i="0">
-                <a:solidFill>
-                  <a:srgbClr val="122A44"/>
-                </a:solidFill>
-                <a:latin typeface="맑은 고딕"/>
-              </a:rPr>
-              <a:t>Q. 경쟁도 만료 경고가 떠요</a:t>
-            </a:r>
-          </a:p>
-        </p:txBody>
-      </p:sp>
-      <p:sp>
-        <p:nvSpPr>
-          <p:cNvPr id="19" name="TextBox 18"/>
-          <p:cNvSpPr txBox="1"/>
-          <p:nvPr/>
-        </p:nvSpPr>
-        <p:spPr>
-          <a:xfrm>
-            <a:off x="731520" y="5056632"/>
-            <a:ext cx="10607040" cy="457200"/>
+              <a:rPr sz="1300" b="1" i="0">
+                <a:solidFill>
+                  <a:srgbClr val="23262B"/>
+                </a:solidFill>
+                <a:latin typeface="맑은 고딕"/>
+              </a:rPr>
+              <a:t>[발행]은 사람이 직접</a:t>
+            </a:r>
+          </a:p>
+        </p:txBody>
+      </p:sp>
+      <p:sp>
+        <p:nvSpPr>
+          <p:cNvPr id="23" name="TextBox 22"/>
+          <p:cNvSpPr txBox="1"/>
+          <p:nvPr/>
+        </p:nvSpPr>
+        <p:spPr>
+          <a:xfrm>
+            <a:off x="822960" y="5093208"/>
+            <a:ext cx="10607040" cy="502920"/>
           </a:xfrm>
           <a:prstGeom prst="rect">
             <a:avLst/>
@@ -16087,30 +15640,30 @@
           <a:p>
             <a:pPr algn="l">
               <a:lnSpc>
-                <a:spcPct val="120000"/>
-              </a:lnSpc>
-            </a:pPr>
-            <a:r>
-              <a:rPr sz="1100" b="0" i="0">
-                <a:solidFill>
-                  <a:srgbClr val="23262B"/>
-                </a:solidFill>
-                <a:latin typeface="맑은 고딕"/>
-              </a:rPr>
-              <a:t>A. [🔄 숫자만 새로 재기]를 누르세요. 캐시가 살아있는 값은 재과금되지 않습니다.</a:t>
-            </a:r>
-          </a:p>
-        </p:txBody>
-      </p:sp>
-      <p:sp>
-        <p:nvSpPr>
-          <p:cNvPr id="20" name="Rectangle 19"/>
+                <a:spcPct val="125000"/>
+              </a:lnSpc>
+            </a:pPr>
+            <a:r>
+              <a:rPr sz="1150" b="0" i="0">
+                <a:solidFill>
+                  <a:srgbClr val="7A828E"/>
+                </a:solidFill>
+                <a:latin typeface="맑은 고딕"/>
+              </a:rPr>
+              <a:t>자동으로 발행까지 가지 않는 것은 고장이 아니라 네이버 차단 회피 설계입니다.</a:t>
+            </a:r>
+          </a:p>
+        </p:txBody>
+      </p:sp>
+      <p:sp>
+        <p:nvSpPr>
+          <p:cNvPr id="24" name="Rectangle 23"/>
           <p:cNvSpPr/>
           <p:nvPr/>
         </p:nvSpPr>
         <p:spPr>
           <a:xfrm>
-            <a:off x="502920" y="5660136"/>
+            <a:off x="502920" y="5733288"/>
             <a:ext cx="11155680" cy="987552"/>
           </a:xfrm>
           <a:prstGeom prst="rect">
@@ -16148,14 +15701,58 @@
       </p:sp>
       <p:sp>
         <p:nvSpPr>
-          <p:cNvPr id="21" name="TextBox 20"/>
-          <p:cNvSpPr txBox="1"/>
-          <p:nvPr/>
-        </p:nvSpPr>
-        <p:spPr>
-          <a:xfrm>
-            <a:off x="731520" y="5733288"/>
-            <a:ext cx="10607040" cy="365760"/>
+          <p:cNvPr id="25" name="Rectangle 24"/>
+          <p:cNvSpPr/>
+          <p:nvPr/>
+        </p:nvSpPr>
+        <p:spPr>
+          <a:xfrm>
+            <a:off x="502920" y="5733288"/>
+            <a:ext cx="109728" cy="987552"/>
+          </a:xfrm>
+          <a:prstGeom prst="rect">
+            <a:avLst/>
+          </a:prstGeom>
+          <a:solidFill>
+            <a:srgbClr val="C0392B"/>
+          </a:solidFill>
+          <a:ln>
+            <a:noFill/>
+          </a:ln>
+          <a:effectLst/>
+        </p:spPr>
+        <p:style>
+          <a:lnRef idx="1">
+            <a:schemeClr val="accent1"/>
+          </a:lnRef>
+          <a:fillRef idx="3">
+            <a:schemeClr val="accent1"/>
+          </a:fillRef>
+          <a:effectRef idx="2">
+            <a:schemeClr val="accent1"/>
+          </a:effectRef>
+          <a:fontRef idx="minor">
+            <a:schemeClr val="lt1"/>
+          </a:fontRef>
+        </p:style>
+        <p:txBody>
+          <a:bodyPr rtlCol="0" anchor="ctr"/>
+          <a:lstStyle/>
+          <a:p>
+            <a:pPr algn="ctr"/>
+          </a:p>
+        </p:txBody>
+      </p:sp>
+      <p:sp>
+        <p:nvSpPr>
+          <p:cNvPr id="26" name="TextBox 25"/>
+          <p:cNvSpPr txBox="1"/>
+          <p:nvPr/>
+        </p:nvSpPr>
+        <p:spPr>
+          <a:xfrm>
+            <a:off x="822960" y="5806440"/>
+            <a:ext cx="10607040" cy="347472"/>
           </a:xfrm>
           <a:prstGeom prst="rect">
             <a:avLst/>
@@ -16174,27 +15771,27 @@
               </a:lnSpc>
             </a:pPr>
             <a:r>
-              <a:rPr sz="1250" b="1" i="0">
-                <a:solidFill>
-                  <a:srgbClr val="122A44"/>
-                </a:solidFill>
-                <a:latin typeface="맑은 고딕"/>
-              </a:rPr>
-              <a:t>Q. 브랜드 킷을 고쳤는데 앱에 안 바껴요</a:t>
-            </a:r>
-          </a:p>
-        </p:txBody>
-      </p:sp>
-      <p:sp>
-        <p:nvSpPr>
-          <p:cNvPr id="22" name="TextBox 21"/>
-          <p:cNvSpPr txBox="1"/>
-          <p:nvPr/>
-        </p:nvSpPr>
-        <p:spPr>
-          <a:xfrm>
-            <a:off x="731520" y="6117336"/>
-            <a:ext cx="10607040" cy="457200"/>
+              <a:rPr sz="1300" b="1" i="0">
+                <a:solidFill>
+                  <a:srgbClr val="23262B"/>
+                </a:solidFill>
+                <a:latin typeface="맑은 고딕"/>
+              </a:rPr>
+              <a:t>%APPDATA%\OSMU_CJC 폴더를 함부로 지우지 말기</a:t>
+            </a:r>
+          </a:p>
+        </p:txBody>
+      </p:sp>
+      <p:sp>
+        <p:nvSpPr>
+          <p:cNvPr id="27" name="TextBox 26"/>
+          <p:cNvSpPr txBox="1"/>
+          <p:nvPr/>
+        </p:nvSpPr>
+        <p:spPr>
+          <a:xfrm>
+            <a:off x="822960" y="6172200"/>
+            <a:ext cx="10607040" cy="502920"/>
           </a:xfrm>
           <a:prstGeom prst="rect">
             <a:avLst/>
@@ -16209,17 +15806,17 @@
           <a:p>
             <a:pPr algn="l">
               <a:lnSpc>
-                <a:spcPct val="120000"/>
-              </a:lnSpc>
-            </a:pPr>
-            <a:r>
-              <a:rPr sz="1100" b="0" i="0">
-                <a:solidFill>
-                  <a:srgbClr val="23262B"/>
-                </a:solidFill>
-                <a:latin typeface="맑은 고딕"/>
-              </a:rPr>
-              <a:t>A. 킷 값은 [킷 저장], 계정·금기어는 [회사 공통 저장]을 눌렀는지, 워크벤치에서 그 킷을 골랐는지 확인하세요. 저장은 다음 생성부터 반영됩니다.</a:t>
+                <a:spcPct val="125000"/>
+              </a:lnSpc>
+            </a:pPr>
+            <a:r>
+              <a:rPr sz="1150" b="0" i="0">
+                <a:solidFill>
+                  <a:srgbClr val="7A828E"/>
+                </a:solidFill>
+                <a:latin typeface="맑은 고딕"/>
+              </a:rPr>
+              <a:t>DB·사진·마스터키가 전부 안에 있습니다(앱을 제거해도 남는 이유). 브랜드 킷을 처음부터 다시 채울 때만 삭제 후 재시작하세요.</a:t>
             </a:r>
           </a:p>
         </p:txBody>
@@ -16233,6 +15830,886 @@
 </file>
 
 <file path=ppt/slides/slide25.xml><?xml version="1.0" encoding="utf-8"?>
+<p:sld xmlns:a="http://schemas.openxmlformats.org/drawingml/2006/main" xmlns:p="http://schemas.openxmlformats.org/presentationml/2006/main" xmlns:r="http://schemas.openxmlformats.org/officeDocument/2006/relationships">
+  <p:cSld>
+    <p:bg>
+      <p:bgPr>
+        <a:solidFill>
+          <a:srgbClr val="F7F5F0"/>
+        </a:solidFill>
+        <a:effectLst/>
+      </p:bgPr>
+    </p:bg>
+    <p:spTree>
+      <p:nvGrpSpPr>
+        <p:cNvPr id="1" name=""/>
+        <p:cNvGrpSpPr/>
+        <p:nvPr/>
+      </p:nvGrpSpPr>
+      <p:grpSpPr/>
+      <p:sp>
+        <p:nvSpPr>
+          <p:cNvPr id="2" name="Rectangle 1"/>
+          <p:cNvSpPr/>
+          <p:nvPr/>
+        </p:nvSpPr>
+        <p:spPr>
+          <a:xfrm>
+            <a:off x="0" y="0"/>
+            <a:ext cx="12191695" cy="1051560"/>
+          </a:xfrm>
+          <a:prstGeom prst="rect">
+            <a:avLst/>
+          </a:prstGeom>
+          <a:solidFill>
+            <a:srgbClr val="122A44"/>
+          </a:solidFill>
+          <a:ln>
+            <a:noFill/>
+          </a:ln>
+          <a:effectLst/>
+        </p:spPr>
+        <p:style>
+          <a:lnRef idx="1">
+            <a:schemeClr val="accent1"/>
+          </a:lnRef>
+          <a:fillRef idx="3">
+            <a:schemeClr val="accent1"/>
+          </a:fillRef>
+          <a:effectRef idx="2">
+            <a:schemeClr val="accent1"/>
+          </a:effectRef>
+          <a:fontRef idx="minor">
+            <a:schemeClr val="lt1"/>
+          </a:fontRef>
+        </p:style>
+        <p:txBody>
+          <a:bodyPr rtlCol="0" anchor="ctr"/>
+          <a:lstStyle/>
+          <a:p>
+            <a:pPr algn="ctr"/>
+          </a:p>
+        </p:txBody>
+      </p:sp>
+      <p:sp>
+        <p:nvSpPr>
+          <p:cNvPr id="3" name="Rectangle 2"/>
+          <p:cNvSpPr/>
+          <p:nvPr/>
+        </p:nvSpPr>
+        <p:spPr>
+          <a:xfrm>
+            <a:off x="0" y="1051560"/>
+            <a:ext cx="12191695" cy="38100"/>
+          </a:xfrm>
+          <a:prstGeom prst="rect">
+            <a:avLst/>
+          </a:prstGeom>
+          <a:solidFill>
+            <a:srgbClr val="1B3A5C"/>
+          </a:solidFill>
+          <a:ln>
+            <a:noFill/>
+          </a:ln>
+          <a:effectLst/>
+        </p:spPr>
+        <p:style>
+          <a:lnRef idx="1">
+            <a:schemeClr val="accent1"/>
+          </a:lnRef>
+          <a:fillRef idx="3">
+            <a:schemeClr val="accent1"/>
+          </a:fillRef>
+          <a:effectRef idx="2">
+            <a:schemeClr val="accent1"/>
+          </a:effectRef>
+          <a:fontRef idx="minor">
+            <a:schemeClr val="lt1"/>
+          </a:fontRef>
+        </p:style>
+        <p:txBody>
+          <a:bodyPr rtlCol="0" anchor="ctr"/>
+          <a:lstStyle/>
+          <a:p>
+            <a:pPr algn="ctr"/>
+          </a:p>
+        </p:txBody>
+      </p:sp>
+      <p:sp>
+        <p:nvSpPr>
+          <p:cNvPr id="4" name="TextBox 3"/>
+          <p:cNvSpPr txBox="1"/>
+          <p:nvPr/>
+        </p:nvSpPr>
+        <p:spPr>
+          <a:xfrm>
+            <a:off x="502920" y="109728"/>
+            <a:ext cx="8686800" cy="292608"/>
+          </a:xfrm>
+          <a:prstGeom prst="rect">
+            <a:avLst/>
+          </a:prstGeom>
+          <a:noFill/>
+        </p:spPr>
+        <p:txBody>
+          <a:bodyPr wrap="square">
+            <a:spAutoFit/>
+          </a:bodyPr>
+          <a:lstStyle/>
+          <a:p>
+            <a:pPr algn="l">
+              <a:lnSpc>
+                <a:spcPct val="100000"/>
+              </a:lnSpc>
+            </a:pPr>
+            <a:r>
+              <a:rPr sz="1200" b="1" i="0">
+                <a:solidFill>
+                  <a:srgbClr val="1B3A5C"/>
+                </a:solidFill>
+                <a:latin typeface="맑은 고딕"/>
+              </a:rPr>
+              <a:t>④ 안전 · FAQ</a:t>
+            </a:r>
+          </a:p>
+        </p:txBody>
+      </p:sp>
+      <p:sp>
+        <p:nvSpPr>
+          <p:cNvPr id="5" name="TextBox 4"/>
+          <p:cNvSpPr txBox="1"/>
+          <p:nvPr/>
+        </p:nvSpPr>
+        <p:spPr>
+          <a:xfrm>
+            <a:off x="457200" y="347472"/>
+            <a:ext cx="10515600" cy="621792"/>
+          </a:xfrm>
+          <a:prstGeom prst="rect">
+            <a:avLst/>
+          </a:prstGeom>
+          <a:noFill/>
+        </p:spPr>
+        <p:txBody>
+          <a:bodyPr wrap="square">
+            <a:spAutoFit/>
+          </a:bodyPr>
+          <a:lstStyle/>
+          <a:p>
+            <a:pPr algn="l">
+              <a:lnSpc>
+                <a:spcPct val="100000"/>
+              </a:lnSpc>
+            </a:pPr>
+            <a:r>
+              <a:rPr sz="2400" b="1" i="0">
+                <a:solidFill>
+                  <a:srgbClr val="FFFFFF"/>
+                </a:solidFill>
+                <a:latin typeface="맑은 고딕"/>
+              </a:rPr>
+              <a:t>자주 묻는 질문</a:t>
+            </a:r>
+          </a:p>
+        </p:txBody>
+      </p:sp>
+      <p:sp>
+        <p:nvSpPr>
+          <p:cNvPr id="6" name="TextBox 5"/>
+          <p:cNvSpPr txBox="1"/>
+          <p:nvPr/>
+        </p:nvSpPr>
+        <p:spPr>
+          <a:xfrm>
+            <a:off x="457200" y="6492240"/>
+            <a:ext cx="8229600" cy="274320"/>
+          </a:xfrm>
+          <a:prstGeom prst="rect">
+            <a:avLst/>
+          </a:prstGeom>
+          <a:noFill/>
+        </p:spPr>
+        <p:txBody>
+          <a:bodyPr wrap="square">
+            <a:spAutoFit/>
+          </a:bodyPr>
+          <a:lstStyle/>
+          <a:p>
+            <a:pPr algn="l">
+              <a:lnSpc>
+                <a:spcPct val="100000"/>
+              </a:lnSpc>
+            </a:pPr>
+            <a:r>
+              <a:rPr sz="900" b="0" i="0">
+                <a:solidFill>
+                  <a:srgbClr val="7A828E"/>
+                </a:solidFill>
+                <a:latin typeface="맑은 고딕"/>
+              </a:rPr>
+              <a:t>씨제이씨협동조합 OSMU 워크벤치 · 관리자·사용자 매뉴얼</a:t>
+            </a:r>
+          </a:p>
+        </p:txBody>
+      </p:sp>
+      <p:sp>
+        <p:nvSpPr>
+          <p:cNvPr id="7" name="TextBox 6"/>
+          <p:cNvSpPr txBox="1"/>
+          <p:nvPr/>
+        </p:nvSpPr>
+        <p:spPr>
+          <a:xfrm>
+            <a:off x="11094415" y="6492240"/>
+            <a:ext cx="731520" cy="274320"/>
+          </a:xfrm>
+          <a:prstGeom prst="rect">
+            <a:avLst/>
+          </a:prstGeom>
+          <a:noFill/>
+        </p:spPr>
+        <p:txBody>
+          <a:bodyPr wrap="square">
+            <a:spAutoFit/>
+          </a:bodyPr>
+          <a:lstStyle/>
+          <a:p>
+            <a:pPr algn="r">
+              <a:lnSpc>
+                <a:spcPct val="100000"/>
+              </a:lnSpc>
+            </a:pPr>
+            <a:r>
+              <a:rPr sz="900" b="0" i="0">
+                <a:solidFill>
+                  <a:srgbClr val="7A828E"/>
+                </a:solidFill>
+                <a:latin typeface="맑은 고딕"/>
+              </a:rPr>
+              <a:t>24</a:t>
+            </a:r>
+          </a:p>
+        </p:txBody>
+      </p:sp>
+      <p:sp>
+        <p:nvSpPr>
+          <p:cNvPr id="8" name="Rectangle 7"/>
+          <p:cNvSpPr/>
+          <p:nvPr/>
+        </p:nvSpPr>
+        <p:spPr>
+          <a:xfrm>
+            <a:off x="502920" y="1417320"/>
+            <a:ext cx="11155680" cy="987552"/>
+          </a:xfrm>
+          <a:prstGeom prst="rect">
+            <a:avLst/>
+          </a:prstGeom>
+          <a:solidFill>
+            <a:srgbClr val="FFFFFF"/>
+          </a:solidFill>
+          <a:ln>
+            <a:noFill/>
+          </a:ln>
+          <a:effectLst/>
+        </p:spPr>
+        <p:style>
+          <a:lnRef idx="1">
+            <a:schemeClr val="accent1"/>
+          </a:lnRef>
+          <a:fillRef idx="3">
+            <a:schemeClr val="accent1"/>
+          </a:fillRef>
+          <a:effectRef idx="2">
+            <a:schemeClr val="accent1"/>
+          </a:effectRef>
+          <a:fontRef idx="minor">
+            <a:schemeClr val="lt1"/>
+          </a:fontRef>
+        </p:style>
+        <p:txBody>
+          <a:bodyPr rtlCol="0" anchor="ctr"/>
+          <a:lstStyle/>
+          <a:p>
+            <a:pPr algn="ctr"/>
+          </a:p>
+        </p:txBody>
+      </p:sp>
+      <p:sp>
+        <p:nvSpPr>
+          <p:cNvPr id="9" name="TextBox 8"/>
+          <p:cNvSpPr txBox="1"/>
+          <p:nvPr/>
+        </p:nvSpPr>
+        <p:spPr>
+          <a:xfrm>
+            <a:off x="731520" y="1490472"/>
+            <a:ext cx="10607040" cy="365760"/>
+          </a:xfrm>
+          <a:prstGeom prst="rect">
+            <a:avLst/>
+          </a:prstGeom>
+          <a:noFill/>
+        </p:spPr>
+        <p:txBody>
+          <a:bodyPr wrap="square">
+            <a:spAutoFit/>
+          </a:bodyPr>
+          <a:lstStyle/>
+          <a:p>
+            <a:pPr algn="l">
+              <a:lnSpc>
+                <a:spcPct val="100000"/>
+              </a:lnSpc>
+            </a:pPr>
+            <a:r>
+              <a:rPr sz="1250" b="1" i="0">
+                <a:solidFill>
+                  <a:srgbClr val="122A44"/>
+                </a:solidFill>
+                <a:latin typeface="맑은 고딕"/>
+              </a:rPr>
+              <a:t>Q. [🪄 브랜드에서 추천]이 실패해요</a:t>
+            </a:r>
+          </a:p>
+        </p:txBody>
+      </p:sp>
+      <p:sp>
+        <p:nvSpPr>
+          <p:cNvPr id="10" name="TextBox 9"/>
+          <p:cNvSpPr txBox="1"/>
+          <p:nvPr/>
+        </p:nvSpPr>
+        <p:spPr>
+          <a:xfrm>
+            <a:off x="731520" y="1874520"/>
+            <a:ext cx="10607040" cy="457200"/>
+          </a:xfrm>
+          <a:prstGeom prst="rect">
+            <a:avLst/>
+          </a:prstGeom>
+          <a:noFill/>
+        </p:spPr>
+        <p:txBody>
+          <a:bodyPr wrap="square">
+            <a:spAutoFit/>
+          </a:bodyPr>
+          <a:lstStyle/>
+          <a:p>
+            <a:pPr algn="l">
+              <a:lnSpc>
+                <a:spcPct val="120000"/>
+              </a:lnSpc>
+            </a:pPr>
+            <a:r>
+              <a:rPr sz="1100" b="0" i="0">
+                <a:solidFill>
+                  <a:srgbClr val="23262B"/>
+                </a:solidFill>
+                <a:latin typeface="맑은 고딕"/>
+              </a:rPr>
+              <a:t>A. '추천 실패: ...' 뒤의 메시지가 원인입니다. 대부분 LLM 미등록 → LLM 탭에서 키 등록 후 기본 모델 확인.</a:t>
+            </a:r>
+          </a:p>
+        </p:txBody>
+      </p:sp>
+      <p:sp>
+        <p:nvSpPr>
+          <p:cNvPr id="11" name="Rectangle 10"/>
+          <p:cNvSpPr/>
+          <p:nvPr/>
+        </p:nvSpPr>
+        <p:spPr>
+          <a:xfrm>
+            <a:off x="502920" y="2478024"/>
+            <a:ext cx="11155680" cy="987552"/>
+          </a:xfrm>
+          <a:prstGeom prst="rect">
+            <a:avLst/>
+          </a:prstGeom>
+          <a:solidFill>
+            <a:srgbClr val="FFFFFF"/>
+          </a:solidFill>
+          <a:ln>
+            <a:noFill/>
+          </a:ln>
+          <a:effectLst/>
+        </p:spPr>
+        <p:style>
+          <a:lnRef idx="1">
+            <a:schemeClr val="accent1"/>
+          </a:lnRef>
+          <a:fillRef idx="3">
+            <a:schemeClr val="accent1"/>
+          </a:fillRef>
+          <a:effectRef idx="2">
+            <a:schemeClr val="accent1"/>
+          </a:effectRef>
+          <a:fontRef idx="minor">
+            <a:schemeClr val="lt1"/>
+          </a:fontRef>
+        </p:style>
+        <p:txBody>
+          <a:bodyPr rtlCol="0" anchor="ctr"/>
+          <a:lstStyle/>
+          <a:p>
+            <a:pPr algn="ctr"/>
+          </a:p>
+        </p:txBody>
+      </p:sp>
+      <p:sp>
+        <p:nvSpPr>
+          <p:cNvPr id="12" name="TextBox 11"/>
+          <p:cNvSpPr txBox="1"/>
+          <p:nvPr/>
+        </p:nvSpPr>
+        <p:spPr>
+          <a:xfrm>
+            <a:off x="731520" y="2551176"/>
+            <a:ext cx="10607040" cy="365760"/>
+          </a:xfrm>
+          <a:prstGeom prst="rect">
+            <a:avLst/>
+          </a:prstGeom>
+          <a:noFill/>
+        </p:spPr>
+        <p:txBody>
+          <a:bodyPr wrap="square">
+            <a:spAutoFit/>
+          </a:bodyPr>
+          <a:lstStyle/>
+          <a:p>
+            <a:pPr algn="l">
+              <a:lnSpc>
+                <a:spcPct val="100000"/>
+              </a:lnSpc>
+            </a:pPr>
+            <a:r>
+              <a:rPr sz="1250" b="1" i="0">
+                <a:solidFill>
+                  <a:srgbClr val="122A44"/>
+                </a:solidFill>
+                <a:latin typeface="맑은 고딕"/>
+              </a:rPr>
+              <a:t>Q. 키를 저장했는데 칸이 비어 있어요</a:t>
+            </a:r>
+          </a:p>
+        </p:txBody>
+      </p:sp>
+      <p:sp>
+        <p:nvSpPr>
+          <p:cNvPr id="13" name="TextBox 12"/>
+          <p:cNvSpPr txBox="1"/>
+          <p:nvPr/>
+        </p:nvSpPr>
+        <p:spPr>
+          <a:xfrm>
+            <a:off x="731520" y="2935224"/>
+            <a:ext cx="10607040" cy="457200"/>
+          </a:xfrm>
+          <a:prstGeom prst="rect">
+            <a:avLst/>
+          </a:prstGeom>
+          <a:noFill/>
+        </p:spPr>
+        <p:txBody>
+          <a:bodyPr wrap="square">
+            <a:spAutoFit/>
+          </a:bodyPr>
+          <a:lstStyle/>
+          <a:p>
+            <a:pPr algn="l">
+              <a:lnSpc>
+                <a:spcPct val="120000"/>
+              </a:lnSpc>
+            </a:pPr>
+            <a:r>
+              <a:rPr sz="1100" b="0" i="0">
+                <a:solidFill>
+                  <a:srgbClr val="23262B"/>
+                </a:solidFill>
+                <a:latin typeface="맑은 고딕"/>
+              </a:rPr>
+              <a:t>A. 정상입니다. 배지(✅ 등록됨 ****...)로 확인하세요. 바꾸려면 새 키 입력 후 다시 [연결 테스트 · 저장].</a:t>
+            </a:r>
+          </a:p>
+        </p:txBody>
+      </p:sp>
+      <p:sp>
+        <p:nvSpPr>
+          <p:cNvPr id="14" name="Rectangle 13"/>
+          <p:cNvSpPr/>
+          <p:nvPr/>
+        </p:nvSpPr>
+        <p:spPr>
+          <a:xfrm>
+            <a:off x="502920" y="3538728"/>
+            <a:ext cx="11155680" cy="987552"/>
+          </a:xfrm>
+          <a:prstGeom prst="rect">
+            <a:avLst/>
+          </a:prstGeom>
+          <a:solidFill>
+            <a:srgbClr val="FFFFFF"/>
+          </a:solidFill>
+          <a:ln>
+            <a:noFill/>
+          </a:ln>
+          <a:effectLst/>
+        </p:spPr>
+        <p:style>
+          <a:lnRef idx="1">
+            <a:schemeClr val="accent1"/>
+          </a:lnRef>
+          <a:fillRef idx="3">
+            <a:schemeClr val="accent1"/>
+          </a:fillRef>
+          <a:effectRef idx="2">
+            <a:schemeClr val="accent1"/>
+          </a:effectRef>
+          <a:fontRef idx="minor">
+            <a:schemeClr val="lt1"/>
+          </a:fontRef>
+        </p:style>
+        <p:txBody>
+          <a:bodyPr rtlCol="0" anchor="ctr"/>
+          <a:lstStyle/>
+          <a:p>
+            <a:pPr algn="ctr"/>
+          </a:p>
+        </p:txBody>
+      </p:sp>
+      <p:sp>
+        <p:nvSpPr>
+          <p:cNvPr id="15" name="TextBox 14"/>
+          <p:cNvSpPr txBox="1"/>
+          <p:nvPr/>
+        </p:nvSpPr>
+        <p:spPr>
+          <a:xfrm>
+            <a:off x="731520" y="3611880"/>
+            <a:ext cx="10607040" cy="365760"/>
+          </a:xfrm>
+          <a:prstGeom prst="rect">
+            <a:avLst/>
+          </a:prstGeom>
+          <a:noFill/>
+        </p:spPr>
+        <p:txBody>
+          <a:bodyPr wrap="square">
+            <a:spAutoFit/>
+          </a:bodyPr>
+          <a:lstStyle/>
+          <a:p>
+            <a:pPr algn="l">
+              <a:lnSpc>
+                <a:spcPct val="100000"/>
+              </a:lnSpc>
+            </a:pPr>
+            <a:r>
+              <a:rPr sz="1250" b="1" i="0">
+                <a:solidFill>
+                  <a:srgbClr val="122A44"/>
+                </a:solidFill>
+                <a:latin typeface="맑은 고딕"/>
+              </a:rPr>
+              <a:t>Q. 4단계 적용 후에 [숫자만 새로 재기]를 또 눌러야 하나요?</a:t>
+            </a:r>
+          </a:p>
+        </p:txBody>
+      </p:sp>
+      <p:sp>
+        <p:nvSpPr>
+          <p:cNvPr id="16" name="TextBox 15"/>
+          <p:cNvSpPr txBox="1"/>
+          <p:nvPr/>
+        </p:nvSpPr>
+        <p:spPr>
+          <a:xfrm>
+            <a:off x="731520" y="3995928"/>
+            <a:ext cx="10607040" cy="457200"/>
+          </a:xfrm>
+          <a:prstGeom prst="rect">
+            <a:avLst/>
+          </a:prstGeom>
+          <a:noFill/>
+        </p:spPr>
+        <p:txBody>
+          <a:bodyPr wrap="square">
+            <a:spAutoFit/>
+          </a:bodyPr>
+          <a:lstStyle/>
+          <a:p>
+            <a:pPr algn="l">
+              <a:lnSpc>
+                <a:spcPct val="120000"/>
+              </a:lnSpc>
+            </a:pPr>
+            <a:r>
+              <a:rPr sz="1100" b="0" i="0">
+                <a:solidFill>
+                  <a:srgbClr val="23262B"/>
+                </a:solidFill>
+                <a:latin typeface="맑은 고딕"/>
+              </a:rPr>
+              <a:t>A. 아니요. 4단계 [적용]이 곧 SEO 키워드 교체이고, 새 키워드 측정까지 같이 끝냅니다. 숫자 재기는 30일 뒤 만료 경고가 뜰 때만.</a:t>
+            </a:r>
+          </a:p>
+        </p:txBody>
+      </p:sp>
+      <p:sp>
+        <p:nvSpPr>
+          <p:cNvPr id="17" name="Rectangle 16"/>
+          <p:cNvSpPr/>
+          <p:nvPr/>
+        </p:nvSpPr>
+        <p:spPr>
+          <a:xfrm>
+            <a:off x="502920" y="4599432"/>
+            <a:ext cx="11155680" cy="987552"/>
+          </a:xfrm>
+          <a:prstGeom prst="rect">
+            <a:avLst/>
+          </a:prstGeom>
+          <a:solidFill>
+            <a:srgbClr val="FFFFFF"/>
+          </a:solidFill>
+          <a:ln>
+            <a:noFill/>
+          </a:ln>
+          <a:effectLst/>
+        </p:spPr>
+        <p:style>
+          <a:lnRef idx="1">
+            <a:schemeClr val="accent1"/>
+          </a:lnRef>
+          <a:fillRef idx="3">
+            <a:schemeClr val="accent1"/>
+          </a:fillRef>
+          <a:effectRef idx="2">
+            <a:schemeClr val="accent1"/>
+          </a:effectRef>
+          <a:fontRef idx="minor">
+            <a:schemeClr val="lt1"/>
+          </a:fontRef>
+        </p:style>
+        <p:txBody>
+          <a:bodyPr rtlCol="0" anchor="ctr"/>
+          <a:lstStyle/>
+          <a:p>
+            <a:pPr algn="ctr"/>
+          </a:p>
+        </p:txBody>
+      </p:sp>
+      <p:sp>
+        <p:nvSpPr>
+          <p:cNvPr id="18" name="TextBox 17"/>
+          <p:cNvSpPr txBox="1"/>
+          <p:nvPr/>
+        </p:nvSpPr>
+        <p:spPr>
+          <a:xfrm>
+            <a:off x="731520" y="4672584"/>
+            <a:ext cx="10607040" cy="365760"/>
+          </a:xfrm>
+          <a:prstGeom prst="rect">
+            <a:avLst/>
+          </a:prstGeom>
+          <a:noFill/>
+        </p:spPr>
+        <p:txBody>
+          <a:bodyPr wrap="square">
+            <a:spAutoFit/>
+          </a:bodyPr>
+          <a:lstStyle/>
+          <a:p>
+            <a:pPr algn="l">
+              <a:lnSpc>
+                <a:spcPct val="100000"/>
+              </a:lnSpc>
+            </a:pPr>
+            <a:r>
+              <a:rPr sz="1250" b="1" i="0">
+                <a:solidFill>
+                  <a:srgbClr val="122A44"/>
+                </a:solidFill>
+                <a:latin typeface="맑은 고딕"/>
+              </a:rPr>
+              <a:t>Q. 경쟁도 만료 경고가 떠요</a:t>
+            </a:r>
+          </a:p>
+        </p:txBody>
+      </p:sp>
+      <p:sp>
+        <p:nvSpPr>
+          <p:cNvPr id="19" name="TextBox 18"/>
+          <p:cNvSpPr txBox="1"/>
+          <p:nvPr/>
+        </p:nvSpPr>
+        <p:spPr>
+          <a:xfrm>
+            <a:off x="731520" y="5056632"/>
+            <a:ext cx="10607040" cy="457200"/>
+          </a:xfrm>
+          <a:prstGeom prst="rect">
+            <a:avLst/>
+          </a:prstGeom>
+          <a:noFill/>
+        </p:spPr>
+        <p:txBody>
+          <a:bodyPr wrap="square">
+            <a:spAutoFit/>
+          </a:bodyPr>
+          <a:lstStyle/>
+          <a:p>
+            <a:pPr algn="l">
+              <a:lnSpc>
+                <a:spcPct val="120000"/>
+              </a:lnSpc>
+            </a:pPr>
+            <a:r>
+              <a:rPr sz="1100" b="0" i="0">
+                <a:solidFill>
+                  <a:srgbClr val="23262B"/>
+                </a:solidFill>
+                <a:latin typeface="맑은 고딕"/>
+              </a:rPr>
+              <a:t>A. [🔄 숫자만 새로 재기]를 누르세요. 캐시가 살아있는 값은 재과금되지 않습니다.</a:t>
+            </a:r>
+          </a:p>
+        </p:txBody>
+      </p:sp>
+      <p:sp>
+        <p:nvSpPr>
+          <p:cNvPr id="20" name="Rectangle 19"/>
+          <p:cNvSpPr/>
+          <p:nvPr/>
+        </p:nvSpPr>
+        <p:spPr>
+          <a:xfrm>
+            <a:off x="502920" y="5660136"/>
+            <a:ext cx="11155680" cy="987552"/>
+          </a:xfrm>
+          <a:prstGeom prst="rect">
+            <a:avLst/>
+          </a:prstGeom>
+          <a:solidFill>
+            <a:srgbClr val="FFFFFF"/>
+          </a:solidFill>
+          <a:ln>
+            <a:noFill/>
+          </a:ln>
+          <a:effectLst/>
+        </p:spPr>
+        <p:style>
+          <a:lnRef idx="1">
+            <a:schemeClr val="accent1"/>
+          </a:lnRef>
+          <a:fillRef idx="3">
+            <a:schemeClr val="accent1"/>
+          </a:fillRef>
+          <a:effectRef idx="2">
+            <a:schemeClr val="accent1"/>
+          </a:effectRef>
+          <a:fontRef idx="minor">
+            <a:schemeClr val="lt1"/>
+          </a:fontRef>
+        </p:style>
+        <p:txBody>
+          <a:bodyPr rtlCol="0" anchor="ctr"/>
+          <a:lstStyle/>
+          <a:p>
+            <a:pPr algn="ctr"/>
+          </a:p>
+        </p:txBody>
+      </p:sp>
+      <p:sp>
+        <p:nvSpPr>
+          <p:cNvPr id="21" name="TextBox 20"/>
+          <p:cNvSpPr txBox="1"/>
+          <p:nvPr/>
+        </p:nvSpPr>
+        <p:spPr>
+          <a:xfrm>
+            <a:off x="731520" y="5733288"/>
+            <a:ext cx="10607040" cy="365760"/>
+          </a:xfrm>
+          <a:prstGeom prst="rect">
+            <a:avLst/>
+          </a:prstGeom>
+          <a:noFill/>
+        </p:spPr>
+        <p:txBody>
+          <a:bodyPr wrap="square">
+            <a:spAutoFit/>
+          </a:bodyPr>
+          <a:lstStyle/>
+          <a:p>
+            <a:pPr algn="l">
+              <a:lnSpc>
+                <a:spcPct val="100000"/>
+              </a:lnSpc>
+            </a:pPr>
+            <a:r>
+              <a:rPr sz="1250" b="1" i="0">
+                <a:solidFill>
+                  <a:srgbClr val="122A44"/>
+                </a:solidFill>
+                <a:latin typeface="맑은 고딕"/>
+              </a:rPr>
+              <a:t>Q. 브랜드 킷을 고쳤는데 앱에 안 바껴요</a:t>
+            </a:r>
+          </a:p>
+        </p:txBody>
+      </p:sp>
+      <p:sp>
+        <p:nvSpPr>
+          <p:cNvPr id="22" name="TextBox 21"/>
+          <p:cNvSpPr txBox="1"/>
+          <p:nvPr/>
+        </p:nvSpPr>
+        <p:spPr>
+          <a:xfrm>
+            <a:off x="731520" y="6117336"/>
+            <a:ext cx="10607040" cy="457200"/>
+          </a:xfrm>
+          <a:prstGeom prst="rect">
+            <a:avLst/>
+          </a:prstGeom>
+          <a:noFill/>
+        </p:spPr>
+        <p:txBody>
+          <a:bodyPr wrap="square">
+            <a:spAutoFit/>
+          </a:bodyPr>
+          <a:lstStyle/>
+          <a:p>
+            <a:pPr algn="l">
+              <a:lnSpc>
+                <a:spcPct val="120000"/>
+              </a:lnSpc>
+            </a:pPr>
+            <a:r>
+              <a:rPr sz="1100" b="0" i="0">
+                <a:solidFill>
+                  <a:srgbClr val="23262B"/>
+                </a:solidFill>
+                <a:latin typeface="맑은 고딕"/>
+              </a:rPr>
+              <a:t>A. 킷 값은 [킷 저장], 계정·금기어는 [회사 공통 저장]을 눌렀는지, 워크벤치에서 그 킷을 골랐는지 확인하세요. 저장은 다음 생성부터 반영됩니다.</a:t>
+            </a:r>
+          </a:p>
+        </p:txBody>
+      </p:sp>
+    </p:spTree>
+  </p:cSld>
+  <p:clrMapOvr>
+    <a:masterClrMapping/>
+  </p:clrMapOvr>
+</p:sld>
+</file>
+
+<file path=ppt/slides/slide26.xml><?xml version="1.0" encoding="utf-8"?>
 <p:sld xmlns:a="http://schemas.openxmlformats.org/drawingml/2006/main" xmlns:p="http://schemas.openxmlformats.org/presentationml/2006/main" xmlns:r="http://schemas.openxmlformats.org/officeDocument/2006/relationships">
   <p:cSld>
     <p:bg>

--- a/docs/CJC_OSMU_사용자_매뉴얼.pptx
+++ b/docs/CJC_OSMU_사용자_매뉴얼.pptx
@@ -31,6 +31,10 @@
     <p:sldId id="279" r:id="rId30"/>
     <p:sldId id="280" r:id="rId31"/>
     <p:sldId id="281" r:id="rId32"/>
+    <p:sldId id="282" r:id="rId33"/>
+    <p:sldId id="283" r:id="rId34"/>
+    <p:sldId id="284" r:id="rId35"/>
+    <p:sldId id="285" r:id="rId36"/>
   </p:sldIdLst>
   <p:sldSz cx="12191695" cy="6858000" type="screen4x3"/>
   <p:notesSz cx="6858000" cy="9144000"/>
@@ -13328,7 +13332,7 @@
                 </a:solidFill>
                 <a:latin typeface="맑은 고딕"/>
               </a:rPr>
-              <a:t>④ 안전 · 컴플라이언스</a:t>
+              <a:t>③ 매일 쓰는 법 · 대시보드</a:t>
             </a:r>
           </a:p>
         </p:txBody>
@@ -13367,7 +13371,7 @@
                 </a:solidFill>
                 <a:latin typeface="맑은 고딕"/>
               </a:rPr>
-              <a:t>의료법 제56조 + 표시·광고법 — 치료 약속 금지</a:t>
+              <a:t>누르면 바로 그 글로 — 대시보드와 게시 기록</a:t>
             </a:r>
           </a:p>
         </p:txBody>
@@ -13446,6 +13450,3739 @@
                 <a:latin typeface="맑은 고딕"/>
               </a:rPr>
               <a:t>21</a:t>
+            </a:r>
+          </a:p>
+        </p:txBody>
+      </p:sp>
+      <p:graphicFrame>
+        <p:nvGraphicFramePr>
+          <p:cNvPr id="8" name="Table 7"/>
+          <p:cNvGraphicFramePr>
+            <a:graphicFrameLocks noGrp="1"/>
+          </p:cNvGraphicFramePr>
+          <p:nvPr/>
+        </p:nvGraphicFramePr>
+        <p:xfrm>
+          <a:off x="502920" y="1371600"/>
+          <a:ext cx="11155680" cy="3108960"/>
+        </p:xfrm>
+        <a:graphic>
+          <a:graphicData uri="http://schemas.openxmlformats.org/drawingml/2006/table">
+            <a:tbl>
+              <a:tblPr firstRow="1" bandRow="1">
+                <a:tableStyleId>{5C22544A-7EE6-4342-B048-85BDC9FD1C3A}</a:tableStyleId>
+              </a:tblPr>
+              <a:tblGrid>
+                <a:gridCol w="4023360"/>
+                <a:gridCol w="7132320"/>
+              </a:tblGrid>
+              <a:tr h="518160">
+                <a:tc>
+                  <a:txBody>
+                    <a:bodyPr/>
+                    <a:lstStyle/>
+                    <a:p>
+                      <a:pPr algn="ctr"/>
+                      <a:r>
+                        <a:rPr b="1" sz="1250">
+                          <a:solidFill>
+                            <a:srgbClr val="FFFFFF"/>
+                          </a:solidFill>
+                          <a:latin typeface="맑은 고딕"/>
+                        </a:rPr>
+                        <a:t>누르는 곳</a:t>
+                      </a:r>
+                    </a:p>
+                  </a:txBody>
+                  <a:tcPr>
+                    <a:solidFill>
+                      <a:srgbClr val="122A44"/>
+                    </a:solidFill>
+                  </a:tcPr>
+                </a:tc>
+                <a:tc>
+                  <a:txBody>
+                    <a:bodyPr/>
+                    <a:lstStyle/>
+                    <a:p>
+                      <a:pPr algn="ctr"/>
+                      <a:r>
+                        <a:rPr b="1" sz="1250">
+                          <a:solidFill>
+                            <a:srgbClr val="FFFFFF"/>
+                          </a:solidFill>
+                          <a:latin typeface="맑은 고딕"/>
+                        </a:rPr>
+                        <a:t>일어나는 일</a:t>
+                      </a:r>
+                    </a:p>
+                  </a:txBody>
+                  <a:tcPr>
+                    <a:solidFill>
+                      <a:srgbClr val="122A44"/>
+                    </a:solidFill>
+                  </a:tcPr>
+                </a:tc>
+              </a:tr>
+              <a:tr h="518160">
+                <a:tc>
+                  <a:txBody>
+                    <a:bodyPr/>
+                    <a:lstStyle/>
+                    <a:p>
+                      <a:pPr algn="l"/>
+                      <a:r>
+                        <a:rPr sz="1100">
+                          <a:solidFill>
+                            <a:srgbClr val="23262B"/>
+                          </a:solidFill>
+                          <a:latin typeface="맑은 고딕"/>
+                        </a:rPr>
+                        <a:t>소재 대기·생성 중·초안·게시 대기 칸의 글</a:t>
+                      </a:r>
+                    </a:p>
+                  </a:txBody>
+                  <a:tcPr marL="101600" marR="101600" marT="50800" marB="50800">
+                    <a:solidFill>
+                      <a:srgbClr val="FFFFFF"/>
+                    </a:solidFill>
+                  </a:tcPr>
+                </a:tc>
+                <a:tc>
+                  <a:txBody>
+                    <a:bodyPr/>
+                    <a:lstStyle/>
+                    <a:p>
+                      <a:pPr algn="l"/>
+                      <a:r>
+                        <a:rPr sz="1100">
+                          <a:solidFill>
+                            <a:srgbClr val="23262B"/>
+                          </a:solidFill>
+                          <a:latin typeface="맑은 고딕"/>
+                        </a:rPr>
+                        <a:t>워크벤치로 이동해 그 글이 열린 상태로 보입니다</a:t>
+                      </a:r>
+                    </a:p>
+                  </a:txBody>
+                  <a:tcPr marL="101600" marR="101600" marT="50800" marB="50800">
+                    <a:solidFill>
+                      <a:srgbClr val="FFFFFF"/>
+                    </a:solidFill>
+                  </a:tcPr>
+                </a:tc>
+              </a:tr>
+              <a:tr h="518160">
+                <a:tc>
+                  <a:txBody>
+                    <a:bodyPr/>
+                    <a:lstStyle/>
+                    <a:p>
+                      <a:pPr algn="l"/>
+                      <a:r>
+                        <a:rPr sz="1100">
+                          <a:solidFill>
+                            <a:srgbClr val="23262B"/>
+                          </a:solidFill>
+                          <a:latin typeface="맑은 고딕"/>
+                        </a:rPr>
+                        <a:t>통계 카드 (작업 중·초안 완료·게시 완료)</a:t>
+                      </a:r>
+                    </a:p>
+                  </a:txBody>
+                  <a:tcPr marL="101600" marR="101600" marT="50800" marB="50800">
+                    <a:solidFill>
+                      <a:srgbClr val="EFEBE2"/>
+                    </a:solidFill>
+                  </a:tcPr>
+                </a:tc>
+                <a:tc>
+                  <a:txBody>
+                    <a:bodyPr/>
+                    <a:lstStyle/>
+                    <a:p>
+                      <a:pPr algn="l"/>
+                      <a:r>
+                        <a:rPr sz="1100">
+                          <a:solidFill>
+                            <a:srgbClr val="23262B"/>
+                          </a:solidFill>
+                          <a:latin typeface="맑은 고딕"/>
+                        </a:rPr>
+                        <a:t>그 상태의 글만 아래 상태판에 남깁니다. 같은 카드를 다시 누르면 전체</a:t>
+                      </a:r>
+                    </a:p>
+                  </a:txBody>
+                  <a:tcPr marL="101600" marR="101600" marT="50800" marB="50800">
+                    <a:solidFill>
+                      <a:srgbClr val="EFEBE2"/>
+                    </a:solidFill>
+                  </a:tcPr>
+                </a:tc>
+              </a:tr>
+              <a:tr h="518160">
+                <a:tc>
+                  <a:txBody>
+                    <a:bodyPr/>
+                    <a:lstStyle/>
+                    <a:p>
+                      <a:pPr algn="l"/>
+                      <a:r>
+                        <a:rPr sz="1100">
+                          <a:solidFill>
+                            <a:srgbClr val="23262B"/>
+                          </a:solidFill>
+                          <a:latin typeface="맑은 고딕"/>
+                        </a:rPr>
+                        <a:t>게시 완료 칸의 글</a:t>
+                      </a:r>
+                    </a:p>
+                  </a:txBody>
+                  <a:tcPr marL="101600" marR="101600" marT="50800" marB="50800">
+                    <a:solidFill>
+                      <a:srgbClr val="FFFFFF"/>
+                    </a:solidFill>
+                  </a:tcPr>
+                </a:tc>
+                <a:tc>
+                  <a:txBody>
+                    <a:bodyPr/>
+                    <a:lstStyle/>
+                    <a:p>
+                      <a:pPr algn="l"/>
+                      <a:r>
+                        <a:rPr sz="1100">
+                          <a:solidFill>
+                            <a:srgbClr val="23262B"/>
+                          </a:solidFill>
+                          <a:latin typeface="맑은 고딕"/>
+                        </a:rPr>
+                        <a:t>저장된 네이버 글 주소가 있으면 브라우저로 그 글을 엽니다 (없으면 워크벤치)</a:t>
+                      </a:r>
+                    </a:p>
+                  </a:txBody>
+                  <a:tcPr marL="101600" marR="101600" marT="50800" marB="50800">
+                    <a:solidFill>
+                      <a:srgbClr val="FFFFFF"/>
+                    </a:solidFill>
+                  </a:tcPr>
+                </a:tc>
+              </a:tr>
+              <a:tr h="518160">
+                <a:tc>
+                  <a:txBody>
+                    <a:bodyPr/>
+                    <a:lstStyle/>
+                    <a:p>
+                      <a:pPr algn="l"/>
+                      <a:r>
+                        <a:rPr sz="1100">
+                          <a:solidFill>
+                            <a:srgbClr val="23262B"/>
+                          </a:solidFill>
+                          <a:latin typeface="맑은 고딕"/>
+                        </a:rPr>
+                        <a:t>'이번 달 AI 비용' 카드 · 노란 띠</a:t>
+                      </a:r>
+                    </a:p>
+                  </a:txBody>
+                  <a:tcPr marL="101600" marR="101600" marT="50800" marB="50800">
+                    <a:solidFill>
+                      <a:srgbClr val="EFEBE2"/>
+                    </a:solidFill>
+                  </a:tcPr>
+                </a:tc>
+                <a:tc>
+                  <a:txBody>
+                    <a:bodyPr/>
+                    <a:lstStyle/>
+                    <a:p>
+                      <a:pPr algn="l"/>
+                      <a:r>
+                        <a:rPr sz="1100">
+                          <a:solidFill>
+                            <a:srgbClr val="23262B"/>
+                          </a:solidFill>
+                          <a:latin typeface="맑은 고딕"/>
+                        </a:rPr>
+                        <a:t>등록한 단가로 계산한 이번 달 금액(추정). 월 예산의 70%·90%를 넘으면 안내</a:t>
+                      </a:r>
+                    </a:p>
+                  </a:txBody>
+                  <a:tcPr marL="101600" marR="101600" marT="50800" marB="50800">
+                    <a:solidFill>
+                      <a:srgbClr val="EFEBE2"/>
+                    </a:solidFill>
+                  </a:tcPr>
+                </a:tc>
+              </a:tr>
+              <a:tr h="518160">
+                <a:tc>
+                  <a:txBody>
+                    <a:bodyPr/>
+                    <a:lstStyle/>
+                    <a:p>
+                      <a:pPr algn="l"/>
+                      <a:r>
+                        <a:rPr sz="1100">
+                          <a:solidFill>
+                            <a:srgbClr val="23262B"/>
+                          </a:solidFill>
+                          <a:latin typeface="맑은 고딕"/>
+                        </a:rPr>
+                        <a:t>빨간 띠 '예정일이 지났는데…'</a:t>
+                      </a:r>
+                    </a:p>
+                  </a:txBody>
+                  <a:tcPr marL="101600" marR="101600" marT="50800" marB="50800">
+                    <a:solidFill>
+                      <a:srgbClr val="FFFFFF"/>
+                    </a:solidFill>
+                  </a:tcPr>
+                </a:tc>
+                <a:tc>
+                  <a:txBody>
+                    <a:bodyPr/>
+                    <a:lstStyle/>
+                    <a:p>
+                      <a:pPr algn="l"/>
+                      <a:r>
+                        <a:rPr sz="1100">
+                          <a:solidFill>
+                            <a:srgbClr val="23262B"/>
+                          </a:solidFill>
+                          <a:latin typeface="맑은 고딕"/>
+                        </a:rPr>
+                        <a:t>발행 예정일이 지났는데 게시되지 않은 글 수 — 📅 캘린더에서 확인</a:t>
+                      </a:r>
+                    </a:p>
+                  </a:txBody>
+                  <a:tcPr marL="101600" marR="101600" marT="50800" marB="50800">
+                    <a:solidFill>
+                      <a:srgbClr val="FFFFFF"/>
+                    </a:solidFill>
+                  </a:tcPr>
+                </a:tc>
+              </a:tr>
+            </a:tbl>
+          </a:graphicData>
+        </a:graphic>
+      </p:graphicFrame>
+      <p:sp>
+        <p:nvSpPr>
+          <p:cNvPr id="9" name="Rectangle 8"/>
+          <p:cNvSpPr/>
+          <p:nvPr/>
+        </p:nvSpPr>
+        <p:spPr>
+          <a:xfrm>
+            <a:off x="502920" y="4709160"/>
+            <a:ext cx="11155680" cy="1371600"/>
+          </a:xfrm>
+          <a:prstGeom prst="rect">
+            <a:avLst/>
+          </a:prstGeom>
+          <a:solidFill>
+            <a:srgbClr val="E4ECEF"/>
+          </a:solidFill>
+          <a:ln>
+            <a:noFill/>
+          </a:ln>
+          <a:effectLst/>
+        </p:spPr>
+        <p:style>
+          <a:lnRef idx="1">
+            <a:schemeClr val="accent1"/>
+          </a:lnRef>
+          <a:fillRef idx="3">
+            <a:schemeClr val="accent1"/>
+          </a:fillRef>
+          <a:effectRef idx="2">
+            <a:schemeClr val="accent1"/>
+          </a:effectRef>
+          <a:fontRef idx="minor">
+            <a:schemeClr val="lt1"/>
+          </a:fontRef>
+        </p:style>
+        <p:txBody>
+          <a:bodyPr rtlCol="0" anchor="ctr"/>
+          <a:lstStyle/>
+          <a:p>
+            <a:pPr algn="ctr"/>
+          </a:p>
+        </p:txBody>
+      </p:sp>
+      <p:sp>
+        <p:nvSpPr>
+          <p:cNvPr id="10" name="TextBox 9"/>
+          <p:cNvSpPr txBox="1"/>
+          <p:nvPr/>
+        </p:nvSpPr>
+        <p:spPr>
+          <a:xfrm>
+            <a:off x="777240" y="4818888"/>
+            <a:ext cx="10607040" cy="1188720"/>
+          </a:xfrm>
+          <a:prstGeom prst="rect">
+            <a:avLst/>
+          </a:prstGeom>
+          <a:noFill/>
+        </p:spPr>
+        <p:txBody>
+          <a:bodyPr wrap="square">
+            <a:spAutoFit/>
+          </a:bodyPr>
+          <a:lstStyle/>
+          <a:p>
+            <a:pPr algn="l">
+              <a:lnSpc>
+                <a:spcPct val="130000"/>
+              </a:lnSpc>
+            </a:pPr>
+            <a:r>
+              <a:rPr sz="1200" b="1" i="0">
+                <a:solidFill>
+                  <a:srgbClr val="2F6B7A"/>
+                </a:solidFill>
+                <a:latin typeface="맑은 고딕"/>
+              </a:rPr>
+              <a:t>글 주소는 자동으로도 남습니다: 🚀 네이버 게시의 [지금 게시]로 연 Chrome 창에서 [발행]을 누르면, 창이 글 화면으로 바뀌는 것을 보고 주소를 저장하고 '게시 완료'로 바꿉니다. 손으로 올렸다면 [✅ 수동으로 완료] 옆 칸에 주소를 붙여 넣으세요. 게시 완료 탭에서 나중에 고칠 수도 있습니다.</a:t>
+            </a:r>
+          </a:p>
+        </p:txBody>
+      </p:sp>
+    </p:spTree>
+  </p:cSld>
+  <p:clrMapOvr>
+    <a:masterClrMapping/>
+  </p:clrMapOvr>
+</p:sld>
+</file>
+
+<file path=ppt/slides/slide23.xml><?xml version="1.0" encoding="utf-8"?>
+<p:sld xmlns:a="http://schemas.openxmlformats.org/drawingml/2006/main" xmlns:p="http://schemas.openxmlformats.org/presentationml/2006/main" xmlns:r="http://schemas.openxmlformats.org/officeDocument/2006/relationships">
+  <p:cSld>
+    <p:bg>
+      <p:bgPr>
+        <a:solidFill>
+          <a:srgbClr val="F7F5F0"/>
+        </a:solidFill>
+        <a:effectLst/>
+      </p:bgPr>
+    </p:bg>
+    <p:spTree>
+      <p:nvGrpSpPr>
+        <p:cNvPr id="1" name=""/>
+        <p:cNvGrpSpPr/>
+        <p:nvPr/>
+      </p:nvGrpSpPr>
+      <p:grpSpPr/>
+      <p:sp>
+        <p:nvSpPr>
+          <p:cNvPr id="2" name="Rectangle 1"/>
+          <p:cNvSpPr/>
+          <p:nvPr/>
+        </p:nvSpPr>
+        <p:spPr>
+          <a:xfrm>
+            <a:off x="0" y="0"/>
+            <a:ext cx="12191695" cy="1051560"/>
+          </a:xfrm>
+          <a:prstGeom prst="rect">
+            <a:avLst/>
+          </a:prstGeom>
+          <a:solidFill>
+            <a:srgbClr val="122A44"/>
+          </a:solidFill>
+          <a:ln>
+            <a:noFill/>
+          </a:ln>
+          <a:effectLst/>
+        </p:spPr>
+        <p:style>
+          <a:lnRef idx="1">
+            <a:schemeClr val="accent1"/>
+          </a:lnRef>
+          <a:fillRef idx="3">
+            <a:schemeClr val="accent1"/>
+          </a:fillRef>
+          <a:effectRef idx="2">
+            <a:schemeClr val="accent1"/>
+          </a:effectRef>
+          <a:fontRef idx="minor">
+            <a:schemeClr val="lt1"/>
+          </a:fontRef>
+        </p:style>
+        <p:txBody>
+          <a:bodyPr rtlCol="0" anchor="ctr"/>
+          <a:lstStyle/>
+          <a:p>
+            <a:pPr algn="ctr"/>
+          </a:p>
+        </p:txBody>
+      </p:sp>
+      <p:sp>
+        <p:nvSpPr>
+          <p:cNvPr id="3" name="Rectangle 2"/>
+          <p:cNvSpPr/>
+          <p:nvPr/>
+        </p:nvSpPr>
+        <p:spPr>
+          <a:xfrm>
+            <a:off x="0" y="1051560"/>
+            <a:ext cx="12191695" cy="38100"/>
+          </a:xfrm>
+          <a:prstGeom prst="rect">
+            <a:avLst/>
+          </a:prstGeom>
+          <a:solidFill>
+            <a:srgbClr val="1B3A5C"/>
+          </a:solidFill>
+          <a:ln>
+            <a:noFill/>
+          </a:ln>
+          <a:effectLst/>
+        </p:spPr>
+        <p:style>
+          <a:lnRef idx="1">
+            <a:schemeClr val="accent1"/>
+          </a:lnRef>
+          <a:fillRef idx="3">
+            <a:schemeClr val="accent1"/>
+          </a:fillRef>
+          <a:effectRef idx="2">
+            <a:schemeClr val="accent1"/>
+          </a:effectRef>
+          <a:fontRef idx="minor">
+            <a:schemeClr val="lt1"/>
+          </a:fontRef>
+        </p:style>
+        <p:txBody>
+          <a:bodyPr rtlCol="0" anchor="ctr"/>
+          <a:lstStyle/>
+          <a:p>
+            <a:pPr algn="ctr"/>
+          </a:p>
+        </p:txBody>
+      </p:sp>
+      <p:sp>
+        <p:nvSpPr>
+          <p:cNvPr id="4" name="TextBox 3"/>
+          <p:cNvSpPr txBox="1"/>
+          <p:nvPr/>
+        </p:nvSpPr>
+        <p:spPr>
+          <a:xfrm>
+            <a:off x="502920" y="109728"/>
+            <a:ext cx="8686800" cy="292608"/>
+          </a:xfrm>
+          <a:prstGeom prst="rect">
+            <a:avLst/>
+          </a:prstGeom>
+          <a:noFill/>
+        </p:spPr>
+        <p:txBody>
+          <a:bodyPr wrap="square">
+            <a:spAutoFit/>
+          </a:bodyPr>
+          <a:lstStyle/>
+          <a:p>
+            <a:pPr algn="l">
+              <a:lnSpc>
+                <a:spcPct val="100000"/>
+              </a:lnSpc>
+            </a:pPr>
+            <a:r>
+              <a:rPr sz="1200" b="1" i="0">
+                <a:solidFill>
+                  <a:srgbClr val="1B3A5C"/>
+                </a:solidFill>
+                <a:latin typeface="맑은 고딕"/>
+              </a:rPr>
+              <a:t>③ 매일 쓰는 법 · 📅 캘린더</a:t>
+            </a:r>
+          </a:p>
+        </p:txBody>
+      </p:sp>
+      <p:sp>
+        <p:nvSpPr>
+          <p:cNvPr id="5" name="TextBox 4"/>
+          <p:cNvSpPr txBox="1"/>
+          <p:nvPr/>
+        </p:nvSpPr>
+        <p:spPr>
+          <a:xfrm>
+            <a:off x="457200" y="347472"/>
+            <a:ext cx="10515600" cy="621792"/>
+          </a:xfrm>
+          <a:prstGeom prst="rect">
+            <a:avLst/>
+          </a:prstGeom>
+          <a:noFill/>
+        </p:spPr>
+        <p:txBody>
+          <a:bodyPr wrap="square">
+            <a:spAutoFit/>
+          </a:bodyPr>
+          <a:lstStyle/>
+          <a:p>
+            <a:pPr algn="l">
+              <a:lnSpc>
+                <a:spcPct val="100000"/>
+              </a:lnSpc>
+            </a:pPr>
+            <a:r>
+              <a:rPr sz="2400" b="1" i="0">
+                <a:solidFill>
+                  <a:srgbClr val="FFFFFF"/>
+                </a:solidFill>
+                <a:latin typeface="맑은 고딕"/>
+              </a:rPr>
+              <a:t>이번 주에 무엇을 올릴지 — 캘린더 · 주제 목록 · 자동 작성 예약</a:t>
+            </a:r>
+          </a:p>
+        </p:txBody>
+      </p:sp>
+      <p:sp>
+        <p:nvSpPr>
+          <p:cNvPr id="6" name="TextBox 5"/>
+          <p:cNvSpPr txBox="1"/>
+          <p:nvPr/>
+        </p:nvSpPr>
+        <p:spPr>
+          <a:xfrm>
+            <a:off x="457200" y="6492240"/>
+            <a:ext cx="8229600" cy="274320"/>
+          </a:xfrm>
+          <a:prstGeom prst="rect">
+            <a:avLst/>
+          </a:prstGeom>
+          <a:noFill/>
+        </p:spPr>
+        <p:txBody>
+          <a:bodyPr wrap="square">
+            <a:spAutoFit/>
+          </a:bodyPr>
+          <a:lstStyle/>
+          <a:p>
+            <a:pPr algn="l">
+              <a:lnSpc>
+                <a:spcPct val="100000"/>
+              </a:lnSpc>
+            </a:pPr>
+            <a:r>
+              <a:rPr sz="900" b="0" i="0">
+                <a:solidFill>
+                  <a:srgbClr val="7A828E"/>
+                </a:solidFill>
+                <a:latin typeface="맑은 고딕"/>
+              </a:rPr>
+              <a:t>씨제이씨협동조합 OSMU 워크벤치 · 관리자·사용자 매뉴얼</a:t>
+            </a:r>
+          </a:p>
+        </p:txBody>
+      </p:sp>
+      <p:sp>
+        <p:nvSpPr>
+          <p:cNvPr id="7" name="TextBox 6"/>
+          <p:cNvSpPr txBox="1"/>
+          <p:nvPr/>
+        </p:nvSpPr>
+        <p:spPr>
+          <a:xfrm>
+            <a:off x="11094415" y="6492240"/>
+            <a:ext cx="731520" cy="274320"/>
+          </a:xfrm>
+          <a:prstGeom prst="rect">
+            <a:avLst/>
+          </a:prstGeom>
+          <a:noFill/>
+        </p:spPr>
+        <p:txBody>
+          <a:bodyPr wrap="square">
+            <a:spAutoFit/>
+          </a:bodyPr>
+          <a:lstStyle/>
+          <a:p>
+            <a:pPr algn="r">
+              <a:lnSpc>
+                <a:spcPct val="100000"/>
+              </a:lnSpc>
+            </a:pPr>
+            <a:r>
+              <a:rPr sz="900" b="0" i="0">
+                <a:solidFill>
+                  <a:srgbClr val="7A828E"/>
+                </a:solidFill>
+                <a:latin typeface="맑은 고딕"/>
+              </a:rPr>
+              <a:t>22</a:t>
+            </a:r>
+          </a:p>
+        </p:txBody>
+      </p:sp>
+      <p:sp>
+        <p:nvSpPr>
+          <p:cNvPr id="8" name="Rectangle 7"/>
+          <p:cNvSpPr/>
+          <p:nvPr/>
+        </p:nvSpPr>
+        <p:spPr>
+          <a:xfrm>
+            <a:off x="502920" y="1325880"/>
+            <a:ext cx="502920" cy="841248"/>
+          </a:xfrm>
+          <a:prstGeom prst="rect">
+            <a:avLst/>
+          </a:prstGeom>
+          <a:solidFill>
+            <a:srgbClr val="1B3A5C"/>
+          </a:solidFill>
+          <a:ln>
+            <a:noFill/>
+          </a:ln>
+          <a:effectLst/>
+        </p:spPr>
+        <p:style>
+          <a:lnRef idx="1">
+            <a:schemeClr val="accent1"/>
+          </a:lnRef>
+          <a:fillRef idx="3">
+            <a:schemeClr val="accent1"/>
+          </a:fillRef>
+          <a:effectRef idx="2">
+            <a:schemeClr val="accent1"/>
+          </a:effectRef>
+          <a:fontRef idx="minor">
+            <a:schemeClr val="lt1"/>
+          </a:fontRef>
+        </p:style>
+        <p:txBody>
+          <a:bodyPr rtlCol="0" anchor="ctr"/>
+          <a:lstStyle/>
+          <a:p>
+            <a:pPr algn="ctr"/>
+          </a:p>
+        </p:txBody>
+      </p:sp>
+      <p:sp>
+        <p:nvSpPr>
+          <p:cNvPr id="9" name="TextBox 8"/>
+          <p:cNvSpPr txBox="1"/>
+          <p:nvPr/>
+        </p:nvSpPr>
+        <p:spPr>
+          <a:xfrm>
+            <a:off x="502920" y="1325880"/>
+            <a:ext cx="502920" cy="841248"/>
+          </a:xfrm>
+          <a:prstGeom prst="rect">
+            <a:avLst/>
+          </a:prstGeom>
+          <a:noFill/>
+        </p:spPr>
+        <p:txBody>
+          <a:bodyPr wrap="square">
+            <a:spAutoFit/>
+          </a:bodyPr>
+          <a:lstStyle/>
+          <a:p>
+            <a:pPr algn="ctr">
+              <a:lnSpc>
+                <a:spcPct val="100000"/>
+              </a:lnSpc>
+            </a:pPr>
+            <a:r>
+              <a:rPr sz="1900" b="1" i="0">
+                <a:solidFill>
+                  <a:srgbClr val="FFFFFF"/>
+                </a:solidFill>
+                <a:latin typeface="맑은 고딕"/>
+              </a:rPr>
+              <a:t>1</a:t>
+            </a:r>
+          </a:p>
+        </p:txBody>
+      </p:sp>
+      <p:sp>
+        <p:nvSpPr>
+          <p:cNvPr id="10" name="Rectangle 9"/>
+          <p:cNvSpPr/>
+          <p:nvPr/>
+        </p:nvSpPr>
+        <p:spPr>
+          <a:xfrm>
+            <a:off x="1005840" y="1325880"/>
+            <a:ext cx="10652760" cy="841248"/>
+          </a:xfrm>
+          <a:prstGeom prst="rect">
+            <a:avLst/>
+          </a:prstGeom>
+          <a:solidFill>
+            <a:srgbClr val="FFFFFF"/>
+          </a:solidFill>
+          <a:ln>
+            <a:noFill/>
+          </a:ln>
+          <a:effectLst/>
+        </p:spPr>
+        <p:style>
+          <a:lnRef idx="1">
+            <a:schemeClr val="accent1"/>
+          </a:lnRef>
+          <a:fillRef idx="3">
+            <a:schemeClr val="accent1"/>
+          </a:fillRef>
+          <a:effectRef idx="2">
+            <a:schemeClr val="accent1"/>
+          </a:effectRef>
+          <a:fontRef idx="minor">
+            <a:schemeClr val="lt1"/>
+          </a:fontRef>
+        </p:style>
+        <p:txBody>
+          <a:bodyPr rtlCol="0" anchor="ctr"/>
+          <a:lstStyle/>
+          <a:p>
+            <a:pPr algn="ctr"/>
+          </a:p>
+        </p:txBody>
+      </p:sp>
+      <p:sp>
+        <p:nvSpPr>
+          <p:cNvPr id="11" name="TextBox 10"/>
+          <p:cNvSpPr txBox="1"/>
+          <p:nvPr/>
+        </p:nvSpPr>
+        <p:spPr>
+          <a:xfrm>
+            <a:off x="1188720" y="1399032"/>
+            <a:ext cx="10287000" cy="320040"/>
+          </a:xfrm>
+          <a:prstGeom prst="rect">
+            <a:avLst/>
+          </a:prstGeom>
+          <a:noFill/>
+        </p:spPr>
+        <p:txBody>
+          <a:bodyPr wrap="square">
+            <a:spAutoFit/>
+          </a:bodyPr>
+          <a:lstStyle/>
+          <a:p>
+            <a:pPr algn="l">
+              <a:lnSpc>
+                <a:spcPct val="100000"/>
+              </a:lnSpc>
+            </a:pPr>
+            <a:r>
+              <a:rPr sz="1350" b="1" i="0">
+                <a:solidFill>
+                  <a:srgbClr val="23262B"/>
+                </a:solidFill>
+                <a:latin typeface="맑은 고딕"/>
+              </a:rPr>
+              <a:t>발행 예정일 정하기</a:t>
+            </a:r>
+          </a:p>
+        </p:txBody>
+      </p:sp>
+      <p:sp>
+        <p:nvSpPr>
+          <p:cNvPr id="12" name="TextBox 11"/>
+          <p:cNvSpPr txBox="1"/>
+          <p:nvPr/>
+        </p:nvSpPr>
+        <p:spPr>
+          <a:xfrm>
+            <a:off x="1188720" y="1709928"/>
+            <a:ext cx="10287000" cy="384048"/>
+          </a:xfrm>
+          <a:prstGeom prst="rect">
+            <a:avLst/>
+          </a:prstGeom>
+          <a:noFill/>
+        </p:spPr>
+        <p:txBody>
+          <a:bodyPr wrap="square">
+            <a:spAutoFit/>
+          </a:bodyPr>
+          <a:lstStyle/>
+          <a:p>
+            <a:pPr algn="l">
+              <a:lnSpc>
+                <a:spcPct val="120000"/>
+              </a:lnSpc>
+            </a:pPr>
+            <a:r>
+              <a:rPr sz="1150" b="0" i="0">
+                <a:solidFill>
+                  <a:srgbClr val="7A828E"/>
+                </a:solidFill>
+                <a:latin typeface="맑은 고딕"/>
+              </a:rPr>
+              <a:t>워크벤치 맨 위 [발행 예정일]에 날짜를 넣거나(📅 버튼으로 달력 선택), 캘린더의 빈 날짜를 눌러 새 글을 만듭니다.</a:t>
+            </a:r>
+          </a:p>
+        </p:txBody>
+      </p:sp>
+      <p:sp>
+        <p:nvSpPr>
+          <p:cNvPr id="13" name="Rectangle 12"/>
+          <p:cNvSpPr/>
+          <p:nvPr/>
+        </p:nvSpPr>
+        <p:spPr>
+          <a:xfrm>
+            <a:off x="502920" y="2231136"/>
+            <a:ext cx="502920" cy="841248"/>
+          </a:xfrm>
+          <a:prstGeom prst="rect">
+            <a:avLst/>
+          </a:prstGeom>
+          <a:solidFill>
+            <a:srgbClr val="1B3A5C"/>
+          </a:solidFill>
+          <a:ln>
+            <a:noFill/>
+          </a:ln>
+          <a:effectLst/>
+        </p:spPr>
+        <p:style>
+          <a:lnRef idx="1">
+            <a:schemeClr val="accent1"/>
+          </a:lnRef>
+          <a:fillRef idx="3">
+            <a:schemeClr val="accent1"/>
+          </a:fillRef>
+          <a:effectRef idx="2">
+            <a:schemeClr val="accent1"/>
+          </a:effectRef>
+          <a:fontRef idx="minor">
+            <a:schemeClr val="lt1"/>
+          </a:fontRef>
+        </p:style>
+        <p:txBody>
+          <a:bodyPr rtlCol="0" anchor="ctr"/>
+          <a:lstStyle/>
+          <a:p>
+            <a:pPr algn="ctr"/>
+          </a:p>
+        </p:txBody>
+      </p:sp>
+      <p:sp>
+        <p:nvSpPr>
+          <p:cNvPr id="14" name="TextBox 13"/>
+          <p:cNvSpPr txBox="1"/>
+          <p:nvPr/>
+        </p:nvSpPr>
+        <p:spPr>
+          <a:xfrm>
+            <a:off x="502920" y="2231136"/>
+            <a:ext cx="502920" cy="841248"/>
+          </a:xfrm>
+          <a:prstGeom prst="rect">
+            <a:avLst/>
+          </a:prstGeom>
+          <a:noFill/>
+        </p:spPr>
+        <p:txBody>
+          <a:bodyPr wrap="square">
+            <a:spAutoFit/>
+          </a:bodyPr>
+          <a:lstStyle/>
+          <a:p>
+            <a:pPr algn="ctr">
+              <a:lnSpc>
+                <a:spcPct val="100000"/>
+              </a:lnSpc>
+            </a:pPr>
+            <a:r>
+              <a:rPr sz="1900" b="1" i="0">
+                <a:solidFill>
+                  <a:srgbClr val="FFFFFF"/>
+                </a:solidFill>
+                <a:latin typeface="맑은 고딕"/>
+              </a:rPr>
+              <a:t>2</a:t>
+            </a:r>
+          </a:p>
+        </p:txBody>
+      </p:sp>
+      <p:sp>
+        <p:nvSpPr>
+          <p:cNvPr id="15" name="Rectangle 14"/>
+          <p:cNvSpPr/>
+          <p:nvPr/>
+        </p:nvSpPr>
+        <p:spPr>
+          <a:xfrm>
+            <a:off x="1005840" y="2231136"/>
+            <a:ext cx="10652760" cy="841248"/>
+          </a:xfrm>
+          <a:prstGeom prst="rect">
+            <a:avLst/>
+          </a:prstGeom>
+          <a:solidFill>
+            <a:srgbClr val="FFFFFF"/>
+          </a:solidFill>
+          <a:ln>
+            <a:noFill/>
+          </a:ln>
+          <a:effectLst/>
+        </p:spPr>
+        <p:style>
+          <a:lnRef idx="1">
+            <a:schemeClr val="accent1"/>
+          </a:lnRef>
+          <a:fillRef idx="3">
+            <a:schemeClr val="accent1"/>
+          </a:fillRef>
+          <a:effectRef idx="2">
+            <a:schemeClr val="accent1"/>
+          </a:effectRef>
+          <a:fontRef idx="minor">
+            <a:schemeClr val="lt1"/>
+          </a:fontRef>
+        </p:style>
+        <p:txBody>
+          <a:bodyPr rtlCol="0" anchor="ctr"/>
+          <a:lstStyle/>
+          <a:p>
+            <a:pPr algn="ctr"/>
+          </a:p>
+        </p:txBody>
+      </p:sp>
+      <p:sp>
+        <p:nvSpPr>
+          <p:cNvPr id="16" name="TextBox 15"/>
+          <p:cNvSpPr txBox="1"/>
+          <p:nvPr/>
+        </p:nvSpPr>
+        <p:spPr>
+          <a:xfrm>
+            <a:off x="1188720" y="2304288"/>
+            <a:ext cx="10287000" cy="320040"/>
+          </a:xfrm>
+          <a:prstGeom prst="rect">
+            <a:avLst/>
+          </a:prstGeom>
+          <a:noFill/>
+        </p:spPr>
+        <p:txBody>
+          <a:bodyPr wrap="square">
+            <a:spAutoFit/>
+          </a:bodyPr>
+          <a:lstStyle/>
+          <a:p>
+            <a:pPr algn="l">
+              <a:lnSpc>
+                <a:spcPct val="100000"/>
+              </a:lnSpc>
+            </a:pPr>
+            <a:r>
+              <a:rPr sz="1350" b="1" i="0">
+                <a:solidFill>
+                  <a:srgbClr val="23262B"/>
+                </a:solidFill>
+                <a:latin typeface="맑은 고딕"/>
+              </a:rPr>
+              <a:t>상태 색으로 한눈에</a:t>
+            </a:r>
+          </a:p>
+        </p:txBody>
+      </p:sp>
+      <p:sp>
+        <p:nvSpPr>
+          <p:cNvPr id="17" name="TextBox 16"/>
+          <p:cNvSpPr txBox="1"/>
+          <p:nvPr/>
+        </p:nvSpPr>
+        <p:spPr>
+          <a:xfrm>
+            <a:off x="1188720" y="2615184"/>
+            <a:ext cx="10287000" cy="384048"/>
+          </a:xfrm>
+          <a:prstGeom prst="rect">
+            <a:avLst/>
+          </a:prstGeom>
+          <a:noFill/>
+        </p:spPr>
+        <p:txBody>
+          <a:bodyPr wrap="square">
+            <a:spAutoFit/>
+          </a:bodyPr>
+          <a:lstStyle/>
+          <a:p>
+            <a:pPr algn="l">
+              <a:lnSpc>
+                <a:spcPct val="120000"/>
+              </a:lnSpc>
+            </a:pPr>
+            <a:r>
+              <a:rPr sz="1150" b="0" i="0">
+                <a:solidFill>
+                  <a:srgbClr val="7A828E"/>
+                </a:solidFill>
+                <a:latin typeface="맑은 고딕"/>
+              </a:rPr>
+              <a:t>회색 소재 대기 · 파랑 생성 중 · 노랑 초안 · 주황 게시 대기 · 초록 게시 완료 · 빨강 실패. 예정일이 지난 글은 ⚠️와 빨간 테두리.</a:t>
+            </a:r>
+          </a:p>
+        </p:txBody>
+      </p:sp>
+      <p:sp>
+        <p:nvSpPr>
+          <p:cNvPr id="18" name="Rectangle 17"/>
+          <p:cNvSpPr/>
+          <p:nvPr/>
+        </p:nvSpPr>
+        <p:spPr>
+          <a:xfrm>
+            <a:off x="502920" y="3136392"/>
+            <a:ext cx="502920" cy="841248"/>
+          </a:xfrm>
+          <a:prstGeom prst="rect">
+            <a:avLst/>
+          </a:prstGeom>
+          <a:solidFill>
+            <a:srgbClr val="1B3A5C"/>
+          </a:solidFill>
+          <a:ln>
+            <a:noFill/>
+          </a:ln>
+          <a:effectLst/>
+        </p:spPr>
+        <p:style>
+          <a:lnRef idx="1">
+            <a:schemeClr val="accent1"/>
+          </a:lnRef>
+          <a:fillRef idx="3">
+            <a:schemeClr val="accent1"/>
+          </a:fillRef>
+          <a:effectRef idx="2">
+            <a:schemeClr val="accent1"/>
+          </a:effectRef>
+          <a:fontRef idx="minor">
+            <a:schemeClr val="lt1"/>
+          </a:fontRef>
+        </p:style>
+        <p:txBody>
+          <a:bodyPr rtlCol="0" anchor="ctr"/>
+          <a:lstStyle/>
+          <a:p>
+            <a:pPr algn="ctr"/>
+          </a:p>
+        </p:txBody>
+      </p:sp>
+      <p:sp>
+        <p:nvSpPr>
+          <p:cNvPr id="19" name="TextBox 18"/>
+          <p:cNvSpPr txBox="1"/>
+          <p:nvPr/>
+        </p:nvSpPr>
+        <p:spPr>
+          <a:xfrm>
+            <a:off x="502920" y="3136392"/>
+            <a:ext cx="502920" cy="841248"/>
+          </a:xfrm>
+          <a:prstGeom prst="rect">
+            <a:avLst/>
+          </a:prstGeom>
+          <a:noFill/>
+        </p:spPr>
+        <p:txBody>
+          <a:bodyPr wrap="square">
+            <a:spAutoFit/>
+          </a:bodyPr>
+          <a:lstStyle/>
+          <a:p>
+            <a:pPr algn="ctr">
+              <a:lnSpc>
+                <a:spcPct val="100000"/>
+              </a:lnSpc>
+            </a:pPr>
+            <a:r>
+              <a:rPr sz="1900" b="1" i="0">
+                <a:solidFill>
+                  <a:srgbClr val="FFFFFF"/>
+                </a:solidFill>
+                <a:latin typeface="맑은 고딕"/>
+              </a:rPr>
+              <a:t>3</a:t>
+            </a:r>
+          </a:p>
+        </p:txBody>
+      </p:sp>
+      <p:sp>
+        <p:nvSpPr>
+          <p:cNvPr id="20" name="Rectangle 19"/>
+          <p:cNvSpPr/>
+          <p:nvPr/>
+        </p:nvSpPr>
+        <p:spPr>
+          <a:xfrm>
+            <a:off x="1005840" y="3136392"/>
+            <a:ext cx="10652760" cy="841248"/>
+          </a:xfrm>
+          <a:prstGeom prst="rect">
+            <a:avLst/>
+          </a:prstGeom>
+          <a:solidFill>
+            <a:srgbClr val="FFFFFF"/>
+          </a:solidFill>
+          <a:ln>
+            <a:noFill/>
+          </a:ln>
+          <a:effectLst/>
+        </p:spPr>
+        <p:style>
+          <a:lnRef idx="1">
+            <a:schemeClr val="accent1"/>
+          </a:lnRef>
+          <a:fillRef idx="3">
+            <a:schemeClr val="accent1"/>
+          </a:fillRef>
+          <a:effectRef idx="2">
+            <a:schemeClr val="accent1"/>
+          </a:effectRef>
+          <a:fontRef idx="minor">
+            <a:schemeClr val="lt1"/>
+          </a:fontRef>
+        </p:style>
+        <p:txBody>
+          <a:bodyPr rtlCol="0" anchor="ctr"/>
+          <a:lstStyle/>
+          <a:p>
+            <a:pPr algn="ctr"/>
+          </a:p>
+        </p:txBody>
+      </p:sp>
+      <p:sp>
+        <p:nvSpPr>
+          <p:cNvPr id="21" name="TextBox 20"/>
+          <p:cNvSpPr txBox="1"/>
+          <p:nvPr/>
+        </p:nvSpPr>
+        <p:spPr>
+          <a:xfrm>
+            <a:off x="1188720" y="3209544"/>
+            <a:ext cx="10287000" cy="320040"/>
+          </a:xfrm>
+          <a:prstGeom prst="rect">
+            <a:avLst/>
+          </a:prstGeom>
+          <a:noFill/>
+        </p:spPr>
+        <p:txBody>
+          <a:bodyPr wrap="square">
+            <a:spAutoFit/>
+          </a:bodyPr>
+          <a:lstStyle/>
+          <a:p>
+            <a:pPr algn="l">
+              <a:lnSpc>
+                <a:spcPct val="100000"/>
+              </a:lnSpc>
+            </a:pPr>
+            <a:r>
+              <a:rPr sz="1350" b="1" i="0">
+                <a:solidFill>
+                  <a:srgbClr val="23262B"/>
+                </a:solidFill>
+                <a:latin typeface="맑은 고딕"/>
+              </a:rPr>
+              <a:t>옮기기</a:t>
+            </a:r>
+          </a:p>
+        </p:txBody>
+      </p:sp>
+      <p:sp>
+        <p:nvSpPr>
+          <p:cNvPr id="22" name="TextBox 21"/>
+          <p:cNvSpPr txBox="1"/>
+          <p:nvPr/>
+        </p:nvSpPr>
+        <p:spPr>
+          <a:xfrm>
+            <a:off x="1188720" y="3520440"/>
+            <a:ext cx="10287000" cy="384048"/>
+          </a:xfrm>
+          <a:prstGeom prst="rect">
+            <a:avLst/>
+          </a:prstGeom>
+          <a:noFill/>
+        </p:spPr>
+        <p:txBody>
+          <a:bodyPr wrap="square">
+            <a:spAutoFit/>
+          </a:bodyPr>
+          <a:lstStyle/>
+          <a:p>
+            <a:pPr algn="l">
+              <a:lnSpc>
+                <a:spcPct val="120000"/>
+              </a:lnSpc>
+            </a:pPr>
+            <a:r>
+              <a:rPr sz="1150" b="0" i="0">
+                <a:solidFill>
+                  <a:srgbClr val="7A828E"/>
+                </a:solidFill>
+                <a:latin typeface="맑은 고딕"/>
+              </a:rPr>
+              <a:t>칩을 다른 날짜로 끌어 놓거나, 칩의 📅 버튼으로 날짜를 고릅니다. 칩을 누르면 워크벤치에서 그 글이 열립니다.</a:t>
+            </a:r>
+          </a:p>
+        </p:txBody>
+      </p:sp>
+      <p:sp>
+        <p:nvSpPr>
+          <p:cNvPr id="23" name="Rectangle 22"/>
+          <p:cNvSpPr/>
+          <p:nvPr/>
+        </p:nvSpPr>
+        <p:spPr>
+          <a:xfrm>
+            <a:off x="502920" y="4041648"/>
+            <a:ext cx="502920" cy="841248"/>
+          </a:xfrm>
+          <a:prstGeom prst="rect">
+            <a:avLst/>
+          </a:prstGeom>
+          <a:solidFill>
+            <a:srgbClr val="1B3A5C"/>
+          </a:solidFill>
+          <a:ln>
+            <a:noFill/>
+          </a:ln>
+          <a:effectLst/>
+        </p:spPr>
+        <p:style>
+          <a:lnRef idx="1">
+            <a:schemeClr val="accent1"/>
+          </a:lnRef>
+          <a:fillRef idx="3">
+            <a:schemeClr val="accent1"/>
+          </a:fillRef>
+          <a:effectRef idx="2">
+            <a:schemeClr val="accent1"/>
+          </a:effectRef>
+          <a:fontRef idx="minor">
+            <a:schemeClr val="lt1"/>
+          </a:fontRef>
+        </p:style>
+        <p:txBody>
+          <a:bodyPr rtlCol="0" anchor="ctr"/>
+          <a:lstStyle/>
+          <a:p>
+            <a:pPr algn="ctr"/>
+          </a:p>
+        </p:txBody>
+      </p:sp>
+      <p:sp>
+        <p:nvSpPr>
+          <p:cNvPr id="24" name="TextBox 23"/>
+          <p:cNvSpPr txBox="1"/>
+          <p:nvPr/>
+        </p:nvSpPr>
+        <p:spPr>
+          <a:xfrm>
+            <a:off x="502920" y="4041648"/>
+            <a:ext cx="502920" cy="841248"/>
+          </a:xfrm>
+          <a:prstGeom prst="rect">
+            <a:avLst/>
+          </a:prstGeom>
+          <a:noFill/>
+        </p:spPr>
+        <p:txBody>
+          <a:bodyPr wrap="square">
+            <a:spAutoFit/>
+          </a:bodyPr>
+          <a:lstStyle/>
+          <a:p>
+            <a:pPr algn="ctr">
+              <a:lnSpc>
+                <a:spcPct val="100000"/>
+              </a:lnSpc>
+            </a:pPr>
+            <a:r>
+              <a:rPr sz="1900" b="1" i="0">
+                <a:solidFill>
+                  <a:srgbClr val="FFFFFF"/>
+                </a:solidFill>
+                <a:latin typeface="맑은 고딕"/>
+              </a:rPr>
+              <a:t>4</a:t>
+            </a:r>
+          </a:p>
+        </p:txBody>
+      </p:sp>
+      <p:sp>
+        <p:nvSpPr>
+          <p:cNvPr id="25" name="Rectangle 24"/>
+          <p:cNvSpPr/>
+          <p:nvPr/>
+        </p:nvSpPr>
+        <p:spPr>
+          <a:xfrm>
+            <a:off x="1005840" y="4041648"/>
+            <a:ext cx="10652760" cy="841248"/>
+          </a:xfrm>
+          <a:prstGeom prst="rect">
+            <a:avLst/>
+          </a:prstGeom>
+          <a:solidFill>
+            <a:srgbClr val="FFFFFF"/>
+          </a:solidFill>
+          <a:ln>
+            <a:noFill/>
+          </a:ln>
+          <a:effectLst/>
+        </p:spPr>
+        <p:style>
+          <a:lnRef idx="1">
+            <a:schemeClr val="accent1"/>
+          </a:lnRef>
+          <a:fillRef idx="3">
+            <a:schemeClr val="accent1"/>
+          </a:fillRef>
+          <a:effectRef idx="2">
+            <a:schemeClr val="accent1"/>
+          </a:effectRef>
+          <a:fontRef idx="minor">
+            <a:schemeClr val="lt1"/>
+          </a:fontRef>
+        </p:style>
+        <p:txBody>
+          <a:bodyPr rtlCol="0" anchor="ctr"/>
+          <a:lstStyle/>
+          <a:p>
+            <a:pPr algn="ctr"/>
+          </a:p>
+        </p:txBody>
+      </p:sp>
+      <p:sp>
+        <p:nvSpPr>
+          <p:cNvPr id="26" name="TextBox 25"/>
+          <p:cNvSpPr txBox="1"/>
+          <p:nvPr/>
+        </p:nvSpPr>
+        <p:spPr>
+          <a:xfrm>
+            <a:off x="1188720" y="4114800"/>
+            <a:ext cx="10287000" cy="320040"/>
+          </a:xfrm>
+          <a:prstGeom prst="rect">
+            <a:avLst/>
+          </a:prstGeom>
+          <a:noFill/>
+        </p:spPr>
+        <p:txBody>
+          <a:bodyPr wrap="square">
+            <a:spAutoFit/>
+          </a:bodyPr>
+          <a:lstStyle/>
+          <a:p>
+            <a:pPr algn="l">
+              <a:lnSpc>
+                <a:spcPct val="100000"/>
+              </a:lnSpc>
+            </a:pPr>
+            <a:r>
+              <a:rPr sz="1350" b="1" i="0">
+                <a:solidFill>
+                  <a:srgbClr val="23262B"/>
+                </a:solidFill>
+                <a:latin typeface="맑은 고딕"/>
+              </a:rPr>
+              <a:t>주제 목록 · 반복 규칙</a:t>
+            </a:r>
+          </a:p>
+        </p:txBody>
+      </p:sp>
+      <p:sp>
+        <p:nvSpPr>
+          <p:cNvPr id="27" name="TextBox 26"/>
+          <p:cNvSpPr txBox="1"/>
+          <p:nvPr/>
+        </p:nvSpPr>
+        <p:spPr>
+          <a:xfrm>
+            <a:off x="1188720" y="4425696"/>
+            <a:ext cx="10287000" cy="384048"/>
+          </a:xfrm>
+          <a:prstGeom prst="rect">
+            <a:avLst/>
+          </a:prstGeom>
+          <a:noFill/>
+        </p:spPr>
+        <p:txBody>
+          <a:bodyPr wrap="square">
+            <a:spAutoFit/>
+          </a:bodyPr>
+          <a:lstStyle/>
+          <a:p>
+            <a:pPr algn="l">
+              <a:lnSpc>
+                <a:spcPct val="120000"/>
+              </a:lnSpc>
+            </a:pPr>
+            <a:r>
+              <a:rPr sz="1150" b="0" i="0">
+                <a:solidFill>
+                  <a:srgbClr val="7A828E"/>
+                </a:solidFill>
+                <a:latin typeface="맑은 고딕"/>
+              </a:rPr>
+              <a:t>오른쪽에 '쓸 주제'를 쌓아 두고 [글로 만들기]. '매주 화요일 · 킷 · 모드' 규칙을 추가하면 앞으로 4주의 빈 자리가 생깁니다.</a:t>
+            </a:r>
+          </a:p>
+        </p:txBody>
+      </p:sp>
+      <p:sp>
+        <p:nvSpPr>
+          <p:cNvPr id="28" name="Rectangle 27"/>
+          <p:cNvSpPr/>
+          <p:nvPr/>
+        </p:nvSpPr>
+        <p:spPr>
+          <a:xfrm>
+            <a:off x="502920" y="4946904"/>
+            <a:ext cx="502920" cy="841248"/>
+          </a:xfrm>
+          <a:prstGeom prst="rect">
+            <a:avLst/>
+          </a:prstGeom>
+          <a:solidFill>
+            <a:srgbClr val="1B3A5C"/>
+          </a:solidFill>
+          <a:ln>
+            <a:noFill/>
+          </a:ln>
+          <a:effectLst/>
+        </p:spPr>
+        <p:style>
+          <a:lnRef idx="1">
+            <a:schemeClr val="accent1"/>
+          </a:lnRef>
+          <a:fillRef idx="3">
+            <a:schemeClr val="accent1"/>
+          </a:fillRef>
+          <a:effectRef idx="2">
+            <a:schemeClr val="accent1"/>
+          </a:effectRef>
+          <a:fontRef idx="minor">
+            <a:schemeClr val="lt1"/>
+          </a:fontRef>
+        </p:style>
+        <p:txBody>
+          <a:bodyPr rtlCol="0" anchor="ctr"/>
+          <a:lstStyle/>
+          <a:p>
+            <a:pPr algn="ctr"/>
+          </a:p>
+        </p:txBody>
+      </p:sp>
+      <p:sp>
+        <p:nvSpPr>
+          <p:cNvPr id="29" name="TextBox 28"/>
+          <p:cNvSpPr txBox="1"/>
+          <p:nvPr/>
+        </p:nvSpPr>
+        <p:spPr>
+          <a:xfrm>
+            <a:off x="502920" y="4946904"/>
+            <a:ext cx="502920" cy="841248"/>
+          </a:xfrm>
+          <a:prstGeom prst="rect">
+            <a:avLst/>
+          </a:prstGeom>
+          <a:noFill/>
+        </p:spPr>
+        <p:txBody>
+          <a:bodyPr wrap="square">
+            <a:spAutoFit/>
+          </a:bodyPr>
+          <a:lstStyle/>
+          <a:p>
+            <a:pPr algn="ctr">
+              <a:lnSpc>
+                <a:spcPct val="100000"/>
+              </a:lnSpc>
+            </a:pPr>
+            <a:r>
+              <a:rPr sz="1900" b="1" i="0">
+                <a:solidFill>
+                  <a:srgbClr val="FFFFFF"/>
+                </a:solidFill>
+                <a:latin typeface="맑은 고딕"/>
+              </a:rPr>
+              <a:t>5</a:t>
+            </a:r>
+          </a:p>
+        </p:txBody>
+      </p:sp>
+      <p:sp>
+        <p:nvSpPr>
+          <p:cNvPr id="30" name="Rectangle 29"/>
+          <p:cNvSpPr/>
+          <p:nvPr/>
+        </p:nvSpPr>
+        <p:spPr>
+          <a:xfrm>
+            <a:off x="1005840" y="4946904"/>
+            <a:ext cx="10652760" cy="841248"/>
+          </a:xfrm>
+          <a:prstGeom prst="rect">
+            <a:avLst/>
+          </a:prstGeom>
+          <a:solidFill>
+            <a:srgbClr val="FFFFFF"/>
+          </a:solidFill>
+          <a:ln>
+            <a:noFill/>
+          </a:ln>
+          <a:effectLst/>
+        </p:spPr>
+        <p:style>
+          <a:lnRef idx="1">
+            <a:schemeClr val="accent1"/>
+          </a:lnRef>
+          <a:fillRef idx="3">
+            <a:schemeClr val="accent1"/>
+          </a:fillRef>
+          <a:effectRef idx="2">
+            <a:schemeClr val="accent1"/>
+          </a:effectRef>
+          <a:fontRef idx="minor">
+            <a:schemeClr val="lt1"/>
+          </a:fontRef>
+        </p:style>
+        <p:txBody>
+          <a:bodyPr rtlCol="0" anchor="ctr"/>
+          <a:lstStyle/>
+          <a:p>
+            <a:pPr algn="ctr"/>
+          </a:p>
+        </p:txBody>
+      </p:sp>
+      <p:sp>
+        <p:nvSpPr>
+          <p:cNvPr id="31" name="TextBox 30"/>
+          <p:cNvSpPr txBox="1"/>
+          <p:nvPr/>
+        </p:nvSpPr>
+        <p:spPr>
+          <a:xfrm>
+            <a:off x="1188720" y="5020056"/>
+            <a:ext cx="10287000" cy="320040"/>
+          </a:xfrm>
+          <a:prstGeom prst="rect">
+            <a:avLst/>
+          </a:prstGeom>
+          <a:noFill/>
+        </p:spPr>
+        <p:txBody>
+          <a:bodyPr wrap="square">
+            <a:spAutoFit/>
+          </a:bodyPr>
+          <a:lstStyle/>
+          <a:p>
+            <a:pPr algn="l">
+              <a:lnSpc>
+                <a:spcPct val="100000"/>
+              </a:lnSpc>
+            </a:pPr>
+            <a:r>
+              <a:rPr sz="1350" b="1" i="0">
+                <a:solidFill>
+                  <a:srgbClr val="23262B"/>
+                </a:solidFill>
+                <a:latin typeface="맑은 고딕"/>
+              </a:rPr>
+              <a:t>자동 작성 예약</a:t>
+            </a:r>
+          </a:p>
+        </p:txBody>
+      </p:sp>
+      <p:sp>
+        <p:nvSpPr>
+          <p:cNvPr id="32" name="TextBox 31"/>
+          <p:cNvSpPr txBox="1"/>
+          <p:nvPr/>
+        </p:nvSpPr>
+        <p:spPr>
+          <a:xfrm>
+            <a:off x="1188720" y="5330952"/>
+            <a:ext cx="10287000" cy="384048"/>
+          </a:xfrm>
+          <a:prstGeom prst="rect">
+            <a:avLst/>
+          </a:prstGeom>
+          <a:noFill/>
+        </p:spPr>
+        <p:txBody>
+          <a:bodyPr wrap="square">
+            <a:spAutoFit/>
+          </a:bodyPr>
+          <a:lstStyle/>
+          <a:p>
+            <a:pPr algn="l">
+              <a:lnSpc>
+                <a:spcPct val="120000"/>
+              </a:lnSpc>
+            </a:pPr>
+            <a:r>
+              <a:rPr sz="1150" b="0" i="0">
+                <a:solidFill>
+                  <a:srgbClr val="7A828E"/>
+                </a:solidFill>
+                <a:latin typeface="맑은 고딕"/>
+              </a:rPr>
+              <a:t>워크벤치 [자동 작성 예약]을 켜고 날짜·시각을 정하면, 앱이 켜져 있을 때 그 시각에 초안을 만듭니다. 발행은 사람이 합니다.</a:t>
+            </a:r>
+          </a:p>
+        </p:txBody>
+      </p:sp>
+      <p:sp>
+        <p:nvSpPr>
+          <p:cNvPr id="33" name="Rectangle 32"/>
+          <p:cNvSpPr/>
+          <p:nvPr/>
+        </p:nvSpPr>
+        <p:spPr>
+          <a:xfrm>
+            <a:off x="502920" y="5897880"/>
+            <a:ext cx="11155680" cy="777240"/>
+          </a:xfrm>
+          <a:prstGeom prst="rect">
+            <a:avLst/>
+          </a:prstGeom>
+          <a:solidFill>
+            <a:srgbClr val="FFFFFF"/>
+          </a:solidFill>
+          <a:ln>
+            <a:noFill/>
+          </a:ln>
+          <a:effectLst/>
+        </p:spPr>
+        <p:style>
+          <a:lnRef idx="1">
+            <a:schemeClr val="accent1"/>
+          </a:lnRef>
+          <a:fillRef idx="3">
+            <a:schemeClr val="accent1"/>
+          </a:fillRef>
+          <a:effectRef idx="2">
+            <a:schemeClr val="accent1"/>
+          </a:effectRef>
+          <a:fontRef idx="minor">
+            <a:schemeClr val="lt1"/>
+          </a:fontRef>
+        </p:style>
+        <p:txBody>
+          <a:bodyPr rtlCol="0" anchor="ctr"/>
+          <a:lstStyle/>
+          <a:p>
+            <a:pPr algn="ctr"/>
+          </a:p>
+        </p:txBody>
+      </p:sp>
+      <p:sp>
+        <p:nvSpPr>
+          <p:cNvPr id="34" name="Rectangle 33"/>
+          <p:cNvSpPr/>
+          <p:nvPr/>
+        </p:nvSpPr>
+        <p:spPr>
+          <a:xfrm>
+            <a:off x="502920" y="5897880"/>
+            <a:ext cx="109728" cy="777240"/>
+          </a:xfrm>
+          <a:prstGeom prst="rect">
+            <a:avLst/>
+          </a:prstGeom>
+          <a:solidFill>
+            <a:srgbClr val="C0392B"/>
+          </a:solidFill>
+          <a:ln>
+            <a:noFill/>
+          </a:ln>
+          <a:effectLst/>
+        </p:spPr>
+        <p:style>
+          <a:lnRef idx="1">
+            <a:schemeClr val="accent1"/>
+          </a:lnRef>
+          <a:fillRef idx="3">
+            <a:schemeClr val="accent1"/>
+          </a:fillRef>
+          <a:effectRef idx="2">
+            <a:schemeClr val="accent1"/>
+          </a:effectRef>
+          <a:fontRef idx="minor">
+            <a:schemeClr val="lt1"/>
+          </a:fontRef>
+        </p:style>
+        <p:txBody>
+          <a:bodyPr rtlCol="0" anchor="ctr"/>
+          <a:lstStyle/>
+          <a:p>
+            <a:pPr algn="ctr"/>
+          </a:p>
+        </p:txBody>
+      </p:sp>
+      <p:sp>
+        <p:nvSpPr>
+          <p:cNvPr id="35" name="TextBox 34"/>
+          <p:cNvSpPr txBox="1"/>
+          <p:nvPr/>
+        </p:nvSpPr>
+        <p:spPr>
+          <a:xfrm>
+            <a:off x="822960" y="5989320"/>
+            <a:ext cx="10607040" cy="365760"/>
+          </a:xfrm>
+          <a:prstGeom prst="rect">
+            <a:avLst/>
+          </a:prstGeom>
+          <a:noFill/>
+        </p:spPr>
+        <p:txBody>
+          <a:bodyPr wrap="square">
+            <a:spAutoFit/>
+          </a:bodyPr>
+          <a:lstStyle/>
+          <a:p>
+            <a:pPr algn="l">
+              <a:lnSpc>
+                <a:spcPct val="100000"/>
+              </a:lnSpc>
+            </a:pPr>
+            <a:r>
+              <a:rPr sz="1350" b="1" i="0">
+                <a:solidFill>
+                  <a:srgbClr val="23262B"/>
+                </a:solidFill>
+                <a:latin typeface="맑은 고딕"/>
+              </a:rPr>
+              <a:t>자동 작성은 앱이 켜져 있을 때만</a:t>
+            </a:r>
+          </a:p>
+        </p:txBody>
+      </p:sp>
+      <p:sp>
+        <p:nvSpPr>
+          <p:cNvPr id="36" name="TextBox 35"/>
+          <p:cNvSpPr txBox="1"/>
+          <p:nvPr/>
+        </p:nvSpPr>
+        <p:spPr>
+          <a:xfrm>
+            <a:off x="822960" y="6373368"/>
+            <a:ext cx="10607040" cy="228600"/>
+          </a:xfrm>
+          <a:prstGeom prst="rect">
+            <a:avLst/>
+          </a:prstGeom>
+          <a:noFill/>
+        </p:spPr>
+        <p:txBody>
+          <a:bodyPr wrap="square">
+            <a:spAutoFit/>
+          </a:bodyPr>
+          <a:lstStyle/>
+          <a:p>
+            <a:pPr algn="l">
+              <a:lnSpc>
+                <a:spcPct val="125000"/>
+              </a:lnSpc>
+            </a:pPr>
+            <a:r>
+              <a:rPr sz="1150" b="0" i="0">
+                <a:solidFill>
+                  <a:srgbClr val="7A828E"/>
+                </a:solidFill>
+                <a:latin typeface="맑은 고딕"/>
+              </a:rPr>
+              <a:t>PC나 앱이 꺼져 있던 동안 지난 예약은 다음에 앱을 켤 때 만듭니다. 메모(또는 뉴스 기사)가 없는 글은 '실패'로 남습니다.</a:t>
+            </a:r>
+          </a:p>
+        </p:txBody>
+      </p:sp>
+    </p:spTree>
+  </p:cSld>
+  <p:clrMapOvr>
+    <a:masterClrMapping/>
+  </p:clrMapOvr>
+</p:sld>
+</file>
+
+<file path=ppt/slides/slide24.xml><?xml version="1.0" encoding="utf-8"?>
+<p:sld xmlns:a="http://schemas.openxmlformats.org/drawingml/2006/main" xmlns:p="http://schemas.openxmlformats.org/presentationml/2006/main" xmlns:r="http://schemas.openxmlformats.org/officeDocument/2006/relationships">
+  <p:cSld>
+    <p:bg>
+      <p:bgPr>
+        <a:solidFill>
+          <a:srgbClr val="F7F5F0"/>
+        </a:solidFill>
+        <a:effectLst/>
+      </p:bgPr>
+    </p:bg>
+    <p:spTree>
+      <p:nvGrpSpPr>
+        <p:cNvPr id="1" name=""/>
+        <p:cNvGrpSpPr/>
+        <p:nvPr/>
+      </p:nvGrpSpPr>
+      <p:grpSpPr/>
+      <p:sp>
+        <p:nvSpPr>
+          <p:cNvPr id="2" name="Rectangle 1"/>
+          <p:cNvSpPr/>
+          <p:nvPr/>
+        </p:nvSpPr>
+        <p:spPr>
+          <a:xfrm>
+            <a:off x="0" y="0"/>
+            <a:ext cx="12191695" cy="1051560"/>
+          </a:xfrm>
+          <a:prstGeom prst="rect">
+            <a:avLst/>
+          </a:prstGeom>
+          <a:solidFill>
+            <a:srgbClr val="122A44"/>
+          </a:solidFill>
+          <a:ln>
+            <a:noFill/>
+          </a:ln>
+          <a:effectLst/>
+        </p:spPr>
+        <p:style>
+          <a:lnRef idx="1">
+            <a:schemeClr val="accent1"/>
+          </a:lnRef>
+          <a:fillRef idx="3">
+            <a:schemeClr val="accent1"/>
+          </a:fillRef>
+          <a:effectRef idx="2">
+            <a:schemeClr val="accent1"/>
+          </a:effectRef>
+          <a:fontRef idx="minor">
+            <a:schemeClr val="lt1"/>
+          </a:fontRef>
+        </p:style>
+        <p:txBody>
+          <a:bodyPr rtlCol="0" anchor="ctr"/>
+          <a:lstStyle/>
+          <a:p>
+            <a:pPr algn="ctr"/>
+          </a:p>
+        </p:txBody>
+      </p:sp>
+      <p:sp>
+        <p:nvSpPr>
+          <p:cNvPr id="3" name="Rectangle 2"/>
+          <p:cNvSpPr/>
+          <p:nvPr/>
+        </p:nvSpPr>
+        <p:spPr>
+          <a:xfrm>
+            <a:off x="0" y="1051560"/>
+            <a:ext cx="12191695" cy="38100"/>
+          </a:xfrm>
+          <a:prstGeom prst="rect">
+            <a:avLst/>
+          </a:prstGeom>
+          <a:solidFill>
+            <a:srgbClr val="1B3A5C"/>
+          </a:solidFill>
+          <a:ln>
+            <a:noFill/>
+          </a:ln>
+          <a:effectLst/>
+        </p:spPr>
+        <p:style>
+          <a:lnRef idx="1">
+            <a:schemeClr val="accent1"/>
+          </a:lnRef>
+          <a:fillRef idx="3">
+            <a:schemeClr val="accent1"/>
+          </a:fillRef>
+          <a:effectRef idx="2">
+            <a:schemeClr val="accent1"/>
+          </a:effectRef>
+          <a:fontRef idx="minor">
+            <a:schemeClr val="lt1"/>
+          </a:fontRef>
+        </p:style>
+        <p:txBody>
+          <a:bodyPr rtlCol="0" anchor="ctr"/>
+          <a:lstStyle/>
+          <a:p>
+            <a:pPr algn="ctr"/>
+          </a:p>
+        </p:txBody>
+      </p:sp>
+      <p:sp>
+        <p:nvSpPr>
+          <p:cNvPr id="4" name="TextBox 3"/>
+          <p:cNvSpPr txBox="1"/>
+          <p:nvPr/>
+        </p:nvSpPr>
+        <p:spPr>
+          <a:xfrm>
+            <a:off x="502920" y="109728"/>
+            <a:ext cx="8686800" cy="292608"/>
+          </a:xfrm>
+          <a:prstGeom prst="rect">
+            <a:avLst/>
+          </a:prstGeom>
+          <a:noFill/>
+        </p:spPr>
+        <p:txBody>
+          <a:bodyPr wrap="square">
+            <a:spAutoFit/>
+          </a:bodyPr>
+          <a:lstStyle/>
+          <a:p>
+            <a:pPr algn="l">
+              <a:lnSpc>
+                <a:spcPct val="100000"/>
+              </a:lnSpc>
+            </a:pPr>
+            <a:r>
+              <a:rPr sz="1200" b="1" i="0">
+                <a:solidFill>
+                  <a:srgbClr val="1B3A5C"/>
+                </a:solidFill>
+                <a:latin typeface="맑은 고딕"/>
+              </a:rPr>
+              <a:t>③ 매일 쓰는 법 · 🎨 원고 서식</a:t>
+            </a:r>
+          </a:p>
+        </p:txBody>
+      </p:sp>
+      <p:sp>
+        <p:nvSpPr>
+          <p:cNvPr id="5" name="TextBox 4"/>
+          <p:cNvSpPr txBox="1"/>
+          <p:nvPr/>
+        </p:nvSpPr>
+        <p:spPr>
+          <a:xfrm>
+            <a:off x="457200" y="347472"/>
+            <a:ext cx="10515600" cy="621792"/>
+          </a:xfrm>
+          <a:prstGeom prst="rect">
+            <a:avLst/>
+          </a:prstGeom>
+          <a:noFill/>
+        </p:spPr>
+        <p:txBody>
+          <a:bodyPr wrap="square">
+            <a:spAutoFit/>
+          </a:bodyPr>
+          <a:lstStyle/>
+          <a:p>
+            <a:pPr algn="l">
+              <a:lnSpc>
+                <a:spcPct val="100000"/>
+              </a:lnSpc>
+            </a:pPr>
+            <a:r>
+              <a:rPr sz="2400" b="1" i="0">
+                <a:solidFill>
+                  <a:srgbClr val="FFFFFF"/>
+                </a:solidFill>
+                <a:latin typeface="맑은 고딕"/>
+              </a:rPr>
+              <a:t>굵게·형광·소제목·인용구·구분선·요약 박스가 들어간 원고</a:t>
+            </a:r>
+          </a:p>
+        </p:txBody>
+      </p:sp>
+      <p:sp>
+        <p:nvSpPr>
+          <p:cNvPr id="6" name="TextBox 5"/>
+          <p:cNvSpPr txBox="1"/>
+          <p:nvPr/>
+        </p:nvSpPr>
+        <p:spPr>
+          <a:xfrm>
+            <a:off x="457200" y="6492240"/>
+            <a:ext cx="8229600" cy="274320"/>
+          </a:xfrm>
+          <a:prstGeom prst="rect">
+            <a:avLst/>
+          </a:prstGeom>
+          <a:noFill/>
+        </p:spPr>
+        <p:txBody>
+          <a:bodyPr wrap="square">
+            <a:spAutoFit/>
+          </a:bodyPr>
+          <a:lstStyle/>
+          <a:p>
+            <a:pPr algn="l">
+              <a:lnSpc>
+                <a:spcPct val="100000"/>
+              </a:lnSpc>
+            </a:pPr>
+            <a:r>
+              <a:rPr sz="900" b="0" i="0">
+                <a:solidFill>
+                  <a:srgbClr val="7A828E"/>
+                </a:solidFill>
+                <a:latin typeface="맑은 고딕"/>
+              </a:rPr>
+              <a:t>씨제이씨협동조합 OSMU 워크벤치 · 관리자·사용자 매뉴얼</a:t>
+            </a:r>
+          </a:p>
+        </p:txBody>
+      </p:sp>
+      <p:sp>
+        <p:nvSpPr>
+          <p:cNvPr id="7" name="TextBox 6"/>
+          <p:cNvSpPr txBox="1"/>
+          <p:nvPr/>
+        </p:nvSpPr>
+        <p:spPr>
+          <a:xfrm>
+            <a:off x="11094415" y="6492240"/>
+            <a:ext cx="731520" cy="274320"/>
+          </a:xfrm>
+          <a:prstGeom prst="rect">
+            <a:avLst/>
+          </a:prstGeom>
+          <a:noFill/>
+        </p:spPr>
+        <p:txBody>
+          <a:bodyPr wrap="square">
+            <a:spAutoFit/>
+          </a:bodyPr>
+          <a:lstStyle/>
+          <a:p>
+            <a:pPr algn="r">
+              <a:lnSpc>
+                <a:spcPct val="100000"/>
+              </a:lnSpc>
+            </a:pPr>
+            <a:r>
+              <a:rPr sz="900" b="0" i="0">
+                <a:solidFill>
+                  <a:srgbClr val="7A828E"/>
+                </a:solidFill>
+                <a:latin typeface="맑은 고딕"/>
+              </a:rPr>
+              <a:t>23</a:t>
+            </a:r>
+          </a:p>
+        </p:txBody>
+      </p:sp>
+      <p:sp>
+        <p:nvSpPr>
+          <p:cNvPr id="8" name="TextBox 7"/>
+          <p:cNvSpPr txBox="1"/>
+          <p:nvPr/>
+        </p:nvSpPr>
+        <p:spPr>
+          <a:xfrm>
+            <a:off x="502920" y="1325880"/>
+            <a:ext cx="5486400" cy="4206240"/>
+          </a:xfrm>
+          <a:prstGeom prst="rect">
+            <a:avLst/>
+          </a:prstGeom>
+          <a:noFill/>
+        </p:spPr>
+        <p:txBody>
+          <a:bodyPr wrap="square">
+            <a:spAutoFit/>
+          </a:bodyPr>
+          <a:lstStyle/>
+          <a:p>
+            <a:pPr>
+              <a:lnSpc>
+                <a:spcPct val="125000"/>
+              </a:lnSpc>
+              <a:spcAft>
+                <a:spcPts val="900"/>
+              </a:spcAft>
+            </a:pPr>
+            <a:r>
+              <a:rPr sz="1200" b="1">
+                <a:solidFill>
+                  <a:srgbClr val="23262B"/>
+                </a:solidFill>
+                <a:latin typeface="맑은 고딕"/>
+              </a:rPr>
+              <a:t>▪ 🧵 브랜드 킷 → 🎨 원고 서식에서 킷마다 템플릿(기본형·정보형·후기형)과 기본 강도를 정합니다.</a:t>
+            </a:r>
+          </a:p>
+          <a:p>
+            <a:pPr>
+              <a:lnSpc>
+                <a:spcPct val="125000"/>
+              </a:lnSpc>
+              <a:spcAft>
+                <a:spcPts val="900"/>
+              </a:spcAft>
+            </a:pPr>
+            <a:r>
+              <a:rPr sz="1200" b="0">
+                <a:solidFill>
+                  <a:srgbClr val="23262B"/>
+                </a:solidFill>
+                <a:latin typeface="맑은 고딕"/>
+              </a:rPr>
+              <a:t>▪ 워크벤치에서 글마다 강도(사용 안 함·최소·표준·풍부)를 바꿀 수 있습니다.</a:t>
+            </a:r>
+          </a:p>
+          <a:p>
+            <a:pPr>
+              <a:lnSpc>
+                <a:spcPct val="125000"/>
+              </a:lnSpc>
+              <a:spcAft>
+                <a:spcPts val="900"/>
+              </a:spcAft>
+            </a:pPr>
+            <a:r>
+              <a:rPr sz="1200" b="0">
+                <a:solidFill>
+                  <a:srgbClr val="23262B"/>
+                </a:solidFill>
+                <a:latin typeface="맑은 고딕"/>
+              </a:rPr>
+              <a:t>▪ 서식은 초안을 쓰는 같은 AI 호출에서 함께 만들어져 비용이 거의 늘지 않습니다.</a:t>
+            </a:r>
+          </a:p>
+          <a:p>
+            <a:pPr>
+              <a:lnSpc>
+                <a:spcPct val="125000"/>
+              </a:lnSpc>
+              <a:spcAft>
+                <a:spcPts val="900"/>
+              </a:spcAft>
+            </a:pPr>
+            <a:r>
+              <a:rPr sz="1200" b="0">
+                <a:solidFill>
+                  <a:srgbClr val="23262B"/>
+                </a:solidFill>
+                <a:latin typeface="맑은 고딕"/>
+              </a:rPr>
+              <a:t>▪ 오른쪽 네이버 미리보기에 서식이 입혀져 보이고, '🎨 서식' 목록에서 하나씩 지우거나 굵게↔형광, 인용구·구분선 모양을 바꿉니다.</a:t>
+            </a:r>
+          </a:p>
+          <a:p>
+            <a:pPr>
+              <a:lnSpc>
+                <a:spcPct val="125000"/>
+              </a:lnSpc>
+              <a:spcAft>
+                <a:spcPts val="900"/>
+              </a:spcAft>
+            </a:pPr>
+            <a:r>
+              <a:rPr sz="1200" b="0">
+                <a:solidFill>
+                  <a:srgbClr val="23262B"/>
+                </a:solidFill>
+                <a:latin typeface="맑은 고딕"/>
+              </a:rPr>
+              <a:t>▪ 예전 글은 [🎨 서식 적용]으로 재생성 없이 서식만 입힙니다 — 본문 글자는 바뀌지 않습니다.</a:t>
+            </a:r>
+          </a:p>
+          <a:p>
+            <a:pPr>
+              <a:lnSpc>
+                <a:spcPct val="125000"/>
+              </a:lnSpc>
+              <a:spcAft>
+                <a:spcPts val="900"/>
+              </a:spcAft>
+            </a:pPr>
+            <a:r>
+              <a:rPr sz="1200" b="0">
+                <a:solidFill>
+                  <a:srgbClr val="23262B"/>
+                </a:solidFill>
+                <a:latin typeface="맑은 고딕"/>
+              </a:rPr>
+              <a:t>▪ 본문 편집창에 **굵게** ==형광== ## 소제목 &gt; 인용 --- 를 직접 써서 저장해도 됩니다.</a:t>
+            </a:r>
+          </a:p>
+        </p:txBody>
+      </p:sp>
+      <p:sp>
+        <p:nvSpPr>
+          <p:cNvPr id="9" name="Rectangle 8"/>
+          <p:cNvSpPr/>
+          <p:nvPr/>
+        </p:nvSpPr>
+        <p:spPr>
+          <a:xfrm>
+            <a:off x="6263640" y="1325880"/>
+            <a:ext cx="5394960" cy="4206240"/>
+          </a:xfrm>
+          <a:prstGeom prst="rect">
+            <a:avLst/>
+          </a:prstGeom>
+          <a:solidFill>
+            <a:srgbClr val="F5EDD7"/>
+          </a:solidFill>
+          <a:ln>
+            <a:noFill/>
+          </a:ln>
+          <a:effectLst/>
+        </p:spPr>
+        <p:style>
+          <a:lnRef idx="1">
+            <a:schemeClr val="accent1"/>
+          </a:lnRef>
+          <a:fillRef idx="3">
+            <a:schemeClr val="accent1"/>
+          </a:fillRef>
+          <a:effectRef idx="2">
+            <a:schemeClr val="accent1"/>
+          </a:effectRef>
+          <a:fontRef idx="minor">
+            <a:schemeClr val="lt1"/>
+          </a:fontRef>
+        </p:style>
+        <p:txBody>
+          <a:bodyPr rtlCol="0" anchor="ctr"/>
+          <a:lstStyle/>
+          <a:p>
+            <a:pPr algn="ctr"/>
+          </a:p>
+        </p:txBody>
+      </p:sp>
+      <p:sp>
+        <p:nvSpPr>
+          <p:cNvPr id="10" name="TextBox 9"/>
+          <p:cNvSpPr txBox="1"/>
+          <p:nvPr/>
+        </p:nvSpPr>
+        <p:spPr>
+          <a:xfrm>
+            <a:off x="6492240" y="1463040"/>
+            <a:ext cx="4937760" cy="365760"/>
+          </a:xfrm>
+          <a:prstGeom prst="rect">
+            <a:avLst/>
+          </a:prstGeom>
+          <a:noFill/>
+        </p:spPr>
+        <p:txBody>
+          <a:bodyPr wrap="square">
+            <a:spAutoFit/>
+          </a:bodyPr>
+          <a:lstStyle/>
+          <a:p>
+            <a:pPr algn="l">
+              <a:lnSpc>
+                <a:spcPct val="100000"/>
+              </a:lnSpc>
+            </a:pPr>
+            <a:r>
+              <a:rPr sz="1400" b="1" i="0">
+                <a:solidFill>
+                  <a:srgbClr val="23262B"/>
+                </a:solidFill>
+                <a:latin typeface="맑은 고딕"/>
+              </a:rPr>
+              <a:t>네이버에 올릴 때</a:t>
+            </a:r>
+          </a:p>
+        </p:txBody>
+      </p:sp>
+      <p:sp>
+        <p:nvSpPr>
+          <p:cNvPr id="11" name="TextBox 10"/>
+          <p:cNvSpPr txBox="1"/>
+          <p:nvPr/>
+        </p:nvSpPr>
+        <p:spPr>
+          <a:xfrm>
+            <a:off x="6492240" y="1874519"/>
+            <a:ext cx="4937760" cy="3566160"/>
+          </a:xfrm>
+          <a:prstGeom prst="rect">
+            <a:avLst/>
+          </a:prstGeom>
+          <a:noFill/>
+        </p:spPr>
+        <p:txBody>
+          <a:bodyPr wrap="square">
+            <a:spAutoFit/>
+          </a:bodyPr>
+          <a:lstStyle/>
+          <a:p>
+            <a:pPr algn="l">
+              <a:lnSpc>
+                <a:spcPct val="130000"/>
+              </a:lnSpc>
+            </a:pPr>
+            <a:r>
+              <a:rPr sz="1150" b="0" i="0">
+                <a:solidFill>
+                  <a:srgbClr val="23262B"/>
+                </a:solidFill>
+                <a:latin typeface="맑은 고딕"/>
+              </a:rPr>
+              <a:t>[지금 게시]가 서식이 담긴 본문을 붙여 넣습니다. 굵게·형광·소제목·목록은 그대로 들어갑니다.</a:t>
+            </a:r>
+          </a:p>
+          <a:p>
+            <a:pPr algn="l">
+              <a:lnSpc>
+                <a:spcPct val="130000"/>
+              </a:lnSpc>
+            </a:pPr>
+          </a:p>
+          <a:p>
+            <a:pPr algn="l">
+              <a:lnSpc>
+                <a:spcPct val="130000"/>
+              </a:lnSpc>
+            </a:pPr>
+            <a:r>
+              <a:rPr sz="1150" b="0" i="0">
+                <a:solidFill>
+                  <a:srgbClr val="23262B"/>
+                </a:solidFill>
+                <a:latin typeface="맑은 고딕"/>
+              </a:rPr>
+              <a:t>인용구·구분선·요약 박스는 에디터가 자기 서식으로 바꾸지 못하면 글자로 들어갈 수 있습니다 — 게시 화면에 안내가 뜨면 ⚙️ 설정 → 📣 생성 채널의 '네이버 서식 붙여넣기'를 '기호로 대체'로 바꾸세요.</a:t>
+            </a:r>
+          </a:p>
+          <a:p>
+            <a:pPr algn="l">
+              <a:lnSpc>
+                <a:spcPct val="130000"/>
+              </a:lnSpc>
+            </a:pPr>
+          </a:p>
+          <a:p>
+            <a:pPr algn="l">
+              <a:lnSpc>
+                <a:spcPct val="130000"/>
+              </a:lnSpc>
+            </a:pPr>
+            <a:r>
+              <a:rPr sz="1150" b="0" i="0">
+                <a:solidFill>
+                  <a:srgbClr val="23262B"/>
+                </a:solidFill>
+                <a:latin typeface="맑은 고딕"/>
+              </a:rPr>
+              <a:t>인용구 모양(따옴표형·선형 등)은 네이버 에디터에서 인용구를 한 번 눌러 고릅니다(자동으로 누르지 않음).</a:t>
+            </a:r>
+          </a:p>
+          <a:p>
+            <a:pPr algn="l">
+              <a:lnSpc>
+                <a:spcPct val="130000"/>
+              </a:lnSpc>
+            </a:pPr>
+          </a:p>
+          <a:p>
+            <a:pPr algn="l">
+              <a:lnSpc>
+                <a:spcPct val="130000"/>
+              </a:lnSpc>
+            </a:pPr>
+            <a:r>
+              <a:rPr sz="1150" b="0" i="0">
+                <a:solidFill>
+                  <a:srgbClr val="23262B"/>
+                </a:solidFill>
+                <a:latin typeface="맑은 고딕"/>
+              </a:rPr>
+              <a:t>빨간 '📷 사진 자리' 줄은 발행 전에 사진을 넣고 지워 주세요.</a:t>
+            </a:r>
+          </a:p>
+        </p:txBody>
+      </p:sp>
+      <p:sp>
+        <p:nvSpPr>
+          <p:cNvPr id="12" name="TextBox 11"/>
+          <p:cNvSpPr txBox="1"/>
+          <p:nvPr/>
+        </p:nvSpPr>
+        <p:spPr>
+          <a:xfrm>
+            <a:off x="502920" y="5715000"/>
+            <a:ext cx="11155680" cy="548640"/>
+          </a:xfrm>
+          <a:prstGeom prst="rect">
+            <a:avLst/>
+          </a:prstGeom>
+          <a:noFill/>
+        </p:spPr>
+        <p:txBody>
+          <a:bodyPr wrap="square">
+            <a:spAutoFit/>
+          </a:bodyPr>
+          <a:lstStyle/>
+          <a:p>
+            <a:pPr algn="l">
+              <a:lnSpc>
+                <a:spcPct val="100000"/>
+              </a:lnSpc>
+            </a:pPr>
+            <a:r>
+              <a:rPr sz="1150" b="0" i="0">
+                <a:solidFill>
+                  <a:srgbClr val="7A828E"/>
+                </a:solidFill>
+                <a:latin typeface="맑은 고딕"/>
+              </a:rPr>
+              <a:t>컴플라이언스 검수는 서식 없는 본문 그대로 합니다. 교정으로 문장이 바뀌어 자리를 잃은 서식은 빠지고, 미리보기에 그 개수가 표시됩니다.</a:t>
+            </a:r>
+          </a:p>
+        </p:txBody>
+      </p:sp>
+    </p:spTree>
+  </p:cSld>
+  <p:clrMapOvr>
+    <a:masterClrMapping/>
+  </p:clrMapOvr>
+</p:sld>
+</file>
+
+<file path=ppt/slides/slide25.xml><?xml version="1.0" encoding="utf-8"?>
+<p:sld xmlns:a="http://schemas.openxmlformats.org/drawingml/2006/main" xmlns:p="http://schemas.openxmlformats.org/presentationml/2006/main" xmlns:r="http://schemas.openxmlformats.org/officeDocument/2006/relationships">
+  <p:cSld>
+    <p:bg>
+      <p:bgPr>
+        <a:solidFill>
+          <a:srgbClr val="F7F5F0"/>
+        </a:solidFill>
+        <a:effectLst/>
+      </p:bgPr>
+    </p:bg>
+    <p:spTree>
+      <p:nvGrpSpPr>
+        <p:cNvPr id="1" name=""/>
+        <p:cNvGrpSpPr/>
+        <p:nvPr/>
+      </p:nvGrpSpPr>
+      <p:grpSpPr/>
+      <p:sp>
+        <p:nvSpPr>
+          <p:cNvPr id="2" name="Rectangle 1"/>
+          <p:cNvSpPr/>
+          <p:nvPr/>
+        </p:nvSpPr>
+        <p:spPr>
+          <a:xfrm>
+            <a:off x="0" y="0"/>
+            <a:ext cx="12191695" cy="1051560"/>
+          </a:xfrm>
+          <a:prstGeom prst="rect">
+            <a:avLst/>
+          </a:prstGeom>
+          <a:solidFill>
+            <a:srgbClr val="122A44"/>
+          </a:solidFill>
+          <a:ln>
+            <a:noFill/>
+          </a:ln>
+          <a:effectLst/>
+        </p:spPr>
+        <p:style>
+          <a:lnRef idx="1">
+            <a:schemeClr val="accent1"/>
+          </a:lnRef>
+          <a:fillRef idx="3">
+            <a:schemeClr val="accent1"/>
+          </a:fillRef>
+          <a:effectRef idx="2">
+            <a:schemeClr val="accent1"/>
+          </a:effectRef>
+          <a:fontRef idx="minor">
+            <a:schemeClr val="lt1"/>
+          </a:fontRef>
+        </p:style>
+        <p:txBody>
+          <a:bodyPr rtlCol="0" anchor="ctr"/>
+          <a:lstStyle/>
+          <a:p>
+            <a:pPr algn="ctr"/>
+          </a:p>
+        </p:txBody>
+      </p:sp>
+      <p:sp>
+        <p:nvSpPr>
+          <p:cNvPr id="3" name="Rectangle 2"/>
+          <p:cNvSpPr/>
+          <p:nvPr/>
+        </p:nvSpPr>
+        <p:spPr>
+          <a:xfrm>
+            <a:off x="0" y="1051560"/>
+            <a:ext cx="12191695" cy="38100"/>
+          </a:xfrm>
+          <a:prstGeom prst="rect">
+            <a:avLst/>
+          </a:prstGeom>
+          <a:solidFill>
+            <a:srgbClr val="2F6B7A"/>
+          </a:solidFill>
+          <a:ln>
+            <a:noFill/>
+          </a:ln>
+          <a:effectLst/>
+        </p:spPr>
+        <p:style>
+          <a:lnRef idx="1">
+            <a:schemeClr val="accent1"/>
+          </a:lnRef>
+          <a:fillRef idx="3">
+            <a:schemeClr val="accent1"/>
+          </a:fillRef>
+          <a:effectRef idx="2">
+            <a:schemeClr val="accent1"/>
+          </a:effectRef>
+          <a:fontRef idx="minor">
+            <a:schemeClr val="lt1"/>
+          </a:fontRef>
+        </p:style>
+        <p:txBody>
+          <a:bodyPr rtlCol="0" anchor="ctr"/>
+          <a:lstStyle/>
+          <a:p>
+            <a:pPr algn="ctr"/>
+          </a:p>
+        </p:txBody>
+      </p:sp>
+      <p:sp>
+        <p:nvSpPr>
+          <p:cNvPr id="4" name="TextBox 3"/>
+          <p:cNvSpPr txBox="1"/>
+          <p:nvPr/>
+        </p:nvSpPr>
+        <p:spPr>
+          <a:xfrm>
+            <a:off x="502920" y="109728"/>
+            <a:ext cx="8686800" cy="292608"/>
+          </a:xfrm>
+          <a:prstGeom prst="rect">
+            <a:avLst/>
+          </a:prstGeom>
+          <a:noFill/>
+        </p:spPr>
+        <p:txBody>
+          <a:bodyPr wrap="square">
+            <a:spAutoFit/>
+          </a:bodyPr>
+          <a:lstStyle/>
+          <a:p>
+            <a:pPr algn="l">
+              <a:lnSpc>
+                <a:spcPct val="100000"/>
+              </a:lnSpc>
+            </a:pPr>
+            <a:r>
+              <a:rPr sz="1200" b="1" i="0">
+                <a:solidFill>
+                  <a:srgbClr val="2F6B7A"/>
+                </a:solidFill>
+                <a:latin typeface="맑은 고딕"/>
+              </a:rPr>
+              <a:t>④ 안전 · AI 비용</a:t>
+            </a:r>
+          </a:p>
+        </p:txBody>
+      </p:sp>
+      <p:sp>
+        <p:nvSpPr>
+          <p:cNvPr id="5" name="TextBox 4"/>
+          <p:cNvSpPr txBox="1"/>
+          <p:nvPr/>
+        </p:nvSpPr>
+        <p:spPr>
+          <a:xfrm>
+            <a:off x="457200" y="347472"/>
+            <a:ext cx="10515600" cy="621792"/>
+          </a:xfrm>
+          <a:prstGeom prst="rect">
+            <a:avLst/>
+          </a:prstGeom>
+          <a:noFill/>
+        </p:spPr>
+        <p:txBody>
+          <a:bodyPr wrap="square">
+            <a:spAutoFit/>
+          </a:bodyPr>
+          <a:lstStyle/>
+          <a:p>
+            <a:pPr algn="l">
+              <a:lnSpc>
+                <a:spcPct val="100000"/>
+              </a:lnSpc>
+            </a:pPr>
+            <a:r>
+              <a:rPr sz="2400" b="1" i="0">
+                <a:solidFill>
+                  <a:srgbClr val="FFFFFF"/>
+                </a:solidFill>
+                <a:latin typeface="맑은 고딕"/>
+              </a:rPr>
+              <a:t>토큰을 금액으로 — 단가 표 · 환율 · 월 예산</a:t>
+            </a:r>
+          </a:p>
+        </p:txBody>
+      </p:sp>
+      <p:sp>
+        <p:nvSpPr>
+          <p:cNvPr id="6" name="TextBox 5"/>
+          <p:cNvSpPr txBox="1"/>
+          <p:nvPr/>
+        </p:nvSpPr>
+        <p:spPr>
+          <a:xfrm>
+            <a:off x="457200" y="6492240"/>
+            <a:ext cx="8229600" cy="274320"/>
+          </a:xfrm>
+          <a:prstGeom prst="rect">
+            <a:avLst/>
+          </a:prstGeom>
+          <a:noFill/>
+        </p:spPr>
+        <p:txBody>
+          <a:bodyPr wrap="square">
+            <a:spAutoFit/>
+          </a:bodyPr>
+          <a:lstStyle/>
+          <a:p>
+            <a:pPr algn="l">
+              <a:lnSpc>
+                <a:spcPct val="100000"/>
+              </a:lnSpc>
+            </a:pPr>
+            <a:r>
+              <a:rPr sz="900" b="0" i="0">
+                <a:solidFill>
+                  <a:srgbClr val="7A828E"/>
+                </a:solidFill>
+                <a:latin typeface="맑은 고딕"/>
+              </a:rPr>
+              <a:t>씨제이씨협동조합 OSMU 워크벤치 · 관리자·사용자 매뉴얼</a:t>
+            </a:r>
+          </a:p>
+        </p:txBody>
+      </p:sp>
+      <p:sp>
+        <p:nvSpPr>
+          <p:cNvPr id="7" name="TextBox 6"/>
+          <p:cNvSpPr txBox="1"/>
+          <p:nvPr/>
+        </p:nvSpPr>
+        <p:spPr>
+          <a:xfrm>
+            <a:off x="11094415" y="6492240"/>
+            <a:ext cx="731520" cy="274320"/>
+          </a:xfrm>
+          <a:prstGeom prst="rect">
+            <a:avLst/>
+          </a:prstGeom>
+          <a:noFill/>
+        </p:spPr>
+        <p:txBody>
+          <a:bodyPr wrap="square">
+            <a:spAutoFit/>
+          </a:bodyPr>
+          <a:lstStyle/>
+          <a:p>
+            <a:pPr algn="r">
+              <a:lnSpc>
+                <a:spcPct val="100000"/>
+              </a:lnSpc>
+            </a:pPr>
+            <a:r>
+              <a:rPr sz="900" b="0" i="0">
+                <a:solidFill>
+                  <a:srgbClr val="7A828E"/>
+                </a:solidFill>
+                <a:latin typeface="맑은 고딕"/>
+              </a:rPr>
+              <a:t>24</a:t>
+            </a:r>
+          </a:p>
+        </p:txBody>
+      </p:sp>
+      <p:sp>
+        <p:nvSpPr>
+          <p:cNvPr id="8" name="Rectangle 7"/>
+          <p:cNvSpPr/>
+          <p:nvPr/>
+        </p:nvSpPr>
+        <p:spPr>
+          <a:xfrm>
+            <a:off x="502920" y="1371600"/>
+            <a:ext cx="502920" cy="914400"/>
+          </a:xfrm>
+          <a:prstGeom prst="rect">
+            <a:avLst/>
+          </a:prstGeom>
+          <a:solidFill>
+            <a:srgbClr val="2F6B7A"/>
+          </a:solidFill>
+          <a:ln>
+            <a:noFill/>
+          </a:ln>
+          <a:effectLst/>
+        </p:spPr>
+        <p:style>
+          <a:lnRef idx="1">
+            <a:schemeClr val="accent1"/>
+          </a:lnRef>
+          <a:fillRef idx="3">
+            <a:schemeClr val="accent1"/>
+          </a:fillRef>
+          <a:effectRef idx="2">
+            <a:schemeClr val="accent1"/>
+          </a:effectRef>
+          <a:fontRef idx="minor">
+            <a:schemeClr val="lt1"/>
+          </a:fontRef>
+        </p:style>
+        <p:txBody>
+          <a:bodyPr rtlCol="0" anchor="ctr"/>
+          <a:lstStyle/>
+          <a:p>
+            <a:pPr algn="ctr"/>
+          </a:p>
+        </p:txBody>
+      </p:sp>
+      <p:sp>
+        <p:nvSpPr>
+          <p:cNvPr id="9" name="TextBox 8"/>
+          <p:cNvSpPr txBox="1"/>
+          <p:nvPr/>
+        </p:nvSpPr>
+        <p:spPr>
+          <a:xfrm>
+            <a:off x="502920" y="1371600"/>
+            <a:ext cx="502920" cy="914400"/>
+          </a:xfrm>
+          <a:prstGeom prst="rect">
+            <a:avLst/>
+          </a:prstGeom>
+          <a:noFill/>
+        </p:spPr>
+        <p:txBody>
+          <a:bodyPr wrap="square">
+            <a:spAutoFit/>
+          </a:bodyPr>
+          <a:lstStyle/>
+          <a:p>
+            <a:pPr algn="ctr">
+              <a:lnSpc>
+                <a:spcPct val="100000"/>
+              </a:lnSpc>
+            </a:pPr>
+            <a:r>
+              <a:rPr sz="1900" b="1" i="0">
+                <a:solidFill>
+                  <a:srgbClr val="FFFFFF"/>
+                </a:solidFill>
+                <a:latin typeface="맑은 고딕"/>
+              </a:rPr>
+              <a:t>1</a:t>
+            </a:r>
+          </a:p>
+        </p:txBody>
+      </p:sp>
+      <p:sp>
+        <p:nvSpPr>
+          <p:cNvPr id="10" name="Rectangle 9"/>
+          <p:cNvSpPr/>
+          <p:nvPr/>
+        </p:nvSpPr>
+        <p:spPr>
+          <a:xfrm>
+            <a:off x="1005840" y="1371600"/>
+            <a:ext cx="10652760" cy="914400"/>
+          </a:xfrm>
+          <a:prstGeom prst="rect">
+            <a:avLst/>
+          </a:prstGeom>
+          <a:solidFill>
+            <a:srgbClr val="FFFFFF"/>
+          </a:solidFill>
+          <a:ln>
+            <a:noFill/>
+          </a:ln>
+          <a:effectLst/>
+        </p:spPr>
+        <p:style>
+          <a:lnRef idx="1">
+            <a:schemeClr val="accent1"/>
+          </a:lnRef>
+          <a:fillRef idx="3">
+            <a:schemeClr val="accent1"/>
+          </a:fillRef>
+          <a:effectRef idx="2">
+            <a:schemeClr val="accent1"/>
+          </a:effectRef>
+          <a:fontRef idx="minor">
+            <a:schemeClr val="lt1"/>
+          </a:fontRef>
+        </p:style>
+        <p:txBody>
+          <a:bodyPr rtlCol="0" anchor="ctr"/>
+          <a:lstStyle/>
+          <a:p>
+            <a:pPr algn="ctr"/>
+          </a:p>
+        </p:txBody>
+      </p:sp>
+      <p:sp>
+        <p:nvSpPr>
+          <p:cNvPr id="11" name="TextBox 10"/>
+          <p:cNvSpPr txBox="1"/>
+          <p:nvPr/>
+        </p:nvSpPr>
+        <p:spPr>
+          <a:xfrm>
+            <a:off x="1188720" y="1444752"/>
+            <a:ext cx="10287000" cy="320040"/>
+          </a:xfrm>
+          <a:prstGeom prst="rect">
+            <a:avLst/>
+          </a:prstGeom>
+          <a:noFill/>
+        </p:spPr>
+        <p:txBody>
+          <a:bodyPr wrap="square">
+            <a:spAutoFit/>
+          </a:bodyPr>
+          <a:lstStyle/>
+          <a:p>
+            <a:pPr algn="l">
+              <a:lnSpc>
+                <a:spcPct val="100000"/>
+              </a:lnSpc>
+            </a:pPr>
+            <a:r>
+              <a:rPr sz="1350" b="1" i="0">
+                <a:solidFill>
+                  <a:srgbClr val="23262B"/>
+                </a:solidFill>
+                <a:latin typeface="맑은 고딕"/>
+              </a:rPr>
+              <a:t>단가 넣기</a:t>
+            </a:r>
+          </a:p>
+        </p:txBody>
+      </p:sp>
+      <p:sp>
+        <p:nvSpPr>
+          <p:cNvPr id="12" name="TextBox 11"/>
+          <p:cNvSpPr txBox="1"/>
+          <p:nvPr/>
+        </p:nvSpPr>
+        <p:spPr>
+          <a:xfrm>
+            <a:off x="1188720" y="1755648"/>
+            <a:ext cx="10287000" cy="457200"/>
+          </a:xfrm>
+          <a:prstGeom prst="rect">
+            <a:avLst/>
+          </a:prstGeom>
+          <a:noFill/>
+        </p:spPr>
+        <p:txBody>
+          <a:bodyPr wrap="square">
+            <a:spAutoFit/>
+          </a:bodyPr>
+          <a:lstStyle/>
+          <a:p>
+            <a:pPr algn="l">
+              <a:lnSpc>
+                <a:spcPct val="120000"/>
+              </a:lnSpc>
+            </a:pPr>
+            <a:r>
+              <a:rPr sz="1150" b="0" i="0">
+                <a:solidFill>
+                  <a:srgbClr val="7A828E"/>
+                </a:solidFill>
+                <a:latin typeface="맑은 고딕"/>
+              </a:rPr>
+              <a:t>⚙️ 설정 → 📈 사용량 → 단가 표. 모델마다 100만 토큰당 입력·출력 단가(USD)를 [공식 가격 보기]에서 확인해 넣습니다. 기본값은 없습니다.</a:t>
+            </a:r>
+          </a:p>
+        </p:txBody>
+      </p:sp>
+      <p:sp>
+        <p:nvSpPr>
+          <p:cNvPr id="13" name="Rectangle 12"/>
+          <p:cNvSpPr/>
+          <p:nvPr/>
+        </p:nvSpPr>
+        <p:spPr>
+          <a:xfrm>
+            <a:off x="502920" y="2359152"/>
+            <a:ext cx="502920" cy="914400"/>
+          </a:xfrm>
+          <a:prstGeom prst="rect">
+            <a:avLst/>
+          </a:prstGeom>
+          <a:solidFill>
+            <a:srgbClr val="2F6B7A"/>
+          </a:solidFill>
+          <a:ln>
+            <a:noFill/>
+          </a:ln>
+          <a:effectLst/>
+        </p:spPr>
+        <p:style>
+          <a:lnRef idx="1">
+            <a:schemeClr val="accent1"/>
+          </a:lnRef>
+          <a:fillRef idx="3">
+            <a:schemeClr val="accent1"/>
+          </a:fillRef>
+          <a:effectRef idx="2">
+            <a:schemeClr val="accent1"/>
+          </a:effectRef>
+          <a:fontRef idx="minor">
+            <a:schemeClr val="lt1"/>
+          </a:fontRef>
+        </p:style>
+        <p:txBody>
+          <a:bodyPr rtlCol="0" anchor="ctr"/>
+          <a:lstStyle/>
+          <a:p>
+            <a:pPr algn="ctr"/>
+          </a:p>
+        </p:txBody>
+      </p:sp>
+      <p:sp>
+        <p:nvSpPr>
+          <p:cNvPr id="14" name="TextBox 13"/>
+          <p:cNvSpPr txBox="1"/>
+          <p:nvPr/>
+        </p:nvSpPr>
+        <p:spPr>
+          <a:xfrm>
+            <a:off x="502920" y="2359152"/>
+            <a:ext cx="502920" cy="914400"/>
+          </a:xfrm>
+          <a:prstGeom prst="rect">
+            <a:avLst/>
+          </a:prstGeom>
+          <a:noFill/>
+        </p:spPr>
+        <p:txBody>
+          <a:bodyPr wrap="square">
+            <a:spAutoFit/>
+          </a:bodyPr>
+          <a:lstStyle/>
+          <a:p>
+            <a:pPr algn="ctr">
+              <a:lnSpc>
+                <a:spcPct val="100000"/>
+              </a:lnSpc>
+            </a:pPr>
+            <a:r>
+              <a:rPr sz="1900" b="1" i="0">
+                <a:solidFill>
+                  <a:srgbClr val="FFFFFF"/>
+                </a:solidFill>
+                <a:latin typeface="맑은 고딕"/>
+              </a:rPr>
+              <a:t>2</a:t>
+            </a:r>
+          </a:p>
+        </p:txBody>
+      </p:sp>
+      <p:sp>
+        <p:nvSpPr>
+          <p:cNvPr id="15" name="Rectangle 14"/>
+          <p:cNvSpPr/>
+          <p:nvPr/>
+        </p:nvSpPr>
+        <p:spPr>
+          <a:xfrm>
+            <a:off x="1005840" y="2359152"/>
+            <a:ext cx="10652760" cy="914400"/>
+          </a:xfrm>
+          <a:prstGeom prst="rect">
+            <a:avLst/>
+          </a:prstGeom>
+          <a:solidFill>
+            <a:srgbClr val="FFFFFF"/>
+          </a:solidFill>
+          <a:ln>
+            <a:noFill/>
+          </a:ln>
+          <a:effectLst/>
+        </p:spPr>
+        <p:style>
+          <a:lnRef idx="1">
+            <a:schemeClr val="accent1"/>
+          </a:lnRef>
+          <a:fillRef idx="3">
+            <a:schemeClr val="accent1"/>
+          </a:fillRef>
+          <a:effectRef idx="2">
+            <a:schemeClr val="accent1"/>
+          </a:effectRef>
+          <a:fontRef idx="minor">
+            <a:schemeClr val="lt1"/>
+          </a:fontRef>
+        </p:style>
+        <p:txBody>
+          <a:bodyPr rtlCol="0" anchor="ctr"/>
+          <a:lstStyle/>
+          <a:p>
+            <a:pPr algn="ctr"/>
+          </a:p>
+        </p:txBody>
+      </p:sp>
+      <p:sp>
+        <p:nvSpPr>
+          <p:cNvPr id="16" name="TextBox 15"/>
+          <p:cNvSpPr txBox="1"/>
+          <p:nvPr/>
+        </p:nvSpPr>
+        <p:spPr>
+          <a:xfrm>
+            <a:off x="1188720" y="2432304"/>
+            <a:ext cx="10287000" cy="320040"/>
+          </a:xfrm>
+          <a:prstGeom prst="rect">
+            <a:avLst/>
+          </a:prstGeom>
+          <a:noFill/>
+        </p:spPr>
+        <p:txBody>
+          <a:bodyPr wrap="square">
+            <a:spAutoFit/>
+          </a:bodyPr>
+          <a:lstStyle/>
+          <a:p>
+            <a:pPr algn="l">
+              <a:lnSpc>
+                <a:spcPct val="100000"/>
+              </a:lnSpc>
+            </a:pPr>
+            <a:r>
+              <a:rPr sz="1350" b="1" i="0">
+                <a:solidFill>
+                  <a:srgbClr val="23262B"/>
+                </a:solidFill>
+                <a:latin typeface="맑은 고딕"/>
+              </a:rPr>
+              <a:t>환율·월 예산</a:t>
+            </a:r>
+          </a:p>
+        </p:txBody>
+      </p:sp>
+      <p:sp>
+        <p:nvSpPr>
+          <p:cNvPr id="17" name="TextBox 16"/>
+          <p:cNvSpPr txBox="1"/>
+          <p:nvPr/>
+        </p:nvSpPr>
+        <p:spPr>
+          <a:xfrm>
+            <a:off x="1188720" y="2743200"/>
+            <a:ext cx="10287000" cy="457200"/>
+          </a:xfrm>
+          <a:prstGeom prst="rect">
+            <a:avLst/>
+          </a:prstGeom>
+          <a:noFill/>
+        </p:spPr>
+        <p:txBody>
+          <a:bodyPr wrap="square">
+            <a:spAutoFit/>
+          </a:bodyPr>
+          <a:lstStyle/>
+          <a:p>
+            <a:pPr algn="l">
+              <a:lnSpc>
+                <a:spcPct val="120000"/>
+              </a:lnSpc>
+            </a:pPr>
+            <a:r>
+              <a:rPr sz="1150" b="0" i="0">
+                <a:solidFill>
+                  <a:srgbClr val="7A828E"/>
+                </a:solidFill>
+                <a:latin typeface="맑은 고딕"/>
+              </a:rPr>
+              <a:t>환율(기본 1,400원 — 실제 환율로 고치기)과 월 예산(원)을 저장하면 70%·90%에서 대시보드·워크벤치에 안내합니다.</a:t>
+            </a:r>
+          </a:p>
+        </p:txBody>
+      </p:sp>
+      <p:sp>
+        <p:nvSpPr>
+          <p:cNvPr id="18" name="Rectangle 17"/>
+          <p:cNvSpPr/>
+          <p:nvPr/>
+        </p:nvSpPr>
+        <p:spPr>
+          <a:xfrm>
+            <a:off x="502920" y="3346704"/>
+            <a:ext cx="502920" cy="914400"/>
+          </a:xfrm>
+          <a:prstGeom prst="rect">
+            <a:avLst/>
+          </a:prstGeom>
+          <a:solidFill>
+            <a:srgbClr val="2F6B7A"/>
+          </a:solidFill>
+          <a:ln>
+            <a:noFill/>
+          </a:ln>
+          <a:effectLst/>
+        </p:spPr>
+        <p:style>
+          <a:lnRef idx="1">
+            <a:schemeClr val="accent1"/>
+          </a:lnRef>
+          <a:fillRef idx="3">
+            <a:schemeClr val="accent1"/>
+          </a:fillRef>
+          <a:effectRef idx="2">
+            <a:schemeClr val="accent1"/>
+          </a:effectRef>
+          <a:fontRef idx="minor">
+            <a:schemeClr val="lt1"/>
+          </a:fontRef>
+        </p:style>
+        <p:txBody>
+          <a:bodyPr rtlCol="0" anchor="ctr"/>
+          <a:lstStyle/>
+          <a:p>
+            <a:pPr algn="ctr"/>
+          </a:p>
+        </p:txBody>
+      </p:sp>
+      <p:sp>
+        <p:nvSpPr>
+          <p:cNvPr id="19" name="TextBox 18"/>
+          <p:cNvSpPr txBox="1"/>
+          <p:nvPr/>
+        </p:nvSpPr>
+        <p:spPr>
+          <a:xfrm>
+            <a:off x="502920" y="3346704"/>
+            <a:ext cx="502920" cy="914400"/>
+          </a:xfrm>
+          <a:prstGeom prst="rect">
+            <a:avLst/>
+          </a:prstGeom>
+          <a:noFill/>
+        </p:spPr>
+        <p:txBody>
+          <a:bodyPr wrap="square">
+            <a:spAutoFit/>
+          </a:bodyPr>
+          <a:lstStyle/>
+          <a:p>
+            <a:pPr algn="ctr">
+              <a:lnSpc>
+                <a:spcPct val="100000"/>
+              </a:lnSpc>
+            </a:pPr>
+            <a:r>
+              <a:rPr sz="1900" b="1" i="0">
+                <a:solidFill>
+                  <a:srgbClr val="FFFFFF"/>
+                </a:solidFill>
+                <a:latin typeface="맑은 고딕"/>
+              </a:rPr>
+              <a:t>3</a:t>
+            </a:r>
+          </a:p>
+        </p:txBody>
+      </p:sp>
+      <p:sp>
+        <p:nvSpPr>
+          <p:cNvPr id="20" name="Rectangle 19"/>
+          <p:cNvSpPr/>
+          <p:nvPr/>
+        </p:nvSpPr>
+        <p:spPr>
+          <a:xfrm>
+            <a:off x="1005840" y="3346704"/>
+            <a:ext cx="10652760" cy="914400"/>
+          </a:xfrm>
+          <a:prstGeom prst="rect">
+            <a:avLst/>
+          </a:prstGeom>
+          <a:solidFill>
+            <a:srgbClr val="FFFFFF"/>
+          </a:solidFill>
+          <a:ln>
+            <a:noFill/>
+          </a:ln>
+          <a:effectLst/>
+        </p:spPr>
+        <p:style>
+          <a:lnRef idx="1">
+            <a:schemeClr val="accent1"/>
+          </a:lnRef>
+          <a:fillRef idx="3">
+            <a:schemeClr val="accent1"/>
+          </a:fillRef>
+          <a:effectRef idx="2">
+            <a:schemeClr val="accent1"/>
+          </a:effectRef>
+          <a:fontRef idx="minor">
+            <a:schemeClr val="lt1"/>
+          </a:fontRef>
+        </p:style>
+        <p:txBody>
+          <a:bodyPr rtlCol="0" anchor="ctr"/>
+          <a:lstStyle/>
+          <a:p>
+            <a:pPr algn="ctr"/>
+          </a:p>
+        </p:txBody>
+      </p:sp>
+      <p:sp>
+        <p:nvSpPr>
+          <p:cNvPr id="21" name="TextBox 20"/>
+          <p:cNvSpPr txBox="1"/>
+          <p:nvPr/>
+        </p:nvSpPr>
+        <p:spPr>
+          <a:xfrm>
+            <a:off x="1188720" y="3419856"/>
+            <a:ext cx="10287000" cy="320040"/>
+          </a:xfrm>
+          <a:prstGeom prst="rect">
+            <a:avLst/>
+          </a:prstGeom>
+          <a:noFill/>
+        </p:spPr>
+        <p:txBody>
+          <a:bodyPr wrap="square">
+            <a:spAutoFit/>
+          </a:bodyPr>
+          <a:lstStyle/>
+          <a:p>
+            <a:pPr algn="l">
+              <a:lnSpc>
+                <a:spcPct val="100000"/>
+              </a:lnSpc>
+            </a:pPr>
+            <a:r>
+              <a:rPr sz="1350" b="1" i="0">
+                <a:solidFill>
+                  <a:srgbClr val="23262B"/>
+                </a:solidFill>
+                <a:latin typeface="맑은 고딕"/>
+              </a:rPr>
+              <a:t>어디서 보나</a:t>
+            </a:r>
+          </a:p>
+        </p:txBody>
+      </p:sp>
+      <p:sp>
+        <p:nvSpPr>
+          <p:cNvPr id="22" name="TextBox 21"/>
+          <p:cNvSpPr txBox="1"/>
+          <p:nvPr/>
+        </p:nvSpPr>
+        <p:spPr>
+          <a:xfrm>
+            <a:off x="1188720" y="3730752"/>
+            <a:ext cx="10287000" cy="457200"/>
+          </a:xfrm>
+          <a:prstGeom prst="rect">
+            <a:avLst/>
+          </a:prstGeom>
+          <a:noFill/>
+        </p:spPr>
+        <p:txBody>
+          <a:bodyPr wrap="square">
+            <a:spAutoFit/>
+          </a:bodyPr>
+          <a:lstStyle/>
+          <a:p>
+            <a:pPr algn="l">
+              <a:lnSpc>
+                <a:spcPct val="120000"/>
+              </a:lnSpc>
+            </a:pPr>
+            <a:r>
+              <a:rPr sz="1150" b="0" i="0">
+                <a:solidFill>
+                  <a:srgbClr val="7A828E"/>
+                </a:solidFill>
+                <a:latin typeface="맑은 고딕"/>
+              </a:rPr>
+              <a:t>사용량 탭: 오늘·이번 달·전체 누적, 글 1건당 평균, 벤더·모델별 표. 워크벤치: 초안마다 '이 글 생성 비용 약 ○○원'.</a:t>
+            </a:r>
+          </a:p>
+        </p:txBody>
+      </p:sp>
+      <p:sp>
+        <p:nvSpPr>
+          <p:cNvPr id="23" name="Rectangle 22"/>
+          <p:cNvSpPr/>
+          <p:nvPr/>
+        </p:nvSpPr>
+        <p:spPr>
+          <a:xfrm>
+            <a:off x="502920" y="4434840"/>
+            <a:ext cx="11155680" cy="1645920"/>
+          </a:xfrm>
+          <a:prstGeom prst="rect">
+            <a:avLst/>
+          </a:prstGeom>
+          <a:solidFill>
+            <a:srgbClr val="E4ECEF"/>
+          </a:solidFill>
+          <a:ln>
+            <a:noFill/>
+          </a:ln>
+          <a:effectLst/>
+        </p:spPr>
+        <p:style>
+          <a:lnRef idx="1">
+            <a:schemeClr val="accent1"/>
+          </a:lnRef>
+          <a:fillRef idx="3">
+            <a:schemeClr val="accent1"/>
+          </a:fillRef>
+          <a:effectRef idx="2">
+            <a:schemeClr val="accent1"/>
+          </a:effectRef>
+          <a:fontRef idx="minor">
+            <a:schemeClr val="lt1"/>
+          </a:fontRef>
+        </p:style>
+        <p:txBody>
+          <a:bodyPr rtlCol="0" anchor="ctr"/>
+          <a:lstStyle/>
+          <a:p>
+            <a:pPr algn="ctr"/>
+          </a:p>
+        </p:txBody>
+      </p:sp>
+      <p:sp>
+        <p:nvSpPr>
+          <p:cNvPr id="24" name="TextBox 23"/>
+          <p:cNvSpPr txBox="1"/>
+          <p:nvPr/>
+        </p:nvSpPr>
+        <p:spPr>
+          <a:xfrm>
+            <a:off x="777240" y="4544568"/>
+            <a:ext cx="10607040" cy="1463040"/>
+          </a:xfrm>
+          <a:prstGeom prst="rect">
+            <a:avLst/>
+          </a:prstGeom>
+          <a:noFill/>
+        </p:spPr>
+        <p:txBody>
+          <a:bodyPr wrap="square">
+            <a:spAutoFit/>
+          </a:bodyPr>
+          <a:lstStyle/>
+          <a:p>
+            <a:pPr algn="l">
+              <a:lnSpc>
+                <a:spcPct val="130000"/>
+              </a:lnSpc>
+            </a:pPr>
+            <a:r>
+              <a:rPr sz="1200" b="1" i="0">
+                <a:solidFill>
+                  <a:srgbClr val="2F6B7A"/>
+                </a:solidFill>
+                <a:latin typeface="맑은 고딕"/>
+              </a:rPr>
+              <a:t>표시 금액은 예산 참고용 추정값입니다 — 실제 청구는 각 벤더 콘솔에서 확인하세요. 금액은 호출할 때의 단가로 계산해 저장하므로 단가를 바꿔도 지난 금액은 그대로입니다. 단가가 없는 모델의 호출은 0원이 아니라 '단가 미등록'으로 따로 셉니다. 처음 단가를 넣으면 그 모델의 지난 기록을 이 단가로 한 번 채웁니다. 글별 비용은 이 기능을 넣은 뒤의 기록부터 정확합니다.</a:t>
+            </a:r>
+          </a:p>
+        </p:txBody>
+      </p:sp>
+    </p:spTree>
+  </p:cSld>
+  <p:clrMapOvr>
+    <a:masterClrMapping/>
+  </p:clrMapOvr>
+</p:sld>
+</file>
+
+<file path=ppt/slides/slide26.xml><?xml version="1.0" encoding="utf-8"?>
+<p:sld xmlns:a="http://schemas.openxmlformats.org/drawingml/2006/main" xmlns:p="http://schemas.openxmlformats.org/presentationml/2006/main" xmlns:r="http://schemas.openxmlformats.org/officeDocument/2006/relationships">
+  <p:cSld>
+    <p:bg>
+      <p:bgPr>
+        <a:solidFill>
+          <a:srgbClr val="F7F5F0"/>
+        </a:solidFill>
+        <a:effectLst/>
+      </p:bgPr>
+    </p:bg>
+    <p:spTree>
+      <p:nvGrpSpPr>
+        <p:cNvPr id="1" name=""/>
+        <p:cNvGrpSpPr/>
+        <p:nvPr/>
+      </p:nvGrpSpPr>
+      <p:grpSpPr/>
+      <p:sp>
+        <p:nvSpPr>
+          <p:cNvPr id="2" name="Rectangle 1"/>
+          <p:cNvSpPr/>
+          <p:nvPr/>
+        </p:nvSpPr>
+        <p:spPr>
+          <a:xfrm>
+            <a:off x="0" y="0"/>
+            <a:ext cx="12191695" cy="1051560"/>
+          </a:xfrm>
+          <a:prstGeom prst="rect">
+            <a:avLst/>
+          </a:prstGeom>
+          <a:solidFill>
+            <a:srgbClr val="122A44"/>
+          </a:solidFill>
+          <a:ln>
+            <a:noFill/>
+          </a:ln>
+          <a:effectLst/>
+        </p:spPr>
+        <p:style>
+          <a:lnRef idx="1">
+            <a:schemeClr val="accent1"/>
+          </a:lnRef>
+          <a:fillRef idx="3">
+            <a:schemeClr val="accent1"/>
+          </a:fillRef>
+          <a:effectRef idx="2">
+            <a:schemeClr val="accent1"/>
+          </a:effectRef>
+          <a:fontRef idx="minor">
+            <a:schemeClr val="lt1"/>
+          </a:fontRef>
+        </p:style>
+        <p:txBody>
+          <a:bodyPr rtlCol="0" anchor="ctr"/>
+          <a:lstStyle/>
+          <a:p>
+            <a:pPr algn="ctr"/>
+          </a:p>
+        </p:txBody>
+      </p:sp>
+      <p:sp>
+        <p:nvSpPr>
+          <p:cNvPr id="3" name="Rectangle 2"/>
+          <p:cNvSpPr/>
+          <p:nvPr/>
+        </p:nvSpPr>
+        <p:spPr>
+          <a:xfrm>
+            <a:off x="0" y="1051560"/>
+            <a:ext cx="12191695" cy="38100"/>
+          </a:xfrm>
+          <a:prstGeom prst="rect">
+            <a:avLst/>
+          </a:prstGeom>
+          <a:solidFill>
+            <a:srgbClr val="1B3A5C"/>
+          </a:solidFill>
+          <a:ln>
+            <a:noFill/>
+          </a:ln>
+          <a:effectLst/>
+        </p:spPr>
+        <p:style>
+          <a:lnRef idx="1">
+            <a:schemeClr val="accent1"/>
+          </a:lnRef>
+          <a:fillRef idx="3">
+            <a:schemeClr val="accent1"/>
+          </a:fillRef>
+          <a:effectRef idx="2">
+            <a:schemeClr val="accent1"/>
+          </a:effectRef>
+          <a:fontRef idx="minor">
+            <a:schemeClr val="lt1"/>
+          </a:fontRef>
+        </p:style>
+        <p:txBody>
+          <a:bodyPr rtlCol="0" anchor="ctr"/>
+          <a:lstStyle/>
+          <a:p>
+            <a:pPr algn="ctr"/>
+          </a:p>
+        </p:txBody>
+      </p:sp>
+      <p:sp>
+        <p:nvSpPr>
+          <p:cNvPr id="4" name="TextBox 3"/>
+          <p:cNvSpPr txBox="1"/>
+          <p:nvPr/>
+        </p:nvSpPr>
+        <p:spPr>
+          <a:xfrm>
+            <a:off x="502920" y="109728"/>
+            <a:ext cx="8686800" cy="292608"/>
+          </a:xfrm>
+          <a:prstGeom prst="rect">
+            <a:avLst/>
+          </a:prstGeom>
+          <a:noFill/>
+        </p:spPr>
+        <p:txBody>
+          <a:bodyPr wrap="square">
+            <a:spAutoFit/>
+          </a:bodyPr>
+          <a:lstStyle/>
+          <a:p>
+            <a:pPr algn="l">
+              <a:lnSpc>
+                <a:spcPct val="100000"/>
+              </a:lnSpc>
+            </a:pPr>
+            <a:r>
+              <a:rPr sz="1200" b="1" i="0">
+                <a:solidFill>
+                  <a:srgbClr val="1B3A5C"/>
+                </a:solidFill>
+                <a:latin typeface="맑은 고딕"/>
+              </a:rPr>
+              <a:t>④ 안전 · 컴플라이언스</a:t>
+            </a:r>
+          </a:p>
+        </p:txBody>
+      </p:sp>
+      <p:sp>
+        <p:nvSpPr>
+          <p:cNvPr id="5" name="TextBox 4"/>
+          <p:cNvSpPr txBox="1"/>
+          <p:nvPr/>
+        </p:nvSpPr>
+        <p:spPr>
+          <a:xfrm>
+            <a:off x="457200" y="347472"/>
+            <a:ext cx="10515600" cy="621792"/>
+          </a:xfrm>
+          <a:prstGeom prst="rect">
+            <a:avLst/>
+          </a:prstGeom>
+          <a:noFill/>
+        </p:spPr>
+        <p:txBody>
+          <a:bodyPr wrap="square">
+            <a:spAutoFit/>
+          </a:bodyPr>
+          <a:lstStyle/>
+          <a:p>
+            <a:pPr algn="l">
+              <a:lnSpc>
+                <a:spcPct val="100000"/>
+              </a:lnSpc>
+            </a:pPr>
+            <a:r>
+              <a:rPr sz="2400" b="1" i="0">
+                <a:solidFill>
+                  <a:srgbClr val="FFFFFF"/>
+                </a:solidFill>
+                <a:latin typeface="맑은 고딕"/>
+              </a:rPr>
+              <a:t>의료법 제56조 + 표시·광고법 — 치료 약속 금지</a:t>
+            </a:r>
+          </a:p>
+        </p:txBody>
+      </p:sp>
+      <p:sp>
+        <p:nvSpPr>
+          <p:cNvPr id="6" name="TextBox 5"/>
+          <p:cNvSpPr txBox="1"/>
+          <p:nvPr/>
+        </p:nvSpPr>
+        <p:spPr>
+          <a:xfrm>
+            <a:off x="457200" y="6492240"/>
+            <a:ext cx="8229600" cy="274320"/>
+          </a:xfrm>
+          <a:prstGeom prst="rect">
+            <a:avLst/>
+          </a:prstGeom>
+          <a:noFill/>
+        </p:spPr>
+        <p:txBody>
+          <a:bodyPr wrap="square">
+            <a:spAutoFit/>
+          </a:bodyPr>
+          <a:lstStyle/>
+          <a:p>
+            <a:pPr algn="l">
+              <a:lnSpc>
+                <a:spcPct val="100000"/>
+              </a:lnSpc>
+            </a:pPr>
+            <a:r>
+              <a:rPr sz="900" b="0" i="0">
+                <a:solidFill>
+                  <a:srgbClr val="7A828E"/>
+                </a:solidFill>
+                <a:latin typeface="맑은 고딕"/>
+              </a:rPr>
+              <a:t>씨제이씨협동조합 OSMU 워크벤치 · 관리자·사용자 매뉴얼</a:t>
+            </a:r>
+          </a:p>
+        </p:txBody>
+      </p:sp>
+      <p:sp>
+        <p:nvSpPr>
+          <p:cNvPr id="7" name="TextBox 6"/>
+          <p:cNvSpPr txBox="1"/>
+          <p:nvPr/>
+        </p:nvSpPr>
+        <p:spPr>
+          <a:xfrm>
+            <a:off x="11094415" y="6492240"/>
+            <a:ext cx="731520" cy="274320"/>
+          </a:xfrm>
+          <a:prstGeom prst="rect">
+            <a:avLst/>
+          </a:prstGeom>
+          <a:noFill/>
+        </p:spPr>
+        <p:txBody>
+          <a:bodyPr wrap="square">
+            <a:spAutoFit/>
+          </a:bodyPr>
+          <a:lstStyle/>
+          <a:p>
+            <a:pPr algn="r">
+              <a:lnSpc>
+                <a:spcPct val="100000"/>
+              </a:lnSpc>
+            </a:pPr>
+            <a:r>
+              <a:rPr sz="900" b="0" i="0">
+                <a:solidFill>
+                  <a:srgbClr val="7A828E"/>
+                </a:solidFill>
+                <a:latin typeface="맑은 고딕"/>
+              </a:rPr>
+              <a:t>25</a:t>
             </a:r>
           </a:p>
         </p:txBody>
@@ -13994,7 +17731,7 @@
 </p:sld>
 </file>
 
-<file path=ppt/slides/slide23.xml><?xml version="1.0" encoding="utf-8"?>
+<file path=ppt/slides/slide27.xml><?xml version="1.0" encoding="utf-8"?>
 <p:sld xmlns:a="http://schemas.openxmlformats.org/drawingml/2006/main" xmlns:p="http://schemas.openxmlformats.org/presentationml/2006/main" xmlns:r="http://schemas.openxmlformats.org/officeDocument/2006/relationships">
   <p:cSld>
     <p:bg>
@@ -14251,7 +17988,7 @@
                 </a:solidFill>
                 <a:latin typeface="맑은 고딕"/>
               </a:rPr>
-              <a:t>22</a:t>
+              <a:t>26</a:t>
             </a:r>
           </a:p>
         </p:txBody>
@@ -14716,7 +18453,7 @@
                 </a:solidFill>
                 <a:latin typeface="맑은 고딕"/>
               </a:rPr>
-              <a:t>⚙️ 설정 → 📈 사용량 탭에서 실제 usage(프로바이더 응답값) 기준으로 쓴 만큼만 확인됩니다. 네이버 호출 수·남은 호출·캐시 현황은 🔍 네이버 API 탭의 통계 카드에서 봅니다.</a:t>
+              <a:t>⚙️ 설정 → 📈 사용량 탭에서 실제 usage(프로바이더 응답값) 기준으로 쓴 만큼과, 단가를 넣으면 금액(추정)까지 확인됩니다. 네이버 호출 수·남은 호출·캐시 현황은 🔍 네이버 API 탭의 통계 카드에서 봅니다.</a:t>
             </a:r>
           </a:p>
         </p:txBody>
@@ -14729,7 +18466,7 @@
 </p:sld>
 </file>
 
-<file path=ppt/slides/slide24.xml><?xml version="1.0" encoding="utf-8"?>
+<file path=ppt/slides/slide28.xml><?xml version="1.0" encoding="utf-8"?>
 <p:sld xmlns:a="http://schemas.openxmlformats.org/drawingml/2006/main" xmlns:p="http://schemas.openxmlformats.org/presentationml/2006/main" xmlns:r="http://schemas.openxmlformats.org/officeDocument/2006/relationships">
   <p:cSld>
     <p:bg>
@@ -14986,7 +18723,7 @@
                 </a:solidFill>
                 <a:latin typeface="맑은 고딕"/>
               </a:rPr>
-              <a:t>23</a:t>
+              <a:t>27</a:t>
             </a:r>
           </a:p>
         </p:txBody>
@@ -15829,7 +19566,7 @@
 </p:sld>
 </file>
 
-<file path=ppt/slides/slide25.xml><?xml version="1.0" encoding="utf-8"?>
+<file path=ppt/slides/slide29.xml><?xml version="1.0" encoding="utf-8"?>
 <p:sld xmlns:a="http://schemas.openxmlformats.org/drawingml/2006/main" xmlns:p="http://schemas.openxmlformats.org/presentationml/2006/main" xmlns:r="http://schemas.openxmlformats.org/officeDocument/2006/relationships">
   <p:cSld>
     <p:bg>
@@ -16086,7 +19823,7 @@
                 </a:solidFill>
                 <a:latin typeface="맑은 고딕"/>
               </a:rPr>
-              <a:t>24</a:t>
+              <a:t>28</a:t>
             </a:r>
           </a:p>
         </p:txBody>
@@ -16697,234 +20434,6 @@
                 <a:latin typeface="맑은 고딕"/>
               </a:rPr>
               <a:t>A. 킷 값은 [킷 저장], 계정·금기어는 [회사 공통 저장]을 눌렀는지, 워크벤치에서 그 킷을 골랐는지 확인하세요. 저장은 다음 생성부터 반영됩니다.</a:t>
-            </a:r>
-          </a:p>
-        </p:txBody>
-      </p:sp>
-    </p:spTree>
-  </p:cSld>
-  <p:clrMapOvr>
-    <a:masterClrMapping/>
-  </p:clrMapOvr>
-</p:sld>
-</file>
-
-<file path=ppt/slides/slide26.xml><?xml version="1.0" encoding="utf-8"?>
-<p:sld xmlns:a="http://schemas.openxmlformats.org/drawingml/2006/main" xmlns:p="http://schemas.openxmlformats.org/presentationml/2006/main" xmlns:r="http://schemas.openxmlformats.org/officeDocument/2006/relationships">
-  <p:cSld>
-    <p:bg>
-      <p:bgPr>
-        <a:solidFill>
-          <a:srgbClr val="122A44"/>
-        </a:solidFill>
-        <a:effectLst/>
-      </p:bgPr>
-    </p:bg>
-    <p:spTree>
-      <p:nvGrpSpPr>
-        <p:cNvPr id="1" name=""/>
-        <p:cNvGrpSpPr/>
-        <p:nvPr/>
-      </p:nvGrpSpPr>
-      <p:grpSpPr/>
-      <p:sp>
-        <p:nvSpPr>
-          <p:cNvPr id="2" name="Rectangle 1"/>
-          <p:cNvSpPr/>
-          <p:nvPr/>
-        </p:nvSpPr>
-        <p:spPr>
-          <a:xfrm>
-            <a:off x="0" y="0"/>
-            <a:ext cx="201168" cy="6858000"/>
-          </a:xfrm>
-          <a:prstGeom prst="rect">
-            <a:avLst/>
-          </a:prstGeom>
-          <a:solidFill>
-            <a:srgbClr val="C9A227"/>
-          </a:solidFill>
-          <a:ln>
-            <a:noFill/>
-          </a:ln>
-          <a:effectLst/>
-        </p:spPr>
-        <p:style>
-          <a:lnRef idx="1">
-            <a:schemeClr val="accent1"/>
-          </a:lnRef>
-          <a:fillRef idx="3">
-            <a:schemeClr val="accent1"/>
-          </a:fillRef>
-          <a:effectRef idx="2">
-            <a:schemeClr val="accent1"/>
-          </a:effectRef>
-          <a:fontRef idx="minor">
-            <a:schemeClr val="lt1"/>
-          </a:fontRef>
-        </p:style>
-        <p:txBody>
-          <a:bodyPr rtlCol="0" anchor="ctr"/>
-          <a:lstStyle/>
-          <a:p>
-            <a:pPr algn="ctr"/>
-          </a:p>
-        </p:txBody>
-      </p:sp>
-      <p:sp>
-        <p:nvSpPr>
-          <p:cNvPr id="3" name="TextBox 2"/>
-          <p:cNvSpPr txBox="1"/>
-          <p:nvPr/>
-        </p:nvSpPr>
-        <p:spPr>
-          <a:xfrm>
-            <a:off x="822960" y="2194560"/>
-            <a:ext cx="10058400" cy="457200"/>
-          </a:xfrm>
-          <a:prstGeom prst="rect">
-            <a:avLst/>
-          </a:prstGeom>
-          <a:noFill/>
-        </p:spPr>
-        <p:txBody>
-          <a:bodyPr wrap="square">
-            <a:spAutoFit/>
-          </a:bodyPr>
-          <a:lstStyle/>
-          <a:p>
-            <a:pPr algn="l">
-              <a:lnSpc>
-                <a:spcPct val="100000"/>
-              </a:lnSpc>
-            </a:pPr>
-            <a:r>
-              <a:rPr sz="1600" b="1" i="0">
-                <a:solidFill>
-                  <a:srgbClr val="C9A227"/>
-                </a:solidFill>
-                <a:latin typeface="맑은 고딕"/>
-              </a:rPr>
-              <a:t>더 알아보기</a:t>
-            </a:r>
-          </a:p>
-        </p:txBody>
-      </p:sp>
-      <p:sp>
-        <p:nvSpPr>
-          <p:cNvPr id="4" name="TextBox 3"/>
-          <p:cNvSpPr txBox="1"/>
-          <p:nvPr/>
-        </p:nvSpPr>
-        <p:spPr>
-          <a:xfrm>
-            <a:off x="777240" y="2606040"/>
-            <a:ext cx="10515600" cy="1005840"/>
-          </a:xfrm>
-          <a:prstGeom prst="rect">
-            <a:avLst/>
-          </a:prstGeom>
-          <a:noFill/>
-        </p:spPr>
-        <p:txBody>
-          <a:bodyPr wrap="square">
-            <a:spAutoFit/>
-          </a:bodyPr>
-          <a:lstStyle/>
-          <a:p>
-            <a:pPr algn="l">
-              <a:lnSpc>
-                <a:spcPct val="100000"/>
-              </a:lnSpc>
-            </a:pPr>
-            <a:r>
-              <a:rPr sz="3200" b="1" i="0">
-                <a:solidFill>
-                  <a:srgbClr val="FFFFFF"/>
-                </a:solidFill>
-                <a:latin typeface="맑은 고딕"/>
-              </a:rPr>
-              <a:t>참고 문서</a:t>
-            </a:r>
-          </a:p>
-        </p:txBody>
-      </p:sp>
-      <p:sp>
-        <p:nvSpPr>
-          <p:cNvPr id="5" name="TextBox 4"/>
-          <p:cNvSpPr txBox="1"/>
-          <p:nvPr/>
-        </p:nvSpPr>
-        <p:spPr>
-          <a:xfrm>
-            <a:off x="822960" y="3657600"/>
-            <a:ext cx="10241280" cy="2194560"/>
-          </a:xfrm>
-          <a:prstGeom prst="rect">
-            <a:avLst/>
-          </a:prstGeom>
-          <a:noFill/>
-        </p:spPr>
-        <p:txBody>
-          <a:bodyPr wrap="square">
-            <a:spAutoFit/>
-          </a:bodyPr>
-          <a:lstStyle/>
-          <a:p>
-            <a:pPr>
-              <a:lnSpc>
-                <a:spcPct val="115000"/>
-              </a:lnSpc>
-              <a:spcAft>
-                <a:spcPts val="1400"/>
-              </a:spcAft>
-            </a:pPr>
-            <a:r>
-              <a:rPr sz="1500" b="0">
-                <a:solidFill>
-                  <a:srgbClr val="F5EDD7"/>
-                </a:solidFill>
-                <a:latin typeface="맑은 고딕"/>
-              </a:rPr>
-              <a:t>▪ README.md — 아키텍처와 설계 이유</a:t>
-            </a:r>
-          </a:p>
-          <a:p>
-            <a:pPr>
-              <a:lnSpc>
-                <a:spcPct val="115000"/>
-              </a:lnSpc>
-              <a:spcAft>
-                <a:spcPts val="1400"/>
-              </a:spcAft>
-            </a:pPr>
-            <a:r>
-              <a:rPr sz="1500" b="0">
-                <a:solidFill>
-                  <a:srgbClr val="F5EDD7"/>
-                </a:solidFill>
-                <a:latin typeface="맑은 고딕"/>
-              </a:rPr>
-              <a:t>▪ HANDOFF.md — 구축 보고 (앱 📋 구축 보고서 페이지에서도 열람)</a:t>
-            </a:r>
-          </a:p>
-          <a:p>
-            <a:pPr>
-              <a:lnSpc>
-                <a:spcPct val="115000"/>
-              </a:lnSpc>
-              <a:spcAft>
-                <a:spcPts val="1400"/>
-              </a:spcAft>
-            </a:pPr>
-            <a:r>
-              <a:rPr sz="1500" b="0">
-                <a:solidFill>
-                  <a:srgbClr val="F5EDD7"/>
-                </a:solidFill>
-                <a:latin typeface="맑은 고딕"/>
-              </a:rPr>
-              <a:t>▪ 문의: 씨제이씨협동조합 02-6396-3388 · cjc@cjccoop.com</a:t>
             </a:r>
           </a:p>
         </p:txBody>
@@ -17815,6 +21324,234 @@
                 <a:latin typeface="맑은 고딕"/>
               </a:rPr>
               <a:t>핵심 팩트 14개(2014년 설립·ATUM 24개 센서·10분 스캔·7~10일 배송·KOTITI 수치 등) · SEO 키워드 14개 · 금기어 12쌍 · 우수 글 샘플 2개 · 네이비·골드 테마</a:t>
+            </a:r>
+          </a:p>
+        </p:txBody>
+      </p:sp>
+    </p:spTree>
+  </p:cSld>
+  <p:clrMapOvr>
+    <a:masterClrMapping/>
+  </p:clrMapOvr>
+</p:sld>
+</file>
+
+<file path=ppt/slides/slide30.xml><?xml version="1.0" encoding="utf-8"?>
+<p:sld xmlns:a="http://schemas.openxmlformats.org/drawingml/2006/main" xmlns:p="http://schemas.openxmlformats.org/presentationml/2006/main" xmlns:r="http://schemas.openxmlformats.org/officeDocument/2006/relationships">
+  <p:cSld>
+    <p:bg>
+      <p:bgPr>
+        <a:solidFill>
+          <a:srgbClr val="122A44"/>
+        </a:solidFill>
+        <a:effectLst/>
+      </p:bgPr>
+    </p:bg>
+    <p:spTree>
+      <p:nvGrpSpPr>
+        <p:cNvPr id="1" name=""/>
+        <p:cNvGrpSpPr/>
+        <p:nvPr/>
+      </p:nvGrpSpPr>
+      <p:grpSpPr/>
+      <p:sp>
+        <p:nvSpPr>
+          <p:cNvPr id="2" name="Rectangle 1"/>
+          <p:cNvSpPr/>
+          <p:nvPr/>
+        </p:nvSpPr>
+        <p:spPr>
+          <a:xfrm>
+            <a:off x="0" y="0"/>
+            <a:ext cx="201168" cy="6858000"/>
+          </a:xfrm>
+          <a:prstGeom prst="rect">
+            <a:avLst/>
+          </a:prstGeom>
+          <a:solidFill>
+            <a:srgbClr val="C9A227"/>
+          </a:solidFill>
+          <a:ln>
+            <a:noFill/>
+          </a:ln>
+          <a:effectLst/>
+        </p:spPr>
+        <p:style>
+          <a:lnRef idx="1">
+            <a:schemeClr val="accent1"/>
+          </a:lnRef>
+          <a:fillRef idx="3">
+            <a:schemeClr val="accent1"/>
+          </a:fillRef>
+          <a:effectRef idx="2">
+            <a:schemeClr val="accent1"/>
+          </a:effectRef>
+          <a:fontRef idx="minor">
+            <a:schemeClr val="lt1"/>
+          </a:fontRef>
+        </p:style>
+        <p:txBody>
+          <a:bodyPr rtlCol="0" anchor="ctr"/>
+          <a:lstStyle/>
+          <a:p>
+            <a:pPr algn="ctr"/>
+          </a:p>
+        </p:txBody>
+      </p:sp>
+      <p:sp>
+        <p:nvSpPr>
+          <p:cNvPr id="3" name="TextBox 2"/>
+          <p:cNvSpPr txBox="1"/>
+          <p:nvPr/>
+        </p:nvSpPr>
+        <p:spPr>
+          <a:xfrm>
+            <a:off x="822960" y="2194560"/>
+            <a:ext cx="10058400" cy="457200"/>
+          </a:xfrm>
+          <a:prstGeom prst="rect">
+            <a:avLst/>
+          </a:prstGeom>
+          <a:noFill/>
+        </p:spPr>
+        <p:txBody>
+          <a:bodyPr wrap="square">
+            <a:spAutoFit/>
+          </a:bodyPr>
+          <a:lstStyle/>
+          <a:p>
+            <a:pPr algn="l">
+              <a:lnSpc>
+                <a:spcPct val="100000"/>
+              </a:lnSpc>
+            </a:pPr>
+            <a:r>
+              <a:rPr sz="1600" b="1" i="0">
+                <a:solidFill>
+                  <a:srgbClr val="C9A227"/>
+                </a:solidFill>
+                <a:latin typeface="맑은 고딕"/>
+              </a:rPr>
+              <a:t>더 알아보기</a:t>
+            </a:r>
+          </a:p>
+        </p:txBody>
+      </p:sp>
+      <p:sp>
+        <p:nvSpPr>
+          <p:cNvPr id="4" name="TextBox 3"/>
+          <p:cNvSpPr txBox="1"/>
+          <p:nvPr/>
+        </p:nvSpPr>
+        <p:spPr>
+          <a:xfrm>
+            <a:off x="777240" y="2606040"/>
+            <a:ext cx="10515600" cy="1005840"/>
+          </a:xfrm>
+          <a:prstGeom prst="rect">
+            <a:avLst/>
+          </a:prstGeom>
+          <a:noFill/>
+        </p:spPr>
+        <p:txBody>
+          <a:bodyPr wrap="square">
+            <a:spAutoFit/>
+          </a:bodyPr>
+          <a:lstStyle/>
+          <a:p>
+            <a:pPr algn="l">
+              <a:lnSpc>
+                <a:spcPct val="100000"/>
+              </a:lnSpc>
+            </a:pPr>
+            <a:r>
+              <a:rPr sz="3200" b="1" i="0">
+                <a:solidFill>
+                  <a:srgbClr val="FFFFFF"/>
+                </a:solidFill>
+                <a:latin typeface="맑은 고딕"/>
+              </a:rPr>
+              <a:t>참고 문서</a:t>
+            </a:r>
+          </a:p>
+        </p:txBody>
+      </p:sp>
+      <p:sp>
+        <p:nvSpPr>
+          <p:cNvPr id="5" name="TextBox 4"/>
+          <p:cNvSpPr txBox="1"/>
+          <p:nvPr/>
+        </p:nvSpPr>
+        <p:spPr>
+          <a:xfrm>
+            <a:off x="822960" y="3657600"/>
+            <a:ext cx="10241280" cy="2194560"/>
+          </a:xfrm>
+          <a:prstGeom prst="rect">
+            <a:avLst/>
+          </a:prstGeom>
+          <a:noFill/>
+        </p:spPr>
+        <p:txBody>
+          <a:bodyPr wrap="square">
+            <a:spAutoFit/>
+          </a:bodyPr>
+          <a:lstStyle/>
+          <a:p>
+            <a:pPr>
+              <a:lnSpc>
+                <a:spcPct val="115000"/>
+              </a:lnSpc>
+              <a:spcAft>
+                <a:spcPts val="1400"/>
+              </a:spcAft>
+            </a:pPr>
+            <a:r>
+              <a:rPr sz="1500" b="0">
+                <a:solidFill>
+                  <a:srgbClr val="F5EDD7"/>
+                </a:solidFill>
+                <a:latin typeface="맑은 고딕"/>
+              </a:rPr>
+              <a:t>▪ README.md — 아키텍처와 설계 이유</a:t>
+            </a:r>
+          </a:p>
+          <a:p>
+            <a:pPr>
+              <a:lnSpc>
+                <a:spcPct val="115000"/>
+              </a:lnSpc>
+              <a:spcAft>
+                <a:spcPts val="1400"/>
+              </a:spcAft>
+            </a:pPr>
+            <a:r>
+              <a:rPr sz="1500" b="0">
+                <a:solidFill>
+                  <a:srgbClr val="F5EDD7"/>
+                </a:solidFill>
+                <a:latin typeface="맑은 고딕"/>
+              </a:rPr>
+              <a:t>▪ HANDOFF.md — 구축 보고 (앱 📋 구축 보고서 페이지에서도 열람)</a:t>
+            </a:r>
+          </a:p>
+          <a:p>
+            <a:pPr>
+              <a:lnSpc>
+                <a:spcPct val="115000"/>
+              </a:lnSpc>
+              <a:spcAft>
+                <a:spcPts val="1400"/>
+              </a:spcAft>
+            </a:pPr>
+            <a:r>
+              <a:rPr sz="1500" b="0">
+                <a:solidFill>
+                  <a:srgbClr val="F5EDD7"/>
+                </a:solidFill>
+                <a:latin typeface="맑은 고딕"/>
+              </a:rPr>
+              <a:t>▪ 문의: 씨제이씨협동조합 02-6396-3388 · cjc@cjccoop.com</a:t>
             </a:r>
           </a:p>
         </p:txBody>

--- a/docs/CJC_OSMU_사용자_매뉴얼.pptx
+++ b/docs/CJC_OSMU_사용자_매뉴얼.pptx
@@ -15905,7 +15905,7 @@
                 </a:solidFill>
                 <a:latin typeface="맑은 고딕"/>
               </a:rPr>
-              <a:t>빨간 '📷 사진 자리' 줄은 발행 전에 사진을 넣고 지워 주세요.</a:t>
+              <a:t>빨간 '📷 사진 자리'는 초안 뒤에 사진을 올리면 그 자리에 차례로 들어갑니다. 남은 표시는 발행 전에 지워 주세요.</a:t>
             </a:r>
           </a:p>
         </p:txBody>

--- a/docs/CJC_OSMU_사용자_매뉴얼.pptx
+++ b/docs/CJC_OSMU_사용자_매뉴얼.pptx
@@ -35,6 +35,7 @@
     <p:sldId id="283" r:id="rId34"/>
     <p:sldId id="284" r:id="rId35"/>
     <p:sldId id="285" r:id="rId36"/>
+    <p:sldId id="286" r:id="rId37"/>
   </p:sldIdLst>
   <p:sldSz cx="12191695" cy="6858000" type="screen4x3"/>
   <p:notesSz cx="6858000" cy="9144000"/>
@@ -17065,7 +17066,7 @@
                 </a:solidFill>
                 <a:latin typeface="맑은 고딕"/>
               </a:rPr>
-              <a:t>④ 안전 · 컴플라이언스</a:t>
+              <a:t>③ 매일 쓰는 법 · 📦 데이터 옮기기</a:t>
             </a:r>
           </a:p>
         </p:txBody>
@@ -17104,7 +17105,7 @@
                 </a:solidFill>
                 <a:latin typeface="맑은 고딕"/>
               </a:rPr>
-              <a:t>의료법 제56조 + 표시·광고법 — 치료 약속 금지</a:t>
+              <a:t>담당자 PC가 여러 대일 때 — 세팅을 파일 하나로 나눠 주기</a:t>
             </a:r>
           </a:p>
         </p:txBody>
@@ -17183,6 +17184,974 @@
                 <a:latin typeface="맑은 고딕"/>
               </a:rPr>
               <a:t>25</a:t>
+            </a:r>
+          </a:p>
+        </p:txBody>
+      </p:sp>
+      <p:sp>
+        <p:nvSpPr>
+          <p:cNvPr id="8" name="Rectangle 7"/>
+          <p:cNvSpPr/>
+          <p:nvPr/>
+        </p:nvSpPr>
+        <p:spPr>
+          <a:xfrm>
+            <a:off x="502920" y="1371600"/>
+            <a:ext cx="502920" cy="960120"/>
+          </a:xfrm>
+          <a:prstGeom prst="rect">
+            <a:avLst/>
+          </a:prstGeom>
+          <a:solidFill>
+            <a:srgbClr val="1B3A5C"/>
+          </a:solidFill>
+          <a:ln>
+            <a:noFill/>
+          </a:ln>
+          <a:effectLst/>
+        </p:spPr>
+        <p:style>
+          <a:lnRef idx="1">
+            <a:schemeClr val="accent1"/>
+          </a:lnRef>
+          <a:fillRef idx="3">
+            <a:schemeClr val="accent1"/>
+          </a:fillRef>
+          <a:effectRef idx="2">
+            <a:schemeClr val="accent1"/>
+          </a:effectRef>
+          <a:fontRef idx="minor">
+            <a:schemeClr val="lt1"/>
+          </a:fontRef>
+        </p:style>
+        <p:txBody>
+          <a:bodyPr rtlCol="0" anchor="ctr"/>
+          <a:lstStyle/>
+          <a:p>
+            <a:pPr algn="ctr"/>
+          </a:p>
+        </p:txBody>
+      </p:sp>
+      <p:sp>
+        <p:nvSpPr>
+          <p:cNvPr id="9" name="TextBox 8"/>
+          <p:cNvSpPr txBox="1"/>
+          <p:nvPr/>
+        </p:nvSpPr>
+        <p:spPr>
+          <a:xfrm>
+            <a:off x="502920" y="1371600"/>
+            <a:ext cx="502920" cy="960120"/>
+          </a:xfrm>
+          <a:prstGeom prst="rect">
+            <a:avLst/>
+          </a:prstGeom>
+          <a:noFill/>
+        </p:spPr>
+        <p:txBody>
+          <a:bodyPr wrap="square">
+            <a:spAutoFit/>
+          </a:bodyPr>
+          <a:lstStyle/>
+          <a:p>
+            <a:pPr algn="ctr">
+              <a:lnSpc>
+                <a:spcPct val="100000"/>
+              </a:lnSpc>
+            </a:pPr>
+            <a:r>
+              <a:rPr sz="1900" b="1" i="0">
+                <a:solidFill>
+                  <a:srgbClr val="FFFFFF"/>
+                </a:solidFill>
+                <a:latin typeface="맑은 고딕"/>
+              </a:rPr>
+              <a:t>1</a:t>
+            </a:r>
+          </a:p>
+        </p:txBody>
+      </p:sp>
+      <p:sp>
+        <p:nvSpPr>
+          <p:cNvPr id="10" name="Rectangle 9"/>
+          <p:cNvSpPr/>
+          <p:nvPr/>
+        </p:nvSpPr>
+        <p:spPr>
+          <a:xfrm>
+            <a:off x="1005840" y="1371600"/>
+            <a:ext cx="10652760" cy="960120"/>
+          </a:xfrm>
+          <a:prstGeom prst="rect">
+            <a:avLst/>
+          </a:prstGeom>
+          <a:solidFill>
+            <a:srgbClr val="FFFFFF"/>
+          </a:solidFill>
+          <a:ln>
+            <a:noFill/>
+          </a:ln>
+          <a:effectLst/>
+        </p:spPr>
+        <p:style>
+          <a:lnRef idx="1">
+            <a:schemeClr val="accent1"/>
+          </a:lnRef>
+          <a:fillRef idx="3">
+            <a:schemeClr val="accent1"/>
+          </a:fillRef>
+          <a:effectRef idx="2">
+            <a:schemeClr val="accent1"/>
+          </a:effectRef>
+          <a:fontRef idx="minor">
+            <a:schemeClr val="lt1"/>
+          </a:fontRef>
+        </p:style>
+        <p:txBody>
+          <a:bodyPr rtlCol="0" anchor="ctr"/>
+          <a:lstStyle/>
+          <a:p>
+            <a:pPr algn="ctr"/>
+          </a:p>
+        </p:txBody>
+      </p:sp>
+      <p:sp>
+        <p:nvSpPr>
+          <p:cNvPr id="11" name="TextBox 10"/>
+          <p:cNvSpPr txBox="1"/>
+          <p:nvPr/>
+        </p:nvSpPr>
+        <p:spPr>
+          <a:xfrm>
+            <a:off x="1188720" y="1444752"/>
+            <a:ext cx="10287000" cy="320040"/>
+          </a:xfrm>
+          <a:prstGeom prst="rect">
+            <a:avLst/>
+          </a:prstGeom>
+          <a:noFill/>
+        </p:spPr>
+        <p:txBody>
+          <a:bodyPr wrap="square">
+            <a:spAutoFit/>
+          </a:bodyPr>
+          <a:lstStyle/>
+          <a:p>
+            <a:pPr algn="l">
+              <a:lnSpc>
+                <a:spcPct val="100000"/>
+              </a:lnSpc>
+            </a:pPr>
+            <a:r>
+              <a:rPr sz="1350" b="1" i="0">
+                <a:solidFill>
+                  <a:srgbClr val="23262B"/>
+                </a:solidFill>
+                <a:latin typeface="맑은 고딕"/>
+              </a:rPr>
+              <a:t>기준 PC에서 내보내기</a:t>
+            </a:r>
+          </a:p>
+        </p:txBody>
+      </p:sp>
+      <p:sp>
+        <p:nvSpPr>
+          <p:cNvPr id="12" name="TextBox 11"/>
+          <p:cNvSpPr txBox="1"/>
+          <p:nvPr/>
+        </p:nvSpPr>
+        <p:spPr>
+          <a:xfrm>
+            <a:off x="1188720" y="1755648"/>
+            <a:ext cx="10287000" cy="502920"/>
+          </a:xfrm>
+          <a:prstGeom prst="rect">
+            <a:avLst/>
+          </a:prstGeom>
+          <a:noFill/>
+        </p:spPr>
+        <p:txBody>
+          <a:bodyPr wrap="square">
+            <a:spAutoFit/>
+          </a:bodyPr>
+          <a:lstStyle/>
+          <a:p>
+            <a:pPr algn="l">
+              <a:lnSpc>
+                <a:spcPct val="120000"/>
+              </a:lnSpc>
+            </a:pPr>
+            <a:r>
+              <a:rPr sz="1150" b="0" i="0">
+                <a:solidFill>
+                  <a:srgbClr val="7A828E"/>
+                </a:solidFill>
+                <a:latin typeface="맑은 고딕"/>
+              </a:rPr>
+              <a:t>⚙️ 설정 → 📦 데이터 옮기기. 옮길 항목을 고르고(브랜드 킷 · 회사 공통·앱 설정 · API 키 · AI 단가 · 키워드 측정값 · 제목 이력) [📤 파일로 내보내기] → .osmu 파일 저장. API 키를 넣으면 6자 이상 비밀번호를 정합니다.</a:t>
+            </a:r>
+          </a:p>
+        </p:txBody>
+      </p:sp>
+      <p:sp>
+        <p:nvSpPr>
+          <p:cNvPr id="13" name="Rectangle 12"/>
+          <p:cNvSpPr/>
+          <p:nvPr/>
+        </p:nvSpPr>
+        <p:spPr>
+          <a:xfrm>
+            <a:off x="502920" y="2404871"/>
+            <a:ext cx="502920" cy="960120"/>
+          </a:xfrm>
+          <a:prstGeom prst="rect">
+            <a:avLst/>
+          </a:prstGeom>
+          <a:solidFill>
+            <a:srgbClr val="1B3A5C"/>
+          </a:solidFill>
+          <a:ln>
+            <a:noFill/>
+          </a:ln>
+          <a:effectLst/>
+        </p:spPr>
+        <p:style>
+          <a:lnRef idx="1">
+            <a:schemeClr val="accent1"/>
+          </a:lnRef>
+          <a:fillRef idx="3">
+            <a:schemeClr val="accent1"/>
+          </a:fillRef>
+          <a:effectRef idx="2">
+            <a:schemeClr val="accent1"/>
+          </a:effectRef>
+          <a:fontRef idx="minor">
+            <a:schemeClr val="lt1"/>
+          </a:fontRef>
+        </p:style>
+        <p:txBody>
+          <a:bodyPr rtlCol="0" anchor="ctr"/>
+          <a:lstStyle/>
+          <a:p>
+            <a:pPr algn="ctr"/>
+          </a:p>
+        </p:txBody>
+      </p:sp>
+      <p:sp>
+        <p:nvSpPr>
+          <p:cNvPr id="14" name="TextBox 13"/>
+          <p:cNvSpPr txBox="1"/>
+          <p:nvPr/>
+        </p:nvSpPr>
+        <p:spPr>
+          <a:xfrm>
+            <a:off x="502920" y="2404871"/>
+            <a:ext cx="502920" cy="960120"/>
+          </a:xfrm>
+          <a:prstGeom prst="rect">
+            <a:avLst/>
+          </a:prstGeom>
+          <a:noFill/>
+        </p:spPr>
+        <p:txBody>
+          <a:bodyPr wrap="square">
+            <a:spAutoFit/>
+          </a:bodyPr>
+          <a:lstStyle/>
+          <a:p>
+            <a:pPr algn="ctr">
+              <a:lnSpc>
+                <a:spcPct val="100000"/>
+              </a:lnSpc>
+            </a:pPr>
+            <a:r>
+              <a:rPr sz="1900" b="1" i="0">
+                <a:solidFill>
+                  <a:srgbClr val="FFFFFF"/>
+                </a:solidFill>
+                <a:latin typeface="맑은 고딕"/>
+              </a:rPr>
+              <a:t>2</a:t>
+            </a:r>
+          </a:p>
+        </p:txBody>
+      </p:sp>
+      <p:sp>
+        <p:nvSpPr>
+          <p:cNvPr id="15" name="Rectangle 14"/>
+          <p:cNvSpPr/>
+          <p:nvPr/>
+        </p:nvSpPr>
+        <p:spPr>
+          <a:xfrm>
+            <a:off x="1005840" y="2404871"/>
+            <a:ext cx="10652760" cy="960120"/>
+          </a:xfrm>
+          <a:prstGeom prst="rect">
+            <a:avLst/>
+          </a:prstGeom>
+          <a:solidFill>
+            <a:srgbClr val="FFFFFF"/>
+          </a:solidFill>
+          <a:ln>
+            <a:noFill/>
+          </a:ln>
+          <a:effectLst/>
+        </p:spPr>
+        <p:style>
+          <a:lnRef idx="1">
+            <a:schemeClr val="accent1"/>
+          </a:lnRef>
+          <a:fillRef idx="3">
+            <a:schemeClr val="accent1"/>
+          </a:fillRef>
+          <a:effectRef idx="2">
+            <a:schemeClr val="accent1"/>
+          </a:effectRef>
+          <a:fontRef idx="minor">
+            <a:schemeClr val="lt1"/>
+          </a:fontRef>
+        </p:style>
+        <p:txBody>
+          <a:bodyPr rtlCol="0" anchor="ctr"/>
+          <a:lstStyle/>
+          <a:p>
+            <a:pPr algn="ctr"/>
+          </a:p>
+        </p:txBody>
+      </p:sp>
+      <p:sp>
+        <p:nvSpPr>
+          <p:cNvPr id="16" name="TextBox 15"/>
+          <p:cNvSpPr txBox="1"/>
+          <p:nvPr/>
+        </p:nvSpPr>
+        <p:spPr>
+          <a:xfrm>
+            <a:off x="1188720" y="2478023"/>
+            <a:ext cx="10287000" cy="320040"/>
+          </a:xfrm>
+          <a:prstGeom prst="rect">
+            <a:avLst/>
+          </a:prstGeom>
+          <a:noFill/>
+        </p:spPr>
+        <p:txBody>
+          <a:bodyPr wrap="square">
+            <a:spAutoFit/>
+          </a:bodyPr>
+          <a:lstStyle/>
+          <a:p>
+            <a:pPr algn="l">
+              <a:lnSpc>
+                <a:spcPct val="100000"/>
+              </a:lnSpc>
+            </a:pPr>
+            <a:r>
+              <a:rPr sz="1350" b="1" i="0">
+                <a:solidFill>
+                  <a:srgbClr val="23262B"/>
+                </a:solidFill>
+                <a:latin typeface="맑은 고딕"/>
+              </a:rPr>
+              <a:t>파일과 비밀번호 전달</a:t>
+            </a:r>
+          </a:p>
+        </p:txBody>
+      </p:sp>
+      <p:sp>
+        <p:nvSpPr>
+          <p:cNvPr id="17" name="TextBox 16"/>
+          <p:cNvSpPr txBox="1"/>
+          <p:nvPr/>
+        </p:nvSpPr>
+        <p:spPr>
+          <a:xfrm>
+            <a:off x="1188720" y="2788919"/>
+            <a:ext cx="10287000" cy="502920"/>
+          </a:xfrm>
+          <a:prstGeom prst="rect">
+            <a:avLst/>
+          </a:prstGeom>
+          <a:noFill/>
+        </p:spPr>
+        <p:txBody>
+          <a:bodyPr wrap="square">
+            <a:spAutoFit/>
+          </a:bodyPr>
+          <a:lstStyle/>
+          <a:p>
+            <a:pPr algn="l">
+              <a:lnSpc>
+                <a:spcPct val="120000"/>
+              </a:lnSpc>
+            </a:pPr>
+            <a:r>
+              <a:rPr sz="1150" b="0" i="0">
+                <a:solidFill>
+                  <a:srgbClr val="7A828E"/>
+                </a:solidFill>
+                <a:latin typeface="맑은 고딕"/>
+              </a:rPr>
+              <a:t>파일은 카카오톡·메일로, 비밀번호는 전화·대면 등 다른 경로로 알려 주세요. 파일+비밀번호가 있으면 키를 쓸 수 있습니다.</a:t>
+            </a:r>
+          </a:p>
+        </p:txBody>
+      </p:sp>
+      <p:sp>
+        <p:nvSpPr>
+          <p:cNvPr id="18" name="Rectangle 17"/>
+          <p:cNvSpPr/>
+          <p:nvPr/>
+        </p:nvSpPr>
+        <p:spPr>
+          <a:xfrm>
+            <a:off x="502920" y="3438142"/>
+            <a:ext cx="502920" cy="960120"/>
+          </a:xfrm>
+          <a:prstGeom prst="rect">
+            <a:avLst/>
+          </a:prstGeom>
+          <a:solidFill>
+            <a:srgbClr val="1B3A5C"/>
+          </a:solidFill>
+          <a:ln>
+            <a:noFill/>
+          </a:ln>
+          <a:effectLst/>
+        </p:spPr>
+        <p:style>
+          <a:lnRef idx="1">
+            <a:schemeClr val="accent1"/>
+          </a:lnRef>
+          <a:fillRef idx="3">
+            <a:schemeClr val="accent1"/>
+          </a:fillRef>
+          <a:effectRef idx="2">
+            <a:schemeClr val="accent1"/>
+          </a:effectRef>
+          <a:fontRef idx="minor">
+            <a:schemeClr val="lt1"/>
+          </a:fontRef>
+        </p:style>
+        <p:txBody>
+          <a:bodyPr rtlCol="0" anchor="ctr"/>
+          <a:lstStyle/>
+          <a:p>
+            <a:pPr algn="ctr"/>
+          </a:p>
+        </p:txBody>
+      </p:sp>
+      <p:sp>
+        <p:nvSpPr>
+          <p:cNvPr id="19" name="TextBox 18"/>
+          <p:cNvSpPr txBox="1"/>
+          <p:nvPr/>
+        </p:nvSpPr>
+        <p:spPr>
+          <a:xfrm>
+            <a:off x="502920" y="3438142"/>
+            <a:ext cx="502920" cy="960120"/>
+          </a:xfrm>
+          <a:prstGeom prst="rect">
+            <a:avLst/>
+          </a:prstGeom>
+          <a:noFill/>
+        </p:spPr>
+        <p:txBody>
+          <a:bodyPr wrap="square">
+            <a:spAutoFit/>
+          </a:bodyPr>
+          <a:lstStyle/>
+          <a:p>
+            <a:pPr algn="ctr">
+              <a:lnSpc>
+                <a:spcPct val="100000"/>
+              </a:lnSpc>
+            </a:pPr>
+            <a:r>
+              <a:rPr sz="1900" b="1" i="0">
+                <a:solidFill>
+                  <a:srgbClr val="FFFFFF"/>
+                </a:solidFill>
+                <a:latin typeface="맑은 고딕"/>
+              </a:rPr>
+              <a:t>3</a:t>
+            </a:r>
+          </a:p>
+        </p:txBody>
+      </p:sp>
+      <p:sp>
+        <p:nvSpPr>
+          <p:cNvPr id="20" name="Rectangle 19"/>
+          <p:cNvSpPr/>
+          <p:nvPr/>
+        </p:nvSpPr>
+        <p:spPr>
+          <a:xfrm>
+            <a:off x="1005840" y="3438142"/>
+            <a:ext cx="10652760" cy="960120"/>
+          </a:xfrm>
+          <a:prstGeom prst="rect">
+            <a:avLst/>
+          </a:prstGeom>
+          <a:solidFill>
+            <a:srgbClr val="FFFFFF"/>
+          </a:solidFill>
+          <a:ln>
+            <a:noFill/>
+          </a:ln>
+          <a:effectLst/>
+        </p:spPr>
+        <p:style>
+          <a:lnRef idx="1">
+            <a:schemeClr val="accent1"/>
+          </a:lnRef>
+          <a:fillRef idx="3">
+            <a:schemeClr val="accent1"/>
+          </a:fillRef>
+          <a:effectRef idx="2">
+            <a:schemeClr val="accent1"/>
+          </a:effectRef>
+          <a:fontRef idx="minor">
+            <a:schemeClr val="lt1"/>
+          </a:fontRef>
+        </p:style>
+        <p:txBody>
+          <a:bodyPr rtlCol="0" anchor="ctr"/>
+          <a:lstStyle/>
+          <a:p>
+            <a:pPr algn="ctr"/>
+          </a:p>
+        </p:txBody>
+      </p:sp>
+      <p:sp>
+        <p:nvSpPr>
+          <p:cNvPr id="21" name="TextBox 20"/>
+          <p:cNvSpPr txBox="1"/>
+          <p:nvPr/>
+        </p:nvSpPr>
+        <p:spPr>
+          <a:xfrm>
+            <a:off x="1188720" y="3511294"/>
+            <a:ext cx="10287000" cy="320040"/>
+          </a:xfrm>
+          <a:prstGeom prst="rect">
+            <a:avLst/>
+          </a:prstGeom>
+          <a:noFill/>
+        </p:spPr>
+        <p:txBody>
+          <a:bodyPr wrap="square">
+            <a:spAutoFit/>
+          </a:bodyPr>
+          <a:lstStyle/>
+          <a:p>
+            <a:pPr algn="l">
+              <a:lnSpc>
+                <a:spcPct val="100000"/>
+              </a:lnSpc>
+            </a:pPr>
+            <a:r>
+              <a:rPr sz="1350" b="1" i="0">
+                <a:solidFill>
+                  <a:srgbClr val="23262B"/>
+                </a:solidFill>
+                <a:latin typeface="맑은 고딕"/>
+              </a:rPr>
+              <a:t>받는 PC에서 가져오기</a:t>
+            </a:r>
+          </a:p>
+        </p:txBody>
+      </p:sp>
+      <p:sp>
+        <p:nvSpPr>
+          <p:cNvPr id="22" name="TextBox 21"/>
+          <p:cNvSpPr txBox="1"/>
+          <p:nvPr/>
+        </p:nvSpPr>
+        <p:spPr>
+          <a:xfrm>
+            <a:off x="1188720" y="3822190"/>
+            <a:ext cx="10287000" cy="502920"/>
+          </a:xfrm>
+          <a:prstGeom prst="rect">
+            <a:avLst/>
+          </a:prstGeom>
+          <a:noFill/>
+        </p:spPr>
+        <p:txBody>
+          <a:bodyPr wrap="square">
+            <a:spAutoFit/>
+          </a:bodyPr>
+          <a:lstStyle/>
+          <a:p>
+            <a:pPr algn="l">
+              <a:lnSpc>
+                <a:spcPct val="120000"/>
+              </a:lnSpc>
+            </a:pPr>
+            <a:r>
+              <a:rPr sz="1150" b="0" i="0">
+                <a:solidFill>
+                  <a:srgbClr val="7A828E"/>
+                </a:solidFill>
+                <a:latin typeface="맑은 고딕"/>
+              </a:rPr>
+              <a:t>[📂 .osmu 파일 열기] → 항목마다 '무엇이 바뀌는지'를 확인하고 고른 뒤 [📥 이 PC에 가져오기]. 브랜드 킷은 이름으로 맞춰 같은 이름이면 내용을 바꾸고, 없으면 새로 만듭니다.</a:t>
+            </a:r>
+          </a:p>
+        </p:txBody>
+      </p:sp>
+      <p:sp>
+        <p:nvSpPr>
+          <p:cNvPr id="23" name="Rectangle 22"/>
+          <p:cNvSpPr/>
+          <p:nvPr/>
+        </p:nvSpPr>
+        <p:spPr>
+          <a:xfrm>
+            <a:off x="502920" y="4572000"/>
+            <a:ext cx="11155680" cy="1600200"/>
+          </a:xfrm>
+          <a:prstGeom prst="rect">
+            <a:avLst/>
+          </a:prstGeom>
+          <a:solidFill>
+            <a:srgbClr val="E4ECEF"/>
+          </a:solidFill>
+          <a:ln>
+            <a:noFill/>
+          </a:ln>
+          <a:effectLst/>
+        </p:spPr>
+        <p:style>
+          <a:lnRef idx="1">
+            <a:schemeClr val="accent1"/>
+          </a:lnRef>
+          <a:fillRef idx="3">
+            <a:schemeClr val="accent1"/>
+          </a:fillRef>
+          <a:effectRef idx="2">
+            <a:schemeClr val="accent1"/>
+          </a:effectRef>
+          <a:fontRef idx="minor">
+            <a:schemeClr val="lt1"/>
+          </a:fontRef>
+        </p:style>
+        <p:txBody>
+          <a:bodyPr rtlCol="0" anchor="ctr"/>
+          <a:lstStyle/>
+          <a:p>
+            <a:pPr algn="ctr"/>
+          </a:p>
+        </p:txBody>
+      </p:sp>
+      <p:sp>
+        <p:nvSpPr>
+          <p:cNvPr id="24" name="TextBox 23"/>
+          <p:cNvSpPr txBox="1"/>
+          <p:nvPr/>
+        </p:nvSpPr>
+        <p:spPr>
+          <a:xfrm>
+            <a:off x="777240" y="4663440"/>
+            <a:ext cx="10607040" cy="1463040"/>
+          </a:xfrm>
+          <a:prstGeom prst="rect">
+            <a:avLst/>
+          </a:prstGeom>
+          <a:noFill/>
+        </p:spPr>
+        <p:txBody>
+          <a:bodyPr wrap="square">
+            <a:spAutoFit/>
+          </a:bodyPr>
+          <a:lstStyle/>
+          <a:p>
+            <a:pPr algn="l">
+              <a:lnSpc>
+                <a:spcPct val="130000"/>
+              </a:lnSpc>
+            </a:pPr>
+            <a:r>
+              <a:rPr sz="1200" b="1" i="0">
+                <a:solidFill>
+                  <a:srgbClr val="2F6B7A"/>
+                </a:solidFill>
+                <a:latin typeface="맑은 고딕"/>
+              </a:rPr>
+              <a:t>받는 PC의 글·사진·캘린더 일정·게시 기록·AI 사용 기록·네이버 로그인은 바뀌지 않습니다(네이버 로그인은 PC마다 한 번씩). 가져오기 직전의 DB는 데이터 폴더의 backups에 자동으로 복사됩니다(최근 5개). 비밀번호가 틀리면 아무것도 바뀌지 않습니다. PC를 통째로 바꿀 때는 앱을 닫고 %APPDATA%\OSMU_CJC 폴더 전체를 새 PC의 같은 자리에 복사하세요.</a:t>
+            </a:r>
+          </a:p>
+        </p:txBody>
+      </p:sp>
+    </p:spTree>
+  </p:cSld>
+  <p:clrMapOvr>
+    <a:masterClrMapping/>
+  </p:clrMapOvr>
+</p:sld>
+</file>
+
+<file path=ppt/slides/slide27.xml><?xml version="1.0" encoding="utf-8"?>
+<p:sld xmlns:a="http://schemas.openxmlformats.org/drawingml/2006/main" xmlns:p="http://schemas.openxmlformats.org/presentationml/2006/main" xmlns:r="http://schemas.openxmlformats.org/officeDocument/2006/relationships">
+  <p:cSld>
+    <p:bg>
+      <p:bgPr>
+        <a:solidFill>
+          <a:srgbClr val="F7F5F0"/>
+        </a:solidFill>
+        <a:effectLst/>
+      </p:bgPr>
+    </p:bg>
+    <p:spTree>
+      <p:nvGrpSpPr>
+        <p:cNvPr id="1" name=""/>
+        <p:cNvGrpSpPr/>
+        <p:nvPr/>
+      </p:nvGrpSpPr>
+      <p:grpSpPr/>
+      <p:sp>
+        <p:nvSpPr>
+          <p:cNvPr id="2" name="Rectangle 1"/>
+          <p:cNvSpPr/>
+          <p:nvPr/>
+        </p:nvSpPr>
+        <p:spPr>
+          <a:xfrm>
+            <a:off x="0" y="0"/>
+            <a:ext cx="12191695" cy="1051560"/>
+          </a:xfrm>
+          <a:prstGeom prst="rect">
+            <a:avLst/>
+          </a:prstGeom>
+          <a:solidFill>
+            <a:srgbClr val="122A44"/>
+          </a:solidFill>
+          <a:ln>
+            <a:noFill/>
+          </a:ln>
+          <a:effectLst/>
+        </p:spPr>
+        <p:style>
+          <a:lnRef idx="1">
+            <a:schemeClr val="accent1"/>
+          </a:lnRef>
+          <a:fillRef idx="3">
+            <a:schemeClr val="accent1"/>
+          </a:fillRef>
+          <a:effectRef idx="2">
+            <a:schemeClr val="accent1"/>
+          </a:effectRef>
+          <a:fontRef idx="minor">
+            <a:schemeClr val="lt1"/>
+          </a:fontRef>
+        </p:style>
+        <p:txBody>
+          <a:bodyPr rtlCol="0" anchor="ctr"/>
+          <a:lstStyle/>
+          <a:p>
+            <a:pPr algn="ctr"/>
+          </a:p>
+        </p:txBody>
+      </p:sp>
+      <p:sp>
+        <p:nvSpPr>
+          <p:cNvPr id="3" name="Rectangle 2"/>
+          <p:cNvSpPr/>
+          <p:nvPr/>
+        </p:nvSpPr>
+        <p:spPr>
+          <a:xfrm>
+            <a:off x="0" y="1051560"/>
+            <a:ext cx="12191695" cy="38100"/>
+          </a:xfrm>
+          <a:prstGeom prst="rect">
+            <a:avLst/>
+          </a:prstGeom>
+          <a:solidFill>
+            <a:srgbClr val="1B3A5C"/>
+          </a:solidFill>
+          <a:ln>
+            <a:noFill/>
+          </a:ln>
+          <a:effectLst/>
+        </p:spPr>
+        <p:style>
+          <a:lnRef idx="1">
+            <a:schemeClr val="accent1"/>
+          </a:lnRef>
+          <a:fillRef idx="3">
+            <a:schemeClr val="accent1"/>
+          </a:fillRef>
+          <a:effectRef idx="2">
+            <a:schemeClr val="accent1"/>
+          </a:effectRef>
+          <a:fontRef idx="minor">
+            <a:schemeClr val="lt1"/>
+          </a:fontRef>
+        </p:style>
+        <p:txBody>
+          <a:bodyPr rtlCol="0" anchor="ctr"/>
+          <a:lstStyle/>
+          <a:p>
+            <a:pPr algn="ctr"/>
+          </a:p>
+        </p:txBody>
+      </p:sp>
+      <p:sp>
+        <p:nvSpPr>
+          <p:cNvPr id="4" name="TextBox 3"/>
+          <p:cNvSpPr txBox="1"/>
+          <p:nvPr/>
+        </p:nvSpPr>
+        <p:spPr>
+          <a:xfrm>
+            <a:off x="502920" y="109728"/>
+            <a:ext cx="8686800" cy="292608"/>
+          </a:xfrm>
+          <a:prstGeom prst="rect">
+            <a:avLst/>
+          </a:prstGeom>
+          <a:noFill/>
+        </p:spPr>
+        <p:txBody>
+          <a:bodyPr wrap="square">
+            <a:spAutoFit/>
+          </a:bodyPr>
+          <a:lstStyle/>
+          <a:p>
+            <a:pPr algn="l">
+              <a:lnSpc>
+                <a:spcPct val="100000"/>
+              </a:lnSpc>
+            </a:pPr>
+            <a:r>
+              <a:rPr sz="1200" b="1" i="0">
+                <a:solidFill>
+                  <a:srgbClr val="1B3A5C"/>
+                </a:solidFill>
+                <a:latin typeface="맑은 고딕"/>
+              </a:rPr>
+              <a:t>④ 안전 · 컴플라이언스</a:t>
+            </a:r>
+          </a:p>
+        </p:txBody>
+      </p:sp>
+      <p:sp>
+        <p:nvSpPr>
+          <p:cNvPr id="5" name="TextBox 4"/>
+          <p:cNvSpPr txBox="1"/>
+          <p:nvPr/>
+        </p:nvSpPr>
+        <p:spPr>
+          <a:xfrm>
+            <a:off x="457200" y="347472"/>
+            <a:ext cx="10515600" cy="621792"/>
+          </a:xfrm>
+          <a:prstGeom prst="rect">
+            <a:avLst/>
+          </a:prstGeom>
+          <a:noFill/>
+        </p:spPr>
+        <p:txBody>
+          <a:bodyPr wrap="square">
+            <a:spAutoFit/>
+          </a:bodyPr>
+          <a:lstStyle/>
+          <a:p>
+            <a:pPr algn="l">
+              <a:lnSpc>
+                <a:spcPct val="100000"/>
+              </a:lnSpc>
+            </a:pPr>
+            <a:r>
+              <a:rPr sz="2400" b="1" i="0">
+                <a:solidFill>
+                  <a:srgbClr val="FFFFFF"/>
+                </a:solidFill>
+                <a:latin typeface="맑은 고딕"/>
+              </a:rPr>
+              <a:t>의료법 제56조 + 표시·광고법 — 치료 약속 금지</a:t>
+            </a:r>
+          </a:p>
+        </p:txBody>
+      </p:sp>
+      <p:sp>
+        <p:nvSpPr>
+          <p:cNvPr id="6" name="TextBox 5"/>
+          <p:cNvSpPr txBox="1"/>
+          <p:nvPr/>
+        </p:nvSpPr>
+        <p:spPr>
+          <a:xfrm>
+            <a:off x="457200" y="6492240"/>
+            <a:ext cx="8229600" cy="274320"/>
+          </a:xfrm>
+          <a:prstGeom prst="rect">
+            <a:avLst/>
+          </a:prstGeom>
+          <a:noFill/>
+        </p:spPr>
+        <p:txBody>
+          <a:bodyPr wrap="square">
+            <a:spAutoFit/>
+          </a:bodyPr>
+          <a:lstStyle/>
+          <a:p>
+            <a:pPr algn="l">
+              <a:lnSpc>
+                <a:spcPct val="100000"/>
+              </a:lnSpc>
+            </a:pPr>
+            <a:r>
+              <a:rPr sz="900" b="0" i="0">
+                <a:solidFill>
+                  <a:srgbClr val="7A828E"/>
+                </a:solidFill>
+                <a:latin typeface="맑은 고딕"/>
+              </a:rPr>
+              <a:t>씨제이씨협동조합 OSMU 워크벤치 · 관리자·사용자 매뉴얼</a:t>
+            </a:r>
+          </a:p>
+        </p:txBody>
+      </p:sp>
+      <p:sp>
+        <p:nvSpPr>
+          <p:cNvPr id="7" name="TextBox 6"/>
+          <p:cNvSpPr txBox="1"/>
+          <p:nvPr/>
+        </p:nvSpPr>
+        <p:spPr>
+          <a:xfrm>
+            <a:off x="11094415" y="6492240"/>
+            <a:ext cx="731520" cy="274320"/>
+          </a:xfrm>
+          <a:prstGeom prst="rect">
+            <a:avLst/>
+          </a:prstGeom>
+          <a:noFill/>
+        </p:spPr>
+        <p:txBody>
+          <a:bodyPr wrap="square">
+            <a:spAutoFit/>
+          </a:bodyPr>
+          <a:lstStyle/>
+          <a:p>
+            <a:pPr algn="r">
+              <a:lnSpc>
+                <a:spcPct val="100000"/>
+              </a:lnSpc>
+            </a:pPr>
+            <a:r>
+              <a:rPr sz="900" b="0" i="0">
+                <a:solidFill>
+                  <a:srgbClr val="7A828E"/>
+                </a:solidFill>
+                <a:latin typeface="맑은 고딕"/>
+              </a:rPr>
+              <a:t>26</a:t>
             </a:r>
           </a:p>
         </p:txBody>
@@ -17731,7 +18700,7 @@
 </p:sld>
 </file>
 
-<file path=ppt/slides/slide27.xml><?xml version="1.0" encoding="utf-8"?>
+<file path=ppt/slides/slide28.xml><?xml version="1.0" encoding="utf-8"?>
 <p:sld xmlns:a="http://schemas.openxmlformats.org/drawingml/2006/main" xmlns:p="http://schemas.openxmlformats.org/presentationml/2006/main" xmlns:r="http://schemas.openxmlformats.org/officeDocument/2006/relationships">
   <p:cSld>
     <p:bg>
@@ -17988,7 +18957,7 @@
                 </a:solidFill>
                 <a:latin typeface="맑은 고딕"/>
               </a:rPr>
-              <a:t>26</a:t>
+              <a:t>27</a:t>
             </a:r>
           </a:p>
         </p:txBody>
@@ -18466,1106 +19435,6 @@
 </p:sld>
 </file>
 
-<file path=ppt/slides/slide28.xml><?xml version="1.0" encoding="utf-8"?>
-<p:sld xmlns:a="http://schemas.openxmlformats.org/drawingml/2006/main" xmlns:p="http://schemas.openxmlformats.org/presentationml/2006/main" xmlns:r="http://schemas.openxmlformats.org/officeDocument/2006/relationships">
-  <p:cSld>
-    <p:bg>
-      <p:bgPr>
-        <a:solidFill>
-          <a:srgbClr val="F7F5F0"/>
-        </a:solidFill>
-        <a:effectLst/>
-      </p:bgPr>
-    </p:bg>
-    <p:spTree>
-      <p:nvGrpSpPr>
-        <p:cNvPr id="1" name=""/>
-        <p:cNvGrpSpPr/>
-        <p:nvPr/>
-      </p:nvGrpSpPr>
-      <p:grpSpPr/>
-      <p:sp>
-        <p:nvSpPr>
-          <p:cNvPr id="2" name="Rectangle 1"/>
-          <p:cNvSpPr/>
-          <p:nvPr/>
-        </p:nvSpPr>
-        <p:spPr>
-          <a:xfrm>
-            <a:off x="0" y="0"/>
-            <a:ext cx="12191695" cy="1051560"/>
-          </a:xfrm>
-          <a:prstGeom prst="rect">
-            <a:avLst/>
-          </a:prstGeom>
-          <a:solidFill>
-            <a:srgbClr val="122A44"/>
-          </a:solidFill>
-          <a:ln>
-            <a:noFill/>
-          </a:ln>
-          <a:effectLst/>
-        </p:spPr>
-        <p:style>
-          <a:lnRef idx="1">
-            <a:schemeClr val="accent1"/>
-          </a:lnRef>
-          <a:fillRef idx="3">
-            <a:schemeClr val="accent1"/>
-          </a:fillRef>
-          <a:effectRef idx="2">
-            <a:schemeClr val="accent1"/>
-          </a:effectRef>
-          <a:fontRef idx="minor">
-            <a:schemeClr val="lt1"/>
-          </a:fontRef>
-        </p:style>
-        <p:txBody>
-          <a:bodyPr rtlCol="0" anchor="ctr"/>
-          <a:lstStyle/>
-          <a:p>
-            <a:pPr algn="ctr"/>
-          </a:p>
-        </p:txBody>
-      </p:sp>
-      <p:sp>
-        <p:nvSpPr>
-          <p:cNvPr id="3" name="Rectangle 2"/>
-          <p:cNvSpPr/>
-          <p:nvPr/>
-        </p:nvSpPr>
-        <p:spPr>
-          <a:xfrm>
-            <a:off x="0" y="1051560"/>
-            <a:ext cx="12191695" cy="38100"/>
-          </a:xfrm>
-          <a:prstGeom prst="rect">
-            <a:avLst/>
-          </a:prstGeom>
-          <a:solidFill>
-            <a:srgbClr val="1B3A5C"/>
-          </a:solidFill>
-          <a:ln>
-            <a:noFill/>
-          </a:ln>
-          <a:effectLst/>
-        </p:spPr>
-        <p:style>
-          <a:lnRef idx="1">
-            <a:schemeClr val="accent1"/>
-          </a:lnRef>
-          <a:fillRef idx="3">
-            <a:schemeClr val="accent1"/>
-          </a:fillRef>
-          <a:effectRef idx="2">
-            <a:schemeClr val="accent1"/>
-          </a:effectRef>
-          <a:fontRef idx="minor">
-            <a:schemeClr val="lt1"/>
-          </a:fontRef>
-        </p:style>
-        <p:txBody>
-          <a:bodyPr rtlCol="0" anchor="ctr"/>
-          <a:lstStyle/>
-          <a:p>
-            <a:pPr algn="ctr"/>
-          </a:p>
-        </p:txBody>
-      </p:sp>
-      <p:sp>
-        <p:nvSpPr>
-          <p:cNvPr id="4" name="TextBox 3"/>
-          <p:cNvSpPr txBox="1"/>
-          <p:nvPr/>
-        </p:nvSpPr>
-        <p:spPr>
-          <a:xfrm>
-            <a:off x="502920" y="109728"/>
-            <a:ext cx="8686800" cy="292608"/>
-          </a:xfrm>
-          <a:prstGeom prst="rect">
-            <a:avLst/>
-          </a:prstGeom>
-          <a:noFill/>
-        </p:spPr>
-        <p:txBody>
-          <a:bodyPr wrap="square">
-            <a:spAutoFit/>
-          </a:bodyPr>
-          <a:lstStyle/>
-          <a:p>
-            <a:pPr algn="l">
-              <a:lnSpc>
-                <a:spcPct val="100000"/>
-              </a:lnSpc>
-            </a:pPr>
-            <a:r>
-              <a:rPr sz="1200" b="1" i="0">
-                <a:solidFill>
-                  <a:srgbClr val="1B3A5C"/>
-                </a:solidFill>
-                <a:latin typeface="맑은 고딕"/>
-              </a:rPr>
-              <a:t>④ 안전 · 주의사항</a:t>
-            </a:r>
-          </a:p>
-        </p:txBody>
-      </p:sp>
-      <p:sp>
-        <p:nvSpPr>
-          <p:cNvPr id="5" name="TextBox 4"/>
-          <p:cNvSpPr txBox="1"/>
-          <p:nvPr/>
-        </p:nvSpPr>
-        <p:spPr>
-          <a:xfrm>
-            <a:off x="457200" y="347472"/>
-            <a:ext cx="10515600" cy="621792"/>
-          </a:xfrm>
-          <a:prstGeom prst="rect">
-            <a:avLst/>
-          </a:prstGeom>
-          <a:noFill/>
-        </p:spPr>
-        <p:txBody>
-          <a:bodyPr wrap="square">
-            <a:spAutoFit/>
-          </a:bodyPr>
-          <a:lstStyle/>
-          <a:p>
-            <a:pPr algn="l">
-              <a:lnSpc>
-                <a:spcPct val="100000"/>
-              </a:lnSpc>
-            </a:pPr>
-            <a:r>
-              <a:rPr sz="2400" b="1" i="0">
-                <a:solidFill>
-                  <a:srgbClr val="FFFFFF"/>
-                </a:solidFill>
-                <a:latin typeface="맑은 고딕"/>
-              </a:rPr>
-              <a:t>함정 모음 — 먼저 알면 안 헷갈립니다</a:t>
-            </a:r>
-          </a:p>
-        </p:txBody>
-      </p:sp>
-      <p:sp>
-        <p:nvSpPr>
-          <p:cNvPr id="6" name="TextBox 5"/>
-          <p:cNvSpPr txBox="1"/>
-          <p:nvPr/>
-        </p:nvSpPr>
-        <p:spPr>
-          <a:xfrm>
-            <a:off x="457200" y="6492240"/>
-            <a:ext cx="8229600" cy="274320"/>
-          </a:xfrm>
-          <a:prstGeom prst="rect">
-            <a:avLst/>
-          </a:prstGeom>
-          <a:noFill/>
-        </p:spPr>
-        <p:txBody>
-          <a:bodyPr wrap="square">
-            <a:spAutoFit/>
-          </a:bodyPr>
-          <a:lstStyle/>
-          <a:p>
-            <a:pPr algn="l">
-              <a:lnSpc>
-                <a:spcPct val="100000"/>
-              </a:lnSpc>
-            </a:pPr>
-            <a:r>
-              <a:rPr sz="900" b="0" i="0">
-                <a:solidFill>
-                  <a:srgbClr val="7A828E"/>
-                </a:solidFill>
-                <a:latin typeface="맑은 고딕"/>
-              </a:rPr>
-              <a:t>씨제이씨협동조합 OSMU 워크벤치 · 관리자·사용자 매뉴얼</a:t>
-            </a:r>
-          </a:p>
-        </p:txBody>
-      </p:sp>
-      <p:sp>
-        <p:nvSpPr>
-          <p:cNvPr id="7" name="TextBox 6"/>
-          <p:cNvSpPr txBox="1"/>
-          <p:nvPr/>
-        </p:nvSpPr>
-        <p:spPr>
-          <a:xfrm>
-            <a:off x="11094415" y="6492240"/>
-            <a:ext cx="731520" cy="274320"/>
-          </a:xfrm>
-          <a:prstGeom prst="rect">
-            <a:avLst/>
-          </a:prstGeom>
-          <a:noFill/>
-        </p:spPr>
-        <p:txBody>
-          <a:bodyPr wrap="square">
-            <a:spAutoFit/>
-          </a:bodyPr>
-          <a:lstStyle/>
-          <a:p>
-            <a:pPr algn="r">
-              <a:lnSpc>
-                <a:spcPct val="100000"/>
-              </a:lnSpc>
-            </a:pPr>
-            <a:r>
-              <a:rPr sz="900" b="0" i="0">
-                <a:solidFill>
-                  <a:srgbClr val="7A828E"/>
-                </a:solidFill>
-                <a:latin typeface="맑은 고딕"/>
-              </a:rPr>
-              <a:t>27</a:t>
-            </a:r>
-          </a:p>
-        </p:txBody>
-      </p:sp>
-      <p:sp>
-        <p:nvSpPr>
-          <p:cNvPr id="8" name="Rectangle 7"/>
-          <p:cNvSpPr/>
-          <p:nvPr/>
-        </p:nvSpPr>
-        <p:spPr>
-          <a:xfrm>
-            <a:off x="502920" y="1417320"/>
-            <a:ext cx="11155680" cy="987552"/>
-          </a:xfrm>
-          <a:prstGeom prst="rect">
-            <a:avLst/>
-          </a:prstGeom>
-          <a:solidFill>
-            <a:srgbClr val="FFFFFF"/>
-          </a:solidFill>
-          <a:ln>
-            <a:noFill/>
-          </a:ln>
-          <a:effectLst/>
-        </p:spPr>
-        <p:style>
-          <a:lnRef idx="1">
-            <a:schemeClr val="accent1"/>
-          </a:lnRef>
-          <a:fillRef idx="3">
-            <a:schemeClr val="accent1"/>
-          </a:fillRef>
-          <a:effectRef idx="2">
-            <a:schemeClr val="accent1"/>
-          </a:effectRef>
-          <a:fontRef idx="minor">
-            <a:schemeClr val="lt1"/>
-          </a:fontRef>
-        </p:style>
-        <p:txBody>
-          <a:bodyPr rtlCol="0" anchor="ctr"/>
-          <a:lstStyle/>
-          <a:p>
-            <a:pPr algn="ctr"/>
-          </a:p>
-        </p:txBody>
-      </p:sp>
-      <p:sp>
-        <p:nvSpPr>
-          <p:cNvPr id="9" name="Rectangle 8"/>
-          <p:cNvSpPr/>
-          <p:nvPr/>
-        </p:nvSpPr>
-        <p:spPr>
-          <a:xfrm>
-            <a:off x="502920" y="1417320"/>
-            <a:ext cx="109728" cy="987552"/>
-          </a:xfrm>
-          <a:prstGeom prst="rect">
-            <a:avLst/>
-          </a:prstGeom>
-          <a:solidFill>
-            <a:srgbClr val="C0392B"/>
-          </a:solidFill>
-          <a:ln>
-            <a:noFill/>
-          </a:ln>
-          <a:effectLst/>
-        </p:spPr>
-        <p:style>
-          <a:lnRef idx="1">
-            <a:schemeClr val="accent1"/>
-          </a:lnRef>
-          <a:fillRef idx="3">
-            <a:schemeClr val="accent1"/>
-          </a:fillRef>
-          <a:effectRef idx="2">
-            <a:schemeClr val="accent1"/>
-          </a:effectRef>
-          <a:fontRef idx="minor">
-            <a:schemeClr val="lt1"/>
-          </a:fontRef>
-        </p:style>
-        <p:txBody>
-          <a:bodyPr rtlCol="0" anchor="ctr"/>
-          <a:lstStyle/>
-          <a:p>
-            <a:pPr algn="ctr"/>
-          </a:p>
-        </p:txBody>
-      </p:sp>
-      <p:sp>
-        <p:nvSpPr>
-          <p:cNvPr id="10" name="TextBox 9"/>
-          <p:cNvSpPr txBox="1"/>
-          <p:nvPr/>
-        </p:nvSpPr>
-        <p:spPr>
-          <a:xfrm>
-            <a:off x="822960" y="1490472"/>
-            <a:ext cx="10607040" cy="347472"/>
-          </a:xfrm>
-          <a:prstGeom prst="rect">
-            <a:avLst/>
-          </a:prstGeom>
-          <a:noFill/>
-        </p:spPr>
-        <p:txBody>
-          <a:bodyPr wrap="square">
-            <a:spAutoFit/>
-          </a:bodyPr>
-          <a:lstStyle/>
-          <a:p>
-            <a:pPr algn="l">
-              <a:lnSpc>
-                <a:spcPct val="100000"/>
-              </a:lnSpc>
-            </a:pPr>
-            <a:r>
-              <a:rPr sz="1300" b="1" i="0">
-                <a:solidFill>
-                  <a:srgbClr val="23262B"/>
-                </a:solidFill>
-                <a:latin typeface="맑은 고딕"/>
-              </a:rPr>
-              <a:t>비밀번호 칸이 비어 보여도 저장된 게 맞다</a:t>
-            </a:r>
-          </a:p>
-        </p:txBody>
-      </p:sp>
-      <p:sp>
-        <p:nvSpPr>
-          <p:cNvPr id="11" name="TextBox 10"/>
-          <p:cNvSpPr txBox="1"/>
-          <p:nvPr/>
-        </p:nvSpPr>
-        <p:spPr>
-          <a:xfrm>
-            <a:off x="822960" y="1856232"/>
-            <a:ext cx="10607040" cy="502920"/>
-          </a:xfrm>
-          <a:prstGeom prst="rect">
-            <a:avLst/>
-          </a:prstGeom>
-          <a:noFill/>
-        </p:spPr>
-        <p:txBody>
-          <a:bodyPr wrap="square">
-            <a:spAutoFit/>
-          </a:bodyPr>
-          <a:lstStyle/>
-          <a:p>
-            <a:pPr algn="l">
-              <a:lnSpc>
-                <a:spcPct val="125000"/>
-              </a:lnSpc>
-            </a:pPr>
-            <a:r>
-              <a:rPr sz="1150" b="0" i="0">
-                <a:solidFill>
-                  <a:srgbClr val="7A828E"/>
-                </a:solidFill>
-                <a:latin typeface="맑은 고딕"/>
-              </a:rPr>
-              <a:t>보안상 키는 절대 다시 보여주지 않습니다. '✅ 등록됨 ****뒷4자리 · 저장 시각' 배지로 확인하세요.</a:t>
-            </a:r>
-          </a:p>
-        </p:txBody>
-      </p:sp>
-      <p:sp>
-        <p:nvSpPr>
-          <p:cNvPr id="12" name="Rectangle 11"/>
-          <p:cNvSpPr/>
-          <p:nvPr/>
-        </p:nvSpPr>
-        <p:spPr>
-          <a:xfrm>
-            <a:off x="502920" y="2496312"/>
-            <a:ext cx="11155680" cy="987552"/>
-          </a:xfrm>
-          <a:prstGeom prst="rect">
-            <a:avLst/>
-          </a:prstGeom>
-          <a:solidFill>
-            <a:srgbClr val="FFFFFF"/>
-          </a:solidFill>
-          <a:ln>
-            <a:noFill/>
-          </a:ln>
-          <a:effectLst/>
-        </p:spPr>
-        <p:style>
-          <a:lnRef idx="1">
-            <a:schemeClr val="accent1"/>
-          </a:lnRef>
-          <a:fillRef idx="3">
-            <a:schemeClr val="accent1"/>
-          </a:fillRef>
-          <a:effectRef idx="2">
-            <a:schemeClr val="accent1"/>
-          </a:effectRef>
-          <a:fontRef idx="minor">
-            <a:schemeClr val="lt1"/>
-          </a:fontRef>
-        </p:style>
-        <p:txBody>
-          <a:bodyPr rtlCol="0" anchor="ctr"/>
-          <a:lstStyle/>
-          <a:p>
-            <a:pPr algn="ctr"/>
-          </a:p>
-        </p:txBody>
-      </p:sp>
-      <p:sp>
-        <p:nvSpPr>
-          <p:cNvPr id="13" name="Rectangle 12"/>
-          <p:cNvSpPr/>
-          <p:nvPr/>
-        </p:nvSpPr>
-        <p:spPr>
-          <a:xfrm>
-            <a:off x="502920" y="2496312"/>
-            <a:ext cx="109728" cy="987552"/>
-          </a:xfrm>
-          <a:prstGeom prst="rect">
-            <a:avLst/>
-          </a:prstGeom>
-          <a:solidFill>
-            <a:srgbClr val="C0392B"/>
-          </a:solidFill>
-          <a:ln>
-            <a:noFill/>
-          </a:ln>
-          <a:effectLst/>
-        </p:spPr>
-        <p:style>
-          <a:lnRef idx="1">
-            <a:schemeClr val="accent1"/>
-          </a:lnRef>
-          <a:fillRef idx="3">
-            <a:schemeClr val="accent1"/>
-          </a:fillRef>
-          <a:effectRef idx="2">
-            <a:schemeClr val="accent1"/>
-          </a:effectRef>
-          <a:fontRef idx="minor">
-            <a:schemeClr val="lt1"/>
-          </a:fontRef>
-        </p:style>
-        <p:txBody>
-          <a:bodyPr rtlCol="0" anchor="ctr"/>
-          <a:lstStyle/>
-          <a:p>
-            <a:pPr algn="ctr"/>
-          </a:p>
-        </p:txBody>
-      </p:sp>
-      <p:sp>
-        <p:nvSpPr>
-          <p:cNvPr id="14" name="TextBox 13"/>
-          <p:cNvSpPr txBox="1"/>
-          <p:nvPr/>
-        </p:nvSpPr>
-        <p:spPr>
-          <a:xfrm>
-            <a:off x="822960" y="2569464"/>
-            <a:ext cx="10607040" cy="347472"/>
-          </a:xfrm>
-          <a:prstGeom prst="rect">
-            <a:avLst/>
-          </a:prstGeom>
-          <a:noFill/>
-        </p:spPr>
-        <p:txBody>
-          <a:bodyPr wrap="square">
-            <a:spAutoFit/>
-          </a:bodyPr>
-          <a:lstStyle/>
-          <a:p>
-            <a:pPr algn="l">
-              <a:lnSpc>
-                <a:spcPct val="100000"/>
-              </a:lnSpc>
-            </a:pPr>
-            <a:r>
-              <a:rPr sz="1300" b="1" i="0">
-                <a:solidFill>
-                  <a:srgbClr val="23262B"/>
-                </a:solidFill>
-                <a:latin typeface="맑은 고딕"/>
-              </a:rPr>
-              <a:t>키 없이 눌렀을 때 증상 3종</a:t>
-            </a:r>
-          </a:p>
-        </p:txBody>
-      </p:sp>
-      <p:sp>
-        <p:nvSpPr>
-          <p:cNvPr id="15" name="TextBox 14"/>
-          <p:cNvSpPr txBox="1"/>
-          <p:nvPr/>
-        </p:nvSpPr>
-        <p:spPr>
-          <a:xfrm>
-            <a:off x="822960" y="2935224"/>
-            <a:ext cx="10607040" cy="502920"/>
-          </a:xfrm>
-          <a:prstGeom prst="rect">
-            <a:avLst/>
-          </a:prstGeom>
-          <a:noFill/>
-        </p:spPr>
-        <p:txBody>
-          <a:bodyPr wrap="square">
-            <a:spAutoFit/>
-          </a:bodyPr>
-          <a:lstStyle/>
-          <a:p>
-            <a:pPr algn="l">
-              <a:lnSpc>
-                <a:spcPct val="125000"/>
-              </a:lnSpc>
-            </a:pPr>
-            <a:r>
-              <a:rPr sz="1150" b="0" i="0">
-                <a:solidFill>
-                  <a:srgbClr val="7A828E"/>
-                </a:solidFill>
-                <a:latin typeface="맑은 고딕"/>
-              </a:rPr>
-              <a:t>'기본 생성 모델이 지정되지 않았습니다'(🪄 추천) · [1~4단계]·[숫자만 새로 재기] 버튼 잠김 · 경쟁도 만료 경고 — 모두 키 등록으로 해결.</a:t>
-            </a:r>
-          </a:p>
-        </p:txBody>
-      </p:sp>
-      <p:sp>
-        <p:nvSpPr>
-          <p:cNvPr id="16" name="Rectangle 15"/>
-          <p:cNvSpPr/>
-          <p:nvPr/>
-        </p:nvSpPr>
-        <p:spPr>
-          <a:xfrm>
-            <a:off x="502920" y="3575304"/>
-            <a:ext cx="11155680" cy="987552"/>
-          </a:xfrm>
-          <a:prstGeom prst="rect">
-            <a:avLst/>
-          </a:prstGeom>
-          <a:solidFill>
-            <a:srgbClr val="FFFFFF"/>
-          </a:solidFill>
-          <a:ln>
-            <a:noFill/>
-          </a:ln>
-          <a:effectLst/>
-        </p:spPr>
-        <p:style>
-          <a:lnRef idx="1">
-            <a:schemeClr val="accent1"/>
-          </a:lnRef>
-          <a:fillRef idx="3">
-            <a:schemeClr val="accent1"/>
-          </a:fillRef>
-          <a:effectRef idx="2">
-            <a:schemeClr val="accent1"/>
-          </a:effectRef>
-          <a:fontRef idx="minor">
-            <a:schemeClr val="lt1"/>
-          </a:fontRef>
-        </p:style>
-        <p:txBody>
-          <a:bodyPr rtlCol="0" anchor="ctr"/>
-          <a:lstStyle/>
-          <a:p>
-            <a:pPr algn="ctr"/>
-          </a:p>
-        </p:txBody>
-      </p:sp>
-      <p:sp>
-        <p:nvSpPr>
-          <p:cNvPr id="17" name="Rectangle 16"/>
-          <p:cNvSpPr/>
-          <p:nvPr/>
-        </p:nvSpPr>
-        <p:spPr>
-          <a:xfrm>
-            <a:off x="502920" y="3575304"/>
-            <a:ext cx="109728" cy="987552"/>
-          </a:xfrm>
-          <a:prstGeom prst="rect">
-            <a:avLst/>
-          </a:prstGeom>
-          <a:solidFill>
-            <a:srgbClr val="C0392B"/>
-          </a:solidFill>
-          <a:ln>
-            <a:noFill/>
-          </a:ln>
-          <a:effectLst/>
-        </p:spPr>
-        <p:style>
-          <a:lnRef idx="1">
-            <a:schemeClr val="accent1"/>
-          </a:lnRef>
-          <a:fillRef idx="3">
-            <a:schemeClr val="accent1"/>
-          </a:fillRef>
-          <a:effectRef idx="2">
-            <a:schemeClr val="accent1"/>
-          </a:effectRef>
-          <a:fontRef idx="minor">
-            <a:schemeClr val="lt1"/>
-          </a:fontRef>
-        </p:style>
-        <p:txBody>
-          <a:bodyPr rtlCol="0" anchor="ctr"/>
-          <a:lstStyle/>
-          <a:p>
-            <a:pPr algn="ctr"/>
-          </a:p>
-        </p:txBody>
-      </p:sp>
-      <p:sp>
-        <p:nvSpPr>
-          <p:cNvPr id="18" name="TextBox 17"/>
-          <p:cNvSpPr txBox="1"/>
-          <p:nvPr/>
-        </p:nvSpPr>
-        <p:spPr>
-          <a:xfrm>
-            <a:off x="822960" y="3648456"/>
-            <a:ext cx="10607040" cy="347472"/>
-          </a:xfrm>
-          <a:prstGeom prst="rect">
-            <a:avLst/>
-          </a:prstGeom>
-          <a:noFill/>
-        </p:spPr>
-        <p:txBody>
-          <a:bodyPr wrap="square">
-            <a:spAutoFit/>
-          </a:bodyPr>
-          <a:lstStyle/>
-          <a:p>
-            <a:pPr algn="l">
-              <a:lnSpc>
-                <a:spcPct val="100000"/>
-              </a:lnSpc>
-            </a:pPr>
-            <a:r>
-              <a:rPr sz="1300" b="1" i="0">
-                <a:solidFill>
-                  <a:srgbClr val="23262B"/>
-                </a:solidFill>
-                <a:latin typeface="맑은 고딕"/>
-              </a:rPr>
-              <a:t>만료는 조용히 일어난다</a:t>
-            </a:r>
-          </a:p>
-        </p:txBody>
-      </p:sp>
-      <p:sp>
-        <p:nvSpPr>
-          <p:cNvPr id="19" name="TextBox 18"/>
-          <p:cNvSpPr txBox="1"/>
-          <p:nvPr/>
-        </p:nvSpPr>
-        <p:spPr>
-          <a:xfrm>
-            <a:off x="822960" y="4014216"/>
-            <a:ext cx="10607040" cy="502920"/>
-          </a:xfrm>
-          <a:prstGeom prst="rect">
-            <a:avLst/>
-          </a:prstGeom>
-          <a:noFill/>
-        </p:spPr>
-        <p:txBody>
-          <a:bodyPr wrap="square">
-            <a:spAutoFit/>
-          </a:bodyPr>
-          <a:lstStyle/>
-          <a:p>
-            <a:pPr algn="l">
-              <a:lnSpc>
-                <a:spcPct val="125000"/>
-              </a:lnSpc>
-            </a:pPr>
-            <a:r>
-              <a:rPr sz="1150" b="0" i="0">
-                <a:solidFill>
-                  <a:srgbClr val="7A828E"/>
-                </a:solidFill>
-                <a:latin typeface="맑은 고딕"/>
-              </a:rPr>
-              <a:t>에러 없이 전환 가중치만 꺼집니다. '경쟁도 측정 만료' 문구가 보이면 [숫자만 새로 재기].</a:t>
-            </a:r>
-          </a:p>
-        </p:txBody>
-      </p:sp>
-      <p:sp>
-        <p:nvSpPr>
-          <p:cNvPr id="20" name="Rectangle 19"/>
-          <p:cNvSpPr/>
-          <p:nvPr/>
-        </p:nvSpPr>
-        <p:spPr>
-          <a:xfrm>
-            <a:off x="502920" y="4654296"/>
-            <a:ext cx="11155680" cy="987552"/>
-          </a:xfrm>
-          <a:prstGeom prst="rect">
-            <a:avLst/>
-          </a:prstGeom>
-          <a:solidFill>
-            <a:srgbClr val="FFFFFF"/>
-          </a:solidFill>
-          <a:ln>
-            <a:noFill/>
-          </a:ln>
-          <a:effectLst/>
-        </p:spPr>
-        <p:style>
-          <a:lnRef idx="1">
-            <a:schemeClr val="accent1"/>
-          </a:lnRef>
-          <a:fillRef idx="3">
-            <a:schemeClr val="accent1"/>
-          </a:fillRef>
-          <a:effectRef idx="2">
-            <a:schemeClr val="accent1"/>
-          </a:effectRef>
-          <a:fontRef idx="minor">
-            <a:schemeClr val="lt1"/>
-          </a:fontRef>
-        </p:style>
-        <p:txBody>
-          <a:bodyPr rtlCol="0" anchor="ctr"/>
-          <a:lstStyle/>
-          <a:p>
-            <a:pPr algn="ctr"/>
-          </a:p>
-        </p:txBody>
-      </p:sp>
-      <p:sp>
-        <p:nvSpPr>
-          <p:cNvPr id="21" name="Rectangle 20"/>
-          <p:cNvSpPr/>
-          <p:nvPr/>
-        </p:nvSpPr>
-        <p:spPr>
-          <a:xfrm>
-            <a:off x="502920" y="4654296"/>
-            <a:ext cx="109728" cy="987552"/>
-          </a:xfrm>
-          <a:prstGeom prst="rect">
-            <a:avLst/>
-          </a:prstGeom>
-          <a:solidFill>
-            <a:srgbClr val="C0392B"/>
-          </a:solidFill>
-          <a:ln>
-            <a:noFill/>
-          </a:ln>
-          <a:effectLst/>
-        </p:spPr>
-        <p:style>
-          <a:lnRef idx="1">
-            <a:schemeClr val="accent1"/>
-          </a:lnRef>
-          <a:fillRef idx="3">
-            <a:schemeClr val="accent1"/>
-          </a:fillRef>
-          <a:effectRef idx="2">
-            <a:schemeClr val="accent1"/>
-          </a:effectRef>
-          <a:fontRef idx="minor">
-            <a:schemeClr val="lt1"/>
-          </a:fontRef>
-        </p:style>
-        <p:txBody>
-          <a:bodyPr rtlCol="0" anchor="ctr"/>
-          <a:lstStyle/>
-          <a:p>
-            <a:pPr algn="ctr"/>
-          </a:p>
-        </p:txBody>
-      </p:sp>
-      <p:sp>
-        <p:nvSpPr>
-          <p:cNvPr id="22" name="TextBox 21"/>
-          <p:cNvSpPr txBox="1"/>
-          <p:nvPr/>
-        </p:nvSpPr>
-        <p:spPr>
-          <a:xfrm>
-            <a:off x="822960" y="4727448"/>
-            <a:ext cx="10607040" cy="347472"/>
-          </a:xfrm>
-          <a:prstGeom prst="rect">
-            <a:avLst/>
-          </a:prstGeom>
-          <a:noFill/>
-        </p:spPr>
-        <p:txBody>
-          <a:bodyPr wrap="square">
-            <a:spAutoFit/>
-          </a:bodyPr>
-          <a:lstStyle/>
-          <a:p>
-            <a:pPr algn="l">
-              <a:lnSpc>
-                <a:spcPct val="100000"/>
-              </a:lnSpc>
-            </a:pPr>
-            <a:r>
-              <a:rPr sz="1300" b="1" i="0">
-                <a:solidFill>
-                  <a:srgbClr val="23262B"/>
-                </a:solidFill>
-                <a:latin typeface="맑은 고딕"/>
-              </a:rPr>
-              <a:t>[발행]은 사람이 직접</a:t>
-            </a:r>
-          </a:p>
-        </p:txBody>
-      </p:sp>
-      <p:sp>
-        <p:nvSpPr>
-          <p:cNvPr id="23" name="TextBox 22"/>
-          <p:cNvSpPr txBox="1"/>
-          <p:nvPr/>
-        </p:nvSpPr>
-        <p:spPr>
-          <a:xfrm>
-            <a:off x="822960" y="5093208"/>
-            <a:ext cx="10607040" cy="502920"/>
-          </a:xfrm>
-          <a:prstGeom prst="rect">
-            <a:avLst/>
-          </a:prstGeom>
-          <a:noFill/>
-        </p:spPr>
-        <p:txBody>
-          <a:bodyPr wrap="square">
-            <a:spAutoFit/>
-          </a:bodyPr>
-          <a:lstStyle/>
-          <a:p>
-            <a:pPr algn="l">
-              <a:lnSpc>
-                <a:spcPct val="125000"/>
-              </a:lnSpc>
-            </a:pPr>
-            <a:r>
-              <a:rPr sz="1150" b="0" i="0">
-                <a:solidFill>
-                  <a:srgbClr val="7A828E"/>
-                </a:solidFill>
-                <a:latin typeface="맑은 고딕"/>
-              </a:rPr>
-              <a:t>자동으로 발행까지 가지 않는 것은 고장이 아니라 네이버 차단 회피 설계입니다.</a:t>
-            </a:r>
-          </a:p>
-        </p:txBody>
-      </p:sp>
-      <p:sp>
-        <p:nvSpPr>
-          <p:cNvPr id="24" name="Rectangle 23"/>
-          <p:cNvSpPr/>
-          <p:nvPr/>
-        </p:nvSpPr>
-        <p:spPr>
-          <a:xfrm>
-            <a:off x="502920" y="5733288"/>
-            <a:ext cx="11155680" cy="987552"/>
-          </a:xfrm>
-          <a:prstGeom prst="rect">
-            <a:avLst/>
-          </a:prstGeom>
-          <a:solidFill>
-            <a:srgbClr val="FFFFFF"/>
-          </a:solidFill>
-          <a:ln>
-            <a:noFill/>
-          </a:ln>
-          <a:effectLst/>
-        </p:spPr>
-        <p:style>
-          <a:lnRef idx="1">
-            <a:schemeClr val="accent1"/>
-          </a:lnRef>
-          <a:fillRef idx="3">
-            <a:schemeClr val="accent1"/>
-          </a:fillRef>
-          <a:effectRef idx="2">
-            <a:schemeClr val="accent1"/>
-          </a:effectRef>
-          <a:fontRef idx="minor">
-            <a:schemeClr val="lt1"/>
-          </a:fontRef>
-        </p:style>
-        <p:txBody>
-          <a:bodyPr rtlCol="0" anchor="ctr"/>
-          <a:lstStyle/>
-          <a:p>
-            <a:pPr algn="ctr"/>
-          </a:p>
-        </p:txBody>
-      </p:sp>
-      <p:sp>
-        <p:nvSpPr>
-          <p:cNvPr id="25" name="Rectangle 24"/>
-          <p:cNvSpPr/>
-          <p:nvPr/>
-        </p:nvSpPr>
-        <p:spPr>
-          <a:xfrm>
-            <a:off x="502920" y="5733288"/>
-            <a:ext cx="109728" cy="987552"/>
-          </a:xfrm>
-          <a:prstGeom prst="rect">
-            <a:avLst/>
-          </a:prstGeom>
-          <a:solidFill>
-            <a:srgbClr val="C0392B"/>
-          </a:solidFill>
-          <a:ln>
-            <a:noFill/>
-          </a:ln>
-          <a:effectLst/>
-        </p:spPr>
-        <p:style>
-          <a:lnRef idx="1">
-            <a:schemeClr val="accent1"/>
-          </a:lnRef>
-          <a:fillRef idx="3">
-            <a:schemeClr val="accent1"/>
-          </a:fillRef>
-          <a:effectRef idx="2">
-            <a:schemeClr val="accent1"/>
-          </a:effectRef>
-          <a:fontRef idx="minor">
-            <a:schemeClr val="lt1"/>
-          </a:fontRef>
-        </p:style>
-        <p:txBody>
-          <a:bodyPr rtlCol="0" anchor="ctr"/>
-          <a:lstStyle/>
-          <a:p>
-            <a:pPr algn="ctr"/>
-          </a:p>
-        </p:txBody>
-      </p:sp>
-      <p:sp>
-        <p:nvSpPr>
-          <p:cNvPr id="26" name="TextBox 25"/>
-          <p:cNvSpPr txBox="1"/>
-          <p:nvPr/>
-        </p:nvSpPr>
-        <p:spPr>
-          <a:xfrm>
-            <a:off x="822960" y="5806440"/>
-            <a:ext cx="10607040" cy="347472"/>
-          </a:xfrm>
-          <a:prstGeom prst="rect">
-            <a:avLst/>
-          </a:prstGeom>
-          <a:noFill/>
-        </p:spPr>
-        <p:txBody>
-          <a:bodyPr wrap="square">
-            <a:spAutoFit/>
-          </a:bodyPr>
-          <a:lstStyle/>
-          <a:p>
-            <a:pPr algn="l">
-              <a:lnSpc>
-                <a:spcPct val="100000"/>
-              </a:lnSpc>
-            </a:pPr>
-            <a:r>
-              <a:rPr sz="1300" b="1" i="0">
-                <a:solidFill>
-                  <a:srgbClr val="23262B"/>
-                </a:solidFill>
-                <a:latin typeface="맑은 고딕"/>
-              </a:rPr>
-              <a:t>%APPDATA%\OSMU_CJC 폴더를 함부로 지우지 말기</a:t>
-            </a:r>
-          </a:p>
-        </p:txBody>
-      </p:sp>
-      <p:sp>
-        <p:nvSpPr>
-          <p:cNvPr id="27" name="TextBox 26"/>
-          <p:cNvSpPr txBox="1"/>
-          <p:nvPr/>
-        </p:nvSpPr>
-        <p:spPr>
-          <a:xfrm>
-            <a:off x="822960" y="6172200"/>
-            <a:ext cx="10607040" cy="502920"/>
-          </a:xfrm>
-          <a:prstGeom prst="rect">
-            <a:avLst/>
-          </a:prstGeom>
-          <a:noFill/>
-        </p:spPr>
-        <p:txBody>
-          <a:bodyPr wrap="square">
-            <a:spAutoFit/>
-          </a:bodyPr>
-          <a:lstStyle/>
-          <a:p>
-            <a:pPr algn="l">
-              <a:lnSpc>
-                <a:spcPct val="125000"/>
-              </a:lnSpc>
-            </a:pPr>
-            <a:r>
-              <a:rPr sz="1150" b="0" i="0">
-                <a:solidFill>
-                  <a:srgbClr val="7A828E"/>
-                </a:solidFill>
-                <a:latin typeface="맑은 고딕"/>
-              </a:rPr>
-              <a:t>DB·사진·마스터키가 전부 안에 있습니다(앱을 제거해도 남는 이유). 브랜드 킷을 처음부터 다시 채울 때만 삭제 후 재시작하세요.</a:t>
-            </a:r>
-          </a:p>
-        </p:txBody>
-      </p:sp>
-    </p:spTree>
-  </p:cSld>
-  <p:clrMapOvr>
-    <a:masterClrMapping/>
-  </p:clrMapOvr>
-</p:sld>
-</file>
-
 <file path=ppt/slides/slide29.xml><?xml version="1.0" encoding="utf-8"?>
 <p:sld xmlns:a="http://schemas.openxmlformats.org/drawingml/2006/main" xmlns:p="http://schemas.openxmlformats.org/presentationml/2006/main" xmlns:r="http://schemas.openxmlformats.org/officeDocument/2006/relationships">
   <p:cSld>
@@ -19706,7 +19575,7 @@
                 </a:solidFill>
                 <a:latin typeface="맑은 고딕"/>
               </a:rPr>
-              <a:t>④ 안전 · FAQ</a:t>
+              <a:t>④ 안전 · 주의사항</a:t>
             </a:r>
           </a:p>
         </p:txBody>
@@ -19745,7 +19614,7 @@
                 </a:solidFill>
                 <a:latin typeface="맑은 고딕"/>
               </a:rPr>
-              <a:t>자주 묻는 질문</a:t>
+              <a:t>함정 모음 — 먼저 알면 안 헷갈립니다</a:t>
             </a:r>
           </a:p>
         </p:txBody>
@@ -19874,14 +19743,58 @@
       </p:sp>
       <p:sp>
         <p:nvSpPr>
-          <p:cNvPr id="9" name="TextBox 8"/>
-          <p:cNvSpPr txBox="1"/>
-          <p:nvPr/>
-        </p:nvSpPr>
-        <p:spPr>
-          <a:xfrm>
-            <a:off x="731520" y="1490472"/>
-            <a:ext cx="10607040" cy="365760"/>
+          <p:cNvPr id="9" name="Rectangle 8"/>
+          <p:cNvSpPr/>
+          <p:nvPr/>
+        </p:nvSpPr>
+        <p:spPr>
+          <a:xfrm>
+            <a:off x="502920" y="1417320"/>
+            <a:ext cx="109728" cy="987552"/>
+          </a:xfrm>
+          <a:prstGeom prst="rect">
+            <a:avLst/>
+          </a:prstGeom>
+          <a:solidFill>
+            <a:srgbClr val="C0392B"/>
+          </a:solidFill>
+          <a:ln>
+            <a:noFill/>
+          </a:ln>
+          <a:effectLst/>
+        </p:spPr>
+        <p:style>
+          <a:lnRef idx="1">
+            <a:schemeClr val="accent1"/>
+          </a:lnRef>
+          <a:fillRef idx="3">
+            <a:schemeClr val="accent1"/>
+          </a:fillRef>
+          <a:effectRef idx="2">
+            <a:schemeClr val="accent1"/>
+          </a:effectRef>
+          <a:fontRef idx="minor">
+            <a:schemeClr val="lt1"/>
+          </a:fontRef>
+        </p:style>
+        <p:txBody>
+          <a:bodyPr rtlCol="0" anchor="ctr"/>
+          <a:lstStyle/>
+          <a:p>
+            <a:pPr algn="ctr"/>
+          </a:p>
+        </p:txBody>
+      </p:sp>
+      <p:sp>
+        <p:nvSpPr>
+          <p:cNvPr id="10" name="TextBox 9"/>
+          <p:cNvSpPr txBox="1"/>
+          <p:nvPr/>
+        </p:nvSpPr>
+        <p:spPr>
+          <a:xfrm>
+            <a:off x="822960" y="1490472"/>
+            <a:ext cx="10607040" cy="347472"/>
           </a:xfrm>
           <a:prstGeom prst="rect">
             <a:avLst/>
@@ -19900,27 +19813,27 @@
               </a:lnSpc>
             </a:pPr>
             <a:r>
-              <a:rPr sz="1250" b="1" i="0">
-                <a:solidFill>
-                  <a:srgbClr val="122A44"/>
-                </a:solidFill>
-                <a:latin typeface="맑은 고딕"/>
-              </a:rPr>
-              <a:t>Q. [🪄 브랜드에서 추천]이 실패해요</a:t>
-            </a:r>
-          </a:p>
-        </p:txBody>
-      </p:sp>
-      <p:sp>
-        <p:nvSpPr>
-          <p:cNvPr id="10" name="TextBox 9"/>
-          <p:cNvSpPr txBox="1"/>
-          <p:nvPr/>
-        </p:nvSpPr>
-        <p:spPr>
-          <a:xfrm>
-            <a:off x="731520" y="1874520"/>
-            <a:ext cx="10607040" cy="457200"/>
+              <a:rPr sz="1300" b="1" i="0">
+                <a:solidFill>
+                  <a:srgbClr val="23262B"/>
+                </a:solidFill>
+                <a:latin typeface="맑은 고딕"/>
+              </a:rPr>
+              <a:t>비밀번호 칸이 비어 보여도 저장된 게 맞다</a:t>
+            </a:r>
+          </a:p>
+        </p:txBody>
+      </p:sp>
+      <p:sp>
+        <p:nvSpPr>
+          <p:cNvPr id="11" name="TextBox 10"/>
+          <p:cNvSpPr txBox="1"/>
+          <p:nvPr/>
+        </p:nvSpPr>
+        <p:spPr>
+          <a:xfrm>
+            <a:off x="822960" y="1856232"/>
+            <a:ext cx="10607040" cy="502920"/>
           </a:xfrm>
           <a:prstGeom prst="rect">
             <a:avLst/>
@@ -19935,30 +19848,30 @@
           <a:p>
             <a:pPr algn="l">
               <a:lnSpc>
-                <a:spcPct val="120000"/>
-              </a:lnSpc>
-            </a:pPr>
-            <a:r>
-              <a:rPr sz="1100" b="0" i="0">
-                <a:solidFill>
-                  <a:srgbClr val="23262B"/>
-                </a:solidFill>
-                <a:latin typeface="맑은 고딕"/>
-              </a:rPr>
-              <a:t>A. '추천 실패: ...' 뒤의 메시지가 원인입니다. 대부분 LLM 미등록 → LLM 탭에서 키 등록 후 기본 모델 확인.</a:t>
-            </a:r>
-          </a:p>
-        </p:txBody>
-      </p:sp>
-      <p:sp>
-        <p:nvSpPr>
-          <p:cNvPr id="11" name="Rectangle 10"/>
+                <a:spcPct val="125000"/>
+              </a:lnSpc>
+            </a:pPr>
+            <a:r>
+              <a:rPr sz="1150" b="0" i="0">
+                <a:solidFill>
+                  <a:srgbClr val="7A828E"/>
+                </a:solidFill>
+                <a:latin typeface="맑은 고딕"/>
+              </a:rPr>
+              <a:t>보안상 키는 절대 다시 보여주지 않습니다. '✅ 등록됨 ****뒷4자리 · 저장 시각' 배지로 확인하세요.</a:t>
+            </a:r>
+          </a:p>
+        </p:txBody>
+      </p:sp>
+      <p:sp>
+        <p:nvSpPr>
+          <p:cNvPr id="12" name="Rectangle 11"/>
           <p:cNvSpPr/>
           <p:nvPr/>
         </p:nvSpPr>
         <p:spPr>
           <a:xfrm>
-            <a:off x="502920" y="2478024"/>
+            <a:off x="502920" y="2496312"/>
             <a:ext cx="11155680" cy="987552"/>
           </a:xfrm>
           <a:prstGeom prst="rect">
@@ -19996,14 +19909,58 @@
       </p:sp>
       <p:sp>
         <p:nvSpPr>
-          <p:cNvPr id="12" name="TextBox 11"/>
-          <p:cNvSpPr txBox="1"/>
-          <p:nvPr/>
-        </p:nvSpPr>
-        <p:spPr>
-          <a:xfrm>
-            <a:off x="731520" y="2551176"/>
-            <a:ext cx="10607040" cy="365760"/>
+          <p:cNvPr id="13" name="Rectangle 12"/>
+          <p:cNvSpPr/>
+          <p:nvPr/>
+        </p:nvSpPr>
+        <p:spPr>
+          <a:xfrm>
+            <a:off x="502920" y="2496312"/>
+            <a:ext cx="109728" cy="987552"/>
+          </a:xfrm>
+          <a:prstGeom prst="rect">
+            <a:avLst/>
+          </a:prstGeom>
+          <a:solidFill>
+            <a:srgbClr val="C0392B"/>
+          </a:solidFill>
+          <a:ln>
+            <a:noFill/>
+          </a:ln>
+          <a:effectLst/>
+        </p:spPr>
+        <p:style>
+          <a:lnRef idx="1">
+            <a:schemeClr val="accent1"/>
+          </a:lnRef>
+          <a:fillRef idx="3">
+            <a:schemeClr val="accent1"/>
+          </a:fillRef>
+          <a:effectRef idx="2">
+            <a:schemeClr val="accent1"/>
+          </a:effectRef>
+          <a:fontRef idx="minor">
+            <a:schemeClr val="lt1"/>
+          </a:fontRef>
+        </p:style>
+        <p:txBody>
+          <a:bodyPr rtlCol="0" anchor="ctr"/>
+          <a:lstStyle/>
+          <a:p>
+            <a:pPr algn="ctr"/>
+          </a:p>
+        </p:txBody>
+      </p:sp>
+      <p:sp>
+        <p:nvSpPr>
+          <p:cNvPr id="14" name="TextBox 13"/>
+          <p:cNvSpPr txBox="1"/>
+          <p:nvPr/>
+        </p:nvSpPr>
+        <p:spPr>
+          <a:xfrm>
+            <a:off x="822960" y="2569464"/>
+            <a:ext cx="10607040" cy="347472"/>
           </a:xfrm>
           <a:prstGeom prst="rect">
             <a:avLst/>
@@ -20022,27 +19979,27 @@
               </a:lnSpc>
             </a:pPr>
             <a:r>
-              <a:rPr sz="1250" b="1" i="0">
-                <a:solidFill>
-                  <a:srgbClr val="122A44"/>
-                </a:solidFill>
-                <a:latin typeface="맑은 고딕"/>
-              </a:rPr>
-              <a:t>Q. 키를 저장했는데 칸이 비어 있어요</a:t>
-            </a:r>
-          </a:p>
-        </p:txBody>
-      </p:sp>
-      <p:sp>
-        <p:nvSpPr>
-          <p:cNvPr id="13" name="TextBox 12"/>
-          <p:cNvSpPr txBox="1"/>
-          <p:nvPr/>
-        </p:nvSpPr>
-        <p:spPr>
-          <a:xfrm>
-            <a:off x="731520" y="2935224"/>
-            <a:ext cx="10607040" cy="457200"/>
+              <a:rPr sz="1300" b="1" i="0">
+                <a:solidFill>
+                  <a:srgbClr val="23262B"/>
+                </a:solidFill>
+                <a:latin typeface="맑은 고딕"/>
+              </a:rPr>
+              <a:t>키 없이 눌렀을 때 증상 3종</a:t>
+            </a:r>
+          </a:p>
+        </p:txBody>
+      </p:sp>
+      <p:sp>
+        <p:nvSpPr>
+          <p:cNvPr id="15" name="TextBox 14"/>
+          <p:cNvSpPr txBox="1"/>
+          <p:nvPr/>
+        </p:nvSpPr>
+        <p:spPr>
+          <a:xfrm>
+            <a:off x="822960" y="2935224"/>
+            <a:ext cx="10607040" cy="502920"/>
           </a:xfrm>
           <a:prstGeom prst="rect">
             <a:avLst/>
@@ -20057,30 +20014,30 @@
           <a:p>
             <a:pPr algn="l">
               <a:lnSpc>
-                <a:spcPct val="120000"/>
-              </a:lnSpc>
-            </a:pPr>
-            <a:r>
-              <a:rPr sz="1100" b="0" i="0">
-                <a:solidFill>
-                  <a:srgbClr val="23262B"/>
-                </a:solidFill>
-                <a:latin typeface="맑은 고딕"/>
-              </a:rPr>
-              <a:t>A. 정상입니다. 배지(✅ 등록됨 ****...)로 확인하세요. 바꾸려면 새 키 입력 후 다시 [연결 테스트 · 저장].</a:t>
-            </a:r>
-          </a:p>
-        </p:txBody>
-      </p:sp>
-      <p:sp>
-        <p:nvSpPr>
-          <p:cNvPr id="14" name="Rectangle 13"/>
+                <a:spcPct val="125000"/>
+              </a:lnSpc>
+            </a:pPr>
+            <a:r>
+              <a:rPr sz="1150" b="0" i="0">
+                <a:solidFill>
+                  <a:srgbClr val="7A828E"/>
+                </a:solidFill>
+                <a:latin typeface="맑은 고딕"/>
+              </a:rPr>
+              <a:t>'기본 생성 모델이 지정되지 않았습니다'(🪄 추천) · [1~4단계]·[숫자만 새로 재기] 버튼 잠김 · 경쟁도 만료 경고 — 모두 키 등록으로 해결.</a:t>
+            </a:r>
+          </a:p>
+        </p:txBody>
+      </p:sp>
+      <p:sp>
+        <p:nvSpPr>
+          <p:cNvPr id="16" name="Rectangle 15"/>
           <p:cNvSpPr/>
           <p:nvPr/>
         </p:nvSpPr>
         <p:spPr>
           <a:xfrm>
-            <a:off x="502920" y="3538728"/>
+            <a:off x="502920" y="3575304"/>
             <a:ext cx="11155680" cy="987552"/>
           </a:xfrm>
           <a:prstGeom prst="rect">
@@ -20118,91 +20075,135 @@
       </p:sp>
       <p:sp>
         <p:nvSpPr>
-          <p:cNvPr id="15" name="TextBox 14"/>
-          <p:cNvSpPr txBox="1"/>
-          <p:nvPr/>
-        </p:nvSpPr>
-        <p:spPr>
-          <a:xfrm>
-            <a:off x="731520" y="3611880"/>
-            <a:ext cx="10607040" cy="365760"/>
-          </a:xfrm>
-          <a:prstGeom prst="rect">
-            <a:avLst/>
-          </a:prstGeom>
-          <a:noFill/>
-        </p:spPr>
-        <p:txBody>
-          <a:bodyPr wrap="square">
-            <a:spAutoFit/>
-          </a:bodyPr>
-          <a:lstStyle/>
-          <a:p>
-            <a:pPr algn="l">
-              <a:lnSpc>
-                <a:spcPct val="100000"/>
-              </a:lnSpc>
-            </a:pPr>
-            <a:r>
-              <a:rPr sz="1250" b="1" i="0">
-                <a:solidFill>
-                  <a:srgbClr val="122A44"/>
-                </a:solidFill>
-                <a:latin typeface="맑은 고딕"/>
-              </a:rPr>
-              <a:t>Q. 4단계 적용 후에 [숫자만 새로 재기]를 또 눌러야 하나요?</a:t>
-            </a:r>
-          </a:p>
-        </p:txBody>
-      </p:sp>
-      <p:sp>
-        <p:nvSpPr>
-          <p:cNvPr id="16" name="TextBox 15"/>
-          <p:cNvSpPr txBox="1"/>
-          <p:nvPr/>
-        </p:nvSpPr>
-        <p:spPr>
-          <a:xfrm>
-            <a:off x="731520" y="3995928"/>
-            <a:ext cx="10607040" cy="457200"/>
-          </a:xfrm>
-          <a:prstGeom prst="rect">
-            <a:avLst/>
-          </a:prstGeom>
-          <a:noFill/>
-        </p:spPr>
-        <p:txBody>
-          <a:bodyPr wrap="square">
-            <a:spAutoFit/>
-          </a:bodyPr>
-          <a:lstStyle/>
-          <a:p>
-            <a:pPr algn="l">
-              <a:lnSpc>
-                <a:spcPct val="120000"/>
-              </a:lnSpc>
-            </a:pPr>
-            <a:r>
-              <a:rPr sz="1100" b="0" i="0">
-                <a:solidFill>
-                  <a:srgbClr val="23262B"/>
-                </a:solidFill>
-                <a:latin typeface="맑은 고딕"/>
-              </a:rPr>
-              <a:t>A. 아니요. 4단계 [적용]이 곧 SEO 키워드 교체이고, 새 키워드 측정까지 같이 끝냅니다. 숫자 재기는 30일 뒤 만료 경고가 뜰 때만.</a:t>
-            </a:r>
-          </a:p>
-        </p:txBody>
-      </p:sp>
-      <p:sp>
-        <p:nvSpPr>
           <p:cNvPr id="17" name="Rectangle 16"/>
           <p:cNvSpPr/>
           <p:nvPr/>
         </p:nvSpPr>
         <p:spPr>
           <a:xfrm>
-            <a:off x="502920" y="4599432"/>
+            <a:off x="502920" y="3575304"/>
+            <a:ext cx="109728" cy="987552"/>
+          </a:xfrm>
+          <a:prstGeom prst="rect">
+            <a:avLst/>
+          </a:prstGeom>
+          <a:solidFill>
+            <a:srgbClr val="C0392B"/>
+          </a:solidFill>
+          <a:ln>
+            <a:noFill/>
+          </a:ln>
+          <a:effectLst/>
+        </p:spPr>
+        <p:style>
+          <a:lnRef idx="1">
+            <a:schemeClr val="accent1"/>
+          </a:lnRef>
+          <a:fillRef idx="3">
+            <a:schemeClr val="accent1"/>
+          </a:fillRef>
+          <a:effectRef idx="2">
+            <a:schemeClr val="accent1"/>
+          </a:effectRef>
+          <a:fontRef idx="minor">
+            <a:schemeClr val="lt1"/>
+          </a:fontRef>
+        </p:style>
+        <p:txBody>
+          <a:bodyPr rtlCol="0" anchor="ctr"/>
+          <a:lstStyle/>
+          <a:p>
+            <a:pPr algn="ctr"/>
+          </a:p>
+        </p:txBody>
+      </p:sp>
+      <p:sp>
+        <p:nvSpPr>
+          <p:cNvPr id="18" name="TextBox 17"/>
+          <p:cNvSpPr txBox="1"/>
+          <p:nvPr/>
+        </p:nvSpPr>
+        <p:spPr>
+          <a:xfrm>
+            <a:off x="822960" y="3648456"/>
+            <a:ext cx="10607040" cy="347472"/>
+          </a:xfrm>
+          <a:prstGeom prst="rect">
+            <a:avLst/>
+          </a:prstGeom>
+          <a:noFill/>
+        </p:spPr>
+        <p:txBody>
+          <a:bodyPr wrap="square">
+            <a:spAutoFit/>
+          </a:bodyPr>
+          <a:lstStyle/>
+          <a:p>
+            <a:pPr algn="l">
+              <a:lnSpc>
+                <a:spcPct val="100000"/>
+              </a:lnSpc>
+            </a:pPr>
+            <a:r>
+              <a:rPr sz="1300" b="1" i="0">
+                <a:solidFill>
+                  <a:srgbClr val="23262B"/>
+                </a:solidFill>
+                <a:latin typeface="맑은 고딕"/>
+              </a:rPr>
+              <a:t>만료는 조용히 일어난다</a:t>
+            </a:r>
+          </a:p>
+        </p:txBody>
+      </p:sp>
+      <p:sp>
+        <p:nvSpPr>
+          <p:cNvPr id="19" name="TextBox 18"/>
+          <p:cNvSpPr txBox="1"/>
+          <p:nvPr/>
+        </p:nvSpPr>
+        <p:spPr>
+          <a:xfrm>
+            <a:off x="822960" y="4014216"/>
+            <a:ext cx="10607040" cy="502920"/>
+          </a:xfrm>
+          <a:prstGeom prst="rect">
+            <a:avLst/>
+          </a:prstGeom>
+          <a:noFill/>
+        </p:spPr>
+        <p:txBody>
+          <a:bodyPr wrap="square">
+            <a:spAutoFit/>
+          </a:bodyPr>
+          <a:lstStyle/>
+          <a:p>
+            <a:pPr algn="l">
+              <a:lnSpc>
+                <a:spcPct val="125000"/>
+              </a:lnSpc>
+            </a:pPr>
+            <a:r>
+              <a:rPr sz="1150" b="0" i="0">
+                <a:solidFill>
+                  <a:srgbClr val="7A828E"/>
+                </a:solidFill>
+                <a:latin typeface="맑은 고딕"/>
+              </a:rPr>
+              <a:t>에러 없이 전환 가중치만 꺼집니다. '경쟁도 측정 만료' 문구가 보이면 [숫자만 새로 재기].</a:t>
+            </a:r>
+          </a:p>
+        </p:txBody>
+      </p:sp>
+      <p:sp>
+        <p:nvSpPr>
+          <p:cNvPr id="20" name="Rectangle 19"/>
+          <p:cNvSpPr/>
+          <p:nvPr/>
+        </p:nvSpPr>
+        <p:spPr>
+          <a:xfrm>
+            <a:off x="502920" y="4654296"/>
             <a:ext cx="11155680" cy="987552"/>
           </a:xfrm>
           <a:prstGeom prst="rect">
@@ -20240,14 +20241,58 @@
       </p:sp>
       <p:sp>
         <p:nvSpPr>
-          <p:cNvPr id="18" name="TextBox 17"/>
-          <p:cNvSpPr txBox="1"/>
-          <p:nvPr/>
-        </p:nvSpPr>
-        <p:spPr>
-          <a:xfrm>
-            <a:off x="731520" y="4672584"/>
-            <a:ext cx="10607040" cy="365760"/>
+          <p:cNvPr id="21" name="Rectangle 20"/>
+          <p:cNvSpPr/>
+          <p:nvPr/>
+        </p:nvSpPr>
+        <p:spPr>
+          <a:xfrm>
+            <a:off x="502920" y="4654296"/>
+            <a:ext cx="109728" cy="987552"/>
+          </a:xfrm>
+          <a:prstGeom prst="rect">
+            <a:avLst/>
+          </a:prstGeom>
+          <a:solidFill>
+            <a:srgbClr val="C0392B"/>
+          </a:solidFill>
+          <a:ln>
+            <a:noFill/>
+          </a:ln>
+          <a:effectLst/>
+        </p:spPr>
+        <p:style>
+          <a:lnRef idx="1">
+            <a:schemeClr val="accent1"/>
+          </a:lnRef>
+          <a:fillRef idx="3">
+            <a:schemeClr val="accent1"/>
+          </a:fillRef>
+          <a:effectRef idx="2">
+            <a:schemeClr val="accent1"/>
+          </a:effectRef>
+          <a:fontRef idx="minor">
+            <a:schemeClr val="lt1"/>
+          </a:fontRef>
+        </p:style>
+        <p:txBody>
+          <a:bodyPr rtlCol="0" anchor="ctr"/>
+          <a:lstStyle/>
+          <a:p>
+            <a:pPr algn="ctr"/>
+          </a:p>
+        </p:txBody>
+      </p:sp>
+      <p:sp>
+        <p:nvSpPr>
+          <p:cNvPr id="22" name="TextBox 21"/>
+          <p:cNvSpPr txBox="1"/>
+          <p:nvPr/>
+        </p:nvSpPr>
+        <p:spPr>
+          <a:xfrm>
+            <a:off x="822960" y="4727448"/>
+            <a:ext cx="10607040" cy="347472"/>
           </a:xfrm>
           <a:prstGeom prst="rect">
             <a:avLst/>
@@ -20266,27 +20311,27 @@
               </a:lnSpc>
             </a:pPr>
             <a:r>
-              <a:rPr sz="1250" b="1" i="0">
-                <a:solidFill>
-                  <a:srgbClr val="122A44"/>
-                </a:solidFill>
-                <a:latin typeface="맑은 고딕"/>
-              </a:rPr>
-              <a:t>Q. 경쟁도 만료 경고가 떠요</a:t>
-            </a:r>
-          </a:p>
-        </p:txBody>
-      </p:sp>
-      <p:sp>
-        <p:nvSpPr>
-          <p:cNvPr id="19" name="TextBox 18"/>
-          <p:cNvSpPr txBox="1"/>
-          <p:nvPr/>
-        </p:nvSpPr>
-        <p:spPr>
-          <a:xfrm>
-            <a:off x="731520" y="5056632"/>
-            <a:ext cx="10607040" cy="457200"/>
+              <a:rPr sz="1300" b="1" i="0">
+                <a:solidFill>
+                  <a:srgbClr val="23262B"/>
+                </a:solidFill>
+                <a:latin typeface="맑은 고딕"/>
+              </a:rPr>
+              <a:t>[발행]은 사람이 직접</a:t>
+            </a:r>
+          </a:p>
+        </p:txBody>
+      </p:sp>
+      <p:sp>
+        <p:nvSpPr>
+          <p:cNvPr id="23" name="TextBox 22"/>
+          <p:cNvSpPr txBox="1"/>
+          <p:nvPr/>
+        </p:nvSpPr>
+        <p:spPr>
+          <a:xfrm>
+            <a:off x="822960" y="5093208"/>
+            <a:ext cx="10607040" cy="502920"/>
           </a:xfrm>
           <a:prstGeom prst="rect">
             <a:avLst/>
@@ -20301,30 +20346,30 @@
           <a:p>
             <a:pPr algn="l">
               <a:lnSpc>
-                <a:spcPct val="120000"/>
-              </a:lnSpc>
-            </a:pPr>
-            <a:r>
-              <a:rPr sz="1100" b="0" i="0">
-                <a:solidFill>
-                  <a:srgbClr val="23262B"/>
-                </a:solidFill>
-                <a:latin typeface="맑은 고딕"/>
-              </a:rPr>
-              <a:t>A. [🔄 숫자만 새로 재기]를 누르세요. 캐시가 살아있는 값은 재과금되지 않습니다.</a:t>
-            </a:r>
-          </a:p>
-        </p:txBody>
-      </p:sp>
-      <p:sp>
-        <p:nvSpPr>
-          <p:cNvPr id="20" name="Rectangle 19"/>
+                <a:spcPct val="125000"/>
+              </a:lnSpc>
+            </a:pPr>
+            <a:r>
+              <a:rPr sz="1150" b="0" i="0">
+                <a:solidFill>
+                  <a:srgbClr val="7A828E"/>
+                </a:solidFill>
+                <a:latin typeface="맑은 고딕"/>
+              </a:rPr>
+              <a:t>자동으로 발행까지 가지 않는 것은 고장이 아니라 네이버 차단 회피 설계입니다.</a:t>
+            </a:r>
+          </a:p>
+        </p:txBody>
+      </p:sp>
+      <p:sp>
+        <p:nvSpPr>
+          <p:cNvPr id="24" name="Rectangle 23"/>
           <p:cNvSpPr/>
           <p:nvPr/>
         </p:nvSpPr>
         <p:spPr>
           <a:xfrm>
-            <a:off x="502920" y="5660136"/>
+            <a:off x="502920" y="5733288"/>
             <a:ext cx="11155680" cy="987552"/>
           </a:xfrm>
           <a:prstGeom prst="rect">
@@ -20362,14 +20407,58 @@
       </p:sp>
       <p:sp>
         <p:nvSpPr>
-          <p:cNvPr id="21" name="TextBox 20"/>
-          <p:cNvSpPr txBox="1"/>
-          <p:nvPr/>
-        </p:nvSpPr>
-        <p:spPr>
-          <a:xfrm>
-            <a:off x="731520" y="5733288"/>
-            <a:ext cx="10607040" cy="365760"/>
+          <p:cNvPr id="25" name="Rectangle 24"/>
+          <p:cNvSpPr/>
+          <p:nvPr/>
+        </p:nvSpPr>
+        <p:spPr>
+          <a:xfrm>
+            <a:off x="502920" y="5733288"/>
+            <a:ext cx="109728" cy="987552"/>
+          </a:xfrm>
+          <a:prstGeom prst="rect">
+            <a:avLst/>
+          </a:prstGeom>
+          <a:solidFill>
+            <a:srgbClr val="C0392B"/>
+          </a:solidFill>
+          <a:ln>
+            <a:noFill/>
+          </a:ln>
+          <a:effectLst/>
+        </p:spPr>
+        <p:style>
+          <a:lnRef idx="1">
+            <a:schemeClr val="accent1"/>
+          </a:lnRef>
+          <a:fillRef idx="3">
+            <a:schemeClr val="accent1"/>
+          </a:fillRef>
+          <a:effectRef idx="2">
+            <a:schemeClr val="accent1"/>
+          </a:effectRef>
+          <a:fontRef idx="minor">
+            <a:schemeClr val="lt1"/>
+          </a:fontRef>
+        </p:style>
+        <p:txBody>
+          <a:bodyPr rtlCol="0" anchor="ctr"/>
+          <a:lstStyle/>
+          <a:p>
+            <a:pPr algn="ctr"/>
+          </a:p>
+        </p:txBody>
+      </p:sp>
+      <p:sp>
+        <p:nvSpPr>
+          <p:cNvPr id="26" name="TextBox 25"/>
+          <p:cNvSpPr txBox="1"/>
+          <p:nvPr/>
+        </p:nvSpPr>
+        <p:spPr>
+          <a:xfrm>
+            <a:off x="822960" y="5806440"/>
+            <a:ext cx="10607040" cy="347472"/>
           </a:xfrm>
           <a:prstGeom prst="rect">
             <a:avLst/>
@@ -20388,27 +20477,27 @@
               </a:lnSpc>
             </a:pPr>
             <a:r>
-              <a:rPr sz="1250" b="1" i="0">
-                <a:solidFill>
-                  <a:srgbClr val="122A44"/>
-                </a:solidFill>
-                <a:latin typeface="맑은 고딕"/>
-              </a:rPr>
-              <a:t>Q. 브랜드 킷을 고쳤는데 앱에 안 바껴요</a:t>
-            </a:r>
-          </a:p>
-        </p:txBody>
-      </p:sp>
-      <p:sp>
-        <p:nvSpPr>
-          <p:cNvPr id="22" name="TextBox 21"/>
-          <p:cNvSpPr txBox="1"/>
-          <p:nvPr/>
-        </p:nvSpPr>
-        <p:spPr>
-          <a:xfrm>
-            <a:off x="731520" y="6117336"/>
-            <a:ext cx="10607040" cy="457200"/>
+              <a:rPr sz="1300" b="1" i="0">
+                <a:solidFill>
+                  <a:srgbClr val="23262B"/>
+                </a:solidFill>
+                <a:latin typeface="맑은 고딕"/>
+              </a:rPr>
+              <a:t>%APPDATA%\OSMU_CJC 폴더를 함부로 지우지 말기</a:t>
+            </a:r>
+          </a:p>
+        </p:txBody>
+      </p:sp>
+      <p:sp>
+        <p:nvSpPr>
+          <p:cNvPr id="27" name="TextBox 26"/>
+          <p:cNvSpPr txBox="1"/>
+          <p:nvPr/>
+        </p:nvSpPr>
+        <p:spPr>
+          <a:xfrm>
+            <a:off x="822960" y="6172200"/>
+            <a:ext cx="10607040" cy="502920"/>
           </a:xfrm>
           <a:prstGeom prst="rect">
             <a:avLst/>
@@ -20423,17 +20512,17 @@
           <a:p>
             <a:pPr algn="l">
               <a:lnSpc>
-                <a:spcPct val="120000"/>
-              </a:lnSpc>
-            </a:pPr>
-            <a:r>
-              <a:rPr sz="1100" b="0" i="0">
-                <a:solidFill>
-                  <a:srgbClr val="23262B"/>
-                </a:solidFill>
-                <a:latin typeface="맑은 고딕"/>
-              </a:rPr>
-              <a:t>A. 킷 값은 [킷 저장], 계정·금기어는 [회사 공통 저장]을 눌렀는지, 워크벤치에서 그 킷을 골랐는지 확인하세요. 저장은 다음 생성부터 반영됩니다.</a:t>
+                <a:spcPct val="125000"/>
+              </a:lnSpc>
+            </a:pPr>
+            <a:r>
+              <a:rPr sz="1150" b="0" i="0">
+                <a:solidFill>
+                  <a:srgbClr val="7A828E"/>
+                </a:solidFill>
+                <a:latin typeface="맑은 고딕"/>
+              </a:rPr>
+              <a:t>DB·사진·마스터키가 전부 안에 있습니다(앱을 제거해도 남는 이유). 브랜드 킷을 처음부터 다시 채울 때만 삭제 후 재시작하세요.</a:t>
             </a:r>
           </a:p>
         </p:txBody>
@@ -21337,6 +21426,886 @@
 </file>
 
 <file path=ppt/slides/slide30.xml><?xml version="1.0" encoding="utf-8"?>
+<p:sld xmlns:a="http://schemas.openxmlformats.org/drawingml/2006/main" xmlns:p="http://schemas.openxmlformats.org/presentationml/2006/main" xmlns:r="http://schemas.openxmlformats.org/officeDocument/2006/relationships">
+  <p:cSld>
+    <p:bg>
+      <p:bgPr>
+        <a:solidFill>
+          <a:srgbClr val="F7F5F0"/>
+        </a:solidFill>
+        <a:effectLst/>
+      </p:bgPr>
+    </p:bg>
+    <p:spTree>
+      <p:nvGrpSpPr>
+        <p:cNvPr id="1" name=""/>
+        <p:cNvGrpSpPr/>
+        <p:nvPr/>
+      </p:nvGrpSpPr>
+      <p:grpSpPr/>
+      <p:sp>
+        <p:nvSpPr>
+          <p:cNvPr id="2" name="Rectangle 1"/>
+          <p:cNvSpPr/>
+          <p:nvPr/>
+        </p:nvSpPr>
+        <p:spPr>
+          <a:xfrm>
+            <a:off x="0" y="0"/>
+            <a:ext cx="12191695" cy="1051560"/>
+          </a:xfrm>
+          <a:prstGeom prst="rect">
+            <a:avLst/>
+          </a:prstGeom>
+          <a:solidFill>
+            <a:srgbClr val="122A44"/>
+          </a:solidFill>
+          <a:ln>
+            <a:noFill/>
+          </a:ln>
+          <a:effectLst/>
+        </p:spPr>
+        <p:style>
+          <a:lnRef idx="1">
+            <a:schemeClr val="accent1"/>
+          </a:lnRef>
+          <a:fillRef idx="3">
+            <a:schemeClr val="accent1"/>
+          </a:fillRef>
+          <a:effectRef idx="2">
+            <a:schemeClr val="accent1"/>
+          </a:effectRef>
+          <a:fontRef idx="minor">
+            <a:schemeClr val="lt1"/>
+          </a:fontRef>
+        </p:style>
+        <p:txBody>
+          <a:bodyPr rtlCol="0" anchor="ctr"/>
+          <a:lstStyle/>
+          <a:p>
+            <a:pPr algn="ctr"/>
+          </a:p>
+        </p:txBody>
+      </p:sp>
+      <p:sp>
+        <p:nvSpPr>
+          <p:cNvPr id="3" name="Rectangle 2"/>
+          <p:cNvSpPr/>
+          <p:nvPr/>
+        </p:nvSpPr>
+        <p:spPr>
+          <a:xfrm>
+            <a:off x="0" y="1051560"/>
+            <a:ext cx="12191695" cy="38100"/>
+          </a:xfrm>
+          <a:prstGeom prst="rect">
+            <a:avLst/>
+          </a:prstGeom>
+          <a:solidFill>
+            <a:srgbClr val="1B3A5C"/>
+          </a:solidFill>
+          <a:ln>
+            <a:noFill/>
+          </a:ln>
+          <a:effectLst/>
+        </p:spPr>
+        <p:style>
+          <a:lnRef idx="1">
+            <a:schemeClr val="accent1"/>
+          </a:lnRef>
+          <a:fillRef idx="3">
+            <a:schemeClr val="accent1"/>
+          </a:fillRef>
+          <a:effectRef idx="2">
+            <a:schemeClr val="accent1"/>
+          </a:effectRef>
+          <a:fontRef idx="minor">
+            <a:schemeClr val="lt1"/>
+          </a:fontRef>
+        </p:style>
+        <p:txBody>
+          <a:bodyPr rtlCol="0" anchor="ctr"/>
+          <a:lstStyle/>
+          <a:p>
+            <a:pPr algn="ctr"/>
+          </a:p>
+        </p:txBody>
+      </p:sp>
+      <p:sp>
+        <p:nvSpPr>
+          <p:cNvPr id="4" name="TextBox 3"/>
+          <p:cNvSpPr txBox="1"/>
+          <p:nvPr/>
+        </p:nvSpPr>
+        <p:spPr>
+          <a:xfrm>
+            <a:off x="502920" y="109728"/>
+            <a:ext cx="8686800" cy="292608"/>
+          </a:xfrm>
+          <a:prstGeom prst="rect">
+            <a:avLst/>
+          </a:prstGeom>
+          <a:noFill/>
+        </p:spPr>
+        <p:txBody>
+          <a:bodyPr wrap="square">
+            <a:spAutoFit/>
+          </a:bodyPr>
+          <a:lstStyle/>
+          <a:p>
+            <a:pPr algn="l">
+              <a:lnSpc>
+                <a:spcPct val="100000"/>
+              </a:lnSpc>
+            </a:pPr>
+            <a:r>
+              <a:rPr sz="1200" b="1" i="0">
+                <a:solidFill>
+                  <a:srgbClr val="1B3A5C"/>
+                </a:solidFill>
+                <a:latin typeface="맑은 고딕"/>
+              </a:rPr>
+              <a:t>④ 안전 · FAQ</a:t>
+            </a:r>
+          </a:p>
+        </p:txBody>
+      </p:sp>
+      <p:sp>
+        <p:nvSpPr>
+          <p:cNvPr id="5" name="TextBox 4"/>
+          <p:cNvSpPr txBox="1"/>
+          <p:nvPr/>
+        </p:nvSpPr>
+        <p:spPr>
+          <a:xfrm>
+            <a:off x="457200" y="347472"/>
+            <a:ext cx="10515600" cy="621792"/>
+          </a:xfrm>
+          <a:prstGeom prst="rect">
+            <a:avLst/>
+          </a:prstGeom>
+          <a:noFill/>
+        </p:spPr>
+        <p:txBody>
+          <a:bodyPr wrap="square">
+            <a:spAutoFit/>
+          </a:bodyPr>
+          <a:lstStyle/>
+          <a:p>
+            <a:pPr algn="l">
+              <a:lnSpc>
+                <a:spcPct val="100000"/>
+              </a:lnSpc>
+            </a:pPr>
+            <a:r>
+              <a:rPr sz="2400" b="1" i="0">
+                <a:solidFill>
+                  <a:srgbClr val="FFFFFF"/>
+                </a:solidFill>
+                <a:latin typeface="맑은 고딕"/>
+              </a:rPr>
+              <a:t>자주 묻는 질문</a:t>
+            </a:r>
+          </a:p>
+        </p:txBody>
+      </p:sp>
+      <p:sp>
+        <p:nvSpPr>
+          <p:cNvPr id="6" name="TextBox 5"/>
+          <p:cNvSpPr txBox="1"/>
+          <p:nvPr/>
+        </p:nvSpPr>
+        <p:spPr>
+          <a:xfrm>
+            <a:off x="457200" y="6492240"/>
+            <a:ext cx="8229600" cy="274320"/>
+          </a:xfrm>
+          <a:prstGeom prst="rect">
+            <a:avLst/>
+          </a:prstGeom>
+          <a:noFill/>
+        </p:spPr>
+        <p:txBody>
+          <a:bodyPr wrap="square">
+            <a:spAutoFit/>
+          </a:bodyPr>
+          <a:lstStyle/>
+          <a:p>
+            <a:pPr algn="l">
+              <a:lnSpc>
+                <a:spcPct val="100000"/>
+              </a:lnSpc>
+            </a:pPr>
+            <a:r>
+              <a:rPr sz="900" b="0" i="0">
+                <a:solidFill>
+                  <a:srgbClr val="7A828E"/>
+                </a:solidFill>
+                <a:latin typeface="맑은 고딕"/>
+              </a:rPr>
+              <a:t>씨제이씨협동조합 OSMU 워크벤치 · 관리자·사용자 매뉴얼</a:t>
+            </a:r>
+          </a:p>
+        </p:txBody>
+      </p:sp>
+      <p:sp>
+        <p:nvSpPr>
+          <p:cNvPr id="7" name="TextBox 6"/>
+          <p:cNvSpPr txBox="1"/>
+          <p:nvPr/>
+        </p:nvSpPr>
+        <p:spPr>
+          <a:xfrm>
+            <a:off x="11094415" y="6492240"/>
+            <a:ext cx="731520" cy="274320"/>
+          </a:xfrm>
+          <a:prstGeom prst="rect">
+            <a:avLst/>
+          </a:prstGeom>
+          <a:noFill/>
+        </p:spPr>
+        <p:txBody>
+          <a:bodyPr wrap="square">
+            <a:spAutoFit/>
+          </a:bodyPr>
+          <a:lstStyle/>
+          <a:p>
+            <a:pPr algn="r">
+              <a:lnSpc>
+                <a:spcPct val="100000"/>
+              </a:lnSpc>
+            </a:pPr>
+            <a:r>
+              <a:rPr sz="900" b="0" i="0">
+                <a:solidFill>
+                  <a:srgbClr val="7A828E"/>
+                </a:solidFill>
+                <a:latin typeface="맑은 고딕"/>
+              </a:rPr>
+              <a:t>29</a:t>
+            </a:r>
+          </a:p>
+        </p:txBody>
+      </p:sp>
+      <p:sp>
+        <p:nvSpPr>
+          <p:cNvPr id="8" name="Rectangle 7"/>
+          <p:cNvSpPr/>
+          <p:nvPr/>
+        </p:nvSpPr>
+        <p:spPr>
+          <a:xfrm>
+            <a:off x="502920" y="1417320"/>
+            <a:ext cx="11155680" cy="987552"/>
+          </a:xfrm>
+          <a:prstGeom prst="rect">
+            <a:avLst/>
+          </a:prstGeom>
+          <a:solidFill>
+            <a:srgbClr val="FFFFFF"/>
+          </a:solidFill>
+          <a:ln>
+            <a:noFill/>
+          </a:ln>
+          <a:effectLst/>
+        </p:spPr>
+        <p:style>
+          <a:lnRef idx="1">
+            <a:schemeClr val="accent1"/>
+          </a:lnRef>
+          <a:fillRef idx="3">
+            <a:schemeClr val="accent1"/>
+          </a:fillRef>
+          <a:effectRef idx="2">
+            <a:schemeClr val="accent1"/>
+          </a:effectRef>
+          <a:fontRef idx="minor">
+            <a:schemeClr val="lt1"/>
+          </a:fontRef>
+        </p:style>
+        <p:txBody>
+          <a:bodyPr rtlCol="0" anchor="ctr"/>
+          <a:lstStyle/>
+          <a:p>
+            <a:pPr algn="ctr"/>
+          </a:p>
+        </p:txBody>
+      </p:sp>
+      <p:sp>
+        <p:nvSpPr>
+          <p:cNvPr id="9" name="TextBox 8"/>
+          <p:cNvSpPr txBox="1"/>
+          <p:nvPr/>
+        </p:nvSpPr>
+        <p:spPr>
+          <a:xfrm>
+            <a:off x="731520" y="1490472"/>
+            <a:ext cx="10607040" cy="365760"/>
+          </a:xfrm>
+          <a:prstGeom prst="rect">
+            <a:avLst/>
+          </a:prstGeom>
+          <a:noFill/>
+        </p:spPr>
+        <p:txBody>
+          <a:bodyPr wrap="square">
+            <a:spAutoFit/>
+          </a:bodyPr>
+          <a:lstStyle/>
+          <a:p>
+            <a:pPr algn="l">
+              <a:lnSpc>
+                <a:spcPct val="100000"/>
+              </a:lnSpc>
+            </a:pPr>
+            <a:r>
+              <a:rPr sz="1250" b="1" i="0">
+                <a:solidFill>
+                  <a:srgbClr val="122A44"/>
+                </a:solidFill>
+                <a:latin typeface="맑은 고딕"/>
+              </a:rPr>
+              <a:t>Q. [🪄 브랜드에서 추천]이 실패해요</a:t>
+            </a:r>
+          </a:p>
+        </p:txBody>
+      </p:sp>
+      <p:sp>
+        <p:nvSpPr>
+          <p:cNvPr id="10" name="TextBox 9"/>
+          <p:cNvSpPr txBox="1"/>
+          <p:nvPr/>
+        </p:nvSpPr>
+        <p:spPr>
+          <a:xfrm>
+            <a:off x="731520" y="1874520"/>
+            <a:ext cx="10607040" cy="457200"/>
+          </a:xfrm>
+          <a:prstGeom prst="rect">
+            <a:avLst/>
+          </a:prstGeom>
+          <a:noFill/>
+        </p:spPr>
+        <p:txBody>
+          <a:bodyPr wrap="square">
+            <a:spAutoFit/>
+          </a:bodyPr>
+          <a:lstStyle/>
+          <a:p>
+            <a:pPr algn="l">
+              <a:lnSpc>
+                <a:spcPct val="120000"/>
+              </a:lnSpc>
+            </a:pPr>
+            <a:r>
+              <a:rPr sz="1100" b="0" i="0">
+                <a:solidFill>
+                  <a:srgbClr val="23262B"/>
+                </a:solidFill>
+                <a:latin typeface="맑은 고딕"/>
+              </a:rPr>
+              <a:t>A. '추천 실패: ...' 뒤의 메시지가 원인입니다. 대부분 LLM 미등록 → LLM 탭에서 키 등록 후 기본 모델 확인.</a:t>
+            </a:r>
+          </a:p>
+        </p:txBody>
+      </p:sp>
+      <p:sp>
+        <p:nvSpPr>
+          <p:cNvPr id="11" name="Rectangle 10"/>
+          <p:cNvSpPr/>
+          <p:nvPr/>
+        </p:nvSpPr>
+        <p:spPr>
+          <a:xfrm>
+            <a:off x="502920" y="2478024"/>
+            <a:ext cx="11155680" cy="987552"/>
+          </a:xfrm>
+          <a:prstGeom prst="rect">
+            <a:avLst/>
+          </a:prstGeom>
+          <a:solidFill>
+            <a:srgbClr val="FFFFFF"/>
+          </a:solidFill>
+          <a:ln>
+            <a:noFill/>
+          </a:ln>
+          <a:effectLst/>
+        </p:spPr>
+        <p:style>
+          <a:lnRef idx="1">
+            <a:schemeClr val="accent1"/>
+          </a:lnRef>
+          <a:fillRef idx="3">
+            <a:schemeClr val="accent1"/>
+          </a:fillRef>
+          <a:effectRef idx="2">
+            <a:schemeClr val="accent1"/>
+          </a:effectRef>
+          <a:fontRef idx="minor">
+            <a:schemeClr val="lt1"/>
+          </a:fontRef>
+        </p:style>
+        <p:txBody>
+          <a:bodyPr rtlCol="0" anchor="ctr"/>
+          <a:lstStyle/>
+          <a:p>
+            <a:pPr algn="ctr"/>
+          </a:p>
+        </p:txBody>
+      </p:sp>
+      <p:sp>
+        <p:nvSpPr>
+          <p:cNvPr id="12" name="TextBox 11"/>
+          <p:cNvSpPr txBox="1"/>
+          <p:nvPr/>
+        </p:nvSpPr>
+        <p:spPr>
+          <a:xfrm>
+            <a:off x="731520" y="2551176"/>
+            <a:ext cx="10607040" cy="365760"/>
+          </a:xfrm>
+          <a:prstGeom prst="rect">
+            <a:avLst/>
+          </a:prstGeom>
+          <a:noFill/>
+        </p:spPr>
+        <p:txBody>
+          <a:bodyPr wrap="square">
+            <a:spAutoFit/>
+          </a:bodyPr>
+          <a:lstStyle/>
+          <a:p>
+            <a:pPr algn="l">
+              <a:lnSpc>
+                <a:spcPct val="100000"/>
+              </a:lnSpc>
+            </a:pPr>
+            <a:r>
+              <a:rPr sz="1250" b="1" i="0">
+                <a:solidFill>
+                  <a:srgbClr val="122A44"/>
+                </a:solidFill>
+                <a:latin typeface="맑은 고딕"/>
+              </a:rPr>
+              <a:t>Q. 키를 저장했는데 칸이 비어 있어요</a:t>
+            </a:r>
+          </a:p>
+        </p:txBody>
+      </p:sp>
+      <p:sp>
+        <p:nvSpPr>
+          <p:cNvPr id="13" name="TextBox 12"/>
+          <p:cNvSpPr txBox="1"/>
+          <p:nvPr/>
+        </p:nvSpPr>
+        <p:spPr>
+          <a:xfrm>
+            <a:off x="731520" y="2935224"/>
+            <a:ext cx="10607040" cy="457200"/>
+          </a:xfrm>
+          <a:prstGeom prst="rect">
+            <a:avLst/>
+          </a:prstGeom>
+          <a:noFill/>
+        </p:spPr>
+        <p:txBody>
+          <a:bodyPr wrap="square">
+            <a:spAutoFit/>
+          </a:bodyPr>
+          <a:lstStyle/>
+          <a:p>
+            <a:pPr algn="l">
+              <a:lnSpc>
+                <a:spcPct val="120000"/>
+              </a:lnSpc>
+            </a:pPr>
+            <a:r>
+              <a:rPr sz="1100" b="0" i="0">
+                <a:solidFill>
+                  <a:srgbClr val="23262B"/>
+                </a:solidFill>
+                <a:latin typeface="맑은 고딕"/>
+              </a:rPr>
+              <a:t>A. 정상입니다. 배지(✅ 등록됨 ****...)로 확인하세요. 바꾸려면 새 키 입력 후 다시 [연결 테스트 · 저장].</a:t>
+            </a:r>
+          </a:p>
+        </p:txBody>
+      </p:sp>
+      <p:sp>
+        <p:nvSpPr>
+          <p:cNvPr id="14" name="Rectangle 13"/>
+          <p:cNvSpPr/>
+          <p:nvPr/>
+        </p:nvSpPr>
+        <p:spPr>
+          <a:xfrm>
+            <a:off x="502920" y="3538728"/>
+            <a:ext cx="11155680" cy="987552"/>
+          </a:xfrm>
+          <a:prstGeom prst="rect">
+            <a:avLst/>
+          </a:prstGeom>
+          <a:solidFill>
+            <a:srgbClr val="FFFFFF"/>
+          </a:solidFill>
+          <a:ln>
+            <a:noFill/>
+          </a:ln>
+          <a:effectLst/>
+        </p:spPr>
+        <p:style>
+          <a:lnRef idx="1">
+            <a:schemeClr val="accent1"/>
+          </a:lnRef>
+          <a:fillRef idx="3">
+            <a:schemeClr val="accent1"/>
+          </a:fillRef>
+          <a:effectRef idx="2">
+            <a:schemeClr val="accent1"/>
+          </a:effectRef>
+          <a:fontRef idx="minor">
+            <a:schemeClr val="lt1"/>
+          </a:fontRef>
+        </p:style>
+        <p:txBody>
+          <a:bodyPr rtlCol="0" anchor="ctr"/>
+          <a:lstStyle/>
+          <a:p>
+            <a:pPr algn="ctr"/>
+          </a:p>
+        </p:txBody>
+      </p:sp>
+      <p:sp>
+        <p:nvSpPr>
+          <p:cNvPr id="15" name="TextBox 14"/>
+          <p:cNvSpPr txBox="1"/>
+          <p:nvPr/>
+        </p:nvSpPr>
+        <p:spPr>
+          <a:xfrm>
+            <a:off x="731520" y="3611880"/>
+            <a:ext cx="10607040" cy="365760"/>
+          </a:xfrm>
+          <a:prstGeom prst="rect">
+            <a:avLst/>
+          </a:prstGeom>
+          <a:noFill/>
+        </p:spPr>
+        <p:txBody>
+          <a:bodyPr wrap="square">
+            <a:spAutoFit/>
+          </a:bodyPr>
+          <a:lstStyle/>
+          <a:p>
+            <a:pPr algn="l">
+              <a:lnSpc>
+                <a:spcPct val="100000"/>
+              </a:lnSpc>
+            </a:pPr>
+            <a:r>
+              <a:rPr sz="1250" b="1" i="0">
+                <a:solidFill>
+                  <a:srgbClr val="122A44"/>
+                </a:solidFill>
+                <a:latin typeface="맑은 고딕"/>
+              </a:rPr>
+              <a:t>Q. 4단계 적용 후에 [숫자만 새로 재기]를 또 눌러야 하나요?</a:t>
+            </a:r>
+          </a:p>
+        </p:txBody>
+      </p:sp>
+      <p:sp>
+        <p:nvSpPr>
+          <p:cNvPr id="16" name="TextBox 15"/>
+          <p:cNvSpPr txBox="1"/>
+          <p:nvPr/>
+        </p:nvSpPr>
+        <p:spPr>
+          <a:xfrm>
+            <a:off x="731520" y="3995928"/>
+            <a:ext cx="10607040" cy="457200"/>
+          </a:xfrm>
+          <a:prstGeom prst="rect">
+            <a:avLst/>
+          </a:prstGeom>
+          <a:noFill/>
+        </p:spPr>
+        <p:txBody>
+          <a:bodyPr wrap="square">
+            <a:spAutoFit/>
+          </a:bodyPr>
+          <a:lstStyle/>
+          <a:p>
+            <a:pPr algn="l">
+              <a:lnSpc>
+                <a:spcPct val="120000"/>
+              </a:lnSpc>
+            </a:pPr>
+            <a:r>
+              <a:rPr sz="1100" b="0" i="0">
+                <a:solidFill>
+                  <a:srgbClr val="23262B"/>
+                </a:solidFill>
+                <a:latin typeface="맑은 고딕"/>
+              </a:rPr>
+              <a:t>A. 아니요. 4단계 [적용]이 곧 SEO 키워드 교체이고, 새 키워드 측정까지 같이 끝냅니다. 숫자 재기는 30일 뒤 만료 경고가 뜰 때만.</a:t>
+            </a:r>
+          </a:p>
+        </p:txBody>
+      </p:sp>
+      <p:sp>
+        <p:nvSpPr>
+          <p:cNvPr id="17" name="Rectangle 16"/>
+          <p:cNvSpPr/>
+          <p:nvPr/>
+        </p:nvSpPr>
+        <p:spPr>
+          <a:xfrm>
+            <a:off x="502920" y="4599432"/>
+            <a:ext cx="11155680" cy="987552"/>
+          </a:xfrm>
+          <a:prstGeom prst="rect">
+            <a:avLst/>
+          </a:prstGeom>
+          <a:solidFill>
+            <a:srgbClr val="FFFFFF"/>
+          </a:solidFill>
+          <a:ln>
+            <a:noFill/>
+          </a:ln>
+          <a:effectLst/>
+        </p:spPr>
+        <p:style>
+          <a:lnRef idx="1">
+            <a:schemeClr val="accent1"/>
+          </a:lnRef>
+          <a:fillRef idx="3">
+            <a:schemeClr val="accent1"/>
+          </a:fillRef>
+          <a:effectRef idx="2">
+            <a:schemeClr val="accent1"/>
+          </a:effectRef>
+          <a:fontRef idx="minor">
+            <a:schemeClr val="lt1"/>
+          </a:fontRef>
+        </p:style>
+        <p:txBody>
+          <a:bodyPr rtlCol="0" anchor="ctr"/>
+          <a:lstStyle/>
+          <a:p>
+            <a:pPr algn="ctr"/>
+          </a:p>
+        </p:txBody>
+      </p:sp>
+      <p:sp>
+        <p:nvSpPr>
+          <p:cNvPr id="18" name="TextBox 17"/>
+          <p:cNvSpPr txBox="1"/>
+          <p:nvPr/>
+        </p:nvSpPr>
+        <p:spPr>
+          <a:xfrm>
+            <a:off x="731520" y="4672584"/>
+            <a:ext cx="10607040" cy="365760"/>
+          </a:xfrm>
+          <a:prstGeom prst="rect">
+            <a:avLst/>
+          </a:prstGeom>
+          <a:noFill/>
+        </p:spPr>
+        <p:txBody>
+          <a:bodyPr wrap="square">
+            <a:spAutoFit/>
+          </a:bodyPr>
+          <a:lstStyle/>
+          <a:p>
+            <a:pPr algn="l">
+              <a:lnSpc>
+                <a:spcPct val="100000"/>
+              </a:lnSpc>
+            </a:pPr>
+            <a:r>
+              <a:rPr sz="1250" b="1" i="0">
+                <a:solidFill>
+                  <a:srgbClr val="122A44"/>
+                </a:solidFill>
+                <a:latin typeface="맑은 고딕"/>
+              </a:rPr>
+              <a:t>Q. 경쟁도 만료 경고가 떠요</a:t>
+            </a:r>
+          </a:p>
+        </p:txBody>
+      </p:sp>
+      <p:sp>
+        <p:nvSpPr>
+          <p:cNvPr id="19" name="TextBox 18"/>
+          <p:cNvSpPr txBox="1"/>
+          <p:nvPr/>
+        </p:nvSpPr>
+        <p:spPr>
+          <a:xfrm>
+            <a:off x="731520" y="5056632"/>
+            <a:ext cx="10607040" cy="457200"/>
+          </a:xfrm>
+          <a:prstGeom prst="rect">
+            <a:avLst/>
+          </a:prstGeom>
+          <a:noFill/>
+        </p:spPr>
+        <p:txBody>
+          <a:bodyPr wrap="square">
+            <a:spAutoFit/>
+          </a:bodyPr>
+          <a:lstStyle/>
+          <a:p>
+            <a:pPr algn="l">
+              <a:lnSpc>
+                <a:spcPct val="120000"/>
+              </a:lnSpc>
+            </a:pPr>
+            <a:r>
+              <a:rPr sz="1100" b="0" i="0">
+                <a:solidFill>
+                  <a:srgbClr val="23262B"/>
+                </a:solidFill>
+                <a:latin typeface="맑은 고딕"/>
+              </a:rPr>
+              <a:t>A. [🔄 숫자만 새로 재기]를 누르세요. 캐시가 살아있는 값은 재과금되지 않습니다.</a:t>
+            </a:r>
+          </a:p>
+        </p:txBody>
+      </p:sp>
+      <p:sp>
+        <p:nvSpPr>
+          <p:cNvPr id="20" name="Rectangle 19"/>
+          <p:cNvSpPr/>
+          <p:nvPr/>
+        </p:nvSpPr>
+        <p:spPr>
+          <a:xfrm>
+            <a:off x="502920" y="5660136"/>
+            <a:ext cx="11155680" cy="987552"/>
+          </a:xfrm>
+          <a:prstGeom prst="rect">
+            <a:avLst/>
+          </a:prstGeom>
+          <a:solidFill>
+            <a:srgbClr val="FFFFFF"/>
+          </a:solidFill>
+          <a:ln>
+            <a:noFill/>
+          </a:ln>
+          <a:effectLst/>
+        </p:spPr>
+        <p:style>
+          <a:lnRef idx="1">
+            <a:schemeClr val="accent1"/>
+          </a:lnRef>
+          <a:fillRef idx="3">
+            <a:schemeClr val="accent1"/>
+          </a:fillRef>
+          <a:effectRef idx="2">
+            <a:schemeClr val="accent1"/>
+          </a:effectRef>
+          <a:fontRef idx="minor">
+            <a:schemeClr val="lt1"/>
+          </a:fontRef>
+        </p:style>
+        <p:txBody>
+          <a:bodyPr rtlCol="0" anchor="ctr"/>
+          <a:lstStyle/>
+          <a:p>
+            <a:pPr algn="ctr"/>
+          </a:p>
+        </p:txBody>
+      </p:sp>
+      <p:sp>
+        <p:nvSpPr>
+          <p:cNvPr id="21" name="TextBox 20"/>
+          <p:cNvSpPr txBox="1"/>
+          <p:nvPr/>
+        </p:nvSpPr>
+        <p:spPr>
+          <a:xfrm>
+            <a:off x="731520" y="5733288"/>
+            <a:ext cx="10607040" cy="365760"/>
+          </a:xfrm>
+          <a:prstGeom prst="rect">
+            <a:avLst/>
+          </a:prstGeom>
+          <a:noFill/>
+        </p:spPr>
+        <p:txBody>
+          <a:bodyPr wrap="square">
+            <a:spAutoFit/>
+          </a:bodyPr>
+          <a:lstStyle/>
+          <a:p>
+            <a:pPr algn="l">
+              <a:lnSpc>
+                <a:spcPct val="100000"/>
+              </a:lnSpc>
+            </a:pPr>
+            <a:r>
+              <a:rPr sz="1250" b="1" i="0">
+                <a:solidFill>
+                  <a:srgbClr val="122A44"/>
+                </a:solidFill>
+                <a:latin typeface="맑은 고딕"/>
+              </a:rPr>
+              <a:t>Q. 브랜드 킷을 고쳤는데 앱에 안 바껴요</a:t>
+            </a:r>
+          </a:p>
+        </p:txBody>
+      </p:sp>
+      <p:sp>
+        <p:nvSpPr>
+          <p:cNvPr id="22" name="TextBox 21"/>
+          <p:cNvSpPr txBox="1"/>
+          <p:nvPr/>
+        </p:nvSpPr>
+        <p:spPr>
+          <a:xfrm>
+            <a:off x="731520" y="6117336"/>
+            <a:ext cx="10607040" cy="457200"/>
+          </a:xfrm>
+          <a:prstGeom prst="rect">
+            <a:avLst/>
+          </a:prstGeom>
+          <a:noFill/>
+        </p:spPr>
+        <p:txBody>
+          <a:bodyPr wrap="square">
+            <a:spAutoFit/>
+          </a:bodyPr>
+          <a:lstStyle/>
+          <a:p>
+            <a:pPr algn="l">
+              <a:lnSpc>
+                <a:spcPct val="120000"/>
+              </a:lnSpc>
+            </a:pPr>
+            <a:r>
+              <a:rPr sz="1100" b="0" i="0">
+                <a:solidFill>
+                  <a:srgbClr val="23262B"/>
+                </a:solidFill>
+                <a:latin typeface="맑은 고딕"/>
+              </a:rPr>
+              <a:t>A. 킷 값은 [킷 저장], 계정·금기어는 [회사 공통 저장]을 눌렀는지, 워크벤치에서 그 킷을 골랐는지 확인하세요. 저장은 다음 생성부터 반영됩니다.</a:t>
+            </a:r>
+          </a:p>
+        </p:txBody>
+      </p:sp>
+    </p:spTree>
+  </p:cSld>
+  <p:clrMapOvr>
+    <a:masterClrMapping/>
+  </p:clrMapOvr>
+</p:sld>
+</file>
+
+<file path=ppt/slides/slide31.xml><?xml version="1.0" encoding="utf-8"?>
 <p:sld xmlns:a="http://schemas.openxmlformats.org/drawingml/2006/main" xmlns:p="http://schemas.openxmlformats.org/presentationml/2006/main" xmlns:r="http://schemas.openxmlformats.org/officeDocument/2006/relationships">
   <p:cSld>
     <p:bg>
